--- a/web-presentation/pdf-exports/Week2-Session1-Deep-Learning.pptx
+++ b/web-presentation/pdf-exports/Week2-Session1-Deep-Learning.pptx
@@ -81,6 +81,7 @@
     <p:sldId id="329" r:id="rId80"/>
     <p:sldId id="330" r:id="rId81"/>
     <p:sldId id="331" r:id="rId82"/>
+    <p:sldId id="332" r:id="rId83"/>
   </p:sldIdLst>
   <p:sldSz cx="12191695" cy="6858000" type="screen4x3"/>
   <p:notesSz cx="6858000" cy="9144000"/>
@@ -4023,7 +4024,7 @@
                 <a:ea typeface="DIN Next LT W23"/>
                 <a:cs typeface="DIN Next LT W23"/>
               </a:rPr>
-              <a:t>10  /  76</a:t>
+              <a:t>10  /  77</a:t>
             </a:r>
           </a:p>
         </p:txBody>
@@ -4691,7 +4692,7 @@
                 <a:ea typeface="DIN Next LT W23"/>
                 <a:cs typeface="DIN Next LT W23"/>
               </a:rPr>
-              <a:t>11  /  76</a:t>
+              <a:t>11  /  77</a:t>
             </a:r>
           </a:p>
         </p:txBody>
@@ -5165,7 +5166,7 @@
                 <a:ea typeface="DIN Next LT W23"/>
                 <a:cs typeface="DIN Next LT W23"/>
               </a:rPr>
-              <a:t>12  /  76</a:t>
+              <a:t>12  /  77</a:t>
             </a:r>
           </a:p>
         </p:txBody>
@@ -5754,7 +5755,7 @@
                 <a:ea typeface="DIN Next LT W23"/>
                 <a:cs typeface="DIN Next LT W23"/>
               </a:rPr>
-              <a:t>13  /  76</a:t>
+              <a:t>13  /  77</a:t>
             </a:r>
           </a:p>
         </p:txBody>
@@ -6228,7 +6229,7 @@
                 <a:ea typeface="DIN Next LT W23"/>
                 <a:cs typeface="DIN Next LT W23"/>
               </a:rPr>
-              <a:t>14  /  76</a:t>
+              <a:t>14  /  77</a:t>
             </a:r>
           </a:p>
         </p:txBody>
@@ -6896,7 +6897,7 @@
                 <a:ea typeface="DIN Next LT W23"/>
                 <a:cs typeface="DIN Next LT W23"/>
               </a:rPr>
-              <a:t>15  /  76</a:t>
+              <a:t>15  /  77</a:t>
             </a:r>
           </a:p>
         </p:txBody>
@@ -7485,7 +7486,7 @@
                 <a:ea typeface="DIN Next LT W23"/>
                 <a:cs typeface="DIN Next LT W23"/>
               </a:rPr>
-              <a:t>16  /  76</a:t>
+              <a:t>16  /  77</a:t>
             </a:r>
           </a:p>
         </p:txBody>
@@ -8305,7 +8306,7 @@
                 <a:ea typeface="DIN Next LT W23"/>
                 <a:cs typeface="DIN Next LT W23"/>
               </a:rPr>
-              <a:t>17  /  76</a:t>
+              <a:t>17  /  77</a:t>
             </a:r>
           </a:p>
         </p:txBody>
@@ -9084,7 +9085,7 @@
                 <a:ea typeface="DIN Next LT W23"/>
                 <a:cs typeface="DIN Next LT W23"/>
               </a:rPr>
-              <a:t>18  /  76</a:t>
+              <a:t>18  /  77</a:t>
             </a:r>
           </a:p>
         </p:txBody>
@@ -9800,7 +9801,7 @@
                 <a:ea typeface="DIN Next LT W23"/>
                 <a:cs typeface="DIN Next LT W23"/>
               </a:rPr>
-              <a:t>19  /  76</a:t>
+              <a:t>19  /  77</a:t>
             </a:r>
           </a:p>
         </p:txBody>
@@ -11719,7 +11720,7 @@
                 <a:ea typeface="DIN Next LT W23"/>
                 <a:cs typeface="DIN Next LT W23"/>
               </a:rPr>
-              <a:t>02  /  76</a:t>
+              <a:t>02  /  77</a:t>
             </a:r>
           </a:p>
         </p:txBody>
@@ -12383,7 +12384,7 @@
                 <a:ea typeface="DIN Next LT W23"/>
                 <a:cs typeface="DIN Next LT W23"/>
               </a:rPr>
-              <a:t>20  /  76</a:t>
+              <a:t>20  /  77</a:t>
             </a:r>
           </a:p>
         </p:txBody>
@@ -13046,7 +13047,7 @@
                 <a:ea typeface="DIN Next LT W23"/>
                 <a:cs typeface="DIN Next LT W23"/>
               </a:rPr>
-              <a:t>21  /  76</a:t>
+              <a:t>21  /  77</a:t>
             </a:r>
           </a:p>
         </p:txBody>
@@ -13878,7 +13879,7 @@
                 <a:ea typeface="DIN Next LT W23"/>
                 <a:cs typeface="DIN Next LT W23"/>
               </a:rPr>
-              <a:t>22  /  76</a:t>
+              <a:t>22  /  77</a:t>
             </a:r>
           </a:p>
         </p:txBody>
@@ -14467,7 +14468,7 @@
                 <a:ea typeface="DIN Next LT W23"/>
                 <a:cs typeface="DIN Next LT W23"/>
               </a:rPr>
-              <a:t>23  /  76</a:t>
+              <a:t>23  /  77</a:t>
             </a:r>
           </a:p>
         </p:txBody>
@@ -15172,7 +15173,7 @@
                 <a:ea typeface="DIN Next LT W23"/>
                 <a:cs typeface="DIN Next LT W23"/>
               </a:rPr>
-              <a:t>24  /  76</a:t>
+              <a:t>24  /  77</a:t>
             </a:r>
           </a:p>
         </p:txBody>
@@ -15850,7 +15851,7 @@
                 <a:ea typeface="DIN Next LT W23"/>
                 <a:cs typeface="DIN Next LT W23"/>
               </a:rPr>
-              <a:t>25  /  76</a:t>
+              <a:t>25  /  77</a:t>
             </a:r>
           </a:p>
         </p:txBody>
@@ -16370,7 +16371,7 @@
                 <a:ea typeface="DIN Next LT W23"/>
                 <a:cs typeface="DIN Next LT W23"/>
               </a:rPr>
-              <a:t>26  /  76</a:t>
+              <a:t>26  /  77</a:t>
             </a:r>
           </a:p>
         </p:txBody>
@@ -16844,7 +16845,7 @@
                 <a:ea typeface="DIN Next LT W23"/>
                 <a:cs typeface="DIN Next LT W23"/>
               </a:rPr>
-              <a:t>27  /  76</a:t>
+              <a:t>27  /  77</a:t>
             </a:r>
           </a:p>
         </p:txBody>
@@ -17433,7 +17434,7 @@
                 <a:ea typeface="DIN Next LT W23"/>
                 <a:cs typeface="DIN Next LT W23"/>
               </a:rPr>
-              <a:t>28  /  76</a:t>
+              <a:t>28  /  77</a:t>
             </a:r>
           </a:p>
         </p:txBody>
@@ -18111,7 +18112,7 @@
                 <a:ea typeface="DIN Next LT W23"/>
                 <a:cs typeface="DIN Next LT W23"/>
               </a:rPr>
-              <a:t>29  /  76</a:t>
+              <a:t>29  /  77</a:t>
             </a:r>
           </a:p>
         </p:txBody>
@@ -18984,7 +18985,7 @@
                 <a:ea typeface="DIN Next LT W23"/>
                 <a:cs typeface="DIN Next LT W23"/>
               </a:rPr>
-              <a:t>03  /  76</a:t>
+              <a:t>03  /  77</a:t>
             </a:r>
           </a:p>
         </p:txBody>
@@ -19648,7 +19649,7 @@
                 <a:ea typeface="DIN Next LT W23"/>
                 <a:cs typeface="DIN Next LT W23"/>
               </a:rPr>
-              <a:t>30  /  76</a:t>
+              <a:t>30  /  77</a:t>
             </a:r>
           </a:p>
         </p:txBody>
@@ -20122,7 +20123,7 @@
                 <a:ea typeface="DIN Next LT W23"/>
                 <a:cs typeface="DIN Next LT W23"/>
               </a:rPr>
-              <a:t>31  /  76</a:t>
+              <a:t>31  /  77</a:t>
             </a:r>
           </a:p>
         </p:txBody>
@@ -20711,7 +20712,7 @@
                 <a:ea typeface="DIN Next LT W23"/>
                 <a:cs typeface="DIN Next LT W23"/>
               </a:rPr>
-              <a:t>32  /  76</a:t>
+              <a:t>32  /  77</a:t>
             </a:r>
           </a:p>
         </p:txBody>
@@ -21185,7 +21186,7 @@
                 <a:ea typeface="DIN Next LT W23"/>
                 <a:cs typeface="DIN Next LT W23"/>
               </a:rPr>
-              <a:t>33  /  76</a:t>
+              <a:t>33  /  77</a:t>
             </a:r>
           </a:p>
         </p:txBody>
@@ -22017,7 +22018,7 @@
                 <a:ea typeface="DIN Next LT W23"/>
                 <a:cs typeface="DIN Next LT W23"/>
               </a:rPr>
-              <a:t>34  /  76</a:t>
+              <a:t>34  /  77</a:t>
             </a:r>
           </a:p>
         </p:txBody>
@@ -22681,7 +22682,7 @@
                 <a:ea typeface="DIN Next LT W23"/>
                 <a:cs typeface="DIN Next LT W23"/>
               </a:rPr>
-              <a:t>35  /  76</a:t>
+              <a:t>35  /  77</a:t>
             </a:r>
           </a:p>
         </p:txBody>
@@ -23155,7 +23156,7 @@
                 <a:ea typeface="DIN Next LT W23"/>
                 <a:cs typeface="DIN Next LT W23"/>
               </a:rPr>
-              <a:t>36  /  76</a:t>
+              <a:t>36  /  77</a:t>
             </a:r>
           </a:p>
         </p:txBody>
@@ -23744,7 +23745,7 @@
                 <a:ea typeface="DIN Next LT W23"/>
                 <a:cs typeface="DIN Next LT W23"/>
               </a:rPr>
-              <a:t>37  /  76</a:t>
+              <a:t>37  /  77</a:t>
             </a:r>
           </a:p>
         </p:txBody>
@@ -24329,7 +24330,7 @@
                 <a:ea typeface="DIN Next LT W23"/>
                 <a:cs typeface="DIN Next LT W23"/>
               </a:rPr>
-              <a:t>38  /  76</a:t>
+              <a:t>38  /  77</a:t>
             </a:r>
           </a:p>
         </p:txBody>
@@ -24803,7 +24804,7 @@
                 <a:ea typeface="DIN Next LT W23"/>
                 <a:cs typeface="DIN Next LT W23"/>
               </a:rPr>
-              <a:t>39  /  76</a:t>
+              <a:t>39  /  77</a:t>
             </a:r>
           </a:p>
         </p:txBody>
@@ -25614,7 +25615,7 @@
                 <a:ea typeface="DIN Next LT W23"/>
                 <a:cs typeface="DIN Next LT W23"/>
               </a:rPr>
-              <a:t>04  /  76</a:t>
+              <a:t>04  /  77</a:t>
             </a:r>
           </a:p>
         </p:txBody>
@@ -26203,7 +26204,7 @@
                 <a:ea typeface="DIN Next LT W23"/>
                 <a:cs typeface="DIN Next LT W23"/>
               </a:rPr>
-              <a:t>40  /  76</a:t>
+              <a:t>40  /  77</a:t>
             </a:r>
           </a:p>
         </p:txBody>
@@ -26881,7 +26882,7 @@
                 <a:ea typeface="DIN Next LT W23"/>
                 <a:cs typeface="DIN Next LT W23"/>
               </a:rPr>
-              <a:t>41  /  76</a:t>
+              <a:t>41  /  77</a:t>
             </a:r>
           </a:p>
         </p:txBody>
@@ -27355,7 +27356,7 @@
                 <a:ea typeface="DIN Next LT W23"/>
                 <a:cs typeface="DIN Next LT W23"/>
               </a:rPr>
-              <a:t>42  /  76</a:t>
+              <a:t>42  /  77</a:t>
             </a:r>
           </a:p>
         </p:txBody>
@@ -28023,7 +28024,7 @@
                 <a:ea typeface="DIN Next LT W23"/>
                 <a:cs typeface="DIN Next LT W23"/>
               </a:rPr>
-              <a:t>43  /  76</a:t>
+              <a:t>43  /  77</a:t>
             </a:r>
           </a:p>
         </p:txBody>
@@ -28728,7 +28729,7 @@
                 <a:ea typeface="DIN Next LT W23"/>
                 <a:cs typeface="DIN Next LT W23"/>
               </a:rPr>
-              <a:t>44  /  76</a:t>
+              <a:t>44  /  77</a:t>
             </a:r>
           </a:p>
         </p:txBody>
@@ -29396,7 +29397,7 @@
                 <a:ea typeface="DIN Next LT W23"/>
                 <a:cs typeface="DIN Next LT W23"/>
               </a:rPr>
-              <a:t>45  /  76</a:t>
+              <a:t>45  /  77</a:t>
             </a:r>
           </a:p>
         </p:txBody>
@@ -29944,7 +29945,7 @@
                 <a:ea typeface="DIN Next LT W23"/>
                 <a:cs typeface="DIN Next LT W23"/>
               </a:rPr>
-              <a:t>46  /  76</a:t>
+              <a:t>46  /  77</a:t>
             </a:r>
           </a:p>
         </p:txBody>
@@ -30418,7 +30419,7 @@
                 <a:ea typeface="DIN Next LT W23"/>
                 <a:cs typeface="DIN Next LT W23"/>
               </a:rPr>
-              <a:t>47  /  76</a:t>
+              <a:t>47  /  77</a:t>
             </a:r>
           </a:p>
         </p:txBody>
@@ -30970,7 +30971,7 @@
                 <a:ea typeface="DIN Next LT W23"/>
                 <a:cs typeface="DIN Next LT W23"/>
               </a:rPr>
-              <a:t>48  /  76</a:t>
+              <a:t>48  /  77</a:t>
             </a:r>
           </a:p>
         </p:txBody>
@@ -31590,7 +31591,7 @@
                 <a:ea typeface="DIN Next LT W23"/>
                 <a:cs typeface="DIN Next LT W23"/>
               </a:rPr>
-              <a:t>49  /  76</a:t>
+              <a:t>49  /  77</a:t>
             </a:r>
           </a:p>
         </p:txBody>
@@ -32369,7 +32370,7 @@
                 <a:ea typeface="DIN Next LT W23"/>
                 <a:cs typeface="DIN Next LT W23"/>
               </a:rPr>
-              <a:t>05  /  76</a:t>
+              <a:t>05  /  77</a:t>
             </a:r>
           </a:p>
         </p:txBody>
@@ -32884,7 +32885,7 @@
                 <a:ea typeface="DIN Next LT W23"/>
                 <a:cs typeface="DIN Next LT W23"/>
               </a:rPr>
-              <a:t>50  /  76</a:t>
+              <a:t>50  /  77</a:t>
             </a:r>
           </a:p>
         </p:txBody>
@@ -33469,7 +33470,7 @@
                 <a:ea typeface="DIN Next LT W23"/>
                 <a:cs typeface="DIN Next LT W23"/>
               </a:rPr>
-              <a:t>51  /  76</a:t>
+              <a:t>51  /  77</a:t>
             </a:r>
           </a:p>
         </p:txBody>
@@ -34058,7 +34059,7 @@
                 <a:ea typeface="DIN Next LT W23"/>
                 <a:cs typeface="DIN Next LT W23"/>
               </a:rPr>
-              <a:t>52  /  76</a:t>
+              <a:t>52  /  77</a:t>
             </a:r>
           </a:p>
         </p:txBody>
@@ -34532,7 +34533,7 @@
                 <a:ea typeface="DIN Next LT W23"/>
                 <a:cs typeface="DIN Next LT W23"/>
               </a:rPr>
-              <a:t>53  /  76</a:t>
+              <a:t>53  /  77</a:t>
             </a:r>
           </a:p>
         </p:txBody>
@@ -35303,7 +35304,7 @@
                 <a:ea typeface="DIN Next LT W23"/>
                 <a:cs typeface="DIN Next LT W23"/>
               </a:rPr>
-              <a:t>54  /  76</a:t>
+              <a:t>54  /  77</a:t>
             </a:r>
           </a:p>
         </p:txBody>
@@ -35892,7 +35893,7 @@
                 <a:ea typeface="DIN Next LT W23"/>
                 <a:cs typeface="DIN Next LT W23"/>
               </a:rPr>
-              <a:t>55  /  76</a:t>
+              <a:t>55  /  77</a:t>
             </a:r>
           </a:p>
         </p:txBody>
@@ -36570,7 +36571,7 @@
                 <a:ea typeface="DIN Next LT W23"/>
                 <a:cs typeface="DIN Next LT W23"/>
               </a:rPr>
-              <a:t>56  /  76</a:t>
+              <a:t>56  /  77</a:t>
             </a:r>
           </a:p>
         </p:txBody>
@@ -37196,7 +37197,7 @@
                 <a:ea typeface="DIN Next LT W23"/>
                 <a:cs typeface="DIN Next LT W23"/>
               </a:rPr>
-              <a:t>57  /  76</a:t>
+              <a:t>57  /  77</a:t>
             </a:r>
           </a:p>
         </p:txBody>
@@ -37670,7 +37671,7 @@
                 <a:ea typeface="DIN Next LT W23"/>
                 <a:cs typeface="DIN Next LT W23"/>
               </a:rPr>
-              <a:t>58  /  76</a:t>
+              <a:t>58  /  77</a:t>
             </a:r>
           </a:p>
         </p:txBody>
@@ -38431,7 +38432,7 @@
                 <a:ea typeface="DIN Next LT W23"/>
                 <a:cs typeface="DIN Next LT W23"/>
               </a:rPr>
-              <a:t>59  /  76</a:t>
+              <a:t>59  /  77</a:t>
             </a:r>
           </a:p>
         </p:txBody>
@@ -38942,7 +38943,7 @@
                 <a:ea typeface="DIN Next LT W23"/>
                 <a:cs typeface="DIN Next LT W23"/>
               </a:rPr>
-              <a:t>06  /  76</a:t>
+              <a:t>06  /  77</a:t>
             </a:r>
           </a:p>
         </p:txBody>
@@ -39154,7 +39155,7 @@
                 <a:ea typeface="DIN Next LT W23"/>
                 <a:cs typeface="DIN Next LT W23"/>
               </a:rPr>
-              <a:t>Batch Normalization</a:t>
+              <a:t>Normalization: Batch Normalization</a:t>
             </a:r>
           </a:p>
         </p:txBody>
@@ -39191,7 +39192,7 @@
                 <a:ea typeface="DIN Next LT W23"/>
                 <a:cs typeface="DIN Next LT W23"/>
               </a:rPr>
-              <a:t>Stabilize Activations, Speed Up Training</a:t>
+              <a:t>Stabilize Activations and Speed Up Deep Training</a:t>
             </a:r>
           </a:p>
         </p:txBody>
@@ -39205,7 +39206,7 @@
         <p:spPr>
           <a:xfrm>
             <a:off x="548640" y="1965960"/>
-            <a:ext cx="10972800" cy="640080"/>
+            <a:ext cx="10972800" cy="3977639"/>
           </a:xfrm>
           <a:prstGeom prst="roundRect">
             <a:avLst>
@@ -39242,92 +39243,9 @@
           </a:p>
         </p:txBody>
       </p:sp>
-      <p:sp>
-        <p:nvSpPr>
-          <p:cNvPr id="9" name="TextBox 8"/>
-          <p:cNvSpPr txBox="1"/>
-          <p:nvPr/>
-        </p:nvSpPr>
-        <p:spPr>
-          <a:xfrm>
-            <a:off x="868680" y="2084831"/>
-            <a:ext cx="10332720" cy="411480"/>
-          </a:xfrm>
-          <a:prstGeom prst="rect">
-            <a:avLst/>
-          </a:prstGeom>
-          <a:noFill/>
-        </p:spPr>
-        <p:txBody>
-          <a:bodyPr wrap="square" anchor="t">
-            <a:spAutoFit/>
-          </a:bodyPr>
-          <a:lstStyle/>
-          <a:p>
-            <a:pPr algn="l"/>
-            <a:r>
-              <a:rPr sz="1400" b="0">
-                <a:solidFill>
-                  <a:srgbClr val="121018"/>
-                </a:solidFill>
-                <a:latin typeface="DIN Next LT W23"/>
-                <a:ea typeface="DIN Next LT W23"/>
-                <a:cs typeface="DIN Next LT W23"/>
-              </a:rPr>
-              <a:t>BN normalizes each channel across the mini-batch, then learns a scale γ and shift β.</a:t>
-            </a:r>
-          </a:p>
-        </p:txBody>
-      </p:sp>
-      <p:sp>
-        <p:nvSpPr>
-          <p:cNvPr id="10" name="Rounded Rectangle 9"/>
-          <p:cNvSpPr/>
-          <p:nvPr/>
-        </p:nvSpPr>
-        <p:spPr>
-          <a:xfrm>
-            <a:off x="548640" y="2743200"/>
-            <a:ext cx="10972800" cy="1417320"/>
-          </a:xfrm>
-          <a:prstGeom prst="roundRect">
-            <a:avLst>
-              <a:gd name="adj" fmla="val 10000"/>
-            </a:avLst>
-          </a:prstGeom>
-          <a:solidFill>
-            <a:srgbClr val="EEE8FA"/>
-          </a:solidFill>
-          <a:ln>
-            <a:noFill/>
-          </a:ln>
-          <a:effectLst/>
-        </p:spPr>
-        <p:style>
-          <a:lnRef idx="1">
-            <a:schemeClr val="accent1"/>
-          </a:lnRef>
-          <a:fillRef idx="3">
-            <a:schemeClr val="accent1"/>
-          </a:fillRef>
-          <a:effectRef idx="2">
-            <a:schemeClr val="accent1"/>
-          </a:effectRef>
-          <a:fontRef idx="minor">
-            <a:schemeClr val="lt1"/>
-          </a:fontRef>
-        </p:style>
-        <p:txBody>
-          <a:bodyPr rtlCol="0" anchor="ctr"/>
-          <a:lstStyle/>
-          <a:p>
-            <a:pPr algn="ctr"/>
-          </a:p>
-        </p:txBody>
-      </p:sp>
       <p:pic>
         <p:nvPicPr>
-          <p:cNvPr id="11" name="Picture 10" descr="f-cf7bf0202215fa01.png"/>
+          <p:cNvPr id="9" name="Picture 8" descr="feature-scaling.png"/>
           <p:cNvPicPr>
             <a:picLocks noChangeAspect="1"/>
           </p:cNvPicPr>
@@ -39341,8 +39259,8 @@
         </p:blipFill>
         <p:spPr>
           <a:xfrm>
-            <a:off x="4480892" y="2852928"/>
-            <a:ext cx="3108294" cy="868680"/>
+            <a:off x="5631742" y="2103120"/>
+            <a:ext cx="806595" cy="3703320"/>
           </a:xfrm>
           <a:prstGeom prst="rect">
             <a:avLst/>
@@ -39351,161 +39269,13 @@
       </p:pic>
       <p:sp>
         <p:nvSpPr>
-          <p:cNvPr id="12" name="TextBox 11"/>
-          <p:cNvSpPr txBox="1"/>
-          <p:nvPr/>
-        </p:nvSpPr>
-        <p:spPr>
-          <a:xfrm>
-            <a:off x="548640" y="4270248"/>
-            <a:ext cx="320040" cy="384048"/>
-          </a:xfrm>
-          <a:prstGeom prst="rect">
-            <a:avLst/>
-          </a:prstGeom>
-          <a:noFill/>
-        </p:spPr>
-        <p:txBody>
-          <a:bodyPr wrap="square" anchor="t">
-            <a:spAutoFit/>
-          </a:bodyPr>
-          <a:lstStyle/>
-          <a:p>
-            <a:pPr algn="l"/>
-            <a:r>
-              <a:rPr sz="1300" b="0">
-                <a:solidFill>
-                  <a:srgbClr val="9E59CD"/>
-                </a:solidFill>
-                <a:latin typeface="DIN Next LT W23"/>
-                <a:ea typeface="DIN Next LT W23"/>
-                <a:cs typeface="DIN Next LT W23"/>
-              </a:rPr>
-              <a:t>–</a:t>
-            </a:r>
-          </a:p>
-        </p:txBody>
-      </p:sp>
-      <p:sp>
-        <p:nvSpPr>
-          <p:cNvPr id="13" name="TextBox 12"/>
-          <p:cNvSpPr txBox="1"/>
-          <p:nvPr/>
-        </p:nvSpPr>
-        <p:spPr>
-          <a:xfrm>
-            <a:off x="914400" y="4270248"/>
-            <a:ext cx="9875519" cy="384048"/>
-          </a:xfrm>
-          <a:prstGeom prst="rect">
-            <a:avLst/>
-          </a:prstGeom>
-          <a:noFill/>
-        </p:spPr>
-        <p:txBody>
-          <a:bodyPr wrap="square" anchor="t">
-            <a:spAutoFit/>
-          </a:bodyPr>
-          <a:lstStyle/>
-          <a:p>
-            <a:pPr algn="l"/>
-            <a:r>
-              <a:rPr sz="1300" b="0">
-                <a:solidFill>
-                  <a:srgbClr val="121018"/>
-                </a:solidFill>
-                <a:latin typeface="DIN Next LT W23"/>
-                <a:ea typeface="DIN Next LT W23"/>
-                <a:cs typeface="DIN Next LT W23"/>
-              </a:rPr>
-              <a:t>Stabilizes internal activations and allows a higher learning rate.</a:t>
-            </a:r>
-          </a:p>
-        </p:txBody>
-      </p:sp>
-      <p:sp>
-        <p:nvSpPr>
-          <p:cNvPr id="14" name="TextBox 13"/>
-          <p:cNvSpPr txBox="1"/>
-          <p:nvPr/>
-        </p:nvSpPr>
-        <p:spPr>
-          <a:xfrm>
-            <a:off x="548640" y="4690872"/>
-            <a:ext cx="320040" cy="384048"/>
-          </a:xfrm>
-          <a:prstGeom prst="rect">
-            <a:avLst/>
-          </a:prstGeom>
-          <a:noFill/>
-        </p:spPr>
-        <p:txBody>
-          <a:bodyPr wrap="square" anchor="t">
-            <a:spAutoFit/>
-          </a:bodyPr>
-          <a:lstStyle/>
-          <a:p>
-            <a:pPr algn="l"/>
-            <a:r>
-              <a:rPr sz="1300" b="0">
-                <a:solidFill>
-                  <a:srgbClr val="9E59CD"/>
-                </a:solidFill>
-                <a:latin typeface="DIN Next LT W23"/>
-                <a:ea typeface="DIN Next LT W23"/>
-                <a:cs typeface="DIN Next LT W23"/>
-              </a:rPr>
-              <a:t>–</a:t>
-            </a:r>
-          </a:p>
-        </p:txBody>
-      </p:sp>
-      <p:sp>
-        <p:nvSpPr>
-          <p:cNvPr id="15" name="TextBox 14"/>
-          <p:cNvSpPr txBox="1"/>
-          <p:nvPr/>
-        </p:nvSpPr>
-        <p:spPr>
-          <a:xfrm>
-            <a:off x="914400" y="4690872"/>
-            <a:ext cx="9875519" cy="384048"/>
-          </a:xfrm>
-          <a:prstGeom prst="rect">
-            <a:avLst/>
-          </a:prstGeom>
-          <a:noFill/>
-        </p:spPr>
-        <p:txBody>
-          <a:bodyPr wrap="square" anchor="t">
-            <a:spAutoFit/>
-          </a:bodyPr>
-          <a:lstStyle/>
-          <a:p>
-            <a:pPr algn="l"/>
-            <a:r>
-              <a:rPr sz="1300" b="0">
-                <a:solidFill>
-                  <a:srgbClr val="121018"/>
-                </a:solidFill>
-                <a:latin typeface="DIN Next LT W23"/>
-                <a:ea typeface="DIN Next LT W23"/>
-                <a:cs typeface="DIN Next LT W23"/>
-              </a:rPr>
-              <a:t>Layer Norm normalizes across features per example — standard in Transformers and RNNs.</a:t>
-            </a:r>
-          </a:p>
-        </p:txBody>
-      </p:sp>
-      <p:sp>
-        <p:nvSpPr>
-          <p:cNvPr id="16" name="TextBox 15"/>
-          <p:cNvSpPr txBox="1"/>
-          <p:nvPr/>
-        </p:nvSpPr>
-        <p:spPr>
-          <a:xfrm>
-            <a:off x="548640" y="5989320"/>
+          <p:cNvPr id="10" name="TextBox 9"/>
+          <p:cNvSpPr txBox="1"/>
+          <p:nvPr/>
+        </p:nvSpPr>
+        <p:spPr>
+          <a:xfrm>
+            <a:off x="548640" y="6309360"/>
             <a:ext cx="10972800" cy="228600"/>
           </a:xfrm>
           <a:prstGeom prst="rect">
@@ -39521,7 +39291,7 @@
           <a:p>
             <a:pPr algn="l"/>
             <a:r>
-              <a:rPr sz="1200" b="0">
+              <a:rPr sz="1100" b="0">
                 <a:solidFill>
                   <a:srgbClr val="5A5470"/>
                 </a:solidFill>
@@ -39529,14 +39299,14 @@
                 <a:ea typeface="DIN Next LT W23"/>
                 <a:cs typeface="DIN Next LT W23"/>
               </a:rPr>
-              <a:t>BN uses batch statistics at train time and running averages at inference.</a:t>
-            </a:r>
-          </a:p>
-        </p:txBody>
-      </p:sp>
-      <p:sp>
-        <p:nvSpPr>
-          <p:cNvPr id="17" name="Rectangle 16"/>
+              <a:t>Feature scaling: features brought to a comparable range.</a:t>
+            </a:r>
+          </a:p>
+        </p:txBody>
+      </p:sp>
+      <p:sp>
+        <p:nvSpPr>
+          <p:cNvPr id="11" name="Rectangle 10"/>
           <p:cNvSpPr/>
           <p:nvPr/>
         </p:nvSpPr>
@@ -39580,7 +39350,7 @@
       </p:sp>
       <p:sp>
         <p:nvSpPr>
-          <p:cNvPr id="18" name="TextBox 17"/>
+          <p:cNvPr id="12" name="TextBox 11"/>
           <p:cNvSpPr txBox="1"/>
           <p:nvPr/>
         </p:nvSpPr>
@@ -39617,7 +39387,7 @@
       </p:sp>
       <p:sp>
         <p:nvSpPr>
-          <p:cNvPr id="19" name="TextBox 18"/>
+          <p:cNvPr id="13" name="TextBox 12"/>
           <p:cNvSpPr txBox="1"/>
           <p:nvPr/>
         </p:nvSpPr>
@@ -39647,7 +39417,7 @@
                 <a:ea typeface="DIN Next LT W23"/>
                 <a:cs typeface="DIN Next LT W23"/>
               </a:rPr>
-              <a:t>60  /  76</a:t>
+              <a:t>60  /  77</a:t>
             </a:r>
           </a:p>
         </p:txBody>
@@ -39859,7 +39629,7 @@
                 <a:ea typeface="DIN Next LT W23"/>
                 <a:cs typeface="DIN Next LT W23"/>
               </a:rPr>
-              <a:t>Image Data: How Computers See Pixels</a:t>
+              <a:t>Normalization: Batch Normalization</a:t>
             </a:r>
           </a:p>
         </p:txBody>
@@ -39896,7 +39666,7 @@
                 <a:ea typeface="DIN Next LT W23"/>
                 <a:cs typeface="DIN Next LT W23"/>
               </a:rPr>
-              <a:t>Tensors, Channels, and Local Structure</a:t>
+              <a:t>Stabilize Activations and Speed Up Deep Training</a:t>
             </a:r>
           </a:p>
         </p:txBody>
@@ -39909,8 +39679,8 @@
         </p:nvSpPr>
         <p:spPr>
           <a:xfrm>
-            <a:off x="548640" y="2011680"/>
-            <a:ext cx="5760720" cy="1097280"/>
+            <a:off x="548640" y="1965960"/>
+            <a:ext cx="10972800" cy="640080"/>
           </a:xfrm>
           <a:prstGeom prst="roundRect">
             <a:avLst>
@@ -39955,23 +39725,23 @@
         </p:nvSpPr>
         <p:spPr>
           <a:xfrm>
-            <a:off x="822960" y="2148840"/>
-            <a:ext cx="5303520" cy="868680"/>
-          </a:xfrm>
-          <a:prstGeom prst="rect">
-            <a:avLst/>
-          </a:prstGeom>
-          <a:noFill/>
-        </p:spPr>
-        <p:txBody>
-          <a:bodyPr wrap="square" anchor="t">
-            <a:spAutoFit/>
-          </a:bodyPr>
-          <a:lstStyle/>
-          <a:p>
-            <a:pPr algn="l"/>
-            <a:r>
-              <a:rPr sz="1300" b="0">
+            <a:off x="868680" y="2084831"/>
+            <a:ext cx="10332720" cy="411480"/>
+          </a:xfrm>
+          <a:prstGeom prst="rect">
+            <a:avLst/>
+          </a:prstGeom>
+          <a:noFill/>
+        </p:spPr>
+        <p:txBody>
+          <a:bodyPr wrap="square" anchor="t">
+            <a:spAutoFit/>
+          </a:bodyPr>
+          <a:lstStyle/>
+          <a:p>
+            <a:pPr algn="l"/>
+            <a:r>
+              <a:rPr sz="1400" b="0">
                 <a:solidFill>
                   <a:srgbClr val="121018"/>
                 </a:solidFill>
@@ -39979,243 +39749,21 @@
                 <a:ea typeface="DIN Next LT W23"/>
                 <a:cs typeface="DIN Next LT W23"/>
               </a:rPr>
-              <a:t>A color image is a tensor H×W×3 (RGB). Meaning lives in local neighborhoods, not isolated pixels.</a:t>
-            </a:r>
-          </a:p>
-        </p:txBody>
-      </p:sp>
-      <p:sp>
-        <p:nvSpPr>
-          <p:cNvPr id="10" name="TextBox 9"/>
-          <p:cNvSpPr txBox="1"/>
-          <p:nvPr/>
-        </p:nvSpPr>
-        <p:spPr>
-          <a:xfrm>
-            <a:off x="548640" y="3246120"/>
-            <a:ext cx="320040" cy="384048"/>
-          </a:xfrm>
-          <a:prstGeom prst="rect">
-            <a:avLst/>
-          </a:prstGeom>
-          <a:noFill/>
-        </p:spPr>
-        <p:txBody>
-          <a:bodyPr wrap="square" anchor="t">
-            <a:spAutoFit/>
-          </a:bodyPr>
-          <a:lstStyle/>
-          <a:p>
-            <a:pPr algn="l"/>
-            <a:r>
-              <a:rPr sz="1300" b="0">
-                <a:solidFill>
-                  <a:srgbClr val="9E59CD"/>
-                </a:solidFill>
-                <a:latin typeface="DIN Next LT W23"/>
-                <a:ea typeface="DIN Next LT W23"/>
-                <a:cs typeface="DIN Next LT W23"/>
-              </a:rPr>
-              <a:t>–</a:t>
-            </a:r>
-          </a:p>
-        </p:txBody>
-      </p:sp>
-      <p:sp>
-        <p:nvSpPr>
-          <p:cNvPr id="11" name="TextBox 10"/>
-          <p:cNvSpPr txBox="1"/>
-          <p:nvPr/>
-        </p:nvSpPr>
-        <p:spPr>
-          <a:xfrm>
-            <a:off x="914400" y="3246120"/>
-            <a:ext cx="4754879" cy="384048"/>
-          </a:xfrm>
-          <a:prstGeom prst="rect">
-            <a:avLst/>
-          </a:prstGeom>
-          <a:noFill/>
-        </p:spPr>
-        <p:txBody>
-          <a:bodyPr wrap="square" anchor="t">
-            <a:spAutoFit/>
-          </a:bodyPr>
-          <a:lstStyle/>
-          <a:p>
-            <a:pPr algn="l"/>
-            <a:r>
-              <a:rPr sz="1300" b="0">
-                <a:solidFill>
-                  <a:srgbClr val="121018"/>
-                </a:solidFill>
-                <a:latin typeface="DIN Next LT W23"/>
-                <a:ea typeface="DIN Next LT W23"/>
-                <a:cs typeface="DIN Next LT W23"/>
-              </a:rPr>
-              <a:t>Small patches reveal edges; larger context reveals objects — hierarchical composition.</a:t>
-            </a:r>
-          </a:p>
-        </p:txBody>
-      </p:sp>
-      <p:sp>
-        <p:nvSpPr>
-          <p:cNvPr id="12" name="TextBox 11"/>
-          <p:cNvSpPr txBox="1"/>
-          <p:nvPr/>
-        </p:nvSpPr>
-        <p:spPr>
-          <a:xfrm>
-            <a:off x="548640" y="3703320"/>
-            <a:ext cx="320040" cy="384048"/>
-          </a:xfrm>
-          <a:prstGeom prst="rect">
-            <a:avLst/>
-          </a:prstGeom>
-          <a:noFill/>
-        </p:spPr>
-        <p:txBody>
-          <a:bodyPr wrap="square" anchor="t">
-            <a:spAutoFit/>
-          </a:bodyPr>
-          <a:lstStyle/>
-          <a:p>
-            <a:pPr algn="l"/>
-            <a:r>
-              <a:rPr sz="1300" b="0">
-                <a:solidFill>
-                  <a:srgbClr val="9E59CD"/>
-                </a:solidFill>
-                <a:latin typeface="DIN Next LT W23"/>
-                <a:ea typeface="DIN Next LT W23"/>
-                <a:cs typeface="DIN Next LT W23"/>
-              </a:rPr>
-              <a:t>–</a:t>
-            </a:r>
-          </a:p>
-        </p:txBody>
-      </p:sp>
-      <p:sp>
-        <p:nvSpPr>
-          <p:cNvPr id="13" name="TextBox 12"/>
-          <p:cNvSpPr txBox="1"/>
-          <p:nvPr/>
-        </p:nvSpPr>
-        <p:spPr>
-          <a:xfrm>
-            <a:off x="914400" y="3703320"/>
-            <a:ext cx="4754879" cy="384048"/>
-          </a:xfrm>
-          <a:prstGeom prst="rect">
-            <a:avLst/>
-          </a:prstGeom>
-          <a:noFill/>
-        </p:spPr>
-        <p:txBody>
-          <a:bodyPr wrap="square" anchor="t">
-            <a:spAutoFit/>
-          </a:bodyPr>
-          <a:lstStyle/>
-          <a:p>
-            <a:pPr algn="l"/>
-            <a:r>
-              <a:rPr sz="1300" b="0">
-                <a:solidFill>
-                  <a:srgbClr val="121018"/>
-                </a:solidFill>
-                <a:latin typeface="DIN Next LT W23"/>
-                <a:ea typeface="DIN Next LT W23"/>
-                <a:cs typeface="DIN Next LT W23"/>
-              </a:rPr>
-              <a:t>Preprocess: resize, crop, normalize (often ImageNet mean/std), then augment.</a:t>
-            </a:r>
-          </a:p>
-        </p:txBody>
-      </p:sp>
-      <p:sp>
-        <p:nvSpPr>
-          <p:cNvPr id="14" name="TextBox 13"/>
-          <p:cNvSpPr txBox="1"/>
-          <p:nvPr/>
-        </p:nvSpPr>
-        <p:spPr>
-          <a:xfrm>
-            <a:off x="548640" y="4160520"/>
-            <a:ext cx="320040" cy="384048"/>
-          </a:xfrm>
-          <a:prstGeom prst="rect">
-            <a:avLst/>
-          </a:prstGeom>
-          <a:noFill/>
-        </p:spPr>
-        <p:txBody>
-          <a:bodyPr wrap="square" anchor="t">
-            <a:spAutoFit/>
-          </a:bodyPr>
-          <a:lstStyle/>
-          <a:p>
-            <a:pPr algn="l"/>
-            <a:r>
-              <a:rPr sz="1300" b="0">
-                <a:solidFill>
-                  <a:srgbClr val="9E59CD"/>
-                </a:solidFill>
-                <a:latin typeface="DIN Next LT W23"/>
-                <a:ea typeface="DIN Next LT W23"/>
-                <a:cs typeface="DIN Next LT W23"/>
-              </a:rPr>
-              <a:t>–</a:t>
-            </a:r>
-          </a:p>
-        </p:txBody>
-      </p:sp>
-      <p:sp>
-        <p:nvSpPr>
-          <p:cNvPr id="15" name="TextBox 14"/>
-          <p:cNvSpPr txBox="1"/>
-          <p:nvPr/>
-        </p:nvSpPr>
-        <p:spPr>
-          <a:xfrm>
-            <a:off x="914400" y="4160520"/>
-            <a:ext cx="4754879" cy="384048"/>
-          </a:xfrm>
-          <a:prstGeom prst="rect">
-            <a:avLst/>
-          </a:prstGeom>
-          <a:noFill/>
-        </p:spPr>
-        <p:txBody>
-          <a:bodyPr wrap="square" anchor="t">
-            <a:spAutoFit/>
-          </a:bodyPr>
-          <a:lstStyle/>
-          <a:p>
-            <a:pPr algn="l"/>
-            <a:r>
-              <a:rPr sz="1300" b="0">
-                <a:solidFill>
-                  <a:srgbClr val="121018"/>
-                </a:solidFill>
-                <a:latin typeface="DIN Next LT W23"/>
-                <a:ea typeface="DIN Next LT W23"/>
-                <a:cs typeface="DIN Next LT W23"/>
-              </a:rPr>
-              <a:t>Model input is typically Batch × C × H × W fed into stem convolutions.</a:t>
-            </a:r>
-          </a:p>
-        </p:txBody>
-      </p:sp>
-      <p:sp>
-        <p:nvSpPr>
-          <p:cNvPr id="16" name="Rounded Rectangle 15"/>
+              <a:t>BN normalizes each channel across the mini-batch, then learns a scale γ and shift β.</a:t>
+            </a:r>
+          </a:p>
+        </p:txBody>
+      </p:sp>
+      <p:sp>
+        <p:nvSpPr>
+          <p:cNvPr id="10" name="Rounded Rectangle 9"/>
           <p:cNvSpPr/>
           <p:nvPr/>
         </p:nvSpPr>
         <p:spPr>
           <a:xfrm>
-            <a:off x="6537960" y="2011680"/>
-            <a:ext cx="4983480" cy="3794760"/>
+            <a:off x="548640" y="2743200"/>
+            <a:ext cx="10972800" cy="1417320"/>
           </a:xfrm>
           <a:prstGeom prst="roundRect">
             <a:avLst>
@@ -40254,7 +39802,7 @@
       </p:sp>
       <p:pic>
         <p:nvPicPr>
-          <p:cNvPr id="17" name="Picture 16" descr="convolution.png"/>
+          <p:cNvPr id="11" name="Picture 10" descr="f-cf7bf0202215fa01.png"/>
           <p:cNvPicPr>
             <a:picLocks noChangeAspect="1"/>
           </p:cNvPicPr>
@@ -40268,8 +39816,8 @@
         </p:blipFill>
         <p:spPr>
           <a:xfrm>
-            <a:off x="6720840" y="2194560"/>
-            <a:ext cx="4617720" cy="1849956"/>
+            <a:off x="4480892" y="2852928"/>
+            <a:ext cx="3108294" cy="868680"/>
           </a:xfrm>
           <a:prstGeom prst="rect">
             <a:avLst/>
@@ -40278,29 +39826,177 @@
       </p:pic>
       <p:sp>
         <p:nvSpPr>
-          <p:cNvPr id="18" name="TextBox 17"/>
+          <p:cNvPr id="12" name="TextBox 11"/>
+          <p:cNvSpPr txBox="1"/>
+          <p:nvPr/>
+        </p:nvSpPr>
+        <p:spPr>
+          <a:xfrm>
+            <a:off x="548640" y="4270248"/>
+            <a:ext cx="320040" cy="384048"/>
+          </a:xfrm>
+          <a:prstGeom prst="rect">
+            <a:avLst/>
+          </a:prstGeom>
+          <a:noFill/>
+        </p:spPr>
+        <p:txBody>
+          <a:bodyPr wrap="square" anchor="t">
+            <a:spAutoFit/>
+          </a:bodyPr>
+          <a:lstStyle/>
+          <a:p>
+            <a:pPr algn="l"/>
+            <a:r>
+              <a:rPr sz="1300" b="0">
+                <a:solidFill>
+                  <a:srgbClr val="9E59CD"/>
+                </a:solidFill>
+                <a:latin typeface="DIN Next LT W23"/>
+                <a:ea typeface="DIN Next LT W23"/>
+                <a:cs typeface="DIN Next LT W23"/>
+              </a:rPr>
+              <a:t>–</a:t>
+            </a:r>
+          </a:p>
+        </p:txBody>
+      </p:sp>
+      <p:sp>
+        <p:nvSpPr>
+          <p:cNvPr id="13" name="TextBox 12"/>
+          <p:cNvSpPr txBox="1"/>
+          <p:nvPr/>
+        </p:nvSpPr>
+        <p:spPr>
+          <a:xfrm>
+            <a:off x="914400" y="4270248"/>
+            <a:ext cx="9875519" cy="384048"/>
+          </a:xfrm>
+          <a:prstGeom prst="rect">
+            <a:avLst/>
+          </a:prstGeom>
+          <a:noFill/>
+        </p:spPr>
+        <p:txBody>
+          <a:bodyPr wrap="square" anchor="t">
+            <a:spAutoFit/>
+          </a:bodyPr>
+          <a:lstStyle/>
+          <a:p>
+            <a:pPr algn="l"/>
+            <a:r>
+              <a:rPr sz="1300" b="0">
+                <a:solidFill>
+                  <a:srgbClr val="121018"/>
+                </a:solidFill>
+                <a:latin typeface="DIN Next LT W23"/>
+                <a:ea typeface="DIN Next LT W23"/>
+                <a:cs typeface="DIN Next LT W23"/>
+              </a:rPr>
+              <a:t>Stabilizes internal activations and allows a higher learning rate.</a:t>
+            </a:r>
+          </a:p>
+        </p:txBody>
+      </p:sp>
+      <p:sp>
+        <p:nvSpPr>
+          <p:cNvPr id="14" name="TextBox 13"/>
+          <p:cNvSpPr txBox="1"/>
+          <p:nvPr/>
+        </p:nvSpPr>
+        <p:spPr>
+          <a:xfrm>
+            <a:off x="548640" y="4690872"/>
+            <a:ext cx="320040" cy="384048"/>
+          </a:xfrm>
+          <a:prstGeom prst="rect">
+            <a:avLst/>
+          </a:prstGeom>
+          <a:noFill/>
+        </p:spPr>
+        <p:txBody>
+          <a:bodyPr wrap="square" anchor="t">
+            <a:spAutoFit/>
+          </a:bodyPr>
+          <a:lstStyle/>
+          <a:p>
+            <a:pPr algn="l"/>
+            <a:r>
+              <a:rPr sz="1300" b="0">
+                <a:solidFill>
+                  <a:srgbClr val="9E59CD"/>
+                </a:solidFill>
+                <a:latin typeface="DIN Next LT W23"/>
+                <a:ea typeface="DIN Next LT W23"/>
+                <a:cs typeface="DIN Next LT W23"/>
+              </a:rPr>
+              <a:t>–</a:t>
+            </a:r>
+          </a:p>
+        </p:txBody>
+      </p:sp>
+      <p:sp>
+        <p:nvSpPr>
+          <p:cNvPr id="15" name="TextBox 14"/>
+          <p:cNvSpPr txBox="1"/>
+          <p:nvPr/>
+        </p:nvSpPr>
+        <p:spPr>
+          <a:xfrm>
+            <a:off x="914400" y="4690872"/>
+            <a:ext cx="9875519" cy="384048"/>
+          </a:xfrm>
+          <a:prstGeom prst="rect">
+            <a:avLst/>
+          </a:prstGeom>
+          <a:noFill/>
+        </p:spPr>
+        <p:txBody>
+          <a:bodyPr wrap="square" anchor="t">
+            <a:spAutoFit/>
+          </a:bodyPr>
+          <a:lstStyle/>
+          <a:p>
+            <a:pPr algn="l"/>
+            <a:r>
+              <a:rPr sz="1300" b="0">
+                <a:solidFill>
+                  <a:srgbClr val="121018"/>
+                </a:solidFill>
+                <a:latin typeface="DIN Next LT W23"/>
+                <a:ea typeface="DIN Next LT W23"/>
+                <a:cs typeface="DIN Next LT W23"/>
+              </a:rPr>
+              <a:t>Layer Norm normalizes across features per example — standard in Transformers and RNNs.</a:t>
+            </a:r>
+          </a:p>
+        </p:txBody>
+      </p:sp>
+      <p:sp>
+        <p:nvSpPr>
+          <p:cNvPr id="16" name="TextBox 15"/>
           <p:cNvSpPr txBox="1"/>
           <p:nvPr/>
         </p:nvSpPr>
         <p:spPr>
           <a:xfrm>
             <a:off x="548640" y="5989320"/>
-            <a:ext cx="10972800" cy="256032"/>
-          </a:xfrm>
-          <a:prstGeom prst="rect">
-            <a:avLst/>
-          </a:prstGeom>
-          <a:noFill/>
-        </p:spPr>
-        <p:txBody>
-          <a:bodyPr wrap="square" anchor="t">
-            <a:spAutoFit/>
-          </a:bodyPr>
-          <a:lstStyle/>
-          <a:p>
-            <a:pPr algn="l"/>
-            <a:r>
-              <a:rPr sz="1100" b="0">
+            <a:ext cx="10972800" cy="228600"/>
+          </a:xfrm>
+          <a:prstGeom prst="rect">
+            <a:avLst/>
+          </a:prstGeom>
+          <a:noFill/>
+        </p:spPr>
+        <p:txBody>
+          <a:bodyPr wrap="square" anchor="t">
+            <a:spAutoFit/>
+          </a:bodyPr>
+          <a:lstStyle/>
+          <a:p>
+            <a:pPr algn="l"/>
+            <a:r>
+              <a:rPr sz="1200" b="0">
                 <a:solidFill>
                   <a:srgbClr val="5A5470"/>
                 </a:solidFill>
@@ -40308,14 +40004,14 @@
                 <a:ea typeface="DIN Next LT W23"/>
                 <a:cs typeface="DIN Next LT W23"/>
               </a:rPr>
-              <a:t>Augmentation (crop, flip, color jitter) teaches invariance the loss never states explicitly.</a:t>
-            </a:r>
-          </a:p>
-        </p:txBody>
-      </p:sp>
-      <p:sp>
-        <p:nvSpPr>
-          <p:cNvPr id="19" name="Rectangle 18"/>
+              <a:t>BN uses batch statistics at train time and running averages at inference.</a:t>
+            </a:r>
+          </a:p>
+        </p:txBody>
+      </p:sp>
+      <p:sp>
+        <p:nvSpPr>
+          <p:cNvPr id="17" name="Rectangle 16"/>
           <p:cNvSpPr/>
           <p:nvPr/>
         </p:nvSpPr>
@@ -40359,7 +40055,7 @@
       </p:sp>
       <p:sp>
         <p:nvSpPr>
-          <p:cNvPr id="20" name="TextBox 19"/>
+          <p:cNvPr id="18" name="TextBox 17"/>
           <p:cNvSpPr txBox="1"/>
           <p:nvPr/>
         </p:nvSpPr>
@@ -40396,7 +40092,7 @@
       </p:sp>
       <p:sp>
         <p:nvSpPr>
-          <p:cNvPr id="21" name="TextBox 20"/>
+          <p:cNvPr id="19" name="TextBox 18"/>
           <p:cNvSpPr txBox="1"/>
           <p:nvPr/>
         </p:nvSpPr>
@@ -40426,7 +40122,7 @@
                 <a:ea typeface="DIN Next LT W23"/>
                 <a:cs typeface="DIN Next LT W23"/>
               </a:rPr>
-              <a:t>61  /  76</a:t>
+              <a:t>61  /  77</a:t>
             </a:r>
           </a:p>
         </p:txBody>
@@ -40638,7 +40334,7 @@
                 <a:ea typeface="DIN Next LT W23"/>
                 <a:cs typeface="DIN Next LT W23"/>
               </a:rPr>
-              <a:t>Convolution: Kernels and Feature Maps</a:t>
+              <a:t>Image Data: How Computers See Pixels</a:t>
             </a:r>
           </a:p>
         </p:txBody>
@@ -40675,58 +40371,21 @@
                 <a:ea typeface="DIN Next LT W23"/>
                 <a:cs typeface="DIN Next LT W23"/>
               </a:rPr>
-              <a:t>Sliding Linear Filters + Nonlinearity</a:t>
-            </a:r>
-          </a:p>
-        </p:txBody>
-      </p:sp>
-      <p:sp>
-        <p:nvSpPr>
-          <p:cNvPr id="8" name="TextBox 7"/>
-          <p:cNvSpPr txBox="1"/>
-          <p:nvPr/>
-        </p:nvSpPr>
-        <p:spPr>
-          <a:xfrm>
-            <a:off x="548640" y="1920240"/>
-            <a:ext cx="10972800" cy="320040"/>
-          </a:xfrm>
-          <a:prstGeom prst="rect">
-            <a:avLst/>
-          </a:prstGeom>
-          <a:noFill/>
-        </p:spPr>
-        <p:txBody>
-          <a:bodyPr wrap="square" anchor="t">
-            <a:spAutoFit/>
-          </a:bodyPr>
-          <a:lstStyle/>
-          <a:p>
-            <a:pPr algn="l"/>
-            <a:r>
-              <a:rPr sz="1300" b="0">
-                <a:solidFill>
-                  <a:srgbClr val="5A5470"/>
-                </a:solidFill>
-                <a:latin typeface="DIN Next LT W23"/>
-                <a:ea typeface="DIN Next LT W23"/>
-                <a:cs typeface="DIN Next LT W23"/>
-              </a:rPr>
-              <a:t>A kernel is a small learnable matrix (often 3×3). Multiple kernels produce a stack of feature maps.</a:t>
-            </a:r>
-          </a:p>
-        </p:txBody>
-      </p:sp>
-      <p:sp>
-        <p:nvSpPr>
-          <p:cNvPr id="9" name="Rounded Rectangle 8"/>
+              <a:t>Tensors, Channels, and Local Structure</a:t>
+            </a:r>
+          </a:p>
+        </p:txBody>
+      </p:sp>
+      <p:sp>
+        <p:nvSpPr>
+          <p:cNvPr id="8" name="Rounded Rectangle 7"/>
           <p:cNvSpPr/>
           <p:nvPr/>
         </p:nvSpPr>
         <p:spPr>
           <a:xfrm>
-            <a:off x="548640" y="2240280"/>
-            <a:ext cx="10972800" cy="3977639"/>
+            <a:off x="548640" y="2011680"/>
+            <a:ext cx="5760720" cy="1097280"/>
           </a:xfrm>
           <a:prstGeom prst="roundRect">
             <a:avLst>
@@ -40763,9 +40422,314 @@
           </a:p>
         </p:txBody>
       </p:sp>
+      <p:sp>
+        <p:nvSpPr>
+          <p:cNvPr id="9" name="TextBox 8"/>
+          <p:cNvSpPr txBox="1"/>
+          <p:nvPr/>
+        </p:nvSpPr>
+        <p:spPr>
+          <a:xfrm>
+            <a:off x="822960" y="2148840"/>
+            <a:ext cx="5303520" cy="868680"/>
+          </a:xfrm>
+          <a:prstGeom prst="rect">
+            <a:avLst/>
+          </a:prstGeom>
+          <a:noFill/>
+        </p:spPr>
+        <p:txBody>
+          <a:bodyPr wrap="square" anchor="t">
+            <a:spAutoFit/>
+          </a:bodyPr>
+          <a:lstStyle/>
+          <a:p>
+            <a:pPr algn="l"/>
+            <a:r>
+              <a:rPr sz="1300" b="0">
+                <a:solidFill>
+                  <a:srgbClr val="121018"/>
+                </a:solidFill>
+                <a:latin typeface="DIN Next LT W23"/>
+                <a:ea typeface="DIN Next LT W23"/>
+                <a:cs typeface="DIN Next LT W23"/>
+              </a:rPr>
+              <a:t>A color image is a tensor H×W×3 (RGB). Meaning lives in local neighborhoods, not isolated pixels.</a:t>
+            </a:r>
+          </a:p>
+        </p:txBody>
+      </p:sp>
+      <p:sp>
+        <p:nvSpPr>
+          <p:cNvPr id="10" name="TextBox 9"/>
+          <p:cNvSpPr txBox="1"/>
+          <p:nvPr/>
+        </p:nvSpPr>
+        <p:spPr>
+          <a:xfrm>
+            <a:off x="548640" y="3246120"/>
+            <a:ext cx="320040" cy="384048"/>
+          </a:xfrm>
+          <a:prstGeom prst="rect">
+            <a:avLst/>
+          </a:prstGeom>
+          <a:noFill/>
+        </p:spPr>
+        <p:txBody>
+          <a:bodyPr wrap="square" anchor="t">
+            <a:spAutoFit/>
+          </a:bodyPr>
+          <a:lstStyle/>
+          <a:p>
+            <a:pPr algn="l"/>
+            <a:r>
+              <a:rPr sz="1300" b="0">
+                <a:solidFill>
+                  <a:srgbClr val="9E59CD"/>
+                </a:solidFill>
+                <a:latin typeface="DIN Next LT W23"/>
+                <a:ea typeface="DIN Next LT W23"/>
+                <a:cs typeface="DIN Next LT W23"/>
+              </a:rPr>
+              <a:t>–</a:t>
+            </a:r>
+          </a:p>
+        </p:txBody>
+      </p:sp>
+      <p:sp>
+        <p:nvSpPr>
+          <p:cNvPr id="11" name="TextBox 10"/>
+          <p:cNvSpPr txBox="1"/>
+          <p:nvPr/>
+        </p:nvSpPr>
+        <p:spPr>
+          <a:xfrm>
+            <a:off x="914400" y="3246120"/>
+            <a:ext cx="4754879" cy="384048"/>
+          </a:xfrm>
+          <a:prstGeom prst="rect">
+            <a:avLst/>
+          </a:prstGeom>
+          <a:noFill/>
+        </p:spPr>
+        <p:txBody>
+          <a:bodyPr wrap="square" anchor="t">
+            <a:spAutoFit/>
+          </a:bodyPr>
+          <a:lstStyle/>
+          <a:p>
+            <a:pPr algn="l"/>
+            <a:r>
+              <a:rPr sz="1300" b="0">
+                <a:solidFill>
+                  <a:srgbClr val="121018"/>
+                </a:solidFill>
+                <a:latin typeface="DIN Next LT W23"/>
+                <a:ea typeface="DIN Next LT W23"/>
+                <a:cs typeface="DIN Next LT W23"/>
+              </a:rPr>
+              <a:t>Small patches reveal edges; larger context reveals objects — hierarchical composition.</a:t>
+            </a:r>
+          </a:p>
+        </p:txBody>
+      </p:sp>
+      <p:sp>
+        <p:nvSpPr>
+          <p:cNvPr id="12" name="TextBox 11"/>
+          <p:cNvSpPr txBox="1"/>
+          <p:nvPr/>
+        </p:nvSpPr>
+        <p:spPr>
+          <a:xfrm>
+            <a:off x="548640" y="3703320"/>
+            <a:ext cx="320040" cy="384048"/>
+          </a:xfrm>
+          <a:prstGeom prst="rect">
+            <a:avLst/>
+          </a:prstGeom>
+          <a:noFill/>
+        </p:spPr>
+        <p:txBody>
+          <a:bodyPr wrap="square" anchor="t">
+            <a:spAutoFit/>
+          </a:bodyPr>
+          <a:lstStyle/>
+          <a:p>
+            <a:pPr algn="l"/>
+            <a:r>
+              <a:rPr sz="1300" b="0">
+                <a:solidFill>
+                  <a:srgbClr val="9E59CD"/>
+                </a:solidFill>
+                <a:latin typeface="DIN Next LT W23"/>
+                <a:ea typeface="DIN Next LT W23"/>
+                <a:cs typeface="DIN Next LT W23"/>
+              </a:rPr>
+              <a:t>–</a:t>
+            </a:r>
+          </a:p>
+        </p:txBody>
+      </p:sp>
+      <p:sp>
+        <p:nvSpPr>
+          <p:cNvPr id="13" name="TextBox 12"/>
+          <p:cNvSpPr txBox="1"/>
+          <p:nvPr/>
+        </p:nvSpPr>
+        <p:spPr>
+          <a:xfrm>
+            <a:off x="914400" y="3703320"/>
+            <a:ext cx="4754879" cy="384048"/>
+          </a:xfrm>
+          <a:prstGeom prst="rect">
+            <a:avLst/>
+          </a:prstGeom>
+          <a:noFill/>
+        </p:spPr>
+        <p:txBody>
+          <a:bodyPr wrap="square" anchor="t">
+            <a:spAutoFit/>
+          </a:bodyPr>
+          <a:lstStyle/>
+          <a:p>
+            <a:pPr algn="l"/>
+            <a:r>
+              <a:rPr sz="1300" b="0">
+                <a:solidFill>
+                  <a:srgbClr val="121018"/>
+                </a:solidFill>
+                <a:latin typeface="DIN Next LT W23"/>
+                <a:ea typeface="DIN Next LT W23"/>
+                <a:cs typeface="DIN Next LT W23"/>
+              </a:rPr>
+              <a:t>Preprocess: resize, crop, normalize (often ImageNet mean/std), then augment.</a:t>
+            </a:r>
+          </a:p>
+        </p:txBody>
+      </p:sp>
+      <p:sp>
+        <p:nvSpPr>
+          <p:cNvPr id="14" name="TextBox 13"/>
+          <p:cNvSpPr txBox="1"/>
+          <p:nvPr/>
+        </p:nvSpPr>
+        <p:spPr>
+          <a:xfrm>
+            <a:off x="548640" y="4160520"/>
+            <a:ext cx="320040" cy="384048"/>
+          </a:xfrm>
+          <a:prstGeom prst="rect">
+            <a:avLst/>
+          </a:prstGeom>
+          <a:noFill/>
+        </p:spPr>
+        <p:txBody>
+          <a:bodyPr wrap="square" anchor="t">
+            <a:spAutoFit/>
+          </a:bodyPr>
+          <a:lstStyle/>
+          <a:p>
+            <a:pPr algn="l"/>
+            <a:r>
+              <a:rPr sz="1300" b="0">
+                <a:solidFill>
+                  <a:srgbClr val="9E59CD"/>
+                </a:solidFill>
+                <a:latin typeface="DIN Next LT W23"/>
+                <a:ea typeface="DIN Next LT W23"/>
+                <a:cs typeface="DIN Next LT W23"/>
+              </a:rPr>
+              <a:t>–</a:t>
+            </a:r>
+          </a:p>
+        </p:txBody>
+      </p:sp>
+      <p:sp>
+        <p:nvSpPr>
+          <p:cNvPr id="15" name="TextBox 14"/>
+          <p:cNvSpPr txBox="1"/>
+          <p:nvPr/>
+        </p:nvSpPr>
+        <p:spPr>
+          <a:xfrm>
+            <a:off x="914400" y="4160520"/>
+            <a:ext cx="4754879" cy="384048"/>
+          </a:xfrm>
+          <a:prstGeom prst="rect">
+            <a:avLst/>
+          </a:prstGeom>
+          <a:noFill/>
+        </p:spPr>
+        <p:txBody>
+          <a:bodyPr wrap="square" anchor="t">
+            <a:spAutoFit/>
+          </a:bodyPr>
+          <a:lstStyle/>
+          <a:p>
+            <a:pPr algn="l"/>
+            <a:r>
+              <a:rPr sz="1300" b="0">
+                <a:solidFill>
+                  <a:srgbClr val="121018"/>
+                </a:solidFill>
+                <a:latin typeface="DIN Next LT W23"/>
+                <a:ea typeface="DIN Next LT W23"/>
+                <a:cs typeface="DIN Next LT W23"/>
+              </a:rPr>
+              <a:t>Model input is typically Batch × C × H × W fed into stem convolutions.</a:t>
+            </a:r>
+          </a:p>
+        </p:txBody>
+      </p:sp>
+      <p:sp>
+        <p:nvSpPr>
+          <p:cNvPr id="16" name="Rounded Rectangle 15"/>
+          <p:cNvSpPr/>
+          <p:nvPr/>
+        </p:nvSpPr>
+        <p:spPr>
+          <a:xfrm>
+            <a:off x="6537960" y="2011680"/>
+            <a:ext cx="4983480" cy="3794760"/>
+          </a:xfrm>
+          <a:prstGeom prst="roundRect">
+            <a:avLst>
+              <a:gd name="adj" fmla="val 10000"/>
+            </a:avLst>
+          </a:prstGeom>
+          <a:solidFill>
+            <a:srgbClr val="EEE8FA"/>
+          </a:solidFill>
+          <a:ln>
+            <a:noFill/>
+          </a:ln>
+          <a:effectLst/>
+        </p:spPr>
+        <p:style>
+          <a:lnRef idx="1">
+            <a:schemeClr val="accent1"/>
+          </a:lnRef>
+          <a:fillRef idx="3">
+            <a:schemeClr val="accent1"/>
+          </a:fillRef>
+          <a:effectRef idx="2">
+            <a:schemeClr val="accent1"/>
+          </a:effectRef>
+          <a:fontRef idx="minor">
+            <a:schemeClr val="lt1"/>
+          </a:fontRef>
+        </p:style>
+        <p:txBody>
+          <a:bodyPr rtlCol="0" anchor="ctr"/>
+          <a:lstStyle/>
+          <a:p>
+            <a:pPr algn="ctr"/>
+          </a:p>
+        </p:txBody>
+      </p:sp>
       <p:pic>
         <p:nvPicPr>
-          <p:cNvPr id="10" name="Picture 9" descr="convolution.png"/>
+          <p:cNvPr id="17" name="Picture 16" descr="convolution.png"/>
           <p:cNvPicPr>
             <a:picLocks noChangeAspect="1"/>
           </p:cNvPicPr>
@@ -40779,8 +40743,8 @@
         </p:blipFill>
         <p:spPr>
           <a:xfrm>
-            <a:off x="1413066" y="2377440"/>
-            <a:ext cx="9243946" cy="3703320"/>
+            <a:off x="6720840" y="2194560"/>
+            <a:ext cx="4617720" cy="1849956"/>
           </a:xfrm>
           <a:prstGeom prst="rect">
             <a:avLst/>
@@ -40789,14 +40753,14 @@
       </p:pic>
       <p:sp>
         <p:nvSpPr>
-          <p:cNvPr id="11" name="TextBox 10"/>
-          <p:cNvSpPr txBox="1"/>
-          <p:nvPr/>
-        </p:nvSpPr>
-        <p:spPr>
-          <a:xfrm>
-            <a:off x="548640" y="6309360"/>
-            <a:ext cx="10972800" cy="228600"/>
+          <p:cNvPr id="18" name="TextBox 17"/>
+          <p:cNvSpPr txBox="1"/>
+          <p:nvPr/>
+        </p:nvSpPr>
+        <p:spPr>
+          <a:xfrm>
+            <a:off x="548640" y="5989320"/>
+            <a:ext cx="10972800" cy="256032"/>
           </a:xfrm>
           <a:prstGeom prst="rect">
             <a:avLst/>
@@ -40819,14 +40783,14 @@
                 <a:ea typeface="DIN Next LT W23"/>
                 <a:cs typeface="DIN Next LT W23"/>
               </a:rPr>
-              <a:t>Classical Sobel filters are fixed. CNNs learn task-specific filters from data.</a:t>
-            </a:r>
-          </a:p>
-        </p:txBody>
-      </p:sp>
-      <p:sp>
-        <p:nvSpPr>
-          <p:cNvPr id="12" name="Rectangle 11"/>
+              <a:t>Augmentation (crop, flip, color jitter) teaches invariance the loss never states explicitly.</a:t>
+            </a:r>
+          </a:p>
+        </p:txBody>
+      </p:sp>
+      <p:sp>
+        <p:nvSpPr>
+          <p:cNvPr id="19" name="Rectangle 18"/>
           <p:cNvSpPr/>
           <p:nvPr/>
         </p:nvSpPr>
@@ -40870,7 +40834,7 @@
       </p:sp>
       <p:sp>
         <p:nvSpPr>
-          <p:cNvPr id="13" name="TextBox 12"/>
+          <p:cNvPr id="20" name="TextBox 19"/>
           <p:cNvSpPr txBox="1"/>
           <p:nvPr/>
         </p:nvSpPr>
@@ -40907,7 +40871,7 @@
       </p:sp>
       <p:sp>
         <p:nvSpPr>
-          <p:cNvPr id="14" name="TextBox 13"/>
+          <p:cNvPr id="21" name="TextBox 20"/>
           <p:cNvSpPr txBox="1"/>
           <p:nvPr/>
         </p:nvSpPr>
@@ -40937,7 +40901,7 @@
                 <a:ea typeface="DIN Next LT W23"/>
                 <a:cs typeface="DIN Next LT W23"/>
               </a:rPr>
-              <a:t>62  /  76</a:t>
+              <a:t>62  /  77</a:t>
             </a:r>
           </a:p>
         </p:txBody>
@@ -40951,6 +40915,517 @@
 </file>
 
 <file path=ppt/slides/slide63.xml><?xml version="1.0" encoding="utf-8"?>
+<p:sld xmlns:a="http://schemas.openxmlformats.org/drawingml/2006/main" xmlns:p="http://schemas.openxmlformats.org/presentationml/2006/main" xmlns:r="http://schemas.openxmlformats.org/officeDocument/2006/relationships">
+  <p:cSld>
+    <p:bg>
+      <p:bgPr>
+        <a:solidFill>
+          <a:srgbClr val="FAF8FF"/>
+        </a:solidFill>
+        <a:effectLst/>
+      </p:bgPr>
+    </p:bg>
+    <p:spTree>
+      <p:nvGrpSpPr>
+        <p:cNvPr id="1" name=""/>
+        <p:cNvGrpSpPr/>
+        <p:nvPr/>
+      </p:nvGrpSpPr>
+      <p:grpSpPr/>
+      <p:sp>
+        <p:nvSpPr>
+          <p:cNvPr id="2" name="Rectangle 1"/>
+          <p:cNvSpPr/>
+          <p:nvPr/>
+        </p:nvSpPr>
+        <p:spPr>
+          <a:xfrm>
+            <a:off x="12136831" y="0"/>
+            <a:ext cx="54864" cy="6858000"/>
+          </a:xfrm>
+          <a:prstGeom prst="rect">
+            <a:avLst/>
+          </a:prstGeom>
+          <a:solidFill>
+            <a:srgbClr val="5234B7"/>
+          </a:solidFill>
+          <a:ln>
+            <a:noFill/>
+          </a:ln>
+          <a:effectLst/>
+        </p:spPr>
+        <p:style>
+          <a:lnRef idx="1">
+            <a:schemeClr val="accent1"/>
+          </a:lnRef>
+          <a:fillRef idx="3">
+            <a:schemeClr val="accent1"/>
+          </a:fillRef>
+          <a:effectRef idx="2">
+            <a:schemeClr val="accent1"/>
+          </a:effectRef>
+          <a:fontRef idx="minor">
+            <a:schemeClr val="lt1"/>
+          </a:fontRef>
+        </p:style>
+        <p:txBody>
+          <a:bodyPr rtlCol="0" anchor="ctr"/>
+          <a:lstStyle/>
+          <a:p>
+            <a:pPr algn="ctr"/>
+          </a:p>
+        </p:txBody>
+      </p:sp>
+      <p:pic>
+        <p:nvPicPr>
+          <p:cNvPr id="3" name="Picture 2" descr="etra-wordmark.png"/>
+          <p:cNvPicPr>
+            <a:picLocks noChangeAspect="1"/>
+          </p:cNvPicPr>
+          <p:nvPr/>
+        </p:nvPicPr>
+        <p:blipFill>
+          <a:blip r:embed="rId2"/>
+          <a:stretch>
+            <a:fillRect/>
+          </a:stretch>
+        </p:blipFill>
+        <p:spPr>
+          <a:xfrm>
+            <a:off x="10561320" y="411480"/>
+            <a:ext cx="1206201" cy="320040"/>
+          </a:xfrm>
+          <a:prstGeom prst="rect">
+            <a:avLst/>
+          </a:prstGeom>
+        </p:spPr>
+      </p:pic>
+      <p:sp>
+        <p:nvSpPr>
+          <p:cNvPr id="4" name="TextBox 3"/>
+          <p:cNvSpPr txBox="1"/>
+          <p:nvPr/>
+        </p:nvSpPr>
+        <p:spPr>
+          <a:xfrm>
+            <a:off x="548640" y="438912"/>
+            <a:ext cx="7772400" cy="274320"/>
+          </a:xfrm>
+          <a:prstGeom prst="rect">
+            <a:avLst/>
+          </a:prstGeom>
+          <a:noFill/>
+        </p:spPr>
+        <p:txBody>
+          <a:bodyPr wrap="square" anchor="t">
+            <a:spAutoFit/>
+          </a:bodyPr>
+          <a:lstStyle/>
+          <a:p>
+            <a:pPr algn="l"/>
+            <a:r>
+              <a:rPr sz="1200" b="0">
+                <a:solidFill>
+                  <a:srgbClr val="5A5470"/>
+                </a:solidFill>
+                <a:latin typeface="DIN Next LT W23"/>
+                <a:ea typeface="DIN Next LT W23"/>
+                <a:cs typeface="DIN Next LT W23"/>
+              </a:rPr>
+              <a:t>S07  ·  Deep Learning</a:t>
+            </a:r>
+          </a:p>
+        </p:txBody>
+      </p:sp>
+      <p:sp>
+        <p:nvSpPr>
+          <p:cNvPr id="5" name="Rectangle 4"/>
+          <p:cNvSpPr/>
+          <p:nvPr/>
+        </p:nvSpPr>
+        <p:spPr>
+          <a:xfrm>
+            <a:off x="548640" y="822960"/>
+            <a:ext cx="11064240" cy="10972"/>
+          </a:xfrm>
+          <a:prstGeom prst="rect">
+            <a:avLst/>
+          </a:prstGeom>
+          <a:solidFill>
+            <a:srgbClr val="E4DCF4"/>
+          </a:solidFill>
+          <a:ln>
+            <a:noFill/>
+          </a:ln>
+          <a:effectLst/>
+        </p:spPr>
+        <p:style>
+          <a:lnRef idx="1">
+            <a:schemeClr val="accent1"/>
+          </a:lnRef>
+          <a:fillRef idx="3">
+            <a:schemeClr val="accent1"/>
+          </a:fillRef>
+          <a:effectRef idx="2">
+            <a:schemeClr val="accent1"/>
+          </a:effectRef>
+          <a:fontRef idx="minor">
+            <a:schemeClr val="lt1"/>
+          </a:fontRef>
+        </p:style>
+        <p:txBody>
+          <a:bodyPr rtlCol="0" anchor="ctr"/>
+          <a:lstStyle/>
+          <a:p>
+            <a:pPr algn="ctr"/>
+          </a:p>
+        </p:txBody>
+      </p:sp>
+      <p:sp>
+        <p:nvSpPr>
+          <p:cNvPr id="6" name="TextBox 5"/>
+          <p:cNvSpPr txBox="1"/>
+          <p:nvPr/>
+        </p:nvSpPr>
+        <p:spPr>
+          <a:xfrm>
+            <a:off x="548640" y="1051560"/>
+            <a:ext cx="10241280" cy="594360"/>
+          </a:xfrm>
+          <a:prstGeom prst="rect">
+            <a:avLst/>
+          </a:prstGeom>
+          <a:noFill/>
+        </p:spPr>
+        <p:txBody>
+          <a:bodyPr wrap="square" anchor="t">
+            <a:spAutoFit/>
+          </a:bodyPr>
+          <a:lstStyle/>
+          <a:p>
+            <a:pPr algn="l"/>
+            <a:r>
+              <a:rPr sz="3200" b="1">
+                <a:solidFill>
+                  <a:srgbClr val="5234B7"/>
+                </a:solidFill>
+                <a:latin typeface="DIN Next LT W23"/>
+                <a:ea typeface="DIN Next LT W23"/>
+                <a:cs typeface="DIN Next LT W23"/>
+              </a:rPr>
+              <a:t>Convolution: Kernels and Feature Maps</a:t>
+            </a:r>
+          </a:p>
+        </p:txBody>
+      </p:sp>
+      <p:sp>
+        <p:nvSpPr>
+          <p:cNvPr id="7" name="TextBox 6"/>
+          <p:cNvSpPr txBox="1"/>
+          <p:nvPr/>
+        </p:nvSpPr>
+        <p:spPr>
+          <a:xfrm>
+            <a:off x="548640" y="1600200"/>
+            <a:ext cx="10241280" cy="365760"/>
+          </a:xfrm>
+          <a:prstGeom prst="rect">
+            <a:avLst/>
+          </a:prstGeom>
+          <a:noFill/>
+        </p:spPr>
+        <p:txBody>
+          <a:bodyPr wrap="square" anchor="t">
+            <a:spAutoFit/>
+          </a:bodyPr>
+          <a:lstStyle/>
+          <a:p>
+            <a:pPr algn="l"/>
+            <a:r>
+              <a:rPr sz="1500" b="0">
+                <a:solidFill>
+                  <a:srgbClr val="5A5470"/>
+                </a:solidFill>
+                <a:latin typeface="DIN Next LT W23"/>
+                <a:ea typeface="DIN Next LT W23"/>
+                <a:cs typeface="DIN Next LT W23"/>
+              </a:rPr>
+              <a:t>Sliding Linear Filters + Nonlinearity</a:t>
+            </a:r>
+          </a:p>
+        </p:txBody>
+      </p:sp>
+      <p:sp>
+        <p:nvSpPr>
+          <p:cNvPr id="8" name="TextBox 7"/>
+          <p:cNvSpPr txBox="1"/>
+          <p:nvPr/>
+        </p:nvSpPr>
+        <p:spPr>
+          <a:xfrm>
+            <a:off x="548640" y="1920240"/>
+            <a:ext cx="10972800" cy="320040"/>
+          </a:xfrm>
+          <a:prstGeom prst="rect">
+            <a:avLst/>
+          </a:prstGeom>
+          <a:noFill/>
+        </p:spPr>
+        <p:txBody>
+          <a:bodyPr wrap="square" anchor="t">
+            <a:spAutoFit/>
+          </a:bodyPr>
+          <a:lstStyle/>
+          <a:p>
+            <a:pPr algn="l"/>
+            <a:r>
+              <a:rPr sz="1300" b="0">
+                <a:solidFill>
+                  <a:srgbClr val="5A5470"/>
+                </a:solidFill>
+                <a:latin typeface="DIN Next LT W23"/>
+                <a:ea typeface="DIN Next LT W23"/>
+                <a:cs typeface="DIN Next LT W23"/>
+              </a:rPr>
+              <a:t>A kernel is a small learnable matrix (often 3×3). Multiple kernels produce a stack of feature maps.</a:t>
+            </a:r>
+          </a:p>
+        </p:txBody>
+      </p:sp>
+      <p:sp>
+        <p:nvSpPr>
+          <p:cNvPr id="9" name="Rounded Rectangle 8"/>
+          <p:cNvSpPr/>
+          <p:nvPr/>
+        </p:nvSpPr>
+        <p:spPr>
+          <a:xfrm>
+            <a:off x="548640" y="2240280"/>
+            <a:ext cx="10972800" cy="3977639"/>
+          </a:xfrm>
+          <a:prstGeom prst="roundRect">
+            <a:avLst>
+              <a:gd name="adj" fmla="val 10000"/>
+            </a:avLst>
+          </a:prstGeom>
+          <a:solidFill>
+            <a:srgbClr val="EEE8FA"/>
+          </a:solidFill>
+          <a:ln>
+            <a:noFill/>
+          </a:ln>
+          <a:effectLst/>
+        </p:spPr>
+        <p:style>
+          <a:lnRef idx="1">
+            <a:schemeClr val="accent1"/>
+          </a:lnRef>
+          <a:fillRef idx="3">
+            <a:schemeClr val="accent1"/>
+          </a:fillRef>
+          <a:effectRef idx="2">
+            <a:schemeClr val="accent1"/>
+          </a:effectRef>
+          <a:fontRef idx="minor">
+            <a:schemeClr val="lt1"/>
+          </a:fontRef>
+        </p:style>
+        <p:txBody>
+          <a:bodyPr rtlCol="0" anchor="ctr"/>
+          <a:lstStyle/>
+          <a:p>
+            <a:pPr algn="ctr"/>
+          </a:p>
+        </p:txBody>
+      </p:sp>
+      <p:pic>
+        <p:nvPicPr>
+          <p:cNvPr id="10" name="Picture 9" descr="convolution.png"/>
+          <p:cNvPicPr>
+            <a:picLocks noChangeAspect="1"/>
+          </p:cNvPicPr>
+          <p:nvPr/>
+        </p:nvPicPr>
+        <p:blipFill>
+          <a:blip r:embed="rId3"/>
+          <a:stretch>
+            <a:fillRect/>
+          </a:stretch>
+        </p:blipFill>
+        <p:spPr>
+          <a:xfrm>
+            <a:off x="1413066" y="2377440"/>
+            <a:ext cx="9243946" cy="3703320"/>
+          </a:xfrm>
+          <a:prstGeom prst="rect">
+            <a:avLst/>
+          </a:prstGeom>
+        </p:spPr>
+      </p:pic>
+      <p:sp>
+        <p:nvSpPr>
+          <p:cNvPr id="11" name="TextBox 10"/>
+          <p:cNvSpPr txBox="1"/>
+          <p:nvPr/>
+        </p:nvSpPr>
+        <p:spPr>
+          <a:xfrm>
+            <a:off x="548640" y="6309360"/>
+            <a:ext cx="10972800" cy="228600"/>
+          </a:xfrm>
+          <a:prstGeom prst="rect">
+            <a:avLst/>
+          </a:prstGeom>
+          <a:noFill/>
+        </p:spPr>
+        <p:txBody>
+          <a:bodyPr wrap="square" anchor="t">
+            <a:spAutoFit/>
+          </a:bodyPr>
+          <a:lstStyle/>
+          <a:p>
+            <a:pPr algn="l"/>
+            <a:r>
+              <a:rPr sz="1100" b="0">
+                <a:solidFill>
+                  <a:srgbClr val="5A5470"/>
+                </a:solidFill>
+                <a:latin typeface="DIN Next LT W23"/>
+                <a:ea typeface="DIN Next LT W23"/>
+                <a:cs typeface="DIN Next LT W23"/>
+              </a:rPr>
+              <a:t>Classical Sobel filters are fixed. CNNs learn task-specific filters from data.</a:t>
+            </a:r>
+          </a:p>
+        </p:txBody>
+      </p:sp>
+      <p:sp>
+        <p:nvSpPr>
+          <p:cNvPr id="12" name="Rectangle 11"/>
+          <p:cNvSpPr/>
+          <p:nvPr/>
+        </p:nvSpPr>
+        <p:spPr>
+          <a:xfrm>
+            <a:off x="548640" y="6446520"/>
+            <a:ext cx="11064240" cy="10972"/>
+          </a:xfrm>
+          <a:prstGeom prst="rect">
+            <a:avLst/>
+          </a:prstGeom>
+          <a:solidFill>
+            <a:srgbClr val="5234B7"/>
+          </a:solidFill>
+          <a:ln>
+            <a:noFill/>
+          </a:ln>
+          <a:effectLst/>
+        </p:spPr>
+        <p:style>
+          <a:lnRef idx="1">
+            <a:schemeClr val="accent1"/>
+          </a:lnRef>
+          <a:fillRef idx="3">
+            <a:schemeClr val="accent1"/>
+          </a:fillRef>
+          <a:effectRef idx="2">
+            <a:schemeClr val="accent1"/>
+          </a:effectRef>
+          <a:fontRef idx="minor">
+            <a:schemeClr val="lt1"/>
+          </a:fontRef>
+        </p:style>
+        <p:txBody>
+          <a:bodyPr rtlCol="0" anchor="ctr"/>
+          <a:lstStyle/>
+          <a:p>
+            <a:pPr algn="ctr"/>
+          </a:p>
+        </p:txBody>
+      </p:sp>
+      <p:sp>
+        <p:nvSpPr>
+          <p:cNvPr id="13" name="TextBox 12"/>
+          <p:cNvSpPr txBox="1"/>
+          <p:nvPr/>
+        </p:nvSpPr>
+        <p:spPr>
+          <a:xfrm>
+            <a:off x="548640" y="6510528"/>
+            <a:ext cx="2743200" cy="256032"/>
+          </a:xfrm>
+          <a:prstGeom prst="rect">
+            <a:avLst/>
+          </a:prstGeom>
+          <a:noFill/>
+        </p:spPr>
+        <p:txBody>
+          <a:bodyPr wrap="square" anchor="t">
+            <a:spAutoFit/>
+          </a:bodyPr>
+          <a:lstStyle/>
+          <a:p>
+            <a:pPr algn="l"/>
+            <a:r>
+              <a:rPr sz="1100" b="1">
+                <a:solidFill>
+                  <a:srgbClr val="5234B7"/>
+                </a:solidFill>
+                <a:latin typeface="DIN Next LT W23"/>
+                <a:ea typeface="DIN Next LT W23"/>
+                <a:cs typeface="DIN Next LT W23"/>
+              </a:rPr>
+              <a:t>ETRA</a:t>
+            </a:r>
+          </a:p>
+        </p:txBody>
+      </p:sp>
+      <p:sp>
+        <p:nvSpPr>
+          <p:cNvPr id="14" name="TextBox 13"/>
+          <p:cNvSpPr txBox="1"/>
+          <p:nvPr/>
+        </p:nvSpPr>
+        <p:spPr>
+          <a:xfrm>
+            <a:off x="9601200" y="6510528"/>
+            <a:ext cx="2011680" cy="256032"/>
+          </a:xfrm>
+          <a:prstGeom prst="rect">
+            <a:avLst/>
+          </a:prstGeom>
+          <a:noFill/>
+        </p:spPr>
+        <p:txBody>
+          <a:bodyPr wrap="square" anchor="t">
+            <a:spAutoFit/>
+          </a:bodyPr>
+          <a:lstStyle/>
+          <a:p>
+            <a:pPr algn="r"/>
+            <a:r>
+              <a:rPr sz="1100" b="0">
+                <a:solidFill>
+                  <a:srgbClr val="5A5470"/>
+                </a:solidFill>
+                <a:latin typeface="DIN Next LT W23"/>
+                <a:ea typeface="DIN Next LT W23"/>
+                <a:cs typeface="DIN Next LT W23"/>
+              </a:rPr>
+              <a:t>63  /  77</a:t>
+            </a:r>
+          </a:p>
+        </p:txBody>
+      </p:sp>
+    </p:spTree>
+  </p:cSld>
+  <p:clrMapOvr>
+    <a:masterClrMapping/>
+  </p:clrMapOvr>
+</p:sld>
+</file>
+
+<file path=ppt/slides/slide64.xml><?xml version="1.0" encoding="utf-8"?>
 <p:sld xmlns:a="http://schemas.openxmlformats.org/drawingml/2006/main" xmlns:p="http://schemas.openxmlformats.org/presentationml/2006/main" xmlns:r="http://schemas.openxmlformats.org/officeDocument/2006/relationships">
   <p:cSld>
     <p:bg>
@@ -41653,518 +42128,7 @@
                 <a:ea typeface="DIN Next LT W23"/>
                 <a:cs typeface="DIN Next LT W23"/>
               </a:rPr>
-              <a:t>63  /  76</a:t>
-            </a:r>
-          </a:p>
-        </p:txBody>
-      </p:sp>
-    </p:spTree>
-  </p:cSld>
-  <p:clrMapOvr>
-    <a:masterClrMapping/>
-  </p:clrMapOvr>
-</p:sld>
-</file>
-
-<file path=ppt/slides/slide64.xml><?xml version="1.0" encoding="utf-8"?>
-<p:sld xmlns:a="http://schemas.openxmlformats.org/drawingml/2006/main" xmlns:p="http://schemas.openxmlformats.org/presentationml/2006/main" xmlns:r="http://schemas.openxmlformats.org/officeDocument/2006/relationships">
-  <p:cSld>
-    <p:bg>
-      <p:bgPr>
-        <a:solidFill>
-          <a:srgbClr val="FAF8FF"/>
-        </a:solidFill>
-        <a:effectLst/>
-      </p:bgPr>
-    </p:bg>
-    <p:spTree>
-      <p:nvGrpSpPr>
-        <p:cNvPr id="1" name=""/>
-        <p:cNvGrpSpPr/>
-        <p:nvPr/>
-      </p:nvGrpSpPr>
-      <p:grpSpPr/>
-      <p:sp>
-        <p:nvSpPr>
-          <p:cNvPr id="2" name="Rectangle 1"/>
-          <p:cNvSpPr/>
-          <p:nvPr/>
-        </p:nvSpPr>
-        <p:spPr>
-          <a:xfrm>
-            <a:off x="12136831" y="0"/>
-            <a:ext cx="54864" cy="6858000"/>
-          </a:xfrm>
-          <a:prstGeom prst="rect">
-            <a:avLst/>
-          </a:prstGeom>
-          <a:solidFill>
-            <a:srgbClr val="5234B7"/>
-          </a:solidFill>
-          <a:ln>
-            <a:noFill/>
-          </a:ln>
-          <a:effectLst/>
-        </p:spPr>
-        <p:style>
-          <a:lnRef idx="1">
-            <a:schemeClr val="accent1"/>
-          </a:lnRef>
-          <a:fillRef idx="3">
-            <a:schemeClr val="accent1"/>
-          </a:fillRef>
-          <a:effectRef idx="2">
-            <a:schemeClr val="accent1"/>
-          </a:effectRef>
-          <a:fontRef idx="minor">
-            <a:schemeClr val="lt1"/>
-          </a:fontRef>
-        </p:style>
-        <p:txBody>
-          <a:bodyPr rtlCol="0" anchor="ctr"/>
-          <a:lstStyle/>
-          <a:p>
-            <a:pPr algn="ctr"/>
-          </a:p>
-        </p:txBody>
-      </p:sp>
-      <p:pic>
-        <p:nvPicPr>
-          <p:cNvPr id="3" name="Picture 2" descr="etra-wordmark.png"/>
-          <p:cNvPicPr>
-            <a:picLocks noChangeAspect="1"/>
-          </p:cNvPicPr>
-          <p:nvPr/>
-        </p:nvPicPr>
-        <p:blipFill>
-          <a:blip r:embed="rId2"/>
-          <a:stretch>
-            <a:fillRect/>
-          </a:stretch>
-        </p:blipFill>
-        <p:spPr>
-          <a:xfrm>
-            <a:off x="10561320" y="411480"/>
-            <a:ext cx="1206201" cy="320040"/>
-          </a:xfrm>
-          <a:prstGeom prst="rect">
-            <a:avLst/>
-          </a:prstGeom>
-        </p:spPr>
-      </p:pic>
-      <p:sp>
-        <p:nvSpPr>
-          <p:cNvPr id="4" name="TextBox 3"/>
-          <p:cNvSpPr txBox="1"/>
-          <p:nvPr/>
-        </p:nvSpPr>
-        <p:spPr>
-          <a:xfrm>
-            <a:off x="548640" y="438912"/>
-            <a:ext cx="7772400" cy="274320"/>
-          </a:xfrm>
-          <a:prstGeom prst="rect">
-            <a:avLst/>
-          </a:prstGeom>
-          <a:noFill/>
-        </p:spPr>
-        <p:txBody>
-          <a:bodyPr wrap="square" anchor="t">
-            <a:spAutoFit/>
-          </a:bodyPr>
-          <a:lstStyle/>
-          <a:p>
-            <a:pPr algn="l"/>
-            <a:r>
-              <a:rPr sz="1200" b="0">
-                <a:solidFill>
-                  <a:srgbClr val="5A5470"/>
-                </a:solidFill>
-                <a:latin typeface="DIN Next LT W23"/>
-                <a:ea typeface="DIN Next LT W23"/>
-                <a:cs typeface="DIN Next LT W23"/>
-              </a:rPr>
-              <a:t>S07  ·  Deep Learning</a:t>
-            </a:r>
-          </a:p>
-        </p:txBody>
-      </p:sp>
-      <p:sp>
-        <p:nvSpPr>
-          <p:cNvPr id="5" name="Rectangle 4"/>
-          <p:cNvSpPr/>
-          <p:nvPr/>
-        </p:nvSpPr>
-        <p:spPr>
-          <a:xfrm>
-            <a:off x="548640" y="822960"/>
-            <a:ext cx="11064240" cy="10972"/>
-          </a:xfrm>
-          <a:prstGeom prst="rect">
-            <a:avLst/>
-          </a:prstGeom>
-          <a:solidFill>
-            <a:srgbClr val="E4DCF4"/>
-          </a:solidFill>
-          <a:ln>
-            <a:noFill/>
-          </a:ln>
-          <a:effectLst/>
-        </p:spPr>
-        <p:style>
-          <a:lnRef idx="1">
-            <a:schemeClr val="accent1"/>
-          </a:lnRef>
-          <a:fillRef idx="3">
-            <a:schemeClr val="accent1"/>
-          </a:fillRef>
-          <a:effectRef idx="2">
-            <a:schemeClr val="accent1"/>
-          </a:effectRef>
-          <a:fontRef idx="minor">
-            <a:schemeClr val="lt1"/>
-          </a:fontRef>
-        </p:style>
-        <p:txBody>
-          <a:bodyPr rtlCol="0" anchor="ctr"/>
-          <a:lstStyle/>
-          <a:p>
-            <a:pPr algn="ctr"/>
-          </a:p>
-        </p:txBody>
-      </p:sp>
-      <p:sp>
-        <p:nvSpPr>
-          <p:cNvPr id="6" name="TextBox 5"/>
-          <p:cNvSpPr txBox="1"/>
-          <p:nvPr/>
-        </p:nvSpPr>
-        <p:spPr>
-          <a:xfrm>
-            <a:off x="548640" y="1051560"/>
-            <a:ext cx="10241280" cy="594360"/>
-          </a:xfrm>
-          <a:prstGeom prst="rect">
-            <a:avLst/>
-          </a:prstGeom>
-          <a:noFill/>
-        </p:spPr>
-        <p:txBody>
-          <a:bodyPr wrap="square" anchor="t">
-            <a:spAutoFit/>
-          </a:bodyPr>
-          <a:lstStyle/>
-          <a:p>
-            <a:pPr algn="l"/>
-            <a:r>
-              <a:rPr sz="3200" b="1">
-                <a:solidFill>
-                  <a:srgbClr val="5234B7"/>
-                </a:solidFill>
-                <a:latin typeface="DIN Next LT W23"/>
-                <a:ea typeface="DIN Next LT W23"/>
-                <a:cs typeface="DIN Next LT W23"/>
-              </a:rPr>
-              <a:t>CNN Blocks: Conv–Pool to ResNet</a:t>
-            </a:r>
-          </a:p>
-        </p:txBody>
-      </p:sp>
-      <p:sp>
-        <p:nvSpPr>
-          <p:cNvPr id="7" name="TextBox 6"/>
-          <p:cNvSpPr txBox="1"/>
-          <p:nvPr/>
-        </p:nvSpPr>
-        <p:spPr>
-          <a:xfrm>
-            <a:off x="548640" y="1600200"/>
-            <a:ext cx="10241280" cy="365760"/>
-          </a:xfrm>
-          <a:prstGeom prst="rect">
-            <a:avLst/>
-          </a:prstGeom>
-          <a:noFill/>
-        </p:spPr>
-        <p:txBody>
-          <a:bodyPr wrap="square" anchor="t">
-            <a:spAutoFit/>
-          </a:bodyPr>
-          <a:lstStyle/>
-          <a:p>
-            <a:pPr algn="l"/>
-            <a:r>
-              <a:rPr sz="1500" b="0">
-                <a:solidFill>
-                  <a:srgbClr val="5A5470"/>
-                </a:solidFill>
-                <a:latin typeface="DIN Next LT W23"/>
-                <a:ea typeface="DIN Next LT W23"/>
-                <a:cs typeface="DIN Next LT W23"/>
-              </a:rPr>
-              <a:t>Depth, Downsampling, Residual Learning</a:t>
-            </a:r>
-          </a:p>
-        </p:txBody>
-      </p:sp>
-      <p:sp>
-        <p:nvSpPr>
-          <p:cNvPr id="8" name="TextBox 7"/>
-          <p:cNvSpPr txBox="1"/>
-          <p:nvPr/>
-        </p:nvSpPr>
-        <p:spPr>
-          <a:xfrm>
-            <a:off x="548640" y="1920240"/>
-            <a:ext cx="10972800" cy="320040"/>
-          </a:xfrm>
-          <a:prstGeom prst="rect">
-            <a:avLst/>
-          </a:prstGeom>
-          <a:noFill/>
-        </p:spPr>
-        <p:txBody>
-          <a:bodyPr wrap="square" anchor="t">
-            <a:spAutoFit/>
-          </a:bodyPr>
-          <a:lstStyle/>
-          <a:p>
-            <a:pPr algn="l"/>
-            <a:r>
-              <a:rPr sz="1300" b="0">
-                <a:solidFill>
-                  <a:srgbClr val="5A5470"/>
-                </a:solidFill>
-                <a:latin typeface="DIN Next LT W23"/>
-                <a:ea typeface="DIN Next LT W23"/>
-                <a:cs typeface="DIN Next LT W23"/>
-              </a:rPr>
-              <a:t>A standard CNN alternates convolution, ReLU, and pooling, then a fully connected head.</a:t>
-            </a:r>
-          </a:p>
-        </p:txBody>
-      </p:sp>
-      <p:sp>
-        <p:nvSpPr>
-          <p:cNvPr id="9" name="Rounded Rectangle 8"/>
-          <p:cNvSpPr/>
-          <p:nvPr/>
-        </p:nvSpPr>
-        <p:spPr>
-          <a:xfrm>
-            <a:off x="548640" y="2240280"/>
-            <a:ext cx="10972800" cy="3977639"/>
-          </a:xfrm>
-          <a:prstGeom prst="roundRect">
-            <a:avLst>
-              <a:gd name="adj" fmla="val 10000"/>
-            </a:avLst>
-          </a:prstGeom>
-          <a:solidFill>
-            <a:srgbClr val="EEE8FA"/>
-          </a:solidFill>
-          <a:ln>
-            <a:noFill/>
-          </a:ln>
-          <a:effectLst/>
-        </p:spPr>
-        <p:style>
-          <a:lnRef idx="1">
-            <a:schemeClr val="accent1"/>
-          </a:lnRef>
-          <a:fillRef idx="3">
-            <a:schemeClr val="accent1"/>
-          </a:fillRef>
-          <a:effectRef idx="2">
-            <a:schemeClr val="accent1"/>
-          </a:effectRef>
-          <a:fontRef idx="minor">
-            <a:schemeClr val="lt1"/>
-          </a:fontRef>
-        </p:style>
-        <p:txBody>
-          <a:bodyPr rtlCol="0" anchor="ctr"/>
-          <a:lstStyle/>
-          <a:p>
-            <a:pPr algn="ctr"/>
-          </a:p>
-        </p:txBody>
-      </p:sp>
-      <p:pic>
-        <p:nvPicPr>
-          <p:cNvPr id="10" name="Picture 9" descr="cnn-stack.png"/>
-          <p:cNvPicPr>
-            <a:picLocks noChangeAspect="1"/>
-          </p:cNvPicPr>
-          <p:nvPr/>
-        </p:nvPicPr>
-        <p:blipFill>
-          <a:blip r:embed="rId3"/>
-          <a:stretch>
-            <a:fillRect/>
-          </a:stretch>
-        </p:blipFill>
-        <p:spPr>
-          <a:xfrm>
-            <a:off x="731520" y="2377440"/>
-            <a:ext cx="10607040" cy="3639993"/>
-          </a:xfrm>
-          <a:prstGeom prst="rect">
-            <a:avLst/>
-          </a:prstGeom>
-        </p:spPr>
-      </p:pic>
-      <p:sp>
-        <p:nvSpPr>
-          <p:cNvPr id="11" name="TextBox 10"/>
-          <p:cNvSpPr txBox="1"/>
-          <p:nvPr/>
-        </p:nvSpPr>
-        <p:spPr>
-          <a:xfrm>
-            <a:off x="548640" y="6309360"/>
-            <a:ext cx="10972800" cy="228600"/>
-          </a:xfrm>
-          <a:prstGeom prst="rect">
-            <a:avLst/>
-          </a:prstGeom>
-          <a:noFill/>
-        </p:spPr>
-        <p:txBody>
-          <a:bodyPr wrap="square" anchor="t">
-            <a:spAutoFit/>
-          </a:bodyPr>
-          <a:lstStyle/>
-          <a:p>
-            <a:pPr algn="l"/>
-            <a:r>
-              <a:rPr sz="1100" b="0">
-                <a:solidFill>
-                  <a:srgbClr val="5A5470"/>
-                </a:solidFill>
-                <a:latin typeface="DIN Next LT W23"/>
-                <a:ea typeface="DIN Next LT W23"/>
-                <a:cs typeface="DIN Next LT W23"/>
-              </a:rPr>
-              <a:t>Max-pool keeps the strongest local response and shrinks the map.</a:t>
-            </a:r>
-          </a:p>
-        </p:txBody>
-      </p:sp>
-      <p:sp>
-        <p:nvSpPr>
-          <p:cNvPr id="12" name="Rectangle 11"/>
-          <p:cNvSpPr/>
-          <p:nvPr/>
-        </p:nvSpPr>
-        <p:spPr>
-          <a:xfrm>
-            <a:off x="548640" y="6446520"/>
-            <a:ext cx="11064240" cy="10972"/>
-          </a:xfrm>
-          <a:prstGeom prst="rect">
-            <a:avLst/>
-          </a:prstGeom>
-          <a:solidFill>
-            <a:srgbClr val="5234B7"/>
-          </a:solidFill>
-          <a:ln>
-            <a:noFill/>
-          </a:ln>
-          <a:effectLst/>
-        </p:spPr>
-        <p:style>
-          <a:lnRef idx="1">
-            <a:schemeClr val="accent1"/>
-          </a:lnRef>
-          <a:fillRef idx="3">
-            <a:schemeClr val="accent1"/>
-          </a:fillRef>
-          <a:effectRef idx="2">
-            <a:schemeClr val="accent1"/>
-          </a:effectRef>
-          <a:fontRef idx="minor">
-            <a:schemeClr val="lt1"/>
-          </a:fontRef>
-        </p:style>
-        <p:txBody>
-          <a:bodyPr rtlCol="0" anchor="ctr"/>
-          <a:lstStyle/>
-          <a:p>
-            <a:pPr algn="ctr"/>
-          </a:p>
-        </p:txBody>
-      </p:sp>
-      <p:sp>
-        <p:nvSpPr>
-          <p:cNvPr id="13" name="TextBox 12"/>
-          <p:cNvSpPr txBox="1"/>
-          <p:nvPr/>
-        </p:nvSpPr>
-        <p:spPr>
-          <a:xfrm>
-            <a:off x="548640" y="6510528"/>
-            <a:ext cx="2743200" cy="256032"/>
-          </a:xfrm>
-          <a:prstGeom prst="rect">
-            <a:avLst/>
-          </a:prstGeom>
-          <a:noFill/>
-        </p:spPr>
-        <p:txBody>
-          <a:bodyPr wrap="square" anchor="t">
-            <a:spAutoFit/>
-          </a:bodyPr>
-          <a:lstStyle/>
-          <a:p>
-            <a:pPr algn="l"/>
-            <a:r>
-              <a:rPr sz="1100" b="1">
-                <a:solidFill>
-                  <a:srgbClr val="5234B7"/>
-                </a:solidFill>
-                <a:latin typeface="DIN Next LT W23"/>
-                <a:ea typeface="DIN Next LT W23"/>
-                <a:cs typeface="DIN Next LT W23"/>
-              </a:rPr>
-              <a:t>ETRA</a:t>
-            </a:r>
-          </a:p>
-        </p:txBody>
-      </p:sp>
-      <p:sp>
-        <p:nvSpPr>
-          <p:cNvPr id="14" name="TextBox 13"/>
-          <p:cNvSpPr txBox="1"/>
-          <p:nvPr/>
-        </p:nvSpPr>
-        <p:spPr>
-          <a:xfrm>
-            <a:off x="9601200" y="6510528"/>
-            <a:ext cx="2011680" cy="256032"/>
-          </a:xfrm>
-          <a:prstGeom prst="rect">
-            <a:avLst/>
-          </a:prstGeom>
-          <a:noFill/>
-        </p:spPr>
-        <p:txBody>
-          <a:bodyPr wrap="square" anchor="t">
-            <a:spAutoFit/>
-          </a:bodyPr>
-          <a:lstStyle/>
-          <a:p>
-            <a:pPr algn="r"/>
-            <a:r>
-              <a:rPr sz="1100" b="0">
-                <a:solidFill>
-                  <a:srgbClr val="5A5470"/>
-                </a:solidFill>
-                <a:latin typeface="DIN Next LT W23"/>
-                <a:ea typeface="DIN Next LT W23"/>
-                <a:cs typeface="DIN Next LT W23"/>
-              </a:rPr>
-              <a:t>64  /  76</a:t>
+              <a:t>64  /  77</a:t>
             </a:r>
           </a:p>
         </p:txBody>
@@ -42376,7 +42340,7 @@
                 <a:ea typeface="DIN Next LT W23"/>
                 <a:cs typeface="DIN Next LT W23"/>
               </a:rPr>
-              <a:t>Residual Block</a:t>
+              <a:t>CNN Blocks: Conv–Pool to ResNet</a:t>
             </a:r>
           </a:p>
         </p:txBody>
@@ -42413,21 +42377,58 @@
                 <a:ea typeface="DIN Next LT W23"/>
                 <a:cs typeface="DIN Next LT W23"/>
               </a:rPr>
-              <a:t>Learn F(x), Keep an Identity Path</a:t>
-            </a:r>
-          </a:p>
-        </p:txBody>
-      </p:sp>
-      <p:sp>
-        <p:nvSpPr>
-          <p:cNvPr id="8" name="Rounded Rectangle 7"/>
+              <a:t>Depth, Downsampling, Residual Learning</a:t>
+            </a:r>
+          </a:p>
+        </p:txBody>
+      </p:sp>
+      <p:sp>
+        <p:nvSpPr>
+          <p:cNvPr id="8" name="TextBox 7"/>
+          <p:cNvSpPr txBox="1"/>
+          <p:nvPr/>
+        </p:nvSpPr>
+        <p:spPr>
+          <a:xfrm>
+            <a:off x="548640" y="1920240"/>
+            <a:ext cx="10972800" cy="320040"/>
+          </a:xfrm>
+          <a:prstGeom prst="rect">
+            <a:avLst/>
+          </a:prstGeom>
+          <a:noFill/>
+        </p:spPr>
+        <p:txBody>
+          <a:bodyPr wrap="square" anchor="t">
+            <a:spAutoFit/>
+          </a:bodyPr>
+          <a:lstStyle/>
+          <a:p>
+            <a:pPr algn="l"/>
+            <a:r>
+              <a:rPr sz="1300" b="0">
+                <a:solidFill>
+                  <a:srgbClr val="5A5470"/>
+                </a:solidFill>
+                <a:latin typeface="DIN Next LT W23"/>
+                <a:ea typeface="DIN Next LT W23"/>
+                <a:cs typeface="DIN Next LT W23"/>
+              </a:rPr>
+              <a:t>A standard CNN alternates convolution, ReLU, and pooling, then a fully connected head.</a:t>
+            </a:r>
+          </a:p>
+        </p:txBody>
+      </p:sp>
+      <p:sp>
+        <p:nvSpPr>
+          <p:cNvPr id="9" name="Rounded Rectangle 8"/>
           <p:cNvSpPr/>
           <p:nvPr/>
         </p:nvSpPr>
         <p:spPr>
           <a:xfrm>
-            <a:off x="548640" y="1965960"/>
-            <a:ext cx="10972800" cy="640080"/>
+            <a:off x="548640" y="2240280"/>
+            <a:ext cx="10972800" cy="3977639"/>
           </a:xfrm>
           <a:prstGeom prst="roundRect">
             <a:avLst>
@@ -42464,92 +42465,9 @@
           </a:p>
         </p:txBody>
       </p:sp>
-      <p:sp>
-        <p:nvSpPr>
-          <p:cNvPr id="9" name="TextBox 8"/>
-          <p:cNvSpPr txBox="1"/>
-          <p:nvPr/>
-        </p:nvSpPr>
-        <p:spPr>
-          <a:xfrm>
-            <a:off x="868680" y="2084831"/>
-            <a:ext cx="10332720" cy="411480"/>
-          </a:xfrm>
-          <a:prstGeom prst="rect">
-            <a:avLst/>
-          </a:prstGeom>
-          <a:noFill/>
-        </p:spPr>
-        <p:txBody>
-          <a:bodyPr wrap="square" anchor="t">
-            <a:spAutoFit/>
-          </a:bodyPr>
-          <a:lstStyle/>
-          <a:p>
-            <a:pPr algn="l"/>
-            <a:r>
-              <a:rPr sz="1400" b="0">
-                <a:solidFill>
-                  <a:srgbClr val="121018"/>
-                </a:solidFill>
-                <a:latin typeface="DIN Next LT W23"/>
-                <a:ea typeface="DIN Next LT W23"/>
-                <a:cs typeface="DIN Next LT W23"/>
-              </a:rPr>
-              <a:t>Skip connections let gradients flow backward through identity — this is how 100+ layer nets train.</a:t>
-            </a:r>
-          </a:p>
-        </p:txBody>
-      </p:sp>
-      <p:sp>
-        <p:nvSpPr>
-          <p:cNvPr id="10" name="Rounded Rectangle 9"/>
-          <p:cNvSpPr/>
-          <p:nvPr/>
-        </p:nvSpPr>
-        <p:spPr>
-          <a:xfrm>
-            <a:off x="548640" y="2743200"/>
-            <a:ext cx="10972800" cy="1417320"/>
-          </a:xfrm>
-          <a:prstGeom prst="roundRect">
-            <a:avLst>
-              <a:gd name="adj" fmla="val 10000"/>
-            </a:avLst>
-          </a:prstGeom>
-          <a:solidFill>
-            <a:srgbClr val="EEE8FA"/>
-          </a:solidFill>
-          <a:ln>
-            <a:noFill/>
-          </a:ln>
-          <a:effectLst/>
-        </p:spPr>
-        <p:style>
-          <a:lnRef idx="1">
-            <a:schemeClr val="accent1"/>
-          </a:lnRef>
-          <a:fillRef idx="3">
-            <a:schemeClr val="accent1"/>
-          </a:fillRef>
-          <a:effectRef idx="2">
-            <a:schemeClr val="accent1"/>
-          </a:effectRef>
-          <a:fontRef idx="minor">
-            <a:schemeClr val="lt1"/>
-          </a:fontRef>
-        </p:style>
-        <p:txBody>
-          <a:bodyPr rtlCol="0" anchor="ctr"/>
-          <a:lstStyle/>
-          <a:p>
-            <a:pPr algn="ctr"/>
-          </a:p>
-        </p:txBody>
-      </p:sp>
       <p:pic>
         <p:nvPicPr>
-          <p:cNvPr id="11" name="Picture 10" descr="f-2b076bcbaf5e0bf9.png"/>
+          <p:cNvPr id="10" name="Picture 9" descr="cnn-stack.png"/>
           <p:cNvPicPr>
             <a:picLocks noChangeAspect="1"/>
           </p:cNvPicPr>
@@ -42563,8 +42481,8 @@
         </p:blipFill>
         <p:spPr>
           <a:xfrm>
-            <a:off x="4440086" y="2852928"/>
-            <a:ext cx="3189906" cy="868679"/>
+            <a:off x="731520" y="2377440"/>
+            <a:ext cx="10607040" cy="3639993"/>
           </a:xfrm>
           <a:prstGeom prst="rect">
             <a:avLst/>
@@ -42573,29 +42491,29 @@
       </p:pic>
       <p:sp>
         <p:nvSpPr>
-          <p:cNvPr id="12" name="TextBox 11"/>
-          <p:cNvSpPr txBox="1"/>
-          <p:nvPr/>
-        </p:nvSpPr>
-        <p:spPr>
-          <a:xfrm>
-            <a:off x="914400" y="3840480"/>
-            <a:ext cx="10241280" cy="256032"/>
-          </a:xfrm>
-          <a:prstGeom prst="rect">
-            <a:avLst/>
-          </a:prstGeom>
-          <a:noFill/>
-        </p:spPr>
-        <p:txBody>
-          <a:bodyPr wrap="square" anchor="t">
-            <a:spAutoFit/>
-          </a:bodyPr>
-          <a:lstStyle/>
-          <a:p>
-            <a:pPr algn="ctr"/>
-            <a:r>
-              <a:rPr sz="1200" b="0">
+          <p:cNvPr id="11" name="TextBox 10"/>
+          <p:cNvSpPr txBox="1"/>
+          <p:nvPr/>
+        </p:nvSpPr>
+        <p:spPr>
+          <a:xfrm>
+            <a:off x="548640" y="6309360"/>
+            <a:ext cx="10972800" cy="228600"/>
+          </a:xfrm>
+          <a:prstGeom prst="rect">
+            <a:avLst/>
+          </a:prstGeom>
+          <a:noFill/>
+        </p:spPr>
+        <p:txBody>
+          <a:bodyPr wrap="square" anchor="t">
+            <a:spAutoFit/>
+          </a:bodyPr>
+          <a:lstStyle/>
+          <a:p>
+            <a:pPr algn="l"/>
+            <a:r>
+              <a:rPr sz="1100" b="0">
                 <a:solidFill>
                   <a:srgbClr val="5A5470"/>
                 </a:solidFill>
@@ -42603,199 +42521,14 @@
                 <a:ea typeface="DIN Next LT W23"/>
                 <a:cs typeface="DIN Next LT W23"/>
               </a:rPr>
-              <a:t>The block learns the residual F; x is copied forward</a:t>
-            </a:r>
-          </a:p>
-        </p:txBody>
-      </p:sp>
-      <p:sp>
-        <p:nvSpPr>
-          <p:cNvPr id="13" name="TextBox 12"/>
-          <p:cNvSpPr txBox="1"/>
-          <p:nvPr/>
-        </p:nvSpPr>
-        <p:spPr>
-          <a:xfrm>
-            <a:off x="548640" y="4270248"/>
-            <a:ext cx="320040" cy="384048"/>
-          </a:xfrm>
-          <a:prstGeom prst="rect">
-            <a:avLst/>
-          </a:prstGeom>
-          <a:noFill/>
-        </p:spPr>
-        <p:txBody>
-          <a:bodyPr wrap="square" anchor="t">
-            <a:spAutoFit/>
-          </a:bodyPr>
-          <a:lstStyle/>
-          <a:p>
-            <a:pPr algn="l"/>
-            <a:r>
-              <a:rPr sz="1300" b="0">
-                <a:solidFill>
-                  <a:srgbClr val="9E59CD"/>
-                </a:solidFill>
-                <a:latin typeface="DIN Next LT W23"/>
-                <a:ea typeface="DIN Next LT W23"/>
-                <a:cs typeface="DIN Next LT W23"/>
-              </a:rPr>
-              <a:t>–</a:t>
-            </a:r>
-          </a:p>
-        </p:txBody>
-      </p:sp>
-      <p:sp>
-        <p:nvSpPr>
-          <p:cNvPr id="14" name="TextBox 13"/>
-          <p:cNvSpPr txBox="1"/>
-          <p:nvPr/>
-        </p:nvSpPr>
-        <p:spPr>
-          <a:xfrm>
-            <a:off x="914400" y="4270248"/>
-            <a:ext cx="9875519" cy="384048"/>
-          </a:xfrm>
-          <a:prstGeom prst="rect">
-            <a:avLst/>
-          </a:prstGeom>
-          <a:noFill/>
-        </p:spPr>
-        <p:txBody>
-          <a:bodyPr wrap="square" anchor="t">
-            <a:spAutoFit/>
-          </a:bodyPr>
-          <a:lstStyle/>
-          <a:p>
-            <a:pPr algn="l"/>
-            <a:r>
-              <a:rPr sz="1300" b="0">
-                <a:solidFill>
-                  <a:srgbClr val="121018"/>
-                </a:solidFill>
-                <a:latin typeface="DIN Next LT W23"/>
-                <a:ea typeface="DIN Next LT W23"/>
-                <a:cs typeface="DIN Next LT W23"/>
-              </a:rPr>
-              <a:t>AlexNet (2012): scale + ReLU + dropout + GPUs on ImageNet.</a:t>
-            </a:r>
-          </a:p>
-        </p:txBody>
-      </p:sp>
-      <p:sp>
-        <p:nvSpPr>
-          <p:cNvPr id="15" name="TextBox 14"/>
-          <p:cNvSpPr txBox="1"/>
-          <p:nvPr/>
-        </p:nvSpPr>
-        <p:spPr>
-          <a:xfrm>
-            <a:off x="548640" y="4690872"/>
-            <a:ext cx="320040" cy="384048"/>
-          </a:xfrm>
-          <a:prstGeom prst="rect">
-            <a:avLst/>
-          </a:prstGeom>
-          <a:noFill/>
-        </p:spPr>
-        <p:txBody>
-          <a:bodyPr wrap="square" anchor="t">
-            <a:spAutoFit/>
-          </a:bodyPr>
-          <a:lstStyle/>
-          <a:p>
-            <a:pPr algn="l"/>
-            <a:r>
-              <a:rPr sz="1300" b="0">
-                <a:solidFill>
-                  <a:srgbClr val="9E59CD"/>
-                </a:solidFill>
-                <a:latin typeface="DIN Next LT W23"/>
-                <a:ea typeface="DIN Next LT W23"/>
-                <a:cs typeface="DIN Next LT W23"/>
-              </a:rPr>
-              <a:t>–</a:t>
-            </a:r>
-          </a:p>
-        </p:txBody>
-      </p:sp>
-      <p:sp>
-        <p:nvSpPr>
-          <p:cNvPr id="16" name="TextBox 15"/>
-          <p:cNvSpPr txBox="1"/>
-          <p:nvPr/>
-        </p:nvSpPr>
-        <p:spPr>
-          <a:xfrm>
-            <a:off x="914400" y="4690872"/>
-            <a:ext cx="9875519" cy="384048"/>
-          </a:xfrm>
-          <a:prstGeom prst="rect">
-            <a:avLst/>
-          </a:prstGeom>
-          <a:noFill/>
-        </p:spPr>
-        <p:txBody>
-          <a:bodyPr wrap="square" anchor="t">
-            <a:spAutoFit/>
-          </a:bodyPr>
-          <a:lstStyle/>
-          <a:p>
-            <a:pPr algn="l"/>
-            <a:r>
-              <a:rPr sz="1300" b="0">
-                <a:solidFill>
-                  <a:srgbClr val="121018"/>
-                </a:solidFill>
-                <a:latin typeface="DIN Next LT W23"/>
-                <a:ea typeface="DIN Next LT W23"/>
-                <a:cs typeface="DIN Next LT W23"/>
-              </a:rPr>
-              <a:t>ResNet (2015): residual mapping F(x)+x; skip paths help gradients.</a:t>
-            </a:r>
-          </a:p>
-        </p:txBody>
-      </p:sp>
-      <p:sp>
-        <p:nvSpPr>
-          <p:cNvPr id="17" name="TextBox 16"/>
-          <p:cNvSpPr txBox="1"/>
-          <p:nvPr/>
-        </p:nvSpPr>
-        <p:spPr>
-          <a:xfrm>
-            <a:off x="548640" y="5989320"/>
-            <a:ext cx="10972800" cy="228600"/>
-          </a:xfrm>
-          <a:prstGeom prst="rect">
-            <a:avLst/>
-          </a:prstGeom>
-          <a:noFill/>
-        </p:spPr>
-        <p:txBody>
-          <a:bodyPr wrap="square" anchor="t">
-            <a:spAutoFit/>
-          </a:bodyPr>
-          <a:lstStyle/>
-          <a:p>
-            <a:pPr algn="l"/>
-            <a:r>
-              <a:rPr sz="1200" b="0">
-                <a:solidFill>
-                  <a:srgbClr val="5A5470"/>
-                </a:solidFill>
-                <a:latin typeface="DIN Next LT W23"/>
-                <a:ea typeface="DIN Next LT W23"/>
-                <a:cs typeface="DIN Next LT W23"/>
-              </a:rPr>
-              <a:t>If F learns zero, the block still acts as identity — easier than learning identity from scratch.</a:t>
-            </a:r>
-          </a:p>
-        </p:txBody>
-      </p:sp>
-      <p:sp>
-        <p:nvSpPr>
-          <p:cNvPr id="18" name="Rectangle 17"/>
+              <a:t>Max-pool keeps the strongest local response and shrinks the map.</a:t>
+            </a:r>
+          </a:p>
+        </p:txBody>
+      </p:sp>
+      <p:sp>
+        <p:nvSpPr>
+          <p:cNvPr id="12" name="Rectangle 11"/>
           <p:cNvSpPr/>
           <p:nvPr/>
         </p:nvSpPr>
@@ -42839,7 +42572,7 @@
       </p:sp>
       <p:sp>
         <p:nvSpPr>
-          <p:cNvPr id="19" name="TextBox 18"/>
+          <p:cNvPr id="13" name="TextBox 12"/>
           <p:cNvSpPr txBox="1"/>
           <p:nvPr/>
         </p:nvSpPr>
@@ -42876,7 +42609,7 @@
       </p:sp>
       <p:sp>
         <p:nvSpPr>
-          <p:cNvPr id="20" name="TextBox 19"/>
+          <p:cNvPr id="14" name="TextBox 13"/>
           <p:cNvSpPr txBox="1"/>
           <p:nvPr/>
         </p:nvSpPr>
@@ -42906,7 +42639,7 @@
                 <a:ea typeface="DIN Next LT W23"/>
                 <a:cs typeface="DIN Next LT W23"/>
               </a:rPr>
-              <a:t>65  /  76</a:t>
+              <a:t>65  /  77</a:t>
             </a:r>
           </a:p>
         </p:txBody>
@@ -43118,7 +42851,7 @@
                 <a:ea typeface="DIN Next LT W23"/>
                 <a:cs typeface="DIN Next LT W23"/>
               </a:rPr>
-              <a:t>Residual Path</a:t>
+              <a:t>Residual Block</a:t>
             </a:r>
           </a:p>
         </p:txBody>
@@ -43155,7 +42888,7 @@
                 <a:ea typeface="DIN Next LT W23"/>
                 <a:cs typeface="DIN Next LT W23"/>
               </a:rPr>
-              <a:t>Shortcut Around the Convolutions</a:t>
+              <a:t>Learn F(x), Keep an Identity Path</a:t>
             </a:r>
           </a:p>
         </p:txBody>
@@ -43169,7 +42902,7 @@
         <p:spPr>
           <a:xfrm>
             <a:off x="548640" y="1965960"/>
-            <a:ext cx="10972800" cy="3977639"/>
+            <a:ext cx="10972800" cy="640080"/>
           </a:xfrm>
           <a:prstGeom prst="roundRect">
             <a:avLst>
@@ -43206,9 +42939,92 @@
           </a:p>
         </p:txBody>
       </p:sp>
+      <p:sp>
+        <p:nvSpPr>
+          <p:cNvPr id="9" name="TextBox 8"/>
+          <p:cNvSpPr txBox="1"/>
+          <p:nvPr/>
+        </p:nvSpPr>
+        <p:spPr>
+          <a:xfrm>
+            <a:off x="868680" y="2084831"/>
+            <a:ext cx="10332720" cy="411480"/>
+          </a:xfrm>
+          <a:prstGeom prst="rect">
+            <a:avLst/>
+          </a:prstGeom>
+          <a:noFill/>
+        </p:spPr>
+        <p:txBody>
+          <a:bodyPr wrap="square" anchor="t">
+            <a:spAutoFit/>
+          </a:bodyPr>
+          <a:lstStyle/>
+          <a:p>
+            <a:pPr algn="l"/>
+            <a:r>
+              <a:rPr sz="1400" b="0">
+                <a:solidFill>
+                  <a:srgbClr val="121018"/>
+                </a:solidFill>
+                <a:latin typeface="DIN Next LT W23"/>
+                <a:ea typeface="DIN Next LT W23"/>
+                <a:cs typeface="DIN Next LT W23"/>
+              </a:rPr>
+              <a:t>Skip connections let gradients flow backward through identity — this is how 100+ layer nets train.</a:t>
+            </a:r>
+          </a:p>
+        </p:txBody>
+      </p:sp>
+      <p:sp>
+        <p:nvSpPr>
+          <p:cNvPr id="10" name="Rounded Rectangle 9"/>
+          <p:cNvSpPr/>
+          <p:nvPr/>
+        </p:nvSpPr>
+        <p:spPr>
+          <a:xfrm>
+            <a:off x="548640" y="2743200"/>
+            <a:ext cx="10972800" cy="1417320"/>
+          </a:xfrm>
+          <a:prstGeom prst="roundRect">
+            <a:avLst>
+              <a:gd name="adj" fmla="val 10000"/>
+            </a:avLst>
+          </a:prstGeom>
+          <a:solidFill>
+            <a:srgbClr val="EEE8FA"/>
+          </a:solidFill>
+          <a:ln>
+            <a:noFill/>
+          </a:ln>
+          <a:effectLst/>
+        </p:spPr>
+        <p:style>
+          <a:lnRef idx="1">
+            <a:schemeClr val="accent1"/>
+          </a:lnRef>
+          <a:fillRef idx="3">
+            <a:schemeClr val="accent1"/>
+          </a:fillRef>
+          <a:effectRef idx="2">
+            <a:schemeClr val="accent1"/>
+          </a:effectRef>
+          <a:fontRef idx="minor">
+            <a:schemeClr val="lt1"/>
+          </a:fontRef>
+        </p:style>
+        <p:txBody>
+          <a:bodyPr rtlCol="0" anchor="ctr"/>
+          <a:lstStyle/>
+          <a:p>
+            <a:pPr algn="ctr"/>
+          </a:p>
+        </p:txBody>
+      </p:sp>
       <p:pic>
         <p:nvPicPr>
-          <p:cNvPr id="9" name="Picture 8" descr="residual-block.png"/>
+          <p:cNvPr id="11" name="Picture 10" descr="f-2b076bcbaf5e0bf9.png"/>
           <p:cNvPicPr>
             <a:picLocks noChangeAspect="1"/>
           </p:cNvPicPr>
@@ -43222,8 +43038,8 @@
         </p:blipFill>
         <p:spPr>
           <a:xfrm>
-            <a:off x="917147" y="2103120"/>
-            <a:ext cx="10235785" cy="3703320"/>
+            <a:off x="4440086" y="2852928"/>
+            <a:ext cx="3189906" cy="868679"/>
           </a:xfrm>
           <a:prstGeom prst="rect">
             <a:avLst/>
@@ -43232,13 +43048,198 @@
       </p:pic>
       <p:sp>
         <p:nvSpPr>
-          <p:cNvPr id="10" name="TextBox 9"/>
-          <p:cNvSpPr txBox="1"/>
-          <p:nvPr/>
-        </p:nvSpPr>
-        <p:spPr>
-          <a:xfrm>
-            <a:off x="548640" y="6309360"/>
+          <p:cNvPr id="12" name="TextBox 11"/>
+          <p:cNvSpPr txBox="1"/>
+          <p:nvPr/>
+        </p:nvSpPr>
+        <p:spPr>
+          <a:xfrm>
+            <a:off x="914400" y="3840480"/>
+            <a:ext cx="10241280" cy="256032"/>
+          </a:xfrm>
+          <a:prstGeom prst="rect">
+            <a:avLst/>
+          </a:prstGeom>
+          <a:noFill/>
+        </p:spPr>
+        <p:txBody>
+          <a:bodyPr wrap="square" anchor="t">
+            <a:spAutoFit/>
+          </a:bodyPr>
+          <a:lstStyle/>
+          <a:p>
+            <a:pPr algn="ctr"/>
+            <a:r>
+              <a:rPr sz="1200" b="0">
+                <a:solidFill>
+                  <a:srgbClr val="5A5470"/>
+                </a:solidFill>
+                <a:latin typeface="DIN Next LT W23"/>
+                <a:ea typeface="DIN Next LT W23"/>
+                <a:cs typeface="DIN Next LT W23"/>
+              </a:rPr>
+              <a:t>The block learns the residual F; x is copied forward</a:t>
+            </a:r>
+          </a:p>
+        </p:txBody>
+      </p:sp>
+      <p:sp>
+        <p:nvSpPr>
+          <p:cNvPr id="13" name="TextBox 12"/>
+          <p:cNvSpPr txBox="1"/>
+          <p:nvPr/>
+        </p:nvSpPr>
+        <p:spPr>
+          <a:xfrm>
+            <a:off x="548640" y="4270248"/>
+            <a:ext cx="320040" cy="384048"/>
+          </a:xfrm>
+          <a:prstGeom prst="rect">
+            <a:avLst/>
+          </a:prstGeom>
+          <a:noFill/>
+        </p:spPr>
+        <p:txBody>
+          <a:bodyPr wrap="square" anchor="t">
+            <a:spAutoFit/>
+          </a:bodyPr>
+          <a:lstStyle/>
+          <a:p>
+            <a:pPr algn="l"/>
+            <a:r>
+              <a:rPr sz="1300" b="0">
+                <a:solidFill>
+                  <a:srgbClr val="9E59CD"/>
+                </a:solidFill>
+                <a:latin typeface="DIN Next LT W23"/>
+                <a:ea typeface="DIN Next LT W23"/>
+                <a:cs typeface="DIN Next LT W23"/>
+              </a:rPr>
+              <a:t>–</a:t>
+            </a:r>
+          </a:p>
+        </p:txBody>
+      </p:sp>
+      <p:sp>
+        <p:nvSpPr>
+          <p:cNvPr id="14" name="TextBox 13"/>
+          <p:cNvSpPr txBox="1"/>
+          <p:nvPr/>
+        </p:nvSpPr>
+        <p:spPr>
+          <a:xfrm>
+            <a:off x="914400" y="4270248"/>
+            <a:ext cx="9875519" cy="384048"/>
+          </a:xfrm>
+          <a:prstGeom prst="rect">
+            <a:avLst/>
+          </a:prstGeom>
+          <a:noFill/>
+        </p:spPr>
+        <p:txBody>
+          <a:bodyPr wrap="square" anchor="t">
+            <a:spAutoFit/>
+          </a:bodyPr>
+          <a:lstStyle/>
+          <a:p>
+            <a:pPr algn="l"/>
+            <a:r>
+              <a:rPr sz="1300" b="0">
+                <a:solidFill>
+                  <a:srgbClr val="121018"/>
+                </a:solidFill>
+                <a:latin typeface="DIN Next LT W23"/>
+                <a:ea typeface="DIN Next LT W23"/>
+                <a:cs typeface="DIN Next LT W23"/>
+              </a:rPr>
+              <a:t>AlexNet (2012): scale + ReLU + dropout + GPUs on ImageNet.</a:t>
+            </a:r>
+          </a:p>
+        </p:txBody>
+      </p:sp>
+      <p:sp>
+        <p:nvSpPr>
+          <p:cNvPr id="15" name="TextBox 14"/>
+          <p:cNvSpPr txBox="1"/>
+          <p:nvPr/>
+        </p:nvSpPr>
+        <p:spPr>
+          <a:xfrm>
+            <a:off x="548640" y="4690872"/>
+            <a:ext cx="320040" cy="384048"/>
+          </a:xfrm>
+          <a:prstGeom prst="rect">
+            <a:avLst/>
+          </a:prstGeom>
+          <a:noFill/>
+        </p:spPr>
+        <p:txBody>
+          <a:bodyPr wrap="square" anchor="t">
+            <a:spAutoFit/>
+          </a:bodyPr>
+          <a:lstStyle/>
+          <a:p>
+            <a:pPr algn="l"/>
+            <a:r>
+              <a:rPr sz="1300" b="0">
+                <a:solidFill>
+                  <a:srgbClr val="9E59CD"/>
+                </a:solidFill>
+                <a:latin typeface="DIN Next LT W23"/>
+                <a:ea typeface="DIN Next LT W23"/>
+                <a:cs typeface="DIN Next LT W23"/>
+              </a:rPr>
+              <a:t>–</a:t>
+            </a:r>
+          </a:p>
+        </p:txBody>
+      </p:sp>
+      <p:sp>
+        <p:nvSpPr>
+          <p:cNvPr id="16" name="TextBox 15"/>
+          <p:cNvSpPr txBox="1"/>
+          <p:nvPr/>
+        </p:nvSpPr>
+        <p:spPr>
+          <a:xfrm>
+            <a:off x="914400" y="4690872"/>
+            <a:ext cx="9875519" cy="384048"/>
+          </a:xfrm>
+          <a:prstGeom prst="rect">
+            <a:avLst/>
+          </a:prstGeom>
+          <a:noFill/>
+        </p:spPr>
+        <p:txBody>
+          <a:bodyPr wrap="square" anchor="t">
+            <a:spAutoFit/>
+          </a:bodyPr>
+          <a:lstStyle/>
+          <a:p>
+            <a:pPr algn="l"/>
+            <a:r>
+              <a:rPr sz="1300" b="0">
+                <a:solidFill>
+                  <a:srgbClr val="121018"/>
+                </a:solidFill>
+                <a:latin typeface="DIN Next LT W23"/>
+                <a:ea typeface="DIN Next LT W23"/>
+                <a:cs typeface="DIN Next LT W23"/>
+              </a:rPr>
+              <a:t>ResNet (2015): residual mapping F(x)+x; skip paths help gradients.</a:t>
+            </a:r>
+          </a:p>
+        </p:txBody>
+      </p:sp>
+      <p:sp>
+        <p:nvSpPr>
+          <p:cNvPr id="17" name="TextBox 16"/>
+          <p:cNvSpPr txBox="1"/>
+          <p:nvPr/>
+        </p:nvSpPr>
+        <p:spPr>
+          <a:xfrm>
+            <a:off x="548640" y="5989320"/>
             <a:ext cx="10972800" cy="228600"/>
           </a:xfrm>
           <a:prstGeom prst="rect">
@@ -43254,7 +43255,7 @@
           <a:p>
             <a:pPr algn="l"/>
             <a:r>
-              <a:rPr sz="1100" b="0">
+              <a:rPr sz="1200" b="0">
                 <a:solidFill>
                   <a:srgbClr val="5A5470"/>
                 </a:solidFill>
@@ -43262,14 +43263,14 @@
                 <a:ea typeface="DIN Next LT W23"/>
                 <a:cs typeface="DIN Next LT W23"/>
               </a:rPr>
-              <a:t>The add node is why early layers still receive a usable gradient.</a:t>
-            </a:r>
-          </a:p>
-        </p:txBody>
-      </p:sp>
-      <p:sp>
-        <p:nvSpPr>
-          <p:cNvPr id="11" name="Rectangle 10"/>
+              <a:t>If F learns zero, the block still acts as identity — easier than learning identity from scratch.</a:t>
+            </a:r>
+          </a:p>
+        </p:txBody>
+      </p:sp>
+      <p:sp>
+        <p:nvSpPr>
+          <p:cNvPr id="18" name="Rectangle 17"/>
           <p:cNvSpPr/>
           <p:nvPr/>
         </p:nvSpPr>
@@ -43313,7 +43314,7 @@
       </p:sp>
       <p:sp>
         <p:nvSpPr>
-          <p:cNvPr id="12" name="TextBox 11"/>
+          <p:cNvPr id="19" name="TextBox 18"/>
           <p:cNvSpPr txBox="1"/>
           <p:nvPr/>
         </p:nvSpPr>
@@ -43350,7 +43351,7 @@
       </p:sp>
       <p:sp>
         <p:nvSpPr>
-          <p:cNvPr id="13" name="TextBox 12"/>
+          <p:cNvPr id="20" name="TextBox 19"/>
           <p:cNvSpPr txBox="1"/>
           <p:nvPr/>
         </p:nvSpPr>
@@ -43380,7 +43381,7 @@
                 <a:ea typeface="DIN Next LT W23"/>
                 <a:cs typeface="DIN Next LT W23"/>
               </a:rPr>
-              <a:t>66  /  76</a:t>
+              <a:t>66  /  77</a:t>
             </a:r>
           </a:p>
         </p:txBody>
@@ -43592,7 +43593,7 @@
                 <a:ea typeface="DIN Next LT W23"/>
                 <a:cs typeface="DIN Next LT W23"/>
               </a:rPr>
-              <a:t>Transfer Learning with Pretrained Models</a:t>
+              <a:t>Residual Path</a:t>
             </a:r>
           </a:p>
         </p:txBody>
@@ -43629,57 +43630,20 @@
                 <a:ea typeface="DIN Next LT W23"/>
                 <a:cs typeface="DIN Next LT W23"/>
               </a:rPr>
-              <a:t>Reuse Features, Adapt the Head</a:t>
-            </a:r>
-          </a:p>
-        </p:txBody>
-      </p:sp>
-      <p:sp>
-        <p:nvSpPr>
-          <p:cNvPr id="8" name="TextBox 7"/>
-          <p:cNvSpPr txBox="1"/>
-          <p:nvPr/>
-        </p:nvSpPr>
-        <p:spPr>
-          <a:xfrm>
-            <a:off x="548640" y="1920240"/>
-            <a:ext cx="10972800" cy="320040"/>
-          </a:xfrm>
-          <a:prstGeom prst="rect">
-            <a:avLst/>
-          </a:prstGeom>
-          <a:noFill/>
-        </p:spPr>
-        <p:txBody>
-          <a:bodyPr wrap="square" anchor="t">
-            <a:spAutoFit/>
-          </a:bodyPr>
-          <a:lstStyle/>
-          <a:p>
-            <a:pPr algn="l"/>
-            <a:r>
-              <a:rPr sz="1300" b="0">
-                <a:solidFill>
-                  <a:srgbClr val="5A5470"/>
-                </a:solidFill>
-                <a:latin typeface="DIN Next LT W23"/>
-                <a:ea typeface="DIN Next LT W23"/>
-                <a:cs typeface="DIN Next LT W23"/>
-              </a:rPr>
-              <a:t>Pretraining on ImageNet learns general filters you can reuse on a smaller target task.</a:t>
-            </a:r>
-          </a:p>
-        </p:txBody>
-      </p:sp>
-      <p:sp>
-        <p:nvSpPr>
-          <p:cNvPr id="9" name="Rounded Rectangle 8"/>
+              <a:t>Shortcut Around the Convolutions</a:t>
+            </a:r>
+          </a:p>
+        </p:txBody>
+      </p:sp>
+      <p:sp>
+        <p:nvSpPr>
+          <p:cNvPr id="8" name="Rounded Rectangle 7"/>
           <p:cNvSpPr/>
           <p:nvPr/>
         </p:nvSpPr>
         <p:spPr>
           <a:xfrm>
-            <a:off x="548640" y="2240280"/>
+            <a:off x="548640" y="1965960"/>
             <a:ext cx="10972800" cy="3977639"/>
           </a:xfrm>
           <a:prstGeom prst="roundRect">
@@ -43719,7 +43683,7 @@
       </p:sp>
       <p:pic>
         <p:nvPicPr>
-          <p:cNvPr id="10" name="Picture 9" descr="transfer-learning.png"/>
+          <p:cNvPr id="9" name="Picture 8" descr="residual-block.png"/>
           <p:cNvPicPr>
             <a:picLocks noChangeAspect="1"/>
           </p:cNvPicPr>
@@ -43733,7 +43697,7 @@
         </p:blipFill>
         <p:spPr>
           <a:xfrm>
-            <a:off x="917147" y="2377440"/>
+            <a:off x="917147" y="2103120"/>
             <a:ext cx="10235785" cy="3703320"/>
           </a:xfrm>
           <a:prstGeom prst="rect">
@@ -43743,7 +43707,7 @@
       </p:pic>
       <p:sp>
         <p:nvSpPr>
-          <p:cNvPr id="11" name="TextBox 10"/>
+          <p:cNvPr id="10" name="TextBox 9"/>
           <p:cNvSpPr txBox="1"/>
           <p:nvPr/>
         </p:nvSpPr>
@@ -43773,14 +43737,14 @@
                 <a:ea typeface="DIN Next LT W23"/>
                 <a:cs typeface="DIN Next LT W23"/>
               </a:rPr>
-              <a:t>Freeze the backbone when data is scarce; fine-tune top blocks when you have more labels.</a:t>
-            </a:r>
-          </a:p>
-        </p:txBody>
-      </p:sp>
-      <p:sp>
-        <p:nvSpPr>
-          <p:cNvPr id="12" name="Rectangle 11"/>
+              <a:t>The add node is why early layers still receive a usable gradient.</a:t>
+            </a:r>
+          </a:p>
+        </p:txBody>
+      </p:sp>
+      <p:sp>
+        <p:nvSpPr>
+          <p:cNvPr id="11" name="Rectangle 10"/>
           <p:cNvSpPr/>
           <p:nvPr/>
         </p:nvSpPr>
@@ -43824,7 +43788,7 @@
       </p:sp>
       <p:sp>
         <p:nvSpPr>
-          <p:cNvPr id="13" name="TextBox 12"/>
+          <p:cNvPr id="12" name="TextBox 11"/>
           <p:cNvSpPr txBox="1"/>
           <p:nvPr/>
         </p:nvSpPr>
@@ -43861,7 +43825,7 @@
       </p:sp>
       <p:sp>
         <p:nvSpPr>
-          <p:cNvPr id="14" name="TextBox 13"/>
+          <p:cNvPr id="13" name="TextBox 12"/>
           <p:cNvSpPr txBox="1"/>
           <p:nvPr/>
         </p:nvSpPr>
@@ -43891,7 +43855,7 @@
                 <a:ea typeface="DIN Next LT W23"/>
                 <a:cs typeface="DIN Next LT W23"/>
               </a:rPr>
-              <a:t>67  /  76</a:t>
+              <a:t>67  /  77</a:t>
             </a:r>
           </a:p>
         </p:txBody>
@@ -43905,6 +43869,517 @@
 </file>
 
 <file path=ppt/slides/slide68.xml><?xml version="1.0" encoding="utf-8"?>
+<p:sld xmlns:a="http://schemas.openxmlformats.org/drawingml/2006/main" xmlns:p="http://schemas.openxmlformats.org/presentationml/2006/main" xmlns:r="http://schemas.openxmlformats.org/officeDocument/2006/relationships">
+  <p:cSld>
+    <p:bg>
+      <p:bgPr>
+        <a:solidFill>
+          <a:srgbClr val="FAF8FF"/>
+        </a:solidFill>
+        <a:effectLst/>
+      </p:bgPr>
+    </p:bg>
+    <p:spTree>
+      <p:nvGrpSpPr>
+        <p:cNvPr id="1" name=""/>
+        <p:cNvGrpSpPr/>
+        <p:nvPr/>
+      </p:nvGrpSpPr>
+      <p:grpSpPr/>
+      <p:sp>
+        <p:nvSpPr>
+          <p:cNvPr id="2" name="Rectangle 1"/>
+          <p:cNvSpPr/>
+          <p:nvPr/>
+        </p:nvSpPr>
+        <p:spPr>
+          <a:xfrm>
+            <a:off x="12136831" y="0"/>
+            <a:ext cx="54864" cy="6858000"/>
+          </a:xfrm>
+          <a:prstGeom prst="rect">
+            <a:avLst/>
+          </a:prstGeom>
+          <a:solidFill>
+            <a:srgbClr val="5234B7"/>
+          </a:solidFill>
+          <a:ln>
+            <a:noFill/>
+          </a:ln>
+          <a:effectLst/>
+        </p:spPr>
+        <p:style>
+          <a:lnRef idx="1">
+            <a:schemeClr val="accent1"/>
+          </a:lnRef>
+          <a:fillRef idx="3">
+            <a:schemeClr val="accent1"/>
+          </a:fillRef>
+          <a:effectRef idx="2">
+            <a:schemeClr val="accent1"/>
+          </a:effectRef>
+          <a:fontRef idx="minor">
+            <a:schemeClr val="lt1"/>
+          </a:fontRef>
+        </p:style>
+        <p:txBody>
+          <a:bodyPr rtlCol="0" anchor="ctr"/>
+          <a:lstStyle/>
+          <a:p>
+            <a:pPr algn="ctr"/>
+          </a:p>
+        </p:txBody>
+      </p:sp>
+      <p:pic>
+        <p:nvPicPr>
+          <p:cNvPr id="3" name="Picture 2" descr="etra-wordmark.png"/>
+          <p:cNvPicPr>
+            <a:picLocks noChangeAspect="1"/>
+          </p:cNvPicPr>
+          <p:nvPr/>
+        </p:nvPicPr>
+        <p:blipFill>
+          <a:blip r:embed="rId2"/>
+          <a:stretch>
+            <a:fillRect/>
+          </a:stretch>
+        </p:blipFill>
+        <p:spPr>
+          <a:xfrm>
+            <a:off x="10561320" y="411480"/>
+            <a:ext cx="1206201" cy="320040"/>
+          </a:xfrm>
+          <a:prstGeom prst="rect">
+            <a:avLst/>
+          </a:prstGeom>
+        </p:spPr>
+      </p:pic>
+      <p:sp>
+        <p:nvSpPr>
+          <p:cNvPr id="4" name="TextBox 3"/>
+          <p:cNvSpPr txBox="1"/>
+          <p:nvPr/>
+        </p:nvSpPr>
+        <p:spPr>
+          <a:xfrm>
+            <a:off x="548640" y="438912"/>
+            <a:ext cx="7772400" cy="274320"/>
+          </a:xfrm>
+          <a:prstGeom prst="rect">
+            <a:avLst/>
+          </a:prstGeom>
+          <a:noFill/>
+        </p:spPr>
+        <p:txBody>
+          <a:bodyPr wrap="square" anchor="t">
+            <a:spAutoFit/>
+          </a:bodyPr>
+          <a:lstStyle/>
+          <a:p>
+            <a:pPr algn="l"/>
+            <a:r>
+              <a:rPr sz="1200" b="0">
+                <a:solidFill>
+                  <a:srgbClr val="5A5470"/>
+                </a:solidFill>
+                <a:latin typeface="DIN Next LT W23"/>
+                <a:ea typeface="DIN Next LT W23"/>
+                <a:cs typeface="DIN Next LT W23"/>
+              </a:rPr>
+              <a:t>S07  ·  Deep Learning</a:t>
+            </a:r>
+          </a:p>
+        </p:txBody>
+      </p:sp>
+      <p:sp>
+        <p:nvSpPr>
+          <p:cNvPr id="5" name="Rectangle 4"/>
+          <p:cNvSpPr/>
+          <p:nvPr/>
+        </p:nvSpPr>
+        <p:spPr>
+          <a:xfrm>
+            <a:off x="548640" y="822960"/>
+            <a:ext cx="11064240" cy="10972"/>
+          </a:xfrm>
+          <a:prstGeom prst="rect">
+            <a:avLst/>
+          </a:prstGeom>
+          <a:solidFill>
+            <a:srgbClr val="E4DCF4"/>
+          </a:solidFill>
+          <a:ln>
+            <a:noFill/>
+          </a:ln>
+          <a:effectLst/>
+        </p:spPr>
+        <p:style>
+          <a:lnRef idx="1">
+            <a:schemeClr val="accent1"/>
+          </a:lnRef>
+          <a:fillRef idx="3">
+            <a:schemeClr val="accent1"/>
+          </a:fillRef>
+          <a:effectRef idx="2">
+            <a:schemeClr val="accent1"/>
+          </a:effectRef>
+          <a:fontRef idx="minor">
+            <a:schemeClr val="lt1"/>
+          </a:fontRef>
+        </p:style>
+        <p:txBody>
+          <a:bodyPr rtlCol="0" anchor="ctr"/>
+          <a:lstStyle/>
+          <a:p>
+            <a:pPr algn="ctr"/>
+          </a:p>
+        </p:txBody>
+      </p:sp>
+      <p:sp>
+        <p:nvSpPr>
+          <p:cNvPr id="6" name="TextBox 5"/>
+          <p:cNvSpPr txBox="1"/>
+          <p:nvPr/>
+        </p:nvSpPr>
+        <p:spPr>
+          <a:xfrm>
+            <a:off x="548640" y="1051560"/>
+            <a:ext cx="10241280" cy="594360"/>
+          </a:xfrm>
+          <a:prstGeom prst="rect">
+            <a:avLst/>
+          </a:prstGeom>
+          <a:noFill/>
+        </p:spPr>
+        <p:txBody>
+          <a:bodyPr wrap="square" anchor="t">
+            <a:spAutoFit/>
+          </a:bodyPr>
+          <a:lstStyle/>
+          <a:p>
+            <a:pPr algn="l"/>
+            <a:r>
+              <a:rPr sz="3200" b="1">
+                <a:solidFill>
+                  <a:srgbClr val="5234B7"/>
+                </a:solidFill>
+                <a:latin typeface="DIN Next LT W23"/>
+                <a:ea typeface="DIN Next LT W23"/>
+                <a:cs typeface="DIN Next LT W23"/>
+              </a:rPr>
+              <a:t>Transfer Learning with Pretrained Models</a:t>
+            </a:r>
+          </a:p>
+        </p:txBody>
+      </p:sp>
+      <p:sp>
+        <p:nvSpPr>
+          <p:cNvPr id="7" name="TextBox 6"/>
+          <p:cNvSpPr txBox="1"/>
+          <p:nvPr/>
+        </p:nvSpPr>
+        <p:spPr>
+          <a:xfrm>
+            <a:off x="548640" y="1600200"/>
+            <a:ext cx="10241280" cy="365760"/>
+          </a:xfrm>
+          <a:prstGeom prst="rect">
+            <a:avLst/>
+          </a:prstGeom>
+          <a:noFill/>
+        </p:spPr>
+        <p:txBody>
+          <a:bodyPr wrap="square" anchor="t">
+            <a:spAutoFit/>
+          </a:bodyPr>
+          <a:lstStyle/>
+          <a:p>
+            <a:pPr algn="l"/>
+            <a:r>
+              <a:rPr sz="1500" b="0">
+                <a:solidFill>
+                  <a:srgbClr val="5A5470"/>
+                </a:solidFill>
+                <a:latin typeface="DIN Next LT W23"/>
+                <a:ea typeface="DIN Next LT W23"/>
+                <a:cs typeface="DIN Next LT W23"/>
+              </a:rPr>
+              <a:t>Reuse Features, Adapt the Head</a:t>
+            </a:r>
+          </a:p>
+        </p:txBody>
+      </p:sp>
+      <p:sp>
+        <p:nvSpPr>
+          <p:cNvPr id="8" name="TextBox 7"/>
+          <p:cNvSpPr txBox="1"/>
+          <p:nvPr/>
+        </p:nvSpPr>
+        <p:spPr>
+          <a:xfrm>
+            <a:off x="548640" y="1920240"/>
+            <a:ext cx="10972800" cy="320040"/>
+          </a:xfrm>
+          <a:prstGeom prst="rect">
+            <a:avLst/>
+          </a:prstGeom>
+          <a:noFill/>
+        </p:spPr>
+        <p:txBody>
+          <a:bodyPr wrap="square" anchor="t">
+            <a:spAutoFit/>
+          </a:bodyPr>
+          <a:lstStyle/>
+          <a:p>
+            <a:pPr algn="l"/>
+            <a:r>
+              <a:rPr sz="1300" b="0">
+                <a:solidFill>
+                  <a:srgbClr val="5A5470"/>
+                </a:solidFill>
+                <a:latin typeface="DIN Next LT W23"/>
+                <a:ea typeface="DIN Next LT W23"/>
+                <a:cs typeface="DIN Next LT W23"/>
+              </a:rPr>
+              <a:t>Pretraining on ImageNet learns general filters you can reuse on a smaller target task.</a:t>
+            </a:r>
+          </a:p>
+        </p:txBody>
+      </p:sp>
+      <p:sp>
+        <p:nvSpPr>
+          <p:cNvPr id="9" name="Rounded Rectangle 8"/>
+          <p:cNvSpPr/>
+          <p:nvPr/>
+        </p:nvSpPr>
+        <p:spPr>
+          <a:xfrm>
+            <a:off x="548640" y="2240280"/>
+            <a:ext cx="10972800" cy="3977639"/>
+          </a:xfrm>
+          <a:prstGeom prst="roundRect">
+            <a:avLst>
+              <a:gd name="adj" fmla="val 10000"/>
+            </a:avLst>
+          </a:prstGeom>
+          <a:solidFill>
+            <a:srgbClr val="EEE8FA"/>
+          </a:solidFill>
+          <a:ln>
+            <a:noFill/>
+          </a:ln>
+          <a:effectLst/>
+        </p:spPr>
+        <p:style>
+          <a:lnRef idx="1">
+            <a:schemeClr val="accent1"/>
+          </a:lnRef>
+          <a:fillRef idx="3">
+            <a:schemeClr val="accent1"/>
+          </a:fillRef>
+          <a:effectRef idx="2">
+            <a:schemeClr val="accent1"/>
+          </a:effectRef>
+          <a:fontRef idx="minor">
+            <a:schemeClr val="lt1"/>
+          </a:fontRef>
+        </p:style>
+        <p:txBody>
+          <a:bodyPr rtlCol="0" anchor="ctr"/>
+          <a:lstStyle/>
+          <a:p>
+            <a:pPr algn="ctr"/>
+          </a:p>
+        </p:txBody>
+      </p:sp>
+      <p:pic>
+        <p:nvPicPr>
+          <p:cNvPr id="10" name="Picture 9" descr="transfer-learning.png"/>
+          <p:cNvPicPr>
+            <a:picLocks noChangeAspect="1"/>
+          </p:cNvPicPr>
+          <p:nvPr/>
+        </p:nvPicPr>
+        <p:blipFill>
+          <a:blip r:embed="rId3"/>
+          <a:stretch>
+            <a:fillRect/>
+          </a:stretch>
+        </p:blipFill>
+        <p:spPr>
+          <a:xfrm>
+            <a:off x="917147" y="2377440"/>
+            <a:ext cx="10235785" cy="3703320"/>
+          </a:xfrm>
+          <a:prstGeom prst="rect">
+            <a:avLst/>
+          </a:prstGeom>
+        </p:spPr>
+      </p:pic>
+      <p:sp>
+        <p:nvSpPr>
+          <p:cNvPr id="11" name="TextBox 10"/>
+          <p:cNvSpPr txBox="1"/>
+          <p:nvPr/>
+        </p:nvSpPr>
+        <p:spPr>
+          <a:xfrm>
+            <a:off x="548640" y="6309360"/>
+            <a:ext cx="10972800" cy="228600"/>
+          </a:xfrm>
+          <a:prstGeom prst="rect">
+            <a:avLst/>
+          </a:prstGeom>
+          <a:noFill/>
+        </p:spPr>
+        <p:txBody>
+          <a:bodyPr wrap="square" anchor="t">
+            <a:spAutoFit/>
+          </a:bodyPr>
+          <a:lstStyle/>
+          <a:p>
+            <a:pPr algn="l"/>
+            <a:r>
+              <a:rPr sz="1100" b="0">
+                <a:solidFill>
+                  <a:srgbClr val="5A5470"/>
+                </a:solidFill>
+                <a:latin typeface="DIN Next LT W23"/>
+                <a:ea typeface="DIN Next LT W23"/>
+                <a:cs typeface="DIN Next LT W23"/>
+              </a:rPr>
+              <a:t>Freeze the backbone when data is scarce; fine-tune top blocks when you have more labels.</a:t>
+            </a:r>
+          </a:p>
+        </p:txBody>
+      </p:sp>
+      <p:sp>
+        <p:nvSpPr>
+          <p:cNvPr id="12" name="Rectangle 11"/>
+          <p:cNvSpPr/>
+          <p:nvPr/>
+        </p:nvSpPr>
+        <p:spPr>
+          <a:xfrm>
+            <a:off x="548640" y="6446520"/>
+            <a:ext cx="11064240" cy="10972"/>
+          </a:xfrm>
+          <a:prstGeom prst="rect">
+            <a:avLst/>
+          </a:prstGeom>
+          <a:solidFill>
+            <a:srgbClr val="5234B7"/>
+          </a:solidFill>
+          <a:ln>
+            <a:noFill/>
+          </a:ln>
+          <a:effectLst/>
+        </p:spPr>
+        <p:style>
+          <a:lnRef idx="1">
+            <a:schemeClr val="accent1"/>
+          </a:lnRef>
+          <a:fillRef idx="3">
+            <a:schemeClr val="accent1"/>
+          </a:fillRef>
+          <a:effectRef idx="2">
+            <a:schemeClr val="accent1"/>
+          </a:effectRef>
+          <a:fontRef idx="minor">
+            <a:schemeClr val="lt1"/>
+          </a:fontRef>
+        </p:style>
+        <p:txBody>
+          <a:bodyPr rtlCol="0" anchor="ctr"/>
+          <a:lstStyle/>
+          <a:p>
+            <a:pPr algn="ctr"/>
+          </a:p>
+        </p:txBody>
+      </p:sp>
+      <p:sp>
+        <p:nvSpPr>
+          <p:cNvPr id="13" name="TextBox 12"/>
+          <p:cNvSpPr txBox="1"/>
+          <p:nvPr/>
+        </p:nvSpPr>
+        <p:spPr>
+          <a:xfrm>
+            <a:off x="548640" y="6510528"/>
+            <a:ext cx="2743200" cy="256032"/>
+          </a:xfrm>
+          <a:prstGeom prst="rect">
+            <a:avLst/>
+          </a:prstGeom>
+          <a:noFill/>
+        </p:spPr>
+        <p:txBody>
+          <a:bodyPr wrap="square" anchor="t">
+            <a:spAutoFit/>
+          </a:bodyPr>
+          <a:lstStyle/>
+          <a:p>
+            <a:pPr algn="l"/>
+            <a:r>
+              <a:rPr sz="1100" b="1">
+                <a:solidFill>
+                  <a:srgbClr val="5234B7"/>
+                </a:solidFill>
+                <a:latin typeface="DIN Next LT W23"/>
+                <a:ea typeface="DIN Next LT W23"/>
+                <a:cs typeface="DIN Next LT W23"/>
+              </a:rPr>
+              <a:t>ETRA</a:t>
+            </a:r>
+          </a:p>
+        </p:txBody>
+      </p:sp>
+      <p:sp>
+        <p:nvSpPr>
+          <p:cNvPr id="14" name="TextBox 13"/>
+          <p:cNvSpPr txBox="1"/>
+          <p:nvPr/>
+        </p:nvSpPr>
+        <p:spPr>
+          <a:xfrm>
+            <a:off x="9601200" y="6510528"/>
+            <a:ext cx="2011680" cy="256032"/>
+          </a:xfrm>
+          <a:prstGeom prst="rect">
+            <a:avLst/>
+          </a:prstGeom>
+          <a:noFill/>
+        </p:spPr>
+        <p:txBody>
+          <a:bodyPr wrap="square" anchor="t">
+            <a:spAutoFit/>
+          </a:bodyPr>
+          <a:lstStyle/>
+          <a:p>
+            <a:pPr algn="r"/>
+            <a:r>
+              <a:rPr sz="1100" b="0">
+                <a:solidFill>
+                  <a:srgbClr val="5A5470"/>
+                </a:solidFill>
+                <a:latin typeface="DIN Next LT W23"/>
+                <a:ea typeface="DIN Next LT W23"/>
+                <a:cs typeface="DIN Next LT W23"/>
+              </a:rPr>
+              <a:t>68  /  77</a:t>
+            </a:r>
+          </a:p>
+        </p:txBody>
+      </p:sp>
+    </p:spTree>
+  </p:cSld>
+  <p:clrMapOvr>
+    <a:masterClrMapping/>
+  </p:clrMapOvr>
+</p:sld>
+</file>
+
+<file path=ppt/slides/slide69.xml><?xml version="1.0" encoding="utf-8"?>
 <p:sld xmlns:a="http://schemas.openxmlformats.org/drawingml/2006/main" xmlns:p="http://schemas.openxmlformats.org/presentationml/2006/main" xmlns:r="http://schemas.openxmlformats.org/officeDocument/2006/relationships">
   <p:cSld>
     <p:bg>
@@ -44559,518 +45034,7 @@
                 <a:ea typeface="DIN Next LT W23"/>
                 <a:cs typeface="DIN Next LT W23"/>
               </a:rPr>
-              <a:t>68  /  76</a:t>
-            </a:r>
-          </a:p>
-        </p:txBody>
-      </p:sp>
-    </p:spTree>
-  </p:cSld>
-  <p:clrMapOvr>
-    <a:masterClrMapping/>
-  </p:clrMapOvr>
-</p:sld>
-</file>
-
-<file path=ppt/slides/slide69.xml><?xml version="1.0" encoding="utf-8"?>
-<p:sld xmlns:a="http://schemas.openxmlformats.org/drawingml/2006/main" xmlns:p="http://schemas.openxmlformats.org/presentationml/2006/main" xmlns:r="http://schemas.openxmlformats.org/officeDocument/2006/relationships">
-  <p:cSld>
-    <p:bg>
-      <p:bgPr>
-        <a:solidFill>
-          <a:srgbClr val="FAF8FF"/>
-        </a:solidFill>
-        <a:effectLst/>
-      </p:bgPr>
-    </p:bg>
-    <p:spTree>
-      <p:nvGrpSpPr>
-        <p:cNvPr id="1" name=""/>
-        <p:cNvGrpSpPr/>
-        <p:nvPr/>
-      </p:nvGrpSpPr>
-      <p:grpSpPr/>
-      <p:sp>
-        <p:nvSpPr>
-          <p:cNvPr id="2" name="Rectangle 1"/>
-          <p:cNvSpPr/>
-          <p:nvPr/>
-        </p:nvSpPr>
-        <p:spPr>
-          <a:xfrm>
-            <a:off x="12136831" y="0"/>
-            <a:ext cx="54864" cy="6858000"/>
-          </a:xfrm>
-          <a:prstGeom prst="rect">
-            <a:avLst/>
-          </a:prstGeom>
-          <a:solidFill>
-            <a:srgbClr val="5234B7"/>
-          </a:solidFill>
-          <a:ln>
-            <a:noFill/>
-          </a:ln>
-          <a:effectLst/>
-        </p:spPr>
-        <p:style>
-          <a:lnRef idx="1">
-            <a:schemeClr val="accent1"/>
-          </a:lnRef>
-          <a:fillRef idx="3">
-            <a:schemeClr val="accent1"/>
-          </a:fillRef>
-          <a:effectRef idx="2">
-            <a:schemeClr val="accent1"/>
-          </a:effectRef>
-          <a:fontRef idx="minor">
-            <a:schemeClr val="lt1"/>
-          </a:fontRef>
-        </p:style>
-        <p:txBody>
-          <a:bodyPr rtlCol="0" anchor="ctr"/>
-          <a:lstStyle/>
-          <a:p>
-            <a:pPr algn="ctr"/>
-          </a:p>
-        </p:txBody>
-      </p:sp>
-      <p:pic>
-        <p:nvPicPr>
-          <p:cNvPr id="3" name="Picture 2" descr="etra-wordmark.png"/>
-          <p:cNvPicPr>
-            <a:picLocks noChangeAspect="1"/>
-          </p:cNvPicPr>
-          <p:nvPr/>
-        </p:nvPicPr>
-        <p:blipFill>
-          <a:blip r:embed="rId2"/>
-          <a:stretch>
-            <a:fillRect/>
-          </a:stretch>
-        </p:blipFill>
-        <p:spPr>
-          <a:xfrm>
-            <a:off x="10561320" y="411480"/>
-            <a:ext cx="1206201" cy="320040"/>
-          </a:xfrm>
-          <a:prstGeom prst="rect">
-            <a:avLst/>
-          </a:prstGeom>
-        </p:spPr>
-      </p:pic>
-      <p:sp>
-        <p:nvSpPr>
-          <p:cNvPr id="4" name="TextBox 3"/>
-          <p:cNvSpPr txBox="1"/>
-          <p:nvPr/>
-        </p:nvSpPr>
-        <p:spPr>
-          <a:xfrm>
-            <a:off x="548640" y="438912"/>
-            <a:ext cx="7772400" cy="274320"/>
-          </a:xfrm>
-          <a:prstGeom prst="rect">
-            <a:avLst/>
-          </a:prstGeom>
-          <a:noFill/>
-        </p:spPr>
-        <p:txBody>
-          <a:bodyPr wrap="square" anchor="t">
-            <a:spAutoFit/>
-          </a:bodyPr>
-          <a:lstStyle/>
-          <a:p>
-            <a:pPr algn="l"/>
-            <a:r>
-              <a:rPr sz="1200" b="0">
-                <a:solidFill>
-                  <a:srgbClr val="5A5470"/>
-                </a:solidFill>
-                <a:latin typeface="DIN Next LT W23"/>
-                <a:ea typeface="DIN Next LT W23"/>
-                <a:cs typeface="DIN Next LT W23"/>
-              </a:rPr>
-              <a:t>S07  ·  Deep Learning</a:t>
-            </a:r>
-          </a:p>
-        </p:txBody>
-      </p:sp>
-      <p:sp>
-        <p:nvSpPr>
-          <p:cNvPr id="5" name="Rectangle 4"/>
-          <p:cNvSpPr/>
-          <p:nvPr/>
-        </p:nvSpPr>
-        <p:spPr>
-          <a:xfrm>
-            <a:off x="548640" y="822960"/>
-            <a:ext cx="11064240" cy="10972"/>
-          </a:xfrm>
-          <a:prstGeom prst="rect">
-            <a:avLst/>
-          </a:prstGeom>
-          <a:solidFill>
-            <a:srgbClr val="E4DCF4"/>
-          </a:solidFill>
-          <a:ln>
-            <a:noFill/>
-          </a:ln>
-          <a:effectLst/>
-        </p:spPr>
-        <p:style>
-          <a:lnRef idx="1">
-            <a:schemeClr val="accent1"/>
-          </a:lnRef>
-          <a:fillRef idx="3">
-            <a:schemeClr val="accent1"/>
-          </a:fillRef>
-          <a:effectRef idx="2">
-            <a:schemeClr val="accent1"/>
-          </a:effectRef>
-          <a:fontRef idx="minor">
-            <a:schemeClr val="lt1"/>
-          </a:fontRef>
-        </p:style>
-        <p:txBody>
-          <a:bodyPr rtlCol="0" anchor="ctr"/>
-          <a:lstStyle/>
-          <a:p>
-            <a:pPr algn="ctr"/>
-          </a:p>
-        </p:txBody>
-      </p:sp>
-      <p:sp>
-        <p:nvSpPr>
-          <p:cNvPr id="6" name="TextBox 5"/>
-          <p:cNvSpPr txBox="1"/>
-          <p:nvPr/>
-        </p:nvSpPr>
-        <p:spPr>
-          <a:xfrm>
-            <a:off x="548640" y="1051560"/>
-            <a:ext cx="10241280" cy="594360"/>
-          </a:xfrm>
-          <a:prstGeom prst="rect">
-            <a:avLst/>
-          </a:prstGeom>
-          <a:noFill/>
-        </p:spPr>
-        <p:txBody>
-          <a:bodyPr wrap="square" anchor="t">
-            <a:spAutoFit/>
-          </a:bodyPr>
-          <a:lstStyle/>
-          <a:p>
-            <a:pPr algn="l"/>
-            <a:r>
-              <a:rPr sz="3200" b="1">
-                <a:solidFill>
-                  <a:srgbClr val="5234B7"/>
-                </a:solidFill>
-                <a:latin typeface="DIN Next LT W23"/>
-                <a:ea typeface="DIN Next LT W23"/>
-                <a:cs typeface="DIN Next LT W23"/>
-              </a:rPr>
-              <a:t>Regularization: Dropout, Weight Decay, Early Stopping</a:t>
-            </a:r>
-          </a:p>
-        </p:txBody>
-      </p:sp>
-      <p:sp>
-        <p:nvSpPr>
-          <p:cNvPr id="7" name="TextBox 6"/>
-          <p:cNvSpPr txBox="1"/>
-          <p:nvPr/>
-        </p:nvSpPr>
-        <p:spPr>
-          <a:xfrm>
-            <a:off x="548640" y="1600200"/>
-            <a:ext cx="10241280" cy="365760"/>
-          </a:xfrm>
-          <a:prstGeom prst="rect">
-            <a:avLst/>
-          </a:prstGeom>
-          <a:noFill/>
-        </p:spPr>
-        <p:txBody>
-          <a:bodyPr wrap="square" anchor="t">
-            <a:spAutoFit/>
-          </a:bodyPr>
-          <a:lstStyle/>
-          <a:p>
-            <a:pPr algn="l"/>
-            <a:r>
-              <a:rPr sz="1500" b="0">
-                <a:solidFill>
-                  <a:srgbClr val="5A5470"/>
-                </a:solidFill>
-                <a:latin typeface="DIN Next LT W23"/>
-                <a:ea typeface="DIN Next LT W23"/>
-                <a:cs typeface="DIN Next LT W23"/>
-              </a:rPr>
-              <a:t>Constrain Capacity to Generalize</a:t>
-            </a:r>
-          </a:p>
-        </p:txBody>
-      </p:sp>
-      <p:sp>
-        <p:nvSpPr>
-          <p:cNvPr id="8" name="TextBox 7"/>
-          <p:cNvSpPr txBox="1"/>
-          <p:nvPr/>
-        </p:nvSpPr>
-        <p:spPr>
-          <a:xfrm>
-            <a:off x="548640" y="1920240"/>
-            <a:ext cx="10972800" cy="320040"/>
-          </a:xfrm>
-          <a:prstGeom prst="rect">
-            <a:avLst/>
-          </a:prstGeom>
-          <a:noFill/>
-        </p:spPr>
-        <p:txBody>
-          <a:bodyPr wrap="square" anchor="t">
-            <a:spAutoFit/>
-          </a:bodyPr>
-          <a:lstStyle/>
-          <a:p>
-            <a:pPr algn="l"/>
-            <a:r>
-              <a:rPr sz="1300" b="0">
-                <a:solidFill>
-                  <a:srgbClr val="5A5470"/>
-                </a:solidFill>
-                <a:latin typeface="DIN Next LT W23"/>
-                <a:ea typeface="DIN Next LT W23"/>
-                <a:cs typeface="DIN Next LT W23"/>
-              </a:rPr>
-              <a:t>Regularization is how we stop the network from memorizing noise.</a:t>
-            </a:r>
-          </a:p>
-        </p:txBody>
-      </p:sp>
-      <p:sp>
-        <p:nvSpPr>
-          <p:cNvPr id="9" name="Rounded Rectangle 8"/>
-          <p:cNvSpPr/>
-          <p:nvPr/>
-        </p:nvSpPr>
-        <p:spPr>
-          <a:xfrm>
-            <a:off x="548640" y="2240280"/>
-            <a:ext cx="10972800" cy="3977639"/>
-          </a:xfrm>
-          <a:prstGeom prst="roundRect">
-            <a:avLst>
-              <a:gd name="adj" fmla="val 10000"/>
-            </a:avLst>
-          </a:prstGeom>
-          <a:solidFill>
-            <a:srgbClr val="EEE8FA"/>
-          </a:solidFill>
-          <a:ln>
-            <a:noFill/>
-          </a:ln>
-          <a:effectLst/>
-        </p:spPr>
-        <p:style>
-          <a:lnRef idx="1">
-            <a:schemeClr val="accent1"/>
-          </a:lnRef>
-          <a:fillRef idx="3">
-            <a:schemeClr val="accent1"/>
-          </a:fillRef>
-          <a:effectRef idx="2">
-            <a:schemeClr val="accent1"/>
-          </a:effectRef>
-          <a:fontRef idx="minor">
-            <a:schemeClr val="lt1"/>
-          </a:fontRef>
-        </p:style>
-        <p:txBody>
-          <a:bodyPr rtlCol="0" anchor="ctr"/>
-          <a:lstStyle/>
-          <a:p>
-            <a:pPr algn="ctr"/>
-          </a:p>
-        </p:txBody>
-      </p:sp>
-      <p:pic>
-        <p:nvPicPr>
-          <p:cNvPr id="10" name="Picture 9" descr="dropout.png"/>
-          <p:cNvPicPr>
-            <a:picLocks noChangeAspect="1"/>
-          </p:cNvPicPr>
-          <p:nvPr/>
-        </p:nvPicPr>
-        <p:blipFill>
-          <a:blip r:embed="rId3"/>
-          <a:stretch>
-            <a:fillRect/>
-          </a:stretch>
-        </p:blipFill>
-        <p:spPr>
-          <a:xfrm>
-            <a:off x="2069837" y="2377440"/>
-            <a:ext cx="7930404" cy="3703320"/>
-          </a:xfrm>
-          <a:prstGeom prst="rect">
-            <a:avLst/>
-          </a:prstGeom>
-        </p:spPr>
-      </p:pic>
-      <p:sp>
-        <p:nvSpPr>
-          <p:cNvPr id="11" name="TextBox 10"/>
-          <p:cNvSpPr txBox="1"/>
-          <p:nvPr/>
-        </p:nvSpPr>
-        <p:spPr>
-          <a:xfrm>
-            <a:off x="548640" y="6309360"/>
-            <a:ext cx="10972800" cy="228600"/>
-          </a:xfrm>
-          <a:prstGeom prst="rect">
-            <a:avLst/>
-          </a:prstGeom>
-          <a:noFill/>
-        </p:spPr>
-        <p:txBody>
-          <a:bodyPr wrap="square" anchor="t">
-            <a:spAutoFit/>
-          </a:bodyPr>
-          <a:lstStyle/>
-          <a:p>
-            <a:pPr algn="l"/>
-            <a:r>
-              <a:rPr sz="1100" b="0">
-                <a:solidFill>
-                  <a:srgbClr val="5A5470"/>
-                </a:solidFill>
-                <a:latin typeface="DIN Next LT W23"/>
-                <a:ea typeface="DIN Next LT W23"/>
-                <a:cs typeface="DIN Next LT W23"/>
-              </a:rPr>
-              <a:t>Turn dropout OFF at inference (model.eval()) so predictions are deterministic.</a:t>
-            </a:r>
-          </a:p>
-        </p:txBody>
-      </p:sp>
-      <p:sp>
-        <p:nvSpPr>
-          <p:cNvPr id="12" name="Rectangle 11"/>
-          <p:cNvSpPr/>
-          <p:nvPr/>
-        </p:nvSpPr>
-        <p:spPr>
-          <a:xfrm>
-            <a:off x="548640" y="6446520"/>
-            <a:ext cx="11064240" cy="10972"/>
-          </a:xfrm>
-          <a:prstGeom prst="rect">
-            <a:avLst/>
-          </a:prstGeom>
-          <a:solidFill>
-            <a:srgbClr val="5234B7"/>
-          </a:solidFill>
-          <a:ln>
-            <a:noFill/>
-          </a:ln>
-          <a:effectLst/>
-        </p:spPr>
-        <p:style>
-          <a:lnRef idx="1">
-            <a:schemeClr val="accent1"/>
-          </a:lnRef>
-          <a:fillRef idx="3">
-            <a:schemeClr val="accent1"/>
-          </a:fillRef>
-          <a:effectRef idx="2">
-            <a:schemeClr val="accent1"/>
-          </a:effectRef>
-          <a:fontRef idx="minor">
-            <a:schemeClr val="lt1"/>
-          </a:fontRef>
-        </p:style>
-        <p:txBody>
-          <a:bodyPr rtlCol="0" anchor="ctr"/>
-          <a:lstStyle/>
-          <a:p>
-            <a:pPr algn="ctr"/>
-          </a:p>
-        </p:txBody>
-      </p:sp>
-      <p:sp>
-        <p:nvSpPr>
-          <p:cNvPr id="13" name="TextBox 12"/>
-          <p:cNvSpPr txBox="1"/>
-          <p:nvPr/>
-        </p:nvSpPr>
-        <p:spPr>
-          <a:xfrm>
-            <a:off x="548640" y="6510528"/>
-            <a:ext cx="2743200" cy="256032"/>
-          </a:xfrm>
-          <a:prstGeom prst="rect">
-            <a:avLst/>
-          </a:prstGeom>
-          <a:noFill/>
-        </p:spPr>
-        <p:txBody>
-          <a:bodyPr wrap="square" anchor="t">
-            <a:spAutoFit/>
-          </a:bodyPr>
-          <a:lstStyle/>
-          <a:p>
-            <a:pPr algn="l"/>
-            <a:r>
-              <a:rPr sz="1100" b="1">
-                <a:solidFill>
-                  <a:srgbClr val="5234B7"/>
-                </a:solidFill>
-                <a:latin typeface="DIN Next LT W23"/>
-                <a:ea typeface="DIN Next LT W23"/>
-                <a:cs typeface="DIN Next LT W23"/>
-              </a:rPr>
-              <a:t>ETRA</a:t>
-            </a:r>
-          </a:p>
-        </p:txBody>
-      </p:sp>
-      <p:sp>
-        <p:nvSpPr>
-          <p:cNvPr id="14" name="TextBox 13"/>
-          <p:cNvSpPr txBox="1"/>
-          <p:nvPr/>
-        </p:nvSpPr>
-        <p:spPr>
-          <a:xfrm>
-            <a:off x="9601200" y="6510528"/>
-            <a:ext cx="2011680" cy="256032"/>
-          </a:xfrm>
-          <a:prstGeom prst="rect">
-            <a:avLst/>
-          </a:prstGeom>
-          <a:noFill/>
-        </p:spPr>
-        <p:txBody>
-          <a:bodyPr wrap="square" anchor="t">
-            <a:spAutoFit/>
-          </a:bodyPr>
-          <a:lstStyle/>
-          <a:p>
-            <a:pPr algn="r"/>
-            <a:r>
-              <a:rPr sz="1100" b="0">
-                <a:solidFill>
-                  <a:srgbClr val="5A5470"/>
-                </a:solidFill>
-                <a:latin typeface="DIN Next LT W23"/>
-                <a:ea typeface="DIN Next LT W23"/>
-                <a:cs typeface="DIN Next LT W23"/>
-              </a:rPr>
-              <a:t>69  /  76</a:t>
+              <a:t>69  /  77</a:t>
             </a:r>
           </a:p>
         </p:txBody>
@@ -45775,7 +45739,7 @@
                 <a:ea typeface="DIN Next LT W23"/>
                 <a:cs typeface="DIN Next LT W23"/>
               </a:rPr>
-              <a:t>07  /  76</a:t>
+              <a:t>07  /  77</a:t>
             </a:r>
           </a:p>
         </p:txBody>
@@ -45789,6 +45753,517 @@
 </file>
 
 <file path=ppt/slides/slide70.xml><?xml version="1.0" encoding="utf-8"?>
+<p:sld xmlns:a="http://schemas.openxmlformats.org/drawingml/2006/main" xmlns:p="http://schemas.openxmlformats.org/presentationml/2006/main" xmlns:r="http://schemas.openxmlformats.org/officeDocument/2006/relationships">
+  <p:cSld>
+    <p:bg>
+      <p:bgPr>
+        <a:solidFill>
+          <a:srgbClr val="FAF8FF"/>
+        </a:solidFill>
+        <a:effectLst/>
+      </p:bgPr>
+    </p:bg>
+    <p:spTree>
+      <p:nvGrpSpPr>
+        <p:cNvPr id="1" name=""/>
+        <p:cNvGrpSpPr/>
+        <p:nvPr/>
+      </p:nvGrpSpPr>
+      <p:grpSpPr/>
+      <p:sp>
+        <p:nvSpPr>
+          <p:cNvPr id="2" name="Rectangle 1"/>
+          <p:cNvSpPr/>
+          <p:nvPr/>
+        </p:nvSpPr>
+        <p:spPr>
+          <a:xfrm>
+            <a:off x="12136831" y="0"/>
+            <a:ext cx="54864" cy="6858000"/>
+          </a:xfrm>
+          <a:prstGeom prst="rect">
+            <a:avLst/>
+          </a:prstGeom>
+          <a:solidFill>
+            <a:srgbClr val="5234B7"/>
+          </a:solidFill>
+          <a:ln>
+            <a:noFill/>
+          </a:ln>
+          <a:effectLst/>
+        </p:spPr>
+        <p:style>
+          <a:lnRef idx="1">
+            <a:schemeClr val="accent1"/>
+          </a:lnRef>
+          <a:fillRef idx="3">
+            <a:schemeClr val="accent1"/>
+          </a:fillRef>
+          <a:effectRef idx="2">
+            <a:schemeClr val="accent1"/>
+          </a:effectRef>
+          <a:fontRef idx="minor">
+            <a:schemeClr val="lt1"/>
+          </a:fontRef>
+        </p:style>
+        <p:txBody>
+          <a:bodyPr rtlCol="0" anchor="ctr"/>
+          <a:lstStyle/>
+          <a:p>
+            <a:pPr algn="ctr"/>
+          </a:p>
+        </p:txBody>
+      </p:sp>
+      <p:pic>
+        <p:nvPicPr>
+          <p:cNvPr id="3" name="Picture 2" descr="etra-wordmark.png"/>
+          <p:cNvPicPr>
+            <a:picLocks noChangeAspect="1"/>
+          </p:cNvPicPr>
+          <p:nvPr/>
+        </p:nvPicPr>
+        <p:blipFill>
+          <a:blip r:embed="rId2"/>
+          <a:stretch>
+            <a:fillRect/>
+          </a:stretch>
+        </p:blipFill>
+        <p:spPr>
+          <a:xfrm>
+            <a:off x="10561320" y="411480"/>
+            <a:ext cx="1206201" cy="320040"/>
+          </a:xfrm>
+          <a:prstGeom prst="rect">
+            <a:avLst/>
+          </a:prstGeom>
+        </p:spPr>
+      </p:pic>
+      <p:sp>
+        <p:nvSpPr>
+          <p:cNvPr id="4" name="TextBox 3"/>
+          <p:cNvSpPr txBox="1"/>
+          <p:nvPr/>
+        </p:nvSpPr>
+        <p:spPr>
+          <a:xfrm>
+            <a:off x="548640" y="438912"/>
+            <a:ext cx="7772400" cy="274320"/>
+          </a:xfrm>
+          <a:prstGeom prst="rect">
+            <a:avLst/>
+          </a:prstGeom>
+          <a:noFill/>
+        </p:spPr>
+        <p:txBody>
+          <a:bodyPr wrap="square" anchor="t">
+            <a:spAutoFit/>
+          </a:bodyPr>
+          <a:lstStyle/>
+          <a:p>
+            <a:pPr algn="l"/>
+            <a:r>
+              <a:rPr sz="1200" b="0">
+                <a:solidFill>
+                  <a:srgbClr val="5A5470"/>
+                </a:solidFill>
+                <a:latin typeface="DIN Next LT W23"/>
+                <a:ea typeface="DIN Next LT W23"/>
+                <a:cs typeface="DIN Next LT W23"/>
+              </a:rPr>
+              <a:t>S07  ·  Deep Learning</a:t>
+            </a:r>
+          </a:p>
+        </p:txBody>
+      </p:sp>
+      <p:sp>
+        <p:nvSpPr>
+          <p:cNvPr id="5" name="Rectangle 4"/>
+          <p:cNvSpPr/>
+          <p:nvPr/>
+        </p:nvSpPr>
+        <p:spPr>
+          <a:xfrm>
+            <a:off x="548640" y="822960"/>
+            <a:ext cx="11064240" cy="10972"/>
+          </a:xfrm>
+          <a:prstGeom prst="rect">
+            <a:avLst/>
+          </a:prstGeom>
+          <a:solidFill>
+            <a:srgbClr val="E4DCF4"/>
+          </a:solidFill>
+          <a:ln>
+            <a:noFill/>
+          </a:ln>
+          <a:effectLst/>
+        </p:spPr>
+        <p:style>
+          <a:lnRef idx="1">
+            <a:schemeClr val="accent1"/>
+          </a:lnRef>
+          <a:fillRef idx="3">
+            <a:schemeClr val="accent1"/>
+          </a:fillRef>
+          <a:effectRef idx="2">
+            <a:schemeClr val="accent1"/>
+          </a:effectRef>
+          <a:fontRef idx="minor">
+            <a:schemeClr val="lt1"/>
+          </a:fontRef>
+        </p:style>
+        <p:txBody>
+          <a:bodyPr rtlCol="0" anchor="ctr"/>
+          <a:lstStyle/>
+          <a:p>
+            <a:pPr algn="ctr"/>
+          </a:p>
+        </p:txBody>
+      </p:sp>
+      <p:sp>
+        <p:nvSpPr>
+          <p:cNvPr id="6" name="TextBox 5"/>
+          <p:cNvSpPr txBox="1"/>
+          <p:nvPr/>
+        </p:nvSpPr>
+        <p:spPr>
+          <a:xfrm>
+            <a:off x="548640" y="1051560"/>
+            <a:ext cx="10241280" cy="594360"/>
+          </a:xfrm>
+          <a:prstGeom prst="rect">
+            <a:avLst/>
+          </a:prstGeom>
+          <a:noFill/>
+        </p:spPr>
+        <p:txBody>
+          <a:bodyPr wrap="square" anchor="t">
+            <a:spAutoFit/>
+          </a:bodyPr>
+          <a:lstStyle/>
+          <a:p>
+            <a:pPr algn="l"/>
+            <a:r>
+              <a:rPr sz="3200" b="1">
+                <a:solidFill>
+                  <a:srgbClr val="5234B7"/>
+                </a:solidFill>
+                <a:latin typeface="DIN Next LT W23"/>
+                <a:ea typeface="DIN Next LT W23"/>
+                <a:cs typeface="DIN Next LT W23"/>
+              </a:rPr>
+              <a:t>Regularization: Dropout, Weight Decay, Early Stopping</a:t>
+            </a:r>
+          </a:p>
+        </p:txBody>
+      </p:sp>
+      <p:sp>
+        <p:nvSpPr>
+          <p:cNvPr id="7" name="TextBox 6"/>
+          <p:cNvSpPr txBox="1"/>
+          <p:nvPr/>
+        </p:nvSpPr>
+        <p:spPr>
+          <a:xfrm>
+            <a:off x="548640" y="1600200"/>
+            <a:ext cx="10241280" cy="365760"/>
+          </a:xfrm>
+          <a:prstGeom prst="rect">
+            <a:avLst/>
+          </a:prstGeom>
+          <a:noFill/>
+        </p:spPr>
+        <p:txBody>
+          <a:bodyPr wrap="square" anchor="t">
+            <a:spAutoFit/>
+          </a:bodyPr>
+          <a:lstStyle/>
+          <a:p>
+            <a:pPr algn="l"/>
+            <a:r>
+              <a:rPr sz="1500" b="0">
+                <a:solidFill>
+                  <a:srgbClr val="5A5470"/>
+                </a:solidFill>
+                <a:latin typeface="DIN Next LT W23"/>
+                <a:ea typeface="DIN Next LT W23"/>
+                <a:cs typeface="DIN Next LT W23"/>
+              </a:rPr>
+              <a:t>Constrain Capacity to Generalize</a:t>
+            </a:r>
+          </a:p>
+        </p:txBody>
+      </p:sp>
+      <p:sp>
+        <p:nvSpPr>
+          <p:cNvPr id="8" name="TextBox 7"/>
+          <p:cNvSpPr txBox="1"/>
+          <p:nvPr/>
+        </p:nvSpPr>
+        <p:spPr>
+          <a:xfrm>
+            <a:off x="548640" y="1920240"/>
+            <a:ext cx="10972800" cy="320040"/>
+          </a:xfrm>
+          <a:prstGeom prst="rect">
+            <a:avLst/>
+          </a:prstGeom>
+          <a:noFill/>
+        </p:spPr>
+        <p:txBody>
+          <a:bodyPr wrap="square" anchor="t">
+            <a:spAutoFit/>
+          </a:bodyPr>
+          <a:lstStyle/>
+          <a:p>
+            <a:pPr algn="l"/>
+            <a:r>
+              <a:rPr sz="1300" b="0">
+                <a:solidFill>
+                  <a:srgbClr val="5A5470"/>
+                </a:solidFill>
+                <a:latin typeface="DIN Next LT W23"/>
+                <a:ea typeface="DIN Next LT W23"/>
+                <a:cs typeface="DIN Next LT W23"/>
+              </a:rPr>
+              <a:t>Regularization is how we stop the network from memorizing noise.</a:t>
+            </a:r>
+          </a:p>
+        </p:txBody>
+      </p:sp>
+      <p:sp>
+        <p:nvSpPr>
+          <p:cNvPr id="9" name="Rounded Rectangle 8"/>
+          <p:cNvSpPr/>
+          <p:nvPr/>
+        </p:nvSpPr>
+        <p:spPr>
+          <a:xfrm>
+            <a:off x="548640" y="2240280"/>
+            <a:ext cx="10972800" cy="3977639"/>
+          </a:xfrm>
+          <a:prstGeom prst="roundRect">
+            <a:avLst>
+              <a:gd name="adj" fmla="val 10000"/>
+            </a:avLst>
+          </a:prstGeom>
+          <a:solidFill>
+            <a:srgbClr val="EEE8FA"/>
+          </a:solidFill>
+          <a:ln>
+            <a:noFill/>
+          </a:ln>
+          <a:effectLst/>
+        </p:spPr>
+        <p:style>
+          <a:lnRef idx="1">
+            <a:schemeClr val="accent1"/>
+          </a:lnRef>
+          <a:fillRef idx="3">
+            <a:schemeClr val="accent1"/>
+          </a:fillRef>
+          <a:effectRef idx="2">
+            <a:schemeClr val="accent1"/>
+          </a:effectRef>
+          <a:fontRef idx="minor">
+            <a:schemeClr val="lt1"/>
+          </a:fontRef>
+        </p:style>
+        <p:txBody>
+          <a:bodyPr rtlCol="0" anchor="ctr"/>
+          <a:lstStyle/>
+          <a:p>
+            <a:pPr algn="ctr"/>
+          </a:p>
+        </p:txBody>
+      </p:sp>
+      <p:pic>
+        <p:nvPicPr>
+          <p:cNvPr id="10" name="Picture 9" descr="dropout.png"/>
+          <p:cNvPicPr>
+            <a:picLocks noChangeAspect="1"/>
+          </p:cNvPicPr>
+          <p:nvPr/>
+        </p:nvPicPr>
+        <p:blipFill>
+          <a:blip r:embed="rId3"/>
+          <a:stretch>
+            <a:fillRect/>
+          </a:stretch>
+        </p:blipFill>
+        <p:spPr>
+          <a:xfrm>
+            <a:off x="2069837" y="2377440"/>
+            <a:ext cx="7930404" cy="3703320"/>
+          </a:xfrm>
+          <a:prstGeom prst="rect">
+            <a:avLst/>
+          </a:prstGeom>
+        </p:spPr>
+      </p:pic>
+      <p:sp>
+        <p:nvSpPr>
+          <p:cNvPr id="11" name="TextBox 10"/>
+          <p:cNvSpPr txBox="1"/>
+          <p:nvPr/>
+        </p:nvSpPr>
+        <p:spPr>
+          <a:xfrm>
+            <a:off x="548640" y="6309360"/>
+            <a:ext cx="10972800" cy="228600"/>
+          </a:xfrm>
+          <a:prstGeom prst="rect">
+            <a:avLst/>
+          </a:prstGeom>
+          <a:noFill/>
+        </p:spPr>
+        <p:txBody>
+          <a:bodyPr wrap="square" anchor="t">
+            <a:spAutoFit/>
+          </a:bodyPr>
+          <a:lstStyle/>
+          <a:p>
+            <a:pPr algn="l"/>
+            <a:r>
+              <a:rPr sz="1100" b="0">
+                <a:solidFill>
+                  <a:srgbClr val="5A5470"/>
+                </a:solidFill>
+                <a:latin typeface="DIN Next LT W23"/>
+                <a:ea typeface="DIN Next LT W23"/>
+                <a:cs typeface="DIN Next LT W23"/>
+              </a:rPr>
+              <a:t>Turn dropout OFF at inference (model.eval()) so predictions are deterministic.</a:t>
+            </a:r>
+          </a:p>
+        </p:txBody>
+      </p:sp>
+      <p:sp>
+        <p:nvSpPr>
+          <p:cNvPr id="12" name="Rectangle 11"/>
+          <p:cNvSpPr/>
+          <p:nvPr/>
+        </p:nvSpPr>
+        <p:spPr>
+          <a:xfrm>
+            <a:off x="548640" y="6446520"/>
+            <a:ext cx="11064240" cy="10972"/>
+          </a:xfrm>
+          <a:prstGeom prst="rect">
+            <a:avLst/>
+          </a:prstGeom>
+          <a:solidFill>
+            <a:srgbClr val="5234B7"/>
+          </a:solidFill>
+          <a:ln>
+            <a:noFill/>
+          </a:ln>
+          <a:effectLst/>
+        </p:spPr>
+        <p:style>
+          <a:lnRef idx="1">
+            <a:schemeClr val="accent1"/>
+          </a:lnRef>
+          <a:fillRef idx="3">
+            <a:schemeClr val="accent1"/>
+          </a:fillRef>
+          <a:effectRef idx="2">
+            <a:schemeClr val="accent1"/>
+          </a:effectRef>
+          <a:fontRef idx="minor">
+            <a:schemeClr val="lt1"/>
+          </a:fontRef>
+        </p:style>
+        <p:txBody>
+          <a:bodyPr rtlCol="0" anchor="ctr"/>
+          <a:lstStyle/>
+          <a:p>
+            <a:pPr algn="ctr"/>
+          </a:p>
+        </p:txBody>
+      </p:sp>
+      <p:sp>
+        <p:nvSpPr>
+          <p:cNvPr id="13" name="TextBox 12"/>
+          <p:cNvSpPr txBox="1"/>
+          <p:nvPr/>
+        </p:nvSpPr>
+        <p:spPr>
+          <a:xfrm>
+            <a:off x="548640" y="6510528"/>
+            <a:ext cx="2743200" cy="256032"/>
+          </a:xfrm>
+          <a:prstGeom prst="rect">
+            <a:avLst/>
+          </a:prstGeom>
+          <a:noFill/>
+        </p:spPr>
+        <p:txBody>
+          <a:bodyPr wrap="square" anchor="t">
+            <a:spAutoFit/>
+          </a:bodyPr>
+          <a:lstStyle/>
+          <a:p>
+            <a:pPr algn="l"/>
+            <a:r>
+              <a:rPr sz="1100" b="1">
+                <a:solidFill>
+                  <a:srgbClr val="5234B7"/>
+                </a:solidFill>
+                <a:latin typeface="DIN Next LT W23"/>
+                <a:ea typeface="DIN Next LT W23"/>
+                <a:cs typeface="DIN Next LT W23"/>
+              </a:rPr>
+              <a:t>ETRA</a:t>
+            </a:r>
+          </a:p>
+        </p:txBody>
+      </p:sp>
+      <p:sp>
+        <p:nvSpPr>
+          <p:cNvPr id="14" name="TextBox 13"/>
+          <p:cNvSpPr txBox="1"/>
+          <p:nvPr/>
+        </p:nvSpPr>
+        <p:spPr>
+          <a:xfrm>
+            <a:off x="9601200" y="6510528"/>
+            <a:ext cx="2011680" cy="256032"/>
+          </a:xfrm>
+          <a:prstGeom prst="rect">
+            <a:avLst/>
+          </a:prstGeom>
+          <a:noFill/>
+        </p:spPr>
+        <p:txBody>
+          <a:bodyPr wrap="square" anchor="t">
+            <a:spAutoFit/>
+          </a:bodyPr>
+          <a:lstStyle/>
+          <a:p>
+            <a:pPr algn="r"/>
+            <a:r>
+              <a:rPr sz="1100" b="0">
+                <a:solidFill>
+                  <a:srgbClr val="5A5470"/>
+                </a:solidFill>
+                <a:latin typeface="DIN Next LT W23"/>
+                <a:ea typeface="DIN Next LT W23"/>
+                <a:cs typeface="DIN Next LT W23"/>
+              </a:rPr>
+              <a:t>70  /  77</a:t>
+            </a:r>
+          </a:p>
+        </p:txBody>
+      </p:sp>
+    </p:spTree>
+  </p:cSld>
+  <p:clrMapOvr>
+    <a:masterClrMapping/>
+  </p:clrMapOvr>
+</p:sld>
+</file>
+
+<file path=ppt/slides/slide71.xml><?xml version="1.0" encoding="utf-8"?>
 <p:sld xmlns:a="http://schemas.openxmlformats.org/drawingml/2006/main" xmlns:p="http://schemas.openxmlformats.org/presentationml/2006/main" xmlns:r="http://schemas.openxmlformats.org/officeDocument/2006/relationships">
   <p:cSld>
     <p:bg>
@@ -46536,749 +47011,7 @@
                 <a:ea typeface="DIN Next LT W23"/>
                 <a:cs typeface="DIN Next LT W23"/>
               </a:rPr>
-              <a:t>70  /  76</a:t>
-            </a:r>
-          </a:p>
-        </p:txBody>
-      </p:sp>
-    </p:spTree>
-  </p:cSld>
-  <p:clrMapOvr>
-    <a:masterClrMapping/>
-  </p:clrMapOvr>
-</p:sld>
-</file>
-
-<file path=ppt/slides/slide71.xml><?xml version="1.0" encoding="utf-8"?>
-<p:sld xmlns:a="http://schemas.openxmlformats.org/drawingml/2006/main" xmlns:p="http://schemas.openxmlformats.org/presentationml/2006/main" xmlns:r="http://schemas.openxmlformats.org/officeDocument/2006/relationships">
-  <p:cSld>
-    <p:bg>
-      <p:bgPr>
-        <a:solidFill>
-          <a:srgbClr val="FAF8FF"/>
-        </a:solidFill>
-        <a:effectLst/>
-      </p:bgPr>
-    </p:bg>
-    <p:spTree>
-      <p:nvGrpSpPr>
-        <p:cNvPr id="1" name=""/>
-        <p:cNvGrpSpPr/>
-        <p:nvPr/>
-      </p:nvGrpSpPr>
-      <p:grpSpPr/>
-      <p:sp>
-        <p:nvSpPr>
-          <p:cNvPr id="2" name="Rectangle 1"/>
-          <p:cNvSpPr/>
-          <p:nvPr/>
-        </p:nvSpPr>
-        <p:spPr>
-          <a:xfrm>
-            <a:off x="12136831" y="0"/>
-            <a:ext cx="54864" cy="6858000"/>
-          </a:xfrm>
-          <a:prstGeom prst="rect">
-            <a:avLst/>
-          </a:prstGeom>
-          <a:solidFill>
-            <a:srgbClr val="5234B7"/>
-          </a:solidFill>
-          <a:ln>
-            <a:noFill/>
-          </a:ln>
-          <a:effectLst/>
-        </p:spPr>
-        <p:style>
-          <a:lnRef idx="1">
-            <a:schemeClr val="accent1"/>
-          </a:lnRef>
-          <a:fillRef idx="3">
-            <a:schemeClr val="accent1"/>
-          </a:fillRef>
-          <a:effectRef idx="2">
-            <a:schemeClr val="accent1"/>
-          </a:effectRef>
-          <a:fontRef idx="minor">
-            <a:schemeClr val="lt1"/>
-          </a:fontRef>
-        </p:style>
-        <p:txBody>
-          <a:bodyPr rtlCol="0" anchor="ctr"/>
-          <a:lstStyle/>
-          <a:p>
-            <a:pPr algn="ctr"/>
-          </a:p>
-        </p:txBody>
-      </p:sp>
-      <p:pic>
-        <p:nvPicPr>
-          <p:cNvPr id="3" name="Picture 2" descr="etra-wordmark.png"/>
-          <p:cNvPicPr>
-            <a:picLocks noChangeAspect="1"/>
-          </p:cNvPicPr>
-          <p:nvPr/>
-        </p:nvPicPr>
-        <p:blipFill>
-          <a:blip r:embed="rId2"/>
-          <a:stretch>
-            <a:fillRect/>
-          </a:stretch>
-        </p:blipFill>
-        <p:spPr>
-          <a:xfrm>
-            <a:off x="10561320" y="411480"/>
-            <a:ext cx="1206201" cy="320040"/>
-          </a:xfrm>
-          <a:prstGeom prst="rect">
-            <a:avLst/>
-          </a:prstGeom>
-        </p:spPr>
-      </p:pic>
-      <p:sp>
-        <p:nvSpPr>
-          <p:cNvPr id="4" name="TextBox 3"/>
-          <p:cNvSpPr txBox="1"/>
-          <p:nvPr/>
-        </p:nvSpPr>
-        <p:spPr>
-          <a:xfrm>
-            <a:off x="548640" y="438912"/>
-            <a:ext cx="7772400" cy="274320"/>
-          </a:xfrm>
-          <a:prstGeom prst="rect">
-            <a:avLst/>
-          </a:prstGeom>
-          <a:noFill/>
-        </p:spPr>
-        <p:txBody>
-          <a:bodyPr wrap="square" anchor="t">
-            <a:spAutoFit/>
-          </a:bodyPr>
-          <a:lstStyle/>
-          <a:p>
-            <a:pPr algn="l"/>
-            <a:r>
-              <a:rPr sz="1200" b="0">
-                <a:solidFill>
-                  <a:srgbClr val="5A5470"/>
-                </a:solidFill>
-                <a:latin typeface="DIN Next LT W23"/>
-                <a:ea typeface="DIN Next LT W23"/>
-                <a:cs typeface="DIN Next LT W23"/>
-              </a:rPr>
-              <a:t>S07  ·  Deep Learning</a:t>
-            </a:r>
-          </a:p>
-        </p:txBody>
-      </p:sp>
-      <p:sp>
-        <p:nvSpPr>
-          <p:cNvPr id="5" name="Rectangle 4"/>
-          <p:cNvSpPr/>
-          <p:nvPr/>
-        </p:nvSpPr>
-        <p:spPr>
-          <a:xfrm>
-            <a:off x="548640" y="822960"/>
-            <a:ext cx="11064240" cy="10972"/>
-          </a:xfrm>
-          <a:prstGeom prst="rect">
-            <a:avLst/>
-          </a:prstGeom>
-          <a:solidFill>
-            <a:srgbClr val="E4DCF4"/>
-          </a:solidFill>
-          <a:ln>
-            <a:noFill/>
-          </a:ln>
-          <a:effectLst/>
-        </p:spPr>
-        <p:style>
-          <a:lnRef idx="1">
-            <a:schemeClr val="accent1"/>
-          </a:lnRef>
-          <a:fillRef idx="3">
-            <a:schemeClr val="accent1"/>
-          </a:fillRef>
-          <a:effectRef idx="2">
-            <a:schemeClr val="accent1"/>
-          </a:effectRef>
-          <a:fontRef idx="minor">
-            <a:schemeClr val="lt1"/>
-          </a:fontRef>
-        </p:style>
-        <p:txBody>
-          <a:bodyPr rtlCol="0" anchor="ctr"/>
-          <a:lstStyle/>
-          <a:p>
-            <a:pPr algn="ctr"/>
-          </a:p>
-        </p:txBody>
-      </p:sp>
-      <p:sp>
-        <p:nvSpPr>
-          <p:cNvPr id="6" name="TextBox 5"/>
-          <p:cNvSpPr txBox="1"/>
-          <p:nvPr/>
-        </p:nvSpPr>
-        <p:spPr>
-          <a:xfrm>
-            <a:off x="548640" y="1051560"/>
-            <a:ext cx="10241280" cy="594360"/>
-          </a:xfrm>
-          <a:prstGeom prst="rect">
-            <a:avLst/>
-          </a:prstGeom>
-          <a:noFill/>
-        </p:spPr>
-        <p:txBody>
-          <a:bodyPr wrap="square" anchor="t">
-            <a:spAutoFit/>
-          </a:bodyPr>
-          <a:lstStyle/>
-          <a:p>
-            <a:pPr algn="l"/>
-            <a:r>
-              <a:rPr sz="3200" b="1">
-                <a:solidFill>
-                  <a:srgbClr val="5234B7"/>
-                </a:solidFill>
-                <a:latin typeface="DIN Next LT W23"/>
-                <a:ea typeface="DIN Next LT W23"/>
-                <a:cs typeface="DIN Next LT W23"/>
-              </a:rPr>
-              <a:t>Sequential Data &amp; Vanilla RNNs</a:t>
-            </a:r>
-          </a:p>
-        </p:txBody>
-      </p:sp>
-      <p:sp>
-        <p:nvSpPr>
-          <p:cNvPr id="7" name="TextBox 6"/>
-          <p:cNvSpPr txBox="1"/>
-          <p:nvPr/>
-        </p:nvSpPr>
-        <p:spPr>
-          <a:xfrm>
-            <a:off x="548640" y="1600200"/>
-            <a:ext cx="10241280" cy="365760"/>
-          </a:xfrm>
-          <a:prstGeom prst="rect">
-            <a:avLst/>
-          </a:prstGeom>
-          <a:noFill/>
-        </p:spPr>
-        <p:txBody>
-          <a:bodyPr wrap="square" anchor="t">
-            <a:spAutoFit/>
-          </a:bodyPr>
-          <a:lstStyle/>
-          <a:p>
-            <a:pPr algn="l"/>
-            <a:r>
-              <a:rPr sz="1500" b="0">
-                <a:solidFill>
-                  <a:srgbClr val="5A5470"/>
-                </a:solidFill>
-                <a:latin typeface="DIN Next LT W23"/>
-                <a:ea typeface="DIN Next LT W23"/>
-                <a:cs typeface="DIN Next LT W23"/>
-              </a:rPr>
-              <a:t>One Transition, Unfolded Through Time</a:t>
-            </a:r>
-          </a:p>
-        </p:txBody>
-      </p:sp>
-      <p:sp>
-        <p:nvSpPr>
-          <p:cNvPr id="8" name="Rounded Rectangle 7"/>
-          <p:cNvSpPr/>
-          <p:nvPr/>
-        </p:nvSpPr>
-        <p:spPr>
-          <a:xfrm>
-            <a:off x="548640" y="1965960"/>
-            <a:ext cx="10972800" cy="640080"/>
-          </a:xfrm>
-          <a:prstGeom prst="roundRect">
-            <a:avLst>
-              <a:gd name="adj" fmla="val 10000"/>
-            </a:avLst>
-          </a:prstGeom>
-          <a:solidFill>
-            <a:srgbClr val="EEE8FA"/>
-          </a:solidFill>
-          <a:ln>
-            <a:noFill/>
-          </a:ln>
-          <a:effectLst/>
-        </p:spPr>
-        <p:style>
-          <a:lnRef idx="1">
-            <a:schemeClr val="accent1"/>
-          </a:lnRef>
-          <a:fillRef idx="3">
-            <a:schemeClr val="accent1"/>
-          </a:fillRef>
-          <a:effectRef idx="2">
-            <a:schemeClr val="accent1"/>
-          </a:effectRef>
-          <a:fontRef idx="minor">
-            <a:schemeClr val="lt1"/>
-          </a:fontRef>
-        </p:style>
-        <p:txBody>
-          <a:bodyPr rtlCol="0" anchor="ctr"/>
-          <a:lstStyle/>
-          <a:p>
-            <a:pPr algn="ctr"/>
-          </a:p>
-        </p:txBody>
-      </p:sp>
-      <p:sp>
-        <p:nvSpPr>
-          <p:cNvPr id="9" name="TextBox 8"/>
-          <p:cNvSpPr txBox="1"/>
-          <p:nvPr/>
-        </p:nvSpPr>
-        <p:spPr>
-          <a:xfrm>
-            <a:off x="868680" y="2084831"/>
-            <a:ext cx="10332720" cy="411480"/>
-          </a:xfrm>
-          <a:prstGeom prst="rect">
-            <a:avLst/>
-          </a:prstGeom>
-          <a:noFill/>
-        </p:spPr>
-        <p:txBody>
-          <a:bodyPr wrap="square" anchor="t">
-            <a:spAutoFit/>
-          </a:bodyPr>
-          <a:lstStyle/>
-          <a:p>
-            <a:pPr algn="l"/>
-            <a:r>
-              <a:rPr sz="1400" b="0">
-                <a:solidFill>
-                  <a:srgbClr val="121018"/>
-                </a:solidFill>
-                <a:latin typeface="DIN Next LT W23"/>
-                <a:ea typeface="DIN Next LT W23"/>
-                <a:cs typeface="DIN Next LT W23"/>
-              </a:rPr>
-              <a:t>Text, audio, and sensors have order. Shuffling them destroys meaning.</a:t>
-            </a:r>
-          </a:p>
-        </p:txBody>
-      </p:sp>
-      <p:sp>
-        <p:nvSpPr>
-          <p:cNvPr id="10" name="Rounded Rectangle 9"/>
-          <p:cNvSpPr/>
-          <p:nvPr/>
-        </p:nvSpPr>
-        <p:spPr>
-          <a:xfrm>
-            <a:off x="548640" y="2743200"/>
-            <a:ext cx="10972800" cy="1417320"/>
-          </a:xfrm>
-          <a:prstGeom prst="roundRect">
-            <a:avLst>
-              <a:gd name="adj" fmla="val 10000"/>
-            </a:avLst>
-          </a:prstGeom>
-          <a:solidFill>
-            <a:srgbClr val="EEE8FA"/>
-          </a:solidFill>
-          <a:ln>
-            <a:noFill/>
-          </a:ln>
-          <a:effectLst/>
-        </p:spPr>
-        <p:style>
-          <a:lnRef idx="1">
-            <a:schemeClr val="accent1"/>
-          </a:lnRef>
-          <a:fillRef idx="3">
-            <a:schemeClr val="accent1"/>
-          </a:fillRef>
-          <a:effectRef idx="2">
-            <a:schemeClr val="accent1"/>
-          </a:effectRef>
-          <a:fontRef idx="minor">
-            <a:schemeClr val="lt1"/>
-          </a:fontRef>
-        </p:style>
-        <p:txBody>
-          <a:bodyPr rtlCol="0" anchor="ctr"/>
-          <a:lstStyle/>
-          <a:p>
-            <a:pPr algn="ctr"/>
-          </a:p>
-        </p:txBody>
-      </p:sp>
-      <p:pic>
-        <p:nvPicPr>
-          <p:cNvPr id="11" name="Picture 10" descr="f-2d62af7528050520.png"/>
-          <p:cNvPicPr>
-            <a:picLocks noChangeAspect="1"/>
-          </p:cNvPicPr>
-          <p:nvPr/>
-        </p:nvPicPr>
-        <p:blipFill>
-          <a:blip r:embed="rId3"/>
-          <a:stretch>
-            <a:fillRect/>
-          </a:stretch>
-        </p:blipFill>
-        <p:spPr>
-          <a:xfrm>
-            <a:off x="2529632" y="2852928"/>
-            <a:ext cx="7010814" cy="868680"/>
-          </a:xfrm>
-          <a:prstGeom prst="rect">
-            <a:avLst/>
-          </a:prstGeom>
-        </p:spPr>
-      </p:pic>
-      <p:sp>
-        <p:nvSpPr>
-          <p:cNvPr id="12" name="TextBox 11"/>
-          <p:cNvSpPr txBox="1"/>
-          <p:nvPr/>
-        </p:nvSpPr>
-        <p:spPr>
-          <a:xfrm>
-            <a:off x="914400" y="3840480"/>
-            <a:ext cx="10241280" cy="256032"/>
-          </a:xfrm>
-          <a:prstGeom prst="rect">
-            <a:avLst/>
-          </a:prstGeom>
-          <a:noFill/>
-        </p:spPr>
-        <p:txBody>
-          <a:bodyPr wrap="square" anchor="t">
-            <a:spAutoFit/>
-          </a:bodyPr>
-          <a:lstStyle/>
-          <a:p>
-            <a:pPr algn="ctr"/>
-            <a:r>
-              <a:rPr sz="1200" b="0">
-                <a:solidFill>
-                  <a:srgbClr val="5A5470"/>
-                </a:solidFill>
-                <a:latin typeface="DIN Next LT W23"/>
-                <a:ea typeface="DIN Next LT W23"/>
-                <a:cs typeface="DIN Next LT W23"/>
-              </a:rPr>
-              <a:t>Same weights at every timestep  ·  hₜ is a running memory of the past</a:t>
-            </a:r>
-          </a:p>
-        </p:txBody>
-      </p:sp>
-      <p:sp>
-        <p:nvSpPr>
-          <p:cNvPr id="13" name="TextBox 12"/>
-          <p:cNvSpPr txBox="1"/>
-          <p:nvPr/>
-        </p:nvSpPr>
-        <p:spPr>
-          <a:xfrm>
-            <a:off x="548640" y="4270248"/>
-            <a:ext cx="320040" cy="384048"/>
-          </a:xfrm>
-          <a:prstGeom prst="rect">
-            <a:avLst/>
-          </a:prstGeom>
-          <a:noFill/>
-        </p:spPr>
-        <p:txBody>
-          <a:bodyPr wrap="square" anchor="t">
-            <a:spAutoFit/>
-          </a:bodyPr>
-          <a:lstStyle/>
-          <a:p>
-            <a:pPr algn="l"/>
-            <a:r>
-              <a:rPr sz="1300" b="0">
-                <a:solidFill>
-                  <a:srgbClr val="9E59CD"/>
-                </a:solidFill>
-                <a:latin typeface="DIN Next LT W23"/>
-                <a:ea typeface="DIN Next LT W23"/>
-                <a:cs typeface="DIN Next LT W23"/>
-              </a:rPr>
-              <a:t>–</a:t>
-            </a:r>
-          </a:p>
-        </p:txBody>
-      </p:sp>
-      <p:sp>
-        <p:nvSpPr>
-          <p:cNvPr id="14" name="TextBox 13"/>
-          <p:cNvSpPr txBox="1"/>
-          <p:nvPr/>
-        </p:nvSpPr>
-        <p:spPr>
-          <a:xfrm>
-            <a:off x="914400" y="4270248"/>
-            <a:ext cx="9875519" cy="384048"/>
-          </a:xfrm>
-          <a:prstGeom prst="rect">
-            <a:avLst/>
-          </a:prstGeom>
-          <a:noFill/>
-        </p:spPr>
-        <p:txBody>
-          <a:bodyPr wrap="square" anchor="t">
-            <a:spAutoFit/>
-          </a:bodyPr>
-          <a:lstStyle/>
-          <a:p>
-            <a:pPr algn="l"/>
-            <a:r>
-              <a:rPr sz="1300" b="0">
-                <a:solidFill>
-                  <a:srgbClr val="121018"/>
-                </a:solidFill>
-                <a:latin typeface="DIN Next LT W23"/>
-                <a:ea typeface="DIN Next LT W23"/>
-                <a:cs typeface="DIN Next LT W23"/>
-              </a:rPr>
-              <a:t>Parameter sharing across time is efficient — but long sequences multiply Jacobians.</a:t>
-            </a:r>
-          </a:p>
-        </p:txBody>
-      </p:sp>
-      <p:sp>
-        <p:nvSpPr>
-          <p:cNvPr id="15" name="TextBox 14"/>
-          <p:cNvSpPr txBox="1"/>
-          <p:nvPr/>
-        </p:nvSpPr>
-        <p:spPr>
-          <a:xfrm>
-            <a:off x="548640" y="4690872"/>
-            <a:ext cx="320040" cy="384048"/>
-          </a:xfrm>
-          <a:prstGeom prst="rect">
-            <a:avLst/>
-          </a:prstGeom>
-          <a:noFill/>
-        </p:spPr>
-        <p:txBody>
-          <a:bodyPr wrap="square" anchor="t">
-            <a:spAutoFit/>
-          </a:bodyPr>
-          <a:lstStyle/>
-          <a:p>
-            <a:pPr algn="l"/>
-            <a:r>
-              <a:rPr sz="1300" b="0">
-                <a:solidFill>
-                  <a:srgbClr val="9E59CD"/>
-                </a:solidFill>
-                <a:latin typeface="DIN Next LT W23"/>
-                <a:ea typeface="DIN Next LT W23"/>
-                <a:cs typeface="DIN Next LT W23"/>
-              </a:rPr>
-              <a:t>–</a:t>
-            </a:r>
-          </a:p>
-        </p:txBody>
-      </p:sp>
-      <p:sp>
-        <p:nvSpPr>
-          <p:cNvPr id="16" name="TextBox 15"/>
-          <p:cNvSpPr txBox="1"/>
-          <p:nvPr/>
-        </p:nvSpPr>
-        <p:spPr>
-          <a:xfrm>
-            <a:off x="914400" y="4690872"/>
-            <a:ext cx="9875519" cy="384048"/>
-          </a:xfrm>
-          <a:prstGeom prst="rect">
-            <a:avLst/>
-          </a:prstGeom>
-          <a:noFill/>
-        </p:spPr>
-        <p:txBody>
-          <a:bodyPr wrap="square" anchor="t">
-            <a:spAutoFit/>
-          </a:bodyPr>
-          <a:lstStyle/>
-          <a:p>
-            <a:pPr algn="l"/>
-            <a:r>
-              <a:rPr sz="1300" b="0">
-                <a:solidFill>
-                  <a:srgbClr val="121018"/>
-                </a:solidFill>
-                <a:latin typeface="DIN Next LT W23"/>
-                <a:ea typeface="DIN Next LT W23"/>
-                <a:cs typeface="DIN Next LT W23"/>
-              </a:rPr>
-              <a:t>Vanilla RNNs struggle with long-range dependencies (vanishing / exploding gradients).</a:t>
-            </a:r>
-          </a:p>
-        </p:txBody>
-      </p:sp>
-      <p:sp>
-        <p:nvSpPr>
-          <p:cNvPr id="17" name="TextBox 16"/>
-          <p:cNvSpPr txBox="1"/>
-          <p:nvPr/>
-        </p:nvSpPr>
-        <p:spPr>
-          <a:xfrm>
-            <a:off x="548640" y="5989320"/>
-            <a:ext cx="10972800" cy="228600"/>
-          </a:xfrm>
-          <a:prstGeom prst="rect">
-            <a:avLst/>
-          </a:prstGeom>
-          <a:noFill/>
-        </p:spPr>
-        <p:txBody>
-          <a:bodyPr wrap="square" anchor="t">
-            <a:spAutoFit/>
-          </a:bodyPr>
-          <a:lstStyle/>
-          <a:p>
-            <a:pPr algn="l"/>
-            <a:r>
-              <a:rPr sz="1200" b="0">
-                <a:solidFill>
-                  <a:srgbClr val="5A5470"/>
-                </a:solidFill>
-                <a:latin typeface="DIN Next LT W23"/>
-                <a:ea typeface="DIN Next LT W23"/>
-                <a:cs typeface="DIN Next LT W23"/>
-              </a:rPr>
-              <a:t>Backprop through 50 steps ≈ multiplying a matrix 50 times.</a:t>
-            </a:r>
-          </a:p>
-        </p:txBody>
-      </p:sp>
-      <p:sp>
-        <p:nvSpPr>
-          <p:cNvPr id="18" name="Rectangle 17"/>
-          <p:cNvSpPr/>
-          <p:nvPr/>
-        </p:nvSpPr>
-        <p:spPr>
-          <a:xfrm>
-            <a:off x="548640" y="6446520"/>
-            <a:ext cx="11064240" cy="10972"/>
-          </a:xfrm>
-          <a:prstGeom prst="rect">
-            <a:avLst/>
-          </a:prstGeom>
-          <a:solidFill>
-            <a:srgbClr val="5234B7"/>
-          </a:solidFill>
-          <a:ln>
-            <a:noFill/>
-          </a:ln>
-          <a:effectLst/>
-        </p:spPr>
-        <p:style>
-          <a:lnRef idx="1">
-            <a:schemeClr val="accent1"/>
-          </a:lnRef>
-          <a:fillRef idx="3">
-            <a:schemeClr val="accent1"/>
-          </a:fillRef>
-          <a:effectRef idx="2">
-            <a:schemeClr val="accent1"/>
-          </a:effectRef>
-          <a:fontRef idx="minor">
-            <a:schemeClr val="lt1"/>
-          </a:fontRef>
-        </p:style>
-        <p:txBody>
-          <a:bodyPr rtlCol="0" anchor="ctr"/>
-          <a:lstStyle/>
-          <a:p>
-            <a:pPr algn="ctr"/>
-          </a:p>
-        </p:txBody>
-      </p:sp>
-      <p:sp>
-        <p:nvSpPr>
-          <p:cNvPr id="19" name="TextBox 18"/>
-          <p:cNvSpPr txBox="1"/>
-          <p:nvPr/>
-        </p:nvSpPr>
-        <p:spPr>
-          <a:xfrm>
-            <a:off x="548640" y="6510528"/>
-            <a:ext cx="2743200" cy="256032"/>
-          </a:xfrm>
-          <a:prstGeom prst="rect">
-            <a:avLst/>
-          </a:prstGeom>
-          <a:noFill/>
-        </p:spPr>
-        <p:txBody>
-          <a:bodyPr wrap="square" anchor="t">
-            <a:spAutoFit/>
-          </a:bodyPr>
-          <a:lstStyle/>
-          <a:p>
-            <a:pPr algn="l"/>
-            <a:r>
-              <a:rPr sz="1100" b="1">
-                <a:solidFill>
-                  <a:srgbClr val="5234B7"/>
-                </a:solidFill>
-                <a:latin typeface="DIN Next LT W23"/>
-                <a:ea typeface="DIN Next LT W23"/>
-                <a:cs typeface="DIN Next LT W23"/>
-              </a:rPr>
-              <a:t>ETRA</a:t>
-            </a:r>
-          </a:p>
-        </p:txBody>
-      </p:sp>
-      <p:sp>
-        <p:nvSpPr>
-          <p:cNvPr id="20" name="TextBox 19"/>
-          <p:cNvSpPr txBox="1"/>
-          <p:nvPr/>
-        </p:nvSpPr>
-        <p:spPr>
-          <a:xfrm>
-            <a:off x="9601200" y="6510528"/>
-            <a:ext cx="2011680" cy="256032"/>
-          </a:xfrm>
-          <a:prstGeom prst="rect">
-            <a:avLst/>
-          </a:prstGeom>
-          <a:noFill/>
-        </p:spPr>
-        <p:txBody>
-          <a:bodyPr wrap="square" anchor="t">
-            <a:spAutoFit/>
-          </a:bodyPr>
-          <a:lstStyle/>
-          <a:p>
-            <a:pPr algn="r"/>
-            <a:r>
-              <a:rPr sz="1100" b="0">
-                <a:solidFill>
-                  <a:srgbClr val="5A5470"/>
-                </a:solidFill>
-                <a:latin typeface="DIN Next LT W23"/>
-                <a:ea typeface="DIN Next LT W23"/>
-                <a:cs typeface="DIN Next LT W23"/>
-              </a:rPr>
-              <a:t>71  /  76</a:t>
+              <a:t>71  /  77</a:t>
             </a:r>
           </a:p>
         </p:txBody>
@@ -47490,7 +47223,7 @@
                 <a:ea typeface="DIN Next LT W23"/>
                 <a:cs typeface="DIN Next LT W23"/>
               </a:rPr>
-              <a:t>RNN Unfolded Through Time</a:t>
+              <a:t>Sequential Data &amp; Vanilla RNNs</a:t>
             </a:r>
           </a:p>
         </p:txBody>
@@ -47527,7 +47260,7 @@
                 <a:ea typeface="DIN Next LT W23"/>
                 <a:cs typeface="DIN Next LT W23"/>
               </a:rPr>
-              <a:t>Rolled Cell = Shared Weights Across Steps</a:t>
+              <a:t>One Transition, Unfolded Through Time</a:t>
             </a:r>
           </a:p>
         </p:txBody>
@@ -47541,7 +47274,7 @@
         <p:spPr>
           <a:xfrm>
             <a:off x="548640" y="1965960"/>
-            <a:ext cx="10972800" cy="3977639"/>
+            <a:ext cx="10972800" cy="640080"/>
           </a:xfrm>
           <a:prstGeom prst="roundRect">
             <a:avLst>
@@ -47578,9 +47311,92 @@
           </a:p>
         </p:txBody>
       </p:sp>
+      <p:sp>
+        <p:nvSpPr>
+          <p:cNvPr id="9" name="TextBox 8"/>
+          <p:cNvSpPr txBox="1"/>
+          <p:nvPr/>
+        </p:nvSpPr>
+        <p:spPr>
+          <a:xfrm>
+            <a:off x="868680" y="2084831"/>
+            <a:ext cx="10332720" cy="411480"/>
+          </a:xfrm>
+          <a:prstGeom prst="rect">
+            <a:avLst/>
+          </a:prstGeom>
+          <a:noFill/>
+        </p:spPr>
+        <p:txBody>
+          <a:bodyPr wrap="square" anchor="t">
+            <a:spAutoFit/>
+          </a:bodyPr>
+          <a:lstStyle/>
+          <a:p>
+            <a:pPr algn="l"/>
+            <a:r>
+              <a:rPr sz="1400" b="0">
+                <a:solidFill>
+                  <a:srgbClr val="121018"/>
+                </a:solidFill>
+                <a:latin typeface="DIN Next LT W23"/>
+                <a:ea typeface="DIN Next LT W23"/>
+                <a:cs typeface="DIN Next LT W23"/>
+              </a:rPr>
+              <a:t>Text, audio, and sensors have order. Shuffling them destroys meaning.</a:t>
+            </a:r>
+          </a:p>
+        </p:txBody>
+      </p:sp>
+      <p:sp>
+        <p:nvSpPr>
+          <p:cNvPr id="10" name="Rounded Rectangle 9"/>
+          <p:cNvSpPr/>
+          <p:nvPr/>
+        </p:nvSpPr>
+        <p:spPr>
+          <a:xfrm>
+            <a:off x="548640" y="2743200"/>
+            <a:ext cx="10972800" cy="1417320"/>
+          </a:xfrm>
+          <a:prstGeom prst="roundRect">
+            <a:avLst>
+              <a:gd name="adj" fmla="val 10000"/>
+            </a:avLst>
+          </a:prstGeom>
+          <a:solidFill>
+            <a:srgbClr val="EEE8FA"/>
+          </a:solidFill>
+          <a:ln>
+            <a:noFill/>
+          </a:ln>
+          <a:effectLst/>
+        </p:spPr>
+        <p:style>
+          <a:lnRef idx="1">
+            <a:schemeClr val="accent1"/>
+          </a:lnRef>
+          <a:fillRef idx="3">
+            <a:schemeClr val="accent1"/>
+          </a:fillRef>
+          <a:effectRef idx="2">
+            <a:schemeClr val="accent1"/>
+          </a:effectRef>
+          <a:fontRef idx="minor">
+            <a:schemeClr val="lt1"/>
+          </a:fontRef>
+        </p:style>
+        <p:txBody>
+          <a:bodyPr rtlCol="0" anchor="ctr"/>
+          <a:lstStyle/>
+          <a:p>
+            <a:pPr algn="ctr"/>
+          </a:p>
+        </p:txBody>
+      </p:sp>
       <p:pic>
         <p:nvPicPr>
-          <p:cNvPr id="9" name="Picture 8" descr="rnn-unfold.png"/>
+          <p:cNvPr id="11" name="Picture 10" descr="f-2d62af7528050520.png"/>
           <p:cNvPicPr>
             <a:picLocks noChangeAspect="1"/>
           </p:cNvPicPr>
@@ -47594,8 +47410,8 @@
         </p:blipFill>
         <p:spPr>
           <a:xfrm>
-            <a:off x="1177732" y="2103120"/>
-            <a:ext cx="9714615" cy="3703320"/>
+            <a:off x="2529632" y="2852928"/>
+            <a:ext cx="7010814" cy="868680"/>
           </a:xfrm>
           <a:prstGeom prst="rect">
             <a:avLst/>
@@ -47604,13 +47420,198 @@
       </p:pic>
       <p:sp>
         <p:nvSpPr>
-          <p:cNvPr id="10" name="TextBox 9"/>
-          <p:cNvSpPr txBox="1"/>
-          <p:nvPr/>
-        </p:nvSpPr>
-        <p:spPr>
-          <a:xfrm>
-            <a:off x="548640" y="6309360"/>
+          <p:cNvPr id="12" name="TextBox 11"/>
+          <p:cNvSpPr txBox="1"/>
+          <p:nvPr/>
+        </p:nvSpPr>
+        <p:spPr>
+          <a:xfrm>
+            <a:off x="914400" y="3840480"/>
+            <a:ext cx="10241280" cy="256032"/>
+          </a:xfrm>
+          <a:prstGeom prst="rect">
+            <a:avLst/>
+          </a:prstGeom>
+          <a:noFill/>
+        </p:spPr>
+        <p:txBody>
+          <a:bodyPr wrap="square" anchor="t">
+            <a:spAutoFit/>
+          </a:bodyPr>
+          <a:lstStyle/>
+          <a:p>
+            <a:pPr algn="ctr"/>
+            <a:r>
+              <a:rPr sz="1200" b="0">
+                <a:solidFill>
+                  <a:srgbClr val="5A5470"/>
+                </a:solidFill>
+                <a:latin typeface="DIN Next LT W23"/>
+                <a:ea typeface="DIN Next LT W23"/>
+                <a:cs typeface="DIN Next LT W23"/>
+              </a:rPr>
+              <a:t>Same weights at every timestep  ·  hₜ is a running memory of the past</a:t>
+            </a:r>
+          </a:p>
+        </p:txBody>
+      </p:sp>
+      <p:sp>
+        <p:nvSpPr>
+          <p:cNvPr id="13" name="TextBox 12"/>
+          <p:cNvSpPr txBox="1"/>
+          <p:nvPr/>
+        </p:nvSpPr>
+        <p:spPr>
+          <a:xfrm>
+            <a:off x="548640" y="4270248"/>
+            <a:ext cx="320040" cy="384048"/>
+          </a:xfrm>
+          <a:prstGeom prst="rect">
+            <a:avLst/>
+          </a:prstGeom>
+          <a:noFill/>
+        </p:spPr>
+        <p:txBody>
+          <a:bodyPr wrap="square" anchor="t">
+            <a:spAutoFit/>
+          </a:bodyPr>
+          <a:lstStyle/>
+          <a:p>
+            <a:pPr algn="l"/>
+            <a:r>
+              <a:rPr sz="1300" b="0">
+                <a:solidFill>
+                  <a:srgbClr val="9E59CD"/>
+                </a:solidFill>
+                <a:latin typeface="DIN Next LT W23"/>
+                <a:ea typeface="DIN Next LT W23"/>
+                <a:cs typeface="DIN Next LT W23"/>
+              </a:rPr>
+              <a:t>–</a:t>
+            </a:r>
+          </a:p>
+        </p:txBody>
+      </p:sp>
+      <p:sp>
+        <p:nvSpPr>
+          <p:cNvPr id="14" name="TextBox 13"/>
+          <p:cNvSpPr txBox="1"/>
+          <p:nvPr/>
+        </p:nvSpPr>
+        <p:spPr>
+          <a:xfrm>
+            <a:off x="914400" y="4270248"/>
+            <a:ext cx="9875519" cy="384048"/>
+          </a:xfrm>
+          <a:prstGeom prst="rect">
+            <a:avLst/>
+          </a:prstGeom>
+          <a:noFill/>
+        </p:spPr>
+        <p:txBody>
+          <a:bodyPr wrap="square" anchor="t">
+            <a:spAutoFit/>
+          </a:bodyPr>
+          <a:lstStyle/>
+          <a:p>
+            <a:pPr algn="l"/>
+            <a:r>
+              <a:rPr sz="1300" b="0">
+                <a:solidFill>
+                  <a:srgbClr val="121018"/>
+                </a:solidFill>
+                <a:latin typeface="DIN Next LT W23"/>
+                <a:ea typeface="DIN Next LT W23"/>
+                <a:cs typeface="DIN Next LT W23"/>
+              </a:rPr>
+              <a:t>Parameter sharing across time is efficient — but long sequences multiply Jacobians.</a:t>
+            </a:r>
+          </a:p>
+        </p:txBody>
+      </p:sp>
+      <p:sp>
+        <p:nvSpPr>
+          <p:cNvPr id="15" name="TextBox 14"/>
+          <p:cNvSpPr txBox="1"/>
+          <p:nvPr/>
+        </p:nvSpPr>
+        <p:spPr>
+          <a:xfrm>
+            <a:off x="548640" y="4690872"/>
+            <a:ext cx="320040" cy="384048"/>
+          </a:xfrm>
+          <a:prstGeom prst="rect">
+            <a:avLst/>
+          </a:prstGeom>
+          <a:noFill/>
+        </p:spPr>
+        <p:txBody>
+          <a:bodyPr wrap="square" anchor="t">
+            <a:spAutoFit/>
+          </a:bodyPr>
+          <a:lstStyle/>
+          <a:p>
+            <a:pPr algn="l"/>
+            <a:r>
+              <a:rPr sz="1300" b="0">
+                <a:solidFill>
+                  <a:srgbClr val="9E59CD"/>
+                </a:solidFill>
+                <a:latin typeface="DIN Next LT W23"/>
+                <a:ea typeface="DIN Next LT W23"/>
+                <a:cs typeface="DIN Next LT W23"/>
+              </a:rPr>
+              <a:t>–</a:t>
+            </a:r>
+          </a:p>
+        </p:txBody>
+      </p:sp>
+      <p:sp>
+        <p:nvSpPr>
+          <p:cNvPr id="16" name="TextBox 15"/>
+          <p:cNvSpPr txBox="1"/>
+          <p:nvPr/>
+        </p:nvSpPr>
+        <p:spPr>
+          <a:xfrm>
+            <a:off x="914400" y="4690872"/>
+            <a:ext cx="9875519" cy="384048"/>
+          </a:xfrm>
+          <a:prstGeom prst="rect">
+            <a:avLst/>
+          </a:prstGeom>
+          <a:noFill/>
+        </p:spPr>
+        <p:txBody>
+          <a:bodyPr wrap="square" anchor="t">
+            <a:spAutoFit/>
+          </a:bodyPr>
+          <a:lstStyle/>
+          <a:p>
+            <a:pPr algn="l"/>
+            <a:r>
+              <a:rPr sz="1300" b="0">
+                <a:solidFill>
+                  <a:srgbClr val="121018"/>
+                </a:solidFill>
+                <a:latin typeface="DIN Next LT W23"/>
+                <a:ea typeface="DIN Next LT W23"/>
+                <a:cs typeface="DIN Next LT W23"/>
+              </a:rPr>
+              <a:t>Vanilla RNNs struggle with long-range dependencies (vanishing / exploding gradients).</a:t>
+            </a:r>
+          </a:p>
+        </p:txBody>
+      </p:sp>
+      <p:sp>
+        <p:nvSpPr>
+          <p:cNvPr id="17" name="TextBox 16"/>
+          <p:cNvSpPr txBox="1"/>
+          <p:nvPr/>
+        </p:nvSpPr>
+        <p:spPr>
+          <a:xfrm>
+            <a:off x="548640" y="5989320"/>
             <a:ext cx="10972800" cy="228600"/>
           </a:xfrm>
           <a:prstGeom prst="rect">
@@ -47626,7 +47627,7 @@
           <a:p>
             <a:pPr algn="l"/>
             <a:r>
-              <a:rPr sz="1100" b="0">
+              <a:rPr sz="1200" b="0">
                 <a:solidFill>
                   <a:srgbClr val="5A5470"/>
                 </a:solidFill>
@@ -47634,14 +47635,14 @@
                 <a:ea typeface="DIN Next LT W23"/>
                 <a:cs typeface="DIN Next LT W23"/>
               </a:rPr>
-              <a:t>Cannot fully parallelize timesteps — each hₜ waits on hₜ₋₁.</a:t>
-            </a:r>
-          </a:p>
-        </p:txBody>
-      </p:sp>
-      <p:sp>
-        <p:nvSpPr>
-          <p:cNvPr id="11" name="Rectangle 10"/>
+              <a:t>Backprop through 50 steps ≈ multiplying a matrix 50 times.</a:t>
+            </a:r>
+          </a:p>
+        </p:txBody>
+      </p:sp>
+      <p:sp>
+        <p:nvSpPr>
+          <p:cNvPr id="18" name="Rectangle 17"/>
           <p:cNvSpPr/>
           <p:nvPr/>
         </p:nvSpPr>
@@ -47685,7 +47686,7 @@
       </p:sp>
       <p:sp>
         <p:nvSpPr>
-          <p:cNvPr id="12" name="TextBox 11"/>
+          <p:cNvPr id="19" name="TextBox 18"/>
           <p:cNvSpPr txBox="1"/>
           <p:nvPr/>
         </p:nvSpPr>
@@ -47722,7 +47723,7 @@
       </p:sp>
       <p:sp>
         <p:nvSpPr>
-          <p:cNvPr id="13" name="TextBox 12"/>
+          <p:cNvPr id="20" name="TextBox 19"/>
           <p:cNvSpPr txBox="1"/>
           <p:nvPr/>
         </p:nvSpPr>
@@ -47752,7 +47753,7 @@
                 <a:ea typeface="DIN Next LT W23"/>
                 <a:cs typeface="DIN Next LT W23"/>
               </a:rPr>
-              <a:t>72  /  76</a:t>
+              <a:t>72  /  77</a:t>
             </a:r>
           </a:p>
         </p:txBody>
@@ -47964,7 +47965,7 @@
                 <a:ea typeface="DIN Next LT W23"/>
                 <a:cs typeface="DIN Next LT W23"/>
               </a:rPr>
-              <a:t>LSTM: Gates for Long-Term Memory</a:t>
+              <a:t>RNN Unfolded Through Time</a:t>
             </a:r>
           </a:p>
         </p:txBody>
@@ -48001,57 +48002,20 @@
                 <a:ea typeface="DIN Next LT W23"/>
                 <a:cs typeface="DIN Next LT W23"/>
               </a:rPr>
-              <a:t>Forget, Input, Output — Cell State Flows Linearly</a:t>
-            </a:r>
-          </a:p>
-        </p:txBody>
-      </p:sp>
-      <p:sp>
-        <p:nvSpPr>
-          <p:cNvPr id="8" name="TextBox 7"/>
-          <p:cNvSpPr txBox="1"/>
-          <p:nvPr/>
-        </p:nvSpPr>
-        <p:spPr>
-          <a:xfrm>
-            <a:off x="548640" y="1920240"/>
-            <a:ext cx="10972800" cy="320040"/>
-          </a:xfrm>
-          <a:prstGeom prst="rect">
-            <a:avLst/>
-          </a:prstGeom>
-          <a:noFill/>
-        </p:spPr>
-        <p:txBody>
-          <a:bodyPr wrap="square" anchor="t">
-            <a:spAutoFit/>
-          </a:bodyPr>
-          <a:lstStyle/>
-          <a:p>
-            <a:pPr algn="l"/>
-            <a:r>
-              <a:rPr sz="1300" b="0">
-                <a:solidFill>
-                  <a:srgbClr val="5A5470"/>
-                </a:solidFill>
-                <a:latin typeface="DIN Next LT W23"/>
-                <a:ea typeface="DIN Next LT W23"/>
-                <a:cs typeface="DIN Next LT W23"/>
-              </a:rPr>
-              <a:t>LSTM adds a cell state cₜ with an additive path, so signal can travel many steps without vanishing.</a:t>
-            </a:r>
-          </a:p>
-        </p:txBody>
-      </p:sp>
-      <p:sp>
-        <p:nvSpPr>
-          <p:cNvPr id="9" name="Rounded Rectangle 8"/>
+              <a:t>Rolled Cell = Shared Weights Across Steps</a:t>
+            </a:r>
+          </a:p>
+        </p:txBody>
+      </p:sp>
+      <p:sp>
+        <p:nvSpPr>
+          <p:cNvPr id="8" name="Rounded Rectangle 7"/>
           <p:cNvSpPr/>
           <p:nvPr/>
         </p:nvSpPr>
         <p:spPr>
           <a:xfrm>
-            <a:off x="548640" y="2240280"/>
+            <a:off x="548640" y="1965960"/>
             <a:ext cx="10972800" cy="3977639"/>
           </a:xfrm>
           <a:prstGeom prst="roundRect">
@@ -48091,7 +48055,7 @@
       </p:sp>
       <p:pic>
         <p:nvPicPr>
-          <p:cNvPr id="10" name="Picture 9" descr="lstm-gates.png"/>
+          <p:cNvPr id="9" name="Picture 8" descr="rnn-unfold.png"/>
           <p:cNvPicPr>
             <a:picLocks noChangeAspect="1"/>
           </p:cNvPicPr>
@@ -48105,8 +48069,8 @@
         </p:blipFill>
         <p:spPr>
           <a:xfrm>
-            <a:off x="1056046" y="2377440"/>
-            <a:ext cx="9957987" cy="3703320"/>
+            <a:off x="1177732" y="2103120"/>
+            <a:ext cx="9714615" cy="3703320"/>
           </a:xfrm>
           <a:prstGeom prst="rect">
             <a:avLst/>
@@ -48115,7 +48079,7 @@
       </p:pic>
       <p:sp>
         <p:nvSpPr>
-          <p:cNvPr id="11" name="TextBox 10"/>
+          <p:cNvPr id="10" name="TextBox 9"/>
           <p:cNvSpPr txBox="1"/>
           <p:nvPr/>
         </p:nvSpPr>
@@ -48145,14 +48109,14 @@
                 <a:ea typeface="DIN Next LT W23"/>
                 <a:cs typeface="DIN Next LT W23"/>
               </a:rPr>
-              <a:t>GRU is a simpler cousin (two gates). Transformers later replace recurrence with attention.</a:t>
-            </a:r>
-          </a:p>
-        </p:txBody>
-      </p:sp>
-      <p:sp>
-        <p:nvSpPr>
-          <p:cNvPr id="12" name="Rectangle 11"/>
+              <a:t>Cannot fully parallelize timesteps — each hₜ waits on hₜ₋₁.</a:t>
+            </a:r>
+          </a:p>
+        </p:txBody>
+      </p:sp>
+      <p:sp>
+        <p:nvSpPr>
+          <p:cNvPr id="11" name="Rectangle 10"/>
           <p:cNvSpPr/>
           <p:nvPr/>
         </p:nvSpPr>
@@ -48196,7 +48160,7 @@
       </p:sp>
       <p:sp>
         <p:nvSpPr>
-          <p:cNvPr id="13" name="TextBox 12"/>
+          <p:cNvPr id="12" name="TextBox 11"/>
           <p:cNvSpPr txBox="1"/>
           <p:nvPr/>
         </p:nvSpPr>
@@ -48233,7 +48197,7 @@
       </p:sp>
       <p:sp>
         <p:nvSpPr>
-          <p:cNvPr id="14" name="TextBox 13"/>
+          <p:cNvPr id="13" name="TextBox 12"/>
           <p:cNvSpPr txBox="1"/>
           <p:nvPr/>
         </p:nvSpPr>
@@ -48263,7 +48227,7 @@
                 <a:ea typeface="DIN Next LT W23"/>
                 <a:cs typeface="DIN Next LT W23"/>
               </a:rPr>
-              <a:t>73  /  76</a:t>
+              <a:t>73  /  77</a:t>
             </a:r>
           </a:p>
         </p:txBody>
@@ -48277,6 +48241,517 @@
 </file>
 
 <file path=ppt/slides/slide74.xml><?xml version="1.0" encoding="utf-8"?>
+<p:sld xmlns:a="http://schemas.openxmlformats.org/drawingml/2006/main" xmlns:p="http://schemas.openxmlformats.org/presentationml/2006/main" xmlns:r="http://schemas.openxmlformats.org/officeDocument/2006/relationships">
+  <p:cSld>
+    <p:bg>
+      <p:bgPr>
+        <a:solidFill>
+          <a:srgbClr val="FAF8FF"/>
+        </a:solidFill>
+        <a:effectLst/>
+      </p:bgPr>
+    </p:bg>
+    <p:spTree>
+      <p:nvGrpSpPr>
+        <p:cNvPr id="1" name=""/>
+        <p:cNvGrpSpPr/>
+        <p:nvPr/>
+      </p:nvGrpSpPr>
+      <p:grpSpPr/>
+      <p:sp>
+        <p:nvSpPr>
+          <p:cNvPr id="2" name="Rectangle 1"/>
+          <p:cNvSpPr/>
+          <p:nvPr/>
+        </p:nvSpPr>
+        <p:spPr>
+          <a:xfrm>
+            <a:off x="12136831" y="0"/>
+            <a:ext cx="54864" cy="6858000"/>
+          </a:xfrm>
+          <a:prstGeom prst="rect">
+            <a:avLst/>
+          </a:prstGeom>
+          <a:solidFill>
+            <a:srgbClr val="5234B7"/>
+          </a:solidFill>
+          <a:ln>
+            <a:noFill/>
+          </a:ln>
+          <a:effectLst/>
+        </p:spPr>
+        <p:style>
+          <a:lnRef idx="1">
+            <a:schemeClr val="accent1"/>
+          </a:lnRef>
+          <a:fillRef idx="3">
+            <a:schemeClr val="accent1"/>
+          </a:fillRef>
+          <a:effectRef idx="2">
+            <a:schemeClr val="accent1"/>
+          </a:effectRef>
+          <a:fontRef idx="minor">
+            <a:schemeClr val="lt1"/>
+          </a:fontRef>
+        </p:style>
+        <p:txBody>
+          <a:bodyPr rtlCol="0" anchor="ctr"/>
+          <a:lstStyle/>
+          <a:p>
+            <a:pPr algn="ctr"/>
+          </a:p>
+        </p:txBody>
+      </p:sp>
+      <p:pic>
+        <p:nvPicPr>
+          <p:cNvPr id="3" name="Picture 2" descr="etra-wordmark.png"/>
+          <p:cNvPicPr>
+            <a:picLocks noChangeAspect="1"/>
+          </p:cNvPicPr>
+          <p:nvPr/>
+        </p:nvPicPr>
+        <p:blipFill>
+          <a:blip r:embed="rId2"/>
+          <a:stretch>
+            <a:fillRect/>
+          </a:stretch>
+        </p:blipFill>
+        <p:spPr>
+          <a:xfrm>
+            <a:off x="10561320" y="411480"/>
+            <a:ext cx="1206201" cy="320040"/>
+          </a:xfrm>
+          <a:prstGeom prst="rect">
+            <a:avLst/>
+          </a:prstGeom>
+        </p:spPr>
+      </p:pic>
+      <p:sp>
+        <p:nvSpPr>
+          <p:cNvPr id="4" name="TextBox 3"/>
+          <p:cNvSpPr txBox="1"/>
+          <p:nvPr/>
+        </p:nvSpPr>
+        <p:spPr>
+          <a:xfrm>
+            <a:off x="548640" y="438912"/>
+            <a:ext cx="7772400" cy="274320"/>
+          </a:xfrm>
+          <a:prstGeom prst="rect">
+            <a:avLst/>
+          </a:prstGeom>
+          <a:noFill/>
+        </p:spPr>
+        <p:txBody>
+          <a:bodyPr wrap="square" anchor="t">
+            <a:spAutoFit/>
+          </a:bodyPr>
+          <a:lstStyle/>
+          <a:p>
+            <a:pPr algn="l"/>
+            <a:r>
+              <a:rPr sz="1200" b="0">
+                <a:solidFill>
+                  <a:srgbClr val="5A5470"/>
+                </a:solidFill>
+                <a:latin typeface="DIN Next LT W23"/>
+                <a:ea typeface="DIN Next LT W23"/>
+                <a:cs typeface="DIN Next LT W23"/>
+              </a:rPr>
+              <a:t>S07  ·  Deep Learning</a:t>
+            </a:r>
+          </a:p>
+        </p:txBody>
+      </p:sp>
+      <p:sp>
+        <p:nvSpPr>
+          <p:cNvPr id="5" name="Rectangle 4"/>
+          <p:cNvSpPr/>
+          <p:nvPr/>
+        </p:nvSpPr>
+        <p:spPr>
+          <a:xfrm>
+            <a:off x="548640" y="822960"/>
+            <a:ext cx="11064240" cy="10972"/>
+          </a:xfrm>
+          <a:prstGeom prst="rect">
+            <a:avLst/>
+          </a:prstGeom>
+          <a:solidFill>
+            <a:srgbClr val="E4DCF4"/>
+          </a:solidFill>
+          <a:ln>
+            <a:noFill/>
+          </a:ln>
+          <a:effectLst/>
+        </p:spPr>
+        <p:style>
+          <a:lnRef idx="1">
+            <a:schemeClr val="accent1"/>
+          </a:lnRef>
+          <a:fillRef idx="3">
+            <a:schemeClr val="accent1"/>
+          </a:fillRef>
+          <a:effectRef idx="2">
+            <a:schemeClr val="accent1"/>
+          </a:effectRef>
+          <a:fontRef idx="minor">
+            <a:schemeClr val="lt1"/>
+          </a:fontRef>
+        </p:style>
+        <p:txBody>
+          <a:bodyPr rtlCol="0" anchor="ctr"/>
+          <a:lstStyle/>
+          <a:p>
+            <a:pPr algn="ctr"/>
+          </a:p>
+        </p:txBody>
+      </p:sp>
+      <p:sp>
+        <p:nvSpPr>
+          <p:cNvPr id="6" name="TextBox 5"/>
+          <p:cNvSpPr txBox="1"/>
+          <p:nvPr/>
+        </p:nvSpPr>
+        <p:spPr>
+          <a:xfrm>
+            <a:off x="548640" y="1051560"/>
+            <a:ext cx="10241280" cy="594360"/>
+          </a:xfrm>
+          <a:prstGeom prst="rect">
+            <a:avLst/>
+          </a:prstGeom>
+          <a:noFill/>
+        </p:spPr>
+        <p:txBody>
+          <a:bodyPr wrap="square" anchor="t">
+            <a:spAutoFit/>
+          </a:bodyPr>
+          <a:lstStyle/>
+          <a:p>
+            <a:pPr algn="l"/>
+            <a:r>
+              <a:rPr sz="3200" b="1">
+                <a:solidFill>
+                  <a:srgbClr val="5234B7"/>
+                </a:solidFill>
+                <a:latin typeface="DIN Next LT W23"/>
+                <a:ea typeface="DIN Next LT W23"/>
+                <a:cs typeface="DIN Next LT W23"/>
+              </a:rPr>
+              <a:t>LSTM: Gates for Long-Term Memory</a:t>
+            </a:r>
+          </a:p>
+        </p:txBody>
+      </p:sp>
+      <p:sp>
+        <p:nvSpPr>
+          <p:cNvPr id="7" name="TextBox 6"/>
+          <p:cNvSpPr txBox="1"/>
+          <p:nvPr/>
+        </p:nvSpPr>
+        <p:spPr>
+          <a:xfrm>
+            <a:off x="548640" y="1600200"/>
+            <a:ext cx="10241280" cy="365760"/>
+          </a:xfrm>
+          <a:prstGeom prst="rect">
+            <a:avLst/>
+          </a:prstGeom>
+          <a:noFill/>
+        </p:spPr>
+        <p:txBody>
+          <a:bodyPr wrap="square" anchor="t">
+            <a:spAutoFit/>
+          </a:bodyPr>
+          <a:lstStyle/>
+          <a:p>
+            <a:pPr algn="l"/>
+            <a:r>
+              <a:rPr sz="1500" b="0">
+                <a:solidFill>
+                  <a:srgbClr val="5A5470"/>
+                </a:solidFill>
+                <a:latin typeface="DIN Next LT W23"/>
+                <a:ea typeface="DIN Next LT W23"/>
+                <a:cs typeface="DIN Next LT W23"/>
+              </a:rPr>
+              <a:t>Forget, Input, Output — Cell State Flows Linearly</a:t>
+            </a:r>
+          </a:p>
+        </p:txBody>
+      </p:sp>
+      <p:sp>
+        <p:nvSpPr>
+          <p:cNvPr id="8" name="TextBox 7"/>
+          <p:cNvSpPr txBox="1"/>
+          <p:nvPr/>
+        </p:nvSpPr>
+        <p:spPr>
+          <a:xfrm>
+            <a:off x="548640" y="1920240"/>
+            <a:ext cx="10972800" cy="320040"/>
+          </a:xfrm>
+          <a:prstGeom prst="rect">
+            <a:avLst/>
+          </a:prstGeom>
+          <a:noFill/>
+        </p:spPr>
+        <p:txBody>
+          <a:bodyPr wrap="square" anchor="t">
+            <a:spAutoFit/>
+          </a:bodyPr>
+          <a:lstStyle/>
+          <a:p>
+            <a:pPr algn="l"/>
+            <a:r>
+              <a:rPr sz="1300" b="0">
+                <a:solidFill>
+                  <a:srgbClr val="5A5470"/>
+                </a:solidFill>
+                <a:latin typeface="DIN Next LT W23"/>
+                <a:ea typeface="DIN Next LT W23"/>
+                <a:cs typeface="DIN Next LT W23"/>
+              </a:rPr>
+              <a:t>LSTM adds a cell state cₜ with an additive path, so signal can travel many steps without vanishing.</a:t>
+            </a:r>
+          </a:p>
+        </p:txBody>
+      </p:sp>
+      <p:sp>
+        <p:nvSpPr>
+          <p:cNvPr id="9" name="Rounded Rectangle 8"/>
+          <p:cNvSpPr/>
+          <p:nvPr/>
+        </p:nvSpPr>
+        <p:spPr>
+          <a:xfrm>
+            <a:off x="548640" y="2240280"/>
+            <a:ext cx="10972800" cy="3977639"/>
+          </a:xfrm>
+          <a:prstGeom prst="roundRect">
+            <a:avLst>
+              <a:gd name="adj" fmla="val 10000"/>
+            </a:avLst>
+          </a:prstGeom>
+          <a:solidFill>
+            <a:srgbClr val="EEE8FA"/>
+          </a:solidFill>
+          <a:ln>
+            <a:noFill/>
+          </a:ln>
+          <a:effectLst/>
+        </p:spPr>
+        <p:style>
+          <a:lnRef idx="1">
+            <a:schemeClr val="accent1"/>
+          </a:lnRef>
+          <a:fillRef idx="3">
+            <a:schemeClr val="accent1"/>
+          </a:fillRef>
+          <a:effectRef idx="2">
+            <a:schemeClr val="accent1"/>
+          </a:effectRef>
+          <a:fontRef idx="minor">
+            <a:schemeClr val="lt1"/>
+          </a:fontRef>
+        </p:style>
+        <p:txBody>
+          <a:bodyPr rtlCol="0" anchor="ctr"/>
+          <a:lstStyle/>
+          <a:p>
+            <a:pPr algn="ctr"/>
+          </a:p>
+        </p:txBody>
+      </p:sp>
+      <p:pic>
+        <p:nvPicPr>
+          <p:cNvPr id="10" name="Picture 9" descr="lstm-gates.png"/>
+          <p:cNvPicPr>
+            <a:picLocks noChangeAspect="1"/>
+          </p:cNvPicPr>
+          <p:nvPr/>
+        </p:nvPicPr>
+        <p:blipFill>
+          <a:blip r:embed="rId3"/>
+          <a:stretch>
+            <a:fillRect/>
+          </a:stretch>
+        </p:blipFill>
+        <p:spPr>
+          <a:xfrm>
+            <a:off x="1056046" y="2377440"/>
+            <a:ext cx="9957987" cy="3703320"/>
+          </a:xfrm>
+          <a:prstGeom prst="rect">
+            <a:avLst/>
+          </a:prstGeom>
+        </p:spPr>
+      </p:pic>
+      <p:sp>
+        <p:nvSpPr>
+          <p:cNvPr id="11" name="TextBox 10"/>
+          <p:cNvSpPr txBox="1"/>
+          <p:nvPr/>
+        </p:nvSpPr>
+        <p:spPr>
+          <a:xfrm>
+            <a:off x="548640" y="6309360"/>
+            <a:ext cx="10972800" cy="228600"/>
+          </a:xfrm>
+          <a:prstGeom prst="rect">
+            <a:avLst/>
+          </a:prstGeom>
+          <a:noFill/>
+        </p:spPr>
+        <p:txBody>
+          <a:bodyPr wrap="square" anchor="t">
+            <a:spAutoFit/>
+          </a:bodyPr>
+          <a:lstStyle/>
+          <a:p>
+            <a:pPr algn="l"/>
+            <a:r>
+              <a:rPr sz="1100" b="0">
+                <a:solidFill>
+                  <a:srgbClr val="5A5470"/>
+                </a:solidFill>
+                <a:latin typeface="DIN Next LT W23"/>
+                <a:ea typeface="DIN Next LT W23"/>
+                <a:cs typeface="DIN Next LT W23"/>
+              </a:rPr>
+              <a:t>GRU is a simpler cousin (two gates). Transformers later replace recurrence with attention.</a:t>
+            </a:r>
+          </a:p>
+        </p:txBody>
+      </p:sp>
+      <p:sp>
+        <p:nvSpPr>
+          <p:cNvPr id="12" name="Rectangle 11"/>
+          <p:cNvSpPr/>
+          <p:nvPr/>
+        </p:nvSpPr>
+        <p:spPr>
+          <a:xfrm>
+            <a:off x="548640" y="6446520"/>
+            <a:ext cx="11064240" cy="10972"/>
+          </a:xfrm>
+          <a:prstGeom prst="rect">
+            <a:avLst/>
+          </a:prstGeom>
+          <a:solidFill>
+            <a:srgbClr val="5234B7"/>
+          </a:solidFill>
+          <a:ln>
+            <a:noFill/>
+          </a:ln>
+          <a:effectLst/>
+        </p:spPr>
+        <p:style>
+          <a:lnRef idx="1">
+            <a:schemeClr val="accent1"/>
+          </a:lnRef>
+          <a:fillRef idx="3">
+            <a:schemeClr val="accent1"/>
+          </a:fillRef>
+          <a:effectRef idx="2">
+            <a:schemeClr val="accent1"/>
+          </a:effectRef>
+          <a:fontRef idx="minor">
+            <a:schemeClr val="lt1"/>
+          </a:fontRef>
+        </p:style>
+        <p:txBody>
+          <a:bodyPr rtlCol="0" anchor="ctr"/>
+          <a:lstStyle/>
+          <a:p>
+            <a:pPr algn="ctr"/>
+          </a:p>
+        </p:txBody>
+      </p:sp>
+      <p:sp>
+        <p:nvSpPr>
+          <p:cNvPr id="13" name="TextBox 12"/>
+          <p:cNvSpPr txBox="1"/>
+          <p:nvPr/>
+        </p:nvSpPr>
+        <p:spPr>
+          <a:xfrm>
+            <a:off x="548640" y="6510528"/>
+            <a:ext cx="2743200" cy="256032"/>
+          </a:xfrm>
+          <a:prstGeom prst="rect">
+            <a:avLst/>
+          </a:prstGeom>
+          <a:noFill/>
+        </p:spPr>
+        <p:txBody>
+          <a:bodyPr wrap="square" anchor="t">
+            <a:spAutoFit/>
+          </a:bodyPr>
+          <a:lstStyle/>
+          <a:p>
+            <a:pPr algn="l"/>
+            <a:r>
+              <a:rPr sz="1100" b="1">
+                <a:solidFill>
+                  <a:srgbClr val="5234B7"/>
+                </a:solidFill>
+                <a:latin typeface="DIN Next LT W23"/>
+                <a:ea typeface="DIN Next LT W23"/>
+                <a:cs typeface="DIN Next LT W23"/>
+              </a:rPr>
+              <a:t>ETRA</a:t>
+            </a:r>
+          </a:p>
+        </p:txBody>
+      </p:sp>
+      <p:sp>
+        <p:nvSpPr>
+          <p:cNvPr id="14" name="TextBox 13"/>
+          <p:cNvSpPr txBox="1"/>
+          <p:nvPr/>
+        </p:nvSpPr>
+        <p:spPr>
+          <a:xfrm>
+            <a:off x="9601200" y="6510528"/>
+            <a:ext cx="2011680" cy="256032"/>
+          </a:xfrm>
+          <a:prstGeom prst="rect">
+            <a:avLst/>
+          </a:prstGeom>
+          <a:noFill/>
+        </p:spPr>
+        <p:txBody>
+          <a:bodyPr wrap="square" anchor="t">
+            <a:spAutoFit/>
+          </a:bodyPr>
+          <a:lstStyle/>
+          <a:p>
+            <a:pPr algn="r"/>
+            <a:r>
+              <a:rPr sz="1100" b="0">
+                <a:solidFill>
+                  <a:srgbClr val="5A5470"/>
+                </a:solidFill>
+                <a:latin typeface="DIN Next LT W23"/>
+                <a:ea typeface="DIN Next LT W23"/>
+                <a:cs typeface="DIN Next LT W23"/>
+              </a:rPr>
+              <a:t>74  /  77</a:t>
+            </a:r>
+          </a:p>
+        </p:txBody>
+      </p:sp>
+    </p:spTree>
+  </p:cSld>
+  <p:clrMapOvr>
+    <a:masterClrMapping/>
+  </p:clrMapOvr>
+</p:sld>
+</file>
+
+<file path=ppt/slides/slide75.xml><?xml version="1.0" encoding="utf-8"?>
 <p:sld xmlns:a="http://schemas.openxmlformats.org/drawingml/2006/main" xmlns:p="http://schemas.openxmlformats.org/presentationml/2006/main" xmlns:r="http://schemas.openxmlformats.org/officeDocument/2006/relationships">
   <p:cSld>
     <p:bg>
@@ -48931,734 +49406,7 @@
                 <a:ea typeface="DIN Next LT W23"/>
                 <a:cs typeface="DIN Next LT W23"/>
               </a:rPr>
-              <a:t>74  /  76</a:t>
-            </a:r>
-          </a:p>
-        </p:txBody>
-      </p:sp>
-    </p:spTree>
-  </p:cSld>
-  <p:clrMapOvr>
-    <a:masterClrMapping/>
-  </p:clrMapOvr>
-</p:sld>
-</file>
-
-<file path=ppt/slides/slide75.xml><?xml version="1.0" encoding="utf-8"?>
-<p:sld xmlns:a="http://schemas.openxmlformats.org/drawingml/2006/main" xmlns:p="http://schemas.openxmlformats.org/presentationml/2006/main" xmlns:r="http://schemas.openxmlformats.org/officeDocument/2006/relationships">
-  <p:cSld>
-    <p:bg>
-      <p:bgPr>
-        <a:solidFill>
-          <a:srgbClr val="FAF8FF"/>
-        </a:solidFill>
-        <a:effectLst/>
-      </p:bgPr>
-    </p:bg>
-    <p:spTree>
-      <p:nvGrpSpPr>
-        <p:cNvPr id="1" name=""/>
-        <p:cNvGrpSpPr/>
-        <p:nvPr/>
-      </p:nvGrpSpPr>
-      <p:grpSpPr/>
-      <p:sp>
-        <p:nvSpPr>
-          <p:cNvPr id="2" name="Rectangle 1"/>
-          <p:cNvSpPr/>
-          <p:nvPr/>
-        </p:nvSpPr>
-        <p:spPr>
-          <a:xfrm>
-            <a:off x="12136831" y="0"/>
-            <a:ext cx="54864" cy="6858000"/>
-          </a:xfrm>
-          <a:prstGeom prst="rect">
-            <a:avLst/>
-          </a:prstGeom>
-          <a:solidFill>
-            <a:srgbClr val="5234B7"/>
-          </a:solidFill>
-          <a:ln>
-            <a:noFill/>
-          </a:ln>
-          <a:effectLst/>
-        </p:spPr>
-        <p:style>
-          <a:lnRef idx="1">
-            <a:schemeClr val="accent1"/>
-          </a:lnRef>
-          <a:fillRef idx="3">
-            <a:schemeClr val="accent1"/>
-          </a:fillRef>
-          <a:effectRef idx="2">
-            <a:schemeClr val="accent1"/>
-          </a:effectRef>
-          <a:fontRef idx="minor">
-            <a:schemeClr val="lt1"/>
-          </a:fontRef>
-        </p:style>
-        <p:txBody>
-          <a:bodyPr rtlCol="0" anchor="ctr"/>
-          <a:lstStyle/>
-          <a:p>
-            <a:pPr algn="ctr"/>
-          </a:p>
-        </p:txBody>
-      </p:sp>
-      <p:pic>
-        <p:nvPicPr>
-          <p:cNvPr id="3" name="Picture 2" descr="etra-wordmark.png"/>
-          <p:cNvPicPr>
-            <a:picLocks noChangeAspect="1"/>
-          </p:cNvPicPr>
-          <p:nvPr/>
-        </p:nvPicPr>
-        <p:blipFill>
-          <a:blip r:embed="rId2"/>
-          <a:stretch>
-            <a:fillRect/>
-          </a:stretch>
-        </p:blipFill>
-        <p:spPr>
-          <a:xfrm>
-            <a:off x="10561320" y="411480"/>
-            <a:ext cx="1206201" cy="320040"/>
-          </a:xfrm>
-          <a:prstGeom prst="rect">
-            <a:avLst/>
-          </a:prstGeom>
-        </p:spPr>
-      </p:pic>
-      <p:sp>
-        <p:nvSpPr>
-          <p:cNvPr id="4" name="TextBox 3"/>
-          <p:cNvSpPr txBox="1"/>
-          <p:nvPr/>
-        </p:nvSpPr>
-        <p:spPr>
-          <a:xfrm>
-            <a:off x="548640" y="438912"/>
-            <a:ext cx="7772400" cy="274320"/>
-          </a:xfrm>
-          <a:prstGeom prst="rect">
-            <a:avLst/>
-          </a:prstGeom>
-          <a:noFill/>
-        </p:spPr>
-        <p:txBody>
-          <a:bodyPr wrap="square" anchor="t">
-            <a:spAutoFit/>
-          </a:bodyPr>
-          <a:lstStyle/>
-          <a:p>
-            <a:pPr algn="l"/>
-            <a:r>
-              <a:rPr sz="1200" b="0">
-                <a:solidFill>
-                  <a:srgbClr val="5A5470"/>
-                </a:solidFill>
-                <a:latin typeface="DIN Next LT W23"/>
-                <a:ea typeface="DIN Next LT W23"/>
-                <a:cs typeface="DIN Next LT W23"/>
-              </a:rPr>
-              <a:t>S07  ·  Takeaways</a:t>
-            </a:r>
-          </a:p>
-        </p:txBody>
-      </p:sp>
-      <p:sp>
-        <p:nvSpPr>
-          <p:cNvPr id="5" name="Rectangle 4"/>
-          <p:cNvSpPr/>
-          <p:nvPr/>
-        </p:nvSpPr>
-        <p:spPr>
-          <a:xfrm>
-            <a:off x="548640" y="822960"/>
-            <a:ext cx="11064240" cy="10972"/>
-          </a:xfrm>
-          <a:prstGeom prst="rect">
-            <a:avLst/>
-          </a:prstGeom>
-          <a:solidFill>
-            <a:srgbClr val="E4DCF4"/>
-          </a:solidFill>
-          <a:ln>
-            <a:noFill/>
-          </a:ln>
-          <a:effectLst/>
-        </p:spPr>
-        <p:style>
-          <a:lnRef idx="1">
-            <a:schemeClr val="accent1"/>
-          </a:lnRef>
-          <a:fillRef idx="3">
-            <a:schemeClr val="accent1"/>
-          </a:fillRef>
-          <a:effectRef idx="2">
-            <a:schemeClr val="accent1"/>
-          </a:effectRef>
-          <a:fontRef idx="minor">
-            <a:schemeClr val="lt1"/>
-          </a:fontRef>
-        </p:style>
-        <p:txBody>
-          <a:bodyPr rtlCol="0" anchor="ctr"/>
-          <a:lstStyle/>
-          <a:p>
-            <a:pPr algn="ctr"/>
-          </a:p>
-        </p:txBody>
-      </p:sp>
-      <p:sp>
-        <p:nvSpPr>
-          <p:cNvPr id="6" name="TextBox 5"/>
-          <p:cNvSpPr txBox="1"/>
-          <p:nvPr/>
-        </p:nvSpPr>
-        <p:spPr>
-          <a:xfrm>
-            <a:off x="548640" y="1051560"/>
-            <a:ext cx="10241280" cy="594360"/>
-          </a:xfrm>
-          <a:prstGeom prst="rect">
-            <a:avLst/>
-          </a:prstGeom>
-          <a:noFill/>
-        </p:spPr>
-        <p:txBody>
-          <a:bodyPr wrap="square" anchor="t">
-            <a:spAutoFit/>
-          </a:bodyPr>
-          <a:lstStyle/>
-          <a:p>
-            <a:pPr algn="l"/>
-            <a:r>
-              <a:rPr sz="3200" b="1">
-                <a:solidFill>
-                  <a:srgbClr val="5234B7"/>
-                </a:solidFill>
-                <a:latin typeface="DIN Next LT W23"/>
-                <a:ea typeface="DIN Next LT W23"/>
-                <a:cs typeface="DIN Next LT W23"/>
-              </a:rPr>
-              <a:t>3 Ideas to Keep</a:t>
-            </a:r>
-          </a:p>
-        </p:txBody>
-      </p:sp>
-      <p:sp>
-        <p:nvSpPr>
-          <p:cNvPr id="7" name="TextBox 6"/>
-          <p:cNvSpPr txBox="1"/>
-          <p:nvPr/>
-        </p:nvSpPr>
-        <p:spPr>
-          <a:xfrm>
-            <a:off x="548640" y="1600200"/>
-            <a:ext cx="10241280" cy="365760"/>
-          </a:xfrm>
-          <a:prstGeom prst="rect">
-            <a:avLst/>
-          </a:prstGeom>
-          <a:noFill/>
-        </p:spPr>
-        <p:txBody>
-          <a:bodyPr wrap="square" anchor="t">
-            <a:spAutoFit/>
-          </a:bodyPr>
-          <a:lstStyle/>
-          <a:p>
-            <a:pPr algn="l"/>
-            <a:r>
-              <a:rPr sz="1500" b="0">
-                <a:solidFill>
-                  <a:srgbClr val="5A5470"/>
-                </a:solidFill>
-                <a:latin typeface="DIN Next LT W23"/>
-                <a:ea typeface="DIN Next LT W23"/>
-                <a:cs typeface="DIN Next LT W23"/>
-              </a:rPr>
-              <a:t>Leave with these</a:t>
-            </a:r>
-          </a:p>
-        </p:txBody>
-      </p:sp>
-      <p:sp>
-        <p:nvSpPr>
-          <p:cNvPr id="8" name="Rounded Rectangle 7"/>
-          <p:cNvSpPr/>
-          <p:nvPr/>
-        </p:nvSpPr>
-        <p:spPr>
-          <a:xfrm>
-            <a:off x="548640" y="2148840"/>
-            <a:ext cx="10972800" cy="987552"/>
-          </a:xfrm>
-          <a:prstGeom prst="roundRect">
-            <a:avLst>
-              <a:gd name="adj" fmla="val 10000"/>
-            </a:avLst>
-          </a:prstGeom>
-          <a:solidFill>
-            <a:srgbClr val="EEE8FA"/>
-          </a:solidFill>
-          <a:ln>
-            <a:noFill/>
-          </a:ln>
-          <a:effectLst/>
-        </p:spPr>
-        <p:style>
-          <a:lnRef idx="1">
-            <a:schemeClr val="accent1"/>
-          </a:lnRef>
-          <a:fillRef idx="3">
-            <a:schemeClr val="accent1"/>
-          </a:fillRef>
-          <a:effectRef idx="2">
-            <a:schemeClr val="accent1"/>
-          </a:effectRef>
-          <a:fontRef idx="minor">
-            <a:schemeClr val="lt1"/>
-          </a:fontRef>
-        </p:style>
-        <p:txBody>
-          <a:bodyPr rtlCol="0" anchor="ctr"/>
-          <a:lstStyle/>
-          <a:p>
-            <a:pPr algn="ctr"/>
-          </a:p>
-        </p:txBody>
-      </p:sp>
-      <p:sp>
-        <p:nvSpPr>
-          <p:cNvPr id="9" name="TextBox 8"/>
-          <p:cNvSpPr txBox="1"/>
-          <p:nvPr/>
-        </p:nvSpPr>
-        <p:spPr>
-          <a:xfrm>
-            <a:off x="822960" y="2404872"/>
-            <a:ext cx="457200" cy="457200"/>
-          </a:xfrm>
-          <a:prstGeom prst="rect">
-            <a:avLst/>
-          </a:prstGeom>
-          <a:noFill/>
-        </p:spPr>
-        <p:txBody>
-          <a:bodyPr wrap="square" anchor="t">
-            <a:spAutoFit/>
-          </a:bodyPr>
-          <a:lstStyle/>
-          <a:p>
-            <a:pPr algn="l"/>
-            <a:r>
-              <a:rPr sz="2200" b="1">
-                <a:solidFill>
-                  <a:srgbClr val="5234B7"/>
-                </a:solidFill>
-                <a:latin typeface="DIN Next LT W23"/>
-                <a:ea typeface="DIN Next LT W23"/>
-                <a:cs typeface="DIN Next LT W23"/>
-              </a:rPr>
-              <a:t>1</a:t>
-            </a:r>
-          </a:p>
-        </p:txBody>
-      </p:sp>
-      <p:sp>
-        <p:nvSpPr>
-          <p:cNvPr id="10" name="TextBox 9"/>
-          <p:cNvSpPr txBox="1"/>
-          <p:nvPr/>
-        </p:nvSpPr>
-        <p:spPr>
-          <a:xfrm>
-            <a:off x="1417320" y="2404872"/>
-            <a:ext cx="9692640" cy="548640"/>
-          </a:xfrm>
-          <a:prstGeom prst="rect">
-            <a:avLst/>
-          </a:prstGeom>
-          <a:noFill/>
-        </p:spPr>
-        <p:txBody>
-          <a:bodyPr wrap="square" anchor="t">
-            <a:spAutoFit/>
-          </a:bodyPr>
-          <a:lstStyle/>
-          <a:p>
-            <a:pPr algn="l"/>
-            <a:r>
-              <a:rPr sz="1600" b="0">
-                <a:solidFill>
-                  <a:srgbClr val="121018"/>
-                </a:solidFill>
-                <a:latin typeface="DIN Next LT W23"/>
-                <a:ea typeface="DIN Next LT W23"/>
-                <a:cs typeface="DIN Next LT W23"/>
-              </a:rPr>
-              <a:t>A neuron is z = wᵀx + b then a = f(z). Depth needs nonlinearity between layers.</a:t>
-            </a:r>
-          </a:p>
-        </p:txBody>
-      </p:sp>
-      <p:sp>
-        <p:nvSpPr>
-          <p:cNvPr id="11" name="Rounded Rectangle 10"/>
-          <p:cNvSpPr/>
-          <p:nvPr/>
-        </p:nvSpPr>
-        <p:spPr>
-          <a:xfrm>
-            <a:off x="548640" y="3291840"/>
-            <a:ext cx="10972800" cy="987552"/>
-          </a:xfrm>
-          <a:prstGeom prst="roundRect">
-            <a:avLst>
-              <a:gd name="adj" fmla="val 10000"/>
-            </a:avLst>
-          </a:prstGeom>
-          <a:solidFill>
-            <a:srgbClr val="EEE8FA"/>
-          </a:solidFill>
-          <a:ln>
-            <a:noFill/>
-          </a:ln>
-          <a:effectLst/>
-        </p:spPr>
-        <p:style>
-          <a:lnRef idx="1">
-            <a:schemeClr val="accent1"/>
-          </a:lnRef>
-          <a:fillRef idx="3">
-            <a:schemeClr val="accent1"/>
-          </a:fillRef>
-          <a:effectRef idx="2">
-            <a:schemeClr val="accent1"/>
-          </a:effectRef>
-          <a:fontRef idx="minor">
-            <a:schemeClr val="lt1"/>
-          </a:fontRef>
-        </p:style>
-        <p:txBody>
-          <a:bodyPr rtlCol="0" anchor="ctr"/>
-          <a:lstStyle/>
-          <a:p>
-            <a:pPr algn="ctr"/>
-          </a:p>
-        </p:txBody>
-      </p:sp>
-      <p:sp>
-        <p:nvSpPr>
-          <p:cNvPr id="12" name="TextBox 11"/>
-          <p:cNvSpPr txBox="1"/>
-          <p:nvPr/>
-        </p:nvSpPr>
-        <p:spPr>
-          <a:xfrm>
-            <a:off x="822960" y="3547872"/>
-            <a:ext cx="457200" cy="457200"/>
-          </a:xfrm>
-          <a:prstGeom prst="rect">
-            <a:avLst/>
-          </a:prstGeom>
-          <a:noFill/>
-        </p:spPr>
-        <p:txBody>
-          <a:bodyPr wrap="square" anchor="t">
-            <a:spAutoFit/>
-          </a:bodyPr>
-          <a:lstStyle/>
-          <a:p>
-            <a:pPr algn="l"/>
-            <a:r>
-              <a:rPr sz="2200" b="1">
-                <a:solidFill>
-                  <a:srgbClr val="5234B7"/>
-                </a:solidFill>
-                <a:latin typeface="DIN Next LT W23"/>
-                <a:ea typeface="DIN Next LT W23"/>
-                <a:cs typeface="DIN Next LT W23"/>
-              </a:rPr>
-              <a:t>2</a:t>
-            </a:r>
-          </a:p>
-        </p:txBody>
-      </p:sp>
-      <p:sp>
-        <p:nvSpPr>
-          <p:cNvPr id="13" name="TextBox 12"/>
-          <p:cNvSpPr txBox="1"/>
-          <p:nvPr/>
-        </p:nvSpPr>
-        <p:spPr>
-          <a:xfrm>
-            <a:off x="1417320" y="3547872"/>
-            <a:ext cx="9692640" cy="548640"/>
-          </a:xfrm>
-          <a:prstGeom prst="rect">
-            <a:avLst/>
-          </a:prstGeom>
-          <a:noFill/>
-        </p:spPr>
-        <p:txBody>
-          <a:bodyPr wrap="square" anchor="t">
-            <a:spAutoFit/>
-          </a:bodyPr>
-          <a:lstStyle/>
-          <a:p>
-            <a:pPr algn="l"/>
-            <a:r>
-              <a:rPr sz="1600" b="0">
-                <a:solidFill>
-                  <a:srgbClr val="121018"/>
-                </a:solidFill>
-                <a:latin typeface="DIN Next LT W23"/>
-                <a:ea typeface="DIN Next LT W23"/>
-                <a:cs typeface="DIN Next LT W23"/>
-              </a:rPr>
-              <a:t>Backprop is the chain rule on a graph. Watch vanishing gradients, LR, and train vs val.</a:t>
-            </a:r>
-          </a:p>
-        </p:txBody>
-      </p:sp>
-      <p:sp>
-        <p:nvSpPr>
-          <p:cNvPr id="14" name="Rounded Rectangle 13"/>
-          <p:cNvSpPr/>
-          <p:nvPr/>
-        </p:nvSpPr>
-        <p:spPr>
-          <a:xfrm>
-            <a:off x="548640" y="4434840"/>
-            <a:ext cx="10972800" cy="987552"/>
-          </a:xfrm>
-          <a:prstGeom prst="roundRect">
-            <a:avLst>
-              <a:gd name="adj" fmla="val 10000"/>
-            </a:avLst>
-          </a:prstGeom>
-          <a:solidFill>
-            <a:srgbClr val="EEE8FA"/>
-          </a:solidFill>
-          <a:ln>
-            <a:noFill/>
-          </a:ln>
-          <a:effectLst/>
-        </p:spPr>
-        <p:style>
-          <a:lnRef idx="1">
-            <a:schemeClr val="accent1"/>
-          </a:lnRef>
-          <a:fillRef idx="3">
-            <a:schemeClr val="accent1"/>
-          </a:fillRef>
-          <a:effectRef idx="2">
-            <a:schemeClr val="accent1"/>
-          </a:effectRef>
-          <a:fontRef idx="minor">
-            <a:schemeClr val="lt1"/>
-          </a:fontRef>
-        </p:style>
-        <p:txBody>
-          <a:bodyPr rtlCol="0" anchor="ctr"/>
-          <a:lstStyle/>
-          <a:p>
-            <a:pPr algn="ctr"/>
-          </a:p>
-        </p:txBody>
-      </p:sp>
-      <p:sp>
-        <p:nvSpPr>
-          <p:cNvPr id="15" name="TextBox 14"/>
-          <p:cNvSpPr txBox="1"/>
-          <p:nvPr/>
-        </p:nvSpPr>
-        <p:spPr>
-          <a:xfrm>
-            <a:off x="822960" y="4690872"/>
-            <a:ext cx="457200" cy="457200"/>
-          </a:xfrm>
-          <a:prstGeom prst="rect">
-            <a:avLst/>
-          </a:prstGeom>
-          <a:noFill/>
-        </p:spPr>
-        <p:txBody>
-          <a:bodyPr wrap="square" anchor="t">
-            <a:spAutoFit/>
-          </a:bodyPr>
-          <a:lstStyle/>
-          <a:p>
-            <a:pPr algn="l"/>
-            <a:r>
-              <a:rPr sz="2200" b="1">
-                <a:solidFill>
-                  <a:srgbClr val="5234B7"/>
-                </a:solidFill>
-                <a:latin typeface="DIN Next LT W23"/>
-                <a:ea typeface="DIN Next LT W23"/>
-                <a:cs typeface="DIN Next LT W23"/>
-              </a:rPr>
-              <a:t>3</a:t>
-            </a:r>
-          </a:p>
-        </p:txBody>
-      </p:sp>
-      <p:sp>
-        <p:nvSpPr>
-          <p:cNvPr id="16" name="TextBox 15"/>
-          <p:cNvSpPr txBox="1"/>
-          <p:nvPr/>
-        </p:nvSpPr>
-        <p:spPr>
-          <a:xfrm>
-            <a:off x="1417320" y="4690872"/>
-            <a:ext cx="9692640" cy="548640"/>
-          </a:xfrm>
-          <a:prstGeom prst="rect">
-            <a:avLst/>
-          </a:prstGeom>
-          <a:noFill/>
-        </p:spPr>
-        <p:txBody>
-          <a:bodyPr wrap="square" anchor="t">
-            <a:spAutoFit/>
-          </a:bodyPr>
-          <a:lstStyle/>
-          <a:p>
-            <a:pPr algn="l"/>
-            <a:r>
-              <a:rPr sz="1600" b="0">
-                <a:solidFill>
-                  <a:srgbClr val="121018"/>
-                </a:solidFill>
-                <a:latin typeface="DIN Next LT W23"/>
-                <a:ea typeface="DIN Next LT W23"/>
-                <a:cs typeface="DIN Next LT W23"/>
-              </a:rPr>
-              <a:t>CNNs share filters across space; RNNs share weights across time; regularize so they generalize.</a:t>
-            </a:r>
-          </a:p>
-        </p:txBody>
-      </p:sp>
-      <p:sp>
-        <p:nvSpPr>
-          <p:cNvPr id="17" name="Rectangle 16"/>
-          <p:cNvSpPr/>
-          <p:nvPr/>
-        </p:nvSpPr>
-        <p:spPr>
-          <a:xfrm>
-            <a:off x="548640" y="6446520"/>
-            <a:ext cx="11064240" cy="10972"/>
-          </a:xfrm>
-          <a:prstGeom prst="rect">
-            <a:avLst/>
-          </a:prstGeom>
-          <a:solidFill>
-            <a:srgbClr val="5234B7"/>
-          </a:solidFill>
-          <a:ln>
-            <a:noFill/>
-          </a:ln>
-          <a:effectLst/>
-        </p:spPr>
-        <p:style>
-          <a:lnRef idx="1">
-            <a:schemeClr val="accent1"/>
-          </a:lnRef>
-          <a:fillRef idx="3">
-            <a:schemeClr val="accent1"/>
-          </a:fillRef>
-          <a:effectRef idx="2">
-            <a:schemeClr val="accent1"/>
-          </a:effectRef>
-          <a:fontRef idx="minor">
-            <a:schemeClr val="lt1"/>
-          </a:fontRef>
-        </p:style>
-        <p:txBody>
-          <a:bodyPr rtlCol="0" anchor="ctr"/>
-          <a:lstStyle/>
-          <a:p>
-            <a:pPr algn="ctr"/>
-          </a:p>
-        </p:txBody>
-      </p:sp>
-      <p:sp>
-        <p:nvSpPr>
-          <p:cNvPr id="18" name="TextBox 17"/>
-          <p:cNvSpPr txBox="1"/>
-          <p:nvPr/>
-        </p:nvSpPr>
-        <p:spPr>
-          <a:xfrm>
-            <a:off x="548640" y="6510528"/>
-            <a:ext cx="2743200" cy="256032"/>
-          </a:xfrm>
-          <a:prstGeom prst="rect">
-            <a:avLst/>
-          </a:prstGeom>
-          <a:noFill/>
-        </p:spPr>
-        <p:txBody>
-          <a:bodyPr wrap="square" anchor="t">
-            <a:spAutoFit/>
-          </a:bodyPr>
-          <a:lstStyle/>
-          <a:p>
-            <a:pPr algn="l"/>
-            <a:r>
-              <a:rPr sz="1100" b="1">
-                <a:solidFill>
-                  <a:srgbClr val="5234B7"/>
-                </a:solidFill>
-                <a:latin typeface="DIN Next LT W23"/>
-                <a:ea typeface="DIN Next LT W23"/>
-                <a:cs typeface="DIN Next LT W23"/>
-              </a:rPr>
-              <a:t>ETRA</a:t>
-            </a:r>
-          </a:p>
-        </p:txBody>
-      </p:sp>
-      <p:sp>
-        <p:nvSpPr>
-          <p:cNvPr id="19" name="TextBox 18"/>
-          <p:cNvSpPr txBox="1"/>
-          <p:nvPr/>
-        </p:nvSpPr>
-        <p:spPr>
-          <a:xfrm>
-            <a:off x="9601200" y="6510528"/>
-            <a:ext cx="2011680" cy="256032"/>
-          </a:xfrm>
-          <a:prstGeom prst="rect">
-            <a:avLst/>
-          </a:prstGeom>
-          <a:noFill/>
-        </p:spPr>
-        <p:txBody>
-          <a:bodyPr wrap="square" anchor="t">
-            <a:spAutoFit/>
-          </a:bodyPr>
-          <a:lstStyle/>
-          <a:p>
-            <a:pPr algn="r"/>
-            <a:r>
-              <a:rPr sz="1100" b="0">
-                <a:solidFill>
-                  <a:srgbClr val="5A5470"/>
-                </a:solidFill>
-                <a:latin typeface="DIN Next LT W23"/>
-                <a:ea typeface="DIN Next LT W23"/>
-                <a:cs typeface="DIN Next LT W23"/>
-              </a:rPr>
-              <a:t>75  /  76</a:t>
+              <a:t>75  /  77</a:t>
             </a:r>
           </a:p>
         </p:txBody>
@@ -49750,7 +49498,7 @@
         <p:spPr>
           <a:xfrm>
             <a:off x="10561320" y="411480"/>
-            <a:ext cx="1378516" cy="365760"/>
+            <a:ext cx="1206201" cy="320040"/>
           </a:xfrm>
           <a:prstGeom prst="rect">
             <a:avLst/>
@@ -49765,23 +49513,104 @@
         </p:nvSpPr>
         <p:spPr>
           <a:xfrm>
-            <a:off x="548640" y="2651760"/>
-            <a:ext cx="10972800" cy="731520"/>
-          </a:xfrm>
-          <a:prstGeom prst="rect">
-            <a:avLst/>
-          </a:prstGeom>
-          <a:noFill/>
-        </p:spPr>
-        <p:txBody>
-          <a:bodyPr wrap="square" anchor="t">
-            <a:spAutoFit/>
-          </a:bodyPr>
+            <a:off x="548640" y="438912"/>
+            <a:ext cx="7772400" cy="274320"/>
+          </a:xfrm>
+          <a:prstGeom prst="rect">
+            <a:avLst/>
+          </a:prstGeom>
+          <a:noFill/>
+        </p:spPr>
+        <p:txBody>
+          <a:bodyPr wrap="square" anchor="t">
+            <a:spAutoFit/>
+          </a:bodyPr>
+          <a:lstStyle/>
+          <a:p>
+            <a:pPr algn="l"/>
+            <a:r>
+              <a:rPr sz="1200" b="0">
+                <a:solidFill>
+                  <a:srgbClr val="5A5470"/>
+                </a:solidFill>
+                <a:latin typeface="DIN Next LT W23"/>
+                <a:ea typeface="DIN Next LT W23"/>
+                <a:cs typeface="DIN Next LT W23"/>
+              </a:rPr>
+              <a:t>S07  ·  Takeaways</a:t>
+            </a:r>
+          </a:p>
+        </p:txBody>
+      </p:sp>
+      <p:sp>
+        <p:nvSpPr>
+          <p:cNvPr id="5" name="Rectangle 4"/>
+          <p:cNvSpPr/>
+          <p:nvPr/>
+        </p:nvSpPr>
+        <p:spPr>
+          <a:xfrm>
+            <a:off x="548640" y="822960"/>
+            <a:ext cx="11064240" cy="10972"/>
+          </a:xfrm>
+          <a:prstGeom prst="rect">
+            <a:avLst/>
+          </a:prstGeom>
+          <a:solidFill>
+            <a:srgbClr val="E4DCF4"/>
+          </a:solidFill>
+          <a:ln>
+            <a:noFill/>
+          </a:ln>
+          <a:effectLst/>
+        </p:spPr>
+        <p:style>
+          <a:lnRef idx="1">
+            <a:schemeClr val="accent1"/>
+          </a:lnRef>
+          <a:fillRef idx="3">
+            <a:schemeClr val="accent1"/>
+          </a:fillRef>
+          <a:effectRef idx="2">
+            <a:schemeClr val="accent1"/>
+          </a:effectRef>
+          <a:fontRef idx="minor">
+            <a:schemeClr val="lt1"/>
+          </a:fontRef>
+        </p:style>
+        <p:txBody>
+          <a:bodyPr rtlCol="0" anchor="ctr"/>
           <a:lstStyle/>
           <a:p>
             <a:pPr algn="ctr"/>
-            <a:r>
-              <a:rPr sz="4000" b="1">
+          </a:p>
+        </p:txBody>
+      </p:sp>
+      <p:sp>
+        <p:nvSpPr>
+          <p:cNvPr id="6" name="TextBox 5"/>
+          <p:cNvSpPr txBox="1"/>
+          <p:nvPr/>
+        </p:nvSpPr>
+        <p:spPr>
+          <a:xfrm>
+            <a:off x="548640" y="1051560"/>
+            <a:ext cx="10241280" cy="594360"/>
+          </a:xfrm>
+          <a:prstGeom prst="rect">
+            <a:avLst/>
+          </a:prstGeom>
+          <a:noFill/>
+        </p:spPr>
+        <p:txBody>
+          <a:bodyPr wrap="square" anchor="t">
+            <a:spAutoFit/>
+          </a:bodyPr>
+          <a:lstStyle/>
+          <a:p>
+            <a:pPr algn="l"/>
+            <a:r>
+              <a:rPr sz="3200" b="1">
                 <a:solidFill>
                   <a:srgbClr val="5234B7"/>
                 </a:solidFill>
@@ -49789,73 +49618,239 @@
                 <a:ea typeface="DIN Next LT W23"/>
                 <a:cs typeface="DIN Next LT W23"/>
               </a:rPr>
-              <a:t>Thank you</a:t>
-            </a:r>
-          </a:p>
-        </p:txBody>
-      </p:sp>
-      <p:sp>
-        <p:nvSpPr>
-          <p:cNvPr id="5" name="TextBox 4"/>
-          <p:cNvSpPr txBox="1"/>
-          <p:nvPr/>
-        </p:nvSpPr>
-        <p:spPr>
-          <a:xfrm>
-            <a:off x="548640" y="3474720"/>
-            <a:ext cx="10972800" cy="365760"/>
-          </a:xfrm>
-          <a:prstGeom prst="rect">
-            <a:avLst/>
-          </a:prstGeom>
-          <a:noFill/>
-        </p:spPr>
-        <p:txBody>
-          <a:bodyPr wrap="square" anchor="t">
-            <a:spAutoFit/>
-          </a:bodyPr>
+              <a:t>3 Ideas to Keep</a:t>
+            </a:r>
+          </a:p>
+        </p:txBody>
+      </p:sp>
+      <p:sp>
+        <p:nvSpPr>
+          <p:cNvPr id="7" name="TextBox 6"/>
+          <p:cNvSpPr txBox="1"/>
+          <p:nvPr/>
+        </p:nvSpPr>
+        <p:spPr>
+          <a:xfrm>
+            <a:off x="548640" y="1600200"/>
+            <a:ext cx="10241280" cy="365760"/>
+          </a:xfrm>
+          <a:prstGeom prst="rect">
+            <a:avLst/>
+          </a:prstGeom>
+          <a:noFill/>
+        </p:spPr>
+        <p:txBody>
+          <a:bodyPr wrap="square" anchor="t">
+            <a:spAutoFit/>
+          </a:bodyPr>
+          <a:lstStyle/>
+          <a:p>
+            <a:pPr algn="l"/>
+            <a:r>
+              <a:rPr sz="1500" b="0">
+                <a:solidFill>
+                  <a:srgbClr val="5A5470"/>
+                </a:solidFill>
+                <a:latin typeface="DIN Next LT W23"/>
+                <a:ea typeface="DIN Next LT W23"/>
+                <a:cs typeface="DIN Next LT W23"/>
+              </a:rPr>
+              <a:t>Leave with these</a:t>
+            </a:r>
+          </a:p>
+        </p:txBody>
+      </p:sp>
+      <p:sp>
+        <p:nvSpPr>
+          <p:cNvPr id="8" name="Rounded Rectangle 7"/>
+          <p:cNvSpPr/>
+          <p:nvPr/>
+        </p:nvSpPr>
+        <p:spPr>
+          <a:xfrm>
+            <a:off x="548640" y="2148840"/>
+            <a:ext cx="10972800" cy="987552"/>
+          </a:xfrm>
+          <a:prstGeom prst="roundRect">
+            <a:avLst>
+              <a:gd name="adj" fmla="val 10000"/>
+            </a:avLst>
+          </a:prstGeom>
+          <a:solidFill>
+            <a:srgbClr val="EEE8FA"/>
+          </a:solidFill>
+          <a:ln>
+            <a:noFill/>
+          </a:ln>
+          <a:effectLst/>
+        </p:spPr>
+        <p:style>
+          <a:lnRef idx="1">
+            <a:schemeClr val="accent1"/>
+          </a:lnRef>
+          <a:fillRef idx="3">
+            <a:schemeClr val="accent1"/>
+          </a:fillRef>
+          <a:effectRef idx="2">
+            <a:schemeClr val="accent1"/>
+          </a:effectRef>
+          <a:fontRef idx="minor">
+            <a:schemeClr val="lt1"/>
+          </a:fontRef>
+        </p:style>
+        <p:txBody>
+          <a:bodyPr rtlCol="0" anchor="ctr"/>
           <a:lstStyle/>
           <a:p>
             <a:pPr algn="ctr"/>
+          </a:p>
+        </p:txBody>
+      </p:sp>
+      <p:sp>
+        <p:nvSpPr>
+          <p:cNvPr id="9" name="TextBox 8"/>
+          <p:cNvSpPr txBox="1"/>
+          <p:nvPr/>
+        </p:nvSpPr>
+        <p:spPr>
+          <a:xfrm>
+            <a:off x="822960" y="2404872"/>
+            <a:ext cx="457200" cy="457200"/>
+          </a:xfrm>
+          <a:prstGeom prst="rect">
+            <a:avLst/>
+          </a:prstGeom>
+          <a:noFill/>
+        </p:spPr>
+        <p:txBody>
+          <a:bodyPr wrap="square" anchor="t">
+            <a:spAutoFit/>
+          </a:bodyPr>
+          <a:lstStyle/>
+          <a:p>
+            <a:pPr algn="l"/>
+            <a:r>
+              <a:rPr sz="2200" b="1">
+                <a:solidFill>
+                  <a:srgbClr val="5234B7"/>
+                </a:solidFill>
+                <a:latin typeface="DIN Next LT W23"/>
+                <a:ea typeface="DIN Next LT W23"/>
+                <a:cs typeface="DIN Next LT W23"/>
+              </a:rPr>
+              <a:t>1</a:t>
+            </a:r>
+          </a:p>
+        </p:txBody>
+      </p:sp>
+      <p:sp>
+        <p:nvSpPr>
+          <p:cNvPr id="10" name="TextBox 9"/>
+          <p:cNvSpPr txBox="1"/>
+          <p:nvPr/>
+        </p:nvSpPr>
+        <p:spPr>
+          <a:xfrm>
+            <a:off x="1417320" y="2404872"/>
+            <a:ext cx="9692640" cy="548640"/>
+          </a:xfrm>
+          <a:prstGeom prst="rect">
+            <a:avLst/>
+          </a:prstGeom>
+          <a:noFill/>
+        </p:spPr>
+        <p:txBody>
+          <a:bodyPr wrap="square" anchor="t">
+            <a:spAutoFit/>
+          </a:bodyPr>
+          <a:lstStyle/>
+          <a:p>
+            <a:pPr algn="l"/>
             <a:r>
               <a:rPr sz="1600" b="0">
                 <a:solidFill>
-                  <a:srgbClr val="5A5470"/>
-                </a:solidFill>
-                <a:latin typeface="DIN Next LT W23"/>
-                <a:ea typeface="DIN Next LT W23"/>
-                <a:cs typeface="DIN Next LT W23"/>
-              </a:rPr>
-              <a:t>Labs: code/15- Deep Learning</a:t>
-            </a:r>
-          </a:p>
-        </p:txBody>
-      </p:sp>
-      <p:sp>
-        <p:nvSpPr>
-          <p:cNvPr id="6" name="TextBox 5"/>
-          <p:cNvSpPr txBox="1"/>
-          <p:nvPr/>
-        </p:nvSpPr>
-        <p:spPr>
-          <a:xfrm>
-            <a:off x="548640" y="6126480"/>
-            <a:ext cx="5486400" cy="274320"/>
-          </a:xfrm>
-          <a:prstGeom prst="rect">
-            <a:avLst/>
-          </a:prstGeom>
-          <a:noFill/>
-        </p:spPr>
-        <p:txBody>
-          <a:bodyPr wrap="square" anchor="t">
-            <a:spAutoFit/>
-          </a:bodyPr>
-          <a:lstStyle/>
-          <a:p>
-            <a:pPr algn="l"/>
-            <a:r>
-              <a:rPr sz="1200" b="1">
+                  <a:srgbClr val="121018"/>
+                </a:solidFill>
+                <a:latin typeface="DIN Next LT W23"/>
+                <a:ea typeface="DIN Next LT W23"/>
+                <a:cs typeface="DIN Next LT W23"/>
+              </a:rPr>
+              <a:t>A neuron is z = wᵀx + b then a = f(z). Depth needs nonlinearity between layers.</a:t>
+            </a:r>
+          </a:p>
+        </p:txBody>
+      </p:sp>
+      <p:sp>
+        <p:nvSpPr>
+          <p:cNvPr id="11" name="Rounded Rectangle 10"/>
+          <p:cNvSpPr/>
+          <p:nvPr/>
+        </p:nvSpPr>
+        <p:spPr>
+          <a:xfrm>
+            <a:off x="548640" y="3291840"/>
+            <a:ext cx="10972800" cy="987552"/>
+          </a:xfrm>
+          <a:prstGeom prst="roundRect">
+            <a:avLst>
+              <a:gd name="adj" fmla="val 10000"/>
+            </a:avLst>
+          </a:prstGeom>
+          <a:solidFill>
+            <a:srgbClr val="EEE8FA"/>
+          </a:solidFill>
+          <a:ln>
+            <a:noFill/>
+          </a:ln>
+          <a:effectLst/>
+        </p:spPr>
+        <p:style>
+          <a:lnRef idx="1">
+            <a:schemeClr val="accent1"/>
+          </a:lnRef>
+          <a:fillRef idx="3">
+            <a:schemeClr val="accent1"/>
+          </a:fillRef>
+          <a:effectRef idx="2">
+            <a:schemeClr val="accent1"/>
+          </a:effectRef>
+          <a:fontRef idx="minor">
+            <a:schemeClr val="lt1"/>
+          </a:fontRef>
+        </p:style>
+        <p:txBody>
+          <a:bodyPr rtlCol="0" anchor="ctr"/>
+          <a:lstStyle/>
+          <a:p>
+            <a:pPr algn="ctr"/>
+          </a:p>
+        </p:txBody>
+      </p:sp>
+      <p:sp>
+        <p:nvSpPr>
+          <p:cNvPr id="12" name="TextBox 11"/>
+          <p:cNvSpPr txBox="1"/>
+          <p:nvPr/>
+        </p:nvSpPr>
+        <p:spPr>
+          <a:xfrm>
+            <a:off x="822960" y="3547872"/>
+            <a:ext cx="457200" cy="457200"/>
+          </a:xfrm>
+          <a:prstGeom prst="rect">
+            <a:avLst/>
+          </a:prstGeom>
+          <a:noFill/>
+        </p:spPr>
+        <p:txBody>
+          <a:bodyPr wrap="square" anchor="t">
+            <a:spAutoFit/>
+          </a:bodyPr>
+          <a:lstStyle/>
+          <a:p>
+            <a:pPr algn="l"/>
+            <a:r>
+              <a:rPr sz="2200" b="1">
                 <a:solidFill>
                   <a:srgbClr val="5234B7"/>
                 </a:solidFill>
@@ -49863,14 +49858,171 @@
                 <a:ea typeface="DIN Next LT W23"/>
                 <a:cs typeface="DIN Next LT W23"/>
               </a:rPr>
-              <a:t>ETRA</a:t>
-            </a:r>
-          </a:p>
-        </p:txBody>
-      </p:sp>
-      <p:sp>
-        <p:nvSpPr>
-          <p:cNvPr id="7" name="Rectangle 6"/>
+              <a:t>2</a:t>
+            </a:r>
+          </a:p>
+        </p:txBody>
+      </p:sp>
+      <p:sp>
+        <p:nvSpPr>
+          <p:cNvPr id="13" name="TextBox 12"/>
+          <p:cNvSpPr txBox="1"/>
+          <p:nvPr/>
+        </p:nvSpPr>
+        <p:spPr>
+          <a:xfrm>
+            <a:off x="1417320" y="3547872"/>
+            <a:ext cx="9692640" cy="548640"/>
+          </a:xfrm>
+          <a:prstGeom prst="rect">
+            <a:avLst/>
+          </a:prstGeom>
+          <a:noFill/>
+        </p:spPr>
+        <p:txBody>
+          <a:bodyPr wrap="square" anchor="t">
+            <a:spAutoFit/>
+          </a:bodyPr>
+          <a:lstStyle/>
+          <a:p>
+            <a:pPr algn="l"/>
+            <a:r>
+              <a:rPr sz="1600" b="0">
+                <a:solidFill>
+                  <a:srgbClr val="121018"/>
+                </a:solidFill>
+                <a:latin typeface="DIN Next LT W23"/>
+                <a:ea typeface="DIN Next LT W23"/>
+                <a:cs typeface="DIN Next LT W23"/>
+              </a:rPr>
+              <a:t>Backprop is the chain rule on a graph. Watch vanishing gradients, LR, and train vs val.</a:t>
+            </a:r>
+          </a:p>
+        </p:txBody>
+      </p:sp>
+      <p:sp>
+        <p:nvSpPr>
+          <p:cNvPr id="14" name="Rounded Rectangle 13"/>
+          <p:cNvSpPr/>
+          <p:nvPr/>
+        </p:nvSpPr>
+        <p:spPr>
+          <a:xfrm>
+            <a:off x="548640" y="4434840"/>
+            <a:ext cx="10972800" cy="987552"/>
+          </a:xfrm>
+          <a:prstGeom prst="roundRect">
+            <a:avLst>
+              <a:gd name="adj" fmla="val 10000"/>
+            </a:avLst>
+          </a:prstGeom>
+          <a:solidFill>
+            <a:srgbClr val="EEE8FA"/>
+          </a:solidFill>
+          <a:ln>
+            <a:noFill/>
+          </a:ln>
+          <a:effectLst/>
+        </p:spPr>
+        <p:style>
+          <a:lnRef idx="1">
+            <a:schemeClr val="accent1"/>
+          </a:lnRef>
+          <a:fillRef idx="3">
+            <a:schemeClr val="accent1"/>
+          </a:fillRef>
+          <a:effectRef idx="2">
+            <a:schemeClr val="accent1"/>
+          </a:effectRef>
+          <a:fontRef idx="minor">
+            <a:schemeClr val="lt1"/>
+          </a:fontRef>
+        </p:style>
+        <p:txBody>
+          <a:bodyPr rtlCol="0" anchor="ctr"/>
+          <a:lstStyle/>
+          <a:p>
+            <a:pPr algn="ctr"/>
+          </a:p>
+        </p:txBody>
+      </p:sp>
+      <p:sp>
+        <p:nvSpPr>
+          <p:cNvPr id="15" name="TextBox 14"/>
+          <p:cNvSpPr txBox="1"/>
+          <p:nvPr/>
+        </p:nvSpPr>
+        <p:spPr>
+          <a:xfrm>
+            <a:off x="822960" y="4690872"/>
+            <a:ext cx="457200" cy="457200"/>
+          </a:xfrm>
+          <a:prstGeom prst="rect">
+            <a:avLst/>
+          </a:prstGeom>
+          <a:noFill/>
+        </p:spPr>
+        <p:txBody>
+          <a:bodyPr wrap="square" anchor="t">
+            <a:spAutoFit/>
+          </a:bodyPr>
+          <a:lstStyle/>
+          <a:p>
+            <a:pPr algn="l"/>
+            <a:r>
+              <a:rPr sz="2200" b="1">
+                <a:solidFill>
+                  <a:srgbClr val="5234B7"/>
+                </a:solidFill>
+                <a:latin typeface="DIN Next LT W23"/>
+                <a:ea typeface="DIN Next LT W23"/>
+                <a:cs typeface="DIN Next LT W23"/>
+              </a:rPr>
+              <a:t>3</a:t>
+            </a:r>
+          </a:p>
+        </p:txBody>
+      </p:sp>
+      <p:sp>
+        <p:nvSpPr>
+          <p:cNvPr id="16" name="TextBox 15"/>
+          <p:cNvSpPr txBox="1"/>
+          <p:nvPr/>
+        </p:nvSpPr>
+        <p:spPr>
+          <a:xfrm>
+            <a:off x="1417320" y="4690872"/>
+            <a:ext cx="9692640" cy="548640"/>
+          </a:xfrm>
+          <a:prstGeom prst="rect">
+            <a:avLst/>
+          </a:prstGeom>
+          <a:noFill/>
+        </p:spPr>
+        <p:txBody>
+          <a:bodyPr wrap="square" anchor="t">
+            <a:spAutoFit/>
+          </a:bodyPr>
+          <a:lstStyle/>
+          <a:p>
+            <a:pPr algn="l"/>
+            <a:r>
+              <a:rPr sz="1600" b="0">
+                <a:solidFill>
+                  <a:srgbClr val="121018"/>
+                </a:solidFill>
+                <a:latin typeface="DIN Next LT W23"/>
+                <a:ea typeface="DIN Next LT W23"/>
+                <a:cs typeface="DIN Next LT W23"/>
+              </a:rPr>
+              <a:t>CNNs share filters across space; RNNs share weights across time; regularize so they generalize.</a:t>
+            </a:r>
+          </a:p>
+        </p:txBody>
+      </p:sp>
+      <p:sp>
+        <p:nvSpPr>
+          <p:cNvPr id="17" name="Rectangle 16"/>
           <p:cNvSpPr/>
           <p:nvPr/>
         </p:nvSpPr>
@@ -49914,7 +50066,7 @@
       </p:sp>
       <p:sp>
         <p:nvSpPr>
-          <p:cNvPr id="8" name="TextBox 7"/>
+          <p:cNvPr id="18" name="TextBox 17"/>
           <p:cNvSpPr txBox="1"/>
           <p:nvPr/>
         </p:nvSpPr>
@@ -49951,7 +50103,7 @@
       </p:sp>
       <p:sp>
         <p:nvSpPr>
-          <p:cNvPr id="9" name="TextBox 8"/>
+          <p:cNvPr id="19" name="TextBox 18"/>
           <p:cNvSpPr txBox="1"/>
           <p:nvPr/>
         </p:nvSpPr>
@@ -49981,7 +50133,330 @@
                 <a:ea typeface="DIN Next LT W23"/>
                 <a:cs typeface="DIN Next LT W23"/>
               </a:rPr>
-              <a:t>76  /  76</a:t>
+              <a:t>76  /  77</a:t>
+            </a:r>
+          </a:p>
+        </p:txBody>
+      </p:sp>
+    </p:spTree>
+  </p:cSld>
+  <p:clrMapOvr>
+    <a:masterClrMapping/>
+  </p:clrMapOvr>
+</p:sld>
+</file>
+
+<file path=ppt/slides/slide77.xml><?xml version="1.0" encoding="utf-8"?>
+<p:sld xmlns:a="http://schemas.openxmlformats.org/drawingml/2006/main" xmlns:p="http://schemas.openxmlformats.org/presentationml/2006/main" xmlns:r="http://schemas.openxmlformats.org/officeDocument/2006/relationships">
+  <p:cSld>
+    <p:bg>
+      <p:bgPr>
+        <a:solidFill>
+          <a:srgbClr val="FAF8FF"/>
+        </a:solidFill>
+        <a:effectLst/>
+      </p:bgPr>
+    </p:bg>
+    <p:spTree>
+      <p:nvGrpSpPr>
+        <p:cNvPr id="1" name=""/>
+        <p:cNvGrpSpPr/>
+        <p:nvPr/>
+      </p:nvGrpSpPr>
+      <p:grpSpPr/>
+      <p:sp>
+        <p:nvSpPr>
+          <p:cNvPr id="2" name="Rectangle 1"/>
+          <p:cNvSpPr/>
+          <p:nvPr/>
+        </p:nvSpPr>
+        <p:spPr>
+          <a:xfrm>
+            <a:off x="12136831" y="0"/>
+            <a:ext cx="54864" cy="6858000"/>
+          </a:xfrm>
+          <a:prstGeom prst="rect">
+            <a:avLst/>
+          </a:prstGeom>
+          <a:solidFill>
+            <a:srgbClr val="5234B7"/>
+          </a:solidFill>
+          <a:ln>
+            <a:noFill/>
+          </a:ln>
+          <a:effectLst/>
+        </p:spPr>
+        <p:style>
+          <a:lnRef idx="1">
+            <a:schemeClr val="accent1"/>
+          </a:lnRef>
+          <a:fillRef idx="3">
+            <a:schemeClr val="accent1"/>
+          </a:fillRef>
+          <a:effectRef idx="2">
+            <a:schemeClr val="accent1"/>
+          </a:effectRef>
+          <a:fontRef idx="minor">
+            <a:schemeClr val="lt1"/>
+          </a:fontRef>
+        </p:style>
+        <p:txBody>
+          <a:bodyPr rtlCol="0" anchor="ctr"/>
+          <a:lstStyle/>
+          <a:p>
+            <a:pPr algn="ctr"/>
+          </a:p>
+        </p:txBody>
+      </p:sp>
+      <p:pic>
+        <p:nvPicPr>
+          <p:cNvPr id="3" name="Picture 2" descr="etra-wordmark.png"/>
+          <p:cNvPicPr>
+            <a:picLocks noChangeAspect="1"/>
+          </p:cNvPicPr>
+          <p:nvPr/>
+        </p:nvPicPr>
+        <p:blipFill>
+          <a:blip r:embed="rId2"/>
+          <a:stretch>
+            <a:fillRect/>
+          </a:stretch>
+        </p:blipFill>
+        <p:spPr>
+          <a:xfrm>
+            <a:off x="10561320" y="411480"/>
+            <a:ext cx="1378516" cy="365760"/>
+          </a:xfrm>
+          <a:prstGeom prst="rect">
+            <a:avLst/>
+          </a:prstGeom>
+        </p:spPr>
+      </p:pic>
+      <p:sp>
+        <p:nvSpPr>
+          <p:cNvPr id="4" name="TextBox 3"/>
+          <p:cNvSpPr txBox="1"/>
+          <p:nvPr/>
+        </p:nvSpPr>
+        <p:spPr>
+          <a:xfrm>
+            <a:off x="548640" y="2651760"/>
+            <a:ext cx="10972800" cy="731520"/>
+          </a:xfrm>
+          <a:prstGeom prst="rect">
+            <a:avLst/>
+          </a:prstGeom>
+          <a:noFill/>
+        </p:spPr>
+        <p:txBody>
+          <a:bodyPr wrap="square" anchor="t">
+            <a:spAutoFit/>
+          </a:bodyPr>
+          <a:lstStyle/>
+          <a:p>
+            <a:pPr algn="ctr"/>
+            <a:r>
+              <a:rPr sz="4000" b="1">
+                <a:solidFill>
+                  <a:srgbClr val="5234B7"/>
+                </a:solidFill>
+                <a:latin typeface="DIN Next LT W23"/>
+                <a:ea typeface="DIN Next LT W23"/>
+                <a:cs typeface="DIN Next LT W23"/>
+              </a:rPr>
+              <a:t>Thank you</a:t>
+            </a:r>
+          </a:p>
+        </p:txBody>
+      </p:sp>
+      <p:sp>
+        <p:nvSpPr>
+          <p:cNvPr id="5" name="TextBox 4"/>
+          <p:cNvSpPr txBox="1"/>
+          <p:nvPr/>
+        </p:nvSpPr>
+        <p:spPr>
+          <a:xfrm>
+            <a:off x="548640" y="3474720"/>
+            <a:ext cx="10972800" cy="365760"/>
+          </a:xfrm>
+          <a:prstGeom prst="rect">
+            <a:avLst/>
+          </a:prstGeom>
+          <a:noFill/>
+        </p:spPr>
+        <p:txBody>
+          <a:bodyPr wrap="square" anchor="t">
+            <a:spAutoFit/>
+          </a:bodyPr>
+          <a:lstStyle/>
+          <a:p>
+            <a:pPr algn="ctr"/>
+            <a:r>
+              <a:rPr sz="1600" b="0">
+                <a:solidFill>
+                  <a:srgbClr val="5A5470"/>
+                </a:solidFill>
+                <a:latin typeface="DIN Next LT W23"/>
+                <a:ea typeface="DIN Next LT W23"/>
+                <a:cs typeface="DIN Next LT W23"/>
+              </a:rPr>
+              <a:t>Labs: code/15- Deep Learning</a:t>
+            </a:r>
+          </a:p>
+        </p:txBody>
+      </p:sp>
+      <p:sp>
+        <p:nvSpPr>
+          <p:cNvPr id="6" name="TextBox 5"/>
+          <p:cNvSpPr txBox="1"/>
+          <p:nvPr/>
+        </p:nvSpPr>
+        <p:spPr>
+          <a:xfrm>
+            <a:off x="548640" y="6126480"/>
+            <a:ext cx="5486400" cy="274320"/>
+          </a:xfrm>
+          <a:prstGeom prst="rect">
+            <a:avLst/>
+          </a:prstGeom>
+          <a:noFill/>
+        </p:spPr>
+        <p:txBody>
+          <a:bodyPr wrap="square" anchor="t">
+            <a:spAutoFit/>
+          </a:bodyPr>
+          <a:lstStyle/>
+          <a:p>
+            <a:pPr algn="l"/>
+            <a:r>
+              <a:rPr sz="1200" b="1">
+                <a:solidFill>
+                  <a:srgbClr val="5234B7"/>
+                </a:solidFill>
+                <a:latin typeface="DIN Next LT W23"/>
+                <a:ea typeface="DIN Next LT W23"/>
+                <a:cs typeface="DIN Next LT W23"/>
+              </a:rPr>
+              <a:t>ETRA</a:t>
+            </a:r>
+          </a:p>
+        </p:txBody>
+      </p:sp>
+      <p:sp>
+        <p:nvSpPr>
+          <p:cNvPr id="7" name="Rectangle 6"/>
+          <p:cNvSpPr/>
+          <p:nvPr/>
+        </p:nvSpPr>
+        <p:spPr>
+          <a:xfrm>
+            <a:off x="548640" y="6446520"/>
+            <a:ext cx="11064240" cy="10972"/>
+          </a:xfrm>
+          <a:prstGeom prst="rect">
+            <a:avLst/>
+          </a:prstGeom>
+          <a:solidFill>
+            <a:srgbClr val="5234B7"/>
+          </a:solidFill>
+          <a:ln>
+            <a:noFill/>
+          </a:ln>
+          <a:effectLst/>
+        </p:spPr>
+        <p:style>
+          <a:lnRef idx="1">
+            <a:schemeClr val="accent1"/>
+          </a:lnRef>
+          <a:fillRef idx="3">
+            <a:schemeClr val="accent1"/>
+          </a:fillRef>
+          <a:effectRef idx="2">
+            <a:schemeClr val="accent1"/>
+          </a:effectRef>
+          <a:fontRef idx="minor">
+            <a:schemeClr val="lt1"/>
+          </a:fontRef>
+        </p:style>
+        <p:txBody>
+          <a:bodyPr rtlCol="0" anchor="ctr"/>
+          <a:lstStyle/>
+          <a:p>
+            <a:pPr algn="ctr"/>
+          </a:p>
+        </p:txBody>
+      </p:sp>
+      <p:sp>
+        <p:nvSpPr>
+          <p:cNvPr id="8" name="TextBox 7"/>
+          <p:cNvSpPr txBox="1"/>
+          <p:nvPr/>
+        </p:nvSpPr>
+        <p:spPr>
+          <a:xfrm>
+            <a:off x="548640" y="6510528"/>
+            <a:ext cx="2743200" cy="256032"/>
+          </a:xfrm>
+          <a:prstGeom prst="rect">
+            <a:avLst/>
+          </a:prstGeom>
+          <a:noFill/>
+        </p:spPr>
+        <p:txBody>
+          <a:bodyPr wrap="square" anchor="t">
+            <a:spAutoFit/>
+          </a:bodyPr>
+          <a:lstStyle/>
+          <a:p>
+            <a:pPr algn="l"/>
+            <a:r>
+              <a:rPr sz="1100" b="1">
+                <a:solidFill>
+                  <a:srgbClr val="5234B7"/>
+                </a:solidFill>
+                <a:latin typeface="DIN Next LT W23"/>
+                <a:ea typeface="DIN Next LT W23"/>
+                <a:cs typeface="DIN Next LT W23"/>
+              </a:rPr>
+              <a:t>ETRA</a:t>
+            </a:r>
+          </a:p>
+        </p:txBody>
+      </p:sp>
+      <p:sp>
+        <p:nvSpPr>
+          <p:cNvPr id="9" name="TextBox 8"/>
+          <p:cNvSpPr txBox="1"/>
+          <p:nvPr/>
+        </p:nvSpPr>
+        <p:spPr>
+          <a:xfrm>
+            <a:off x="9601200" y="6510528"/>
+            <a:ext cx="2011680" cy="256032"/>
+          </a:xfrm>
+          <a:prstGeom prst="rect">
+            <a:avLst/>
+          </a:prstGeom>
+          <a:noFill/>
+        </p:spPr>
+        <p:txBody>
+          <a:bodyPr wrap="square" anchor="t">
+            <a:spAutoFit/>
+          </a:bodyPr>
+          <a:lstStyle/>
+          <a:p>
+            <a:pPr algn="r"/>
+            <a:r>
+              <a:rPr sz="1100" b="0">
+                <a:solidFill>
+                  <a:srgbClr val="5A5470"/>
+                </a:solidFill>
+                <a:latin typeface="DIN Next LT W23"/>
+                <a:ea typeface="DIN Next LT W23"/>
+                <a:cs typeface="DIN Next LT W23"/>
+              </a:rPr>
+              <a:t>77  /  77</a:t>
             </a:r>
           </a:p>
         </p:txBody>
@@ -50649,7 +51124,7 @@
                 <a:ea typeface="DIN Next LT W23"/>
                 <a:cs typeface="DIN Next LT W23"/>
               </a:rPr>
-              <a:t>08  /  76</a:t>
+              <a:t>08  /  77</a:t>
             </a:r>
           </a:p>
         </p:txBody>
@@ -51280,7 +51755,7 @@
                 <a:ea typeface="DIN Next LT W23"/>
                 <a:cs typeface="DIN Next LT W23"/>
               </a:rPr>
-              <a:t>09  /  76</a:t>
+              <a:t>09  /  77</a:t>
             </a:r>
           </a:p>
         </p:txBody>

--- a/web-presentation/pdf-exports/Week2-Session1-Deep-Learning.pptx
+++ b/web-presentation/pdf-exports/Week2-Session1-Deep-Learning.pptx
@@ -82,6 +82,7 @@
     <p:sldId id="330" r:id="rId81"/>
     <p:sldId id="331" r:id="rId82"/>
     <p:sldId id="332" r:id="rId83"/>
+    <p:sldId id="333" r:id="rId84"/>
   </p:sldIdLst>
   <p:sldSz cx="12191695" cy="6858000" type="screen4x3"/>
   <p:notesSz cx="6858000" cy="9144000"/>
@@ -4024,7 +4025,7 @@
                 <a:ea typeface="DIN Next LT W23"/>
                 <a:cs typeface="DIN Next LT W23"/>
               </a:rPr>
-              <a:t>10  /  77</a:t>
+              <a:t>10  /  78</a:t>
             </a:r>
           </a:p>
         </p:txBody>
@@ -4692,7 +4693,7 @@
                 <a:ea typeface="DIN Next LT W23"/>
                 <a:cs typeface="DIN Next LT W23"/>
               </a:rPr>
-              <a:t>11  /  77</a:t>
+              <a:t>11  /  78</a:t>
             </a:r>
           </a:p>
         </p:txBody>
@@ -5166,7 +5167,7 @@
                 <a:ea typeface="DIN Next LT W23"/>
                 <a:cs typeface="DIN Next LT W23"/>
               </a:rPr>
-              <a:t>12  /  77</a:t>
+              <a:t>12  /  78</a:t>
             </a:r>
           </a:p>
         </p:txBody>
@@ -5755,7 +5756,7 @@
                 <a:ea typeface="DIN Next LT W23"/>
                 <a:cs typeface="DIN Next LT W23"/>
               </a:rPr>
-              <a:t>13  /  77</a:t>
+              <a:t>13  /  78</a:t>
             </a:r>
           </a:p>
         </p:txBody>
@@ -6229,7 +6230,7 @@
                 <a:ea typeface="DIN Next LT W23"/>
                 <a:cs typeface="DIN Next LT W23"/>
               </a:rPr>
-              <a:t>14  /  77</a:t>
+              <a:t>14  /  78</a:t>
             </a:r>
           </a:p>
         </p:txBody>
@@ -6897,7 +6898,7 @@
                 <a:ea typeface="DIN Next LT W23"/>
                 <a:cs typeface="DIN Next LT W23"/>
               </a:rPr>
-              <a:t>15  /  77</a:t>
+              <a:t>15  /  78</a:t>
             </a:r>
           </a:p>
         </p:txBody>
@@ -7486,7 +7487,7 @@
                 <a:ea typeface="DIN Next LT W23"/>
                 <a:cs typeface="DIN Next LT W23"/>
               </a:rPr>
-              <a:t>16  /  77</a:t>
+              <a:t>16  /  78</a:t>
             </a:r>
           </a:p>
         </p:txBody>
@@ -8306,7 +8307,7 @@
                 <a:ea typeface="DIN Next LT W23"/>
                 <a:cs typeface="DIN Next LT W23"/>
               </a:rPr>
-              <a:t>17  /  77</a:t>
+              <a:t>17  /  78</a:t>
             </a:r>
           </a:p>
         </p:txBody>
@@ -9085,7 +9086,7 @@
                 <a:ea typeface="DIN Next LT W23"/>
                 <a:cs typeface="DIN Next LT W23"/>
               </a:rPr>
-              <a:t>18  /  77</a:t>
+              <a:t>18  /  78</a:t>
             </a:r>
           </a:p>
         </p:txBody>
@@ -9801,7 +9802,7 @@
                 <a:ea typeface="DIN Next LT W23"/>
                 <a:cs typeface="DIN Next LT W23"/>
               </a:rPr>
-              <a:t>19  /  77</a:t>
+              <a:t>19  /  78</a:t>
             </a:r>
           </a:p>
         </p:txBody>
@@ -11720,7 +11721,7 @@
                 <a:ea typeface="DIN Next LT W23"/>
                 <a:cs typeface="DIN Next LT W23"/>
               </a:rPr>
-              <a:t>02  /  77</a:t>
+              <a:t>02  /  78</a:t>
             </a:r>
           </a:p>
         </p:txBody>
@@ -12384,7 +12385,7 @@
                 <a:ea typeface="DIN Next LT W23"/>
                 <a:cs typeface="DIN Next LT W23"/>
               </a:rPr>
-              <a:t>20  /  77</a:t>
+              <a:t>20  /  78</a:t>
             </a:r>
           </a:p>
         </p:txBody>
@@ -13047,7 +13048,7 @@
                 <a:ea typeface="DIN Next LT W23"/>
                 <a:cs typeface="DIN Next LT W23"/>
               </a:rPr>
-              <a:t>21  /  77</a:t>
+              <a:t>21  /  78</a:t>
             </a:r>
           </a:p>
         </p:txBody>
@@ -13879,7 +13880,7 @@
                 <a:ea typeface="DIN Next LT W23"/>
                 <a:cs typeface="DIN Next LT W23"/>
               </a:rPr>
-              <a:t>22  /  77</a:t>
+              <a:t>22  /  78</a:t>
             </a:r>
           </a:p>
         </p:txBody>
@@ -14468,7 +14469,7 @@
                 <a:ea typeface="DIN Next LT W23"/>
                 <a:cs typeface="DIN Next LT W23"/>
               </a:rPr>
-              <a:t>23  /  77</a:t>
+              <a:t>23  /  78</a:t>
             </a:r>
           </a:p>
         </p:txBody>
@@ -15173,7 +15174,7 @@
                 <a:ea typeface="DIN Next LT W23"/>
                 <a:cs typeface="DIN Next LT W23"/>
               </a:rPr>
-              <a:t>24  /  77</a:t>
+              <a:t>24  /  78</a:t>
             </a:r>
           </a:p>
         </p:txBody>
@@ -15851,7 +15852,7 @@
                 <a:ea typeface="DIN Next LT W23"/>
                 <a:cs typeface="DIN Next LT W23"/>
               </a:rPr>
-              <a:t>25  /  77</a:t>
+              <a:t>25  /  78</a:t>
             </a:r>
           </a:p>
         </p:txBody>
@@ -16371,7 +16372,7 @@
                 <a:ea typeface="DIN Next LT W23"/>
                 <a:cs typeface="DIN Next LT W23"/>
               </a:rPr>
-              <a:t>26  /  77</a:t>
+              <a:t>26  /  78</a:t>
             </a:r>
           </a:p>
         </p:txBody>
@@ -16845,7 +16846,7 @@
                 <a:ea typeface="DIN Next LT W23"/>
                 <a:cs typeface="DIN Next LT W23"/>
               </a:rPr>
-              <a:t>27  /  77</a:t>
+              <a:t>27  /  78</a:t>
             </a:r>
           </a:p>
         </p:txBody>
@@ -17434,7 +17435,7 @@
                 <a:ea typeface="DIN Next LT W23"/>
                 <a:cs typeface="DIN Next LT W23"/>
               </a:rPr>
-              <a:t>28  /  77</a:t>
+              <a:t>28  /  78</a:t>
             </a:r>
           </a:p>
         </p:txBody>
@@ -18112,7 +18113,7 @@
                 <a:ea typeface="DIN Next LT W23"/>
                 <a:cs typeface="DIN Next LT W23"/>
               </a:rPr>
-              <a:t>29  /  77</a:t>
+              <a:t>29  /  78</a:t>
             </a:r>
           </a:p>
         </p:txBody>
@@ -18985,7 +18986,7 @@
                 <a:ea typeface="DIN Next LT W23"/>
                 <a:cs typeface="DIN Next LT W23"/>
               </a:rPr>
-              <a:t>03  /  77</a:t>
+              <a:t>03  /  78</a:t>
             </a:r>
           </a:p>
         </p:txBody>
@@ -19649,7 +19650,7 @@
                 <a:ea typeface="DIN Next LT W23"/>
                 <a:cs typeface="DIN Next LT W23"/>
               </a:rPr>
-              <a:t>30  /  77</a:t>
+              <a:t>30  /  78</a:t>
             </a:r>
           </a:p>
         </p:txBody>
@@ -20123,7 +20124,7 @@
                 <a:ea typeface="DIN Next LT W23"/>
                 <a:cs typeface="DIN Next LT W23"/>
               </a:rPr>
-              <a:t>31  /  77</a:t>
+              <a:t>31  /  78</a:t>
             </a:r>
           </a:p>
         </p:txBody>
@@ -20712,7 +20713,7 @@
                 <a:ea typeface="DIN Next LT W23"/>
                 <a:cs typeface="DIN Next LT W23"/>
               </a:rPr>
-              <a:t>32  /  77</a:t>
+              <a:t>32  /  78</a:t>
             </a:r>
           </a:p>
         </p:txBody>
@@ -21186,7 +21187,7 @@
                 <a:ea typeface="DIN Next LT W23"/>
                 <a:cs typeface="DIN Next LT W23"/>
               </a:rPr>
-              <a:t>33  /  77</a:t>
+              <a:t>33  /  78</a:t>
             </a:r>
           </a:p>
         </p:txBody>
@@ -22018,7 +22019,7 @@
                 <a:ea typeface="DIN Next LT W23"/>
                 <a:cs typeface="DIN Next LT W23"/>
               </a:rPr>
-              <a:t>34  /  77</a:t>
+              <a:t>34  /  78</a:t>
             </a:r>
           </a:p>
         </p:txBody>
@@ -22682,7 +22683,7 @@
                 <a:ea typeface="DIN Next LT W23"/>
                 <a:cs typeface="DIN Next LT W23"/>
               </a:rPr>
-              <a:t>35  /  77</a:t>
+              <a:t>35  /  78</a:t>
             </a:r>
           </a:p>
         </p:txBody>
@@ -23156,7 +23157,7 @@
                 <a:ea typeface="DIN Next LT W23"/>
                 <a:cs typeface="DIN Next LT W23"/>
               </a:rPr>
-              <a:t>36  /  77</a:t>
+              <a:t>36  /  78</a:t>
             </a:r>
           </a:p>
         </p:txBody>
@@ -23745,7 +23746,7 @@
                 <a:ea typeface="DIN Next LT W23"/>
                 <a:cs typeface="DIN Next LT W23"/>
               </a:rPr>
-              <a:t>37  /  77</a:t>
+              <a:t>37  /  78</a:t>
             </a:r>
           </a:p>
         </p:txBody>
@@ -24330,7 +24331,7 @@
                 <a:ea typeface="DIN Next LT W23"/>
                 <a:cs typeface="DIN Next LT W23"/>
               </a:rPr>
-              <a:t>38  /  77</a:t>
+              <a:t>38  /  78</a:t>
             </a:r>
           </a:p>
         </p:txBody>
@@ -24804,7 +24805,7 @@
                 <a:ea typeface="DIN Next LT W23"/>
                 <a:cs typeface="DIN Next LT W23"/>
               </a:rPr>
-              <a:t>39  /  77</a:t>
+              <a:t>39  /  78</a:t>
             </a:r>
           </a:p>
         </p:txBody>
@@ -25615,7 +25616,7 @@
                 <a:ea typeface="DIN Next LT W23"/>
                 <a:cs typeface="DIN Next LT W23"/>
               </a:rPr>
-              <a:t>04  /  77</a:t>
+              <a:t>04  /  78</a:t>
             </a:r>
           </a:p>
         </p:txBody>
@@ -26204,7 +26205,7 @@
                 <a:ea typeface="DIN Next LT W23"/>
                 <a:cs typeface="DIN Next LT W23"/>
               </a:rPr>
-              <a:t>40  /  77</a:t>
+              <a:t>40  /  78</a:t>
             </a:r>
           </a:p>
         </p:txBody>
@@ -26882,7 +26883,7 @@
                 <a:ea typeface="DIN Next LT W23"/>
                 <a:cs typeface="DIN Next LT W23"/>
               </a:rPr>
-              <a:t>41  /  77</a:t>
+              <a:t>41  /  78</a:t>
             </a:r>
           </a:p>
         </p:txBody>
@@ -27356,7 +27357,7 @@
                 <a:ea typeface="DIN Next LT W23"/>
                 <a:cs typeface="DIN Next LT W23"/>
               </a:rPr>
-              <a:t>42  /  77</a:t>
+              <a:t>42  /  78</a:t>
             </a:r>
           </a:p>
         </p:txBody>
@@ -28024,7 +28025,7 @@
                 <a:ea typeface="DIN Next LT W23"/>
                 <a:cs typeface="DIN Next LT W23"/>
               </a:rPr>
-              <a:t>43  /  77</a:t>
+              <a:t>43  /  78</a:t>
             </a:r>
           </a:p>
         </p:txBody>
@@ -28729,7 +28730,7 @@
                 <a:ea typeface="DIN Next LT W23"/>
                 <a:cs typeface="DIN Next LT W23"/>
               </a:rPr>
-              <a:t>44  /  77</a:t>
+              <a:t>44  /  78</a:t>
             </a:r>
           </a:p>
         </p:txBody>
@@ -29397,7 +29398,7 @@
                 <a:ea typeface="DIN Next LT W23"/>
                 <a:cs typeface="DIN Next LT W23"/>
               </a:rPr>
-              <a:t>45  /  77</a:t>
+              <a:t>45  /  78</a:t>
             </a:r>
           </a:p>
         </p:txBody>
@@ -29945,7 +29946,7 @@
                 <a:ea typeface="DIN Next LT W23"/>
                 <a:cs typeface="DIN Next LT W23"/>
               </a:rPr>
-              <a:t>46  /  77</a:t>
+              <a:t>46  /  78</a:t>
             </a:r>
           </a:p>
         </p:txBody>
@@ -30419,7 +30420,7 @@
                 <a:ea typeface="DIN Next LT W23"/>
                 <a:cs typeface="DIN Next LT W23"/>
               </a:rPr>
-              <a:t>47  /  77</a:t>
+              <a:t>47  /  78</a:t>
             </a:r>
           </a:p>
         </p:txBody>
@@ -30971,7 +30972,7 @@
                 <a:ea typeface="DIN Next LT W23"/>
                 <a:cs typeface="DIN Next LT W23"/>
               </a:rPr>
-              <a:t>48  /  77</a:t>
+              <a:t>48  /  78</a:t>
             </a:r>
           </a:p>
         </p:txBody>
@@ -31591,7 +31592,7 @@
                 <a:ea typeface="DIN Next LT W23"/>
                 <a:cs typeface="DIN Next LT W23"/>
               </a:rPr>
-              <a:t>49  /  77</a:t>
+              <a:t>49  /  78</a:t>
             </a:r>
           </a:p>
         </p:txBody>
@@ -32370,7 +32371,7 @@
                 <a:ea typeface="DIN Next LT W23"/>
                 <a:cs typeface="DIN Next LT W23"/>
               </a:rPr>
-              <a:t>05  /  77</a:t>
+              <a:t>05  /  78</a:t>
             </a:r>
           </a:p>
         </p:txBody>
@@ -32885,7 +32886,7 @@
                 <a:ea typeface="DIN Next LT W23"/>
                 <a:cs typeface="DIN Next LT W23"/>
               </a:rPr>
-              <a:t>50  /  77</a:t>
+              <a:t>50  /  78</a:t>
             </a:r>
           </a:p>
         </p:txBody>
@@ -33470,7 +33471,7 @@
                 <a:ea typeface="DIN Next LT W23"/>
                 <a:cs typeface="DIN Next LT W23"/>
               </a:rPr>
-              <a:t>51  /  77</a:t>
+              <a:t>51  /  78</a:t>
             </a:r>
           </a:p>
         </p:txBody>
@@ -34059,7 +34060,7 @@
                 <a:ea typeface="DIN Next LT W23"/>
                 <a:cs typeface="DIN Next LT W23"/>
               </a:rPr>
-              <a:t>52  /  77</a:t>
+              <a:t>52  /  78</a:t>
             </a:r>
           </a:p>
         </p:txBody>
@@ -34533,7 +34534,7 @@
                 <a:ea typeface="DIN Next LT W23"/>
                 <a:cs typeface="DIN Next LT W23"/>
               </a:rPr>
-              <a:t>53  /  77</a:t>
+              <a:t>53  /  78</a:t>
             </a:r>
           </a:p>
         </p:txBody>
@@ -35304,7 +35305,7 @@
                 <a:ea typeface="DIN Next LT W23"/>
                 <a:cs typeface="DIN Next LT W23"/>
               </a:rPr>
-              <a:t>54  /  77</a:t>
+              <a:t>54  /  78</a:t>
             </a:r>
           </a:p>
         </p:txBody>
@@ -35893,7 +35894,7 @@
                 <a:ea typeface="DIN Next LT W23"/>
                 <a:cs typeface="DIN Next LT W23"/>
               </a:rPr>
-              <a:t>55  /  77</a:t>
+              <a:t>55  /  78</a:t>
             </a:r>
           </a:p>
         </p:txBody>
@@ -36571,7 +36572,7 @@
                 <a:ea typeface="DIN Next LT W23"/>
                 <a:cs typeface="DIN Next LT W23"/>
               </a:rPr>
-              <a:t>56  /  77</a:t>
+              <a:t>56  /  78</a:t>
             </a:r>
           </a:p>
         </p:txBody>
@@ -37197,7 +37198,7 @@
                 <a:ea typeface="DIN Next LT W23"/>
                 <a:cs typeface="DIN Next LT W23"/>
               </a:rPr>
-              <a:t>57  /  77</a:t>
+              <a:t>57  /  78</a:t>
             </a:r>
           </a:p>
         </p:txBody>
@@ -37671,7 +37672,7 @@
                 <a:ea typeface="DIN Next LT W23"/>
                 <a:cs typeface="DIN Next LT W23"/>
               </a:rPr>
-              <a:t>58  /  77</a:t>
+              <a:t>58  /  78</a:t>
             </a:r>
           </a:p>
         </p:txBody>
@@ -38432,7 +38433,7 @@
                 <a:ea typeface="DIN Next LT W23"/>
                 <a:cs typeface="DIN Next LT W23"/>
               </a:rPr>
-              <a:t>59  /  77</a:t>
+              <a:t>59  /  78</a:t>
             </a:r>
           </a:p>
         </p:txBody>
@@ -38943,7 +38944,7 @@
                 <a:ea typeface="DIN Next LT W23"/>
                 <a:cs typeface="DIN Next LT W23"/>
               </a:rPr>
-              <a:t>06  /  77</a:t>
+              <a:t>06  /  78</a:t>
             </a:r>
           </a:p>
         </p:txBody>
@@ -39417,7 +39418,7 @@
                 <a:ea typeface="DIN Next LT W23"/>
                 <a:cs typeface="DIN Next LT W23"/>
               </a:rPr>
-              <a:t>60  /  77</a:t>
+              <a:t>60  /  78</a:t>
             </a:r>
           </a:p>
         </p:txBody>
@@ -39749,7 +39750,7 @@
                 <a:ea typeface="DIN Next LT W23"/>
                 <a:cs typeface="DIN Next LT W23"/>
               </a:rPr>
-              <a:t>BN normalizes each channel across the mini-batch, then learns a scale γ and shift β.</a:t>
+              <a:t>Batch Norm (BN): normalizes activations across the mini-batch for each channel, then learns scale γ and shift β.</a:t>
             </a:r>
           </a:p>
         </p:txBody>
@@ -39848,7 +39849,7 @@
           <a:p>
             <a:pPr algn="l"/>
             <a:r>
-              <a:rPr sz="1300" b="0">
+              <a:rPr sz="1500" b="0">
                 <a:solidFill>
                   <a:srgbClr val="9E59CD"/>
                 </a:solidFill>
@@ -39885,7 +39886,7 @@
           <a:p>
             <a:pPr algn="l"/>
             <a:r>
-              <a:rPr sz="1300" b="0">
+              <a:rPr sz="1500" b="0">
                 <a:solidFill>
                   <a:srgbClr val="121018"/>
                 </a:solidFill>
@@ -39893,7 +39894,7 @@
                 <a:ea typeface="DIN Next LT W23"/>
                 <a:cs typeface="DIN Next LT W23"/>
               </a:rPr>
-              <a:t>Stabilizes internal activations and allows a higher learning rate.</a:t>
+              <a:t>It stabilizes internal activations, allowing higher learning rates and reducing dependency on precise initialization.</a:t>
             </a:r>
           </a:p>
         </p:txBody>
@@ -39906,7 +39907,7 @@
         </p:nvSpPr>
         <p:spPr>
           <a:xfrm>
-            <a:off x="548640" y="4690872"/>
+            <a:off x="548640" y="4782312"/>
             <a:ext cx="320040" cy="384048"/>
           </a:xfrm>
           <a:prstGeom prst="rect">
@@ -39922,7 +39923,7 @@
           <a:p>
             <a:pPr algn="l"/>
             <a:r>
-              <a:rPr sz="1300" b="0">
+              <a:rPr sz="1500" b="0">
                 <a:solidFill>
                   <a:srgbClr val="9E59CD"/>
                 </a:solidFill>
@@ -39943,7 +39944,7 @@
         </p:nvSpPr>
         <p:spPr>
           <a:xfrm>
-            <a:off x="914400" y="4690872"/>
+            <a:off x="914400" y="4782312"/>
             <a:ext cx="9875519" cy="384048"/>
           </a:xfrm>
           <a:prstGeom prst="rect">
@@ -39959,7 +39960,7 @@
           <a:p>
             <a:pPr algn="l"/>
             <a:r>
-              <a:rPr sz="1300" b="0">
+              <a:rPr sz="1500" b="0">
                 <a:solidFill>
                   <a:srgbClr val="121018"/>
                 </a:solidFill>
@@ -39967,51 +39968,14 @@
                 <a:ea typeface="DIN Next LT W23"/>
                 <a:cs typeface="DIN Next LT W23"/>
               </a:rPr>
-              <a:t>Layer Norm normalizes across features per example — standard in Transformers and RNNs.</a:t>
-            </a:r>
-          </a:p>
-        </p:txBody>
-      </p:sp>
-      <p:sp>
-        <p:nvSpPr>
-          <p:cNvPr id="16" name="TextBox 15"/>
-          <p:cNvSpPr txBox="1"/>
-          <p:nvPr/>
-        </p:nvSpPr>
-        <p:spPr>
-          <a:xfrm>
-            <a:off x="548640" y="5989320"/>
-            <a:ext cx="10972800" cy="228600"/>
-          </a:xfrm>
-          <a:prstGeom prst="rect">
-            <a:avLst/>
-          </a:prstGeom>
-          <a:noFill/>
-        </p:spPr>
-        <p:txBody>
-          <a:bodyPr wrap="square" anchor="t">
-            <a:spAutoFit/>
-          </a:bodyPr>
-          <a:lstStyle/>
-          <a:p>
-            <a:pPr algn="l"/>
-            <a:r>
-              <a:rPr sz="1200" b="0">
-                <a:solidFill>
-                  <a:srgbClr val="5A5470"/>
-                </a:solidFill>
-                <a:latin typeface="DIN Next LT W23"/>
-                <a:ea typeface="DIN Next LT W23"/>
-                <a:cs typeface="DIN Next LT W23"/>
-              </a:rPr>
-              <a:t>BN uses batch statistics at train time and running averages at inference.</a:t>
-            </a:r>
-          </a:p>
-        </p:txBody>
-      </p:sp>
-      <p:sp>
-        <p:nvSpPr>
-          <p:cNvPr id="17" name="Rectangle 16"/>
+              <a:t>Alternative is Layer Norm (LN) which normalizes across features per example—standard in Transformers and sequence models.</a:t>
+            </a:r>
+          </a:p>
+        </p:txBody>
+      </p:sp>
+      <p:sp>
+        <p:nvSpPr>
+          <p:cNvPr id="16" name="Rectangle 15"/>
           <p:cNvSpPr/>
           <p:nvPr/>
         </p:nvSpPr>
@@ -40055,7 +40019,7 @@
       </p:sp>
       <p:sp>
         <p:nvSpPr>
-          <p:cNvPr id="18" name="TextBox 17"/>
+          <p:cNvPr id="17" name="TextBox 16"/>
           <p:cNvSpPr txBox="1"/>
           <p:nvPr/>
         </p:nvSpPr>
@@ -40092,7 +40056,7 @@
       </p:sp>
       <p:sp>
         <p:nvSpPr>
-          <p:cNvPr id="19" name="TextBox 18"/>
+          <p:cNvPr id="18" name="TextBox 17"/>
           <p:cNvSpPr txBox="1"/>
           <p:nvPr/>
         </p:nvSpPr>
@@ -40122,7 +40086,7 @@
                 <a:ea typeface="DIN Next LT W23"/>
                 <a:cs typeface="DIN Next LT W23"/>
               </a:rPr>
-              <a:t>61  /  77</a:t>
+              <a:t>61  /  78</a:t>
             </a:r>
           </a:p>
         </p:txBody>
@@ -40334,7 +40298,7 @@
                 <a:ea typeface="DIN Next LT W23"/>
                 <a:cs typeface="DIN Next LT W23"/>
               </a:rPr>
-              <a:t>Image Data: How Computers See Pixels</a:t>
+              <a:t>Normalization: Batch Normalization</a:t>
             </a:r>
           </a:p>
         </p:txBody>
@@ -40371,426 +40335,254 @@
                 <a:ea typeface="DIN Next LT W23"/>
                 <a:cs typeface="DIN Next LT W23"/>
               </a:rPr>
-              <a:t>Tensors, Channels, and Local Structure</a:t>
-            </a:r>
-          </a:p>
-        </p:txBody>
-      </p:sp>
-      <p:sp>
-        <p:nvSpPr>
-          <p:cNvPr id="8" name="Rounded Rectangle 7"/>
-          <p:cNvSpPr/>
-          <p:nvPr/>
-        </p:nvSpPr>
-        <p:spPr>
-          <a:xfrm>
-            <a:off x="548640" y="2011680"/>
-            <a:ext cx="5760720" cy="1097280"/>
-          </a:xfrm>
-          <a:prstGeom prst="roundRect">
-            <a:avLst>
-              <a:gd name="adj" fmla="val 10000"/>
-            </a:avLst>
-          </a:prstGeom>
-          <a:solidFill>
-            <a:srgbClr val="EEE8FA"/>
-          </a:solidFill>
-          <a:ln>
-            <a:noFill/>
-          </a:ln>
-          <a:effectLst/>
-        </p:spPr>
-        <p:style>
-          <a:lnRef idx="1">
-            <a:schemeClr val="accent1"/>
-          </a:lnRef>
-          <a:fillRef idx="3">
-            <a:schemeClr val="accent1"/>
-          </a:fillRef>
-          <a:effectRef idx="2">
-            <a:schemeClr val="accent1"/>
-          </a:effectRef>
-          <a:fontRef idx="minor">
-            <a:schemeClr val="lt1"/>
-          </a:fontRef>
-        </p:style>
-        <p:txBody>
-          <a:bodyPr rtlCol="0" anchor="ctr"/>
-          <a:lstStyle/>
-          <a:p>
-            <a:pPr algn="ctr"/>
-          </a:p>
-        </p:txBody>
-      </p:sp>
-      <p:sp>
-        <p:nvSpPr>
-          <p:cNvPr id="9" name="TextBox 8"/>
-          <p:cNvSpPr txBox="1"/>
-          <p:nvPr/>
-        </p:nvSpPr>
-        <p:spPr>
-          <a:xfrm>
-            <a:off x="822960" y="2148840"/>
-            <a:ext cx="5303520" cy="868680"/>
-          </a:xfrm>
-          <a:prstGeom prst="rect">
-            <a:avLst/>
-          </a:prstGeom>
-          <a:noFill/>
-        </p:spPr>
-        <p:txBody>
-          <a:bodyPr wrap="square" anchor="t">
-            <a:spAutoFit/>
-          </a:bodyPr>
-          <a:lstStyle/>
-          <a:p>
-            <a:pPr algn="l"/>
-            <a:r>
-              <a:rPr sz="1300" b="0">
-                <a:solidFill>
-                  <a:srgbClr val="121018"/>
-                </a:solidFill>
-                <a:latin typeface="DIN Next LT W23"/>
-                <a:ea typeface="DIN Next LT W23"/>
-                <a:cs typeface="DIN Next LT W23"/>
-              </a:rPr>
-              <a:t>A color image is a tensor H×W×3 (RGB). Meaning lives in local neighborhoods, not isolated pixels.</a:t>
-            </a:r>
-          </a:p>
-        </p:txBody>
-      </p:sp>
-      <p:sp>
-        <p:nvSpPr>
-          <p:cNvPr id="10" name="TextBox 9"/>
-          <p:cNvSpPr txBox="1"/>
-          <p:nvPr/>
-        </p:nvSpPr>
-        <p:spPr>
-          <a:xfrm>
-            <a:off x="548640" y="3246120"/>
-            <a:ext cx="320040" cy="384048"/>
-          </a:xfrm>
-          <a:prstGeom prst="rect">
-            <a:avLst/>
-          </a:prstGeom>
-          <a:noFill/>
-        </p:spPr>
-        <p:txBody>
-          <a:bodyPr wrap="square" anchor="t">
-            <a:spAutoFit/>
-          </a:bodyPr>
-          <a:lstStyle/>
-          <a:p>
-            <a:pPr algn="l"/>
-            <a:r>
-              <a:rPr sz="1300" b="0">
-                <a:solidFill>
-                  <a:srgbClr val="9E59CD"/>
-                </a:solidFill>
-                <a:latin typeface="DIN Next LT W23"/>
-                <a:ea typeface="DIN Next LT W23"/>
-                <a:cs typeface="DIN Next LT W23"/>
-              </a:rPr>
-              <a:t>–</a:t>
-            </a:r>
-          </a:p>
-        </p:txBody>
-      </p:sp>
-      <p:sp>
-        <p:nvSpPr>
-          <p:cNvPr id="11" name="TextBox 10"/>
-          <p:cNvSpPr txBox="1"/>
-          <p:nvPr/>
-        </p:nvSpPr>
-        <p:spPr>
-          <a:xfrm>
-            <a:off x="914400" y="3246120"/>
-            <a:ext cx="4754879" cy="384048"/>
-          </a:xfrm>
-          <a:prstGeom prst="rect">
-            <a:avLst/>
-          </a:prstGeom>
-          <a:noFill/>
-        </p:spPr>
-        <p:txBody>
-          <a:bodyPr wrap="square" anchor="t">
-            <a:spAutoFit/>
-          </a:bodyPr>
-          <a:lstStyle/>
-          <a:p>
-            <a:pPr algn="l"/>
-            <a:r>
-              <a:rPr sz="1300" b="0">
-                <a:solidFill>
-                  <a:srgbClr val="121018"/>
-                </a:solidFill>
-                <a:latin typeface="DIN Next LT W23"/>
-                <a:ea typeface="DIN Next LT W23"/>
-                <a:cs typeface="DIN Next LT W23"/>
-              </a:rPr>
-              <a:t>Small patches reveal edges; larger context reveals objects — hierarchical composition.</a:t>
-            </a:r>
-          </a:p>
-        </p:txBody>
-      </p:sp>
-      <p:sp>
-        <p:nvSpPr>
-          <p:cNvPr id="12" name="TextBox 11"/>
-          <p:cNvSpPr txBox="1"/>
-          <p:nvPr/>
-        </p:nvSpPr>
-        <p:spPr>
-          <a:xfrm>
-            <a:off x="548640" y="3703320"/>
-            <a:ext cx="320040" cy="384048"/>
-          </a:xfrm>
-          <a:prstGeom prst="rect">
-            <a:avLst/>
-          </a:prstGeom>
-          <a:noFill/>
-        </p:spPr>
-        <p:txBody>
-          <a:bodyPr wrap="square" anchor="t">
-            <a:spAutoFit/>
-          </a:bodyPr>
-          <a:lstStyle/>
-          <a:p>
-            <a:pPr algn="l"/>
-            <a:r>
-              <a:rPr sz="1300" b="0">
-                <a:solidFill>
-                  <a:srgbClr val="9E59CD"/>
-                </a:solidFill>
-                <a:latin typeface="DIN Next LT W23"/>
-                <a:ea typeface="DIN Next LT W23"/>
-                <a:cs typeface="DIN Next LT W23"/>
-              </a:rPr>
-              <a:t>–</a:t>
-            </a:r>
-          </a:p>
-        </p:txBody>
-      </p:sp>
-      <p:sp>
-        <p:nvSpPr>
-          <p:cNvPr id="13" name="TextBox 12"/>
-          <p:cNvSpPr txBox="1"/>
-          <p:nvPr/>
-        </p:nvSpPr>
-        <p:spPr>
-          <a:xfrm>
-            <a:off x="914400" y="3703320"/>
-            <a:ext cx="4754879" cy="384048"/>
-          </a:xfrm>
-          <a:prstGeom prst="rect">
-            <a:avLst/>
-          </a:prstGeom>
-          <a:noFill/>
-        </p:spPr>
-        <p:txBody>
-          <a:bodyPr wrap="square" anchor="t">
-            <a:spAutoFit/>
-          </a:bodyPr>
-          <a:lstStyle/>
-          <a:p>
-            <a:pPr algn="l"/>
-            <a:r>
-              <a:rPr sz="1300" b="0">
-                <a:solidFill>
-                  <a:srgbClr val="121018"/>
-                </a:solidFill>
-                <a:latin typeface="DIN Next LT W23"/>
-                <a:ea typeface="DIN Next LT W23"/>
-                <a:cs typeface="DIN Next LT W23"/>
-              </a:rPr>
-              <a:t>Preprocess: resize, crop, normalize (often ImageNet mean/std), then augment.</a:t>
-            </a:r>
-          </a:p>
-        </p:txBody>
-      </p:sp>
-      <p:sp>
-        <p:nvSpPr>
-          <p:cNvPr id="14" name="TextBox 13"/>
-          <p:cNvSpPr txBox="1"/>
-          <p:nvPr/>
-        </p:nvSpPr>
-        <p:spPr>
-          <a:xfrm>
-            <a:off x="548640" y="4160520"/>
-            <a:ext cx="320040" cy="384048"/>
-          </a:xfrm>
-          <a:prstGeom prst="rect">
-            <a:avLst/>
-          </a:prstGeom>
-          <a:noFill/>
-        </p:spPr>
-        <p:txBody>
-          <a:bodyPr wrap="square" anchor="t">
-            <a:spAutoFit/>
-          </a:bodyPr>
-          <a:lstStyle/>
-          <a:p>
-            <a:pPr algn="l"/>
-            <a:r>
-              <a:rPr sz="1300" b="0">
-                <a:solidFill>
-                  <a:srgbClr val="9E59CD"/>
-                </a:solidFill>
-                <a:latin typeface="DIN Next LT W23"/>
-                <a:ea typeface="DIN Next LT W23"/>
-                <a:cs typeface="DIN Next LT W23"/>
-              </a:rPr>
-              <a:t>–</a:t>
-            </a:r>
-          </a:p>
-        </p:txBody>
-      </p:sp>
-      <p:sp>
-        <p:nvSpPr>
-          <p:cNvPr id="15" name="TextBox 14"/>
-          <p:cNvSpPr txBox="1"/>
-          <p:nvPr/>
-        </p:nvSpPr>
-        <p:spPr>
-          <a:xfrm>
-            <a:off x="914400" y="4160520"/>
-            <a:ext cx="4754879" cy="384048"/>
-          </a:xfrm>
-          <a:prstGeom prst="rect">
-            <a:avLst/>
-          </a:prstGeom>
-          <a:noFill/>
-        </p:spPr>
-        <p:txBody>
-          <a:bodyPr wrap="square" anchor="t">
-            <a:spAutoFit/>
-          </a:bodyPr>
-          <a:lstStyle/>
-          <a:p>
-            <a:pPr algn="l"/>
-            <a:r>
-              <a:rPr sz="1300" b="0">
-                <a:solidFill>
-                  <a:srgbClr val="121018"/>
-                </a:solidFill>
-                <a:latin typeface="DIN Next LT W23"/>
-                <a:ea typeface="DIN Next LT W23"/>
-                <a:cs typeface="DIN Next LT W23"/>
-              </a:rPr>
-              <a:t>Model input is typically Batch × C × H × W fed into stem convolutions.</a:t>
-            </a:r>
-          </a:p>
-        </p:txBody>
-      </p:sp>
-      <p:sp>
-        <p:nvSpPr>
-          <p:cNvPr id="16" name="Rounded Rectangle 15"/>
-          <p:cNvSpPr/>
-          <p:nvPr/>
-        </p:nvSpPr>
-        <p:spPr>
-          <a:xfrm>
-            <a:off x="6537960" y="2011680"/>
-            <a:ext cx="4983480" cy="3794760"/>
-          </a:xfrm>
-          <a:prstGeom prst="roundRect">
-            <a:avLst>
-              <a:gd name="adj" fmla="val 10000"/>
-            </a:avLst>
-          </a:prstGeom>
-          <a:solidFill>
-            <a:srgbClr val="EEE8FA"/>
-          </a:solidFill>
-          <a:ln>
-            <a:noFill/>
-          </a:ln>
-          <a:effectLst/>
-        </p:spPr>
-        <p:style>
-          <a:lnRef idx="1">
-            <a:schemeClr val="accent1"/>
-          </a:lnRef>
-          <a:fillRef idx="3">
-            <a:schemeClr val="accent1"/>
-          </a:fillRef>
-          <a:effectRef idx="2">
-            <a:schemeClr val="accent1"/>
-          </a:effectRef>
-          <a:fontRef idx="minor">
-            <a:schemeClr val="lt1"/>
-          </a:fontRef>
-        </p:style>
-        <p:txBody>
-          <a:bodyPr rtlCol="0" anchor="ctr"/>
-          <a:lstStyle/>
-          <a:p>
-            <a:pPr algn="ctr"/>
-          </a:p>
-        </p:txBody>
-      </p:sp>
-      <p:pic>
-        <p:nvPicPr>
-          <p:cNvPr id="17" name="Picture 16" descr="convolution.png"/>
-          <p:cNvPicPr>
-            <a:picLocks noChangeAspect="1"/>
-          </p:cNvPicPr>
-          <p:nvPr/>
-        </p:nvPicPr>
-        <p:blipFill>
-          <a:blip r:embed="rId3"/>
-          <a:stretch>
-            <a:fillRect/>
-          </a:stretch>
-        </p:blipFill>
-        <p:spPr>
-          <a:xfrm>
-            <a:off x="6720840" y="2194560"/>
-            <a:ext cx="4617720" cy="1849956"/>
-          </a:xfrm>
-          <a:prstGeom prst="rect">
-            <a:avLst/>
-          </a:prstGeom>
-        </p:spPr>
-      </p:pic>
-      <p:sp>
-        <p:nvSpPr>
-          <p:cNvPr id="18" name="TextBox 17"/>
-          <p:cNvSpPr txBox="1"/>
-          <p:nvPr/>
-        </p:nvSpPr>
-        <p:spPr>
-          <a:xfrm>
-            <a:off x="548640" y="5989320"/>
-            <a:ext cx="10972800" cy="256032"/>
-          </a:xfrm>
-          <a:prstGeom prst="rect">
-            <a:avLst/>
-          </a:prstGeom>
-          <a:noFill/>
-        </p:spPr>
-        <p:txBody>
-          <a:bodyPr wrap="square" anchor="t">
-            <a:spAutoFit/>
-          </a:bodyPr>
-          <a:lstStyle/>
-          <a:p>
-            <a:pPr algn="l"/>
-            <a:r>
-              <a:rPr sz="1100" b="0">
-                <a:solidFill>
-                  <a:srgbClr val="5A5470"/>
-                </a:solidFill>
-                <a:latin typeface="DIN Next LT W23"/>
-                <a:ea typeface="DIN Next LT W23"/>
-                <a:cs typeface="DIN Next LT W23"/>
-              </a:rPr>
-              <a:t>Augmentation (crop, flip, color jitter) teaches invariance the loss never states explicitly.</a:t>
-            </a:r>
-          </a:p>
-        </p:txBody>
-      </p:sp>
-      <p:sp>
-        <p:nvSpPr>
-          <p:cNvPr id="19" name="Rectangle 18"/>
+              <a:t>Stabilize Activations and Speed Up Deep Training</a:t>
+            </a:r>
+          </a:p>
+        </p:txBody>
+      </p:sp>
+      <p:graphicFrame>
+        <p:nvGraphicFramePr>
+          <p:cNvPr id="8" name="Table 7"/>
+          <p:cNvGraphicFramePr>
+            <a:graphicFrameLocks noGrp="1"/>
+          </p:cNvGraphicFramePr>
+          <p:nvPr/>
+        </p:nvGraphicFramePr>
+        <p:xfrm>
+          <a:off x="548640" y="2057400"/>
+          <a:ext cx="10972800" cy="1426464"/>
+        </p:xfrm>
+        <a:graphic>
+          <a:graphicData uri="http://schemas.openxmlformats.org/drawingml/2006/table">
+            <a:tbl>
+              <a:tblPr firstRow="1" bandRow="1">
+                <a:tableStyleId>{5C22544A-7EE6-4342-B048-85BDC9FD1C3A}</a:tableStyleId>
+              </a:tblPr>
+              <a:tblGrid>
+                <a:gridCol w="3657600"/>
+                <a:gridCol w="3657600"/>
+                <a:gridCol w="3657600"/>
+              </a:tblGrid>
+              <a:tr h="475488">
+                <a:tc>
+                  <a:txBody>
+                    <a:bodyPr/>
+                    <a:lstStyle/>
+                    <a:p>
+                      <a:pPr algn="ctr"/>
+                      <a:r>
+                        <a:rPr sz="1200" b="1">
+                          <a:solidFill>
+                            <a:srgbClr val="FFFFFF"/>
+                          </a:solidFill>
+                          <a:latin typeface="Helvetica"/>
+                        </a:rPr>
+                        <a:t>Method</a:t>
+                      </a:r>
+                    </a:p>
+                  </a:txBody>
+                  <a:tcPr>
+                    <a:solidFill>
+                      <a:srgbClr val="5234B7"/>
+                    </a:solidFill>
+                  </a:tcPr>
+                </a:tc>
+                <a:tc>
+                  <a:txBody>
+                    <a:bodyPr/>
+                    <a:lstStyle/>
+                    <a:p>
+                      <a:pPr algn="ctr"/>
+                      <a:r>
+                        <a:rPr sz="1200" b="1">
+                          <a:solidFill>
+                            <a:srgbClr val="FFFFFF"/>
+                          </a:solidFill>
+                          <a:latin typeface="Helvetica"/>
+                        </a:rPr>
+                        <a:t>Normalization dimension</a:t>
+                      </a:r>
+                    </a:p>
+                  </a:txBody>
+                  <a:tcPr>
+                    <a:solidFill>
+                      <a:srgbClr val="5234B7"/>
+                    </a:solidFill>
+                  </a:tcPr>
+                </a:tc>
+                <a:tc>
+                  <a:txBody>
+                    <a:bodyPr/>
+                    <a:lstStyle/>
+                    <a:p>
+                      <a:pPr algn="ctr"/>
+                      <a:r>
+                        <a:rPr sz="1200" b="1">
+                          <a:solidFill>
+                            <a:srgbClr val="FFFFFF"/>
+                          </a:solidFill>
+                          <a:latin typeface="Helvetica"/>
+                        </a:rPr>
+                        <a:t>Typical use-case</a:t>
+                      </a:r>
+                    </a:p>
+                  </a:txBody>
+                  <a:tcPr>
+                    <a:solidFill>
+                      <a:srgbClr val="5234B7"/>
+                    </a:solidFill>
+                  </a:tcPr>
+                </a:tc>
+              </a:tr>
+              <a:tr h="475488">
+                <a:tc>
+                  <a:txBody>
+                    <a:bodyPr/>
+                    <a:lstStyle/>
+                    <a:p>
+                      <a:pPr algn="l"/>
+                      <a:r>
+                        <a:rPr sz="1300" b="1">
+                          <a:solidFill>
+                            <a:srgbClr val="5234B7"/>
+                          </a:solidFill>
+                          <a:latin typeface="Helvetica"/>
+                        </a:rPr>
+                        <a:t>Batch Norm</a:t>
+                      </a:r>
+                    </a:p>
+                  </a:txBody>
+                  <a:tcPr>
+                    <a:solidFill>
+                      <a:srgbClr val="EEE8FA"/>
+                    </a:solidFill>
+                  </a:tcPr>
+                </a:tc>
+                <a:tc>
+                  <a:txBody>
+                    <a:bodyPr/>
+                    <a:lstStyle/>
+                    <a:p>
+                      <a:pPr algn="l"/>
+                      <a:r>
+                        <a:rPr sz="1300" b="0">
+                          <a:solidFill>
+                            <a:srgbClr val="121018"/>
+                          </a:solidFill>
+                          <a:latin typeface="Helvetica"/>
+                        </a:rPr>
+                        <a:t>Across batch and spatial dimensions</a:t>
+                      </a:r>
+                    </a:p>
+                  </a:txBody>
+                  <a:tcPr>
+                    <a:solidFill>
+                      <a:srgbClr val="EEE8FA"/>
+                    </a:solidFill>
+                  </a:tcPr>
+                </a:tc>
+                <a:tc>
+                  <a:txBody>
+                    <a:bodyPr/>
+                    <a:lstStyle/>
+                    <a:p>
+                      <a:pPr algn="l"/>
+                      <a:r>
+                        <a:rPr sz="1300" b="0">
+                          <a:solidFill>
+                            <a:srgbClr val="121018"/>
+                          </a:solidFill>
+                          <a:latin typeface="Helvetica"/>
+                        </a:rPr>
+                        <a:t>CNN classifiers, ResNets</a:t>
+                      </a:r>
+                    </a:p>
+                  </a:txBody>
+                  <a:tcPr>
+                    <a:solidFill>
+                      <a:srgbClr val="EEE8FA"/>
+                    </a:solidFill>
+                  </a:tcPr>
+                </a:tc>
+              </a:tr>
+              <a:tr h="475488">
+                <a:tc>
+                  <a:txBody>
+                    <a:bodyPr/>
+                    <a:lstStyle/>
+                    <a:p>
+                      <a:pPr algn="l"/>
+                      <a:r>
+                        <a:rPr sz="1300" b="1">
+                          <a:solidFill>
+                            <a:srgbClr val="5234B7"/>
+                          </a:solidFill>
+                          <a:latin typeface="Helvetica"/>
+                        </a:rPr>
+                        <a:t>Layer Norm</a:t>
+                      </a:r>
+                    </a:p>
+                  </a:txBody>
+                  <a:tcPr>
+                    <a:solidFill>
+                      <a:srgbClr val="F5F1FC"/>
+                    </a:solidFill>
+                  </a:tcPr>
+                </a:tc>
+                <a:tc>
+                  <a:txBody>
+                    <a:bodyPr/>
+                    <a:lstStyle/>
+                    <a:p>
+                      <a:pPr algn="l"/>
+                      <a:r>
+                        <a:rPr sz="1300" b="0">
+                          <a:solidFill>
+                            <a:srgbClr val="121018"/>
+                          </a:solidFill>
+                          <a:latin typeface="Helvetica"/>
+                        </a:rPr>
+                        <a:t>Across features for a single token/example</a:t>
+                      </a:r>
+                    </a:p>
+                  </a:txBody>
+                  <a:tcPr>
+                    <a:solidFill>
+                      <a:srgbClr val="F5F1FC"/>
+                    </a:solidFill>
+                  </a:tcPr>
+                </a:tc>
+                <a:tc>
+                  <a:txBody>
+                    <a:bodyPr/>
+                    <a:lstStyle/>
+                    <a:p>
+                      <a:pPr algn="l"/>
+                      <a:r>
+                        <a:rPr sz="1300" b="0">
+                          <a:solidFill>
+                            <a:srgbClr val="121018"/>
+                          </a:solidFill>
+                          <a:latin typeface="Helvetica"/>
+                        </a:rPr>
+                        <a:t>Transformers, RNNs</a:t>
+                      </a:r>
+                    </a:p>
+                  </a:txBody>
+                  <a:tcPr>
+                    <a:solidFill>
+                      <a:srgbClr val="F5F1FC"/>
+                    </a:solidFill>
+                  </a:tcPr>
+                </a:tc>
+              </a:tr>
+            </a:tbl>
+          </a:graphicData>
+        </a:graphic>
+      </p:graphicFrame>
+      <p:sp>
+        <p:nvSpPr>
+          <p:cNvPr id="9" name="Rectangle 8"/>
           <p:cNvSpPr/>
           <p:nvPr/>
         </p:nvSpPr>
@@ -40834,7 +40626,7 @@
       </p:sp>
       <p:sp>
         <p:nvSpPr>
-          <p:cNvPr id="20" name="TextBox 19"/>
+          <p:cNvPr id="10" name="TextBox 9"/>
           <p:cNvSpPr txBox="1"/>
           <p:nvPr/>
         </p:nvSpPr>
@@ -40871,7 +40663,7 @@
       </p:sp>
       <p:sp>
         <p:nvSpPr>
-          <p:cNvPr id="21" name="TextBox 20"/>
+          <p:cNvPr id="11" name="TextBox 10"/>
           <p:cNvSpPr txBox="1"/>
           <p:nvPr/>
         </p:nvSpPr>
@@ -40901,7 +40693,7 @@
                 <a:ea typeface="DIN Next LT W23"/>
                 <a:cs typeface="DIN Next LT W23"/>
               </a:rPr>
-              <a:t>62  /  77</a:t>
+              <a:t>62  /  78</a:t>
             </a:r>
           </a:p>
         </p:txBody>
@@ -41113,7 +40905,7 @@
                 <a:ea typeface="DIN Next LT W23"/>
                 <a:cs typeface="DIN Next LT W23"/>
               </a:rPr>
-              <a:t>Convolution: Kernels and Feature Maps</a:t>
+              <a:t>Image Data: How Computers See Pixels</a:t>
             </a:r>
           </a:p>
         </p:txBody>
@@ -41150,58 +40942,21 @@
                 <a:ea typeface="DIN Next LT W23"/>
                 <a:cs typeface="DIN Next LT W23"/>
               </a:rPr>
-              <a:t>Sliding Linear Filters + Nonlinearity</a:t>
-            </a:r>
-          </a:p>
-        </p:txBody>
-      </p:sp>
-      <p:sp>
-        <p:nvSpPr>
-          <p:cNvPr id="8" name="TextBox 7"/>
-          <p:cNvSpPr txBox="1"/>
-          <p:nvPr/>
-        </p:nvSpPr>
-        <p:spPr>
-          <a:xfrm>
-            <a:off x="548640" y="1920240"/>
-            <a:ext cx="10972800" cy="320040"/>
-          </a:xfrm>
-          <a:prstGeom prst="rect">
-            <a:avLst/>
-          </a:prstGeom>
-          <a:noFill/>
-        </p:spPr>
-        <p:txBody>
-          <a:bodyPr wrap="square" anchor="t">
-            <a:spAutoFit/>
-          </a:bodyPr>
-          <a:lstStyle/>
-          <a:p>
-            <a:pPr algn="l"/>
-            <a:r>
-              <a:rPr sz="1300" b="0">
-                <a:solidFill>
-                  <a:srgbClr val="5A5470"/>
-                </a:solidFill>
-                <a:latin typeface="DIN Next LT W23"/>
-                <a:ea typeface="DIN Next LT W23"/>
-                <a:cs typeface="DIN Next LT W23"/>
-              </a:rPr>
-              <a:t>A kernel is a small learnable matrix (often 3×3). Multiple kernels produce a stack of feature maps.</a:t>
-            </a:r>
-          </a:p>
-        </p:txBody>
-      </p:sp>
-      <p:sp>
-        <p:nvSpPr>
-          <p:cNvPr id="9" name="Rounded Rectangle 8"/>
+              <a:t>Tensors, Channels, and Local Structure</a:t>
+            </a:r>
+          </a:p>
+        </p:txBody>
+      </p:sp>
+      <p:sp>
+        <p:nvSpPr>
+          <p:cNvPr id="8" name="Rounded Rectangle 7"/>
           <p:cNvSpPr/>
           <p:nvPr/>
         </p:nvSpPr>
         <p:spPr>
           <a:xfrm>
-            <a:off x="548640" y="2240280"/>
-            <a:ext cx="10972800" cy="3977639"/>
+            <a:off x="548640" y="2011680"/>
+            <a:ext cx="5760720" cy="1097280"/>
           </a:xfrm>
           <a:prstGeom prst="roundRect">
             <a:avLst>
@@ -41238,9 +40993,314 @@
           </a:p>
         </p:txBody>
       </p:sp>
+      <p:sp>
+        <p:nvSpPr>
+          <p:cNvPr id="9" name="TextBox 8"/>
+          <p:cNvSpPr txBox="1"/>
+          <p:nvPr/>
+        </p:nvSpPr>
+        <p:spPr>
+          <a:xfrm>
+            <a:off x="822960" y="2148840"/>
+            <a:ext cx="5303520" cy="868680"/>
+          </a:xfrm>
+          <a:prstGeom prst="rect">
+            <a:avLst/>
+          </a:prstGeom>
+          <a:noFill/>
+        </p:spPr>
+        <p:txBody>
+          <a:bodyPr wrap="square" anchor="t">
+            <a:spAutoFit/>
+          </a:bodyPr>
+          <a:lstStyle/>
+          <a:p>
+            <a:pPr algn="l"/>
+            <a:r>
+              <a:rPr sz="1300" b="0">
+                <a:solidFill>
+                  <a:srgbClr val="121018"/>
+                </a:solidFill>
+                <a:latin typeface="DIN Next LT W23"/>
+                <a:ea typeface="DIN Next LT W23"/>
+                <a:cs typeface="DIN Next LT W23"/>
+              </a:rPr>
+              <a:t>A color image is a tensor H×W×3 (RGB). Meaning lives in local neighborhoods, not isolated pixels.</a:t>
+            </a:r>
+          </a:p>
+        </p:txBody>
+      </p:sp>
+      <p:sp>
+        <p:nvSpPr>
+          <p:cNvPr id="10" name="TextBox 9"/>
+          <p:cNvSpPr txBox="1"/>
+          <p:nvPr/>
+        </p:nvSpPr>
+        <p:spPr>
+          <a:xfrm>
+            <a:off x="548640" y="3246120"/>
+            <a:ext cx="320040" cy="384048"/>
+          </a:xfrm>
+          <a:prstGeom prst="rect">
+            <a:avLst/>
+          </a:prstGeom>
+          <a:noFill/>
+        </p:spPr>
+        <p:txBody>
+          <a:bodyPr wrap="square" anchor="t">
+            <a:spAutoFit/>
+          </a:bodyPr>
+          <a:lstStyle/>
+          <a:p>
+            <a:pPr algn="l"/>
+            <a:r>
+              <a:rPr sz="1300" b="0">
+                <a:solidFill>
+                  <a:srgbClr val="9E59CD"/>
+                </a:solidFill>
+                <a:latin typeface="DIN Next LT W23"/>
+                <a:ea typeface="DIN Next LT W23"/>
+                <a:cs typeface="DIN Next LT W23"/>
+              </a:rPr>
+              <a:t>–</a:t>
+            </a:r>
+          </a:p>
+        </p:txBody>
+      </p:sp>
+      <p:sp>
+        <p:nvSpPr>
+          <p:cNvPr id="11" name="TextBox 10"/>
+          <p:cNvSpPr txBox="1"/>
+          <p:nvPr/>
+        </p:nvSpPr>
+        <p:spPr>
+          <a:xfrm>
+            <a:off x="914400" y="3246120"/>
+            <a:ext cx="4754879" cy="384048"/>
+          </a:xfrm>
+          <a:prstGeom prst="rect">
+            <a:avLst/>
+          </a:prstGeom>
+          <a:noFill/>
+        </p:spPr>
+        <p:txBody>
+          <a:bodyPr wrap="square" anchor="t">
+            <a:spAutoFit/>
+          </a:bodyPr>
+          <a:lstStyle/>
+          <a:p>
+            <a:pPr algn="l"/>
+            <a:r>
+              <a:rPr sz="1300" b="0">
+                <a:solidFill>
+                  <a:srgbClr val="121018"/>
+                </a:solidFill>
+                <a:latin typeface="DIN Next LT W23"/>
+                <a:ea typeface="DIN Next LT W23"/>
+                <a:cs typeface="DIN Next LT W23"/>
+              </a:rPr>
+              <a:t>Small patches reveal edges; larger context reveals objects — hierarchical composition.</a:t>
+            </a:r>
+          </a:p>
+        </p:txBody>
+      </p:sp>
+      <p:sp>
+        <p:nvSpPr>
+          <p:cNvPr id="12" name="TextBox 11"/>
+          <p:cNvSpPr txBox="1"/>
+          <p:nvPr/>
+        </p:nvSpPr>
+        <p:spPr>
+          <a:xfrm>
+            <a:off x="548640" y="3703320"/>
+            <a:ext cx="320040" cy="384048"/>
+          </a:xfrm>
+          <a:prstGeom prst="rect">
+            <a:avLst/>
+          </a:prstGeom>
+          <a:noFill/>
+        </p:spPr>
+        <p:txBody>
+          <a:bodyPr wrap="square" anchor="t">
+            <a:spAutoFit/>
+          </a:bodyPr>
+          <a:lstStyle/>
+          <a:p>
+            <a:pPr algn="l"/>
+            <a:r>
+              <a:rPr sz="1300" b="0">
+                <a:solidFill>
+                  <a:srgbClr val="9E59CD"/>
+                </a:solidFill>
+                <a:latin typeface="DIN Next LT W23"/>
+                <a:ea typeface="DIN Next LT W23"/>
+                <a:cs typeface="DIN Next LT W23"/>
+              </a:rPr>
+              <a:t>–</a:t>
+            </a:r>
+          </a:p>
+        </p:txBody>
+      </p:sp>
+      <p:sp>
+        <p:nvSpPr>
+          <p:cNvPr id="13" name="TextBox 12"/>
+          <p:cNvSpPr txBox="1"/>
+          <p:nvPr/>
+        </p:nvSpPr>
+        <p:spPr>
+          <a:xfrm>
+            <a:off x="914400" y="3703320"/>
+            <a:ext cx="4754879" cy="384048"/>
+          </a:xfrm>
+          <a:prstGeom prst="rect">
+            <a:avLst/>
+          </a:prstGeom>
+          <a:noFill/>
+        </p:spPr>
+        <p:txBody>
+          <a:bodyPr wrap="square" anchor="t">
+            <a:spAutoFit/>
+          </a:bodyPr>
+          <a:lstStyle/>
+          <a:p>
+            <a:pPr algn="l"/>
+            <a:r>
+              <a:rPr sz="1300" b="0">
+                <a:solidFill>
+                  <a:srgbClr val="121018"/>
+                </a:solidFill>
+                <a:latin typeface="DIN Next LT W23"/>
+                <a:ea typeface="DIN Next LT W23"/>
+                <a:cs typeface="DIN Next LT W23"/>
+              </a:rPr>
+              <a:t>Preprocess: resize, crop, normalize (often ImageNet mean/std), then augment.</a:t>
+            </a:r>
+          </a:p>
+        </p:txBody>
+      </p:sp>
+      <p:sp>
+        <p:nvSpPr>
+          <p:cNvPr id="14" name="TextBox 13"/>
+          <p:cNvSpPr txBox="1"/>
+          <p:nvPr/>
+        </p:nvSpPr>
+        <p:spPr>
+          <a:xfrm>
+            <a:off x="548640" y="4160520"/>
+            <a:ext cx="320040" cy="384048"/>
+          </a:xfrm>
+          <a:prstGeom prst="rect">
+            <a:avLst/>
+          </a:prstGeom>
+          <a:noFill/>
+        </p:spPr>
+        <p:txBody>
+          <a:bodyPr wrap="square" anchor="t">
+            <a:spAutoFit/>
+          </a:bodyPr>
+          <a:lstStyle/>
+          <a:p>
+            <a:pPr algn="l"/>
+            <a:r>
+              <a:rPr sz="1300" b="0">
+                <a:solidFill>
+                  <a:srgbClr val="9E59CD"/>
+                </a:solidFill>
+                <a:latin typeface="DIN Next LT W23"/>
+                <a:ea typeface="DIN Next LT W23"/>
+                <a:cs typeface="DIN Next LT W23"/>
+              </a:rPr>
+              <a:t>–</a:t>
+            </a:r>
+          </a:p>
+        </p:txBody>
+      </p:sp>
+      <p:sp>
+        <p:nvSpPr>
+          <p:cNvPr id="15" name="TextBox 14"/>
+          <p:cNvSpPr txBox="1"/>
+          <p:nvPr/>
+        </p:nvSpPr>
+        <p:spPr>
+          <a:xfrm>
+            <a:off x="914400" y="4160520"/>
+            <a:ext cx="4754879" cy="384048"/>
+          </a:xfrm>
+          <a:prstGeom prst="rect">
+            <a:avLst/>
+          </a:prstGeom>
+          <a:noFill/>
+        </p:spPr>
+        <p:txBody>
+          <a:bodyPr wrap="square" anchor="t">
+            <a:spAutoFit/>
+          </a:bodyPr>
+          <a:lstStyle/>
+          <a:p>
+            <a:pPr algn="l"/>
+            <a:r>
+              <a:rPr sz="1300" b="0">
+                <a:solidFill>
+                  <a:srgbClr val="121018"/>
+                </a:solidFill>
+                <a:latin typeface="DIN Next LT W23"/>
+                <a:ea typeface="DIN Next LT W23"/>
+                <a:cs typeface="DIN Next LT W23"/>
+              </a:rPr>
+              <a:t>Model input is typically Batch × C × H × W fed into stem convolutions.</a:t>
+            </a:r>
+          </a:p>
+        </p:txBody>
+      </p:sp>
+      <p:sp>
+        <p:nvSpPr>
+          <p:cNvPr id="16" name="Rounded Rectangle 15"/>
+          <p:cNvSpPr/>
+          <p:nvPr/>
+        </p:nvSpPr>
+        <p:spPr>
+          <a:xfrm>
+            <a:off x="6537960" y="2011680"/>
+            <a:ext cx="4983480" cy="3794760"/>
+          </a:xfrm>
+          <a:prstGeom prst="roundRect">
+            <a:avLst>
+              <a:gd name="adj" fmla="val 10000"/>
+            </a:avLst>
+          </a:prstGeom>
+          <a:solidFill>
+            <a:srgbClr val="EEE8FA"/>
+          </a:solidFill>
+          <a:ln>
+            <a:noFill/>
+          </a:ln>
+          <a:effectLst/>
+        </p:spPr>
+        <p:style>
+          <a:lnRef idx="1">
+            <a:schemeClr val="accent1"/>
+          </a:lnRef>
+          <a:fillRef idx="3">
+            <a:schemeClr val="accent1"/>
+          </a:fillRef>
+          <a:effectRef idx="2">
+            <a:schemeClr val="accent1"/>
+          </a:effectRef>
+          <a:fontRef idx="minor">
+            <a:schemeClr val="lt1"/>
+          </a:fontRef>
+        </p:style>
+        <p:txBody>
+          <a:bodyPr rtlCol="0" anchor="ctr"/>
+          <a:lstStyle/>
+          <a:p>
+            <a:pPr algn="ctr"/>
+          </a:p>
+        </p:txBody>
+      </p:sp>
       <p:pic>
         <p:nvPicPr>
-          <p:cNvPr id="10" name="Picture 9" descr="convolution.png"/>
+          <p:cNvPr id="17" name="Picture 16" descr="convolution.png"/>
           <p:cNvPicPr>
             <a:picLocks noChangeAspect="1"/>
           </p:cNvPicPr>
@@ -41254,8 +41314,8 @@
         </p:blipFill>
         <p:spPr>
           <a:xfrm>
-            <a:off x="1413066" y="2377440"/>
-            <a:ext cx="9243946" cy="3703320"/>
+            <a:off x="6720840" y="2194560"/>
+            <a:ext cx="4617720" cy="1849956"/>
           </a:xfrm>
           <a:prstGeom prst="rect">
             <a:avLst/>
@@ -41264,14 +41324,14 @@
       </p:pic>
       <p:sp>
         <p:nvSpPr>
-          <p:cNvPr id="11" name="TextBox 10"/>
-          <p:cNvSpPr txBox="1"/>
-          <p:nvPr/>
-        </p:nvSpPr>
-        <p:spPr>
-          <a:xfrm>
-            <a:off x="548640" y="6309360"/>
-            <a:ext cx="10972800" cy="228600"/>
+          <p:cNvPr id="18" name="TextBox 17"/>
+          <p:cNvSpPr txBox="1"/>
+          <p:nvPr/>
+        </p:nvSpPr>
+        <p:spPr>
+          <a:xfrm>
+            <a:off x="548640" y="5989320"/>
+            <a:ext cx="10972800" cy="256032"/>
           </a:xfrm>
           <a:prstGeom prst="rect">
             <a:avLst/>
@@ -41294,14 +41354,14 @@
                 <a:ea typeface="DIN Next LT W23"/>
                 <a:cs typeface="DIN Next LT W23"/>
               </a:rPr>
-              <a:t>Classical Sobel filters are fixed. CNNs learn task-specific filters from data.</a:t>
-            </a:r>
-          </a:p>
-        </p:txBody>
-      </p:sp>
-      <p:sp>
-        <p:nvSpPr>
-          <p:cNvPr id="12" name="Rectangle 11"/>
+              <a:t>Augmentation (crop, flip, color jitter) teaches invariance the loss never states explicitly.</a:t>
+            </a:r>
+          </a:p>
+        </p:txBody>
+      </p:sp>
+      <p:sp>
+        <p:nvSpPr>
+          <p:cNvPr id="19" name="Rectangle 18"/>
           <p:cNvSpPr/>
           <p:nvPr/>
         </p:nvSpPr>
@@ -41345,7 +41405,7 @@
       </p:sp>
       <p:sp>
         <p:nvSpPr>
-          <p:cNvPr id="13" name="TextBox 12"/>
+          <p:cNvPr id="20" name="TextBox 19"/>
           <p:cNvSpPr txBox="1"/>
           <p:nvPr/>
         </p:nvSpPr>
@@ -41382,7 +41442,7 @@
       </p:sp>
       <p:sp>
         <p:nvSpPr>
-          <p:cNvPr id="14" name="TextBox 13"/>
+          <p:cNvPr id="21" name="TextBox 20"/>
           <p:cNvSpPr txBox="1"/>
           <p:nvPr/>
         </p:nvSpPr>
@@ -41412,7 +41472,7 @@
                 <a:ea typeface="DIN Next LT W23"/>
                 <a:cs typeface="DIN Next LT W23"/>
               </a:rPr>
-              <a:t>63  /  77</a:t>
+              <a:t>63  /  78</a:t>
             </a:r>
           </a:p>
         </p:txBody>
@@ -41426,6 +41486,517 @@
 </file>
 
 <file path=ppt/slides/slide64.xml><?xml version="1.0" encoding="utf-8"?>
+<p:sld xmlns:a="http://schemas.openxmlformats.org/drawingml/2006/main" xmlns:p="http://schemas.openxmlformats.org/presentationml/2006/main" xmlns:r="http://schemas.openxmlformats.org/officeDocument/2006/relationships">
+  <p:cSld>
+    <p:bg>
+      <p:bgPr>
+        <a:solidFill>
+          <a:srgbClr val="FAF8FF"/>
+        </a:solidFill>
+        <a:effectLst/>
+      </p:bgPr>
+    </p:bg>
+    <p:spTree>
+      <p:nvGrpSpPr>
+        <p:cNvPr id="1" name=""/>
+        <p:cNvGrpSpPr/>
+        <p:nvPr/>
+      </p:nvGrpSpPr>
+      <p:grpSpPr/>
+      <p:sp>
+        <p:nvSpPr>
+          <p:cNvPr id="2" name="Rectangle 1"/>
+          <p:cNvSpPr/>
+          <p:nvPr/>
+        </p:nvSpPr>
+        <p:spPr>
+          <a:xfrm>
+            <a:off x="12136831" y="0"/>
+            <a:ext cx="54864" cy="6858000"/>
+          </a:xfrm>
+          <a:prstGeom prst="rect">
+            <a:avLst/>
+          </a:prstGeom>
+          <a:solidFill>
+            <a:srgbClr val="5234B7"/>
+          </a:solidFill>
+          <a:ln>
+            <a:noFill/>
+          </a:ln>
+          <a:effectLst/>
+        </p:spPr>
+        <p:style>
+          <a:lnRef idx="1">
+            <a:schemeClr val="accent1"/>
+          </a:lnRef>
+          <a:fillRef idx="3">
+            <a:schemeClr val="accent1"/>
+          </a:fillRef>
+          <a:effectRef idx="2">
+            <a:schemeClr val="accent1"/>
+          </a:effectRef>
+          <a:fontRef idx="minor">
+            <a:schemeClr val="lt1"/>
+          </a:fontRef>
+        </p:style>
+        <p:txBody>
+          <a:bodyPr rtlCol="0" anchor="ctr"/>
+          <a:lstStyle/>
+          <a:p>
+            <a:pPr algn="ctr"/>
+          </a:p>
+        </p:txBody>
+      </p:sp>
+      <p:pic>
+        <p:nvPicPr>
+          <p:cNvPr id="3" name="Picture 2" descr="etra-wordmark.png"/>
+          <p:cNvPicPr>
+            <a:picLocks noChangeAspect="1"/>
+          </p:cNvPicPr>
+          <p:nvPr/>
+        </p:nvPicPr>
+        <p:blipFill>
+          <a:blip r:embed="rId2"/>
+          <a:stretch>
+            <a:fillRect/>
+          </a:stretch>
+        </p:blipFill>
+        <p:spPr>
+          <a:xfrm>
+            <a:off x="10561320" y="411480"/>
+            <a:ext cx="1206201" cy="320040"/>
+          </a:xfrm>
+          <a:prstGeom prst="rect">
+            <a:avLst/>
+          </a:prstGeom>
+        </p:spPr>
+      </p:pic>
+      <p:sp>
+        <p:nvSpPr>
+          <p:cNvPr id="4" name="TextBox 3"/>
+          <p:cNvSpPr txBox="1"/>
+          <p:nvPr/>
+        </p:nvSpPr>
+        <p:spPr>
+          <a:xfrm>
+            <a:off x="548640" y="438912"/>
+            <a:ext cx="7772400" cy="274320"/>
+          </a:xfrm>
+          <a:prstGeom prst="rect">
+            <a:avLst/>
+          </a:prstGeom>
+          <a:noFill/>
+        </p:spPr>
+        <p:txBody>
+          <a:bodyPr wrap="square" anchor="t">
+            <a:spAutoFit/>
+          </a:bodyPr>
+          <a:lstStyle/>
+          <a:p>
+            <a:pPr algn="l"/>
+            <a:r>
+              <a:rPr sz="1200" b="0">
+                <a:solidFill>
+                  <a:srgbClr val="5A5470"/>
+                </a:solidFill>
+                <a:latin typeface="DIN Next LT W23"/>
+                <a:ea typeface="DIN Next LT W23"/>
+                <a:cs typeface="DIN Next LT W23"/>
+              </a:rPr>
+              <a:t>S07  ·  Deep Learning</a:t>
+            </a:r>
+          </a:p>
+        </p:txBody>
+      </p:sp>
+      <p:sp>
+        <p:nvSpPr>
+          <p:cNvPr id="5" name="Rectangle 4"/>
+          <p:cNvSpPr/>
+          <p:nvPr/>
+        </p:nvSpPr>
+        <p:spPr>
+          <a:xfrm>
+            <a:off x="548640" y="822960"/>
+            <a:ext cx="11064240" cy="10972"/>
+          </a:xfrm>
+          <a:prstGeom prst="rect">
+            <a:avLst/>
+          </a:prstGeom>
+          <a:solidFill>
+            <a:srgbClr val="E4DCF4"/>
+          </a:solidFill>
+          <a:ln>
+            <a:noFill/>
+          </a:ln>
+          <a:effectLst/>
+        </p:spPr>
+        <p:style>
+          <a:lnRef idx="1">
+            <a:schemeClr val="accent1"/>
+          </a:lnRef>
+          <a:fillRef idx="3">
+            <a:schemeClr val="accent1"/>
+          </a:fillRef>
+          <a:effectRef idx="2">
+            <a:schemeClr val="accent1"/>
+          </a:effectRef>
+          <a:fontRef idx="minor">
+            <a:schemeClr val="lt1"/>
+          </a:fontRef>
+        </p:style>
+        <p:txBody>
+          <a:bodyPr rtlCol="0" anchor="ctr"/>
+          <a:lstStyle/>
+          <a:p>
+            <a:pPr algn="ctr"/>
+          </a:p>
+        </p:txBody>
+      </p:sp>
+      <p:sp>
+        <p:nvSpPr>
+          <p:cNvPr id="6" name="TextBox 5"/>
+          <p:cNvSpPr txBox="1"/>
+          <p:nvPr/>
+        </p:nvSpPr>
+        <p:spPr>
+          <a:xfrm>
+            <a:off x="548640" y="1051560"/>
+            <a:ext cx="10241280" cy="594360"/>
+          </a:xfrm>
+          <a:prstGeom prst="rect">
+            <a:avLst/>
+          </a:prstGeom>
+          <a:noFill/>
+        </p:spPr>
+        <p:txBody>
+          <a:bodyPr wrap="square" anchor="t">
+            <a:spAutoFit/>
+          </a:bodyPr>
+          <a:lstStyle/>
+          <a:p>
+            <a:pPr algn="l"/>
+            <a:r>
+              <a:rPr sz="3200" b="1">
+                <a:solidFill>
+                  <a:srgbClr val="5234B7"/>
+                </a:solidFill>
+                <a:latin typeface="DIN Next LT W23"/>
+                <a:ea typeface="DIN Next LT W23"/>
+                <a:cs typeface="DIN Next LT W23"/>
+              </a:rPr>
+              <a:t>Convolution: Kernels and Feature Maps</a:t>
+            </a:r>
+          </a:p>
+        </p:txBody>
+      </p:sp>
+      <p:sp>
+        <p:nvSpPr>
+          <p:cNvPr id="7" name="TextBox 6"/>
+          <p:cNvSpPr txBox="1"/>
+          <p:nvPr/>
+        </p:nvSpPr>
+        <p:spPr>
+          <a:xfrm>
+            <a:off x="548640" y="1600200"/>
+            <a:ext cx="10241280" cy="365760"/>
+          </a:xfrm>
+          <a:prstGeom prst="rect">
+            <a:avLst/>
+          </a:prstGeom>
+          <a:noFill/>
+        </p:spPr>
+        <p:txBody>
+          <a:bodyPr wrap="square" anchor="t">
+            <a:spAutoFit/>
+          </a:bodyPr>
+          <a:lstStyle/>
+          <a:p>
+            <a:pPr algn="l"/>
+            <a:r>
+              <a:rPr sz="1500" b="0">
+                <a:solidFill>
+                  <a:srgbClr val="5A5470"/>
+                </a:solidFill>
+                <a:latin typeface="DIN Next LT W23"/>
+                <a:ea typeface="DIN Next LT W23"/>
+                <a:cs typeface="DIN Next LT W23"/>
+              </a:rPr>
+              <a:t>Sliding Linear Filters + Nonlinearity</a:t>
+            </a:r>
+          </a:p>
+        </p:txBody>
+      </p:sp>
+      <p:sp>
+        <p:nvSpPr>
+          <p:cNvPr id="8" name="TextBox 7"/>
+          <p:cNvSpPr txBox="1"/>
+          <p:nvPr/>
+        </p:nvSpPr>
+        <p:spPr>
+          <a:xfrm>
+            <a:off x="548640" y="1920240"/>
+            <a:ext cx="10972800" cy="320040"/>
+          </a:xfrm>
+          <a:prstGeom prst="rect">
+            <a:avLst/>
+          </a:prstGeom>
+          <a:noFill/>
+        </p:spPr>
+        <p:txBody>
+          <a:bodyPr wrap="square" anchor="t">
+            <a:spAutoFit/>
+          </a:bodyPr>
+          <a:lstStyle/>
+          <a:p>
+            <a:pPr algn="l"/>
+            <a:r>
+              <a:rPr sz="1300" b="0">
+                <a:solidFill>
+                  <a:srgbClr val="5A5470"/>
+                </a:solidFill>
+                <a:latin typeface="DIN Next LT W23"/>
+                <a:ea typeface="DIN Next LT W23"/>
+                <a:cs typeface="DIN Next LT W23"/>
+              </a:rPr>
+              <a:t>A kernel is a small learnable matrix (often 3×3). Multiple kernels produce a stack of feature maps.</a:t>
+            </a:r>
+          </a:p>
+        </p:txBody>
+      </p:sp>
+      <p:sp>
+        <p:nvSpPr>
+          <p:cNvPr id="9" name="Rounded Rectangle 8"/>
+          <p:cNvSpPr/>
+          <p:nvPr/>
+        </p:nvSpPr>
+        <p:spPr>
+          <a:xfrm>
+            <a:off x="548640" y="2240280"/>
+            <a:ext cx="10972800" cy="3977639"/>
+          </a:xfrm>
+          <a:prstGeom prst="roundRect">
+            <a:avLst>
+              <a:gd name="adj" fmla="val 10000"/>
+            </a:avLst>
+          </a:prstGeom>
+          <a:solidFill>
+            <a:srgbClr val="EEE8FA"/>
+          </a:solidFill>
+          <a:ln>
+            <a:noFill/>
+          </a:ln>
+          <a:effectLst/>
+        </p:spPr>
+        <p:style>
+          <a:lnRef idx="1">
+            <a:schemeClr val="accent1"/>
+          </a:lnRef>
+          <a:fillRef idx="3">
+            <a:schemeClr val="accent1"/>
+          </a:fillRef>
+          <a:effectRef idx="2">
+            <a:schemeClr val="accent1"/>
+          </a:effectRef>
+          <a:fontRef idx="minor">
+            <a:schemeClr val="lt1"/>
+          </a:fontRef>
+        </p:style>
+        <p:txBody>
+          <a:bodyPr rtlCol="0" anchor="ctr"/>
+          <a:lstStyle/>
+          <a:p>
+            <a:pPr algn="ctr"/>
+          </a:p>
+        </p:txBody>
+      </p:sp>
+      <p:pic>
+        <p:nvPicPr>
+          <p:cNvPr id="10" name="Picture 9" descr="convolution.png"/>
+          <p:cNvPicPr>
+            <a:picLocks noChangeAspect="1"/>
+          </p:cNvPicPr>
+          <p:nvPr/>
+        </p:nvPicPr>
+        <p:blipFill>
+          <a:blip r:embed="rId3"/>
+          <a:stretch>
+            <a:fillRect/>
+          </a:stretch>
+        </p:blipFill>
+        <p:spPr>
+          <a:xfrm>
+            <a:off x="1413066" y="2377440"/>
+            <a:ext cx="9243946" cy="3703320"/>
+          </a:xfrm>
+          <a:prstGeom prst="rect">
+            <a:avLst/>
+          </a:prstGeom>
+        </p:spPr>
+      </p:pic>
+      <p:sp>
+        <p:nvSpPr>
+          <p:cNvPr id="11" name="TextBox 10"/>
+          <p:cNvSpPr txBox="1"/>
+          <p:nvPr/>
+        </p:nvSpPr>
+        <p:spPr>
+          <a:xfrm>
+            <a:off x="548640" y="6309360"/>
+            <a:ext cx="10972800" cy="228600"/>
+          </a:xfrm>
+          <a:prstGeom prst="rect">
+            <a:avLst/>
+          </a:prstGeom>
+          <a:noFill/>
+        </p:spPr>
+        <p:txBody>
+          <a:bodyPr wrap="square" anchor="t">
+            <a:spAutoFit/>
+          </a:bodyPr>
+          <a:lstStyle/>
+          <a:p>
+            <a:pPr algn="l"/>
+            <a:r>
+              <a:rPr sz="1100" b="0">
+                <a:solidFill>
+                  <a:srgbClr val="5A5470"/>
+                </a:solidFill>
+                <a:latin typeface="DIN Next LT W23"/>
+                <a:ea typeface="DIN Next LT W23"/>
+                <a:cs typeface="DIN Next LT W23"/>
+              </a:rPr>
+              <a:t>Classical Sobel filters are fixed. CNNs learn task-specific filters from data.</a:t>
+            </a:r>
+          </a:p>
+        </p:txBody>
+      </p:sp>
+      <p:sp>
+        <p:nvSpPr>
+          <p:cNvPr id="12" name="Rectangle 11"/>
+          <p:cNvSpPr/>
+          <p:nvPr/>
+        </p:nvSpPr>
+        <p:spPr>
+          <a:xfrm>
+            <a:off x="548640" y="6446520"/>
+            <a:ext cx="11064240" cy="10972"/>
+          </a:xfrm>
+          <a:prstGeom prst="rect">
+            <a:avLst/>
+          </a:prstGeom>
+          <a:solidFill>
+            <a:srgbClr val="5234B7"/>
+          </a:solidFill>
+          <a:ln>
+            <a:noFill/>
+          </a:ln>
+          <a:effectLst/>
+        </p:spPr>
+        <p:style>
+          <a:lnRef idx="1">
+            <a:schemeClr val="accent1"/>
+          </a:lnRef>
+          <a:fillRef idx="3">
+            <a:schemeClr val="accent1"/>
+          </a:fillRef>
+          <a:effectRef idx="2">
+            <a:schemeClr val="accent1"/>
+          </a:effectRef>
+          <a:fontRef idx="minor">
+            <a:schemeClr val="lt1"/>
+          </a:fontRef>
+        </p:style>
+        <p:txBody>
+          <a:bodyPr rtlCol="0" anchor="ctr"/>
+          <a:lstStyle/>
+          <a:p>
+            <a:pPr algn="ctr"/>
+          </a:p>
+        </p:txBody>
+      </p:sp>
+      <p:sp>
+        <p:nvSpPr>
+          <p:cNvPr id="13" name="TextBox 12"/>
+          <p:cNvSpPr txBox="1"/>
+          <p:nvPr/>
+        </p:nvSpPr>
+        <p:spPr>
+          <a:xfrm>
+            <a:off x="548640" y="6510528"/>
+            <a:ext cx="2743200" cy="256032"/>
+          </a:xfrm>
+          <a:prstGeom prst="rect">
+            <a:avLst/>
+          </a:prstGeom>
+          <a:noFill/>
+        </p:spPr>
+        <p:txBody>
+          <a:bodyPr wrap="square" anchor="t">
+            <a:spAutoFit/>
+          </a:bodyPr>
+          <a:lstStyle/>
+          <a:p>
+            <a:pPr algn="l"/>
+            <a:r>
+              <a:rPr sz="1100" b="1">
+                <a:solidFill>
+                  <a:srgbClr val="5234B7"/>
+                </a:solidFill>
+                <a:latin typeface="DIN Next LT W23"/>
+                <a:ea typeface="DIN Next LT W23"/>
+                <a:cs typeface="DIN Next LT W23"/>
+              </a:rPr>
+              <a:t>ETRA</a:t>
+            </a:r>
+          </a:p>
+        </p:txBody>
+      </p:sp>
+      <p:sp>
+        <p:nvSpPr>
+          <p:cNvPr id="14" name="TextBox 13"/>
+          <p:cNvSpPr txBox="1"/>
+          <p:nvPr/>
+        </p:nvSpPr>
+        <p:spPr>
+          <a:xfrm>
+            <a:off x="9601200" y="6510528"/>
+            <a:ext cx="2011680" cy="256032"/>
+          </a:xfrm>
+          <a:prstGeom prst="rect">
+            <a:avLst/>
+          </a:prstGeom>
+          <a:noFill/>
+        </p:spPr>
+        <p:txBody>
+          <a:bodyPr wrap="square" anchor="t">
+            <a:spAutoFit/>
+          </a:bodyPr>
+          <a:lstStyle/>
+          <a:p>
+            <a:pPr algn="r"/>
+            <a:r>
+              <a:rPr sz="1100" b="0">
+                <a:solidFill>
+                  <a:srgbClr val="5A5470"/>
+                </a:solidFill>
+                <a:latin typeface="DIN Next LT W23"/>
+                <a:ea typeface="DIN Next LT W23"/>
+                <a:cs typeface="DIN Next LT W23"/>
+              </a:rPr>
+              <a:t>64  /  78</a:t>
+            </a:r>
+          </a:p>
+        </p:txBody>
+      </p:sp>
+    </p:spTree>
+  </p:cSld>
+  <p:clrMapOvr>
+    <a:masterClrMapping/>
+  </p:clrMapOvr>
+</p:sld>
+</file>
+
+<file path=ppt/slides/slide65.xml><?xml version="1.0" encoding="utf-8"?>
 <p:sld xmlns:a="http://schemas.openxmlformats.org/drawingml/2006/main" xmlns:p="http://schemas.openxmlformats.org/presentationml/2006/main" xmlns:r="http://schemas.openxmlformats.org/officeDocument/2006/relationships">
   <p:cSld>
     <p:bg>
@@ -42128,518 +42699,7 @@
                 <a:ea typeface="DIN Next LT W23"/>
                 <a:cs typeface="DIN Next LT W23"/>
               </a:rPr>
-              <a:t>64  /  77</a:t>
-            </a:r>
-          </a:p>
-        </p:txBody>
-      </p:sp>
-    </p:spTree>
-  </p:cSld>
-  <p:clrMapOvr>
-    <a:masterClrMapping/>
-  </p:clrMapOvr>
-</p:sld>
-</file>
-
-<file path=ppt/slides/slide65.xml><?xml version="1.0" encoding="utf-8"?>
-<p:sld xmlns:a="http://schemas.openxmlformats.org/drawingml/2006/main" xmlns:p="http://schemas.openxmlformats.org/presentationml/2006/main" xmlns:r="http://schemas.openxmlformats.org/officeDocument/2006/relationships">
-  <p:cSld>
-    <p:bg>
-      <p:bgPr>
-        <a:solidFill>
-          <a:srgbClr val="FAF8FF"/>
-        </a:solidFill>
-        <a:effectLst/>
-      </p:bgPr>
-    </p:bg>
-    <p:spTree>
-      <p:nvGrpSpPr>
-        <p:cNvPr id="1" name=""/>
-        <p:cNvGrpSpPr/>
-        <p:nvPr/>
-      </p:nvGrpSpPr>
-      <p:grpSpPr/>
-      <p:sp>
-        <p:nvSpPr>
-          <p:cNvPr id="2" name="Rectangle 1"/>
-          <p:cNvSpPr/>
-          <p:nvPr/>
-        </p:nvSpPr>
-        <p:spPr>
-          <a:xfrm>
-            <a:off x="12136831" y="0"/>
-            <a:ext cx="54864" cy="6858000"/>
-          </a:xfrm>
-          <a:prstGeom prst="rect">
-            <a:avLst/>
-          </a:prstGeom>
-          <a:solidFill>
-            <a:srgbClr val="5234B7"/>
-          </a:solidFill>
-          <a:ln>
-            <a:noFill/>
-          </a:ln>
-          <a:effectLst/>
-        </p:spPr>
-        <p:style>
-          <a:lnRef idx="1">
-            <a:schemeClr val="accent1"/>
-          </a:lnRef>
-          <a:fillRef idx="3">
-            <a:schemeClr val="accent1"/>
-          </a:fillRef>
-          <a:effectRef idx="2">
-            <a:schemeClr val="accent1"/>
-          </a:effectRef>
-          <a:fontRef idx="minor">
-            <a:schemeClr val="lt1"/>
-          </a:fontRef>
-        </p:style>
-        <p:txBody>
-          <a:bodyPr rtlCol="0" anchor="ctr"/>
-          <a:lstStyle/>
-          <a:p>
-            <a:pPr algn="ctr"/>
-          </a:p>
-        </p:txBody>
-      </p:sp>
-      <p:pic>
-        <p:nvPicPr>
-          <p:cNvPr id="3" name="Picture 2" descr="etra-wordmark.png"/>
-          <p:cNvPicPr>
-            <a:picLocks noChangeAspect="1"/>
-          </p:cNvPicPr>
-          <p:nvPr/>
-        </p:nvPicPr>
-        <p:blipFill>
-          <a:blip r:embed="rId2"/>
-          <a:stretch>
-            <a:fillRect/>
-          </a:stretch>
-        </p:blipFill>
-        <p:spPr>
-          <a:xfrm>
-            <a:off x="10561320" y="411480"/>
-            <a:ext cx="1206201" cy="320040"/>
-          </a:xfrm>
-          <a:prstGeom prst="rect">
-            <a:avLst/>
-          </a:prstGeom>
-        </p:spPr>
-      </p:pic>
-      <p:sp>
-        <p:nvSpPr>
-          <p:cNvPr id="4" name="TextBox 3"/>
-          <p:cNvSpPr txBox="1"/>
-          <p:nvPr/>
-        </p:nvSpPr>
-        <p:spPr>
-          <a:xfrm>
-            <a:off x="548640" y="438912"/>
-            <a:ext cx="7772400" cy="274320"/>
-          </a:xfrm>
-          <a:prstGeom prst="rect">
-            <a:avLst/>
-          </a:prstGeom>
-          <a:noFill/>
-        </p:spPr>
-        <p:txBody>
-          <a:bodyPr wrap="square" anchor="t">
-            <a:spAutoFit/>
-          </a:bodyPr>
-          <a:lstStyle/>
-          <a:p>
-            <a:pPr algn="l"/>
-            <a:r>
-              <a:rPr sz="1200" b="0">
-                <a:solidFill>
-                  <a:srgbClr val="5A5470"/>
-                </a:solidFill>
-                <a:latin typeface="DIN Next LT W23"/>
-                <a:ea typeface="DIN Next LT W23"/>
-                <a:cs typeface="DIN Next LT W23"/>
-              </a:rPr>
-              <a:t>S07  ·  Deep Learning</a:t>
-            </a:r>
-          </a:p>
-        </p:txBody>
-      </p:sp>
-      <p:sp>
-        <p:nvSpPr>
-          <p:cNvPr id="5" name="Rectangle 4"/>
-          <p:cNvSpPr/>
-          <p:nvPr/>
-        </p:nvSpPr>
-        <p:spPr>
-          <a:xfrm>
-            <a:off x="548640" y="822960"/>
-            <a:ext cx="11064240" cy="10972"/>
-          </a:xfrm>
-          <a:prstGeom prst="rect">
-            <a:avLst/>
-          </a:prstGeom>
-          <a:solidFill>
-            <a:srgbClr val="E4DCF4"/>
-          </a:solidFill>
-          <a:ln>
-            <a:noFill/>
-          </a:ln>
-          <a:effectLst/>
-        </p:spPr>
-        <p:style>
-          <a:lnRef idx="1">
-            <a:schemeClr val="accent1"/>
-          </a:lnRef>
-          <a:fillRef idx="3">
-            <a:schemeClr val="accent1"/>
-          </a:fillRef>
-          <a:effectRef idx="2">
-            <a:schemeClr val="accent1"/>
-          </a:effectRef>
-          <a:fontRef idx="minor">
-            <a:schemeClr val="lt1"/>
-          </a:fontRef>
-        </p:style>
-        <p:txBody>
-          <a:bodyPr rtlCol="0" anchor="ctr"/>
-          <a:lstStyle/>
-          <a:p>
-            <a:pPr algn="ctr"/>
-          </a:p>
-        </p:txBody>
-      </p:sp>
-      <p:sp>
-        <p:nvSpPr>
-          <p:cNvPr id="6" name="TextBox 5"/>
-          <p:cNvSpPr txBox="1"/>
-          <p:nvPr/>
-        </p:nvSpPr>
-        <p:spPr>
-          <a:xfrm>
-            <a:off x="548640" y="1051560"/>
-            <a:ext cx="10241280" cy="594360"/>
-          </a:xfrm>
-          <a:prstGeom prst="rect">
-            <a:avLst/>
-          </a:prstGeom>
-          <a:noFill/>
-        </p:spPr>
-        <p:txBody>
-          <a:bodyPr wrap="square" anchor="t">
-            <a:spAutoFit/>
-          </a:bodyPr>
-          <a:lstStyle/>
-          <a:p>
-            <a:pPr algn="l"/>
-            <a:r>
-              <a:rPr sz="3200" b="1">
-                <a:solidFill>
-                  <a:srgbClr val="5234B7"/>
-                </a:solidFill>
-                <a:latin typeface="DIN Next LT W23"/>
-                <a:ea typeface="DIN Next LT W23"/>
-                <a:cs typeface="DIN Next LT W23"/>
-              </a:rPr>
-              <a:t>CNN Blocks: Conv–Pool to ResNet</a:t>
-            </a:r>
-          </a:p>
-        </p:txBody>
-      </p:sp>
-      <p:sp>
-        <p:nvSpPr>
-          <p:cNvPr id="7" name="TextBox 6"/>
-          <p:cNvSpPr txBox="1"/>
-          <p:nvPr/>
-        </p:nvSpPr>
-        <p:spPr>
-          <a:xfrm>
-            <a:off x="548640" y="1600200"/>
-            <a:ext cx="10241280" cy="365760"/>
-          </a:xfrm>
-          <a:prstGeom prst="rect">
-            <a:avLst/>
-          </a:prstGeom>
-          <a:noFill/>
-        </p:spPr>
-        <p:txBody>
-          <a:bodyPr wrap="square" anchor="t">
-            <a:spAutoFit/>
-          </a:bodyPr>
-          <a:lstStyle/>
-          <a:p>
-            <a:pPr algn="l"/>
-            <a:r>
-              <a:rPr sz="1500" b="0">
-                <a:solidFill>
-                  <a:srgbClr val="5A5470"/>
-                </a:solidFill>
-                <a:latin typeface="DIN Next LT W23"/>
-                <a:ea typeface="DIN Next LT W23"/>
-                <a:cs typeface="DIN Next LT W23"/>
-              </a:rPr>
-              <a:t>Depth, Downsampling, Residual Learning</a:t>
-            </a:r>
-          </a:p>
-        </p:txBody>
-      </p:sp>
-      <p:sp>
-        <p:nvSpPr>
-          <p:cNvPr id="8" name="TextBox 7"/>
-          <p:cNvSpPr txBox="1"/>
-          <p:nvPr/>
-        </p:nvSpPr>
-        <p:spPr>
-          <a:xfrm>
-            <a:off x="548640" y="1920240"/>
-            <a:ext cx="10972800" cy="320040"/>
-          </a:xfrm>
-          <a:prstGeom prst="rect">
-            <a:avLst/>
-          </a:prstGeom>
-          <a:noFill/>
-        </p:spPr>
-        <p:txBody>
-          <a:bodyPr wrap="square" anchor="t">
-            <a:spAutoFit/>
-          </a:bodyPr>
-          <a:lstStyle/>
-          <a:p>
-            <a:pPr algn="l"/>
-            <a:r>
-              <a:rPr sz="1300" b="0">
-                <a:solidFill>
-                  <a:srgbClr val="5A5470"/>
-                </a:solidFill>
-                <a:latin typeface="DIN Next LT W23"/>
-                <a:ea typeface="DIN Next LT W23"/>
-                <a:cs typeface="DIN Next LT W23"/>
-              </a:rPr>
-              <a:t>A standard CNN alternates convolution, ReLU, and pooling, then a fully connected head.</a:t>
-            </a:r>
-          </a:p>
-        </p:txBody>
-      </p:sp>
-      <p:sp>
-        <p:nvSpPr>
-          <p:cNvPr id="9" name="Rounded Rectangle 8"/>
-          <p:cNvSpPr/>
-          <p:nvPr/>
-        </p:nvSpPr>
-        <p:spPr>
-          <a:xfrm>
-            <a:off x="548640" y="2240280"/>
-            <a:ext cx="10972800" cy="3977639"/>
-          </a:xfrm>
-          <a:prstGeom prst="roundRect">
-            <a:avLst>
-              <a:gd name="adj" fmla="val 10000"/>
-            </a:avLst>
-          </a:prstGeom>
-          <a:solidFill>
-            <a:srgbClr val="EEE8FA"/>
-          </a:solidFill>
-          <a:ln>
-            <a:noFill/>
-          </a:ln>
-          <a:effectLst/>
-        </p:spPr>
-        <p:style>
-          <a:lnRef idx="1">
-            <a:schemeClr val="accent1"/>
-          </a:lnRef>
-          <a:fillRef idx="3">
-            <a:schemeClr val="accent1"/>
-          </a:fillRef>
-          <a:effectRef idx="2">
-            <a:schemeClr val="accent1"/>
-          </a:effectRef>
-          <a:fontRef idx="minor">
-            <a:schemeClr val="lt1"/>
-          </a:fontRef>
-        </p:style>
-        <p:txBody>
-          <a:bodyPr rtlCol="0" anchor="ctr"/>
-          <a:lstStyle/>
-          <a:p>
-            <a:pPr algn="ctr"/>
-          </a:p>
-        </p:txBody>
-      </p:sp>
-      <p:pic>
-        <p:nvPicPr>
-          <p:cNvPr id="10" name="Picture 9" descr="cnn-stack.png"/>
-          <p:cNvPicPr>
-            <a:picLocks noChangeAspect="1"/>
-          </p:cNvPicPr>
-          <p:nvPr/>
-        </p:nvPicPr>
-        <p:blipFill>
-          <a:blip r:embed="rId3"/>
-          <a:stretch>
-            <a:fillRect/>
-          </a:stretch>
-        </p:blipFill>
-        <p:spPr>
-          <a:xfrm>
-            <a:off x="731520" y="2377440"/>
-            <a:ext cx="10607040" cy="3639993"/>
-          </a:xfrm>
-          <a:prstGeom prst="rect">
-            <a:avLst/>
-          </a:prstGeom>
-        </p:spPr>
-      </p:pic>
-      <p:sp>
-        <p:nvSpPr>
-          <p:cNvPr id="11" name="TextBox 10"/>
-          <p:cNvSpPr txBox="1"/>
-          <p:nvPr/>
-        </p:nvSpPr>
-        <p:spPr>
-          <a:xfrm>
-            <a:off x="548640" y="6309360"/>
-            <a:ext cx="10972800" cy="228600"/>
-          </a:xfrm>
-          <a:prstGeom prst="rect">
-            <a:avLst/>
-          </a:prstGeom>
-          <a:noFill/>
-        </p:spPr>
-        <p:txBody>
-          <a:bodyPr wrap="square" anchor="t">
-            <a:spAutoFit/>
-          </a:bodyPr>
-          <a:lstStyle/>
-          <a:p>
-            <a:pPr algn="l"/>
-            <a:r>
-              <a:rPr sz="1100" b="0">
-                <a:solidFill>
-                  <a:srgbClr val="5A5470"/>
-                </a:solidFill>
-                <a:latin typeface="DIN Next LT W23"/>
-                <a:ea typeface="DIN Next LT W23"/>
-                <a:cs typeface="DIN Next LT W23"/>
-              </a:rPr>
-              <a:t>Max-pool keeps the strongest local response and shrinks the map.</a:t>
-            </a:r>
-          </a:p>
-        </p:txBody>
-      </p:sp>
-      <p:sp>
-        <p:nvSpPr>
-          <p:cNvPr id="12" name="Rectangle 11"/>
-          <p:cNvSpPr/>
-          <p:nvPr/>
-        </p:nvSpPr>
-        <p:spPr>
-          <a:xfrm>
-            <a:off x="548640" y="6446520"/>
-            <a:ext cx="11064240" cy="10972"/>
-          </a:xfrm>
-          <a:prstGeom prst="rect">
-            <a:avLst/>
-          </a:prstGeom>
-          <a:solidFill>
-            <a:srgbClr val="5234B7"/>
-          </a:solidFill>
-          <a:ln>
-            <a:noFill/>
-          </a:ln>
-          <a:effectLst/>
-        </p:spPr>
-        <p:style>
-          <a:lnRef idx="1">
-            <a:schemeClr val="accent1"/>
-          </a:lnRef>
-          <a:fillRef idx="3">
-            <a:schemeClr val="accent1"/>
-          </a:fillRef>
-          <a:effectRef idx="2">
-            <a:schemeClr val="accent1"/>
-          </a:effectRef>
-          <a:fontRef idx="minor">
-            <a:schemeClr val="lt1"/>
-          </a:fontRef>
-        </p:style>
-        <p:txBody>
-          <a:bodyPr rtlCol="0" anchor="ctr"/>
-          <a:lstStyle/>
-          <a:p>
-            <a:pPr algn="ctr"/>
-          </a:p>
-        </p:txBody>
-      </p:sp>
-      <p:sp>
-        <p:nvSpPr>
-          <p:cNvPr id="13" name="TextBox 12"/>
-          <p:cNvSpPr txBox="1"/>
-          <p:nvPr/>
-        </p:nvSpPr>
-        <p:spPr>
-          <a:xfrm>
-            <a:off x="548640" y="6510528"/>
-            <a:ext cx="2743200" cy="256032"/>
-          </a:xfrm>
-          <a:prstGeom prst="rect">
-            <a:avLst/>
-          </a:prstGeom>
-          <a:noFill/>
-        </p:spPr>
-        <p:txBody>
-          <a:bodyPr wrap="square" anchor="t">
-            <a:spAutoFit/>
-          </a:bodyPr>
-          <a:lstStyle/>
-          <a:p>
-            <a:pPr algn="l"/>
-            <a:r>
-              <a:rPr sz="1100" b="1">
-                <a:solidFill>
-                  <a:srgbClr val="5234B7"/>
-                </a:solidFill>
-                <a:latin typeface="DIN Next LT W23"/>
-                <a:ea typeface="DIN Next LT W23"/>
-                <a:cs typeface="DIN Next LT W23"/>
-              </a:rPr>
-              <a:t>ETRA</a:t>
-            </a:r>
-          </a:p>
-        </p:txBody>
-      </p:sp>
-      <p:sp>
-        <p:nvSpPr>
-          <p:cNvPr id="14" name="TextBox 13"/>
-          <p:cNvSpPr txBox="1"/>
-          <p:nvPr/>
-        </p:nvSpPr>
-        <p:spPr>
-          <a:xfrm>
-            <a:off x="9601200" y="6510528"/>
-            <a:ext cx="2011680" cy="256032"/>
-          </a:xfrm>
-          <a:prstGeom prst="rect">
-            <a:avLst/>
-          </a:prstGeom>
-          <a:noFill/>
-        </p:spPr>
-        <p:txBody>
-          <a:bodyPr wrap="square" anchor="t">
-            <a:spAutoFit/>
-          </a:bodyPr>
-          <a:lstStyle/>
-          <a:p>
-            <a:pPr algn="r"/>
-            <a:r>
-              <a:rPr sz="1100" b="0">
-                <a:solidFill>
-                  <a:srgbClr val="5A5470"/>
-                </a:solidFill>
-                <a:latin typeface="DIN Next LT W23"/>
-                <a:ea typeface="DIN Next LT W23"/>
-                <a:cs typeface="DIN Next LT W23"/>
-              </a:rPr>
-              <a:t>65  /  77</a:t>
+              <a:t>65  /  78</a:t>
             </a:r>
           </a:p>
         </p:txBody>
@@ -42851,7 +42911,7 @@
                 <a:ea typeface="DIN Next LT W23"/>
                 <a:cs typeface="DIN Next LT W23"/>
               </a:rPr>
-              <a:t>Residual Block</a:t>
+              <a:t>CNN Blocks: Conv–Pool to ResNet</a:t>
             </a:r>
           </a:p>
         </p:txBody>
@@ -42888,21 +42948,58 @@
                 <a:ea typeface="DIN Next LT W23"/>
                 <a:cs typeface="DIN Next LT W23"/>
               </a:rPr>
-              <a:t>Learn F(x), Keep an Identity Path</a:t>
-            </a:r>
-          </a:p>
-        </p:txBody>
-      </p:sp>
-      <p:sp>
-        <p:nvSpPr>
-          <p:cNvPr id="8" name="Rounded Rectangle 7"/>
+              <a:t>Depth, Downsampling, Residual Learning</a:t>
+            </a:r>
+          </a:p>
+        </p:txBody>
+      </p:sp>
+      <p:sp>
+        <p:nvSpPr>
+          <p:cNvPr id="8" name="TextBox 7"/>
+          <p:cNvSpPr txBox="1"/>
+          <p:nvPr/>
+        </p:nvSpPr>
+        <p:spPr>
+          <a:xfrm>
+            <a:off x="548640" y="1920240"/>
+            <a:ext cx="10972800" cy="320040"/>
+          </a:xfrm>
+          <a:prstGeom prst="rect">
+            <a:avLst/>
+          </a:prstGeom>
+          <a:noFill/>
+        </p:spPr>
+        <p:txBody>
+          <a:bodyPr wrap="square" anchor="t">
+            <a:spAutoFit/>
+          </a:bodyPr>
+          <a:lstStyle/>
+          <a:p>
+            <a:pPr algn="l"/>
+            <a:r>
+              <a:rPr sz="1300" b="0">
+                <a:solidFill>
+                  <a:srgbClr val="5A5470"/>
+                </a:solidFill>
+                <a:latin typeface="DIN Next LT W23"/>
+                <a:ea typeface="DIN Next LT W23"/>
+                <a:cs typeface="DIN Next LT W23"/>
+              </a:rPr>
+              <a:t>A standard CNN alternates convolution, ReLU, and pooling, then a fully connected head.</a:t>
+            </a:r>
+          </a:p>
+        </p:txBody>
+      </p:sp>
+      <p:sp>
+        <p:nvSpPr>
+          <p:cNvPr id="9" name="Rounded Rectangle 8"/>
           <p:cNvSpPr/>
           <p:nvPr/>
         </p:nvSpPr>
         <p:spPr>
           <a:xfrm>
-            <a:off x="548640" y="1965960"/>
-            <a:ext cx="10972800" cy="640080"/>
+            <a:off x="548640" y="2240280"/>
+            <a:ext cx="10972800" cy="3977639"/>
           </a:xfrm>
           <a:prstGeom prst="roundRect">
             <a:avLst>
@@ -42939,92 +43036,9 @@
           </a:p>
         </p:txBody>
       </p:sp>
-      <p:sp>
-        <p:nvSpPr>
-          <p:cNvPr id="9" name="TextBox 8"/>
-          <p:cNvSpPr txBox="1"/>
-          <p:nvPr/>
-        </p:nvSpPr>
-        <p:spPr>
-          <a:xfrm>
-            <a:off x="868680" y="2084831"/>
-            <a:ext cx="10332720" cy="411480"/>
-          </a:xfrm>
-          <a:prstGeom prst="rect">
-            <a:avLst/>
-          </a:prstGeom>
-          <a:noFill/>
-        </p:spPr>
-        <p:txBody>
-          <a:bodyPr wrap="square" anchor="t">
-            <a:spAutoFit/>
-          </a:bodyPr>
-          <a:lstStyle/>
-          <a:p>
-            <a:pPr algn="l"/>
-            <a:r>
-              <a:rPr sz="1400" b="0">
-                <a:solidFill>
-                  <a:srgbClr val="121018"/>
-                </a:solidFill>
-                <a:latin typeface="DIN Next LT W23"/>
-                <a:ea typeface="DIN Next LT W23"/>
-                <a:cs typeface="DIN Next LT W23"/>
-              </a:rPr>
-              <a:t>Skip connections let gradients flow backward through identity — this is how 100+ layer nets train.</a:t>
-            </a:r>
-          </a:p>
-        </p:txBody>
-      </p:sp>
-      <p:sp>
-        <p:nvSpPr>
-          <p:cNvPr id="10" name="Rounded Rectangle 9"/>
-          <p:cNvSpPr/>
-          <p:nvPr/>
-        </p:nvSpPr>
-        <p:spPr>
-          <a:xfrm>
-            <a:off x="548640" y="2743200"/>
-            <a:ext cx="10972800" cy="1417320"/>
-          </a:xfrm>
-          <a:prstGeom prst="roundRect">
-            <a:avLst>
-              <a:gd name="adj" fmla="val 10000"/>
-            </a:avLst>
-          </a:prstGeom>
-          <a:solidFill>
-            <a:srgbClr val="EEE8FA"/>
-          </a:solidFill>
-          <a:ln>
-            <a:noFill/>
-          </a:ln>
-          <a:effectLst/>
-        </p:spPr>
-        <p:style>
-          <a:lnRef idx="1">
-            <a:schemeClr val="accent1"/>
-          </a:lnRef>
-          <a:fillRef idx="3">
-            <a:schemeClr val="accent1"/>
-          </a:fillRef>
-          <a:effectRef idx="2">
-            <a:schemeClr val="accent1"/>
-          </a:effectRef>
-          <a:fontRef idx="minor">
-            <a:schemeClr val="lt1"/>
-          </a:fontRef>
-        </p:style>
-        <p:txBody>
-          <a:bodyPr rtlCol="0" anchor="ctr"/>
-          <a:lstStyle/>
-          <a:p>
-            <a:pPr algn="ctr"/>
-          </a:p>
-        </p:txBody>
-      </p:sp>
       <p:pic>
         <p:nvPicPr>
-          <p:cNvPr id="11" name="Picture 10" descr="f-2b076bcbaf5e0bf9.png"/>
+          <p:cNvPr id="10" name="Picture 9" descr="cnn-stack.png"/>
           <p:cNvPicPr>
             <a:picLocks noChangeAspect="1"/>
           </p:cNvPicPr>
@@ -43038,8 +43052,8 @@
         </p:blipFill>
         <p:spPr>
           <a:xfrm>
-            <a:off x="4440086" y="2852928"/>
-            <a:ext cx="3189906" cy="868679"/>
+            <a:off x="731520" y="2377440"/>
+            <a:ext cx="10607040" cy="3639993"/>
           </a:xfrm>
           <a:prstGeom prst="rect">
             <a:avLst/>
@@ -43048,29 +43062,29 @@
       </p:pic>
       <p:sp>
         <p:nvSpPr>
-          <p:cNvPr id="12" name="TextBox 11"/>
-          <p:cNvSpPr txBox="1"/>
-          <p:nvPr/>
-        </p:nvSpPr>
-        <p:spPr>
-          <a:xfrm>
-            <a:off x="914400" y="3840480"/>
-            <a:ext cx="10241280" cy="256032"/>
-          </a:xfrm>
-          <a:prstGeom prst="rect">
-            <a:avLst/>
-          </a:prstGeom>
-          <a:noFill/>
-        </p:spPr>
-        <p:txBody>
-          <a:bodyPr wrap="square" anchor="t">
-            <a:spAutoFit/>
-          </a:bodyPr>
-          <a:lstStyle/>
-          <a:p>
-            <a:pPr algn="ctr"/>
-            <a:r>
-              <a:rPr sz="1200" b="0">
+          <p:cNvPr id="11" name="TextBox 10"/>
+          <p:cNvSpPr txBox="1"/>
+          <p:nvPr/>
+        </p:nvSpPr>
+        <p:spPr>
+          <a:xfrm>
+            <a:off x="548640" y="6309360"/>
+            <a:ext cx="10972800" cy="228600"/>
+          </a:xfrm>
+          <a:prstGeom prst="rect">
+            <a:avLst/>
+          </a:prstGeom>
+          <a:noFill/>
+        </p:spPr>
+        <p:txBody>
+          <a:bodyPr wrap="square" anchor="t">
+            <a:spAutoFit/>
+          </a:bodyPr>
+          <a:lstStyle/>
+          <a:p>
+            <a:pPr algn="l"/>
+            <a:r>
+              <a:rPr sz="1100" b="0">
                 <a:solidFill>
                   <a:srgbClr val="5A5470"/>
                 </a:solidFill>
@@ -43078,199 +43092,14 @@
                 <a:ea typeface="DIN Next LT W23"/>
                 <a:cs typeface="DIN Next LT W23"/>
               </a:rPr>
-              <a:t>The block learns the residual F; x is copied forward</a:t>
-            </a:r>
-          </a:p>
-        </p:txBody>
-      </p:sp>
-      <p:sp>
-        <p:nvSpPr>
-          <p:cNvPr id="13" name="TextBox 12"/>
-          <p:cNvSpPr txBox="1"/>
-          <p:nvPr/>
-        </p:nvSpPr>
-        <p:spPr>
-          <a:xfrm>
-            <a:off x="548640" y="4270248"/>
-            <a:ext cx="320040" cy="384048"/>
-          </a:xfrm>
-          <a:prstGeom prst="rect">
-            <a:avLst/>
-          </a:prstGeom>
-          <a:noFill/>
-        </p:spPr>
-        <p:txBody>
-          <a:bodyPr wrap="square" anchor="t">
-            <a:spAutoFit/>
-          </a:bodyPr>
-          <a:lstStyle/>
-          <a:p>
-            <a:pPr algn="l"/>
-            <a:r>
-              <a:rPr sz="1300" b="0">
-                <a:solidFill>
-                  <a:srgbClr val="9E59CD"/>
-                </a:solidFill>
-                <a:latin typeface="DIN Next LT W23"/>
-                <a:ea typeface="DIN Next LT W23"/>
-                <a:cs typeface="DIN Next LT W23"/>
-              </a:rPr>
-              <a:t>–</a:t>
-            </a:r>
-          </a:p>
-        </p:txBody>
-      </p:sp>
-      <p:sp>
-        <p:nvSpPr>
-          <p:cNvPr id="14" name="TextBox 13"/>
-          <p:cNvSpPr txBox="1"/>
-          <p:nvPr/>
-        </p:nvSpPr>
-        <p:spPr>
-          <a:xfrm>
-            <a:off x="914400" y="4270248"/>
-            <a:ext cx="9875519" cy="384048"/>
-          </a:xfrm>
-          <a:prstGeom prst="rect">
-            <a:avLst/>
-          </a:prstGeom>
-          <a:noFill/>
-        </p:spPr>
-        <p:txBody>
-          <a:bodyPr wrap="square" anchor="t">
-            <a:spAutoFit/>
-          </a:bodyPr>
-          <a:lstStyle/>
-          <a:p>
-            <a:pPr algn="l"/>
-            <a:r>
-              <a:rPr sz="1300" b="0">
-                <a:solidFill>
-                  <a:srgbClr val="121018"/>
-                </a:solidFill>
-                <a:latin typeface="DIN Next LT W23"/>
-                <a:ea typeface="DIN Next LT W23"/>
-                <a:cs typeface="DIN Next LT W23"/>
-              </a:rPr>
-              <a:t>AlexNet (2012): scale + ReLU + dropout + GPUs on ImageNet.</a:t>
-            </a:r>
-          </a:p>
-        </p:txBody>
-      </p:sp>
-      <p:sp>
-        <p:nvSpPr>
-          <p:cNvPr id="15" name="TextBox 14"/>
-          <p:cNvSpPr txBox="1"/>
-          <p:nvPr/>
-        </p:nvSpPr>
-        <p:spPr>
-          <a:xfrm>
-            <a:off x="548640" y="4690872"/>
-            <a:ext cx="320040" cy="384048"/>
-          </a:xfrm>
-          <a:prstGeom prst="rect">
-            <a:avLst/>
-          </a:prstGeom>
-          <a:noFill/>
-        </p:spPr>
-        <p:txBody>
-          <a:bodyPr wrap="square" anchor="t">
-            <a:spAutoFit/>
-          </a:bodyPr>
-          <a:lstStyle/>
-          <a:p>
-            <a:pPr algn="l"/>
-            <a:r>
-              <a:rPr sz="1300" b="0">
-                <a:solidFill>
-                  <a:srgbClr val="9E59CD"/>
-                </a:solidFill>
-                <a:latin typeface="DIN Next LT W23"/>
-                <a:ea typeface="DIN Next LT W23"/>
-                <a:cs typeface="DIN Next LT W23"/>
-              </a:rPr>
-              <a:t>–</a:t>
-            </a:r>
-          </a:p>
-        </p:txBody>
-      </p:sp>
-      <p:sp>
-        <p:nvSpPr>
-          <p:cNvPr id="16" name="TextBox 15"/>
-          <p:cNvSpPr txBox="1"/>
-          <p:nvPr/>
-        </p:nvSpPr>
-        <p:spPr>
-          <a:xfrm>
-            <a:off x="914400" y="4690872"/>
-            <a:ext cx="9875519" cy="384048"/>
-          </a:xfrm>
-          <a:prstGeom prst="rect">
-            <a:avLst/>
-          </a:prstGeom>
-          <a:noFill/>
-        </p:spPr>
-        <p:txBody>
-          <a:bodyPr wrap="square" anchor="t">
-            <a:spAutoFit/>
-          </a:bodyPr>
-          <a:lstStyle/>
-          <a:p>
-            <a:pPr algn="l"/>
-            <a:r>
-              <a:rPr sz="1300" b="0">
-                <a:solidFill>
-                  <a:srgbClr val="121018"/>
-                </a:solidFill>
-                <a:latin typeface="DIN Next LT W23"/>
-                <a:ea typeface="DIN Next LT W23"/>
-                <a:cs typeface="DIN Next LT W23"/>
-              </a:rPr>
-              <a:t>ResNet (2015): residual mapping F(x)+x; skip paths help gradients.</a:t>
-            </a:r>
-          </a:p>
-        </p:txBody>
-      </p:sp>
-      <p:sp>
-        <p:nvSpPr>
-          <p:cNvPr id="17" name="TextBox 16"/>
-          <p:cNvSpPr txBox="1"/>
-          <p:nvPr/>
-        </p:nvSpPr>
-        <p:spPr>
-          <a:xfrm>
-            <a:off x="548640" y="5989320"/>
-            <a:ext cx="10972800" cy="228600"/>
-          </a:xfrm>
-          <a:prstGeom prst="rect">
-            <a:avLst/>
-          </a:prstGeom>
-          <a:noFill/>
-        </p:spPr>
-        <p:txBody>
-          <a:bodyPr wrap="square" anchor="t">
-            <a:spAutoFit/>
-          </a:bodyPr>
-          <a:lstStyle/>
-          <a:p>
-            <a:pPr algn="l"/>
-            <a:r>
-              <a:rPr sz="1200" b="0">
-                <a:solidFill>
-                  <a:srgbClr val="5A5470"/>
-                </a:solidFill>
-                <a:latin typeface="DIN Next LT W23"/>
-                <a:ea typeface="DIN Next LT W23"/>
-                <a:cs typeface="DIN Next LT W23"/>
-              </a:rPr>
-              <a:t>If F learns zero, the block still acts as identity — easier than learning identity from scratch.</a:t>
-            </a:r>
-          </a:p>
-        </p:txBody>
-      </p:sp>
-      <p:sp>
-        <p:nvSpPr>
-          <p:cNvPr id="18" name="Rectangle 17"/>
+              <a:t>Max-pool keeps the strongest local response and shrinks the map.</a:t>
+            </a:r>
+          </a:p>
+        </p:txBody>
+      </p:sp>
+      <p:sp>
+        <p:nvSpPr>
+          <p:cNvPr id="12" name="Rectangle 11"/>
           <p:cNvSpPr/>
           <p:nvPr/>
         </p:nvSpPr>
@@ -43314,7 +43143,7 @@
       </p:sp>
       <p:sp>
         <p:nvSpPr>
-          <p:cNvPr id="19" name="TextBox 18"/>
+          <p:cNvPr id="13" name="TextBox 12"/>
           <p:cNvSpPr txBox="1"/>
           <p:nvPr/>
         </p:nvSpPr>
@@ -43351,7 +43180,7 @@
       </p:sp>
       <p:sp>
         <p:nvSpPr>
-          <p:cNvPr id="20" name="TextBox 19"/>
+          <p:cNvPr id="14" name="TextBox 13"/>
           <p:cNvSpPr txBox="1"/>
           <p:nvPr/>
         </p:nvSpPr>
@@ -43381,7 +43210,7 @@
                 <a:ea typeface="DIN Next LT W23"/>
                 <a:cs typeface="DIN Next LT W23"/>
               </a:rPr>
-              <a:t>66  /  77</a:t>
+              <a:t>66  /  78</a:t>
             </a:r>
           </a:p>
         </p:txBody>
@@ -43593,7 +43422,7 @@
                 <a:ea typeface="DIN Next LT W23"/>
                 <a:cs typeface="DIN Next LT W23"/>
               </a:rPr>
-              <a:t>Residual Path</a:t>
+              <a:t>Residual Block</a:t>
             </a:r>
           </a:p>
         </p:txBody>
@@ -43630,7 +43459,7 @@
                 <a:ea typeface="DIN Next LT W23"/>
                 <a:cs typeface="DIN Next LT W23"/>
               </a:rPr>
-              <a:t>Shortcut Around the Convolutions</a:t>
+              <a:t>Learn F(x), Keep an Identity Path</a:t>
             </a:r>
           </a:p>
         </p:txBody>
@@ -43644,7 +43473,7 @@
         <p:spPr>
           <a:xfrm>
             <a:off x="548640" y="1965960"/>
-            <a:ext cx="10972800" cy="3977639"/>
+            <a:ext cx="10972800" cy="640080"/>
           </a:xfrm>
           <a:prstGeom prst="roundRect">
             <a:avLst>
@@ -43681,9 +43510,92 @@
           </a:p>
         </p:txBody>
       </p:sp>
+      <p:sp>
+        <p:nvSpPr>
+          <p:cNvPr id="9" name="TextBox 8"/>
+          <p:cNvSpPr txBox="1"/>
+          <p:nvPr/>
+        </p:nvSpPr>
+        <p:spPr>
+          <a:xfrm>
+            <a:off x="868680" y="2084831"/>
+            <a:ext cx="10332720" cy="411480"/>
+          </a:xfrm>
+          <a:prstGeom prst="rect">
+            <a:avLst/>
+          </a:prstGeom>
+          <a:noFill/>
+        </p:spPr>
+        <p:txBody>
+          <a:bodyPr wrap="square" anchor="t">
+            <a:spAutoFit/>
+          </a:bodyPr>
+          <a:lstStyle/>
+          <a:p>
+            <a:pPr algn="l"/>
+            <a:r>
+              <a:rPr sz="1400" b="0">
+                <a:solidFill>
+                  <a:srgbClr val="121018"/>
+                </a:solidFill>
+                <a:latin typeface="DIN Next LT W23"/>
+                <a:ea typeface="DIN Next LT W23"/>
+                <a:cs typeface="DIN Next LT W23"/>
+              </a:rPr>
+              <a:t>Skip connections let gradients flow backward through identity — this is how 100+ layer nets train.</a:t>
+            </a:r>
+          </a:p>
+        </p:txBody>
+      </p:sp>
+      <p:sp>
+        <p:nvSpPr>
+          <p:cNvPr id="10" name="Rounded Rectangle 9"/>
+          <p:cNvSpPr/>
+          <p:nvPr/>
+        </p:nvSpPr>
+        <p:spPr>
+          <a:xfrm>
+            <a:off x="548640" y="2743200"/>
+            <a:ext cx="10972800" cy="1417320"/>
+          </a:xfrm>
+          <a:prstGeom prst="roundRect">
+            <a:avLst>
+              <a:gd name="adj" fmla="val 10000"/>
+            </a:avLst>
+          </a:prstGeom>
+          <a:solidFill>
+            <a:srgbClr val="EEE8FA"/>
+          </a:solidFill>
+          <a:ln>
+            <a:noFill/>
+          </a:ln>
+          <a:effectLst/>
+        </p:spPr>
+        <p:style>
+          <a:lnRef idx="1">
+            <a:schemeClr val="accent1"/>
+          </a:lnRef>
+          <a:fillRef idx="3">
+            <a:schemeClr val="accent1"/>
+          </a:fillRef>
+          <a:effectRef idx="2">
+            <a:schemeClr val="accent1"/>
+          </a:effectRef>
+          <a:fontRef idx="minor">
+            <a:schemeClr val="lt1"/>
+          </a:fontRef>
+        </p:style>
+        <p:txBody>
+          <a:bodyPr rtlCol="0" anchor="ctr"/>
+          <a:lstStyle/>
+          <a:p>
+            <a:pPr algn="ctr"/>
+          </a:p>
+        </p:txBody>
+      </p:sp>
       <p:pic>
         <p:nvPicPr>
-          <p:cNvPr id="9" name="Picture 8" descr="residual-block.png"/>
+          <p:cNvPr id="11" name="Picture 10" descr="f-2b076bcbaf5e0bf9.png"/>
           <p:cNvPicPr>
             <a:picLocks noChangeAspect="1"/>
           </p:cNvPicPr>
@@ -43697,8 +43609,8 @@
         </p:blipFill>
         <p:spPr>
           <a:xfrm>
-            <a:off x="917147" y="2103120"/>
-            <a:ext cx="10235785" cy="3703320"/>
+            <a:off x="4440086" y="2852928"/>
+            <a:ext cx="3189906" cy="868679"/>
           </a:xfrm>
           <a:prstGeom prst="rect">
             <a:avLst/>
@@ -43707,13 +43619,198 @@
       </p:pic>
       <p:sp>
         <p:nvSpPr>
-          <p:cNvPr id="10" name="TextBox 9"/>
-          <p:cNvSpPr txBox="1"/>
-          <p:nvPr/>
-        </p:nvSpPr>
-        <p:spPr>
-          <a:xfrm>
-            <a:off x="548640" y="6309360"/>
+          <p:cNvPr id="12" name="TextBox 11"/>
+          <p:cNvSpPr txBox="1"/>
+          <p:nvPr/>
+        </p:nvSpPr>
+        <p:spPr>
+          <a:xfrm>
+            <a:off x="914400" y="3840480"/>
+            <a:ext cx="10241280" cy="256032"/>
+          </a:xfrm>
+          <a:prstGeom prst="rect">
+            <a:avLst/>
+          </a:prstGeom>
+          <a:noFill/>
+        </p:spPr>
+        <p:txBody>
+          <a:bodyPr wrap="square" anchor="t">
+            <a:spAutoFit/>
+          </a:bodyPr>
+          <a:lstStyle/>
+          <a:p>
+            <a:pPr algn="ctr"/>
+            <a:r>
+              <a:rPr sz="1200" b="0">
+                <a:solidFill>
+                  <a:srgbClr val="5A5470"/>
+                </a:solidFill>
+                <a:latin typeface="DIN Next LT W23"/>
+                <a:ea typeface="DIN Next LT W23"/>
+                <a:cs typeface="DIN Next LT W23"/>
+              </a:rPr>
+              <a:t>The block learns the residual F; x is copied forward</a:t>
+            </a:r>
+          </a:p>
+        </p:txBody>
+      </p:sp>
+      <p:sp>
+        <p:nvSpPr>
+          <p:cNvPr id="13" name="TextBox 12"/>
+          <p:cNvSpPr txBox="1"/>
+          <p:nvPr/>
+        </p:nvSpPr>
+        <p:spPr>
+          <a:xfrm>
+            <a:off x="548640" y="4270248"/>
+            <a:ext cx="320040" cy="384048"/>
+          </a:xfrm>
+          <a:prstGeom prst="rect">
+            <a:avLst/>
+          </a:prstGeom>
+          <a:noFill/>
+        </p:spPr>
+        <p:txBody>
+          <a:bodyPr wrap="square" anchor="t">
+            <a:spAutoFit/>
+          </a:bodyPr>
+          <a:lstStyle/>
+          <a:p>
+            <a:pPr algn="l"/>
+            <a:r>
+              <a:rPr sz="1300" b="0">
+                <a:solidFill>
+                  <a:srgbClr val="9E59CD"/>
+                </a:solidFill>
+                <a:latin typeface="DIN Next LT W23"/>
+                <a:ea typeface="DIN Next LT W23"/>
+                <a:cs typeface="DIN Next LT W23"/>
+              </a:rPr>
+              <a:t>–</a:t>
+            </a:r>
+          </a:p>
+        </p:txBody>
+      </p:sp>
+      <p:sp>
+        <p:nvSpPr>
+          <p:cNvPr id="14" name="TextBox 13"/>
+          <p:cNvSpPr txBox="1"/>
+          <p:nvPr/>
+        </p:nvSpPr>
+        <p:spPr>
+          <a:xfrm>
+            <a:off x="914400" y="4270248"/>
+            <a:ext cx="9875519" cy="384048"/>
+          </a:xfrm>
+          <a:prstGeom prst="rect">
+            <a:avLst/>
+          </a:prstGeom>
+          <a:noFill/>
+        </p:spPr>
+        <p:txBody>
+          <a:bodyPr wrap="square" anchor="t">
+            <a:spAutoFit/>
+          </a:bodyPr>
+          <a:lstStyle/>
+          <a:p>
+            <a:pPr algn="l"/>
+            <a:r>
+              <a:rPr sz="1300" b="0">
+                <a:solidFill>
+                  <a:srgbClr val="121018"/>
+                </a:solidFill>
+                <a:latin typeface="DIN Next LT W23"/>
+                <a:ea typeface="DIN Next LT W23"/>
+                <a:cs typeface="DIN Next LT W23"/>
+              </a:rPr>
+              <a:t>AlexNet (2012): scale + ReLU + dropout + GPUs on ImageNet.</a:t>
+            </a:r>
+          </a:p>
+        </p:txBody>
+      </p:sp>
+      <p:sp>
+        <p:nvSpPr>
+          <p:cNvPr id="15" name="TextBox 14"/>
+          <p:cNvSpPr txBox="1"/>
+          <p:nvPr/>
+        </p:nvSpPr>
+        <p:spPr>
+          <a:xfrm>
+            <a:off x="548640" y="4690872"/>
+            <a:ext cx="320040" cy="384048"/>
+          </a:xfrm>
+          <a:prstGeom prst="rect">
+            <a:avLst/>
+          </a:prstGeom>
+          <a:noFill/>
+        </p:spPr>
+        <p:txBody>
+          <a:bodyPr wrap="square" anchor="t">
+            <a:spAutoFit/>
+          </a:bodyPr>
+          <a:lstStyle/>
+          <a:p>
+            <a:pPr algn="l"/>
+            <a:r>
+              <a:rPr sz="1300" b="0">
+                <a:solidFill>
+                  <a:srgbClr val="9E59CD"/>
+                </a:solidFill>
+                <a:latin typeface="DIN Next LT W23"/>
+                <a:ea typeface="DIN Next LT W23"/>
+                <a:cs typeface="DIN Next LT W23"/>
+              </a:rPr>
+              <a:t>–</a:t>
+            </a:r>
+          </a:p>
+        </p:txBody>
+      </p:sp>
+      <p:sp>
+        <p:nvSpPr>
+          <p:cNvPr id="16" name="TextBox 15"/>
+          <p:cNvSpPr txBox="1"/>
+          <p:nvPr/>
+        </p:nvSpPr>
+        <p:spPr>
+          <a:xfrm>
+            <a:off x="914400" y="4690872"/>
+            <a:ext cx="9875519" cy="384048"/>
+          </a:xfrm>
+          <a:prstGeom prst="rect">
+            <a:avLst/>
+          </a:prstGeom>
+          <a:noFill/>
+        </p:spPr>
+        <p:txBody>
+          <a:bodyPr wrap="square" anchor="t">
+            <a:spAutoFit/>
+          </a:bodyPr>
+          <a:lstStyle/>
+          <a:p>
+            <a:pPr algn="l"/>
+            <a:r>
+              <a:rPr sz="1300" b="0">
+                <a:solidFill>
+                  <a:srgbClr val="121018"/>
+                </a:solidFill>
+                <a:latin typeface="DIN Next LT W23"/>
+                <a:ea typeface="DIN Next LT W23"/>
+                <a:cs typeface="DIN Next LT W23"/>
+              </a:rPr>
+              <a:t>ResNet (2015): residual mapping F(x)+x; skip paths help gradients.</a:t>
+            </a:r>
+          </a:p>
+        </p:txBody>
+      </p:sp>
+      <p:sp>
+        <p:nvSpPr>
+          <p:cNvPr id="17" name="TextBox 16"/>
+          <p:cNvSpPr txBox="1"/>
+          <p:nvPr/>
+        </p:nvSpPr>
+        <p:spPr>
+          <a:xfrm>
+            <a:off x="548640" y="5989320"/>
             <a:ext cx="10972800" cy="228600"/>
           </a:xfrm>
           <a:prstGeom prst="rect">
@@ -43729,7 +43826,7 @@
           <a:p>
             <a:pPr algn="l"/>
             <a:r>
-              <a:rPr sz="1100" b="0">
+              <a:rPr sz="1200" b="0">
                 <a:solidFill>
                   <a:srgbClr val="5A5470"/>
                 </a:solidFill>
@@ -43737,14 +43834,14 @@
                 <a:ea typeface="DIN Next LT W23"/>
                 <a:cs typeface="DIN Next LT W23"/>
               </a:rPr>
-              <a:t>The add node is why early layers still receive a usable gradient.</a:t>
-            </a:r>
-          </a:p>
-        </p:txBody>
-      </p:sp>
-      <p:sp>
-        <p:nvSpPr>
-          <p:cNvPr id="11" name="Rectangle 10"/>
+              <a:t>If F learns zero, the block still acts as identity — easier than learning identity from scratch.</a:t>
+            </a:r>
+          </a:p>
+        </p:txBody>
+      </p:sp>
+      <p:sp>
+        <p:nvSpPr>
+          <p:cNvPr id="18" name="Rectangle 17"/>
           <p:cNvSpPr/>
           <p:nvPr/>
         </p:nvSpPr>
@@ -43788,7 +43885,7 @@
       </p:sp>
       <p:sp>
         <p:nvSpPr>
-          <p:cNvPr id="12" name="TextBox 11"/>
+          <p:cNvPr id="19" name="TextBox 18"/>
           <p:cNvSpPr txBox="1"/>
           <p:nvPr/>
         </p:nvSpPr>
@@ -43825,7 +43922,7 @@
       </p:sp>
       <p:sp>
         <p:nvSpPr>
-          <p:cNvPr id="13" name="TextBox 12"/>
+          <p:cNvPr id="20" name="TextBox 19"/>
           <p:cNvSpPr txBox="1"/>
           <p:nvPr/>
         </p:nvSpPr>
@@ -43855,7 +43952,7 @@
                 <a:ea typeface="DIN Next LT W23"/>
                 <a:cs typeface="DIN Next LT W23"/>
               </a:rPr>
-              <a:t>67  /  77</a:t>
+              <a:t>67  /  78</a:t>
             </a:r>
           </a:p>
         </p:txBody>
@@ -44067,7 +44164,7 @@
                 <a:ea typeface="DIN Next LT W23"/>
                 <a:cs typeface="DIN Next LT W23"/>
               </a:rPr>
-              <a:t>Transfer Learning with Pretrained Models</a:t>
+              <a:t>Residual Path</a:t>
             </a:r>
           </a:p>
         </p:txBody>
@@ -44104,57 +44201,20 @@
                 <a:ea typeface="DIN Next LT W23"/>
                 <a:cs typeface="DIN Next LT W23"/>
               </a:rPr>
-              <a:t>Reuse Features, Adapt the Head</a:t>
-            </a:r>
-          </a:p>
-        </p:txBody>
-      </p:sp>
-      <p:sp>
-        <p:nvSpPr>
-          <p:cNvPr id="8" name="TextBox 7"/>
-          <p:cNvSpPr txBox="1"/>
-          <p:nvPr/>
-        </p:nvSpPr>
-        <p:spPr>
-          <a:xfrm>
-            <a:off x="548640" y="1920240"/>
-            <a:ext cx="10972800" cy="320040"/>
-          </a:xfrm>
-          <a:prstGeom prst="rect">
-            <a:avLst/>
-          </a:prstGeom>
-          <a:noFill/>
-        </p:spPr>
-        <p:txBody>
-          <a:bodyPr wrap="square" anchor="t">
-            <a:spAutoFit/>
-          </a:bodyPr>
-          <a:lstStyle/>
-          <a:p>
-            <a:pPr algn="l"/>
-            <a:r>
-              <a:rPr sz="1300" b="0">
-                <a:solidFill>
-                  <a:srgbClr val="5A5470"/>
-                </a:solidFill>
-                <a:latin typeface="DIN Next LT W23"/>
-                <a:ea typeface="DIN Next LT W23"/>
-                <a:cs typeface="DIN Next LT W23"/>
-              </a:rPr>
-              <a:t>Pretraining on ImageNet learns general filters you can reuse on a smaller target task.</a:t>
-            </a:r>
-          </a:p>
-        </p:txBody>
-      </p:sp>
-      <p:sp>
-        <p:nvSpPr>
-          <p:cNvPr id="9" name="Rounded Rectangle 8"/>
+              <a:t>Shortcut Around the Convolutions</a:t>
+            </a:r>
+          </a:p>
+        </p:txBody>
+      </p:sp>
+      <p:sp>
+        <p:nvSpPr>
+          <p:cNvPr id="8" name="Rounded Rectangle 7"/>
           <p:cNvSpPr/>
           <p:nvPr/>
         </p:nvSpPr>
         <p:spPr>
           <a:xfrm>
-            <a:off x="548640" y="2240280"/>
+            <a:off x="548640" y="1965960"/>
             <a:ext cx="10972800" cy="3977639"/>
           </a:xfrm>
           <a:prstGeom prst="roundRect">
@@ -44194,7 +44254,7 @@
       </p:sp>
       <p:pic>
         <p:nvPicPr>
-          <p:cNvPr id="10" name="Picture 9" descr="transfer-learning.png"/>
+          <p:cNvPr id="9" name="Picture 8" descr="residual-block.png"/>
           <p:cNvPicPr>
             <a:picLocks noChangeAspect="1"/>
           </p:cNvPicPr>
@@ -44208,7 +44268,7 @@
         </p:blipFill>
         <p:spPr>
           <a:xfrm>
-            <a:off x="917147" y="2377440"/>
+            <a:off x="917147" y="2103120"/>
             <a:ext cx="10235785" cy="3703320"/>
           </a:xfrm>
           <a:prstGeom prst="rect">
@@ -44218,7 +44278,7 @@
       </p:pic>
       <p:sp>
         <p:nvSpPr>
-          <p:cNvPr id="11" name="TextBox 10"/>
+          <p:cNvPr id="10" name="TextBox 9"/>
           <p:cNvSpPr txBox="1"/>
           <p:nvPr/>
         </p:nvSpPr>
@@ -44248,14 +44308,14 @@
                 <a:ea typeface="DIN Next LT W23"/>
                 <a:cs typeface="DIN Next LT W23"/>
               </a:rPr>
-              <a:t>Freeze the backbone when data is scarce; fine-tune top blocks when you have more labels.</a:t>
-            </a:r>
-          </a:p>
-        </p:txBody>
-      </p:sp>
-      <p:sp>
-        <p:nvSpPr>
-          <p:cNvPr id="12" name="Rectangle 11"/>
+              <a:t>The add node is why early layers still receive a usable gradient.</a:t>
+            </a:r>
+          </a:p>
+        </p:txBody>
+      </p:sp>
+      <p:sp>
+        <p:nvSpPr>
+          <p:cNvPr id="11" name="Rectangle 10"/>
           <p:cNvSpPr/>
           <p:nvPr/>
         </p:nvSpPr>
@@ -44299,7 +44359,7 @@
       </p:sp>
       <p:sp>
         <p:nvSpPr>
-          <p:cNvPr id="13" name="TextBox 12"/>
+          <p:cNvPr id="12" name="TextBox 11"/>
           <p:cNvSpPr txBox="1"/>
           <p:nvPr/>
         </p:nvSpPr>
@@ -44336,7 +44396,7 @@
       </p:sp>
       <p:sp>
         <p:nvSpPr>
-          <p:cNvPr id="14" name="TextBox 13"/>
+          <p:cNvPr id="13" name="TextBox 12"/>
           <p:cNvSpPr txBox="1"/>
           <p:nvPr/>
         </p:nvSpPr>
@@ -44366,7 +44426,7 @@
                 <a:ea typeface="DIN Next LT W23"/>
                 <a:cs typeface="DIN Next LT W23"/>
               </a:rPr>
-              <a:t>68  /  77</a:t>
+              <a:t>68  /  78</a:t>
             </a:r>
           </a:p>
         </p:txBody>
@@ -44380,6 +44440,1222 @@
 </file>
 
 <file path=ppt/slides/slide69.xml><?xml version="1.0" encoding="utf-8"?>
+<p:sld xmlns:a="http://schemas.openxmlformats.org/drawingml/2006/main" xmlns:p="http://schemas.openxmlformats.org/presentationml/2006/main" xmlns:r="http://schemas.openxmlformats.org/officeDocument/2006/relationships">
+  <p:cSld>
+    <p:bg>
+      <p:bgPr>
+        <a:solidFill>
+          <a:srgbClr val="FAF8FF"/>
+        </a:solidFill>
+        <a:effectLst/>
+      </p:bgPr>
+    </p:bg>
+    <p:spTree>
+      <p:nvGrpSpPr>
+        <p:cNvPr id="1" name=""/>
+        <p:cNvGrpSpPr/>
+        <p:nvPr/>
+      </p:nvGrpSpPr>
+      <p:grpSpPr/>
+      <p:sp>
+        <p:nvSpPr>
+          <p:cNvPr id="2" name="Rectangle 1"/>
+          <p:cNvSpPr/>
+          <p:nvPr/>
+        </p:nvSpPr>
+        <p:spPr>
+          <a:xfrm>
+            <a:off x="12136831" y="0"/>
+            <a:ext cx="54864" cy="6858000"/>
+          </a:xfrm>
+          <a:prstGeom prst="rect">
+            <a:avLst/>
+          </a:prstGeom>
+          <a:solidFill>
+            <a:srgbClr val="5234B7"/>
+          </a:solidFill>
+          <a:ln>
+            <a:noFill/>
+          </a:ln>
+          <a:effectLst/>
+        </p:spPr>
+        <p:style>
+          <a:lnRef idx="1">
+            <a:schemeClr val="accent1"/>
+          </a:lnRef>
+          <a:fillRef idx="3">
+            <a:schemeClr val="accent1"/>
+          </a:fillRef>
+          <a:effectRef idx="2">
+            <a:schemeClr val="accent1"/>
+          </a:effectRef>
+          <a:fontRef idx="minor">
+            <a:schemeClr val="lt1"/>
+          </a:fontRef>
+        </p:style>
+        <p:txBody>
+          <a:bodyPr rtlCol="0" anchor="ctr"/>
+          <a:lstStyle/>
+          <a:p>
+            <a:pPr algn="ctr"/>
+          </a:p>
+        </p:txBody>
+      </p:sp>
+      <p:pic>
+        <p:nvPicPr>
+          <p:cNvPr id="3" name="Picture 2" descr="etra-wordmark.png"/>
+          <p:cNvPicPr>
+            <a:picLocks noChangeAspect="1"/>
+          </p:cNvPicPr>
+          <p:nvPr/>
+        </p:nvPicPr>
+        <p:blipFill>
+          <a:blip r:embed="rId2"/>
+          <a:stretch>
+            <a:fillRect/>
+          </a:stretch>
+        </p:blipFill>
+        <p:spPr>
+          <a:xfrm>
+            <a:off x="10561320" y="411480"/>
+            <a:ext cx="1206201" cy="320040"/>
+          </a:xfrm>
+          <a:prstGeom prst="rect">
+            <a:avLst/>
+          </a:prstGeom>
+        </p:spPr>
+      </p:pic>
+      <p:sp>
+        <p:nvSpPr>
+          <p:cNvPr id="4" name="TextBox 3"/>
+          <p:cNvSpPr txBox="1"/>
+          <p:nvPr/>
+        </p:nvSpPr>
+        <p:spPr>
+          <a:xfrm>
+            <a:off x="548640" y="438912"/>
+            <a:ext cx="7772400" cy="274320"/>
+          </a:xfrm>
+          <a:prstGeom prst="rect">
+            <a:avLst/>
+          </a:prstGeom>
+          <a:noFill/>
+        </p:spPr>
+        <p:txBody>
+          <a:bodyPr wrap="square" anchor="t">
+            <a:spAutoFit/>
+          </a:bodyPr>
+          <a:lstStyle/>
+          <a:p>
+            <a:pPr algn="l"/>
+            <a:r>
+              <a:rPr sz="1200" b="0">
+                <a:solidFill>
+                  <a:srgbClr val="5A5470"/>
+                </a:solidFill>
+                <a:latin typeface="DIN Next LT W23"/>
+                <a:ea typeface="DIN Next LT W23"/>
+                <a:cs typeface="DIN Next LT W23"/>
+              </a:rPr>
+              <a:t>S07  ·  Deep Learning</a:t>
+            </a:r>
+          </a:p>
+        </p:txBody>
+      </p:sp>
+      <p:sp>
+        <p:nvSpPr>
+          <p:cNvPr id="5" name="Rectangle 4"/>
+          <p:cNvSpPr/>
+          <p:nvPr/>
+        </p:nvSpPr>
+        <p:spPr>
+          <a:xfrm>
+            <a:off x="548640" y="822960"/>
+            <a:ext cx="11064240" cy="10972"/>
+          </a:xfrm>
+          <a:prstGeom prst="rect">
+            <a:avLst/>
+          </a:prstGeom>
+          <a:solidFill>
+            <a:srgbClr val="E4DCF4"/>
+          </a:solidFill>
+          <a:ln>
+            <a:noFill/>
+          </a:ln>
+          <a:effectLst/>
+        </p:spPr>
+        <p:style>
+          <a:lnRef idx="1">
+            <a:schemeClr val="accent1"/>
+          </a:lnRef>
+          <a:fillRef idx="3">
+            <a:schemeClr val="accent1"/>
+          </a:fillRef>
+          <a:effectRef idx="2">
+            <a:schemeClr val="accent1"/>
+          </a:effectRef>
+          <a:fontRef idx="minor">
+            <a:schemeClr val="lt1"/>
+          </a:fontRef>
+        </p:style>
+        <p:txBody>
+          <a:bodyPr rtlCol="0" anchor="ctr"/>
+          <a:lstStyle/>
+          <a:p>
+            <a:pPr algn="ctr"/>
+          </a:p>
+        </p:txBody>
+      </p:sp>
+      <p:sp>
+        <p:nvSpPr>
+          <p:cNvPr id="6" name="TextBox 5"/>
+          <p:cNvSpPr txBox="1"/>
+          <p:nvPr/>
+        </p:nvSpPr>
+        <p:spPr>
+          <a:xfrm>
+            <a:off x="548640" y="1051560"/>
+            <a:ext cx="10241280" cy="594360"/>
+          </a:xfrm>
+          <a:prstGeom prst="rect">
+            <a:avLst/>
+          </a:prstGeom>
+          <a:noFill/>
+        </p:spPr>
+        <p:txBody>
+          <a:bodyPr wrap="square" anchor="t">
+            <a:spAutoFit/>
+          </a:bodyPr>
+          <a:lstStyle/>
+          <a:p>
+            <a:pPr algn="l"/>
+            <a:r>
+              <a:rPr sz="3200" b="1">
+                <a:solidFill>
+                  <a:srgbClr val="5234B7"/>
+                </a:solidFill>
+                <a:latin typeface="DIN Next LT W23"/>
+                <a:ea typeface="DIN Next LT W23"/>
+                <a:cs typeface="DIN Next LT W23"/>
+              </a:rPr>
+              <a:t>Transfer Learning with Pretrained Models</a:t>
+            </a:r>
+          </a:p>
+        </p:txBody>
+      </p:sp>
+      <p:sp>
+        <p:nvSpPr>
+          <p:cNvPr id="7" name="TextBox 6"/>
+          <p:cNvSpPr txBox="1"/>
+          <p:nvPr/>
+        </p:nvSpPr>
+        <p:spPr>
+          <a:xfrm>
+            <a:off x="548640" y="1600200"/>
+            <a:ext cx="10241280" cy="365760"/>
+          </a:xfrm>
+          <a:prstGeom prst="rect">
+            <a:avLst/>
+          </a:prstGeom>
+          <a:noFill/>
+        </p:spPr>
+        <p:txBody>
+          <a:bodyPr wrap="square" anchor="t">
+            <a:spAutoFit/>
+          </a:bodyPr>
+          <a:lstStyle/>
+          <a:p>
+            <a:pPr algn="l"/>
+            <a:r>
+              <a:rPr sz="1500" b="0">
+                <a:solidFill>
+                  <a:srgbClr val="5A5470"/>
+                </a:solidFill>
+                <a:latin typeface="DIN Next LT W23"/>
+                <a:ea typeface="DIN Next LT W23"/>
+                <a:cs typeface="DIN Next LT W23"/>
+              </a:rPr>
+              <a:t>Reuse Features, Adapt the Head</a:t>
+            </a:r>
+          </a:p>
+        </p:txBody>
+      </p:sp>
+      <p:sp>
+        <p:nvSpPr>
+          <p:cNvPr id="8" name="TextBox 7"/>
+          <p:cNvSpPr txBox="1"/>
+          <p:nvPr/>
+        </p:nvSpPr>
+        <p:spPr>
+          <a:xfrm>
+            <a:off x="548640" y="1920240"/>
+            <a:ext cx="10972800" cy="320040"/>
+          </a:xfrm>
+          <a:prstGeom prst="rect">
+            <a:avLst/>
+          </a:prstGeom>
+          <a:noFill/>
+        </p:spPr>
+        <p:txBody>
+          <a:bodyPr wrap="square" anchor="t">
+            <a:spAutoFit/>
+          </a:bodyPr>
+          <a:lstStyle/>
+          <a:p>
+            <a:pPr algn="l"/>
+            <a:r>
+              <a:rPr sz="1300" b="0">
+                <a:solidFill>
+                  <a:srgbClr val="5A5470"/>
+                </a:solidFill>
+                <a:latin typeface="DIN Next LT W23"/>
+                <a:ea typeface="DIN Next LT W23"/>
+                <a:cs typeface="DIN Next LT W23"/>
+              </a:rPr>
+              <a:t>Pretraining on ImageNet learns general filters you can reuse on a smaller target task.</a:t>
+            </a:r>
+          </a:p>
+        </p:txBody>
+      </p:sp>
+      <p:sp>
+        <p:nvSpPr>
+          <p:cNvPr id="9" name="Rounded Rectangle 8"/>
+          <p:cNvSpPr/>
+          <p:nvPr/>
+        </p:nvSpPr>
+        <p:spPr>
+          <a:xfrm>
+            <a:off x="548640" y="2240280"/>
+            <a:ext cx="10972800" cy="3977639"/>
+          </a:xfrm>
+          <a:prstGeom prst="roundRect">
+            <a:avLst>
+              <a:gd name="adj" fmla="val 10000"/>
+            </a:avLst>
+          </a:prstGeom>
+          <a:solidFill>
+            <a:srgbClr val="EEE8FA"/>
+          </a:solidFill>
+          <a:ln>
+            <a:noFill/>
+          </a:ln>
+          <a:effectLst/>
+        </p:spPr>
+        <p:style>
+          <a:lnRef idx="1">
+            <a:schemeClr val="accent1"/>
+          </a:lnRef>
+          <a:fillRef idx="3">
+            <a:schemeClr val="accent1"/>
+          </a:fillRef>
+          <a:effectRef idx="2">
+            <a:schemeClr val="accent1"/>
+          </a:effectRef>
+          <a:fontRef idx="minor">
+            <a:schemeClr val="lt1"/>
+          </a:fontRef>
+        </p:style>
+        <p:txBody>
+          <a:bodyPr rtlCol="0" anchor="ctr"/>
+          <a:lstStyle/>
+          <a:p>
+            <a:pPr algn="ctr"/>
+          </a:p>
+        </p:txBody>
+      </p:sp>
+      <p:pic>
+        <p:nvPicPr>
+          <p:cNvPr id="10" name="Picture 9" descr="transfer-learning.png"/>
+          <p:cNvPicPr>
+            <a:picLocks noChangeAspect="1"/>
+          </p:cNvPicPr>
+          <p:nvPr/>
+        </p:nvPicPr>
+        <p:blipFill>
+          <a:blip r:embed="rId3"/>
+          <a:stretch>
+            <a:fillRect/>
+          </a:stretch>
+        </p:blipFill>
+        <p:spPr>
+          <a:xfrm>
+            <a:off x="917147" y="2377440"/>
+            <a:ext cx="10235785" cy="3703320"/>
+          </a:xfrm>
+          <a:prstGeom prst="rect">
+            <a:avLst/>
+          </a:prstGeom>
+        </p:spPr>
+      </p:pic>
+      <p:sp>
+        <p:nvSpPr>
+          <p:cNvPr id="11" name="TextBox 10"/>
+          <p:cNvSpPr txBox="1"/>
+          <p:nvPr/>
+        </p:nvSpPr>
+        <p:spPr>
+          <a:xfrm>
+            <a:off x="548640" y="6309360"/>
+            <a:ext cx="10972800" cy="228600"/>
+          </a:xfrm>
+          <a:prstGeom prst="rect">
+            <a:avLst/>
+          </a:prstGeom>
+          <a:noFill/>
+        </p:spPr>
+        <p:txBody>
+          <a:bodyPr wrap="square" anchor="t">
+            <a:spAutoFit/>
+          </a:bodyPr>
+          <a:lstStyle/>
+          <a:p>
+            <a:pPr algn="l"/>
+            <a:r>
+              <a:rPr sz="1100" b="0">
+                <a:solidFill>
+                  <a:srgbClr val="5A5470"/>
+                </a:solidFill>
+                <a:latin typeface="DIN Next LT W23"/>
+                <a:ea typeface="DIN Next LT W23"/>
+                <a:cs typeface="DIN Next LT W23"/>
+              </a:rPr>
+              <a:t>Freeze the backbone when data is scarce; fine-tune top blocks when you have more labels.</a:t>
+            </a:r>
+          </a:p>
+        </p:txBody>
+      </p:sp>
+      <p:sp>
+        <p:nvSpPr>
+          <p:cNvPr id="12" name="Rectangle 11"/>
+          <p:cNvSpPr/>
+          <p:nvPr/>
+        </p:nvSpPr>
+        <p:spPr>
+          <a:xfrm>
+            <a:off x="548640" y="6446520"/>
+            <a:ext cx="11064240" cy="10972"/>
+          </a:xfrm>
+          <a:prstGeom prst="rect">
+            <a:avLst/>
+          </a:prstGeom>
+          <a:solidFill>
+            <a:srgbClr val="5234B7"/>
+          </a:solidFill>
+          <a:ln>
+            <a:noFill/>
+          </a:ln>
+          <a:effectLst/>
+        </p:spPr>
+        <p:style>
+          <a:lnRef idx="1">
+            <a:schemeClr val="accent1"/>
+          </a:lnRef>
+          <a:fillRef idx="3">
+            <a:schemeClr val="accent1"/>
+          </a:fillRef>
+          <a:effectRef idx="2">
+            <a:schemeClr val="accent1"/>
+          </a:effectRef>
+          <a:fontRef idx="minor">
+            <a:schemeClr val="lt1"/>
+          </a:fontRef>
+        </p:style>
+        <p:txBody>
+          <a:bodyPr rtlCol="0" anchor="ctr"/>
+          <a:lstStyle/>
+          <a:p>
+            <a:pPr algn="ctr"/>
+          </a:p>
+        </p:txBody>
+      </p:sp>
+      <p:sp>
+        <p:nvSpPr>
+          <p:cNvPr id="13" name="TextBox 12"/>
+          <p:cNvSpPr txBox="1"/>
+          <p:nvPr/>
+        </p:nvSpPr>
+        <p:spPr>
+          <a:xfrm>
+            <a:off x="548640" y="6510528"/>
+            <a:ext cx="2743200" cy="256032"/>
+          </a:xfrm>
+          <a:prstGeom prst="rect">
+            <a:avLst/>
+          </a:prstGeom>
+          <a:noFill/>
+        </p:spPr>
+        <p:txBody>
+          <a:bodyPr wrap="square" anchor="t">
+            <a:spAutoFit/>
+          </a:bodyPr>
+          <a:lstStyle/>
+          <a:p>
+            <a:pPr algn="l"/>
+            <a:r>
+              <a:rPr sz="1100" b="1">
+                <a:solidFill>
+                  <a:srgbClr val="5234B7"/>
+                </a:solidFill>
+                <a:latin typeface="DIN Next LT W23"/>
+                <a:ea typeface="DIN Next LT W23"/>
+                <a:cs typeface="DIN Next LT W23"/>
+              </a:rPr>
+              <a:t>ETRA</a:t>
+            </a:r>
+          </a:p>
+        </p:txBody>
+      </p:sp>
+      <p:sp>
+        <p:nvSpPr>
+          <p:cNvPr id="14" name="TextBox 13"/>
+          <p:cNvSpPr txBox="1"/>
+          <p:nvPr/>
+        </p:nvSpPr>
+        <p:spPr>
+          <a:xfrm>
+            <a:off x="9601200" y="6510528"/>
+            <a:ext cx="2011680" cy="256032"/>
+          </a:xfrm>
+          <a:prstGeom prst="rect">
+            <a:avLst/>
+          </a:prstGeom>
+          <a:noFill/>
+        </p:spPr>
+        <p:txBody>
+          <a:bodyPr wrap="square" anchor="t">
+            <a:spAutoFit/>
+          </a:bodyPr>
+          <a:lstStyle/>
+          <a:p>
+            <a:pPr algn="r"/>
+            <a:r>
+              <a:rPr sz="1100" b="0">
+                <a:solidFill>
+                  <a:srgbClr val="5A5470"/>
+                </a:solidFill>
+                <a:latin typeface="DIN Next LT W23"/>
+                <a:ea typeface="DIN Next LT W23"/>
+                <a:cs typeface="DIN Next LT W23"/>
+              </a:rPr>
+              <a:t>69  /  78</a:t>
+            </a:r>
+          </a:p>
+        </p:txBody>
+      </p:sp>
+    </p:spTree>
+  </p:cSld>
+  <p:clrMapOvr>
+    <a:masterClrMapping/>
+  </p:clrMapOvr>
+</p:sld>
+</file>
+
+<file path=ppt/slides/slide7.xml><?xml version="1.0" encoding="utf-8"?>
+<p:sld xmlns:a="http://schemas.openxmlformats.org/drawingml/2006/main" xmlns:p="http://schemas.openxmlformats.org/presentationml/2006/main" xmlns:r="http://schemas.openxmlformats.org/officeDocument/2006/relationships">
+  <p:cSld>
+    <p:bg>
+      <p:bgPr>
+        <a:solidFill>
+          <a:srgbClr val="FAF8FF"/>
+        </a:solidFill>
+        <a:effectLst/>
+      </p:bgPr>
+    </p:bg>
+    <p:spTree>
+      <p:nvGrpSpPr>
+        <p:cNvPr id="1" name=""/>
+        <p:cNvGrpSpPr/>
+        <p:nvPr/>
+      </p:nvGrpSpPr>
+      <p:grpSpPr/>
+      <p:sp>
+        <p:nvSpPr>
+          <p:cNvPr id="2" name="Rectangle 1"/>
+          <p:cNvSpPr/>
+          <p:nvPr/>
+        </p:nvSpPr>
+        <p:spPr>
+          <a:xfrm>
+            <a:off x="12136831" y="0"/>
+            <a:ext cx="54864" cy="6858000"/>
+          </a:xfrm>
+          <a:prstGeom prst="rect">
+            <a:avLst/>
+          </a:prstGeom>
+          <a:solidFill>
+            <a:srgbClr val="5234B7"/>
+          </a:solidFill>
+          <a:ln>
+            <a:noFill/>
+          </a:ln>
+          <a:effectLst/>
+        </p:spPr>
+        <p:style>
+          <a:lnRef idx="1">
+            <a:schemeClr val="accent1"/>
+          </a:lnRef>
+          <a:fillRef idx="3">
+            <a:schemeClr val="accent1"/>
+          </a:fillRef>
+          <a:effectRef idx="2">
+            <a:schemeClr val="accent1"/>
+          </a:effectRef>
+          <a:fontRef idx="minor">
+            <a:schemeClr val="lt1"/>
+          </a:fontRef>
+        </p:style>
+        <p:txBody>
+          <a:bodyPr rtlCol="0" anchor="ctr"/>
+          <a:lstStyle/>
+          <a:p>
+            <a:pPr algn="ctr"/>
+          </a:p>
+        </p:txBody>
+      </p:sp>
+      <p:pic>
+        <p:nvPicPr>
+          <p:cNvPr id="3" name="Picture 2" descr="etra-wordmark.png"/>
+          <p:cNvPicPr>
+            <a:picLocks noChangeAspect="1"/>
+          </p:cNvPicPr>
+          <p:nvPr/>
+        </p:nvPicPr>
+        <p:blipFill>
+          <a:blip r:embed="rId2"/>
+          <a:stretch>
+            <a:fillRect/>
+          </a:stretch>
+        </p:blipFill>
+        <p:spPr>
+          <a:xfrm>
+            <a:off x="10561320" y="411480"/>
+            <a:ext cx="1206201" cy="320040"/>
+          </a:xfrm>
+          <a:prstGeom prst="rect">
+            <a:avLst/>
+          </a:prstGeom>
+        </p:spPr>
+      </p:pic>
+      <p:sp>
+        <p:nvSpPr>
+          <p:cNvPr id="4" name="TextBox 3"/>
+          <p:cNvSpPr txBox="1"/>
+          <p:nvPr/>
+        </p:nvSpPr>
+        <p:spPr>
+          <a:xfrm>
+            <a:off x="548640" y="438912"/>
+            <a:ext cx="7772400" cy="274320"/>
+          </a:xfrm>
+          <a:prstGeom prst="rect">
+            <a:avLst/>
+          </a:prstGeom>
+          <a:noFill/>
+        </p:spPr>
+        <p:txBody>
+          <a:bodyPr wrap="square" anchor="t">
+            <a:spAutoFit/>
+          </a:bodyPr>
+          <a:lstStyle/>
+          <a:p>
+            <a:pPr algn="l"/>
+            <a:r>
+              <a:rPr sz="1200" b="0">
+                <a:solidFill>
+                  <a:srgbClr val="5A5470"/>
+                </a:solidFill>
+                <a:latin typeface="DIN Next LT W23"/>
+                <a:ea typeface="DIN Next LT W23"/>
+                <a:cs typeface="DIN Next LT W23"/>
+              </a:rPr>
+              <a:t>S07  ·  Deep Learning</a:t>
+            </a:r>
+          </a:p>
+        </p:txBody>
+      </p:sp>
+      <p:sp>
+        <p:nvSpPr>
+          <p:cNvPr id="5" name="Rectangle 4"/>
+          <p:cNvSpPr/>
+          <p:nvPr/>
+        </p:nvSpPr>
+        <p:spPr>
+          <a:xfrm>
+            <a:off x="548640" y="822960"/>
+            <a:ext cx="11064240" cy="10972"/>
+          </a:xfrm>
+          <a:prstGeom prst="rect">
+            <a:avLst/>
+          </a:prstGeom>
+          <a:solidFill>
+            <a:srgbClr val="E4DCF4"/>
+          </a:solidFill>
+          <a:ln>
+            <a:noFill/>
+          </a:ln>
+          <a:effectLst/>
+        </p:spPr>
+        <p:style>
+          <a:lnRef idx="1">
+            <a:schemeClr val="accent1"/>
+          </a:lnRef>
+          <a:fillRef idx="3">
+            <a:schemeClr val="accent1"/>
+          </a:fillRef>
+          <a:effectRef idx="2">
+            <a:schemeClr val="accent1"/>
+          </a:effectRef>
+          <a:fontRef idx="minor">
+            <a:schemeClr val="lt1"/>
+          </a:fontRef>
+        </p:style>
+        <p:txBody>
+          <a:bodyPr rtlCol="0" anchor="ctr"/>
+          <a:lstStyle/>
+          <a:p>
+            <a:pPr algn="ctr"/>
+          </a:p>
+        </p:txBody>
+      </p:sp>
+      <p:sp>
+        <p:nvSpPr>
+          <p:cNvPr id="6" name="TextBox 5"/>
+          <p:cNvSpPr txBox="1"/>
+          <p:nvPr/>
+        </p:nvSpPr>
+        <p:spPr>
+          <a:xfrm>
+            <a:off x="548640" y="1051560"/>
+            <a:ext cx="10241280" cy="594360"/>
+          </a:xfrm>
+          <a:prstGeom prst="rect">
+            <a:avLst/>
+          </a:prstGeom>
+          <a:noFill/>
+        </p:spPr>
+        <p:txBody>
+          <a:bodyPr wrap="square" anchor="t">
+            <a:spAutoFit/>
+          </a:bodyPr>
+          <a:lstStyle/>
+          <a:p>
+            <a:pPr algn="l"/>
+            <a:r>
+              <a:rPr sz="3200" b="1">
+                <a:solidFill>
+                  <a:srgbClr val="5234B7"/>
+                </a:solidFill>
+                <a:latin typeface="DIN Next LT W23"/>
+                <a:ea typeface="DIN Next LT W23"/>
+                <a:cs typeface="DIN Next LT W23"/>
+              </a:rPr>
+              <a:t>Phase 1: Foundations &amp; Neural Core</a:t>
+            </a:r>
+          </a:p>
+        </p:txBody>
+      </p:sp>
+      <p:sp>
+        <p:nvSpPr>
+          <p:cNvPr id="7" name="TextBox 6"/>
+          <p:cNvSpPr txBox="1"/>
+          <p:nvPr/>
+        </p:nvSpPr>
+        <p:spPr>
+          <a:xfrm>
+            <a:off x="548640" y="1600200"/>
+            <a:ext cx="10241280" cy="365760"/>
+          </a:xfrm>
+          <a:prstGeom prst="rect">
+            <a:avLst/>
+          </a:prstGeom>
+          <a:noFill/>
+        </p:spPr>
+        <p:txBody>
+          <a:bodyPr wrap="square" anchor="t">
+            <a:spAutoFit/>
+          </a:bodyPr>
+          <a:lstStyle/>
+          <a:p>
+            <a:pPr algn="l"/>
+            <a:r>
+              <a:rPr sz="1500" b="0">
+                <a:solidFill>
+                  <a:srgbClr val="5A5470"/>
+                </a:solidFill>
+                <a:latin typeface="DIN Next LT W23"/>
+                <a:ea typeface="DIN Next LT W23"/>
+                <a:cs typeface="DIN Next LT W23"/>
+              </a:rPr>
+              <a:t>Why depth, neurons, and forward pass</a:t>
+            </a:r>
+          </a:p>
+        </p:txBody>
+      </p:sp>
+      <p:sp>
+        <p:nvSpPr>
+          <p:cNvPr id="8" name="Rounded Rectangle 7"/>
+          <p:cNvSpPr/>
+          <p:nvPr/>
+        </p:nvSpPr>
+        <p:spPr>
+          <a:xfrm>
+            <a:off x="548640" y="1965960"/>
+            <a:ext cx="10972800" cy="640080"/>
+          </a:xfrm>
+          <a:prstGeom prst="roundRect">
+            <a:avLst>
+              <a:gd name="adj" fmla="val 10000"/>
+            </a:avLst>
+          </a:prstGeom>
+          <a:solidFill>
+            <a:srgbClr val="EEE8FA"/>
+          </a:solidFill>
+          <a:ln>
+            <a:noFill/>
+          </a:ln>
+          <a:effectLst/>
+        </p:spPr>
+        <p:style>
+          <a:lnRef idx="1">
+            <a:schemeClr val="accent1"/>
+          </a:lnRef>
+          <a:fillRef idx="3">
+            <a:schemeClr val="accent1"/>
+          </a:fillRef>
+          <a:effectRef idx="2">
+            <a:schemeClr val="accent1"/>
+          </a:effectRef>
+          <a:fontRef idx="minor">
+            <a:schemeClr val="lt1"/>
+          </a:fontRef>
+        </p:style>
+        <p:txBody>
+          <a:bodyPr rtlCol="0" anchor="ctr"/>
+          <a:lstStyle/>
+          <a:p>
+            <a:pPr algn="ctr"/>
+          </a:p>
+        </p:txBody>
+      </p:sp>
+      <p:sp>
+        <p:nvSpPr>
+          <p:cNvPr id="9" name="TextBox 8"/>
+          <p:cNvSpPr txBox="1"/>
+          <p:nvPr/>
+        </p:nvSpPr>
+        <p:spPr>
+          <a:xfrm>
+            <a:off x="868680" y="2084831"/>
+            <a:ext cx="10332720" cy="411480"/>
+          </a:xfrm>
+          <a:prstGeom prst="rect">
+            <a:avLst/>
+          </a:prstGeom>
+          <a:noFill/>
+        </p:spPr>
+        <p:txBody>
+          <a:bodyPr wrap="square" anchor="t">
+            <a:spAutoFit/>
+          </a:bodyPr>
+          <a:lstStyle/>
+          <a:p>
+            <a:pPr algn="l"/>
+            <a:r>
+              <a:rPr sz="1400" b="0">
+                <a:solidFill>
+                  <a:srgbClr val="121018"/>
+                </a:solidFill>
+                <a:latin typeface="DIN Next LT W23"/>
+                <a:ea typeface="DIN Next LT W23"/>
+                <a:cs typeface="DIN Next LT W23"/>
+              </a:rPr>
+              <a:t>Goal: understand what a neuron computes and why stacking layers enables hierarchical features.</a:t>
+            </a:r>
+          </a:p>
+        </p:txBody>
+      </p:sp>
+      <p:sp>
+        <p:nvSpPr>
+          <p:cNvPr id="10" name="Rounded Rectangle 9"/>
+          <p:cNvSpPr/>
+          <p:nvPr/>
+        </p:nvSpPr>
+        <p:spPr>
+          <a:xfrm>
+            <a:off x="548640" y="2743200"/>
+            <a:ext cx="10972800" cy="1417320"/>
+          </a:xfrm>
+          <a:prstGeom prst="roundRect">
+            <a:avLst>
+              <a:gd name="adj" fmla="val 10000"/>
+            </a:avLst>
+          </a:prstGeom>
+          <a:solidFill>
+            <a:srgbClr val="EEE8FA"/>
+          </a:solidFill>
+          <a:ln>
+            <a:noFill/>
+          </a:ln>
+          <a:effectLst/>
+        </p:spPr>
+        <p:style>
+          <a:lnRef idx="1">
+            <a:schemeClr val="accent1"/>
+          </a:lnRef>
+          <a:fillRef idx="3">
+            <a:schemeClr val="accent1"/>
+          </a:fillRef>
+          <a:effectRef idx="2">
+            <a:schemeClr val="accent1"/>
+          </a:effectRef>
+          <a:fontRef idx="minor">
+            <a:schemeClr val="lt1"/>
+          </a:fontRef>
+        </p:style>
+        <p:txBody>
+          <a:bodyPr rtlCol="0" anchor="ctr"/>
+          <a:lstStyle/>
+          <a:p>
+            <a:pPr algn="ctr"/>
+          </a:p>
+        </p:txBody>
+      </p:sp>
+      <p:pic>
+        <p:nvPicPr>
+          <p:cNvPr id="11" name="Picture 10" descr="f-a72afc9ad6284967.png"/>
+          <p:cNvPicPr>
+            <a:picLocks noChangeAspect="1"/>
+          </p:cNvPicPr>
+          <p:nvPr/>
+        </p:nvPicPr>
+        <p:blipFill>
+          <a:blip r:embed="rId3"/>
+          <a:stretch>
+            <a:fillRect/>
+          </a:stretch>
+        </p:blipFill>
+        <p:spPr>
+          <a:xfrm>
+            <a:off x="4415917" y="2852928"/>
+            <a:ext cx="3238246" cy="868680"/>
+          </a:xfrm>
+          <a:prstGeom prst="rect">
+            <a:avLst/>
+          </a:prstGeom>
+        </p:spPr>
+      </p:pic>
+      <p:sp>
+        <p:nvSpPr>
+          <p:cNvPr id="12" name="TextBox 11"/>
+          <p:cNvSpPr txBox="1"/>
+          <p:nvPr/>
+        </p:nvSpPr>
+        <p:spPr>
+          <a:xfrm>
+            <a:off x="914400" y="3840480"/>
+            <a:ext cx="10241280" cy="256032"/>
+          </a:xfrm>
+          <a:prstGeom prst="rect">
+            <a:avLst/>
+          </a:prstGeom>
+          <a:noFill/>
+        </p:spPr>
+        <p:txBody>
+          <a:bodyPr wrap="square" anchor="t">
+            <a:spAutoFit/>
+          </a:bodyPr>
+          <a:lstStyle/>
+          <a:p>
+            <a:pPr algn="ctr"/>
+            <a:r>
+              <a:rPr sz="1200" b="0">
+                <a:solidFill>
+                  <a:srgbClr val="5A5470"/>
+                </a:solidFill>
+                <a:latin typeface="DIN Next LT W23"/>
+                <a:ea typeface="DIN Next LT W23"/>
+                <a:cs typeface="DIN Next LT W23"/>
+              </a:rPr>
+              <a:t>Exit check: explain this — and why nonlinearity is required between layers.</a:t>
+            </a:r>
+          </a:p>
+        </p:txBody>
+      </p:sp>
+      <p:sp>
+        <p:nvSpPr>
+          <p:cNvPr id="13" name="TextBox 12"/>
+          <p:cNvSpPr txBox="1"/>
+          <p:nvPr/>
+        </p:nvSpPr>
+        <p:spPr>
+          <a:xfrm>
+            <a:off x="548640" y="4270248"/>
+            <a:ext cx="320040" cy="384048"/>
+          </a:xfrm>
+          <a:prstGeom prst="rect">
+            <a:avLst/>
+          </a:prstGeom>
+          <a:noFill/>
+        </p:spPr>
+        <p:txBody>
+          <a:bodyPr wrap="square" anchor="t">
+            <a:spAutoFit/>
+          </a:bodyPr>
+          <a:lstStyle/>
+          <a:p>
+            <a:pPr algn="l"/>
+            <a:r>
+              <a:rPr sz="1500" b="0">
+                <a:solidFill>
+                  <a:srgbClr val="9E59CD"/>
+                </a:solidFill>
+                <a:latin typeface="DIN Next LT W23"/>
+                <a:ea typeface="DIN Next LT W23"/>
+                <a:cs typeface="DIN Next LT W23"/>
+              </a:rPr>
+              <a:t>–</a:t>
+            </a:r>
+          </a:p>
+        </p:txBody>
+      </p:sp>
+      <p:sp>
+        <p:nvSpPr>
+          <p:cNvPr id="14" name="TextBox 13"/>
+          <p:cNvSpPr txBox="1"/>
+          <p:nvPr/>
+        </p:nvSpPr>
+        <p:spPr>
+          <a:xfrm>
+            <a:off x="914400" y="4270248"/>
+            <a:ext cx="9875519" cy="384048"/>
+          </a:xfrm>
+          <a:prstGeom prst="rect">
+            <a:avLst/>
+          </a:prstGeom>
+          <a:noFill/>
+        </p:spPr>
+        <p:txBody>
+          <a:bodyPr wrap="square" anchor="t">
+            <a:spAutoFit/>
+          </a:bodyPr>
+          <a:lstStyle/>
+          <a:p>
+            <a:pPr algn="l"/>
+            <a:r>
+              <a:rPr sz="1500" b="0">
+                <a:solidFill>
+                  <a:srgbClr val="121018"/>
+                </a:solidFill>
+                <a:latin typeface="DIN Next LT W23"/>
+                <a:ea typeface="DIN Next LT W23"/>
+                <a:cs typeface="DIN Next LT W23"/>
+              </a:rPr>
+              <a:t>Topics: perceptron, activations, MLP, forward propagation, and loss functions.</a:t>
+            </a:r>
+          </a:p>
+        </p:txBody>
+      </p:sp>
+      <p:sp>
+        <p:nvSpPr>
+          <p:cNvPr id="15" name="TextBox 14"/>
+          <p:cNvSpPr txBox="1"/>
+          <p:nvPr/>
+        </p:nvSpPr>
+        <p:spPr>
+          <a:xfrm>
+            <a:off x="548640" y="4782312"/>
+            <a:ext cx="320040" cy="384048"/>
+          </a:xfrm>
+          <a:prstGeom prst="rect">
+            <a:avLst/>
+          </a:prstGeom>
+          <a:noFill/>
+        </p:spPr>
+        <p:txBody>
+          <a:bodyPr wrap="square" anchor="t">
+            <a:spAutoFit/>
+          </a:bodyPr>
+          <a:lstStyle/>
+          <a:p>
+            <a:pPr algn="l"/>
+            <a:r>
+              <a:rPr sz="1500" b="0">
+                <a:solidFill>
+                  <a:srgbClr val="9E59CD"/>
+                </a:solidFill>
+                <a:latin typeface="DIN Next LT W23"/>
+                <a:ea typeface="DIN Next LT W23"/>
+                <a:cs typeface="DIN Next LT W23"/>
+              </a:rPr>
+              <a:t>–</a:t>
+            </a:r>
+          </a:p>
+        </p:txBody>
+      </p:sp>
+      <p:sp>
+        <p:nvSpPr>
+          <p:cNvPr id="16" name="TextBox 15"/>
+          <p:cNvSpPr txBox="1"/>
+          <p:nvPr/>
+        </p:nvSpPr>
+        <p:spPr>
+          <a:xfrm>
+            <a:off x="914400" y="4782312"/>
+            <a:ext cx="9875519" cy="384048"/>
+          </a:xfrm>
+          <a:prstGeom prst="rect">
+            <a:avLst/>
+          </a:prstGeom>
+          <a:noFill/>
+        </p:spPr>
+        <p:txBody>
+          <a:bodyPr wrap="square" anchor="t">
+            <a:spAutoFit/>
+          </a:bodyPr>
+          <a:lstStyle/>
+          <a:p>
+            <a:pPr algn="l"/>
+            <a:r>
+              <a:rPr sz="1500" b="0">
+                <a:solidFill>
+                  <a:srgbClr val="121018"/>
+                </a:solidFill>
+                <a:latin typeface="DIN Next LT W23"/>
+                <a:ea typeface="DIN Next LT W23"/>
+                <a:cs typeface="DIN Next LT W23"/>
+              </a:rPr>
+              <a:t>Stacking layers builds hierarchical features only if a nonlinearity sits between them.</a:t>
+            </a:r>
+          </a:p>
+        </p:txBody>
+      </p:sp>
+      <p:sp>
+        <p:nvSpPr>
+          <p:cNvPr id="17" name="Rectangle 16"/>
+          <p:cNvSpPr/>
+          <p:nvPr/>
+        </p:nvSpPr>
+        <p:spPr>
+          <a:xfrm>
+            <a:off x="548640" y="6446520"/>
+            <a:ext cx="11064240" cy="10972"/>
+          </a:xfrm>
+          <a:prstGeom prst="rect">
+            <a:avLst/>
+          </a:prstGeom>
+          <a:solidFill>
+            <a:srgbClr val="5234B7"/>
+          </a:solidFill>
+          <a:ln>
+            <a:noFill/>
+          </a:ln>
+          <a:effectLst/>
+        </p:spPr>
+        <p:style>
+          <a:lnRef idx="1">
+            <a:schemeClr val="accent1"/>
+          </a:lnRef>
+          <a:fillRef idx="3">
+            <a:schemeClr val="accent1"/>
+          </a:fillRef>
+          <a:effectRef idx="2">
+            <a:schemeClr val="accent1"/>
+          </a:effectRef>
+          <a:fontRef idx="minor">
+            <a:schemeClr val="lt1"/>
+          </a:fontRef>
+        </p:style>
+        <p:txBody>
+          <a:bodyPr rtlCol="0" anchor="ctr"/>
+          <a:lstStyle/>
+          <a:p>
+            <a:pPr algn="ctr"/>
+          </a:p>
+        </p:txBody>
+      </p:sp>
+      <p:sp>
+        <p:nvSpPr>
+          <p:cNvPr id="18" name="TextBox 17"/>
+          <p:cNvSpPr txBox="1"/>
+          <p:nvPr/>
+        </p:nvSpPr>
+        <p:spPr>
+          <a:xfrm>
+            <a:off x="548640" y="6510528"/>
+            <a:ext cx="2743200" cy="256032"/>
+          </a:xfrm>
+          <a:prstGeom prst="rect">
+            <a:avLst/>
+          </a:prstGeom>
+          <a:noFill/>
+        </p:spPr>
+        <p:txBody>
+          <a:bodyPr wrap="square" anchor="t">
+            <a:spAutoFit/>
+          </a:bodyPr>
+          <a:lstStyle/>
+          <a:p>
+            <a:pPr algn="l"/>
+            <a:r>
+              <a:rPr sz="1100" b="1">
+                <a:solidFill>
+                  <a:srgbClr val="5234B7"/>
+                </a:solidFill>
+                <a:latin typeface="DIN Next LT W23"/>
+                <a:ea typeface="DIN Next LT W23"/>
+                <a:cs typeface="DIN Next LT W23"/>
+              </a:rPr>
+              <a:t>ETRA</a:t>
+            </a:r>
+          </a:p>
+        </p:txBody>
+      </p:sp>
+      <p:sp>
+        <p:nvSpPr>
+          <p:cNvPr id="19" name="TextBox 18"/>
+          <p:cNvSpPr txBox="1"/>
+          <p:nvPr/>
+        </p:nvSpPr>
+        <p:spPr>
+          <a:xfrm>
+            <a:off x="9601200" y="6510528"/>
+            <a:ext cx="2011680" cy="256032"/>
+          </a:xfrm>
+          <a:prstGeom prst="rect">
+            <a:avLst/>
+          </a:prstGeom>
+          <a:noFill/>
+        </p:spPr>
+        <p:txBody>
+          <a:bodyPr wrap="square" anchor="t">
+            <a:spAutoFit/>
+          </a:bodyPr>
+          <a:lstStyle/>
+          <a:p>
+            <a:pPr algn="r"/>
+            <a:r>
+              <a:rPr sz="1100" b="0">
+                <a:solidFill>
+                  <a:srgbClr val="5A5470"/>
+                </a:solidFill>
+                <a:latin typeface="DIN Next LT W23"/>
+                <a:ea typeface="DIN Next LT W23"/>
+                <a:cs typeface="DIN Next LT W23"/>
+              </a:rPr>
+              <a:t>07  /  78</a:t>
+            </a:r>
+          </a:p>
+        </p:txBody>
+      </p:sp>
+    </p:spTree>
+  </p:cSld>
+  <p:clrMapOvr>
+    <a:masterClrMapping/>
+  </p:clrMapOvr>
+</p:sld>
+</file>
+
+<file path=ppt/slides/slide70.xml><?xml version="1.0" encoding="utf-8"?>
 <p:sld xmlns:a="http://schemas.openxmlformats.org/drawingml/2006/main" xmlns:p="http://schemas.openxmlformats.org/presentationml/2006/main" xmlns:r="http://schemas.openxmlformats.org/officeDocument/2006/relationships">
   <p:cSld>
     <p:bg>
@@ -45034,7 +46310,7 @@
                 <a:ea typeface="DIN Next LT W23"/>
                 <a:cs typeface="DIN Next LT W23"/>
               </a:rPr>
-              <a:t>69  /  77</a:t>
+              <a:t>70  /  78</a:t>
             </a:r>
           </a:p>
         </p:txBody>
@@ -45047,7 +46323,7 @@
 </p:sld>
 </file>
 
-<file path=ppt/slides/slide7.xml><?xml version="1.0" encoding="utf-8"?>
+<file path=ppt/slides/slide71.xml><?xml version="1.0" encoding="utf-8"?>
 <p:sld xmlns:a="http://schemas.openxmlformats.org/drawingml/2006/main" xmlns:p="http://schemas.openxmlformats.org/presentationml/2006/main" xmlns:r="http://schemas.openxmlformats.org/officeDocument/2006/relationships">
   <p:cSld>
     <p:bg>
@@ -45246,7 +46522,7 @@
                 <a:ea typeface="DIN Next LT W23"/>
                 <a:cs typeface="DIN Next LT W23"/>
               </a:rPr>
-              <a:t>Phase 1: Foundations &amp; Neural Core</a:t>
+              <a:t>Regularization: Dropout, Weight Decay, and Early Stopping</a:t>
             </a:r>
           </a:p>
         </p:txBody>
@@ -45283,7 +46559,7 @@
                 <a:ea typeface="DIN Next LT W23"/>
                 <a:cs typeface="DIN Next LT W23"/>
               </a:rPr>
-              <a:t>Why depth, neurons, and forward pass</a:t>
+              <a:t>Constrain Capacity to Prevent Overfitting</a:t>
             </a:r>
           </a:p>
         </p:txBody>
@@ -45296,8 +46572,8 @@
         </p:nvSpPr>
         <p:spPr>
           <a:xfrm>
-            <a:off x="548640" y="1965960"/>
-            <a:ext cx="10972800" cy="640080"/>
+            <a:off x="548640" y="2011680"/>
+            <a:ext cx="5760720" cy="1097280"/>
           </a:xfrm>
           <a:prstGeom prst="roundRect">
             <a:avLst>
@@ -45342,23 +46618,23 @@
         </p:nvSpPr>
         <p:spPr>
           <a:xfrm>
-            <a:off x="868680" y="2084831"/>
-            <a:ext cx="10332720" cy="411480"/>
-          </a:xfrm>
-          <a:prstGeom prst="rect">
-            <a:avLst/>
-          </a:prstGeom>
-          <a:noFill/>
-        </p:spPr>
-        <p:txBody>
-          <a:bodyPr wrap="square" anchor="t">
-            <a:spAutoFit/>
-          </a:bodyPr>
-          <a:lstStyle/>
-          <a:p>
-            <a:pPr algn="l"/>
-            <a:r>
-              <a:rPr sz="1400" b="0">
+            <a:off x="822960" y="2148840"/>
+            <a:ext cx="5303520" cy="868680"/>
+          </a:xfrm>
+          <a:prstGeom prst="rect">
+            <a:avLst/>
+          </a:prstGeom>
+          <a:noFill/>
+        </p:spPr>
+        <p:txBody>
+          <a:bodyPr wrap="square" anchor="t">
+            <a:spAutoFit/>
+          </a:bodyPr>
+          <a:lstStyle/>
+          <a:p>
+            <a:pPr algn="l"/>
+            <a:r>
+              <a:rPr sz="1300" b="0">
                 <a:solidFill>
                   <a:srgbClr val="121018"/>
                 </a:solidFill>
@@ -45366,21 +46642,95 @@
                 <a:ea typeface="DIN Next LT W23"/>
                 <a:cs typeface="DIN Next LT W23"/>
               </a:rPr>
-              <a:t>Goal: understand what a neuron computes and why stacking layers enables hierarchical features.</a:t>
-            </a:r>
-          </a:p>
-        </p:txBody>
-      </p:sp>
-      <p:sp>
-        <p:nvSpPr>
-          <p:cNvPr id="10" name="Rounded Rectangle 9"/>
+              <a:t>Dropout</a:t>
+            </a:r>
+          </a:p>
+        </p:txBody>
+      </p:sp>
+      <p:sp>
+        <p:nvSpPr>
+          <p:cNvPr id="10" name="TextBox 9"/>
+          <p:cNvSpPr txBox="1"/>
+          <p:nvPr/>
+        </p:nvSpPr>
+        <p:spPr>
+          <a:xfrm>
+            <a:off x="548640" y="3246120"/>
+            <a:ext cx="320040" cy="384048"/>
+          </a:xfrm>
+          <a:prstGeom prst="rect">
+            <a:avLst/>
+          </a:prstGeom>
+          <a:noFill/>
+        </p:spPr>
+        <p:txBody>
+          <a:bodyPr wrap="square" anchor="t">
+            <a:spAutoFit/>
+          </a:bodyPr>
+          <a:lstStyle/>
+          <a:p>
+            <a:pPr algn="l"/>
+            <a:r>
+              <a:rPr sz="1300" b="0">
+                <a:solidFill>
+                  <a:srgbClr val="9E59CD"/>
+                </a:solidFill>
+                <a:latin typeface="DIN Next LT W23"/>
+                <a:ea typeface="DIN Next LT W23"/>
+                <a:cs typeface="DIN Next LT W23"/>
+              </a:rPr>
+              <a:t>–</a:t>
+            </a:r>
+          </a:p>
+        </p:txBody>
+      </p:sp>
+      <p:sp>
+        <p:nvSpPr>
+          <p:cNvPr id="11" name="TextBox 10"/>
+          <p:cNvSpPr txBox="1"/>
+          <p:nvPr/>
+        </p:nvSpPr>
+        <p:spPr>
+          <a:xfrm>
+            <a:off x="914400" y="3246120"/>
+            <a:ext cx="4754879" cy="384048"/>
+          </a:xfrm>
+          <a:prstGeom prst="rect">
+            <a:avLst/>
+          </a:prstGeom>
+          <a:noFill/>
+        </p:spPr>
+        <p:txBody>
+          <a:bodyPr wrap="square" anchor="t">
+            <a:spAutoFit/>
+          </a:bodyPr>
+          <a:lstStyle/>
+          <a:p>
+            <a:pPr algn="l"/>
+            <a:r>
+              <a:rPr sz="1300" b="0">
+                <a:solidFill>
+                  <a:srgbClr val="121018"/>
+                </a:solidFill>
+                <a:latin typeface="DIN Next LT W23"/>
+                <a:ea typeface="DIN Next LT W23"/>
+                <a:cs typeface="DIN Next LT W23"/>
+              </a:rPr>
+              <a:t>Randomly zero out hidden units during training with probability p (e.g., 0.2-0.5) so neurons cannot co-adapt.</a:t>
+            </a:r>
+          </a:p>
+        </p:txBody>
+      </p:sp>
+      <p:sp>
+        <p:nvSpPr>
+          <p:cNvPr id="12" name="Rounded Rectangle 11"/>
           <p:cNvSpPr/>
           <p:nvPr/>
         </p:nvSpPr>
         <p:spPr>
           <a:xfrm>
-            <a:off x="548640" y="2743200"/>
-            <a:ext cx="10972800" cy="1417320"/>
+            <a:off x="6537960" y="2011680"/>
+            <a:ext cx="4983480" cy="3794760"/>
           </a:xfrm>
           <a:prstGeom prst="roundRect">
             <a:avLst>
@@ -45419,7 +46769,7 @@
       </p:sp>
       <p:pic>
         <p:nvPicPr>
-          <p:cNvPr id="11" name="Picture 10" descr="f-a72afc9ad6284967.png"/>
+          <p:cNvPr id="13" name="Picture 12" descr="dropout.png"/>
           <p:cNvPicPr>
             <a:picLocks noChangeAspect="1"/>
           </p:cNvPicPr>
@@ -45433,8 +46783,8 @@
         </p:blipFill>
         <p:spPr>
           <a:xfrm>
-            <a:off x="4415917" y="2852928"/>
-            <a:ext cx="3238246" cy="868680"/>
+            <a:off x="6720840" y="2194560"/>
+            <a:ext cx="4617720" cy="2156371"/>
           </a:xfrm>
           <a:prstGeom prst="rect">
             <a:avLst/>
@@ -45443,192 +46793,7 @@
       </p:pic>
       <p:sp>
         <p:nvSpPr>
-          <p:cNvPr id="12" name="TextBox 11"/>
-          <p:cNvSpPr txBox="1"/>
-          <p:nvPr/>
-        </p:nvSpPr>
-        <p:spPr>
-          <a:xfrm>
-            <a:off x="914400" y="3840480"/>
-            <a:ext cx="10241280" cy="256032"/>
-          </a:xfrm>
-          <a:prstGeom prst="rect">
-            <a:avLst/>
-          </a:prstGeom>
-          <a:noFill/>
-        </p:spPr>
-        <p:txBody>
-          <a:bodyPr wrap="square" anchor="t">
-            <a:spAutoFit/>
-          </a:bodyPr>
-          <a:lstStyle/>
-          <a:p>
-            <a:pPr algn="ctr"/>
-            <a:r>
-              <a:rPr sz="1200" b="0">
-                <a:solidFill>
-                  <a:srgbClr val="5A5470"/>
-                </a:solidFill>
-                <a:latin typeface="DIN Next LT W23"/>
-                <a:ea typeface="DIN Next LT W23"/>
-                <a:cs typeface="DIN Next LT W23"/>
-              </a:rPr>
-              <a:t>Exit check: explain this — and why nonlinearity is required between layers.</a:t>
-            </a:r>
-          </a:p>
-        </p:txBody>
-      </p:sp>
-      <p:sp>
-        <p:nvSpPr>
-          <p:cNvPr id="13" name="TextBox 12"/>
-          <p:cNvSpPr txBox="1"/>
-          <p:nvPr/>
-        </p:nvSpPr>
-        <p:spPr>
-          <a:xfrm>
-            <a:off x="548640" y="4270248"/>
-            <a:ext cx="320040" cy="384048"/>
-          </a:xfrm>
-          <a:prstGeom prst="rect">
-            <a:avLst/>
-          </a:prstGeom>
-          <a:noFill/>
-        </p:spPr>
-        <p:txBody>
-          <a:bodyPr wrap="square" anchor="t">
-            <a:spAutoFit/>
-          </a:bodyPr>
-          <a:lstStyle/>
-          <a:p>
-            <a:pPr algn="l"/>
-            <a:r>
-              <a:rPr sz="1500" b="0">
-                <a:solidFill>
-                  <a:srgbClr val="9E59CD"/>
-                </a:solidFill>
-                <a:latin typeface="DIN Next LT W23"/>
-                <a:ea typeface="DIN Next LT W23"/>
-                <a:cs typeface="DIN Next LT W23"/>
-              </a:rPr>
-              <a:t>–</a:t>
-            </a:r>
-          </a:p>
-        </p:txBody>
-      </p:sp>
-      <p:sp>
-        <p:nvSpPr>
-          <p:cNvPr id="14" name="TextBox 13"/>
-          <p:cNvSpPr txBox="1"/>
-          <p:nvPr/>
-        </p:nvSpPr>
-        <p:spPr>
-          <a:xfrm>
-            <a:off x="914400" y="4270248"/>
-            <a:ext cx="9875519" cy="384048"/>
-          </a:xfrm>
-          <a:prstGeom prst="rect">
-            <a:avLst/>
-          </a:prstGeom>
-          <a:noFill/>
-        </p:spPr>
-        <p:txBody>
-          <a:bodyPr wrap="square" anchor="t">
-            <a:spAutoFit/>
-          </a:bodyPr>
-          <a:lstStyle/>
-          <a:p>
-            <a:pPr algn="l"/>
-            <a:r>
-              <a:rPr sz="1500" b="0">
-                <a:solidFill>
-                  <a:srgbClr val="121018"/>
-                </a:solidFill>
-                <a:latin typeface="DIN Next LT W23"/>
-                <a:ea typeface="DIN Next LT W23"/>
-                <a:cs typeface="DIN Next LT W23"/>
-              </a:rPr>
-              <a:t>Topics: perceptron, activations, MLP, forward propagation, and loss functions.</a:t>
-            </a:r>
-          </a:p>
-        </p:txBody>
-      </p:sp>
-      <p:sp>
-        <p:nvSpPr>
-          <p:cNvPr id="15" name="TextBox 14"/>
-          <p:cNvSpPr txBox="1"/>
-          <p:nvPr/>
-        </p:nvSpPr>
-        <p:spPr>
-          <a:xfrm>
-            <a:off x="548640" y="4782312"/>
-            <a:ext cx="320040" cy="384048"/>
-          </a:xfrm>
-          <a:prstGeom prst="rect">
-            <a:avLst/>
-          </a:prstGeom>
-          <a:noFill/>
-        </p:spPr>
-        <p:txBody>
-          <a:bodyPr wrap="square" anchor="t">
-            <a:spAutoFit/>
-          </a:bodyPr>
-          <a:lstStyle/>
-          <a:p>
-            <a:pPr algn="l"/>
-            <a:r>
-              <a:rPr sz="1500" b="0">
-                <a:solidFill>
-                  <a:srgbClr val="9E59CD"/>
-                </a:solidFill>
-                <a:latin typeface="DIN Next LT W23"/>
-                <a:ea typeface="DIN Next LT W23"/>
-                <a:cs typeface="DIN Next LT W23"/>
-              </a:rPr>
-              <a:t>–</a:t>
-            </a:r>
-          </a:p>
-        </p:txBody>
-      </p:sp>
-      <p:sp>
-        <p:nvSpPr>
-          <p:cNvPr id="16" name="TextBox 15"/>
-          <p:cNvSpPr txBox="1"/>
-          <p:nvPr/>
-        </p:nvSpPr>
-        <p:spPr>
-          <a:xfrm>
-            <a:off x="914400" y="4782312"/>
-            <a:ext cx="9875519" cy="384048"/>
-          </a:xfrm>
-          <a:prstGeom prst="rect">
-            <a:avLst/>
-          </a:prstGeom>
-          <a:noFill/>
-        </p:spPr>
-        <p:txBody>
-          <a:bodyPr wrap="square" anchor="t">
-            <a:spAutoFit/>
-          </a:bodyPr>
-          <a:lstStyle/>
-          <a:p>
-            <a:pPr algn="l"/>
-            <a:r>
-              <a:rPr sz="1500" b="0">
-                <a:solidFill>
-                  <a:srgbClr val="121018"/>
-                </a:solidFill>
-                <a:latin typeface="DIN Next LT W23"/>
-                <a:ea typeface="DIN Next LT W23"/>
-                <a:cs typeface="DIN Next LT W23"/>
-              </a:rPr>
-              <a:t>Stacking layers builds hierarchical features only if a nonlinearity sits between them.</a:t>
-            </a:r>
-          </a:p>
-        </p:txBody>
-      </p:sp>
-      <p:sp>
-        <p:nvSpPr>
-          <p:cNvPr id="17" name="Rectangle 16"/>
+          <p:cNvPr id="14" name="Rectangle 13"/>
           <p:cNvSpPr/>
           <p:nvPr/>
         </p:nvSpPr>
@@ -45672,7 +46837,7 @@
       </p:sp>
       <p:sp>
         <p:nvSpPr>
-          <p:cNvPr id="18" name="TextBox 17"/>
+          <p:cNvPr id="15" name="TextBox 14"/>
           <p:cNvSpPr txBox="1"/>
           <p:nvPr/>
         </p:nvSpPr>
@@ -45709,7 +46874,7 @@
       </p:sp>
       <p:sp>
         <p:nvSpPr>
-          <p:cNvPr id="19" name="TextBox 18"/>
+          <p:cNvPr id="16" name="TextBox 15"/>
           <p:cNvSpPr txBox="1"/>
           <p:nvPr/>
         </p:nvSpPr>
@@ -45739,7 +46904,7 @@
                 <a:ea typeface="DIN Next LT W23"/>
                 <a:cs typeface="DIN Next LT W23"/>
               </a:rPr>
-              <a:t>07  /  77</a:t>
+              <a:t>71  /  78</a:t>
             </a:r>
           </a:p>
         </p:txBody>
@@ -45752,518 +46917,7 @@
 </p:sld>
 </file>
 
-<file path=ppt/slides/slide70.xml><?xml version="1.0" encoding="utf-8"?>
-<p:sld xmlns:a="http://schemas.openxmlformats.org/drawingml/2006/main" xmlns:p="http://schemas.openxmlformats.org/presentationml/2006/main" xmlns:r="http://schemas.openxmlformats.org/officeDocument/2006/relationships">
-  <p:cSld>
-    <p:bg>
-      <p:bgPr>
-        <a:solidFill>
-          <a:srgbClr val="FAF8FF"/>
-        </a:solidFill>
-        <a:effectLst/>
-      </p:bgPr>
-    </p:bg>
-    <p:spTree>
-      <p:nvGrpSpPr>
-        <p:cNvPr id="1" name=""/>
-        <p:cNvGrpSpPr/>
-        <p:nvPr/>
-      </p:nvGrpSpPr>
-      <p:grpSpPr/>
-      <p:sp>
-        <p:nvSpPr>
-          <p:cNvPr id="2" name="Rectangle 1"/>
-          <p:cNvSpPr/>
-          <p:nvPr/>
-        </p:nvSpPr>
-        <p:spPr>
-          <a:xfrm>
-            <a:off x="12136831" y="0"/>
-            <a:ext cx="54864" cy="6858000"/>
-          </a:xfrm>
-          <a:prstGeom prst="rect">
-            <a:avLst/>
-          </a:prstGeom>
-          <a:solidFill>
-            <a:srgbClr val="5234B7"/>
-          </a:solidFill>
-          <a:ln>
-            <a:noFill/>
-          </a:ln>
-          <a:effectLst/>
-        </p:spPr>
-        <p:style>
-          <a:lnRef idx="1">
-            <a:schemeClr val="accent1"/>
-          </a:lnRef>
-          <a:fillRef idx="3">
-            <a:schemeClr val="accent1"/>
-          </a:fillRef>
-          <a:effectRef idx="2">
-            <a:schemeClr val="accent1"/>
-          </a:effectRef>
-          <a:fontRef idx="minor">
-            <a:schemeClr val="lt1"/>
-          </a:fontRef>
-        </p:style>
-        <p:txBody>
-          <a:bodyPr rtlCol="0" anchor="ctr"/>
-          <a:lstStyle/>
-          <a:p>
-            <a:pPr algn="ctr"/>
-          </a:p>
-        </p:txBody>
-      </p:sp>
-      <p:pic>
-        <p:nvPicPr>
-          <p:cNvPr id="3" name="Picture 2" descr="etra-wordmark.png"/>
-          <p:cNvPicPr>
-            <a:picLocks noChangeAspect="1"/>
-          </p:cNvPicPr>
-          <p:nvPr/>
-        </p:nvPicPr>
-        <p:blipFill>
-          <a:blip r:embed="rId2"/>
-          <a:stretch>
-            <a:fillRect/>
-          </a:stretch>
-        </p:blipFill>
-        <p:spPr>
-          <a:xfrm>
-            <a:off x="10561320" y="411480"/>
-            <a:ext cx="1206201" cy="320040"/>
-          </a:xfrm>
-          <a:prstGeom prst="rect">
-            <a:avLst/>
-          </a:prstGeom>
-        </p:spPr>
-      </p:pic>
-      <p:sp>
-        <p:nvSpPr>
-          <p:cNvPr id="4" name="TextBox 3"/>
-          <p:cNvSpPr txBox="1"/>
-          <p:nvPr/>
-        </p:nvSpPr>
-        <p:spPr>
-          <a:xfrm>
-            <a:off x="548640" y="438912"/>
-            <a:ext cx="7772400" cy="274320"/>
-          </a:xfrm>
-          <a:prstGeom prst="rect">
-            <a:avLst/>
-          </a:prstGeom>
-          <a:noFill/>
-        </p:spPr>
-        <p:txBody>
-          <a:bodyPr wrap="square" anchor="t">
-            <a:spAutoFit/>
-          </a:bodyPr>
-          <a:lstStyle/>
-          <a:p>
-            <a:pPr algn="l"/>
-            <a:r>
-              <a:rPr sz="1200" b="0">
-                <a:solidFill>
-                  <a:srgbClr val="5A5470"/>
-                </a:solidFill>
-                <a:latin typeface="DIN Next LT W23"/>
-                <a:ea typeface="DIN Next LT W23"/>
-                <a:cs typeface="DIN Next LT W23"/>
-              </a:rPr>
-              <a:t>S07  ·  Deep Learning</a:t>
-            </a:r>
-          </a:p>
-        </p:txBody>
-      </p:sp>
-      <p:sp>
-        <p:nvSpPr>
-          <p:cNvPr id="5" name="Rectangle 4"/>
-          <p:cNvSpPr/>
-          <p:nvPr/>
-        </p:nvSpPr>
-        <p:spPr>
-          <a:xfrm>
-            <a:off x="548640" y="822960"/>
-            <a:ext cx="11064240" cy="10972"/>
-          </a:xfrm>
-          <a:prstGeom prst="rect">
-            <a:avLst/>
-          </a:prstGeom>
-          <a:solidFill>
-            <a:srgbClr val="E4DCF4"/>
-          </a:solidFill>
-          <a:ln>
-            <a:noFill/>
-          </a:ln>
-          <a:effectLst/>
-        </p:spPr>
-        <p:style>
-          <a:lnRef idx="1">
-            <a:schemeClr val="accent1"/>
-          </a:lnRef>
-          <a:fillRef idx="3">
-            <a:schemeClr val="accent1"/>
-          </a:fillRef>
-          <a:effectRef idx="2">
-            <a:schemeClr val="accent1"/>
-          </a:effectRef>
-          <a:fontRef idx="minor">
-            <a:schemeClr val="lt1"/>
-          </a:fontRef>
-        </p:style>
-        <p:txBody>
-          <a:bodyPr rtlCol="0" anchor="ctr"/>
-          <a:lstStyle/>
-          <a:p>
-            <a:pPr algn="ctr"/>
-          </a:p>
-        </p:txBody>
-      </p:sp>
-      <p:sp>
-        <p:nvSpPr>
-          <p:cNvPr id="6" name="TextBox 5"/>
-          <p:cNvSpPr txBox="1"/>
-          <p:nvPr/>
-        </p:nvSpPr>
-        <p:spPr>
-          <a:xfrm>
-            <a:off x="548640" y="1051560"/>
-            <a:ext cx="10241280" cy="594360"/>
-          </a:xfrm>
-          <a:prstGeom prst="rect">
-            <a:avLst/>
-          </a:prstGeom>
-          <a:noFill/>
-        </p:spPr>
-        <p:txBody>
-          <a:bodyPr wrap="square" anchor="t">
-            <a:spAutoFit/>
-          </a:bodyPr>
-          <a:lstStyle/>
-          <a:p>
-            <a:pPr algn="l"/>
-            <a:r>
-              <a:rPr sz="3200" b="1">
-                <a:solidFill>
-                  <a:srgbClr val="5234B7"/>
-                </a:solidFill>
-                <a:latin typeface="DIN Next LT W23"/>
-                <a:ea typeface="DIN Next LT W23"/>
-                <a:cs typeface="DIN Next LT W23"/>
-              </a:rPr>
-              <a:t>Regularization: Dropout, Weight Decay, Early Stopping</a:t>
-            </a:r>
-          </a:p>
-        </p:txBody>
-      </p:sp>
-      <p:sp>
-        <p:nvSpPr>
-          <p:cNvPr id="7" name="TextBox 6"/>
-          <p:cNvSpPr txBox="1"/>
-          <p:nvPr/>
-        </p:nvSpPr>
-        <p:spPr>
-          <a:xfrm>
-            <a:off x="548640" y="1600200"/>
-            <a:ext cx="10241280" cy="365760"/>
-          </a:xfrm>
-          <a:prstGeom prst="rect">
-            <a:avLst/>
-          </a:prstGeom>
-          <a:noFill/>
-        </p:spPr>
-        <p:txBody>
-          <a:bodyPr wrap="square" anchor="t">
-            <a:spAutoFit/>
-          </a:bodyPr>
-          <a:lstStyle/>
-          <a:p>
-            <a:pPr algn="l"/>
-            <a:r>
-              <a:rPr sz="1500" b="0">
-                <a:solidFill>
-                  <a:srgbClr val="5A5470"/>
-                </a:solidFill>
-                <a:latin typeface="DIN Next LT W23"/>
-                <a:ea typeface="DIN Next LT W23"/>
-                <a:cs typeface="DIN Next LT W23"/>
-              </a:rPr>
-              <a:t>Constrain Capacity to Generalize</a:t>
-            </a:r>
-          </a:p>
-        </p:txBody>
-      </p:sp>
-      <p:sp>
-        <p:nvSpPr>
-          <p:cNvPr id="8" name="TextBox 7"/>
-          <p:cNvSpPr txBox="1"/>
-          <p:nvPr/>
-        </p:nvSpPr>
-        <p:spPr>
-          <a:xfrm>
-            <a:off x="548640" y="1920240"/>
-            <a:ext cx="10972800" cy="320040"/>
-          </a:xfrm>
-          <a:prstGeom prst="rect">
-            <a:avLst/>
-          </a:prstGeom>
-          <a:noFill/>
-        </p:spPr>
-        <p:txBody>
-          <a:bodyPr wrap="square" anchor="t">
-            <a:spAutoFit/>
-          </a:bodyPr>
-          <a:lstStyle/>
-          <a:p>
-            <a:pPr algn="l"/>
-            <a:r>
-              <a:rPr sz="1300" b="0">
-                <a:solidFill>
-                  <a:srgbClr val="5A5470"/>
-                </a:solidFill>
-                <a:latin typeface="DIN Next LT W23"/>
-                <a:ea typeface="DIN Next LT W23"/>
-                <a:cs typeface="DIN Next LT W23"/>
-              </a:rPr>
-              <a:t>Regularization is how we stop the network from memorizing noise.</a:t>
-            </a:r>
-          </a:p>
-        </p:txBody>
-      </p:sp>
-      <p:sp>
-        <p:nvSpPr>
-          <p:cNvPr id="9" name="Rounded Rectangle 8"/>
-          <p:cNvSpPr/>
-          <p:nvPr/>
-        </p:nvSpPr>
-        <p:spPr>
-          <a:xfrm>
-            <a:off x="548640" y="2240280"/>
-            <a:ext cx="10972800" cy="3977639"/>
-          </a:xfrm>
-          <a:prstGeom prst="roundRect">
-            <a:avLst>
-              <a:gd name="adj" fmla="val 10000"/>
-            </a:avLst>
-          </a:prstGeom>
-          <a:solidFill>
-            <a:srgbClr val="EEE8FA"/>
-          </a:solidFill>
-          <a:ln>
-            <a:noFill/>
-          </a:ln>
-          <a:effectLst/>
-        </p:spPr>
-        <p:style>
-          <a:lnRef idx="1">
-            <a:schemeClr val="accent1"/>
-          </a:lnRef>
-          <a:fillRef idx="3">
-            <a:schemeClr val="accent1"/>
-          </a:fillRef>
-          <a:effectRef idx="2">
-            <a:schemeClr val="accent1"/>
-          </a:effectRef>
-          <a:fontRef idx="minor">
-            <a:schemeClr val="lt1"/>
-          </a:fontRef>
-        </p:style>
-        <p:txBody>
-          <a:bodyPr rtlCol="0" anchor="ctr"/>
-          <a:lstStyle/>
-          <a:p>
-            <a:pPr algn="ctr"/>
-          </a:p>
-        </p:txBody>
-      </p:sp>
-      <p:pic>
-        <p:nvPicPr>
-          <p:cNvPr id="10" name="Picture 9" descr="dropout.png"/>
-          <p:cNvPicPr>
-            <a:picLocks noChangeAspect="1"/>
-          </p:cNvPicPr>
-          <p:nvPr/>
-        </p:nvPicPr>
-        <p:blipFill>
-          <a:blip r:embed="rId3"/>
-          <a:stretch>
-            <a:fillRect/>
-          </a:stretch>
-        </p:blipFill>
-        <p:spPr>
-          <a:xfrm>
-            <a:off x="2069837" y="2377440"/>
-            <a:ext cx="7930404" cy="3703320"/>
-          </a:xfrm>
-          <a:prstGeom prst="rect">
-            <a:avLst/>
-          </a:prstGeom>
-        </p:spPr>
-      </p:pic>
-      <p:sp>
-        <p:nvSpPr>
-          <p:cNvPr id="11" name="TextBox 10"/>
-          <p:cNvSpPr txBox="1"/>
-          <p:nvPr/>
-        </p:nvSpPr>
-        <p:spPr>
-          <a:xfrm>
-            <a:off x="548640" y="6309360"/>
-            <a:ext cx="10972800" cy="228600"/>
-          </a:xfrm>
-          <a:prstGeom prst="rect">
-            <a:avLst/>
-          </a:prstGeom>
-          <a:noFill/>
-        </p:spPr>
-        <p:txBody>
-          <a:bodyPr wrap="square" anchor="t">
-            <a:spAutoFit/>
-          </a:bodyPr>
-          <a:lstStyle/>
-          <a:p>
-            <a:pPr algn="l"/>
-            <a:r>
-              <a:rPr sz="1100" b="0">
-                <a:solidFill>
-                  <a:srgbClr val="5A5470"/>
-                </a:solidFill>
-                <a:latin typeface="DIN Next LT W23"/>
-                <a:ea typeface="DIN Next LT W23"/>
-                <a:cs typeface="DIN Next LT W23"/>
-              </a:rPr>
-              <a:t>Turn dropout OFF at inference (model.eval()) so predictions are deterministic.</a:t>
-            </a:r>
-          </a:p>
-        </p:txBody>
-      </p:sp>
-      <p:sp>
-        <p:nvSpPr>
-          <p:cNvPr id="12" name="Rectangle 11"/>
-          <p:cNvSpPr/>
-          <p:nvPr/>
-        </p:nvSpPr>
-        <p:spPr>
-          <a:xfrm>
-            <a:off x="548640" y="6446520"/>
-            <a:ext cx="11064240" cy="10972"/>
-          </a:xfrm>
-          <a:prstGeom prst="rect">
-            <a:avLst/>
-          </a:prstGeom>
-          <a:solidFill>
-            <a:srgbClr val="5234B7"/>
-          </a:solidFill>
-          <a:ln>
-            <a:noFill/>
-          </a:ln>
-          <a:effectLst/>
-        </p:spPr>
-        <p:style>
-          <a:lnRef idx="1">
-            <a:schemeClr val="accent1"/>
-          </a:lnRef>
-          <a:fillRef idx="3">
-            <a:schemeClr val="accent1"/>
-          </a:fillRef>
-          <a:effectRef idx="2">
-            <a:schemeClr val="accent1"/>
-          </a:effectRef>
-          <a:fontRef idx="minor">
-            <a:schemeClr val="lt1"/>
-          </a:fontRef>
-        </p:style>
-        <p:txBody>
-          <a:bodyPr rtlCol="0" anchor="ctr"/>
-          <a:lstStyle/>
-          <a:p>
-            <a:pPr algn="ctr"/>
-          </a:p>
-        </p:txBody>
-      </p:sp>
-      <p:sp>
-        <p:nvSpPr>
-          <p:cNvPr id="13" name="TextBox 12"/>
-          <p:cNvSpPr txBox="1"/>
-          <p:nvPr/>
-        </p:nvSpPr>
-        <p:spPr>
-          <a:xfrm>
-            <a:off x="548640" y="6510528"/>
-            <a:ext cx="2743200" cy="256032"/>
-          </a:xfrm>
-          <a:prstGeom prst="rect">
-            <a:avLst/>
-          </a:prstGeom>
-          <a:noFill/>
-        </p:spPr>
-        <p:txBody>
-          <a:bodyPr wrap="square" anchor="t">
-            <a:spAutoFit/>
-          </a:bodyPr>
-          <a:lstStyle/>
-          <a:p>
-            <a:pPr algn="l"/>
-            <a:r>
-              <a:rPr sz="1100" b="1">
-                <a:solidFill>
-                  <a:srgbClr val="5234B7"/>
-                </a:solidFill>
-                <a:latin typeface="DIN Next LT W23"/>
-                <a:ea typeface="DIN Next LT W23"/>
-                <a:cs typeface="DIN Next LT W23"/>
-              </a:rPr>
-              <a:t>ETRA</a:t>
-            </a:r>
-          </a:p>
-        </p:txBody>
-      </p:sp>
-      <p:sp>
-        <p:nvSpPr>
-          <p:cNvPr id="14" name="TextBox 13"/>
-          <p:cNvSpPr txBox="1"/>
-          <p:nvPr/>
-        </p:nvSpPr>
-        <p:spPr>
-          <a:xfrm>
-            <a:off x="9601200" y="6510528"/>
-            <a:ext cx="2011680" cy="256032"/>
-          </a:xfrm>
-          <a:prstGeom prst="rect">
-            <a:avLst/>
-          </a:prstGeom>
-          <a:noFill/>
-        </p:spPr>
-        <p:txBody>
-          <a:bodyPr wrap="square" anchor="t">
-            <a:spAutoFit/>
-          </a:bodyPr>
-          <a:lstStyle/>
-          <a:p>
-            <a:pPr algn="r"/>
-            <a:r>
-              <a:rPr sz="1100" b="0">
-                <a:solidFill>
-                  <a:srgbClr val="5A5470"/>
-                </a:solidFill>
-                <a:latin typeface="DIN Next LT W23"/>
-                <a:ea typeface="DIN Next LT W23"/>
-                <a:cs typeface="DIN Next LT W23"/>
-              </a:rPr>
-              <a:t>70  /  77</a:t>
-            </a:r>
-          </a:p>
-        </p:txBody>
-      </p:sp>
-    </p:spTree>
-  </p:cSld>
-  <p:clrMapOvr>
-    <a:masterClrMapping/>
-  </p:clrMapOvr>
-</p:sld>
-</file>
-
-<file path=ppt/slides/slide71.xml><?xml version="1.0" encoding="utf-8"?>
+<file path=ppt/slides/slide72.xml><?xml version="1.0" encoding="utf-8"?>
 <p:sld xmlns:a="http://schemas.openxmlformats.org/drawingml/2006/main" xmlns:p="http://schemas.openxmlformats.org/presentationml/2006/main" xmlns:r="http://schemas.openxmlformats.org/officeDocument/2006/relationships">
   <p:cSld>
     <p:bg>
@@ -47011,749 +47665,7 @@
                 <a:ea typeface="DIN Next LT W23"/>
                 <a:cs typeface="DIN Next LT W23"/>
               </a:rPr>
-              <a:t>71  /  77</a:t>
-            </a:r>
-          </a:p>
-        </p:txBody>
-      </p:sp>
-    </p:spTree>
-  </p:cSld>
-  <p:clrMapOvr>
-    <a:masterClrMapping/>
-  </p:clrMapOvr>
-</p:sld>
-</file>
-
-<file path=ppt/slides/slide72.xml><?xml version="1.0" encoding="utf-8"?>
-<p:sld xmlns:a="http://schemas.openxmlformats.org/drawingml/2006/main" xmlns:p="http://schemas.openxmlformats.org/presentationml/2006/main" xmlns:r="http://schemas.openxmlformats.org/officeDocument/2006/relationships">
-  <p:cSld>
-    <p:bg>
-      <p:bgPr>
-        <a:solidFill>
-          <a:srgbClr val="FAF8FF"/>
-        </a:solidFill>
-        <a:effectLst/>
-      </p:bgPr>
-    </p:bg>
-    <p:spTree>
-      <p:nvGrpSpPr>
-        <p:cNvPr id="1" name=""/>
-        <p:cNvGrpSpPr/>
-        <p:nvPr/>
-      </p:nvGrpSpPr>
-      <p:grpSpPr/>
-      <p:sp>
-        <p:nvSpPr>
-          <p:cNvPr id="2" name="Rectangle 1"/>
-          <p:cNvSpPr/>
-          <p:nvPr/>
-        </p:nvSpPr>
-        <p:spPr>
-          <a:xfrm>
-            <a:off x="12136831" y="0"/>
-            <a:ext cx="54864" cy="6858000"/>
-          </a:xfrm>
-          <a:prstGeom prst="rect">
-            <a:avLst/>
-          </a:prstGeom>
-          <a:solidFill>
-            <a:srgbClr val="5234B7"/>
-          </a:solidFill>
-          <a:ln>
-            <a:noFill/>
-          </a:ln>
-          <a:effectLst/>
-        </p:spPr>
-        <p:style>
-          <a:lnRef idx="1">
-            <a:schemeClr val="accent1"/>
-          </a:lnRef>
-          <a:fillRef idx="3">
-            <a:schemeClr val="accent1"/>
-          </a:fillRef>
-          <a:effectRef idx="2">
-            <a:schemeClr val="accent1"/>
-          </a:effectRef>
-          <a:fontRef idx="minor">
-            <a:schemeClr val="lt1"/>
-          </a:fontRef>
-        </p:style>
-        <p:txBody>
-          <a:bodyPr rtlCol="0" anchor="ctr"/>
-          <a:lstStyle/>
-          <a:p>
-            <a:pPr algn="ctr"/>
-          </a:p>
-        </p:txBody>
-      </p:sp>
-      <p:pic>
-        <p:nvPicPr>
-          <p:cNvPr id="3" name="Picture 2" descr="etra-wordmark.png"/>
-          <p:cNvPicPr>
-            <a:picLocks noChangeAspect="1"/>
-          </p:cNvPicPr>
-          <p:nvPr/>
-        </p:nvPicPr>
-        <p:blipFill>
-          <a:blip r:embed="rId2"/>
-          <a:stretch>
-            <a:fillRect/>
-          </a:stretch>
-        </p:blipFill>
-        <p:spPr>
-          <a:xfrm>
-            <a:off x="10561320" y="411480"/>
-            <a:ext cx="1206201" cy="320040"/>
-          </a:xfrm>
-          <a:prstGeom prst="rect">
-            <a:avLst/>
-          </a:prstGeom>
-        </p:spPr>
-      </p:pic>
-      <p:sp>
-        <p:nvSpPr>
-          <p:cNvPr id="4" name="TextBox 3"/>
-          <p:cNvSpPr txBox="1"/>
-          <p:nvPr/>
-        </p:nvSpPr>
-        <p:spPr>
-          <a:xfrm>
-            <a:off x="548640" y="438912"/>
-            <a:ext cx="7772400" cy="274320"/>
-          </a:xfrm>
-          <a:prstGeom prst="rect">
-            <a:avLst/>
-          </a:prstGeom>
-          <a:noFill/>
-        </p:spPr>
-        <p:txBody>
-          <a:bodyPr wrap="square" anchor="t">
-            <a:spAutoFit/>
-          </a:bodyPr>
-          <a:lstStyle/>
-          <a:p>
-            <a:pPr algn="l"/>
-            <a:r>
-              <a:rPr sz="1200" b="0">
-                <a:solidFill>
-                  <a:srgbClr val="5A5470"/>
-                </a:solidFill>
-                <a:latin typeface="DIN Next LT W23"/>
-                <a:ea typeface="DIN Next LT W23"/>
-                <a:cs typeface="DIN Next LT W23"/>
-              </a:rPr>
-              <a:t>S07  ·  Deep Learning</a:t>
-            </a:r>
-          </a:p>
-        </p:txBody>
-      </p:sp>
-      <p:sp>
-        <p:nvSpPr>
-          <p:cNvPr id="5" name="Rectangle 4"/>
-          <p:cNvSpPr/>
-          <p:nvPr/>
-        </p:nvSpPr>
-        <p:spPr>
-          <a:xfrm>
-            <a:off x="548640" y="822960"/>
-            <a:ext cx="11064240" cy="10972"/>
-          </a:xfrm>
-          <a:prstGeom prst="rect">
-            <a:avLst/>
-          </a:prstGeom>
-          <a:solidFill>
-            <a:srgbClr val="E4DCF4"/>
-          </a:solidFill>
-          <a:ln>
-            <a:noFill/>
-          </a:ln>
-          <a:effectLst/>
-        </p:spPr>
-        <p:style>
-          <a:lnRef idx="1">
-            <a:schemeClr val="accent1"/>
-          </a:lnRef>
-          <a:fillRef idx="3">
-            <a:schemeClr val="accent1"/>
-          </a:fillRef>
-          <a:effectRef idx="2">
-            <a:schemeClr val="accent1"/>
-          </a:effectRef>
-          <a:fontRef idx="minor">
-            <a:schemeClr val="lt1"/>
-          </a:fontRef>
-        </p:style>
-        <p:txBody>
-          <a:bodyPr rtlCol="0" anchor="ctr"/>
-          <a:lstStyle/>
-          <a:p>
-            <a:pPr algn="ctr"/>
-          </a:p>
-        </p:txBody>
-      </p:sp>
-      <p:sp>
-        <p:nvSpPr>
-          <p:cNvPr id="6" name="TextBox 5"/>
-          <p:cNvSpPr txBox="1"/>
-          <p:nvPr/>
-        </p:nvSpPr>
-        <p:spPr>
-          <a:xfrm>
-            <a:off x="548640" y="1051560"/>
-            <a:ext cx="10241280" cy="594360"/>
-          </a:xfrm>
-          <a:prstGeom prst="rect">
-            <a:avLst/>
-          </a:prstGeom>
-          <a:noFill/>
-        </p:spPr>
-        <p:txBody>
-          <a:bodyPr wrap="square" anchor="t">
-            <a:spAutoFit/>
-          </a:bodyPr>
-          <a:lstStyle/>
-          <a:p>
-            <a:pPr algn="l"/>
-            <a:r>
-              <a:rPr sz="3200" b="1">
-                <a:solidFill>
-                  <a:srgbClr val="5234B7"/>
-                </a:solidFill>
-                <a:latin typeface="DIN Next LT W23"/>
-                <a:ea typeface="DIN Next LT W23"/>
-                <a:cs typeface="DIN Next LT W23"/>
-              </a:rPr>
-              <a:t>Sequential Data &amp; Vanilla RNNs</a:t>
-            </a:r>
-          </a:p>
-        </p:txBody>
-      </p:sp>
-      <p:sp>
-        <p:nvSpPr>
-          <p:cNvPr id="7" name="TextBox 6"/>
-          <p:cNvSpPr txBox="1"/>
-          <p:nvPr/>
-        </p:nvSpPr>
-        <p:spPr>
-          <a:xfrm>
-            <a:off x="548640" y="1600200"/>
-            <a:ext cx="10241280" cy="365760"/>
-          </a:xfrm>
-          <a:prstGeom prst="rect">
-            <a:avLst/>
-          </a:prstGeom>
-          <a:noFill/>
-        </p:spPr>
-        <p:txBody>
-          <a:bodyPr wrap="square" anchor="t">
-            <a:spAutoFit/>
-          </a:bodyPr>
-          <a:lstStyle/>
-          <a:p>
-            <a:pPr algn="l"/>
-            <a:r>
-              <a:rPr sz="1500" b="0">
-                <a:solidFill>
-                  <a:srgbClr val="5A5470"/>
-                </a:solidFill>
-                <a:latin typeface="DIN Next LT W23"/>
-                <a:ea typeface="DIN Next LT W23"/>
-                <a:cs typeface="DIN Next LT W23"/>
-              </a:rPr>
-              <a:t>One Transition, Unfolded Through Time</a:t>
-            </a:r>
-          </a:p>
-        </p:txBody>
-      </p:sp>
-      <p:sp>
-        <p:nvSpPr>
-          <p:cNvPr id="8" name="Rounded Rectangle 7"/>
-          <p:cNvSpPr/>
-          <p:nvPr/>
-        </p:nvSpPr>
-        <p:spPr>
-          <a:xfrm>
-            <a:off x="548640" y="1965960"/>
-            <a:ext cx="10972800" cy="640080"/>
-          </a:xfrm>
-          <a:prstGeom prst="roundRect">
-            <a:avLst>
-              <a:gd name="adj" fmla="val 10000"/>
-            </a:avLst>
-          </a:prstGeom>
-          <a:solidFill>
-            <a:srgbClr val="EEE8FA"/>
-          </a:solidFill>
-          <a:ln>
-            <a:noFill/>
-          </a:ln>
-          <a:effectLst/>
-        </p:spPr>
-        <p:style>
-          <a:lnRef idx="1">
-            <a:schemeClr val="accent1"/>
-          </a:lnRef>
-          <a:fillRef idx="3">
-            <a:schemeClr val="accent1"/>
-          </a:fillRef>
-          <a:effectRef idx="2">
-            <a:schemeClr val="accent1"/>
-          </a:effectRef>
-          <a:fontRef idx="minor">
-            <a:schemeClr val="lt1"/>
-          </a:fontRef>
-        </p:style>
-        <p:txBody>
-          <a:bodyPr rtlCol="0" anchor="ctr"/>
-          <a:lstStyle/>
-          <a:p>
-            <a:pPr algn="ctr"/>
-          </a:p>
-        </p:txBody>
-      </p:sp>
-      <p:sp>
-        <p:nvSpPr>
-          <p:cNvPr id="9" name="TextBox 8"/>
-          <p:cNvSpPr txBox="1"/>
-          <p:nvPr/>
-        </p:nvSpPr>
-        <p:spPr>
-          <a:xfrm>
-            <a:off x="868680" y="2084831"/>
-            <a:ext cx="10332720" cy="411480"/>
-          </a:xfrm>
-          <a:prstGeom prst="rect">
-            <a:avLst/>
-          </a:prstGeom>
-          <a:noFill/>
-        </p:spPr>
-        <p:txBody>
-          <a:bodyPr wrap="square" anchor="t">
-            <a:spAutoFit/>
-          </a:bodyPr>
-          <a:lstStyle/>
-          <a:p>
-            <a:pPr algn="l"/>
-            <a:r>
-              <a:rPr sz="1400" b="0">
-                <a:solidFill>
-                  <a:srgbClr val="121018"/>
-                </a:solidFill>
-                <a:latin typeface="DIN Next LT W23"/>
-                <a:ea typeface="DIN Next LT W23"/>
-                <a:cs typeface="DIN Next LT W23"/>
-              </a:rPr>
-              <a:t>Text, audio, and sensors have order. Shuffling them destroys meaning.</a:t>
-            </a:r>
-          </a:p>
-        </p:txBody>
-      </p:sp>
-      <p:sp>
-        <p:nvSpPr>
-          <p:cNvPr id="10" name="Rounded Rectangle 9"/>
-          <p:cNvSpPr/>
-          <p:nvPr/>
-        </p:nvSpPr>
-        <p:spPr>
-          <a:xfrm>
-            <a:off x="548640" y="2743200"/>
-            <a:ext cx="10972800" cy="1417320"/>
-          </a:xfrm>
-          <a:prstGeom prst="roundRect">
-            <a:avLst>
-              <a:gd name="adj" fmla="val 10000"/>
-            </a:avLst>
-          </a:prstGeom>
-          <a:solidFill>
-            <a:srgbClr val="EEE8FA"/>
-          </a:solidFill>
-          <a:ln>
-            <a:noFill/>
-          </a:ln>
-          <a:effectLst/>
-        </p:spPr>
-        <p:style>
-          <a:lnRef idx="1">
-            <a:schemeClr val="accent1"/>
-          </a:lnRef>
-          <a:fillRef idx="3">
-            <a:schemeClr val="accent1"/>
-          </a:fillRef>
-          <a:effectRef idx="2">
-            <a:schemeClr val="accent1"/>
-          </a:effectRef>
-          <a:fontRef idx="minor">
-            <a:schemeClr val="lt1"/>
-          </a:fontRef>
-        </p:style>
-        <p:txBody>
-          <a:bodyPr rtlCol="0" anchor="ctr"/>
-          <a:lstStyle/>
-          <a:p>
-            <a:pPr algn="ctr"/>
-          </a:p>
-        </p:txBody>
-      </p:sp>
-      <p:pic>
-        <p:nvPicPr>
-          <p:cNvPr id="11" name="Picture 10" descr="f-2d62af7528050520.png"/>
-          <p:cNvPicPr>
-            <a:picLocks noChangeAspect="1"/>
-          </p:cNvPicPr>
-          <p:nvPr/>
-        </p:nvPicPr>
-        <p:blipFill>
-          <a:blip r:embed="rId3"/>
-          <a:stretch>
-            <a:fillRect/>
-          </a:stretch>
-        </p:blipFill>
-        <p:spPr>
-          <a:xfrm>
-            <a:off x="2529632" y="2852928"/>
-            <a:ext cx="7010814" cy="868680"/>
-          </a:xfrm>
-          <a:prstGeom prst="rect">
-            <a:avLst/>
-          </a:prstGeom>
-        </p:spPr>
-      </p:pic>
-      <p:sp>
-        <p:nvSpPr>
-          <p:cNvPr id="12" name="TextBox 11"/>
-          <p:cNvSpPr txBox="1"/>
-          <p:nvPr/>
-        </p:nvSpPr>
-        <p:spPr>
-          <a:xfrm>
-            <a:off x="914400" y="3840480"/>
-            <a:ext cx="10241280" cy="256032"/>
-          </a:xfrm>
-          <a:prstGeom prst="rect">
-            <a:avLst/>
-          </a:prstGeom>
-          <a:noFill/>
-        </p:spPr>
-        <p:txBody>
-          <a:bodyPr wrap="square" anchor="t">
-            <a:spAutoFit/>
-          </a:bodyPr>
-          <a:lstStyle/>
-          <a:p>
-            <a:pPr algn="ctr"/>
-            <a:r>
-              <a:rPr sz="1200" b="0">
-                <a:solidFill>
-                  <a:srgbClr val="5A5470"/>
-                </a:solidFill>
-                <a:latin typeface="DIN Next LT W23"/>
-                <a:ea typeface="DIN Next LT W23"/>
-                <a:cs typeface="DIN Next LT W23"/>
-              </a:rPr>
-              <a:t>Same weights at every timestep  ·  hₜ is a running memory of the past</a:t>
-            </a:r>
-          </a:p>
-        </p:txBody>
-      </p:sp>
-      <p:sp>
-        <p:nvSpPr>
-          <p:cNvPr id="13" name="TextBox 12"/>
-          <p:cNvSpPr txBox="1"/>
-          <p:nvPr/>
-        </p:nvSpPr>
-        <p:spPr>
-          <a:xfrm>
-            <a:off x="548640" y="4270248"/>
-            <a:ext cx="320040" cy="384048"/>
-          </a:xfrm>
-          <a:prstGeom prst="rect">
-            <a:avLst/>
-          </a:prstGeom>
-          <a:noFill/>
-        </p:spPr>
-        <p:txBody>
-          <a:bodyPr wrap="square" anchor="t">
-            <a:spAutoFit/>
-          </a:bodyPr>
-          <a:lstStyle/>
-          <a:p>
-            <a:pPr algn="l"/>
-            <a:r>
-              <a:rPr sz="1300" b="0">
-                <a:solidFill>
-                  <a:srgbClr val="9E59CD"/>
-                </a:solidFill>
-                <a:latin typeface="DIN Next LT W23"/>
-                <a:ea typeface="DIN Next LT W23"/>
-                <a:cs typeface="DIN Next LT W23"/>
-              </a:rPr>
-              <a:t>–</a:t>
-            </a:r>
-          </a:p>
-        </p:txBody>
-      </p:sp>
-      <p:sp>
-        <p:nvSpPr>
-          <p:cNvPr id="14" name="TextBox 13"/>
-          <p:cNvSpPr txBox="1"/>
-          <p:nvPr/>
-        </p:nvSpPr>
-        <p:spPr>
-          <a:xfrm>
-            <a:off x="914400" y="4270248"/>
-            <a:ext cx="9875519" cy="384048"/>
-          </a:xfrm>
-          <a:prstGeom prst="rect">
-            <a:avLst/>
-          </a:prstGeom>
-          <a:noFill/>
-        </p:spPr>
-        <p:txBody>
-          <a:bodyPr wrap="square" anchor="t">
-            <a:spAutoFit/>
-          </a:bodyPr>
-          <a:lstStyle/>
-          <a:p>
-            <a:pPr algn="l"/>
-            <a:r>
-              <a:rPr sz="1300" b="0">
-                <a:solidFill>
-                  <a:srgbClr val="121018"/>
-                </a:solidFill>
-                <a:latin typeface="DIN Next LT W23"/>
-                <a:ea typeface="DIN Next LT W23"/>
-                <a:cs typeface="DIN Next LT W23"/>
-              </a:rPr>
-              <a:t>Parameter sharing across time is efficient — but long sequences multiply Jacobians.</a:t>
-            </a:r>
-          </a:p>
-        </p:txBody>
-      </p:sp>
-      <p:sp>
-        <p:nvSpPr>
-          <p:cNvPr id="15" name="TextBox 14"/>
-          <p:cNvSpPr txBox="1"/>
-          <p:nvPr/>
-        </p:nvSpPr>
-        <p:spPr>
-          <a:xfrm>
-            <a:off x="548640" y="4690872"/>
-            <a:ext cx="320040" cy="384048"/>
-          </a:xfrm>
-          <a:prstGeom prst="rect">
-            <a:avLst/>
-          </a:prstGeom>
-          <a:noFill/>
-        </p:spPr>
-        <p:txBody>
-          <a:bodyPr wrap="square" anchor="t">
-            <a:spAutoFit/>
-          </a:bodyPr>
-          <a:lstStyle/>
-          <a:p>
-            <a:pPr algn="l"/>
-            <a:r>
-              <a:rPr sz="1300" b="0">
-                <a:solidFill>
-                  <a:srgbClr val="9E59CD"/>
-                </a:solidFill>
-                <a:latin typeface="DIN Next LT W23"/>
-                <a:ea typeface="DIN Next LT W23"/>
-                <a:cs typeface="DIN Next LT W23"/>
-              </a:rPr>
-              <a:t>–</a:t>
-            </a:r>
-          </a:p>
-        </p:txBody>
-      </p:sp>
-      <p:sp>
-        <p:nvSpPr>
-          <p:cNvPr id="16" name="TextBox 15"/>
-          <p:cNvSpPr txBox="1"/>
-          <p:nvPr/>
-        </p:nvSpPr>
-        <p:spPr>
-          <a:xfrm>
-            <a:off x="914400" y="4690872"/>
-            <a:ext cx="9875519" cy="384048"/>
-          </a:xfrm>
-          <a:prstGeom prst="rect">
-            <a:avLst/>
-          </a:prstGeom>
-          <a:noFill/>
-        </p:spPr>
-        <p:txBody>
-          <a:bodyPr wrap="square" anchor="t">
-            <a:spAutoFit/>
-          </a:bodyPr>
-          <a:lstStyle/>
-          <a:p>
-            <a:pPr algn="l"/>
-            <a:r>
-              <a:rPr sz="1300" b="0">
-                <a:solidFill>
-                  <a:srgbClr val="121018"/>
-                </a:solidFill>
-                <a:latin typeface="DIN Next LT W23"/>
-                <a:ea typeface="DIN Next LT W23"/>
-                <a:cs typeface="DIN Next LT W23"/>
-              </a:rPr>
-              <a:t>Vanilla RNNs struggle with long-range dependencies (vanishing / exploding gradients).</a:t>
-            </a:r>
-          </a:p>
-        </p:txBody>
-      </p:sp>
-      <p:sp>
-        <p:nvSpPr>
-          <p:cNvPr id="17" name="TextBox 16"/>
-          <p:cNvSpPr txBox="1"/>
-          <p:nvPr/>
-        </p:nvSpPr>
-        <p:spPr>
-          <a:xfrm>
-            <a:off x="548640" y="5989320"/>
-            <a:ext cx="10972800" cy="228600"/>
-          </a:xfrm>
-          <a:prstGeom prst="rect">
-            <a:avLst/>
-          </a:prstGeom>
-          <a:noFill/>
-        </p:spPr>
-        <p:txBody>
-          <a:bodyPr wrap="square" anchor="t">
-            <a:spAutoFit/>
-          </a:bodyPr>
-          <a:lstStyle/>
-          <a:p>
-            <a:pPr algn="l"/>
-            <a:r>
-              <a:rPr sz="1200" b="0">
-                <a:solidFill>
-                  <a:srgbClr val="5A5470"/>
-                </a:solidFill>
-                <a:latin typeface="DIN Next LT W23"/>
-                <a:ea typeface="DIN Next LT W23"/>
-                <a:cs typeface="DIN Next LT W23"/>
-              </a:rPr>
-              <a:t>Backprop through 50 steps ≈ multiplying a matrix 50 times.</a:t>
-            </a:r>
-          </a:p>
-        </p:txBody>
-      </p:sp>
-      <p:sp>
-        <p:nvSpPr>
-          <p:cNvPr id="18" name="Rectangle 17"/>
-          <p:cNvSpPr/>
-          <p:nvPr/>
-        </p:nvSpPr>
-        <p:spPr>
-          <a:xfrm>
-            <a:off x="548640" y="6446520"/>
-            <a:ext cx="11064240" cy="10972"/>
-          </a:xfrm>
-          <a:prstGeom prst="rect">
-            <a:avLst/>
-          </a:prstGeom>
-          <a:solidFill>
-            <a:srgbClr val="5234B7"/>
-          </a:solidFill>
-          <a:ln>
-            <a:noFill/>
-          </a:ln>
-          <a:effectLst/>
-        </p:spPr>
-        <p:style>
-          <a:lnRef idx="1">
-            <a:schemeClr val="accent1"/>
-          </a:lnRef>
-          <a:fillRef idx="3">
-            <a:schemeClr val="accent1"/>
-          </a:fillRef>
-          <a:effectRef idx="2">
-            <a:schemeClr val="accent1"/>
-          </a:effectRef>
-          <a:fontRef idx="minor">
-            <a:schemeClr val="lt1"/>
-          </a:fontRef>
-        </p:style>
-        <p:txBody>
-          <a:bodyPr rtlCol="0" anchor="ctr"/>
-          <a:lstStyle/>
-          <a:p>
-            <a:pPr algn="ctr"/>
-          </a:p>
-        </p:txBody>
-      </p:sp>
-      <p:sp>
-        <p:nvSpPr>
-          <p:cNvPr id="19" name="TextBox 18"/>
-          <p:cNvSpPr txBox="1"/>
-          <p:nvPr/>
-        </p:nvSpPr>
-        <p:spPr>
-          <a:xfrm>
-            <a:off x="548640" y="6510528"/>
-            <a:ext cx="2743200" cy="256032"/>
-          </a:xfrm>
-          <a:prstGeom prst="rect">
-            <a:avLst/>
-          </a:prstGeom>
-          <a:noFill/>
-        </p:spPr>
-        <p:txBody>
-          <a:bodyPr wrap="square" anchor="t">
-            <a:spAutoFit/>
-          </a:bodyPr>
-          <a:lstStyle/>
-          <a:p>
-            <a:pPr algn="l"/>
-            <a:r>
-              <a:rPr sz="1100" b="1">
-                <a:solidFill>
-                  <a:srgbClr val="5234B7"/>
-                </a:solidFill>
-                <a:latin typeface="DIN Next LT W23"/>
-                <a:ea typeface="DIN Next LT W23"/>
-                <a:cs typeface="DIN Next LT W23"/>
-              </a:rPr>
-              <a:t>ETRA</a:t>
-            </a:r>
-          </a:p>
-        </p:txBody>
-      </p:sp>
-      <p:sp>
-        <p:nvSpPr>
-          <p:cNvPr id="20" name="TextBox 19"/>
-          <p:cNvSpPr txBox="1"/>
-          <p:nvPr/>
-        </p:nvSpPr>
-        <p:spPr>
-          <a:xfrm>
-            <a:off x="9601200" y="6510528"/>
-            <a:ext cx="2011680" cy="256032"/>
-          </a:xfrm>
-          <a:prstGeom prst="rect">
-            <a:avLst/>
-          </a:prstGeom>
-          <a:noFill/>
-        </p:spPr>
-        <p:txBody>
-          <a:bodyPr wrap="square" anchor="t">
-            <a:spAutoFit/>
-          </a:bodyPr>
-          <a:lstStyle/>
-          <a:p>
-            <a:pPr algn="r"/>
-            <a:r>
-              <a:rPr sz="1100" b="0">
-                <a:solidFill>
-                  <a:srgbClr val="5A5470"/>
-                </a:solidFill>
-                <a:latin typeface="DIN Next LT W23"/>
-                <a:ea typeface="DIN Next LT W23"/>
-                <a:cs typeface="DIN Next LT W23"/>
-              </a:rPr>
-              <a:t>72  /  77</a:t>
+              <a:t>72  /  78</a:t>
             </a:r>
           </a:p>
         </p:txBody>
@@ -47965,7 +47877,7 @@
                 <a:ea typeface="DIN Next LT W23"/>
                 <a:cs typeface="DIN Next LT W23"/>
               </a:rPr>
-              <a:t>RNN Unfolded Through Time</a:t>
+              <a:t>Sequential Data &amp; Vanilla RNNs</a:t>
             </a:r>
           </a:p>
         </p:txBody>
@@ -48002,7 +47914,7 @@
                 <a:ea typeface="DIN Next LT W23"/>
                 <a:cs typeface="DIN Next LT W23"/>
               </a:rPr>
-              <a:t>Rolled Cell = Shared Weights Across Steps</a:t>
+              <a:t>One Transition, Unfolded Through Time</a:t>
             </a:r>
           </a:p>
         </p:txBody>
@@ -48016,7 +47928,7 @@
         <p:spPr>
           <a:xfrm>
             <a:off x="548640" y="1965960"/>
-            <a:ext cx="10972800" cy="3977639"/>
+            <a:ext cx="10972800" cy="640080"/>
           </a:xfrm>
           <a:prstGeom prst="roundRect">
             <a:avLst>
@@ -48053,9 +47965,92 @@
           </a:p>
         </p:txBody>
       </p:sp>
+      <p:sp>
+        <p:nvSpPr>
+          <p:cNvPr id="9" name="TextBox 8"/>
+          <p:cNvSpPr txBox="1"/>
+          <p:nvPr/>
+        </p:nvSpPr>
+        <p:spPr>
+          <a:xfrm>
+            <a:off x="868680" y="2084831"/>
+            <a:ext cx="10332720" cy="411480"/>
+          </a:xfrm>
+          <a:prstGeom prst="rect">
+            <a:avLst/>
+          </a:prstGeom>
+          <a:noFill/>
+        </p:spPr>
+        <p:txBody>
+          <a:bodyPr wrap="square" anchor="t">
+            <a:spAutoFit/>
+          </a:bodyPr>
+          <a:lstStyle/>
+          <a:p>
+            <a:pPr algn="l"/>
+            <a:r>
+              <a:rPr sz="1400" b="0">
+                <a:solidFill>
+                  <a:srgbClr val="121018"/>
+                </a:solidFill>
+                <a:latin typeface="DIN Next LT W23"/>
+                <a:ea typeface="DIN Next LT W23"/>
+                <a:cs typeface="DIN Next LT W23"/>
+              </a:rPr>
+              <a:t>Text, audio, and sensors have order. Shuffling them destroys meaning.</a:t>
+            </a:r>
+          </a:p>
+        </p:txBody>
+      </p:sp>
+      <p:sp>
+        <p:nvSpPr>
+          <p:cNvPr id="10" name="Rounded Rectangle 9"/>
+          <p:cNvSpPr/>
+          <p:nvPr/>
+        </p:nvSpPr>
+        <p:spPr>
+          <a:xfrm>
+            <a:off x="548640" y="2743200"/>
+            <a:ext cx="10972800" cy="1417320"/>
+          </a:xfrm>
+          <a:prstGeom prst="roundRect">
+            <a:avLst>
+              <a:gd name="adj" fmla="val 10000"/>
+            </a:avLst>
+          </a:prstGeom>
+          <a:solidFill>
+            <a:srgbClr val="EEE8FA"/>
+          </a:solidFill>
+          <a:ln>
+            <a:noFill/>
+          </a:ln>
+          <a:effectLst/>
+        </p:spPr>
+        <p:style>
+          <a:lnRef idx="1">
+            <a:schemeClr val="accent1"/>
+          </a:lnRef>
+          <a:fillRef idx="3">
+            <a:schemeClr val="accent1"/>
+          </a:fillRef>
+          <a:effectRef idx="2">
+            <a:schemeClr val="accent1"/>
+          </a:effectRef>
+          <a:fontRef idx="minor">
+            <a:schemeClr val="lt1"/>
+          </a:fontRef>
+        </p:style>
+        <p:txBody>
+          <a:bodyPr rtlCol="0" anchor="ctr"/>
+          <a:lstStyle/>
+          <a:p>
+            <a:pPr algn="ctr"/>
+          </a:p>
+        </p:txBody>
+      </p:sp>
       <p:pic>
         <p:nvPicPr>
-          <p:cNvPr id="9" name="Picture 8" descr="rnn-unfold.png"/>
+          <p:cNvPr id="11" name="Picture 10" descr="f-2d62af7528050520.png"/>
           <p:cNvPicPr>
             <a:picLocks noChangeAspect="1"/>
           </p:cNvPicPr>
@@ -48069,8 +48064,8 @@
         </p:blipFill>
         <p:spPr>
           <a:xfrm>
-            <a:off x="1177732" y="2103120"/>
-            <a:ext cx="9714615" cy="3703320"/>
+            <a:off x="2529632" y="2852928"/>
+            <a:ext cx="7010814" cy="868680"/>
           </a:xfrm>
           <a:prstGeom prst="rect">
             <a:avLst/>
@@ -48079,13 +48074,198 @@
       </p:pic>
       <p:sp>
         <p:nvSpPr>
-          <p:cNvPr id="10" name="TextBox 9"/>
-          <p:cNvSpPr txBox="1"/>
-          <p:nvPr/>
-        </p:nvSpPr>
-        <p:spPr>
-          <a:xfrm>
-            <a:off x="548640" y="6309360"/>
+          <p:cNvPr id="12" name="TextBox 11"/>
+          <p:cNvSpPr txBox="1"/>
+          <p:nvPr/>
+        </p:nvSpPr>
+        <p:spPr>
+          <a:xfrm>
+            <a:off x="914400" y="3840480"/>
+            <a:ext cx="10241280" cy="256032"/>
+          </a:xfrm>
+          <a:prstGeom prst="rect">
+            <a:avLst/>
+          </a:prstGeom>
+          <a:noFill/>
+        </p:spPr>
+        <p:txBody>
+          <a:bodyPr wrap="square" anchor="t">
+            <a:spAutoFit/>
+          </a:bodyPr>
+          <a:lstStyle/>
+          <a:p>
+            <a:pPr algn="ctr"/>
+            <a:r>
+              <a:rPr sz="1200" b="0">
+                <a:solidFill>
+                  <a:srgbClr val="5A5470"/>
+                </a:solidFill>
+                <a:latin typeface="DIN Next LT W23"/>
+                <a:ea typeface="DIN Next LT W23"/>
+                <a:cs typeface="DIN Next LT W23"/>
+              </a:rPr>
+              <a:t>Same weights at every timestep  ·  hₜ is a running memory of the past</a:t>
+            </a:r>
+          </a:p>
+        </p:txBody>
+      </p:sp>
+      <p:sp>
+        <p:nvSpPr>
+          <p:cNvPr id="13" name="TextBox 12"/>
+          <p:cNvSpPr txBox="1"/>
+          <p:nvPr/>
+        </p:nvSpPr>
+        <p:spPr>
+          <a:xfrm>
+            <a:off x="548640" y="4270248"/>
+            <a:ext cx="320040" cy="384048"/>
+          </a:xfrm>
+          <a:prstGeom prst="rect">
+            <a:avLst/>
+          </a:prstGeom>
+          <a:noFill/>
+        </p:spPr>
+        <p:txBody>
+          <a:bodyPr wrap="square" anchor="t">
+            <a:spAutoFit/>
+          </a:bodyPr>
+          <a:lstStyle/>
+          <a:p>
+            <a:pPr algn="l"/>
+            <a:r>
+              <a:rPr sz="1300" b="0">
+                <a:solidFill>
+                  <a:srgbClr val="9E59CD"/>
+                </a:solidFill>
+                <a:latin typeface="DIN Next LT W23"/>
+                <a:ea typeface="DIN Next LT W23"/>
+                <a:cs typeface="DIN Next LT W23"/>
+              </a:rPr>
+              <a:t>–</a:t>
+            </a:r>
+          </a:p>
+        </p:txBody>
+      </p:sp>
+      <p:sp>
+        <p:nvSpPr>
+          <p:cNvPr id="14" name="TextBox 13"/>
+          <p:cNvSpPr txBox="1"/>
+          <p:nvPr/>
+        </p:nvSpPr>
+        <p:spPr>
+          <a:xfrm>
+            <a:off x="914400" y="4270248"/>
+            <a:ext cx="9875519" cy="384048"/>
+          </a:xfrm>
+          <a:prstGeom prst="rect">
+            <a:avLst/>
+          </a:prstGeom>
+          <a:noFill/>
+        </p:spPr>
+        <p:txBody>
+          <a:bodyPr wrap="square" anchor="t">
+            <a:spAutoFit/>
+          </a:bodyPr>
+          <a:lstStyle/>
+          <a:p>
+            <a:pPr algn="l"/>
+            <a:r>
+              <a:rPr sz="1300" b="0">
+                <a:solidFill>
+                  <a:srgbClr val="121018"/>
+                </a:solidFill>
+                <a:latin typeface="DIN Next LT W23"/>
+                <a:ea typeface="DIN Next LT W23"/>
+                <a:cs typeface="DIN Next LT W23"/>
+              </a:rPr>
+              <a:t>Parameter sharing across time is efficient — but long sequences multiply Jacobians.</a:t>
+            </a:r>
+          </a:p>
+        </p:txBody>
+      </p:sp>
+      <p:sp>
+        <p:nvSpPr>
+          <p:cNvPr id="15" name="TextBox 14"/>
+          <p:cNvSpPr txBox="1"/>
+          <p:nvPr/>
+        </p:nvSpPr>
+        <p:spPr>
+          <a:xfrm>
+            <a:off x="548640" y="4690872"/>
+            <a:ext cx="320040" cy="384048"/>
+          </a:xfrm>
+          <a:prstGeom prst="rect">
+            <a:avLst/>
+          </a:prstGeom>
+          <a:noFill/>
+        </p:spPr>
+        <p:txBody>
+          <a:bodyPr wrap="square" anchor="t">
+            <a:spAutoFit/>
+          </a:bodyPr>
+          <a:lstStyle/>
+          <a:p>
+            <a:pPr algn="l"/>
+            <a:r>
+              <a:rPr sz="1300" b="0">
+                <a:solidFill>
+                  <a:srgbClr val="9E59CD"/>
+                </a:solidFill>
+                <a:latin typeface="DIN Next LT W23"/>
+                <a:ea typeface="DIN Next LT W23"/>
+                <a:cs typeface="DIN Next LT W23"/>
+              </a:rPr>
+              <a:t>–</a:t>
+            </a:r>
+          </a:p>
+        </p:txBody>
+      </p:sp>
+      <p:sp>
+        <p:nvSpPr>
+          <p:cNvPr id="16" name="TextBox 15"/>
+          <p:cNvSpPr txBox="1"/>
+          <p:nvPr/>
+        </p:nvSpPr>
+        <p:spPr>
+          <a:xfrm>
+            <a:off x="914400" y="4690872"/>
+            <a:ext cx="9875519" cy="384048"/>
+          </a:xfrm>
+          <a:prstGeom prst="rect">
+            <a:avLst/>
+          </a:prstGeom>
+          <a:noFill/>
+        </p:spPr>
+        <p:txBody>
+          <a:bodyPr wrap="square" anchor="t">
+            <a:spAutoFit/>
+          </a:bodyPr>
+          <a:lstStyle/>
+          <a:p>
+            <a:pPr algn="l"/>
+            <a:r>
+              <a:rPr sz="1300" b="0">
+                <a:solidFill>
+                  <a:srgbClr val="121018"/>
+                </a:solidFill>
+                <a:latin typeface="DIN Next LT W23"/>
+                <a:ea typeface="DIN Next LT W23"/>
+                <a:cs typeface="DIN Next LT W23"/>
+              </a:rPr>
+              <a:t>Vanilla RNNs struggle with long-range dependencies (vanishing / exploding gradients).</a:t>
+            </a:r>
+          </a:p>
+        </p:txBody>
+      </p:sp>
+      <p:sp>
+        <p:nvSpPr>
+          <p:cNvPr id="17" name="TextBox 16"/>
+          <p:cNvSpPr txBox="1"/>
+          <p:nvPr/>
+        </p:nvSpPr>
+        <p:spPr>
+          <a:xfrm>
+            <a:off x="548640" y="5989320"/>
             <a:ext cx="10972800" cy="228600"/>
           </a:xfrm>
           <a:prstGeom prst="rect">
@@ -48101,7 +48281,7 @@
           <a:p>
             <a:pPr algn="l"/>
             <a:r>
-              <a:rPr sz="1100" b="0">
+              <a:rPr sz="1200" b="0">
                 <a:solidFill>
                   <a:srgbClr val="5A5470"/>
                 </a:solidFill>
@@ -48109,14 +48289,14 @@
                 <a:ea typeface="DIN Next LT W23"/>
                 <a:cs typeface="DIN Next LT W23"/>
               </a:rPr>
-              <a:t>Cannot fully parallelize timesteps — each hₜ waits on hₜ₋₁.</a:t>
-            </a:r>
-          </a:p>
-        </p:txBody>
-      </p:sp>
-      <p:sp>
-        <p:nvSpPr>
-          <p:cNvPr id="11" name="Rectangle 10"/>
+              <a:t>Backprop through 50 steps ≈ multiplying a matrix 50 times.</a:t>
+            </a:r>
+          </a:p>
+        </p:txBody>
+      </p:sp>
+      <p:sp>
+        <p:nvSpPr>
+          <p:cNvPr id="18" name="Rectangle 17"/>
           <p:cNvSpPr/>
           <p:nvPr/>
         </p:nvSpPr>
@@ -48160,7 +48340,7 @@
       </p:sp>
       <p:sp>
         <p:nvSpPr>
-          <p:cNvPr id="12" name="TextBox 11"/>
+          <p:cNvPr id="19" name="TextBox 18"/>
           <p:cNvSpPr txBox="1"/>
           <p:nvPr/>
         </p:nvSpPr>
@@ -48197,7 +48377,7 @@
       </p:sp>
       <p:sp>
         <p:nvSpPr>
-          <p:cNvPr id="13" name="TextBox 12"/>
+          <p:cNvPr id="20" name="TextBox 19"/>
           <p:cNvSpPr txBox="1"/>
           <p:nvPr/>
         </p:nvSpPr>
@@ -48227,7 +48407,7 @@
                 <a:ea typeface="DIN Next LT W23"/>
                 <a:cs typeface="DIN Next LT W23"/>
               </a:rPr>
-              <a:t>73  /  77</a:t>
+              <a:t>73  /  78</a:t>
             </a:r>
           </a:p>
         </p:txBody>
@@ -48439,7 +48619,7 @@
                 <a:ea typeface="DIN Next LT W23"/>
                 <a:cs typeface="DIN Next LT W23"/>
               </a:rPr>
-              <a:t>LSTM: Gates for Long-Term Memory</a:t>
+              <a:t>RNN Unfolded Through Time</a:t>
             </a:r>
           </a:p>
         </p:txBody>
@@ -48476,57 +48656,20 @@
                 <a:ea typeface="DIN Next LT W23"/>
                 <a:cs typeface="DIN Next LT W23"/>
               </a:rPr>
-              <a:t>Forget, Input, Output — Cell State Flows Linearly</a:t>
-            </a:r>
-          </a:p>
-        </p:txBody>
-      </p:sp>
-      <p:sp>
-        <p:nvSpPr>
-          <p:cNvPr id="8" name="TextBox 7"/>
-          <p:cNvSpPr txBox="1"/>
-          <p:nvPr/>
-        </p:nvSpPr>
-        <p:spPr>
-          <a:xfrm>
-            <a:off x="548640" y="1920240"/>
-            <a:ext cx="10972800" cy="320040"/>
-          </a:xfrm>
-          <a:prstGeom prst="rect">
-            <a:avLst/>
-          </a:prstGeom>
-          <a:noFill/>
-        </p:spPr>
-        <p:txBody>
-          <a:bodyPr wrap="square" anchor="t">
-            <a:spAutoFit/>
-          </a:bodyPr>
-          <a:lstStyle/>
-          <a:p>
-            <a:pPr algn="l"/>
-            <a:r>
-              <a:rPr sz="1300" b="0">
-                <a:solidFill>
-                  <a:srgbClr val="5A5470"/>
-                </a:solidFill>
-                <a:latin typeface="DIN Next LT W23"/>
-                <a:ea typeface="DIN Next LT W23"/>
-                <a:cs typeface="DIN Next LT W23"/>
-              </a:rPr>
-              <a:t>LSTM adds a cell state cₜ with an additive path, so signal can travel many steps without vanishing.</a:t>
-            </a:r>
-          </a:p>
-        </p:txBody>
-      </p:sp>
-      <p:sp>
-        <p:nvSpPr>
-          <p:cNvPr id="9" name="Rounded Rectangle 8"/>
+              <a:t>Rolled Cell = Shared Weights Across Steps</a:t>
+            </a:r>
+          </a:p>
+        </p:txBody>
+      </p:sp>
+      <p:sp>
+        <p:nvSpPr>
+          <p:cNvPr id="8" name="Rounded Rectangle 7"/>
           <p:cNvSpPr/>
           <p:nvPr/>
         </p:nvSpPr>
         <p:spPr>
           <a:xfrm>
-            <a:off x="548640" y="2240280"/>
+            <a:off x="548640" y="1965960"/>
             <a:ext cx="10972800" cy="3977639"/>
           </a:xfrm>
           <a:prstGeom prst="roundRect">
@@ -48566,7 +48709,7 @@
       </p:sp>
       <p:pic>
         <p:nvPicPr>
-          <p:cNvPr id="10" name="Picture 9" descr="lstm-gates.png"/>
+          <p:cNvPr id="9" name="Picture 8" descr="rnn-unfold.png"/>
           <p:cNvPicPr>
             <a:picLocks noChangeAspect="1"/>
           </p:cNvPicPr>
@@ -48580,8 +48723,8 @@
         </p:blipFill>
         <p:spPr>
           <a:xfrm>
-            <a:off x="1056046" y="2377440"/>
-            <a:ext cx="9957987" cy="3703320"/>
+            <a:off x="1177732" y="2103120"/>
+            <a:ext cx="9714615" cy="3703320"/>
           </a:xfrm>
           <a:prstGeom prst="rect">
             <a:avLst/>
@@ -48590,7 +48733,7 @@
       </p:pic>
       <p:sp>
         <p:nvSpPr>
-          <p:cNvPr id="11" name="TextBox 10"/>
+          <p:cNvPr id="10" name="TextBox 9"/>
           <p:cNvSpPr txBox="1"/>
           <p:nvPr/>
         </p:nvSpPr>
@@ -48620,14 +48763,14 @@
                 <a:ea typeface="DIN Next LT W23"/>
                 <a:cs typeface="DIN Next LT W23"/>
               </a:rPr>
-              <a:t>GRU is a simpler cousin (two gates). Transformers later replace recurrence with attention.</a:t>
-            </a:r>
-          </a:p>
-        </p:txBody>
-      </p:sp>
-      <p:sp>
-        <p:nvSpPr>
-          <p:cNvPr id="12" name="Rectangle 11"/>
+              <a:t>Cannot fully parallelize timesteps — each hₜ waits on hₜ₋₁.</a:t>
+            </a:r>
+          </a:p>
+        </p:txBody>
+      </p:sp>
+      <p:sp>
+        <p:nvSpPr>
+          <p:cNvPr id="11" name="Rectangle 10"/>
           <p:cNvSpPr/>
           <p:nvPr/>
         </p:nvSpPr>
@@ -48671,7 +48814,7 @@
       </p:sp>
       <p:sp>
         <p:nvSpPr>
-          <p:cNvPr id="13" name="TextBox 12"/>
+          <p:cNvPr id="12" name="TextBox 11"/>
           <p:cNvSpPr txBox="1"/>
           <p:nvPr/>
         </p:nvSpPr>
@@ -48708,7 +48851,7 @@
       </p:sp>
       <p:sp>
         <p:nvSpPr>
-          <p:cNvPr id="14" name="TextBox 13"/>
+          <p:cNvPr id="13" name="TextBox 12"/>
           <p:cNvSpPr txBox="1"/>
           <p:nvPr/>
         </p:nvSpPr>
@@ -48738,7 +48881,7 @@
                 <a:ea typeface="DIN Next LT W23"/>
                 <a:cs typeface="DIN Next LT W23"/>
               </a:rPr>
-              <a:t>74  /  77</a:t>
+              <a:t>74  /  78</a:t>
             </a:r>
           </a:p>
         </p:txBody>
@@ -48752,6 +48895,517 @@
 </file>
 
 <file path=ppt/slides/slide75.xml><?xml version="1.0" encoding="utf-8"?>
+<p:sld xmlns:a="http://schemas.openxmlformats.org/drawingml/2006/main" xmlns:p="http://schemas.openxmlformats.org/presentationml/2006/main" xmlns:r="http://schemas.openxmlformats.org/officeDocument/2006/relationships">
+  <p:cSld>
+    <p:bg>
+      <p:bgPr>
+        <a:solidFill>
+          <a:srgbClr val="FAF8FF"/>
+        </a:solidFill>
+        <a:effectLst/>
+      </p:bgPr>
+    </p:bg>
+    <p:spTree>
+      <p:nvGrpSpPr>
+        <p:cNvPr id="1" name=""/>
+        <p:cNvGrpSpPr/>
+        <p:nvPr/>
+      </p:nvGrpSpPr>
+      <p:grpSpPr/>
+      <p:sp>
+        <p:nvSpPr>
+          <p:cNvPr id="2" name="Rectangle 1"/>
+          <p:cNvSpPr/>
+          <p:nvPr/>
+        </p:nvSpPr>
+        <p:spPr>
+          <a:xfrm>
+            <a:off x="12136831" y="0"/>
+            <a:ext cx="54864" cy="6858000"/>
+          </a:xfrm>
+          <a:prstGeom prst="rect">
+            <a:avLst/>
+          </a:prstGeom>
+          <a:solidFill>
+            <a:srgbClr val="5234B7"/>
+          </a:solidFill>
+          <a:ln>
+            <a:noFill/>
+          </a:ln>
+          <a:effectLst/>
+        </p:spPr>
+        <p:style>
+          <a:lnRef idx="1">
+            <a:schemeClr val="accent1"/>
+          </a:lnRef>
+          <a:fillRef idx="3">
+            <a:schemeClr val="accent1"/>
+          </a:fillRef>
+          <a:effectRef idx="2">
+            <a:schemeClr val="accent1"/>
+          </a:effectRef>
+          <a:fontRef idx="minor">
+            <a:schemeClr val="lt1"/>
+          </a:fontRef>
+        </p:style>
+        <p:txBody>
+          <a:bodyPr rtlCol="0" anchor="ctr"/>
+          <a:lstStyle/>
+          <a:p>
+            <a:pPr algn="ctr"/>
+          </a:p>
+        </p:txBody>
+      </p:sp>
+      <p:pic>
+        <p:nvPicPr>
+          <p:cNvPr id="3" name="Picture 2" descr="etra-wordmark.png"/>
+          <p:cNvPicPr>
+            <a:picLocks noChangeAspect="1"/>
+          </p:cNvPicPr>
+          <p:nvPr/>
+        </p:nvPicPr>
+        <p:blipFill>
+          <a:blip r:embed="rId2"/>
+          <a:stretch>
+            <a:fillRect/>
+          </a:stretch>
+        </p:blipFill>
+        <p:spPr>
+          <a:xfrm>
+            <a:off x="10561320" y="411480"/>
+            <a:ext cx="1206201" cy="320040"/>
+          </a:xfrm>
+          <a:prstGeom prst="rect">
+            <a:avLst/>
+          </a:prstGeom>
+        </p:spPr>
+      </p:pic>
+      <p:sp>
+        <p:nvSpPr>
+          <p:cNvPr id="4" name="TextBox 3"/>
+          <p:cNvSpPr txBox="1"/>
+          <p:nvPr/>
+        </p:nvSpPr>
+        <p:spPr>
+          <a:xfrm>
+            <a:off x="548640" y="438912"/>
+            <a:ext cx="7772400" cy="274320"/>
+          </a:xfrm>
+          <a:prstGeom prst="rect">
+            <a:avLst/>
+          </a:prstGeom>
+          <a:noFill/>
+        </p:spPr>
+        <p:txBody>
+          <a:bodyPr wrap="square" anchor="t">
+            <a:spAutoFit/>
+          </a:bodyPr>
+          <a:lstStyle/>
+          <a:p>
+            <a:pPr algn="l"/>
+            <a:r>
+              <a:rPr sz="1200" b="0">
+                <a:solidFill>
+                  <a:srgbClr val="5A5470"/>
+                </a:solidFill>
+                <a:latin typeface="DIN Next LT W23"/>
+                <a:ea typeface="DIN Next LT W23"/>
+                <a:cs typeface="DIN Next LT W23"/>
+              </a:rPr>
+              <a:t>S07  ·  Deep Learning</a:t>
+            </a:r>
+          </a:p>
+        </p:txBody>
+      </p:sp>
+      <p:sp>
+        <p:nvSpPr>
+          <p:cNvPr id="5" name="Rectangle 4"/>
+          <p:cNvSpPr/>
+          <p:nvPr/>
+        </p:nvSpPr>
+        <p:spPr>
+          <a:xfrm>
+            <a:off x="548640" y="822960"/>
+            <a:ext cx="11064240" cy="10972"/>
+          </a:xfrm>
+          <a:prstGeom prst="rect">
+            <a:avLst/>
+          </a:prstGeom>
+          <a:solidFill>
+            <a:srgbClr val="E4DCF4"/>
+          </a:solidFill>
+          <a:ln>
+            <a:noFill/>
+          </a:ln>
+          <a:effectLst/>
+        </p:spPr>
+        <p:style>
+          <a:lnRef idx="1">
+            <a:schemeClr val="accent1"/>
+          </a:lnRef>
+          <a:fillRef idx="3">
+            <a:schemeClr val="accent1"/>
+          </a:fillRef>
+          <a:effectRef idx="2">
+            <a:schemeClr val="accent1"/>
+          </a:effectRef>
+          <a:fontRef idx="minor">
+            <a:schemeClr val="lt1"/>
+          </a:fontRef>
+        </p:style>
+        <p:txBody>
+          <a:bodyPr rtlCol="0" anchor="ctr"/>
+          <a:lstStyle/>
+          <a:p>
+            <a:pPr algn="ctr"/>
+          </a:p>
+        </p:txBody>
+      </p:sp>
+      <p:sp>
+        <p:nvSpPr>
+          <p:cNvPr id="6" name="TextBox 5"/>
+          <p:cNvSpPr txBox="1"/>
+          <p:nvPr/>
+        </p:nvSpPr>
+        <p:spPr>
+          <a:xfrm>
+            <a:off x="548640" y="1051560"/>
+            <a:ext cx="10241280" cy="594360"/>
+          </a:xfrm>
+          <a:prstGeom prst="rect">
+            <a:avLst/>
+          </a:prstGeom>
+          <a:noFill/>
+        </p:spPr>
+        <p:txBody>
+          <a:bodyPr wrap="square" anchor="t">
+            <a:spAutoFit/>
+          </a:bodyPr>
+          <a:lstStyle/>
+          <a:p>
+            <a:pPr algn="l"/>
+            <a:r>
+              <a:rPr sz="3200" b="1">
+                <a:solidFill>
+                  <a:srgbClr val="5234B7"/>
+                </a:solidFill>
+                <a:latin typeface="DIN Next LT W23"/>
+                <a:ea typeface="DIN Next LT W23"/>
+                <a:cs typeface="DIN Next LT W23"/>
+              </a:rPr>
+              <a:t>LSTM: Gates for Long-Term Memory</a:t>
+            </a:r>
+          </a:p>
+        </p:txBody>
+      </p:sp>
+      <p:sp>
+        <p:nvSpPr>
+          <p:cNvPr id="7" name="TextBox 6"/>
+          <p:cNvSpPr txBox="1"/>
+          <p:nvPr/>
+        </p:nvSpPr>
+        <p:spPr>
+          <a:xfrm>
+            <a:off x="548640" y="1600200"/>
+            <a:ext cx="10241280" cy="365760"/>
+          </a:xfrm>
+          <a:prstGeom prst="rect">
+            <a:avLst/>
+          </a:prstGeom>
+          <a:noFill/>
+        </p:spPr>
+        <p:txBody>
+          <a:bodyPr wrap="square" anchor="t">
+            <a:spAutoFit/>
+          </a:bodyPr>
+          <a:lstStyle/>
+          <a:p>
+            <a:pPr algn="l"/>
+            <a:r>
+              <a:rPr sz="1500" b="0">
+                <a:solidFill>
+                  <a:srgbClr val="5A5470"/>
+                </a:solidFill>
+                <a:latin typeface="DIN Next LT W23"/>
+                <a:ea typeface="DIN Next LT W23"/>
+                <a:cs typeface="DIN Next LT W23"/>
+              </a:rPr>
+              <a:t>Forget, Input, Output — Cell State Flows Linearly</a:t>
+            </a:r>
+          </a:p>
+        </p:txBody>
+      </p:sp>
+      <p:sp>
+        <p:nvSpPr>
+          <p:cNvPr id="8" name="TextBox 7"/>
+          <p:cNvSpPr txBox="1"/>
+          <p:nvPr/>
+        </p:nvSpPr>
+        <p:spPr>
+          <a:xfrm>
+            <a:off x="548640" y="1920240"/>
+            <a:ext cx="10972800" cy="320040"/>
+          </a:xfrm>
+          <a:prstGeom prst="rect">
+            <a:avLst/>
+          </a:prstGeom>
+          <a:noFill/>
+        </p:spPr>
+        <p:txBody>
+          <a:bodyPr wrap="square" anchor="t">
+            <a:spAutoFit/>
+          </a:bodyPr>
+          <a:lstStyle/>
+          <a:p>
+            <a:pPr algn="l"/>
+            <a:r>
+              <a:rPr sz="1300" b="0">
+                <a:solidFill>
+                  <a:srgbClr val="5A5470"/>
+                </a:solidFill>
+                <a:latin typeface="DIN Next LT W23"/>
+                <a:ea typeface="DIN Next LT W23"/>
+                <a:cs typeface="DIN Next LT W23"/>
+              </a:rPr>
+              <a:t>LSTM adds a cell state cₜ with an additive path, so signal can travel many steps without vanishing.</a:t>
+            </a:r>
+          </a:p>
+        </p:txBody>
+      </p:sp>
+      <p:sp>
+        <p:nvSpPr>
+          <p:cNvPr id="9" name="Rounded Rectangle 8"/>
+          <p:cNvSpPr/>
+          <p:nvPr/>
+        </p:nvSpPr>
+        <p:spPr>
+          <a:xfrm>
+            <a:off x="548640" y="2240280"/>
+            <a:ext cx="10972800" cy="3977639"/>
+          </a:xfrm>
+          <a:prstGeom prst="roundRect">
+            <a:avLst>
+              <a:gd name="adj" fmla="val 10000"/>
+            </a:avLst>
+          </a:prstGeom>
+          <a:solidFill>
+            <a:srgbClr val="EEE8FA"/>
+          </a:solidFill>
+          <a:ln>
+            <a:noFill/>
+          </a:ln>
+          <a:effectLst/>
+        </p:spPr>
+        <p:style>
+          <a:lnRef idx="1">
+            <a:schemeClr val="accent1"/>
+          </a:lnRef>
+          <a:fillRef idx="3">
+            <a:schemeClr val="accent1"/>
+          </a:fillRef>
+          <a:effectRef idx="2">
+            <a:schemeClr val="accent1"/>
+          </a:effectRef>
+          <a:fontRef idx="minor">
+            <a:schemeClr val="lt1"/>
+          </a:fontRef>
+        </p:style>
+        <p:txBody>
+          <a:bodyPr rtlCol="0" anchor="ctr"/>
+          <a:lstStyle/>
+          <a:p>
+            <a:pPr algn="ctr"/>
+          </a:p>
+        </p:txBody>
+      </p:sp>
+      <p:pic>
+        <p:nvPicPr>
+          <p:cNvPr id="10" name="Picture 9" descr="lstm-gates.png"/>
+          <p:cNvPicPr>
+            <a:picLocks noChangeAspect="1"/>
+          </p:cNvPicPr>
+          <p:nvPr/>
+        </p:nvPicPr>
+        <p:blipFill>
+          <a:blip r:embed="rId3"/>
+          <a:stretch>
+            <a:fillRect/>
+          </a:stretch>
+        </p:blipFill>
+        <p:spPr>
+          <a:xfrm>
+            <a:off x="1056046" y="2377440"/>
+            <a:ext cx="9957987" cy="3703320"/>
+          </a:xfrm>
+          <a:prstGeom prst="rect">
+            <a:avLst/>
+          </a:prstGeom>
+        </p:spPr>
+      </p:pic>
+      <p:sp>
+        <p:nvSpPr>
+          <p:cNvPr id="11" name="TextBox 10"/>
+          <p:cNvSpPr txBox="1"/>
+          <p:nvPr/>
+        </p:nvSpPr>
+        <p:spPr>
+          <a:xfrm>
+            <a:off x="548640" y="6309360"/>
+            <a:ext cx="10972800" cy="228600"/>
+          </a:xfrm>
+          <a:prstGeom prst="rect">
+            <a:avLst/>
+          </a:prstGeom>
+          <a:noFill/>
+        </p:spPr>
+        <p:txBody>
+          <a:bodyPr wrap="square" anchor="t">
+            <a:spAutoFit/>
+          </a:bodyPr>
+          <a:lstStyle/>
+          <a:p>
+            <a:pPr algn="l"/>
+            <a:r>
+              <a:rPr sz="1100" b="0">
+                <a:solidFill>
+                  <a:srgbClr val="5A5470"/>
+                </a:solidFill>
+                <a:latin typeface="DIN Next LT W23"/>
+                <a:ea typeface="DIN Next LT W23"/>
+                <a:cs typeface="DIN Next LT W23"/>
+              </a:rPr>
+              <a:t>GRU is a simpler cousin (two gates). Transformers later replace recurrence with attention.</a:t>
+            </a:r>
+          </a:p>
+        </p:txBody>
+      </p:sp>
+      <p:sp>
+        <p:nvSpPr>
+          <p:cNvPr id="12" name="Rectangle 11"/>
+          <p:cNvSpPr/>
+          <p:nvPr/>
+        </p:nvSpPr>
+        <p:spPr>
+          <a:xfrm>
+            <a:off x="548640" y="6446520"/>
+            <a:ext cx="11064240" cy="10972"/>
+          </a:xfrm>
+          <a:prstGeom prst="rect">
+            <a:avLst/>
+          </a:prstGeom>
+          <a:solidFill>
+            <a:srgbClr val="5234B7"/>
+          </a:solidFill>
+          <a:ln>
+            <a:noFill/>
+          </a:ln>
+          <a:effectLst/>
+        </p:spPr>
+        <p:style>
+          <a:lnRef idx="1">
+            <a:schemeClr val="accent1"/>
+          </a:lnRef>
+          <a:fillRef idx="3">
+            <a:schemeClr val="accent1"/>
+          </a:fillRef>
+          <a:effectRef idx="2">
+            <a:schemeClr val="accent1"/>
+          </a:effectRef>
+          <a:fontRef idx="minor">
+            <a:schemeClr val="lt1"/>
+          </a:fontRef>
+        </p:style>
+        <p:txBody>
+          <a:bodyPr rtlCol="0" anchor="ctr"/>
+          <a:lstStyle/>
+          <a:p>
+            <a:pPr algn="ctr"/>
+          </a:p>
+        </p:txBody>
+      </p:sp>
+      <p:sp>
+        <p:nvSpPr>
+          <p:cNvPr id="13" name="TextBox 12"/>
+          <p:cNvSpPr txBox="1"/>
+          <p:nvPr/>
+        </p:nvSpPr>
+        <p:spPr>
+          <a:xfrm>
+            <a:off x="548640" y="6510528"/>
+            <a:ext cx="2743200" cy="256032"/>
+          </a:xfrm>
+          <a:prstGeom prst="rect">
+            <a:avLst/>
+          </a:prstGeom>
+          <a:noFill/>
+        </p:spPr>
+        <p:txBody>
+          <a:bodyPr wrap="square" anchor="t">
+            <a:spAutoFit/>
+          </a:bodyPr>
+          <a:lstStyle/>
+          <a:p>
+            <a:pPr algn="l"/>
+            <a:r>
+              <a:rPr sz="1100" b="1">
+                <a:solidFill>
+                  <a:srgbClr val="5234B7"/>
+                </a:solidFill>
+                <a:latin typeface="DIN Next LT W23"/>
+                <a:ea typeface="DIN Next LT W23"/>
+                <a:cs typeface="DIN Next LT W23"/>
+              </a:rPr>
+              <a:t>ETRA</a:t>
+            </a:r>
+          </a:p>
+        </p:txBody>
+      </p:sp>
+      <p:sp>
+        <p:nvSpPr>
+          <p:cNvPr id="14" name="TextBox 13"/>
+          <p:cNvSpPr txBox="1"/>
+          <p:nvPr/>
+        </p:nvSpPr>
+        <p:spPr>
+          <a:xfrm>
+            <a:off x="9601200" y="6510528"/>
+            <a:ext cx="2011680" cy="256032"/>
+          </a:xfrm>
+          <a:prstGeom prst="rect">
+            <a:avLst/>
+          </a:prstGeom>
+          <a:noFill/>
+        </p:spPr>
+        <p:txBody>
+          <a:bodyPr wrap="square" anchor="t">
+            <a:spAutoFit/>
+          </a:bodyPr>
+          <a:lstStyle/>
+          <a:p>
+            <a:pPr algn="r"/>
+            <a:r>
+              <a:rPr sz="1100" b="0">
+                <a:solidFill>
+                  <a:srgbClr val="5A5470"/>
+                </a:solidFill>
+                <a:latin typeface="DIN Next LT W23"/>
+                <a:ea typeface="DIN Next LT W23"/>
+                <a:cs typeface="DIN Next LT W23"/>
+              </a:rPr>
+              <a:t>75  /  78</a:t>
+            </a:r>
+          </a:p>
+        </p:txBody>
+      </p:sp>
+    </p:spTree>
+  </p:cSld>
+  <p:clrMapOvr>
+    <a:masterClrMapping/>
+  </p:clrMapOvr>
+</p:sld>
+</file>
+
+<file path=ppt/slides/slide76.xml><?xml version="1.0" encoding="utf-8"?>
 <p:sld xmlns:a="http://schemas.openxmlformats.org/drawingml/2006/main" xmlns:p="http://schemas.openxmlformats.org/presentationml/2006/main" xmlns:r="http://schemas.openxmlformats.org/officeDocument/2006/relationships">
   <p:cSld>
     <p:bg>
@@ -49406,734 +50060,7 @@
                 <a:ea typeface="DIN Next LT W23"/>
                 <a:cs typeface="DIN Next LT W23"/>
               </a:rPr>
-              <a:t>75  /  77</a:t>
-            </a:r>
-          </a:p>
-        </p:txBody>
-      </p:sp>
-    </p:spTree>
-  </p:cSld>
-  <p:clrMapOvr>
-    <a:masterClrMapping/>
-  </p:clrMapOvr>
-</p:sld>
-</file>
-
-<file path=ppt/slides/slide76.xml><?xml version="1.0" encoding="utf-8"?>
-<p:sld xmlns:a="http://schemas.openxmlformats.org/drawingml/2006/main" xmlns:p="http://schemas.openxmlformats.org/presentationml/2006/main" xmlns:r="http://schemas.openxmlformats.org/officeDocument/2006/relationships">
-  <p:cSld>
-    <p:bg>
-      <p:bgPr>
-        <a:solidFill>
-          <a:srgbClr val="FAF8FF"/>
-        </a:solidFill>
-        <a:effectLst/>
-      </p:bgPr>
-    </p:bg>
-    <p:spTree>
-      <p:nvGrpSpPr>
-        <p:cNvPr id="1" name=""/>
-        <p:cNvGrpSpPr/>
-        <p:nvPr/>
-      </p:nvGrpSpPr>
-      <p:grpSpPr/>
-      <p:sp>
-        <p:nvSpPr>
-          <p:cNvPr id="2" name="Rectangle 1"/>
-          <p:cNvSpPr/>
-          <p:nvPr/>
-        </p:nvSpPr>
-        <p:spPr>
-          <a:xfrm>
-            <a:off x="12136831" y="0"/>
-            <a:ext cx="54864" cy="6858000"/>
-          </a:xfrm>
-          <a:prstGeom prst="rect">
-            <a:avLst/>
-          </a:prstGeom>
-          <a:solidFill>
-            <a:srgbClr val="5234B7"/>
-          </a:solidFill>
-          <a:ln>
-            <a:noFill/>
-          </a:ln>
-          <a:effectLst/>
-        </p:spPr>
-        <p:style>
-          <a:lnRef idx="1">
-            <a:schemeClr val="accent1"/>
-          </a:lnRef>
-          <a:fillRef idx="3">
-            <a:schemeClr val="accent1"/>
-          </a:fillRef>
-          <a:effectRef idx="2">
-            <a:schemeClr val="accent1"/>
-          </a:effectRef>
-          <a:fontRef idx="minor">
-            <a:schemeClr val="lt1"/>
-          </a:fontRef>
-        </p:style>
-        <p:txBody>
-          <a:bodyPr rtlCol="0" anchor="ctr"/>
-          <a:lstStyle/>
-          <a:p>
-            <a:pPr algn="ctr"/>
-          </a:p>
-        </p:txBody>
-      </p:sp>
-      <p:pic>
-        <p:nvPicPr>
-          <p:cNvPr id="3" name="Picture 2" descr="etra-wordmark.png"/>
-          <p:cNvPicPr>
-            <a:picLocks noChangeAspect="1"/>
-          </p:cNvPicPr>
-          <p:nvPr/>
-        </p:nvPicPr>
-        <p:blipFill>
-          <a:blip r:embed="rId2"/>
-          <a:stretch>
-            <a:fillRect/>
-          </a:stretch>
-        </p:blipFill>
-        <p:spPr>
-          <a:xfrm>
-            <a:off x="10561320" y="411480"/>
-            <a:ext cx="1206201" cy="320040"/>
-          </a:xfrm>
-          <a:prstGeom prst="rect">
-            <a:avLst/>
-          </a:prstGeom>
-        </p:spPr>
-      </p:pic>
-      <p:sp>
-        <p:nvSpPr>
-          <p:cNvPr id="4" name="TextBox 3"/>
-          <p:cNvSpPr txBox="1"/>
-          <p:nvPr/>
-        </p:nvSpPr>
-        <p:spPr>
-          <a:xfrm>
-            <a:off x="548640" y="438912"/>
-            <a:ext cx="7772400" cy="274320"/>
-          </a:xfrm>
-          <a:prstGeom prst="rect">
-            <a:avLst/>
-          </a:prstGeom>
-          <a:noFill/>
-        </p:spPr>
-        <p:txBody>
-          <a:bodyPr wrap="square" anchor="t">
-            <a:spAutoFit/>
-          </a:bodyPr>
-          <a:lstStyle/>
-          <a:p>
-            <a:pPr algn="l"/>
-            <a:r>
-              <a:rPr sz="1200" b="0">
-                <a:solidFill>
-                  <a:srgbClr val="5A5470"/>
-                </a:solidFill>
-                <a:latin typeface="DIN Next LT W23"/>
-                <a:ea typeface="DIN Next LT W23"/>
-                <a:cs typeface="DIN Next LT W23"/>
-              </a:rPr>
-              <a:t>S07  ·  Takeaways</a:t>
-            </a:r>
-          </a:p>
-        </p:txBody>
-      </p:sp>
-      <p:sp>
-        <p:nvSpPr>
-          <p:cNvPr id="5" name="Rectangle 4"/>
-          <p:cNvSpPr/>
-          <p:nvPr/>
-        </p:nvSpPr>
-        <p:spPr>
-          <a:xfrm>
-            <a:off x="548640" y="822960"/>
-            <a:ext cx="11064240" cy="10972"/>
-          </a:xfrm>
-          <a:prstGeom prst="rect">
-            <a:avLst/>
-          </a:prstGeom>
-          <a:solidFill>
-            <a:srgbClr val="E4DCF4"/>
-          </a:solidFill>
-          <a:ln>
-            <a:noFill/>
-          </a:ln>
-          <a:effectLst/>
-        </p:spPr>
-        <p:style>
-          <a:lnRef idx="1">
-            <a:schemeClr val="accent1"/>
-          </a:lnRef>
-          <a:fillRef idx="3">
-            <a:schemeClr val="accent1"/>
-          </a:fillRef>
-          <a:effectRef idx="2">
-            <a:schemeClr val="accent1"/>
-          </a:effectRef>
-          <a:fontRef idx="minor">
-            <a:schemeClr val="lt1"/>
-          </a:fontRef>
-        </p:style>
-        <p:txBody>
-          <a:bodyPr rtlCol="0" anchor="ctr"/>
-          <a:lstStyle/>
-          <a:p>
-            <a:pPr algn="ctr"/>
-          </a:p>
-        </p:txBody>
-      </p:sp>
-      <p:sp>
-        <p:nvSpPr>
-          <p:cNvPr id="6" name="TextBox 5"/>
-          <p:cNvSpPr txBox="1"/>
-          <p:nvPr/>
-        </p:nvSpPr>
-        <p:spPr>
-          <a:xfrm>
-            <a:off x="548640" y="1051560"/>
-            <a:ext cx="10241280" cy="594360"/>
-          </a:xfrm>
-          <a:prstGeom prst="rect">
-            <a:avLst/>
-          </a:prstGeom>
-          <a:noFill/>
-        </p:spPr>
-        <p:txBody>
-          <a:bodyPr wrap="square" anchor="t">
-            <a:spAutoFit/>
-          </a:bodyPr>
-          <a:lstStyle/>
-          <a:p>
-            <a:pPr algn="l"/>
-            <a:r>
-              <a:rPr sz="3200" b="1">
-                <a:solidFill>
-                  <a:srgbClr val="5234B7"/>
-                </a:solidFill>
-                <a:latin typeface="DIN Next LT W23"/>
-                <a:ea typeface="DIN Next LT W23"/>
-                <a:cs typeface="DIN Next LT W23"/>
-              </a:rPr>
-              <a:t>3 Ideas to Keep</a:t>
-            </a:r>
-          </a:p>
-        </p:txBody>
-      </p:sp>
-      <p:sp>
-        <p:nvSpPr>
-          <p:cNvPr id="7" name="TextBox 6"/>
-          <p:cNvSpPr txBox="1"/>
-          <p:nvPr/>
-        </p:nvSpPr>
-        <p:spPr>
-          <a:xfrm>
-            <a:off x="548640" y="1600200"/>
-            <a:ext cx="10241280" cy="365760"/>
-          </a:xfrm>
-          <a:prstGeom prst="rect">
-            <a:avLst/>
-          </a:prstGeom>
-          <a:noFill/>
-        </p:spPr>
-        <p:txBody>
-          <a:bodyPr wrap="square" anchor="t">
-            <a:spAutoFit/>
-          </a:bodyPr>
-          <a:lstStyle/>
-          <a:p>
-            <a:pPr algn="l"/>
-            <a:r>
-              <a:rPr sz="1500" b="0">
-                <a:solidFill>
-                  <a:srgbClr val="5A5470"/>
-                </a:solidFill>
-                <a:latin typeface="DIN Next LT W23"/>
-                <a:ea typeface="DIN Next LT W23"/>
-                <a:cs typeface="DIN Next LT W23"/>
-              </a:rPr>
-              <a:t>Leave with these</a:t>
-            </a:r>
-          </a:p>
-        </p:txBody>
-      </p:sp>
-      <p:sp>
-        <p:nvSpPr>
-          <p:cNvPr id="8" name="Rounded Rectangle 7"/>
-          <p:cNvSpPr/>
-          <p:nvPr/>
-        </p:nvSpPr>
-        <p:spPr>
-          <a:xfrm>
-            <a:off x="548640" y="2148840"/>
-            <a:ext cx="10972800" cy="987552"/>
-          </a:xfrm>
-          <a:prstGeom prst="roundRect">
-            <a:avLst>
-              <a:gd name="adj" fmla="val 10000"/>
-            </a:avLst>
-          </a:prstGeom>
-          <a:solidFill>
-            <a:srgbClr val="EEE8FA"/>
-          </a:solidFill>
-          <a:ln>
-            <a:noFill/>
-          </a:ln>
-          <a:effectLst/>
-        </p:spPr>
-        <p:style>
-          <a:lnRef idx="1">
-            <a:schemeClr val="accent1"/>
-          </a:lnRef>
-          <a:fillRef idx="3">
-            <a:schemeClr val="accent1"/>
-          </a:fillRef>
-          <a:effectRef idx="2">
-            <a:schemeClr val="accent1"/>
-          </a:effectRef>
-          <a:fontRef idx="minor">
-            <a:schemeClr val="lt1"/>
-          </a:fontRef>
-        </p:style>
-        <p:txBody>
-          <a:bodyPr rtlCol="0" anchor="ctr"/>
-          <a:lstStyle/>
-          <a:p>
-            <a:pPr algn="ctr"/>
-          </a:p>
-        </p:txBody>
-      </p:sp>
-      <p:sp>
-        <p:nvSpPr>
-          <p:cNvPr id="9" name="TextBox 8"/>
-          <p:cNvSpPr txBox="1"/>
-          <p:nvPr/>
-        </p:nvSpPr>
-        <p:spPr>
-          <a:xfrm>
-            <a:off x="822960" y="2404872"/>
-            <a:ext cx="457200" cy="457200"/>
-          </a:xfrm>
-          <a:prstGeom prst="rect">
-            <a:avLst/>
-          </a:prstGeom>
-          <a:noFill/>
-        </p:spPr>
-        <p:txBody>
-          <a:bodyPr wrap="square" anchor="t">
-            <a:spAutoFit/>
-          </a:bodyPr>
-          <a:lstStyle/>
-          <a:p>
-            <a:pPr algn="l"/>
-            <a:r>
-              <a:rPr sz="2200" b="1">
-                <a:solidFill>
-                  <a:srgbClr val="5234B7"/>
-                </a:solidFill>
-                <a:latin typeface="DIN Next LT W23"/>
-                <a:ea typeface="DIN Next LT W23"/>
-                <a:cs typeface="DIN Next LT W23"/>
-              </a:rPr>
-              <a:t>1</a:t>
-            </a:r>
-          </a:p>
-        </p:txBody>
-      </p:sp>
-      <p:sp>
-        <p:nvSpPr>
-          <p:cNvPr id="10" name="TextBox 9"/>
-          <p:cNvSpPr txBox="1"/>
-          <p:nvPr/>
-        </p:nvSpPr>
-        <p:spPr>
-          <a:xfrm>
-            <a:off x="1417320" y="2404872"/>
-            <a:ext cx="9692640" cy="548640"/>
-          </a:xfrm>
-          <a:prstGeom prst="rect">
-            <a:avLst/>
-          </a:prstGeom>
-          <a:noFill/>
-        </p:spPr>
-        <p:txBody>
-          <a:bodyPr wrap="square" anchor="t">
-            <a:spAutoFit/>
-          </a:bodyPr>
-          <a:lstStyle/>
-          <a:p>
-            <a:pPr algn="l"/>
-            <a:r>
-              <a:rPr sz="1600" b="0">
-                <a:solidFill>
-                  <a:srgbClr val="121018"/>
-                </a:solidFill>
-                <a:latin typeface="DIN Next LT W23"/>
-                <a:ea typeface="DIN Next LT W23"/>
-                <a:cs typeface="DIN Next LT W23"/>
-              </a:rPr>
-              <a:t>A neuron is z = wᵀx + b then a = f(z). Depth needs nonlinearity between layers.</a:t>
-            </a:r>
-          </a:p>
-        </p:txBody>
-      </p:sp>
-      <p:sp>
-        <p:nvSpPr>
-          <p:cNvPr id="11" name="Rounded Rectangle 10"/>
-          <p:cNvSpPr/>
-          <p:nvPr/>
-        </p:nvSpPr>
-        <p:spPr>
-          <a:xfrm>
-            <a:off x="548640" y="3291840"/>
-            <a:ext cx="10972800" cy="987552"/>
-          </a:xfrm>
-          <a:prstGeom prst="roundRect">
-            <a:avLst>
-              <a:gd name="adj" fmla="val 10000"/>
-            </a:avLst>
-          </a:prstGeom>
-          <a:solidFill>
-            <a:srgbClr val="EEE8FA"/>
-          </a:solidFill>
-          <a:ln>
-            <a:noFill/>
-          </a:ln>
-          <a:effectLst/>
-        </p:spPr>
-        <p:style>
-          <a:lnRef idx="1">
-            <a:schemeClr val="accent1"/>
-          </a:lnRef>
-          <a:fillRef idx="3">
-            <a:schemeClr val="accent1"/>
-          </a:fillRef>
-          <a:effectRef idx="2">
-            <a:schemeClr val="accent1"/>
-          </a:effectRef>
-          <a:fontRef idx="minor">
-            <a:schemeClr val="lt1"/>
-          </a:fontRef>
-        </p:style>
-        <p:txBody>
-          <a:bodyPr rtlCol="0" anchor="ctr"/>
-          <a:lstStyle/>
-          <a:p>
-            <a:pPr algn="ctr"/>
-          </a:p>
-        </p:txBody>
-      </p:sp>
-      <p:sp>
-        <p:nvSpPr>
-          <p:cNvPr id="12" name="TextBox 11"/>
-          <p:cNvSpPr txBox="1"/>
-          <p:nvPr/>
-        </p:nvSpPr>
-        <p:spPr>
-          <a:xfrm>
-            <a:off x="822960" y="3547872"/>
-            <a:ext cx="457200" cy="457200"/>
-          </a:xfrm>
-          <a:prstGeom prst="rect">
-            <a:avLst/>
-          </a:prstGeom>
-          <a:noFill/>
-        </p:spPr>
-        <p:txBody>
-          <a:bodyPr wrap="square" anchor="t">
-            <a:spAutoFit/>
-          </a:bodyPr>
-          <a:lstStyle/>
-          <a:p>
-            <a:pPr algn="l"/>
-            <a:r>
-              <a:rPr sz="2200" b="1">
-                <a:solidFill>
-                  <a:srgbClr val="5234B7"/>
-                </a:solidFill>
-                <a:latin typeface="DIN Next LT W23"/>
-                <a:ea typeface="DIN Next LT W23"/>
-                <a:cs typeface="DIN Next LT W23"/>
-              </a:rPr>
-              <a:t>2</a:t>
-            </a:r>
-          </a:p>
-        </p:txBody>
-      </p:sp>
-      <p:sp>
-        <p:nvSpPr>
-          <p:cNvPr id="13" name="TextBox 12"/>
-          <p:cNvSpPr txBox="1"/>
-          <p:nvPr/>
-        </p:nvSpPr>
-        <p:spPr>
-          <a:xfrm>
-            <a:off x="1417320" y="3547872"/>
-            <a:ext cx="9692640" cy="548640"/>
-          </a:xfrm>
-          <a:prstGeom prst="rect">
-            <a:avLst/>
-          </a:prstGeom>
-          <a:noFill/>
-        </p:spPr>
-        <p:txBody>
-          <a:bodyPr wrap="square" anchor="t">
-            <a:spAutoFit/>
-          </a:bodyPr>
-          <a:lstStyle/>
-          <a:p>
-            <a:pPr algn="l"/>
-            <a:r>
-              <a:rPr sz="1600" b="0">
-                <a:solidFill>
-                  <a:srgbClr val="121018"/>
-                </a:solidFill>
-                <a:latin typeface="DIN Next LT W23"/>
-                <a:ea typeface="DIN Next LT W23"/>
-                <a:cs typeface="DIN Next LT W23"/>
-              </a:rPr>
-              <a:t>Backprop is the chain rule on a graph. Watch vanishing gradients, LR, and train vs val.</a:t>
-            </a:r>
-          </a:p>
-        </p:txBody>
-      </p:sp>
-      <p:sp>
-        <p:nvSpPr>
-          <p:cNvPr id="14" name="Rounded Rectangle 13"/>
-          <p:cNvSpPr/>
-          <p:nvPr/>
-        </p:nvSpPr>
-        <p:spPr>
-          <a:xfrm>
-            <a:off x="548640" y="4434840"/>
-            <a:ext cx="10972800" cy="987552"/>
-          </a:xfrm>
-          <a:prstGeom prst="roundRect">
-            <a:avLst>
-              <a:gd name="adj" fmla="val 10000"/>
-            </a:avLst>
-          </a:prstGeom>
-          <a:solidFill>
-            <a:srgbClr val="EEE8FA"/>
-          </a:solidFill>
-          <a:ln>
-            <a:noFill/>
-          </a:ln>
-          <a:effectLst/>
-        </p:spPr>
-        <p:style>
-          <a:lnRef idx="1">
-            <a:schemeClr val="accent1"/>
-          </a:lnRef>
-          <a:fillRef idx="3">
-            <a:schemeClr val="accent1"/>
-          </a:fillRef>
-          <a:effectRef idx="2">
-            <a:schemeClr val="accent1"/>
-          </a:effectRef>
-          <a:fontRef idx="minor">
-            <a:schemeClr val="lt1"/>
-          </a:fontRef>
-        </p:style>
-        <p:txBody>
-          <a:bodyPr rtlCol="0" anchor="ctr"/>
-          <a:lstStyle/>
-          <a:p>
-            <a:pPr algn="ctr"/>
-          </a:p>
-        </p:txBody>
-      </p:sp>
-      <p:sp>
-        <p:nvSpPr>
-          <p:cNvPr id="15" name="TextBox 14"/>
-          <p:cNvSpPr txBox="1"/>
-          <p:nvPr/>
-        </p:nvSpPr>
-        <p:spPr>
-          <a:xfrm>
-            <a:off x="822960" y="4690872"/>
-            <a:ext cx="457200" cy="457200"/>
-          </a:xfrm>
-          <a:prstGeom prst="rect">
-            <a:avLst/>
-          </a:prstGeom>
-          <a:noFill/>
-        </p:spPr>
-        <p:txBody>
-          <a:bodyPr wrap="square" anchor="t">
-            <a:spAutoFit/>
-          </a:bodyPr>
-          <a:lstStyle/>
-          <a:p>
-            <a:pPr algn="l"/>
-            <a:r>
-              <a:rPr sz="2200" b="1">
-                <a:solidFill>
-                  <a:srgbClr val="5234B7"/>
-                </a:solidFill>
-                <a:latin typeface="DIN Next LT W23"/>
-                <a:ea typeface="DIN Next LT W23"/>
-                <a:cs typeface="DIN Next LT W23"/>
-              </a:rPr>
-              <a:t>3</a:t>
-            </a:r>
-          </a:p>
-        </p:txBody>
-      </p:sp>
-      <p:sp>
-        <p:nvSpPr>
-          <p:cNvPr id="16" name="TextBox 15"/>
-          <p:cNvSpPr txBox="1"/>
-          <p:nvPr/>
-        </p:nvSpPr>
-        <p:spPr>
-          <a:xfrm>
-            <a:off x="1417320" y="4690872"/>
-            <a:ext cx="9692640" cy="548640"/>
-          </a:xfrm>
-          <a:prstGeom prst="rect">
-            <a:avLst/>
-          </a:prstGeom>
-          <a:noFill/>
-        </p:spPr>
-        <p:txBody>
-          <a:bodyPr wrap="square" anchor="t">
-            <a:spAutoFit/>
-          </a:bodyPr>
-          <a:lstStyle/>
-          <a:p>
-            <a:pPr algn="l"/>
-            <a:r>
-              <a:rPr sz="1600" b="0">
-                <a:solidFill>
-                  <a:srgbClr val="121018"/>
-                </a:solidFill>
-                <a:latin typeface="DIN Next LT W23"/>
-                <a:ea typeface="DIN Next LT W23"/>
-                <a:cs typeface="DIN Next LT W23"/>
-              </a:rPr>
-              <a:t>CNNs share filters across space; RNNs share weights across time; regularize so they generalize.</a:t>
-            </a:r>
-          </a:p>
-        </p:txBody>
-      </p:sp>
-      <p:sp>
-        <p:nvSpPr>
-          <p:cNvPr id="17" name="Rectangle 16"/>
-          <p:cNvSpPr/>
-          <p:nvPr/>
-        </p:nvSpPr>
-        <p:spPr>
-          <a:xfrm>
-            <a:off x="548640" y="6446520"/>
-            <a:ext cx="11064240" cy="10972"/>
-          </a:xfrm>
-          <a:prstGeom prst="rect">
-            <a:avLst/>
-          </a:prstGeom>
-          <a:solidFill>
-            <a:srgbClr val="5234B7"/>
-          </a:solidFill>
-          <a:ln>
-            <a:noFill/>
-          </a:ln>
-          <a:effectLst/>
-        </p:spPr>
-        <p:style>
-          <a:lnRef idx="1">
-            <a:schemeClr val="accent1"/>
-          </a:lnRef>
-          <a:fillRef idx="3">
-            <a:schemeClr val="accent1"/>
-          </a:fillRef>
-          <a:effectRef idx="2">
-            <a:schemeClr val="accent1"/>
-          </a:effectRef>
-          <a:fontRef idx="minor">
-            <a:schemeClr val="lt1"/>
-          </a:fontRef>
-        </p:style>
-        <p:txBody>
-          <a:bodyPr rtlCol="0" anchor="ctr"/>
-          <a:lstStyle/>
-          <a:p>
-            <a:pPr algn="ctr"/>
-          </a:p>
-        </p:txBody>
-      </p:sp>
-      <p:sp>
-        <p:nvSpPr>
-          <p:cNvPr id="18" name="TextBox 17"/>
-          <p:cNvSpPr txBox="1"/>
-          <p:nvPr/>
-        </p:nvSpPr>
-        <p:spPr>
-          <a:xfrm>
-            <a:off x="548640" y="6510528"/>
-            <a:ext cx="2743200" cy="256032"/>
-          </a:xfrm>
-          <a:prstGeom prst="rect">
-            <a:avLst/>
-          </a:prstGeom>
-          <a:noFill/>
-        </p:spPr>
-        <p:txBody>
-          <a:bodyPr wrap="square" anchor="t">
-            <a:spAutoFit/>
-          </a:bodyPr>
-          <a:lstStyle/>
-          <a:p>
-            <a:pPr algn="l"/>
-            <a:r>
-              <a:rPr sz="1100" b="1">
-                <a:solidFill>
-                  <a:srgbClr val="5234B7"/>
-                </a:solidFill>
-                <a:latin typeface="DIN Next LT W23"/>
-                <a:ea typeface="DIN Next LT W23"/>
-                <a:cs typeface="DIN Next LT W23"/>
-              </a:rPr>
-              <a:t>ETRA</a:t>
-            </a:r>
-          </a:p>
-        </p:txBody>
-      </p:sp>
-      <p:sp>
-        <p:nvSpPr>
-          <p:cNvPr id="19" name="TextBox 18"/>
-          <p:cNvSpPr txBox="1"/>
-          <p:nvPr/>
-        </p:nvSpPr>
-        <p:spPr>
-          <a:xfrm>
-            <a:off x="9601200" y="6510528"/>
-            <a:ext cx="2011680" cy="256032"/>
-          </a:xfrm>
-          <a:prstGeom prst="rect">
-            <a:avLst/>
-          </a:prstGeom>
-          <a:noFill/>
-        </p:spPr>
-        <p:txBody>
-          <a:bodyPr wrap="square" anchor="t">
-            <a:spAutoFit/>
-          </a:bodyPr>
-          <a:lstStyle/>
-          <a:p>
-            <a:pPr algn="r"/>
-            <a:r>
-              <a:rPr sz="1100" b="0">
-                <a:solidFill>
-                  <a:srgbClr val="5A5470"/>
-                </a:solidFill>
-                <a:latin typeface="DIN Next LT W23"/>
-                <a:ea typeface="DIN Next LT W23"/>
-                <a:cs typeface="DIN Next LT W23"/>
-              </a:rPr>
-              <a:t>76  /  77</a:t>
+              <a:t>76  /  78</a:t>
             </a:r>
           </a:p>
         </p:txBody>
@@ -50225,7 +50152,7 @@
         <p:spPr>
           <a:xfrm>
             <a:off x="10561320" y="411480"/>
-            <a:ext cx="1378516" cy="365760"/>
+            <a:ext cx="1206201" cy="320040"/>
           </a:xfrm>
           <a:prstGeom prst="rect">
             <a:avLst/>
@@ -50240,23 +50167,104 @@
         </p:nvSpPr>
         <p:spPr>
           <a:xfrm>
-            <a:off x="548640" y="2651760"/>
-            <a:ext cx="10972800" cy="731520"/>
-          </a:xfrm>
-          <a:prstGeom prst="rect">
-            <a:avLst/>
-          </a:prstGeom>
-          <a:noFill/>
-        </p:spPr>
-        <p:txBody>
-          <a:bodyPr wrap="square" anchor="t">
-            <a:spAutoFit/>
-          </a:bodyPr>
+            <a:off x="548640" y="438912"/>
+            <a:ext cx="7772400" cy="274320"/>
+          </a:xfrm>
+          <a:prstGeom prst="rect">
+            <a:avLst/>
+          </a:prstGeom>
+          <a:noFill/>
+        </p:spPr>
+        <p:txBody>
+          <a:bodyPr wrap="square" anchor="t">
+            <a:spAutoFit/>
+          </a:bodyPr>
+          <a:lstStyle/>
+          <a:p>
+            <a:pPr algn="l"/>
+            <a:r>
+              <a:rPr sz="1200" b="0">
+                <a:solidFill>
+                  <a:srgbClr val="5A5470"/>
+                </a:solidFill>
+                <a:latin typeface="DIN Next LT W23"/>
+                <a:ea typeface="DIN Next LT W23"/>
+                <a:cs typeface="DIN Next LT W23"/>
+              </a:rPr>
+              <a:t>S07  ·  Takeaways</a:t>
+            </a:r>
+          </a:p>
+        </p:txBody>
+      </p:sp>
+      <p:sp>
+        <p:nvSpPr>
+          <p:cNvPr id="5" name="Rectangle 4"/>
+          <p:cNvSpPr/>
+          <p:nvPr/>
+        </p:nvSpPr>
+        <p:spPr>
+          <a:xfrm>
+            <a:off x="548640" y="822960"/>
+            <a:ext cx="11064240" cy="10972"/>
+          </a:xfrm>
+          <a:prstGeom prst="rect">
+            <a:avLst/>
+          </a:prstGeom>
+          <a:solidFill>
+            <a:srgbClr val="E4DCF4"/>
+          </a:solidFill>
+          <a:ln>
+            <a:noFill/>
+          </a:ln>
+          <a:effectLst/>
+        </p:spPr>
+        <p:style>
+          <a:lnRef idx="1">
+            <a:schemeClr val="accent1"/>
+          </a:lnRef>
+          <a:fillRef idx="3">
+            <a:schemeClr val="accent1"/>
+          </a:fillRef>
+          <a:effectRef idx="2">
+            <a:schemeClr val="accent1"/>
+          </a:effectRef>
+          <a:fontRef idx="minor">
+            <a:schemeClr val="lt1"/>
+          </a:fontRef>
+        </p:style>
+        <p:txBody>
+          <a:bodyPr rtlCol="0" anchor="ctr"/>
           <a:lstStyle/>
           <a:p>
             <a:pPr algn="ctr"/>
-            <a:r>
-              <a:rPr sz="4000" b="1">
+          </a:p>
+        </p:txBody>
+      </p:sp>
+      <p:sp>
+        <p:nvSpPr>
+          <p:cNvPr id="6" name="TextBox 5"/>
+          <p:cNvSpPr txBox="1"/>
+          <p:nvPr/>
+        </p:nvSpPr>
+        <p:spPr>
+          <a:xfrm>
+            <a:off x="548640" y="1051560"/>
+            <a:ext cx="10241280" cy="594360"/>
+          </a:xfrm>
+          <a:prstGeom prst="rect">
+            <a:avLst/>
+          </a:prstGeom>
+          <a:noFill/>
+        </p:spPr>
+        <p:txBody>
+          <a:bodyPr wrap="square" anchor="t">
+            <a:spAutoFit/>
+          </a:bodyPr>
+          <a:lstStyle/>
+          <a:p>
+            <a:pPr algn="l"/>
+            <a:r>
+              <a:rPr sz="3200" b="1">
                 <a:solidFill>
                   <a:srgbClr val="5234B7"/>
                 </a:solidFill>
@@ -50264,73 +50272,239 @@
                 <a:ea typeface="DIN Next LT W23"/>
                 <a:cs typeface="DIN Next LT W23"/>
               </a:rPr>
-              <a:t>Thank you</a:t>
-            </a:r>
-          </a:p>
-        </p:txBody>
-      </p:sp>
-      <p:sp>
-        <p:nvSpPr>
-          <p:cNvPr id="5" name="TextBox 4"/>
-          <p:cNvSpPr txBox="1"/>
-          <p:nvPr/>
-        </p:nvSpPr>
-        <p:spPr>
-          <a:xfrm>
-            <a:off x="548640" y="3474720"/>
-            <a:ext cx="10972800" cy="365760"/>
-          </a:xfrm>
-          <a:prstGeom prst="rect">
-            <a:avLst/>
-          </a:prstGeom>
-          <a:noFill/>
-        </p:spPr>
-        <p:txBody>
-          <a:bodyPr wrap="square" anchor="t">
-            <a:spAutoFit/>
-          </a:bodyPr>
+              <a:t>3 Ideas to Keep</a:t>
+            </a:r>
+          </a:p>
+        </p:txBody>
+      </p:sp>
+      <p:sp>
+        <p:nvSpPr>
+          <p:cNvPr id="7" name="TextBox 6"/>
+          <p:cNvSpPr txBox="1"/>
+          <p:nvPr/>
+        </p:nvSpPr>
+        <p:spPr>
+          <a:xfrm>
+            <a:off x="548640" y="1600200"/>
+            <a:ext cx="10241280" cy="365760"/>
+          </a:xfrm>
+          <a:prstGeom prst="rect">
+            <a:avLst/>
+          </a:prstGeom>
+          <a:noFill/>
+        </p:spPr>
+        <p:txBody>
+          <a:bodyPr wrap="square" anchor="t">
+            <a:spAutoFit/>
+          </a:bodyPr>
+          <a:lstStyle/>
+          <a:p>
+            <a:pPr algn="l"/>
+            <a:r>
+              <a:rPr sz="1500" b="0">
+                <a:solidFill>
+                  <a:srgbClr val="5A5470"/>
+                </a:solidFill>
+                <a:latin typeface="DIN Next LT W23"/>
+                <a:ea typeface="DIN Next LT W23"/>
+                <a:cs typeface="DIN Next LT W23"/>
+              </a:rPr>
+              <a:t>Leave with these</a:t>
+            </a:r>
+          </a:p>
+        </p:txBody>
+      </p:sp>
+      <p:sp>
+        <p:nvSpPr>
+          <p:cNvPr id="8" name="Rounded Rectangle 7"/>
+          <p:cNvSpPr/>
+          <p:nvPr/>
+        </p:nvSpPr>
+        <p:spPr>
+          <a:xfrm>
+            <a:off x="548640" y="2148840"/>
+            <a:ext cx="10972800" cy="987552"/>
+          </a:xfrm>
+          <a:prstGeom prst="roundRect">
+            <a:avLst>
+              <a:gd name="adj" fmla="val 10000"/>
+            </a:avLst>
+          </a:prstGeom>
+          <a:solidFill>
+            <a:srgbClr val="EEE8FA"/>
+          </a:solidFill>
+          <a:ln>
+            <a:noFill/>
+          </a:ln>
+          <a:effectLst/>
+        </p:spPr>
+        <p:style>
+          <a:lnRef idx="1">
+            <a:schemeClr val="accent1"/>
+          </a:lnRef>
+          <a:fillRef idx="3">
+            <a:schemeClr val="accent1"/>
+          </a:fillRef>
+          <a:effectRef idx="2">
+            <a:schemeClr val="accent1"/>
+          </a:effectRef>
+          <a:fontRef idx="minor">
+            <a:schemeClr val="lt1"/>
+          </a:fontRef>
+        </p:style>
+        <p:txBody>
+          <a:bodyPr rtlCol="0" anchor="ctr"/>
           <a:lstStyle/>
           <a:p>
             <a:pPr algn="ctr"/>
+          </a:p>
+        </p:txBody>
+      </p:sp>
+      <p:sp>
+        <p:nvSpPr>
+          <p:cNvPr id="9" name="TextBox 8"/>
+          <p:cNvSpPr txBox="1"/>
+          <p:nvPr/>
+        </p:nvSpPr>
+        <p:spPr>
+          <a:xfrm>
+            <a:off x="822960" y="2404872"/>
+            <a:ext cx="457200" cy="457200"/>
+          </a:xfrm>
+          <a:prstGeom prst="rect">
+            <a:avLst/>
+          </a:prstGeom>
+          <a:noFill/>
+        </p:spPr>
+        <p:txBody>
+          <a:bodyPr wrap="square" anchor="t">
+            <a:spAutoFit/>
+          </a:bodyPr>
+          <a:lstStyle/>
+          <a:p>
+            <a:pPr algn="l"/>
+            <a:r>
+              <a:rPr sz="2200" b="1">
+                <a:solidFill>
+                  <a:srgbClr val="5234B7"/>
+                </a:solidFill>
+                <a:latin typeface="DIN Next LT W23"/>
+                <a:ea typeface="DIN Next LT W23"/>
+                <a:cs typeface="DIN Next LT W23"/>
+              </a:rPr>
+              <a:t>1</a:t>
+            </a:r>
+          </a:p>
+        </p:txBody>
+      </p:sp>
+      <p:sp>
+        <p:nvSpPr>
+          <p:cNvPr id="10" name="TextBox 9"/>
+          <p:cNvSpPr txBox="1"/>
+          <p:nvPr/>
+        </p:nvSpPr>
+        <p:spPr>
+          <a:xfrm>
+            <a:off x="1417320" y="2404872"/>
+            <a:ext cx="9692640" cy="548640"/>
+          </a:xfrm>
+          <a:prstGeom prst="rect">
+            <a:avLst/>
+          </a:prstGeom>
+          <a:noFill/>
+        </p:spPr>
+        <p:txBody>
+          <a:bodyPr wrap="square" anchor="t">
+            <a:spAutoFit/>
+          </a:bodyPr>
+          <a:lstStyle/>
+          <a:p>
+            <a:pPr algn="l"/>
             <a:r>
               <a:rPr sz="1600" b="0">
                 <a:solidFill>
-                  <a:srgbClr val="5A5470"/>
-                </a:solidFill>
-                <a:latin typeface="DIN Next LT W23"/>
-                <a:ea typeface="DIN Next LT W23"/>
-                <a:cs typeface="DIN Next LT W23"/>
-              </a:rPr>
-              <a:t>Labs: code/15- Deep Learning</a:t>
-            </a:r>
-          </a:p>
-        </p:txBody>
-      </p:sp>
-      <p:sp>
-        <p:nvSpPr>
-          <p:cNvPr id="6" name="TextBox 5"/>
-          <p:cNvSpPr txBox="1"/>
-          <p:nvPr/>
-        </p:nvSpPr>
-        <p:spPr>
-          <a:xfrm>
-            <a:off x="548640" y="6126480"/>
-            <a:ext cx="5486400" cy="274320"/>
-          </a:xfrm>
-          <a:prstGeom prst="rect">
-            <a:avLst/>
-          </a:prstGeom>
-          <a:noFill/>
-        </p:spPr>
-        <p:txBody>
-          <a:bodyPr wrap="square" anchor="t">
-            <a:spAutoFit/>
-          </a:bodyPr>
-          <a:lstStyle/>
-          <a:p>
-            <a:pPr algn="l"/>
-            <a:r>
-              <a:rPr sz="1200" b="1">
+                  <a:srgbClr val="121018"/>
+                </a:solidFill>
+                <a:latin typeface="DIN Next LT W23"/>
+                <a:ea typeface="DIN Next LT W23"/>
+                <a:cs typeface="DIN Next LT W23"/>
+              </a:rPr>
+              <a:t>A neuron is z = wᵀx + b then a = f(z). Depth needs nonlinearity between layers.</a:t>
+            </a:r>
+          </a:p>
+        </p:txBody>
+      </p:sp>
+      <p:sp>
+        <p:nvSpPr>
+          <p:cNvPr id="11" name="Rounded Rectangle 10"/>
+          <p:cNvSpPr/>
+          <p:nvPr/>
+        </p:nvSpPr>
+        <p:spPr>
+          <a:xfrm>
+            <a:off x="548640" y="3291840"/>
+            <a:ext cx="10972800" cy="987552"/>
+          </a:xfrm>
+          <a:prstGeom prst="roundRect">
+            <a:avLst>
+              <a:gd name="adj" fmla="val 10000"/>
+            </a:avLst>
+          </a:prstGeom>
+          <a:solidFill>
+            <a:srgbClr val="EEE8FA"/>
+          </a:solidFill>
+          <a:ln>
+            <a:noFill/>
+          </a:ln>
+          <a:effectLst/>
+        </p:spPr>
+        <p:style>
+          <a:lnRef idx="1">
+            <a:schemeClr val="accent1"/>
+          </a:lnRef>
+          <a:fillRef idx="3">
+            <a:schemeClr val="accent1"/>
+          </a:fillRef>
+          <a:effectRef idx="2">
+            <a:schemeClr val="accent1"/>
+          </a:effectRef>
+          <a:fontRef idx="minor">
+            <a:schemeClr val="lt1"/>
+          </a:fontRef>
+        </p:style>
+        <p:txBody>
+          <a:bodyPr rtlCol="0" anchor="ctr"/>
+          <a:lstStyle/>
+          <a:p>
+            <a:pPr algn="ctr"/>
+          </a:p>
+        </p:txBody>
+      </p:sp>
+      <p:sp>
+        <p:nvSpPr>
+          <p:cNvPr id="12" name="TextBox 11"/>
+          <p:cNvSpPr txBox="1"/>
+          <p:nvPr/>
+        </p:nvSpPr>
+        <p:spPr>
+          <a:xfrm>
+            <a:off x="822960" y="3547872"/>
+            <a:ext cx="457200" cy="457200"/>
+          </a:xfrm>
+          <a:prstGeom prst="rect">
+            <a:avLst/>
+          </a:prstGeom>
+          <a:noFill/>
+        </p:spPr>
+        <p:txBody>
+          <a:bodyPr wrap="square" anchor="t">
+            <a:spAutoFit/>
+          </a:bodyPr>
+          <a:lstStyle/>
+          <a:p>
+            <a:pPr algn="l"/>
+            <a:r>
+              <a:rPr sz="2200" b="1">
                 <a:solidFill>
                   <a:srgbClr val="5234B7"/>
                 </a:solidFill>
@@ -50338,14 +50512,171 @@
                 <a:ea typeface="DIN Next LT W23"/>
                 <a:cs typeface="DIN Next LT W23"/>
               </a:rPr>
-              <a:t>ETRA</a:t>
-            </a:r>
-          </a:p>
-        </p:txBody>
-      </p:sp>
-      <p:sp>
-        <p:nvSpPr>
-          <p:cNvPr id="7" name="Rectangle 6"/>
+              <a:t>2</a:t>
+            </a:r>
+          </a:p>
+        </p:txBody>
+      </p:sp>
+      <p:sp>
+        <p:nvSpPr>
+          <p:cNvPr id="13" name="TextBox 12"/>
+          <p:cNvSpPr txBox="1"/>
+          <p:nvPr/>
+        </p:nvSpPr>
+        <p:spPr>
+          <a:xfrm>
+            <a:off x="1417320" y="3547872"/>
+            <a:ext cx="9692640" cy="548640"/>
+          </a:xfrm>
+          <a:prstGeom prst="rect">
+            <a:avLst/>
+          </a:prstGeom>
+          <a:noFill/>
+        </p:spPr>
+        <p:txBody>
+          <a:bodyPr wrap="square" anchor="t">
+            <a:spAutoFit/>
+          </a:bodyPr>
+          <a:lstStyle/>
+          <a:p>
+            <a:pPr algn="l"/>
+            <a:r>
+              <a:rPr sz="1600" b="0">
+                <a:solidFill>
+                  <a:srgbClr val="121018"/>
+                </a:solidFill>
+                <a:latin typeface="DIN Next LT W23"/>
+                <a:ea typeface="DIN Next LT W23"/>
+                <a:cs typeface="DIN Next LT W23"/>
+              </a:rPr>
+              <a:t>Backprop is the chain rule on a graph. Watch vanishing gradients, LR, and train vs val.</a:t>
+            </a:r>
+          </a:p>
+        </p:txBody>
+      </p:sp>
+      <p:sp>
+        <p:nvSpPr>
+          <p:cNvPr id="14" name="Rounded Rectangle 13"/>
+          <p:cNvSpPr/>
+          <p:nvPr/>
+        </p:nvSpPr>
+        <p:spPr>
+          <a:xfrm>
+            <a:off x="548640" y="4434840"/>
+            <a:ext cx="10972800" cy="987552"/>
+          </a:xfrm>
+          <a:prstGeom prst="roundRect">
+            <a:avLst>
+              <a:gd name="adj" fmla="val 10000"/>
+            </a:avLst>
+          </a:prstGeom>
+          <a:solidFill>
+            <a:srgbClr val="EEE8FA"/>
+          </a:solidFill>
+          <a:ln>
+            <a:noFill/>
+          </a:ln>
+          <a:effectLst/>
+        </p:spPr>
+        <p:style>
+          <a:lnRef idx="1">
+            <a:schemeClr val="accent1"/>
+          </a:lnRef>
+          <a:fillRef idx="3">
+            <a:schemeClr val="accent1"/>
+          </a:fillRef>
+          <a:effectRef idx="2">
+            <a:schemeClr val="accent1"/>
+          </a:effectRef>
+          <a:fontRef idx="minor">
+            <a:schemeClr val="lt1"/>
+          </a:fontRef>
+        </p:style>
+        <p:txBody>
+          <a:bodyPr rtlCol="0" anchor="ctr"/>
+          <a:lstStyle/>
+          <a:p>
+            <a:pPr algn="ctr"/>
+          </a:p>
+        </p:txBody>
+      </p:sp>
+      <p:sp>
+        <p:nvSpPr>
+          <p:cNvPr id="15" name="TextBox 14"/>
+          <p:cNvSpPr txBox="1"/>
+          <p:nvPr/>
+        </p:nvSpPr>
+        <p:spPr>
+          <a:xfrm>
+            <a:off x="822960" y="4690872"/>
+            <a:ext cx="457200" cy="457200"/>
+          </a:xfrm>
+          <a:prstGeom prst="rect">
+            <a:avLst/>
+          </a:prstGeom>
+          <a:noFill/>
+        </p:spPr>
+        <p:txBody>
+          <a:bodyPr wrap="square" anchor="t">
+            <a:spAutoFit/>
+          </a:bodyPr>
+          <a:lstStyle/>
+          <a:p>
+            <a:pPr algn="l"/>
+            <a:r>
+              <a:rPr sz="2200" b="1">
+                <a:solidFill>
+                  <a:srgbClr val="5234B7"/>
+                </a:solidFill>
+                <a:latin typeface="DIN Next LT W23"/>
+                <a:ea typeface="DIN Next LT W23"/>
+                <a:cs typeface="DIN Next LT W23"/>
+              </a:rPr>
+              <a:t>3</a:t>
+            </a:r>
+          </a:p>
+        </p:txBody>
+      </p:sp>
+      <p:sp>
+        <p:nvSpPr>
+          <p:cNvPr id="16" name="TextBox 15"/>
+          <p:cNvSpPr txBox="1"/>
+          <p:nvPr/>
+        </p:nvSpPr>
+        <p:spPr>
+          <a:xfrm>
+            <a:off x="1417320" y="4690872"/>
+            <a:ext cx="9692640" cy="548640"/>
+          </a:xfrm>
+          <a:prstGeom prst="rect">
+            <a:avLst/>
+          </a:prstGeom>
+          <a:noFill/>
+        </p:spPr>
+        <p:txBody>
+          <a:bodyPr wrap="square" anchor="t">
+            <a:spAutoFit/>
+          </a:bodyPr>
+          <a:lstStyle/>
+          <a:p>
+            <a:pPr algn="l"/>
+            <a:r>
+              <a:rPr sz="1600" b="0">
+                <a:solidFill>
+                  <a:srgbClr val="121018"/>
+                </a:solidFill>
+                <a:latin typeface="DIN Next LT W23"/>
+                <a:ea typeface="DIN Next LT W23"/>
+                <a:cs typeface="DIN Next LT W23"/>
+              </a:rPr>
+              <a:t>CNNs share filters across space; RNNs share weights across time; regularize so they generalize.</a:t>
+            </a:r>
+          </a:p>
+        </p:txBody>
+      </p:sp>
+      <p:sp>
+        <p:nvSpPr>
+          <p:cNvPr id="17" name="Rectangle 16"/>
           <p:cNvSpPr/>
           <p:nvPr/>
         </p:nvSpPr>
@@ -50389,7 +50720,7 @@
       </p:sp>
       <p:sp>
         <p:nvSpPr>
-          <p:cNvPr id="8" name="TextBox 7"/>
+          <p:cNvPr id="18" name="TextBox 17"/>
           <p:cNvSpPr txBox="1"/>
           <p:nvPr/>
         </p:nvSpPr>
@@ -50426,7 +50757,7 @@
       </p:sp>
       <p:sp>
         <p:nvSpPr>
-          <p:cNvPr id="9" name="TextBox 8"/>
+          <p:cNvPr id="19" name="TextBox 18"/>
           <p:cNvSpPr txBox="1"/>
           <p:nvPr/>
         </p:nvSpPr>
@@ -50456,7 +50787,330 @@
                 <a:ea typeface="DIN Next LT W23"/>
                 <a:cs typeface="DIN Next LT W23"/>
               </a:rPr>
-              <a:t>77  /  77</a:t>
+              <a:t>77  /  78</a:t>
+            </a:r>
+          </a:p>
+        </p:txBody>
+      </p:sp>
+    </p:spTree>
+  </p:cSld>
+  <p:clrMapOvr>
+    <a:masterClrMapping/>
+  </p:clrMapOvr>
+</p:sld>
+</file>
+
+<file path=ppt/slides/slide78.xml><?xml version="1.0" encoding="utf-8"?>
+<p:sld xmlns:a="http://schemas.openxmlformats.org/drawingml/2006/main" xmlns:p="http://schemas.openxmlformats.org/presentationml/2006/main" xmlns:r="http://schemas.openxmlformats.org/officeDocument/2006/relationships">
+  <p:cSld>
+    <p:bg>
+      <p:bgPr>
+        <a:solidFill>
+          <a:srgbClr val="FAF8FF"/>
+        </a:solidFill>
+        <a:effectLst/>
+      </p:bgPr>
+    </p:bg>
+    <p:spTree>
+      <p:nvGrpSpPr>
+        <p:cNvPr id="1" name=""/>
+        <p:cNvGrpSpPr/>
+        <p:nvPr/>
+      </p:nvGrpSpPr>
+      <p:grpSpPr/>
+      <p:sp>
+        <p:nvSpPr>
+          <p:cNvPr id="2" name="Rectangle 1"/>
+          <p:cNvSpPr/>
+          <p:nvPr/>
+        </p:nvSpPr>
+        <p:spPr>
+          <a:xfrm>
+            <a:off x="12136831" y="0"/>
+            <a:ext cx="54864" cy="6858000"/>
+          </a:xfrm>
+          <a:prstGeom prst="rect">
+            <a:avLst/>
+          </a:prstGeom>
+          <a:solidFill>
+            <a:srgbClr val="5234B7"/>
+          </a:solidFill>
+          <a:ln>
+            <a:noFill/>
+          </a:ln>
+          <a:effectLst/>
+        </p:spPr>
+        <p:style>
+          <a:lnRef idx="1">
+            <a:schemeClr val="accent1"/>
+          </a:lnRef>
+          <a:fillRef idx="3">
+            <a:schemeClr val="accent1"/>
+          </a:fillRef>
+          <a:effectRef idx="2">
+            <a:schemeClr val="accent1"/>
+          </a:effectRef>
+          <a:fontRef idx="minor">
+            <a:schemeClr val="lt1"/>
+          </a:fontRef>
+        </p:style>
+        <p:txBody>
+          <a:bodyPr rtlCol="0" anchor="ctr"/>
+          <a:lstStyle/>
+          <a:p>
+            <a:pPr algn="ctr"/>
+          </a:p>
+        </p:txBody>
+      </p:sp>
+      <p:pic>
+        <p:nvPicPr>
+          <p:cNvPr id="3" name="Picture 2" descr="etra-wordmark.png"/>
+          <p:cNvPicPr>
+            <a:picLocks noChangeAspect="1"/>
+          </p:cNvPicPr>
+          <p:nvPr/>
+        </p:nvPicPr>
+        <p:blipFill>
+          <a:blip r:embed="rId2"/>
+          <a:stretch>
+            <a:fillRect/>
+          </a:stretch>
+        </p:blipFill>
+        <p:spPr>
+          <a:xfrm>
+            <a:off x="10561320" y="411480"/>
+            <a:ext cx="1378516" cy="365760"/>
+          </a:xfrm>
+          <a:prstGeom prst="rect">
+            <a:avLst/>
+          </a:prstGeom>
+        </p:spPr>
+      </p:pic>
+      <p:sp>
+        <p:nvSpPr>
+          <p:cNvPr id="4" name="TextBox 3"/>
+          <p:cNvSpPr txBox="1"/>
+          <p:nvPr/>
+        </p:nvSpPr>
+        <p:spPr>
+          <a:xfrm>
+            <a:off x="548640" y="2651760"/>
+            <a:ext cx="10972800" cy="731520"/>
+          </a:xfrm>
+          <a:prstGeom prst="rect">
+            <a:avLst/>
+          </a:prstGeom>
+          <a:noFill/>
+        </p:spPr>
+        <p:txBody>
+          <a:bodyPr wrap="square" anchor="t">
+            <a:spAutoFit/>
+          </a:bodyPr>
+          <a:lstStyle/>
+          <a:p>
+            <a:pPr algn="ctr"/>
+            <a:r>
+              <a:rPr sz="4000" b="1">
+                <a:solidFill>
+                  <a:srgbClr val="5234B7"/>
+                </a:solidFill>
+                <a:latin typeface="DIN Next LT W23"/>
+                <a:ea typeface="DIN Next LT W23"/>
+                <a:cs typeface="DIN Next LT W23"/>
+              </a:rPr>
+              <a:t>Thank you</a:t>
+            </a:r>
+          </a:p>
+        </p:txBody>
+      </p:sp>
+      <p:sp>
+        <p:nvSpPr>
+          <p:cNvPr id="5" name="TextBox 4"/>
+          <p:cNvSpPr txBox="1"/>
+          <p:nvPr/>
+        </p:nvSpPr>
+        <p:spPr>
+          <a:xfrm>
+            <a:off x="548640" y="3474720"/>
+            <a:ext cx="10972800" cy="365760"/>
+          </a:xfrm>
+          <a:prstGeom prst="rect">
+            <a:avLst/>
+          </a:prstGeom>
+          <a:noFill/>
+        </p:spPr>
+        <p:txBody>
+          <a:bodyPr wrap="square" anchor="t">
+            <a:spAutoFit/>
+          </a:bodyPr>
+          <a:lstStyle/>
+          <a:p>
+            <a:pPr algn="ctr"/>
+            <a:r>
+              <a:rPr sz="1600" b="0">
+                <a:solidFill>
+                  <a:srgbClr val="5A5470"/>
+                </a:solidFill>
+                <a:latin typeface="DIN Next LT W23"/>
+                <a:ea typeface="DIN Next LT W23"/>
+                <a:cs typeface="DIN Next LT W23"/>
+              </a:rPr>
+              <a:t>Labs: code/15- Deep Learning</a:t>
+            </a:r>
+          </a:p>
+        </p:txBody>
+      </p:sp>
+      <p:sp>
+        <p:nvSpPr>
+          <p:cNvPr id="6" name="TextBox 5"/>
+          <p:cNvSpPr txBox="1"/>
+          <p:nvPr/>
+        </p:nvSpPr>
+        <p:spPr>
+          <a:xfrm>
+            <a:off x="548640" y="6126480"/>
+            <a:ext cx="5486400" cy="274320"/>
+          </a:xfrm>
+          <a:prstGeom prst="rect">
+            <a:avLst/>
+          </a:prstGeom>
+          <a:noFill/>
+        </p:spPr>
+        <p:txBody>
+          <a:bodyPr wrap="square" anchor="t">
+            <a:spAutoFit/>
+          </a:bodyPr>
+          <a:lstStyle/>
+          <a:p>
+            <a:pPr algn="l"/>
+            <a:r>
+              <a:rPr sz="1200" b="1">
+                <a:solidFill>
+                  <a:srgbClr val="5234B7"/>
+                </a:solidFill>
+                <a:latin typeface="DIN Next LT W23"/>
+                <a:ea typeface="DIN Next LT W23"/>
+                <a:cs typeface="DIN Next LT W23"/>
+              </a:rPr>
+              <a:t>ETRA</a:t>
+            </a:r>
+          </a:p>
+        </p:txBody>
+      </p:sp>
+      <p:sp>
+        <p:nvSpPr>
+          <p:cNvPr id="7" name="Rectangle 6"/>
+          <p:cNvSpPr/>
+          <p:nvPr/>
+        </p:nvSpPr>
+        <p:spPr>
+          <a:xfrm>
+            <a:off x="548640" y="6446520"/>
+            <a:ext cx="11064240" cy="10972"/>
+          </a:xfrm>
+          <a:prstGeom prst="rect">
+            <a:avLst/>
+          </a:prstGeom>
+          <a:solidFill>
+            <a:srgbClr val="5234B7"/>
+          </a:solidFill>
+          <a:ln>
+            <a:noFill/>
+          </a:ln>
+          <a:effectLst/>
+        </p:spPr>
+        <p:style>
+          <a:lnRef idx="1">
+            <a:schemeClr val="accent1"/>
+          </a:lnRef>
+          <a:fillRef idx="3">
+            <a:schemeClr val="accent1"/>
+          </a:fillRef>
+          <a:effectRef idx="2">
+            <a:schemeClr val="accent1"/>
+          </a:effectRef>
+          <a:fontRef idx="minor">
+            <a:schemeClr val="lt1"/>
+          </a:fontRef>
+        </p:style>
+        <p:txBody>
+          <a:bodyPr rtlCol="0" anchor="ctr"/>
+          <a:lstStyle/>
+          <a:p>
+            <a:pPr algn="ctr"/>
+          </a:p>
+        </p:txBody>
+      </p:sp>
+      <p:sp>
+        <p:nvSpPr>
+          <p:cNvPr id="8" name="TextBox 7"/>
+          <p:cNvSpPr txBox="1"/>
+          <p:nvPr/>
+        </p:nvSpPr>
+        <p:spPr>
+          <a:xfrm>
+            <a:off x="548640" y="6510528"/>
+            <a:ext cx="2743200" cy="256032"/>
+          </a:xfrm>
+          <a:prstGeom prst="rect">
+            <a:avLst/>
+          </a:prstGeom>
+          <a:noFill/>
+        </p:spPr>
+        <p:txBody>
+          <a:bodyPr wrap="square" anchor="t">
+            <a:spAutoFit/>
+          </a:bodyPr>
+          <a:lstStyle/>
+          <a:p>
+            <a:pPr algn="l"/>
+            <a:r>
+              <a:rPr sz="1100" b="1">
+                <a:solidFill>
+                  <a:srgbClr val="5234B7"/>
+                </a:solidFill>
+                <a:latin typeface="DIN Next LT W23"/>
+                <a:ea typeface="DIN Next LT W23"/>
+                <a:cs typeface="DIN Next LT W23"/>
+              </a:rPr>
+              <a:t>ETRA</a:t>
+            </a:r>
+          </a:p>
+        </p:txBody>
+      </p:sp>
+      <p:sp>
+        <p:nvSpPr>
+          <p:cNvPr id="9" name="TextBox 8"/>
+          <p:cNvSpPr txBox="1"/>
+          <p:nvPr/>
+        </p:nvSpPr>
+        <p:spPr>
+          <a:xfrm>
+            <a:off x="9601200" y="6510528"/>
+            <a:ext cx="2011680" cy="256032"/>
+          </a:xfrm>
+          <a:prstGeom prst="rect">
+            <a:avLst/>
+          </a:prstGeom>
+          <a:noFill/>
+        </p:spPr>
+        <p:txBody>
+          <a:bodyPr wrap="square" anchor="t">
+            <a:spAutoFit/>
+          </a:bodyPr>
+          <a:lstStyle/>
+          <a:p>
+            <a:pPr algn="r"/>
+            <a:r>
+              <a:rPr sz="1100" b="0">
+                <a:solidFill>
+                  <a:srgbClr val="5A5470"/>
+                </a:solidFill>
+                <a:latin typeface="DIN Next LT W23"/>
+                <a:ea typeface="DIN Next LT W23"/>
+                <a:cs typeface="DIN Next LT W23"/>
+              </a:rPr>
+              <a:t>78  /  78</a:t>
             </a:r>
           </a:p>
         </p:txBody>
@@ -51124,7 +51778,7 @@
                 <a:ea typeface="DIN Next LT W23"/>
                 <a:cs typeface="DIN Next LT W23"/>
               </a:rPr>
-              <a:t>08  /  77</a:t>
+              <a:t>08  /  78</a:t>
             </a:r>
           </a:p>
         </p:txBody>
@@ -51755,7 +52409,7 @@
                 <a:ea typeface="DIN Next LT W23"/>
                 <a:cs typeface="DIN Next LT W23"/>
               </a:rPr>
-              <a:t>09  /  77</a:t>
+              <a:t>09  /  78</a:t>
             </a:r>
           </a:p>
         </p:txBody>

--- a/web-presentation/pdf-exports/Week2-Session1-Deep-Learning.pptx
+++ b/web-presentation/pdf-exports/Week2-Session1-Deep-Learning.pptx
@@ -83,6 +83,7 @@
     <p:sldId id="331" r:id="rId82"/>
     <p:sldId id="332" r:id="rId83"/>
     <p:sldId id="333" r:id="rId84"/>
+    <p:sldId id="334" r:id="rId85"/>
   </p:sldIdLst>
   <p:sldSz cx="12191695" cy="6858000" type="screen4x3"/>
   <p:notesSz cx="6858000" cy="9144000"/>
@@ -4025,7 +4026,7 @@
                 <a:ea typeface="DIN Next LT W23"/>
                 <a:cs typeface="DIN Next LT W23"/>
               </a:rPr>
-              <a:t>10  /  78</a:t>
+              <a:t>10  /  79</a:t>
             </a:r>
           </a:p>
         </p:txBody>
@@ -4693,7 +4694,7 @@
                 <a:ea typeface="DIN Next LT W23"/>
                 <a:cs typeface="DIN Next LT W23"/>
               </a:rPr>
-              <a:t>11  /  78</a:t>
+              <a:t>11  /  79</a:t>
             </a:r>
           </a:p>
         </p:txBody>
@@ -5167,7 +5168,7 @@
                 <a:ea typeface="DIN Next LT W23"/>
                 <a:cs typeface="DIN Next LT W23"/>
               </a:rPr>
-              <a:t>12  /  78</a:t>
+              <a:t>12  /  79</a:t>
             </a:r>
           </a:p>
         </p:txBody>
@@ -5756,7 +5757,7 @@
                 <a:ea typeface="DIN Next LT W23"/>
                 <a:cs typeface="DIN Next LT W23"/>
               </a:rPr>
-              <a:t>13  /  78</a:t>
+              <a:t>13  /  79</a:t>
             </a:r>
           </a:p>
         </p:txBody>
@@ -6230,7 +6231,7 @@
                 <a:ea typeface="DIN Next LT W23"/>
                 <a:cs typeface="DIN Next LT W23"/>
               </a:rPr>
-              <a:t>14  /  78</a:t>
+              <a:t>14  /  79</a:t>
             </a:r>
           </a:p>
         </p:txBody>
@@ -6898,7 +6899,7 @@
                 <a:ea typeface="DIN Next LT W23"/>
                 <a:cs typeface="DIN Next LT W23"/>
               </a:rPr>
-              <a:t>15  /  78</a:t>
+              <a:t>15  /  79</a:t>
             </a:r>
           </a:p>
         </p:txBody>
@@ -7487,7 +7488,7 @@
                 <a:ea typeface="DIN Next LT W23"/>
                 <a:cs typeface="DIN Next LT W23"/>
               </a:rPr>
-              <a:t>16  /  78</a:t>
+              <a:t>16  /  79</a:t>
             </a:r>
           </a:p>
         </p:txBody>
@@ -8307,7 +8308,7 @@
                 <a:ea typeface="DIN Next LT W23"/>
                 <a:cs typeface="DIN Next LT W23"/>
               </a:rPr>
-              <a:t>17  /  78</a:t>
+              <a:t>17  /  79</a:t>
             </a:r>
           </a:p>
         </p:txBody>
@@ -9086,7 +9087,7 @@
                 <a:ea typeface="DIN Next LT W23"/>
                 <a:cs typeface="DIN Next LT W23"/>
               </a:rPr>
-              <a:t>18  /  78</a:t>
+              <a:t>18  /  79</a:t>
             </a:r>
           </a:p>
         </p:txBody>
@@ -9802,7 +9803,7 @@
                 <a:ea typeface="DIN Next LT W23"/>
                 <a:cs typeface="DIN Next LT W23"/>
               </a:rPr>
-              <a:t>19  /  78</a:t>
+              <a:t>19  /  79</a:t>
             </a:r>
           </a:p>
         </p:txBody>
@@ -11721,7 +11722,7 @@
                 <a:ea typeface="DIN Next LT W23"/>
                 <a:cs typeface="DIN Next LT W23"/>
               </a:rPr>
-              <a:t>02  /  78</a:t>
+              <a:t>02  /  79</a:t>
             </a:r>
           </a:p>
         </p:txBody>
@@ -12385,7 +12386,7 @@
                 <a:ea typeface="DIN Next LT W23"/>
                 <a:cs typeface="DIN Next LT W23"/>
               </a:rPr>
-              <a:t>20  /  78</a:t>
+              <a:t>20  /  79</a:t>
             </a:r>
           </a:p>
         </p:txBody>
@@ -13048,7 +13049,7 @@
                 <a:ea typeface="DIN Next LT W23"/>
                 <a:cs typeface="DIN Next LT W23"/>
               </a:rPr>
-              <a:t>21  /  78</a:t>
+              <a:t>21  /  79</a:t>
             </a:r>
           </a:p>
         </p:txBody>
@@ -13880,7 +13881,7 @@
                 <a:ea typeface="DIN Next LT W23"/>
                 <a:cs typeface="DIN Next LT W23"/>
               </a:rPr>
-              <a:t>22  /  78</a:t>
+              <a:t>22  /  79</a:t>
             </a:r>
           </a:p>
         </p:txBody>
@@ -14469,7 +14470,7 @@
                 <a:ea typeface="DIN Next LT W23"/>
                 <a:cs typeface="DIN Next LT W23"/>
               </a:rPr>
-              <a:t>23  /  78</a:t>
+              <a:t>23  /  79</a:t>
             </a:r>
           </a:p>
         </p:txBody>
@@ -15174,7 +15175,7 @@
                 <a:ea typeface="DIN Next LT W23"/>
                 <a:cs typeface="DIN Next LT W23"/>
               </a:rPr>
-              <a:t>24  /  78</a:t>
+              <a:t>24  /  79</a:t>
             </a:r>
           </a:p>
         </p:txBody>
@@ -15852,7 +15853,7 @@
                 <a:ea typeface="DIN Next LT W23"/>
                 <a:cs typeface="DIN Next LT W23"/>
               </a:rPr>
-              <a:t>25  /  78</a:t>
+              <a:t>25  /  79</a:t>
             </a:r>
           </a:p>
         </p:txBody>
@@ -16372,7 +16373,7 @@
                 <a:ea typeface="DIN Next LT W23"/>
                 <a:cs typeface="DIN Next LT W23"/>
               </a:rPr>
-              <a:t>26  /  78</a:t>
+              <a:t>26  /  79</a:t>
             </a:r>
           </a:p>
         </p:txBody>
@@ -16846,7 +16847,7 @@
                 <a:ea typeface="DIN Next LT W23"/>
                 <a:cs typeface="DIN Next LT W23"/>
               </a:rPr>
-              <a:t>27  /  78</a:t>
+              <a:t>27  /  79</a:t>
             </a:r>
           </a:p>
         </p:txBody>
@@ -17435,7 +17436,7 @@
                 <a:ea typeface="DIN Next LT W23"/>
                 <a:cs typeface="DIN Next LT W23"/>
               </a:rPr>
-              <a:t>28  /  78</a:t>
+              <a:t>28  /  79</a:t>
             </a:r>
           </a:p>
         </p:txBody>
@@ -18113,7 +18114,7 @@
                 <a:ea typeface="DIN Next LT W23"/>
                 <a:cs typeface="DIN Next LT W23"/>
               </a:rPr>
-              <a:t>29  /  78</a:t>
+              <a:t>29  /  79</a:t>
             </a:r>
           </a:p>
         </p:txBody>
@@ -18986,7 +18987,7 @@
                 <a:ea typeface="DIN Next LT W23"/>
                 <a:cs typeface="DIN Next LT W23"/>
               </a:rPr>
-              <a:t>03  /  78</a:t>
+              <a:t>03  /  79</a:t>
             </a:r>
           </a:p>
         </p:txBody>
@@ -19650,7 +19651,7 @@
                 <a:ea typeface="DIN Next LT W23"/>
                 <a:cs typeface="DIN Next LT W23"/>
               </a:rPr>
-              <a:t>30  /  78</a:t>
+              <a:t>30  /  79</a:t>
             </a:r>
           </a:p>
         </p:txBody>
@@ -20124,7 +20125,7 @@
                 <a:ea typeface="DIN Next LT W23"/>
                 <a:cs typeface="DIN Next LT W23"/>
               </a:rPr>
-              <a:t>31  /  78</a:t>
+              <a:t>31  /  79</a:t>
             </a:r>
           </a:p>
         </p:txBody>
@@ -20713,7 +20714,7 @@
                 <a:ea typeface="DIN Next LT W23"/>
                 <a:cs typeface="DIN Next LT W23"/>
               </a:rPr>
-              <a:t>32  /  78</a:t>
+              <a:t>32  /  79</a:t>
             </a:r>
           </a:p>
         </p:txBody>
@@ -21187,7 +21188,7 @@
                 <a:ea typeface="DIN Next LT W23"/>
                 <a:cs typeface="DIN Next LT W23"/>
               </a:rPr>
-              <a:t>33  /  78</a:t>
+              <a:t>33  /  79</a:t>
             </a:r>
           </a:p>
         </p:txBody>
@@ -22019,7 +22020,7 @@
                 <a:ea typeface="DIN Next LT W23"/>
                 <a:cs typeface="DIN Next LT W23"/>
               </a:rPr>
-              <a:t>34  /  78</a:t>
+              <a:t>34  /  79</a:t>
             </a:r>
           </a:p>
         </p:txBody>
@@ -22683,7 +22684,7 @@
                 <a:ea typeface="DIN Next LT W23"/>
                 <a:cs typeface="DIN Next LT W23"/>
               </a:rPr>
-              <a:t>35  /  78</a:t>
+              <a:t>35  /  79</a:t>
             </a:r>
           </a:p>
         </p:txBody>
@@ -23157,7 +23158,7 @@
                 <a:ea typeface="DIN Next LT W23"/>
                 <a:cs typeface="DIN Next LT W23"/>
               </a:rPr>
-              <a:t>36  /  78</a:t>
+              <a:t>36  /  79</a:t>
             </a:r>
           </a:p>
         </p:txBody>
@@ -23746,7 +23747,7 @@
                 <a:ea typeface="DIN Next LT W23"/>
                 <a:cs typeface="DIN Next LT W23"/>
               </a:rPr>
-              <a:t>37  /  78</a:t>
+              <a:t>37  /  79</a:t>
             </a:r>
           </a:p>
         </p:txBody>
@@ -24331,7 +24332,7 @@
                 <a:ea typeface="DIN Next LT W23"/>
                 <a:cs typeface="DIN Next LT W23"/>
               </a:rPr>
-              <a:t>38  /  78</a:t>
+              <a:t>38  /  79</a:t>
             </a:r>
           </a:p>
         </p:txBody>
@@ -24805,7 +24806,7 @@
                 <a:ea typeface="DIN Next LT W23"/>
                 <a:cs typeface="DIN Next LT W23"/>
               </a:rPr>
-              <a:t>39  /  78</a:t>
+              <a:t>39  /  79</a:t>
             </a:r>
           </a:p>
         </p:txBody>
@@ -25616,7 +25617,7 @@
                 <a:ea typeface="DIN Next LT W23"/>
                 <a:cs typeface="DIN Next LT W23"/>
               </a:rPr>
-              <a:t>04  /  78</a:t>
+              <a:t>04  /  79</a:t>
             </a:r>
           </a:p>
         </p:txBody>
@@ -26205,7 +26206,7 @@
                 <a:ea typeface="DIN Next LT W23"/>
                 <a:cs typeface="DIN Next LT W23"/>
               </a:rPr>
-              <a:t>40  /  78</a:t>
+              <a:t>40  /  79</a:t>
             </a:r>
           </a:p>
         </p:txBody>
@@ -26883,7 +26884,7 @@
                 <a:ea typeface="DIN Next LT W23"/>
                 <a:cs typeface="DIN Next LT W23"/>
               </a:rPr>
-              <a:t>41  /  78</a:t>
+              <a:t>41  /  79</a:t>
             </a:r>
           </a:p>
         </p:txBody>
@@ -27357,7 +27358,7 @@
                 <a:ea typeface="DIN Next LT W23"/>
                 <a:cs typeface="DIN Next LT W23"/>
               </a:rPr>
-              <a:t>42  /  78</a:t>
+              <a:t>42  /  79</a:t>
             </a:r>
           </a:p>
         </p:txBody>
@@ -28025,7 +28026,7 @@
                 <a:ea typeface="DIN Next LT W23"/>
                 <a:cs typeface="DIN Next LT W23"/>
               </a:rPr>
-              <a:t>43  /  78</a:t>
+              <a:t>43  /  79</a:t>
             </a:r>
           </a:p>
         </p:txBody>
@@ -28730,7 +28731,7 @@
                 <a:ea typeface="DIN Next LT W23"/>
                 <a:cs typeface="DIN Next LT W23"/>
               </a:rPr>
-              <a:t>44  /  78</a:t>
+              <a:t>44  /  79</a:t>
             </a:r>
           </a:p>
         </p:txBody>
@@ -29398,7 +29399,7 @@
                 <a:ea typeface="DIN Next LT W23"/>
                 <a:cs typeface="DIN Next LT W23"/>
               </a:rPr>
-              <a:t>45  /  78</a:t>
+              <a:t>45  /  79</a:t>
             </a:r>
           </a:p>
         </p:txBody>
@@ -29946,7 +29947,7 @@
                 <a:ea typeface="DIN Next LT W23"/>
                 <a:cs typeface="DIN Next LT W23"/>
               </a:rPr>
-              <a:t>46  /  78</a:t>
+              <a:t>46  /  79</a:t>
             </a:r>
           </a:p>
         </p:txBody>
@@ -30420,7 +30421,7 @@
                 <a:ea typeface="DIN Next LT W23"/>
                 <a:cs typeface="DIN Next LT W23"/>
               </a:rPr>
-              <a:t>47  /  78</a:t>
+              <a:t>47  /  79</a:t>
             </a:r>
           </a:p>
         </p:txBody>
@@ -30972,7 +30973,7 @@
                 <a:ea typeface="DIN Next LT W23"/>
                 <a:cs typeface="DIN Next LT W23"/>
               </a:rPr>
-              <a:t>48  /  78</a:t>
+              <a:t>48  /  79</a:t>
             </a:r>
           </a:p>
         </p:txBody>
@@ -31592,7 +31593,7 @@
                 <a:ea typeface="DIN Next LT W23"/>
                 <a:cs typeface="DIN Next LT W23"/>
               </a:rPr>
-              <a:t>49  /  78</a:t>
+              <a:t>49  /  79</a:t>
             </a:r>
           </a:p>
         </p:txBody>
@@ -32371,7 +32372,7 @@
                 <a:ea typeface="DIN Next LT W23"/>
                 <a:cs typeface="DIN Next LT W23"/>
               </a:rPr>
-              <a:t>05  /  78</a:t>
+              <a:t>05  /  79</a:t>
             </a:r>
           </a:p>
         </p:txBody>
@@ -32886,7 +32887,7 @@
                 <a:ea typeface="DIN Next LT W23"/>
                 <a:cs typeface="DIN Next LT W23"/>
               </a:rPr>
-              <a:t>50  /  78</a:t>
+              <a:t>50  /  79</a:t>
             </a:r>
           </a:p>
         </p:txBody>
@@ -33471,7 +33472,7 @@
                 <a:ea typeface="DIN Next LT W23"/>
                 <a:cs typeface="DIN Next LT W23"/>
               </a:rPr>
-              <a:t>51  /  78</a:t>
+              <a:t>51  /  79</a:t>
             </a:r>
           </a:p>
         </p:txBody>
@@ -34060,7 +34061,7 @@
                 <a:ea typeface="DIN Next LT W23"/>
                 <a:cs typeface="DIN Next LT W23"/>
               </a:rPr>
-              <a:t>52  /  78</a:t>
+              <a:t>52  /  79</a:t>
             </a:r>
           </a:p>
         </p:txBody>
@@ -34534,7 +34535,7 @@
                 <a:ea typeface="DIN Next LT W23"/>
                 <a:cs typeface="DIN Next LT W23"/>
               </a:rPr>
-              <a:t>53  /  78</a:t>
+              <a:t>53  /  79</a:t>
             </a:r>
           </a:p>
         </p:txBody>
@@ -35305,7 +35306,7 @@
                 <a:ea typeface="DIN Next LT W23"/>
                 <a:cs typeface="DIN Next LT W23"/>
               </a:rPr>
-              <a:t>54  /  78</a:t>
+              <a:t>54  /  79</a:t>
             </a:r>
           </a:p>
         </p:txBody>
@@ -35894,7 +35895,7 @@
                 <a:ea typeface="DIN Next LT W23"/>
                 <a:cs typeface="DIN Next LT W23"/>
               </a:rPr>
-              <a:t>55  /  78</a:t>
+              <a:t>55  /  79</a:t>
             </a:r>
           </a:p>
         </p:txBody>
@@ -36572,7 +36573,7 @@
                 <a:ea typeface="DIN Next LT W23"/>
                 <a:cs typeface="DIN Next LT W23"/>
               </a:rPr>
-              <a:t>56  /  78</a:t>
+              <a:t>56  /  79</a:t>
             </a:r>
           </a:p>
         </p:txBody>
@@ -37198,7 +37199,7 @@
                 <a:ea typeface="DIN Next LT W23"/>
                 <a:cs typeface="DIN Next LT W23"/>
               </a:rPr>
-              <a:t>57  /  78</a:t>
+              <a:t>57  /  79</a:t>
             </a:r>
           </a:p>
         </p:txBody>
@@ -37672,7 +37673,7 @@
                 <a:ea typeface="DIN Next LT W23"/>
                 <a:cs typeface="DIN Next LT W23"/>
               </a:rPr>
-              <a:t>58  /  78</a:t>
+              <a:t>58  /  79</a:t>
             </a:r>
           </a:p>
         </p:txBody>
@@ -38433,7 +38434,7 @@
                 <a:ea typeface="DIN Next LT W23"/>
                 <a:cs typeface="DIN Next LT W23"/>
               </a:rPr>
-              <a:t>59  /  78</a:t>
+              <a:t>59  /  79</a:t>
             </a:r>
           </a:p>
         </p:txBody>
@@ -38944,7 +38945,7 @@
                 <a:ea typeface="DIN Next LT W23"/>
                 <a:cs typeface="DIN Next LT W23"/>
               </a:rPr>
-              <a:t>06  /  78</a:t>
+              <a:t>06  /  79</a:t>
             </a:r>
           </a:p>
         </p:txBody>
@@ -39418,7 +39419,7 @@
                 <a:ea typeface="DIN Next LT W23"/>
                 <a:cs typeface="DIN Next LT W23"/>
               </a:rPr>
-              <a:t>60  /  78</a:t>
+              <a:t>60  /  79</a:t>
             </a:r>
           </a:p>
         </p:txBody>
@@ -40086,7 +40087,7 @@
                 <a:ea typeface="DIN Next LT W23"/>
                 <a:cs typeface="DIN Next LT W23"/>
               </a:rPr>
-              <a:t>61  /  78</a:t>
+              <a:t>61  /  79</a:t>
             </a:r>
           </a:p>
         </p:txBody>
@@ -40693,7 +40694,7 @@
                 <a:ea typeface="DIN Next LT W23"/>
                 <a:cs typeface="DIN Next LT W23"/>
               </a:rPr>
-              <a:t>62  /  78</a:t>
+              <a:t>62  /  79</a:t>
             </a:r>
           </a:p>
         </p:txBody>
@@ -41472,7 +41473,7 @@
                 <a:ea typeface="DIN Next LT W23"/>
                 <a:cs typeface="DIN Next LT W23"/>
               </a:rPr>
-              <a:t>63  /  78</a:t>
+              <a:t>63  /  79</a:t>
             </a:r>
           </a:p>
         </p:txBody>
@@ -41983,7 +41984,7 @@
                 <a:ea typeface="DIN Next LT W23"/>
                 <a:cs typeface="DIN Next LT W23"/>
               </a:rPr>
-              <a:t>64  /  78</a:t>
+              <a:t>64  /  79</a:t>
             </a:r>
           </a:p>
         </p:txBody>
@@ -42699,7 +42700,7 @@
                 <a:ea typeface="DIN Next LT W23"/>
                 <a:cs typeface="DIN Next LT W23"/>
               </a:rPr>
-              <a:t>65  /  78</a:t>
+              <a:t>65  /  79</a:t>
             </a:r>
           </a:p>
         </p:txBody>
@@ -43210,7 +43211,7 @@
                 <a:ea typeface="DIN Next LT W23"/>
                 <a:cs typeface="DIN Next LT W23"/>
               </a:rPr>
-              <a:t>66  /  78</a:t>
+              <a:t>66  /  79</a:t>
             </a:r>
           </a:p>
         </p:txBody>
@@ -43952,7 +43953,7 @@
                 <a:ea typeface="DIN Next LT W23"/>
                 <a:cs typeface="DIN Next LT W23"/>
               </a:rPr>
-              <a:t>67  /  78</a:t>
+              <a:t>67  /  79</a:t>
             </a:r>
           </a:p>
         </p:txBody>
@@ -44426,7 +44427,7 @@
                 <a:ea typeface="DIN Next LT W23"/>
                 <a:cs typeface="DIN Next LT W23"/>
               </a:rPr>
-              <a:t>68  /  78</a:t>
+              <a:t>68  /  79</a:t>
             </a:r>
           </a:p>
         </p:txBody>
@@ -44937,7 +44938,7 @@
                 <a:ea typeface="DIN Next LT W23"/>
                 <a:cs typeface="DIN Next LT W23"/>
               </a:rPr>
-              <a:t>69  /  78</a:t>
+              <a:t>69  /  79</a:t>
             </a:r>
           </a:p>
         </p:txBody>
@@ -45642,7 +45643,7 @@
                 <a:ea typeface="DIN Next LT W23"/>
                 <a:cs typeface="DIN Next LT W23"/>
               </a:rPr>
-              <a:t>07  /  78</a:t>
+              <a:t>07  /  79</a:t>
             </a:r>
           </a:p>
         </p:txBody>
@@ -46310,7 +46311,7 @@
                 <a:ea typeface="DIN Next LT W23"/>
                 <a:cs typeface="DIN Next LT W23"/>
               </a:rPr>
-              <a:t>70  /  78</a:t>
+              <a:t>70  /  79</a:t>
             </a:r>
           </a:p>
         </p:txBody>
@@ -46904,7 +46905,7 @@
                 <a:ea typeface="DIN Next LT W23"/>
                 <a:cs typeface="DIN Next LT W23"/>
               </a:rPr>
-              <a:t>71  /  78</a:t>
+              <a:t>71  /  79</a:t>
             </a:r>
           </a:p>
         </p:txBody>
@@ -47116,7 +47117,7 @@
                 <a:ea typeface="DIN Next LT W23"/>
                 <a:cs typeface="DIN Next LT W23"/>
               </a:rPr>
-              <a:t>Regularization Toolkit</a:t>
+              <a:t>Regularization: Dropout, Weight Decay, and Early Stopping</a:t>
             </a:r>
           </a:p>
         </p:txBody>
@@ -47153,7 +47154,596 @@
                 <a:ea typeface="DIN Next LT W23"/>
                 <a:cs typeface="DIN Next LT W23"/>
               </a:rPr>
-              <a:t>Three Levers You Will Use Together</a:t>
+              <a:t>Constrain Capacity to Prevent Overfitting</a:t>
+            </a:r>
+          </a:p>
+        </p:txBody>
+      </p:sp>
+      <p:sp>
+        <p:nvSpPr>
+          <p:cNvPr id="8" name="TextBox 7"/>
+          <p:cNvSpPr txBox="1"/>
+          <p:nvPr/>
+        </p:nvSpPr>
+        <p:spPr>
+          <a:xfrm>
+            <a:off x="548640" y="2148840"/>
+            <a:ext cx="320040" cy="411480"/>
+          </a:xfrm>
+          <a:prstGeom prst="rect">
+            <a:avLst/>
+          </a:prstGeom>
+          <a:noFill/>
+        </p:spPr>
+        <p:txBody>
+          <a:bodyPr wrap="square" anchor="t">
+            <a:spAutoFit/>
+          </a:bodyPr>
+          <a:lstStyle/>
+          <a:p>
+            <a:pPr algn="l"/>
+            <a:r>
+              <a:rPr sz="1700" b="0">
+                <a:solidFill>
+                  <a:srgbClr val="9E59CD"/>
+                </a:solidFill>
+                <a:latin typeface="DIN Next LT W23"/>
+                <a:ea typeface="DIN Next LT W23"/>
+                <a:cs typeface="DIN Next LT W23"/>
+              </a:rPr>
+              <a:t>–</a:t>
+            </a:r>
+          </a:p>
+        </p:txBody>
+      </p:sp>
+      <p:sp>
+        <p:nvSpPr>
+          <p:cNvPr id="9" name="TextBox 8"/>
+          <p:cNvSpPr txBox="1"/>
+          <p:nvPr/>
+        </p:nvSpPr>
+        <p:spPr>
+          <a:xfrm>
+            <a:off x="914400" y="2148840"/>
+            <a:ext cx="9875519" cy="411480"/>
+          </a:xfrm>
+          <a:prstGeom prst="rect">
+            <a:avLst/>
+          </a:prstGeom>
+          <a:noFill/>
+        </p:spPr>
+        <p:txBody>
+          <a:bodyPr wrap="square" anchor="t">
+            <a:spAutoFit/>
+          </a:bodyPr>
+          <a:lstStyle/>
+          <a:p>
+            <a:pPr algn="l"/>
+            <a:r>
+              <a:rPr sz="1700" b="0">
+                <a:solidFill>
+                  <a:srgbClr val="121018"/>
+                </a:solidFill>
+                <a:latin typeface="DIN Next LT W23"/>
+                <a:ea typeface="DIN Next LT W23"/>
+                <a:cs typeface="DIN Next LT W23"/>
+              </a:rPr>
+              <a:t>Dropout acts as a powerful implicit ensemble method; disabled during inference (evaluation mode).</a:t>
+            </a:r>
+          </a:p>
+        </p:txBody>
+      </p:sp>
+      <p:sp>
+        <p:nvSpPr>
+          <p:cNvPr id="10" name="TextBox 9"/>
+          <p:cNvSpPr txBox="1"/>
+          <p:nvPr/>
+        </p:nvSpPr>
+        <p:spPr>
+          <a:xfrm>
+            <a:off x="548640" y="2715768"/>
+            <a:ext cx="320040" cy="411480"/>
+          </a:xfrm>
+          <a:prstGeom prst="rect">
+            <a:avLst/>
+          </a:prstGeom>
+          <a:noFill/>
+        </p:spPr>
+        <p:txBody>
+          <a:bodyPr wrap="square" anchor="t">
+            <a:spAutoFit/>
+          </a:bodyPr>
+          <a:lstStyle/>
+          <a:p>
+            <a:pPr algn="l"/>
+            <a:r>
+              <a:rPr sz="1700" b="0">
+                <a:solidFill>
+                  <a:srgbClr val="9E59CD"/>
+                </a:solidFill>
+                <a:latin typeface="DIN Next LT W23"/>
+                <a:ea typeface="DIN Next LT W23"/>
+                <a:cs typeface="DIN Next LT W23"/>
+              </a:rPr>
+              <a:t>–</a:t>
+            </a:r>
+          </a:p>
+        </p:txBody>
+      </p:sp>
+      <p:sp>
+        <p:nvSpPr>
+          <p:cNvPr id="11" name="TextBox 10"/>
+          <p:cNvSpPr txBox="1"/>
+          <p:nvPr/>
+        </p:nvSpPr>
+        <p:spPr>
+          <a:xfrm>
+            <a:off x="914400" y="2715768"/>
+            <a:ext cx="9875519" cy="411480"/>
+          </a:xfrm>
+          <a:prstGeom prst="rect">
+            <a:avLst/>
+          </a:prstGeom>
+          <a:noFill/>
+        </p:spPr>
+        <p:txBody>
+          <a:bodyPr wrap="square" anchor="t">
+            <a:spAutoFit/>
+          </a:bodyPr>
+          <a:lstStyle/>
+          <a:p>
+            <a:pPr algn="l"/>
+            <a:r>
+              <a:rPr sz="1700" b="0">
+                <a:solidFill>
+                  <a:srgbClr val="121018"/>
+                </a:solidFill>
+                <a:latin typeface="DIN Next LT W23"/>
+                <a:ea typeface="DIN Next LT W23"/>
+                <a:cs typeface="DIN Next LT W23"/>
+              </a:rPr>
+              <a:t>Weight Decay (L2 regularization): adds a penalty to the loss proportional to the squared sum of weights to keep weights small and smooth.</a:t>
+            </a:r>
+          </a:p>
+        </p:txBody>
+      </p:sp>
+      <p:sp>
+        <p:nvSpPr>
+          <p:cNvPr id="12" name="TextBox 11"/>
+          <p:cNvSpPr txBox="1"/>
+          <p:nvPr/>
+        </p:nvSpPr>
+        <p:spPr>
+          <a:xfrm>
+            <a:off x="548640" y="3282696"/>
+            <a:ext cx="320040" cy="411480"/>
+          </a:xfrm>
+          <a:prstGeom prst="rect">
+            <a:avLst/>
+          </a:prstGeom>
+          <a:noFill/>
+        </p:spPr>
+        <p:txBody>
+          <a:bodyPr wrap="square" anchor="t">
+            <a:spAutoFit/>
+          </a:bodyPr>
+          <a:lstStyle/>
+          <a:p>
+            <a:pPr algn="l"/>
+            <a:r>
+              <a:rPr sz="1700" b="0">
+                <a:solidFill>
+                  <a:srgbClr val="9E59CD"/>
+                </a:solidFill>
+                <a:latin typeface="DIN Next LT W23"/>
+                <a:ea typeface="DIN Next LT W23"/>
+                <a:cs typeface="DIN Next LT W23"/>
+              </a:rPr>
+              <a:t>–</a:t>
+            </a:r>
+          </a:p>
+        </p:txBody>
+      </p:sp>
+      <p:sp>
+        <p:nvSpPr>
+          <p:cNvPr id="13" name="TextBox 12"/>
+          <p:cNvSpPr txBox="1"/>
+          <p:nvPr/>
+        </p:nvSpPr>
+        <p:spPr>
+          <a:xfrm>
+            <a:off x="914400" y="3282696"/>
+            <a:ext cx="9875519" cy="411480"/>
+          </a:xfrm>
+          <a:prstGeom prst="rect">
+            <a:avLst/>
+          </a:prstGeom>
+          <a:noFill/>
+        </p:spPr>
+        <p:txBody>
+          <a:bodyPr wrap="square" anchor="t">
+            <a:spAutoFit/>
+          </a:bodyPr>
+          <a:lstStyle/>
+          <a:p>
+            <a:pPr algn="l"/>
+            <a:r>
+              <a:rPr sz="1700" b="0">
+                <a:solidFill>
+                  <a:srgbClr val="121018"/>
+                </a:solidFill>
+                <a:latin typeface="DIN Next LT W23"/>
+                <a:ea typeface="DIN Next LT W23"/>
+                <a:cs typeface="DIN Next LT W23"/>
+              </a:rPr>
+              <a:t>Early stopping: monitor validation loss during training and stop when it ceases to improve for a certain number of epochs (patience).</a:t>
+            </a:r>
+          </a:p>
+        </p:txBody>
+      </p:sp>
+      <p:sp>
+        <p:nvSpPr>
+          <p:cNvPr id="14" name="Rectangle 13"/>
+          <p:cNvSpPr/>
+          <p:nvPr/>
+        </p:nvSpPr>
+        <p:spPr>
+          <a:xfrm>
+            <a:off x="548640" y="6446520"/>
+            <a:ext cx="11064240" cy="10972"/>
+          </a:xfrm>
+          <a:prstGeom prst="rect">
+            <a:avLst/>
+          </a:prstGeom>
+          <a:solidFill>
+            <a:srgbClr val="5234B7"/>
+          </a:solidFill>
+          <a:ln>
+            <a:noFill/>
+          </a:ln>
+          <a:effectLst/>
+        </p:spPr>
+        <p:style>
+          <a:lnRef idx="1">
+            <a:schemeClr val="accent1"/>
+          </a:lnRef>
+          <a:fillRef idx="3">
+            <a:schemeClr val="accent1"/>
+          </a:fillRef>
+          <a:effectRef idx="2">
+            <a:schemeClr val="accent1"/>
+          </a:effectRef>
+          <a:fontRef idx="minor">
+            <a:schemeClr val="lt1"/>
+          </a:fontRef>
+        </p:style>
+        <p:txBody>
+          <a:bodyPr rtlCol="0" anchor="ctr"/>
+          <a:lstStyle/>
+          <a:p>
+            <a:pPr algn="ctr"/>
+          </a:p>
+        </p:txBody>
+      </p:sp>
+      <p:sp>
+        <p:nvSpPr>
+          <p:cNvPr id="15" name="TextBox 14"/>
+          <p:cNvSpPr txBox="1"/>
+          <p:nvPr/>
+        </p:nvSpPr>
+        <p:spPr>
+          <a:xfrm>
+            <a:off x="548640" y="6510528"/>
+            <a:ext cx="2743200" cy="256032"/>
+          </a:xfrm>
+          <a:prstGeom prst="rect">
+            <a:avLst/>
+          </a:prstGeom>
+          <a:noFill/>
+        </p:spPr>
+        <p:txBody>
+          <a:bodyPr wrap="square" anchor="t">
+            <a:spAutoFit/>
+          </a:bodyPr>
+          <a:lstStyle/>
+          <a:p>
+            <a:pPr algn="l"/>
+            <a:r>
+              <a:rPr sz="1100" b="1">
+                <a:solidFill>
+                  <a:srgbClr val="5234B7"/>
+                </a:solidFill>
+                <a:latin typeface="DIN Next LT W23"/>
+                <a:ea typeface="DIN Next LT W23"/>
+                <a:cs typeface="DIN Next LT W23"/>
+              </a:rPr>
+              <a:t>ETRA</a:t>
+            </a:r>
+          </a:p>
+        </p:txBody>
+      </p:sp>
+      <p:sp>
+        <p:nvSpPr>
+          <p:cNvPr id="16" name="TextBox 15"/>
+          <p:cNvSpPr txBox="1"/>
+          <p:nvPr/>
+        </p:nvSpPr>
+        <p:spPr>
+          <a:xfrm>
+            <a:off x="9601200" y="6510528"/>
+            <a:ext cx="2011680" cy="256032"/>
+          </a:xfrm>
+          <a:prstGeom prst="rect">
+            <a:avLst/>
+          </a:prstGeom>
+          <a:noFill/>
+        </p:spPr>
+        <p:txBody>
+          <a:bodyPr wrap="square" anchor="t">
+            <a:spAutoFit/>
+          </a:bodyPr>
+          <a:lstStyle/>
+          <a:p>
+            <a:pPr algn="r"/>
+            <a:r>
+              <a:rPr sz="1100" b="0">
+                <a:solidFill>
+                  <a:srgbClr val="5A5470"/>
+                </a:solidFill>
+                <a:latin typeface="DIN Next LT W23"/>
+                <a:ea typeface="DIN Next LT W23"/>
+                <a:cs typeface="DIN Next LT W23"/>
+              </a:rPr>
+              <a:t>72  /  79</a:t>
+            </a:r>
+          </a:p>
+        </p:txBody>
+      </p:sp>
+    </p:spTree>
+  </p:cSld>
+  <p:clrMapOvr>
+    <a:masterClrMapping/>
+  </p:clrMapOvr>
+</p:sld>
+</file>
+
+<file path=ppt/slides/slide73.xml><?xml version="1.0" encoding="utf-8"?>
+<p:sld xmlns:a="http://schemas.openxmlformats.org/drawingml/2006/main" xmlns:p="http://schemas.openxmlformats.org/presentationml/2006/main" xmlns:r="http://schemas.openxmlformats.org/officeDocument/2006/relationships">
+  <p:cSld>
+    <p:bg>
+      <p:bgPr>
+        <a:solidFill>
+          <a:srgbClr val="FAF8FF"/>
+        </a:solidFill>
+        <a:effectLst/>
+      </p:bgPr>
+    </p:bg>
+    <p:spTree>
+      <p:nvGrpSpPr>
+        <p:cNvPr id="1" name=""/>
+        <p:cNvGrpSpPr/>
+        <p:nvPr/>
+      </p:nvGrpSpPr>
+      <p:grpSpPr/>
+      <p:sp>
+        <p:nvSpPr>
+          <p:cNvPr id="2" name="Rectangle 1"/>
+          <p:cNvSpPr/>
+          <p:nvPr/>
+        </p:nvSpPr>
+        <p:spPr>
+          <a:xfrm>
+            <a:off x="12136831" y="0"/>
+            <a:ext cx="54864" cy="6858000"/>
+          </a:xfrm>
+          <a:prstGeom prst="rect">
+            <a:avLst/>
+          </a:prstGeom>
+          <a:solidFill>
+            <a:srgbClr val="5234B7"/>
+          </a:solidFill>
+          <a:ln>
+            <a:noFill/>
+          </a:ln>
+          <a:effectLst/>
+        </p:spPr>
+        <p:style>
+          <a:lnRef idx="1">
+            <a:schemeClr val="accent1"/>
+          </a:lnRef>
+          <a:fillRef idx="3">
+            <a:schemeClr val="accent1"/>
+          </a:fillRef>
+          <a:effectRef idx="2">
+            <a:schemeClr val="accent1"/>
+          </a:effectRef>
+          <a:fontRef idx="minor">
+            <a:schemeClr val="lt1"/>
+          </a:fontRef>
+        </p:style>
+        <p:txBody>
+          <a:bodyPr rtlCol="0" anchor="ctr"/>
+          <a:lstStyle/>
+          <a:p>
+            <a:pPr algn="ctr"/>
+          </a:p>
+        </p:txBody>
+      </p:sp>
+      <p:pic>
+        <p:nvPicPr>
+          <p:cNvPr id="3" name="Picture 2" descr="etra-wordmark.png"/>
+          <p:cNvPicPr>
+            <a:picLocks noChangeAspect="1"/>
+          </p:cNvPicPr>
+          <p:nvPr/>
+        </p:nvPicPr>
+        <p:blipFill>
+          <a:blip r:embed="rId2"/>
+          <a:stretch>
+            <a:fillRect/>
+          </a:stretch>
+        </p:blipFill>
+        <p:spPr>
+          <a:xfrm>
+            <a:off x="10561320" y="411480"/>
+            <a:ext cx="1206201" cy="320040"/>
+          </a:xfrm>
+          <a:prstGeom prst="rect">
+            <a:avLst/>
+          </a:prstGeom>
+        </p:spPr>
+      </p:pic>
+      <p:sp>
+        <p:nvSpPr>
+          <p:cNvPr id="4" name="TextBox 3"/>
+          <p:cNvSpPr txBox="1"/>
+          <p:nvPr/>
+        </p:nvSpPr>
+        <p:spPr>
+          <a:xfrm>
+            <a:off x="548640" y="438912"/>
+            <a:ext cx="7772400" cy="274320"/>
+          </a:xfrm>
+          <a:prstGeom prst="rect">
+            <a:avLst/>
+          </a:prstGeom>
+          <a:noFill/>
+        </p:spPr>
+        <p:txBody>
+          <a:bodyPr wrap="square" anchor="t">
+            <a:spAutoFit/>
+          </a:bodyPr>
+          <a:lstStyle/>
+          <a:p>
+            <a:pPr algn="l"/>
+            <a:r>
+              <a:rPr sz="1200" b="0">
+                <a:solidFill>
+                  <a:srgbClr val="5A5470"/>
+                </a:solidFill>
+                <a:latin typeface="DIN Next LT W23"/>
+                <a:ea typeface="DIN Next LT W23"/>
+                <a:cs typeface="DIN Next LT W23"/>
+              </a:rPr>
+              <a:t>S07  ·  Deep Learning</a:t>
+            </a:r>
+          </a:p>
+        </p:txBody>
+      </p:sp>
+      <p:sp>
+        <p:nvSpPr>
+          <p:cNvPr id="5" name="Rectangle 4"/>
+          <p:cNvSpPr/>
+          <p:nvPr/>
+        </p:nvSpPr>
+        <p:spPr>
+          <a:xfrm>
+            <a:off x="548640" y="822960"/>
+            <a:ext cx="11064240" cy="10972"/>
+          </a:xfrm>
+          <a:prstGeom prst="rect">
+            <a:avLst/>
+          </a:prstGeom>
+          <a:solidFill>
+            <a:srgbClr val="E4DCF4"/>
+          </a:solidFill>
+          <a:ln>
+            <a:noFill/>
+          </a:ln>
+          <a:effectLst/>
+        </p:spPr>
+        <p:style>
+          <a:lnRef idx="1">
+            <a:schemeClr val="accent1"/>
+          </a:lnRef>
+          <a:fillRef idx="3">
+            <a:schemeClr val="accent1"/>
+          </a:fillRef>
+          <a:effectRef idx="2">
+            <a:schemeClr val="accent1"/>
+          </a:effectRef>
+          <a:fontRef idx="minor">
+            <a:schemeClr val="lt1"/>
+          </a:fontRef>
+        </p:style>
+        <p:txBody>
+          <a:bodyPr rtlCol="0" anchor="ctr"/>
+          <a:lstStyle/>
+          <a:p>
+            <a:pPr algn="ctr"/>
+          </a:p>
+        </p:txBody>
+      </p:sp>
+      <p:sp>
+        <p:nvSpPr>
+          <p:cNvPr id="6" name="TextBox 5"/>
+          <p:cNvSpPr txBox="1"/>
+          <p:nvPr/>
+        </p:nvSpPr>
+        <p:spPr>
+          <a:xfrm>
+            <a:off x="548640" y="1051560"/>
+            <a:ext cx="10241280" cy="594360"/>
+          </a:xfrm>
+          <a:prstGeom prst="rect">
+            <a:avLst/>
+          </a:prstGeom>
+          <a:noFill/>
+        </p:spPr>
+        <p:txBody>
+          <a:bodyPr wrap="square" anchor="t">
+            <a:spAutoFit/>
+          </a:bodyPr>
+          <a:lstStyle/>
+          <a:p>
+            <a:pPr algn="l"/>
+            <a:r>
+              <a:rPr sz="3200" b="1">
+                <a:solidFill>
+                  <a:srgbClr val="5234B7"/>
+                </a:solidFill>
+                <a:latin typeface="DIN Next LT W23"/>
+                <a:ea typeface="DIN Next LT W23"/>
+                <a:cs typeface="DIN Next LT W23"/>
+              </a:rPr>
+              <a:t>Regularization: Dropout, Weight Decay, and Early Stopping</a:t>
+            </a:r>
+          </a:p>
+        </p:txBody>
+      </p:sp>
+      <p:sp>
+        <p:nvSpPr>
+          <p:cNvPr id="7" name="TextBox 6"/>
+          <p:cNvSpPr txBox="1"/>
+          <p:nvPr/>
+        </p:nvSpPr>
+        <p:spPr>
+          <a:xfrm>
+            <a:off x="548640" y="1600200"/>
+            <a:ext cx="10241280" cy="365760"/>
+          </a:xfrm>
+          <a:prstGeom prst="rect">
+            <a:avLst/>
+          </a:prstGeom>
+          <a:noFill/>
+        </p:spPr>
+        <p:txBody>
+          <a:bodyPr wrap="square" anchor="t">
+            <a:spAutoFit/>
+          </a:bodyPr>
+          <a:lstStyle/>
+          <a:p>
+            <a:pPr algn="l"/>
+            <a:r>
+              <a:rPr sz="1500" b="0">
+                <a:solidFill>
+                  <a:srgbClr val="5A5470"/>
+                </a:solidFill>
+                <a:latin typeface="DIN Next LT W23"/>
+                <a:ea typeface="DIN Next LT W23"/>
+                <a:cs typeface="DIN Next LT W23"/>
+              </a:rPr>
+              <a:t>Constrain Capacity to Prevent Overfitting</a:t>
             </a:r>
           </a:p>
         </p:txBody>
@@ -47241,7 +47831,7 @@
                           </a:solidFill>
                           <a:latin typeface="Helvetica"/>
                         </a:rPr>
-                        <a:t>At inference</a:t>
+                        <a:t>Inference behavior</a:t>
                       </a:r>
                     </a:p>
                   </a:txBody>
@@ -47289,7 +47879,7 @@
                           </a:solidFill>
                           <a:latin typeface="Helvetica"/>
                         </a:rPr>
-                        <a:t>Randomly drop hidden units (p ≈ 0.2–0.5)</a:t>
+                        <a:t>Randomly drops connections</a:t>
                       </a:r>
                     </a:p>
                   </a:txBody>
@@ -47312,7 +47902,7 @@
                           </a:solidFill>
                           <a:latin typeface="Helvetica"/>
                         </a:rPr>
-                        <a:t>Off (weights scaled)</a:t>
+                        <a:t>Turned OFF (weights scaled)</a:t>
                       </a:r>
                     </a:p>
                   </a:txBody>
@@ -47337,7 +47927,7 @@
                           </a:solidFill>
                           <a:latin typeface="Helvetica"/>
                         </a:rPr>
-                        <a:t>L2 weight decay</a:t>
+                        <a:t>L2 Weight Decay</a:t>
                       </a:r>
                     </a:p>
                   </a:txBody>
@@ -47360,7 +47950,7 @@
                           </a:solidFill>
                           <a:latin typeface="Helvetica"/>
                         </a:rPr>
-                        <a:t>Shrink weights toward zero</a:t>
+                        <a:t>Shrinks weights toward zero</a:t>
                       </a:r>
                     </a:p>
                   </a:txBody>
@@ -47383,7 +47973,7 @@
                           </a:solidFill>
                           <a:latin typeface="Helvetica"/>
                         </a:rPr>
-                        <a:t>On (weights are static)</a:t>
+                        <a:t>Turned ON (weights are static)</a:t>
                       </a:r>
                     </a:p>
                   </a:txBody>
@@ -47408,7 +47998,7 @@
                           </a:solidFill>
                           <a:latin typeface="Helvetica"/>
                         </a:rPr>
-                        <a:t>Early stopping</a:t>
+                        <a:t>Early Stopping</a:t>
                       </a:r>
                     </a:p>
                   </a:txBody>
@@ -47431,7 +48021,7 @@
                           </a:solidFill>
                           <a:latin typeface="Helvetica"/>
                         </a:rPr>
-                        <a:t>Stop at lowest validation loss</a:t>
+                        <a:t>Halts training at lowest val loss</a:t>
                       </a:r>
                     </a:p>
                   </a:txBody>
@@ -47454,7 +48044,7 @@
                           </a:solidFill>
                           <a:latin typeface="Helvetica"/>
                         </a:rPr>
-                        <a:t>N/A — checkpoint the best</a:t>
+                        <a:t>N/A (model is checkpointed)</a:t>
                       </a:r>
                     </a:p>
                   </a:txBody>
@@ -47471,90 +48061,7 @@
       </p:graphicFrame>
       <p:sp>
         <p:nvSpPr>
-          <p:cNvPr id="9" name="Rounded Rectangle 8"/>
-          <p:cNvSpPr/>
-          <p:nvPr/>
-        </p:nvSpPr>
-        <p:spPr>
-          <a:xfrm>
-            <a:off x="548640" y="4032504"/>
-            <a:ext cx="10972800" cy="411480"/>
-          </a:xfrm>
-          <a:prstGeom prst="roundRect">
-            <a:avLst>
-              <a:gd name="adj" fmla="val 10000"/>
-            </a:avLst>
-          </a:prstGeom>
-          <a:solidFill>
-            <a:srgbClr val="EEE8FA"/>
-          </a:solidFill>
-          <a:ln>
-            <a:noFill/>
-          </a:ln>
-          <a:effectLst/>
-        </p:spPr>
-        <p:style>
-          <a:lnRef idx="1">
-            <a:schemeClr val="accent1"/>
-          </a:lnRef>
-          <a:fillRef idx="3">
-            <a:schemeClr val="accent1"/>
-          </a:fillRef>
-          <a:effectRef idx="2">
-            <a:schemeClr val="accent1"/>
-          </a:effectRef>
-          <a:fontRef idx="minor">
-            <a:schemeClr val="lt1"/>
-          </a:fontRef>
-        </p:style>
-        <p:txBody>
-          <a:bodyPr rtlCol="0" anchor="ctr"/>
-          <a:lstStyle/>
-          <a:p>
-            <a:pPr algn="ctr"/>
-          </a:p>
-        </p:txBody>
-      </p:sp>
-      <p:sp>
-        <p:nvSpPr>
-          <p:cNvPr id="10" name="TextBox 9"/>
-          <p:cNvSpPr txBox="1"/>
-          <p:nvPr/>
-        </p:nvSpPr>
-        <p:spPr>
-          <a:xfrm>
-            <a:off x="868680" y="4105656"/>
-            <a:ext cx="10332720" cy="292608"/>
-          </a:xfrm>
-          <a:prstGeom prst="rect">
-            <a:avLst/>
-          </a:prstGeom>
-          <a:noFill/>
-        </p:spPr>
-        <p:txBody>
-          <a:bodyPr wrap="square" anchor="t">
-            <a:spAutoFit/>
-          </a:bodyPr>
-          <a:lstStyle/>
-          <a:p>
-            <a:pPr algn="l"/>
-            <a:r>
-              <a:rPr sz="1200" b="0">
-                <a:solidFill>
-                  <a:srgbClr val="5A5470"/>
-                </a:solidFill>
-                <a:latin typeface="DIN Next LT W23"/>
-                <a:ea typeface="DIN Next LT W23"/>
-                <a:cs typeface="DIN Next LT W23"/>
-              </a:rPr>
-              <a:t>Dropout is an implicit ensemble. Weight decay is a smoothness prior. Early stopping is free.</a:t>
-            </a:r>
-          </a:p>
-        </p:txBody>
-      </p:sp>
-      <p:sp>
-        <p:nvSpPr>
-          <p:cNvPr id="11" name="Rectangle 10"/>
+          <p:cNvPr id="9" name="Rectangle 8"/>
           <p:cNvSpPr/>
           <p:nvPr/>
         </p:nvSpPr>
@@ -47598,7 +48105,7 @@
       </p:sp>
       <p:sp>
         <p:nvSpPr>
-          <p:cNvPr id="12" name="TextBox 11"/>
+          <p:cNvPr id="10" name="TextBox 9"/>
           <p:cNvSpPr txBox="1"/>
           <p:nvPr/>
         </p:nvSpPr>
@@ -47635,7 +48142,7 @@
       </p:sp>
       <p:sp>
         <p:nvSpPr>
-          <p:cNvPr id="13" name="TextBox 12"/>
+          <p:cNvPr id="11" name="TextBox 10"/>
           <p:cNvSpPr txBox="1"/>
           <p:nvPr/>
         </p:nvSpPr>
@@ -47665,749 +48172,7 @@
                 <a:ea typeface="DIN Next LT W23"/>
                 <a:cs typeface="DIN Next LT W23"/>
               </a:rPr>
-              <a:t>72  /  78</a:t>
-            </a:r>
-          </a:p>
-        </p:txBody>
-      </p:sp>
-    </p:spTree>
-  </p:cSld>
-  <p:clrMapOvr>
-    <a:masterClrMapping/>
-  </p:clrMapOvr>
-</p:sld>
-</file>
-
-<file path=ppt/slides/slide73.xml><?xml version="1.0" encoding="utf-8"?>
-<p:sld xmlns:a="http://schemas.openxmlformats.org/drawingml/2006/main" xmlns:p="http://schemas.openxmlformats.org/presentationml/2006/main" xmlns:r="http://schemas.openxmlformats.org/officeDocument/2006/relationships">
-  <p:cSld>
-    <p:bg>
-      <p:bgPr>
-        <a:solidFill>
-          <a:srgbClr val="FAF8FF"/>
-        </a:solidFill>
-        <a:effectLst/>
-      </p:bgPr>
-    </p:bg>
-    <p:spTree>
-      <p:nvGrpSpPr>
-        <p:cNvPr id="1" name=""/>
-        <p:cNvGrpSpPr/>
-        <p:nvPr/>
-      </p:nvGrpSpPr>
-      <p:grpSpPr/>
-      <p:sp>
-        <p:nvSpPr>
-          <p:cNvPr id="2" name="Rectangle 1"/>
-          <p:cNvSpPr/>
-          <p:nvPr/>
-        </p:nvSpPr>
-        <p:spPr>
-          <a:xfrm>
-            <a:off x="12136831" y="0"/>
-            <a:ext cx="54864" cy="6858000"/>
-          </a:xfrm>
-          <a:prstGeom prst="rect">
-            <a:avLst/>
-          </a:prstGeom>
-          <a:solidFill>
-            <a:srgbClr val="5234B7"/>
-          </a:solidFill>
-          <a:ln>
-            <a:noFill/>
-          </a:ln>
-          <a:effectLst/>
-        </p:spPr>
-        <p:style>
-          <a:lnRef idx="1">
-            <a:schemeClr val="accent1"/>
-          </a:lnRef>
-          <a:fillRef idx="3">
-            <a:schemeClr val="accent1"/>
-          </a:fillRef>
-          <a:effectRef idx="2">
-            <a:schemeClr val="accent1"/>
-          </a:effectRef>
-          <a:fontRef idx="minor">
-            <a:schemeClr val="lt1"/>
-          </a:fontRef>
-        </p:style>
-        <p:txBody>
-          <a:bodyPr rtlCol="0" anchor="ctr"/>
-          <a:lstStyle/>
-          <a:p>
-            <a:pPr algn="ctr"/>
-          </a:p>
-        </p:txBody>
-      </p:sp>
-      <p:pic>
-        <p:nvPicPr>
-          <p:cNvPr id="3" name="Picture 2" descr="etra-wordmark.png"/>
-          <p:cNvPicPr>
-            <a:picLocks noChangeAspect="1"/>
-          </p:cNvPicPr>
-          <p:nvPr/>
-        </p:nvPicPr>
-        <p:blipFill>
-          <a:blip r:embed="rId2"/>
-          <a:stretch>
-            <a:fillRect/>
-          </a:stretch>
-        </p:blipFill>
-        <p:spPr>
-          <a:xfrm>
-            <a:off x="10561320" y="411480"/>
-            <a:ext cx="1206201" cy="320040"/>
-          </a:xfrm>
-          <a:prstGeom prst="rect">
-            <a:avLst/>
-          </a:prstGeom>
-        </p:spPr>
-      </p:pic>
-      <p:sp>
-        <p:nvSpPr>
-          <p:cNvPr id="4" name="TextBox 3"/>
-          <p:cNvSpPr txBox="1"/>
-          <p:nvPr/>
-        </p:nvSpPr>
-        <p:spPr>
-          <a:xfrm>
-            <a:off x="548640" y="438912"/>
-            <a:ext cx="7772400" cy="274320"/>
-          </a:xfrm>
-          <a:prstGeom prst="rect">
-            <a:avLst/>
-          </a:prstGeom>
-          <a:noFill/>
-        </p:spPr>
-        <p:txBody>
-          <a:bodyPr wrap="square" anchor="t">
-            <a:spAutoFit/>
-          </a:bodyPr>
-          <a:lstStyle/>
-          <a:p>
-            <a:pPr algn="l"/>
-            <a:r>
-              <a:rPr sz="1200" b="0">
-                <a:solidFill>
-                  <a:srgbClr val="5A5470"/>
-                </a:solidFill>
-                <a:latin typeface="DIN Next LT W23"/>
-                <a:ea typeface="DIN Next LT W23"/>
-                <a:cs typeface="DIN Next LT W23"/>
-              </a:rPr>
-              <a:t>S07  ·  Deep Learning</a:t>
-            </a:r>
-          </a:p>
-        </p:txBody>
-      </p:sp>
-      <p:sp>
-        <p:nvSpPr>
-          <p:cNvPr id="5" name="Rectangle 4"/>
-          <p:cNvSpPr/>
-          <p:nvPr/>
-        </p:nvSpPr>
-        <p:spPr>
-          <a:xfrm>
-            <a:off x="548640" y="822960"/>
-            <a:ext cx="11064240" cy="10972"/>
-          </a:xfrm>
-          <a:prstGeom prst="rect">
-            <a:avLst/>
-          </a:prstGeom>
-          <a:solidFill>
-            <a:srgbClr val="E4DCF4"/>
-          </a:solidFill>
-          <a:ln>
-            <a:noFill/>
-          </a:ln>
-          <a:effectLst/>
-        </p:spPr>
-        <p:style>
-          <a:lnRef idx="1">
-            <a:schemeClr val="accent1"/>
-          </a:lnRef>
-          <a:fillRef idx="3">
-            <a:schemeClr val="accent1"/>
-          </a:fillRef>
-          <a:effectRef idx="2">
-            <a:schemeClr val="accent1"/>
-          </a:effectRef>
-          <a:fontRef idx="minor">
-            <a:schemeClr val="lt1"/>
-          </a:fontRef>
-        </p:style>
-        <p:txBody>
-          <a:bodyPr rtlCol="0" anchor="ctr"/>
-          <a:lstStyle/>
-          <a:p>
-            <a:pPr algn="ctr"/>
-          </a:p>
-        </p:txBody>
-      </p:sp>
-      <p:sp>
-        <p:nvSpPr>
-          <p:cNvPr id="6" name="TextBox 5"/>
-          <p:cNvSpPr txBox="1"/>
-          <p:nvPr/>
-        </p:nvSpPr>
-        <p:spPr>
-          <a:xfrm>
-            <a:off x="548640" y="1051560"/>
-            <a:ext cx="10241280" cy="594360"/>
-          </a:xfrm>
-          <a:prstGeom prst="rect">
-            <a:avLst/>
-          </a:prstGeom>
-          <a:noFill/>
-        </p:spPr>
-        <p:txBody>
-          <a:bodyPr wrap="square" anchor="t">
-            <a:spAutoFit/>
-          </a:bodyPr>
-          <a:lstStyle/>
-          <a:p>
-            <a:pPr algn="l"/>
-            <a:r>
-              <a:rPr sz="3200" b="1">
-                <a:solidFill>
-                  <a:srgbClr val="5234B7"/>
-                </a:solidFill>
-                <a:latin typeface="DIN Next LT W23"/>
-                <a:ea typeface="DIN Next LT W23"/>
-                <a:cs typeface="DIN Next LT W23"/>
-              </a:rPr>
-              <a:t>Sequential Data &amp; Vanilla RNNs</a:t>
-            </a:r>
-          </a:p>
-        </p:txBody>
-      </p:sp>
-      <p:sp>
-        <p:nvSpPr>
-          <p:cNvPr id="7" name="TextBox 6"/>
-          <p:cNvSpPr txBox="1"/>
-          <p:nvPr/>
-        </p:nvSpPr>
-        <p:spPr>
-          <a:xfrm>
-            <a:off x="548640" y="1600200"/>
-            <a:ext cx="10241280" cy="365760"/>
-          </a:xfrm>
-          <a:prstGeom prst="rect">
-            <a:avLst/>
-          </a:prstGeom>
-          <a:noFill/>
-        </p:spPr>
-        <p:txBody>
-          <a:bodyPr wrap="square" anchor="t">
-            <a:spAutoFit/>
-          </a:bodyPr>
-          <a:lstStyle/>
-          <a:p>
-            <a:pPr algn="l"/>
-            <a:r>
-              <a:rPr sz="1500" b="0">
-                <a:solidFill>
-                  <a:srgbClr val="5A5470"/>
-                </a:solidFill>
-                <a:latin typeface="DIN Next LT W23"/>
-                <a:ea typeface="DIN Next LT W23"/>
-                <a:cs typeface="DIN Next LT W23"/>
-              </a:rPr>
-              <a:t>One Transition, Unfolded Through Time</a:t>
-            </a:r>
-          </a:p>
-        </p:txBody>
-      </p:sp>
-      <p:sp>
-        <p:nvSpPr>
-          <p:cNvPr id="8" name="Rounded Rectangle 7"/>
-          <p:cNvSpPr/>
-          <p:nvPr/>
-        </p:nvSpPr>
-        <p:spPr>
-          <a:xfrm>
-            <a:off x="548640" y="1965960"/>
-            <a:ext cx="10972800" cy="640080"/>
-          </a:xfrm>
-          <a:prstGeom prst="roundRect">
-            <a:avLst>
-              <a:gd name="adj" fmla="val 10000"/>
-            </a:avLst>
-          </a:prstGeom>
-          <a:solidFill>
-            <a:srgbClr val="EEE8FA"/>
-          </a:solidFill>
-          <a:ln>
-            <a:noFill/>
-          </a:ln>
-          <a:effectLst/>
-        </p:spPr>
-        <p:style>
-          <a:lnRef idx="1">
-            <a:schemeClr val="accent1"/>
-          </a:lnRef>
-          <a:fillRef idx="3">
-            <a:schemeClr val="accent1"/>
-          </a:fillRef>
-          <a:effectRef idx="2">
-            <a:schemeClr val="accent1"/>
-          </a:effectRef>
-          <a:fontRef idx="minor">
-            <a:schemeClr val="lt1"/>
-          </a:fontRef>
-        </p:style>
-        <p:txBody>
-          <a:bodyPr rtlCol="0" anchor="ctr"/>
-          <a:lstStyle/>
-          <a:p>
-            <a:pPr algn="ctr"/>
-          </a:p>
-        </p:txBody>
-      </p:sp>
-      <p:sp>
-        <p:nvSpPr>
-          <p:cNvPr id="9" name="TextBox 8"/>
-          <p:cNvSpPr txBox="1"/>
-          <p:nvPr/>
-        </p:nvSpPr>
-        <p:spPr>
-          <a:xfrm>
-            <a:off x="868680" y="2084831"/>
-            <a:ext cx="10332720" cy="411480"/>
-          </a:xfrm>
-          <a:prstGeom prst="rect">
-            <a:avLst/>
-          </a:prstGeom>
-          <a:noFill/>
-        </p:spPr>
-        <p:txBody>
-          <a:bodyPr wrap="square" anchor="t">
-            <a:spAutoFit/>
-          </a:bodyPr>
-          <a:lstStyle/>
-          <a:p>
-            <a:pPr algn="l"/>
-            <a:r>
-              <a:rPr sz="1400" b="0">
-                <a:solidFill>
-                  <a:srgbClr val="121018"/>
-                </a:solidFill>
-                <a:latin typeface="DIN Next LT W23"/>
-                <a:ea typeface="DIN Next LT W23"/>
-                <a:cs typeface="DIN Next LT W23"/>
-              </a:rPr>
-              <a:t>Text, audio, and sensors have order. Shuffling them destroys meaning.</a:t>
-            </a:r>
-          </a:p>
-        </p:txBody>
-      </p:sp>
-      <p:sp>
-        <p:nvSpPr>
-          <p:cNvPr id="10" name="Rounded Rectangle 9"/>
-          <p:cNvSpPr/>
-          <p:nvPr/>
-        </p:nvSpPr>
-        <p:spPr>
-          <a:xfrm>
-            <a:off x="548640" y="2743200"/>
-            <a:ext cx="10972800" cy="1417320"/>
-          </a:xfrm>
-          <a:prstGeom prst="roundRect">
-            <a:avLst>
-              <a:gd name="adj" fmla="val 10000"/>
-            </a:avLst>
-          </a:prstGeom>
-          <a:solidFill>
-            <a:srgbClr val="EEE8FA"/>
-          </a:solidFill>
-          <a:ln>
-            <a:noFill/>
-          </a:ln>
-          <a:effectLst/>
-        </p:spPr>
-        <p:style>
-          <a:lnRef idx="1">
-            <a:schemeClr val="accent1"/>
-          </a:lnRef>
-          <a:fillRef idx="3">
-            <a:schemeClr val="accent1"/>
-          </a:fillRef>
-          <a:effectRef idx="2">
-            <a:schemeClr val="accent1"/>
-          </a:effectRef>
-          <a:fontRef idx="minor">
-            <a:schemeClr val="lt1"/>
-          </a:fontRef>
-        </p:style>
-        <p:txBody>
-          <a:bodyPr rtlCol="0" anchor="ctr"/>
-          <a:lstStyle/>
-          <a:p>
-            <a:pPr algn="ctr"/>
-          </a:p>
-        </p:txBody>
-      </p:sp>
-      <p:pic>
-        <p:nvPicPr>
-          <p:cNvPr id="11" name="Picture 10" descr="f-2d62af7528050520.png"/>
-          <p:cNvPicPr>
-            <a:picLocks noChangeAspect="1"/>
-          </p:cNvPicPr>
-          <p:nvPr/>
-        </p:nvPicPr>
-        <p:blipFill>
-          <a:blip r:embed="rId3"/>
-          <a:stretch>
-            <a:fillRect/>
-          </a:stretch>
-        </p:blipFill>
-        <p:spPr>
-          <a:xfrm>
-            <a:off x="2529632" y="2852928"/>
-            <a:ext cx="7010814" cy="868680"/>
-          </a:xfrm>
-          <a:prstGeom prst="rect">
-            <a:avLst/>
-          </a:prstGeom>
-        </p:spPr>
-      </p:pic>
-      <p:sp>
-        <p:nvSpPr>
-          <p:cNvPr id="12" name="TextBox 11"/>
-          <p:cNvSpPr txBox="1"/>
-          <p:nvPr/>
-        </p:nvSpPr>
-        <p:spPr>
-          <a:xfrm>
-            <a:off x="914400" y="3840480"/>
-            <a:ext cx="10241280" cy="256032"/>
-          </a:xfrm>
-          <a:prstGeom prst="rect">
-            <a:avLst/>
-          </a:prstGeom>
-          <a:noFill/>
-        </p:spPr>
-        <p:txBody>
-          <a:bodyPr wrap="square" anchor="t">
-            <a:spAutoFit/>
-          </a:bodyPr>
-          <a:lstStyle/>
-          <a:p>
-            <a:pPr algn="ctr"/>
-            <a:r>
-              <a:rPr sz="1200" b="0">
-                <a:solidFill>
-                  <a:srgbClr val="5A5470"/>
-                </a:solidFill>
-                <a:latin typeface="DIN Next LT W23"/>
-                <a:ea typeface="DIN Next LT W23"/>
-                <a:cs typeface="DIN Next LT W23"/>
-              </a:rPr>
-              <a:t>Same weights at every timestep  ·  hₜ is a running memory of the past</a:t>
-            </a:r>
-          </a:p>
-        </p:txBody>
-      </p:sp>
-      <p:sp>
-        <p:nvSpPr>
-          <p:cNvPr id="13" name="TextBox 12"/>
-          <p:cNvSpPr txBox="1"/>
-          <p:nvPr/>
-        </p:nvSpPr>
-        <p:spPr>
-          <a:xfrm>
-            <a:off x="548640" y="4270248"/>
-            <a:ext cx="320040" cy="384048"/>
-          </a:xfrm>
-          <a:prstGeom prst="rect">
-            <a:avLst/>
-          </a:prstGeom>
-          <a:noFill/>
-        </p:spPr>
-        <p:txBody>
-          <a:bodyPr wrap="square" anchor="t">
-            <a:spAutoFit/>
-          </a:bodyPr>
-          <a:lstStyle/>
-          <a:p>
-            <a:pPr algn="l"/>
-            <a:r>
-              <a:rPr sz="1300" b="0">
-                <a:solidFill>
-                  <a:srgbClr val="9E59CD"/>
-                </a:solidFill>
-                <a:latin typeface="DIN Next LT W23"/>
-                <a:ea typeface="DIN Next LT W23"/>
-                <a:cs typeface="DIN Next LT W23"/>
-              </a:rPr>
-              <a:t>–</a:t>
-            </a:r>
-          </a:p>
-        </p:txBody>
-      </p:sp>
-      <p:sp>
-        <p:nvSpPr>
-          <p:cNvPr id="14" name="TextBox 13"/>
-          <p:cNvSpPr txBox="1"/>
-          <p:nvPr/>
-        </p:nvSpPr>
-        <p:spPr>
-          <a:xfrm>
-            <a:off x="914400" y="4270248"/>
-            <a:ext cx="9875519" cy="384048"/>
-          </a:xfrm>
-          <a:prstGeom prst="rect">
-            <a:avLst/>
-          </a:prstGeom>
-          <a:noFill/>
-        </p:spPr>
-        <p:txBody>
-          <a:bodyPr wrap="square" anchor="t">
-            <a:spAutoFit/>
-          </a:bodyPr>
-          <a:lstStyle/>
-          <a:p>
-            <a:pPr algn="l"/>
-            <a:r>
-              <a:rPr sz="1300" b="0">
-                <a:solidFill>
-                  <a:srgbClr val="121018"/>
-                </a:solidFill>
-                <a:latin typeface="DIN Next LT W23"/>
-                <a:ea typeface="DIN Next LT W23"/>
-                <a:cs typeface="DIN Next LT W23"/>
-              </a:rPr>
-              <a:t>Parameter sharing across time is efficient — but long sequences multiply Jacobians.</a:t>
-            </a:r>
-          </a:p>
-        </p:txBody>
-      </p:sp>
-      <p:sp>
-        <p:nvSpPr>
-          <p:cNvPr id="15" name="TextBox 14"/>
-          <p:cNvSpPr txBox="1"/>
-          <p:nvPr/>
-        </p:nvSpPr>
-        <p:spPr>
-          <a:xfrm>
-            <a:off x="548640" y="4690872"/>
-            <a:ext cx="320040" cy="384048"/>
-          </a:xfrm>
-          <a:prstGeom prst="rect">
-            <a:avLst/>
-          </a:prstGeom>
-          <a:noFill/>
-        </p:spPr>
-        <p:txBody>
-          <a:bodyPr wrap="square" anchor="t">
-            <a:spAutoFit/>
-          </a:bodyPr>
-          <a:lstStyle/>
-          <a:p>
-            <a:pPr algn="l"/>
-            <a:r>
-              <a:rPr sz="1300" b="0">
-                <a:solidFill>
-                  <a:srgbClr val="9E59CD"/>
-                </a:solidFill>
-                <a:latin typeface="DIN Next LT W23"/>
-                <a:ea typeface="DIN Next LT W23"/>
-                <a:cs typeface="DIN Next LT W23"/>
-              </a:rPr>
-              <a:t>–</a:t>
-            </a:r>
-          </a:p>
-        </p:txBody>
-      </p:sp>
-      <p:sp>
-        <p:nvSpPr>
-          <p:cNvPr id="16" name="TextBox 15"/>
-          <p:cNvSpPr txBox="1"/>
-          <p:nvPr/>
-        </p:nvSpPr>
-        <p:spPr>
-          <a:xfrm>
-            <a:off x="914400" y="4690872"/>
-            <a:ext cx="9875519" cy="384048"/>
-          </a:xfrm>
-          <a:prstGeom prst="rect">
-            <a:avLst/>
-          </a:prstGeom>
-          <a:noFill/>
-        </p:spPr>
-        <p:txBody>
-          <a:bodyPr wrap="square" anchor="t">
-            <a:spAutoFit/>
-          </a:bodyPr>
-          <a:lstStyle/>
-          <a:p>
-            <a:pPr algn="l"/>
-            <a:r>
-              <a:rPr sz="1300" b="0">
-                <a:solidFill>
-                  <a:srgbClr val="121018"/>
-                </a:solidFill>
-                <a:latin typeface="DIN Next LT W23"/>
-                <a:ea typeface="DIN Next LT W23"/>
-                <a:cs typeface="DIN Next LT W23"/>
-              </a:rPr>
-              <a:t>Vanilla RNNs struggle with long-range dependencies (vanishing / exploding gradients).</a:t>
-            </a:r>
-          </a:p>
-        </p:txBody>
-      </p:sp>
-      <p:sp>
-        <p:nvSpPr>
-          <p:cNvPr id="17" name="TextBox 16"/>
-          <p:cNvSpPr txBox="1"/>
-          <p:nvPr/>
-        </p:nvSpPr>
-        <p:spPr>
-          <a:xfrm>
-            <a:off x="548640" y="5989320"/>
-            <a:ext cx="10972800" cy="228600"/>
-          </a:xfrm>
-          <a:prstGeom prst="rect">
-            <a:avLst/>
-          </a:prstGeom>
-          <a:noFill/>
-        </p:spPr>
-        <p:txBody>
-          <a:bodyPr wrap="square" anchor="t">
-            <a:spAutoFit/>
-          </a:bodyPr>
-          <a:lstStyle/>
-          <a:p>
-            <a:pPr algn="l"/>
-            <a:r>
-              <a:rPr sz="1200" b="0">
-                <a:solidFill>
-                  <a:srgbClr val="5A5470"/>
-                </a:solidFill>
-                <a:latin typeface="DIN Next LT W23"/>
-                <a:ea typeface="DIN Next LT W23"/>
-                <a:cs typeface="DIN Next LT W23"/>
-              </a:rPr>
-              <a:t>Backprop through 50 steps ≈ multiplying a matrix 50 times.</a:t>
-            </a:r>
-          </a:p>
-        </p:txBody>
-      </p:sp>
-      <p:sp>
-        <p:nvSpPr>
-          <p:cNvPr id="18" name="Rectangle 17"/>
-          <p:cNvSpPr/>
-          <p:nvPr/>
-        </p:nvSpPr>
-        <p:spPr>
-          <a:xfrm>
-            <a:off x="548640" y="6446520"/>
-            <a:ext cx="11064240" cy="10972"/>
-          </a:xfrm>
-          <a:prstGeom prst="rect">
-            <a:avLst/>
-          </a:prstGeom>
-          <a:solidFill>
-            <a:srgbClr val="5234B7"/>
-          </a:solidFill>
-          <a:ln>
-            <a:noFill/>
-          </a:ln>
-          <a:effectLst/>
-        </p:spPr>
-        <p:style>
-          <a:lnRef idx="1">
-            <a:schemeClr val="accent1"/>
-          </a:lnRef>
-          <a:fillRef idx="3">
-            <a:schemeClr val="accent1"/>
-          </a:fillRef>
-          <a:effectRef idx="2">
-            <a:schemeClr val="accent1"/>
-          </a:effectRef>
-          <a:fontRef idx="minor">
-            <a:schemeClr val="lt1"/>
-          </a:fontRef>
-        </p:style>
-        <p:txBody>
-          <a:bodyPr rtlCol="0" anchor="ctr"/>
-          <a:lstStyle/>
-          <a:p>
-            <a:pPr algn="ctr"/>
-          </a:p>
-        </p:txBody>
-      </p:sp>
-      <p:sp>
-        <p:nvSpPr>
-          <p:cNvPr id="19" name="TextBox 18"/>
-          <p:cNvSpPr txBox="1"/>
-          <p:nvPr/>
-        </p:nvSpPr>
-        <p:spPr>
-          <a:xfrm>
-            <a:off x="548640" y="6510528"/>
-            <a:ext cx="2743200" cy="256032"/>
-          </a:xfrm>
-          <a:prstGeom prst="rect">
-            <a:avLst/>
-          </a:prstGeom>
-          <a:noFill/>
-        </p:spPr>
-        <p:txBody>
-          <a:bodyPr wrap="square" anchor="t">
-            <a:spAutoFit/>
-          </a:bodyPr>
-          <a:lstStyle/>
-          <a:p>
-            <a:pPr algn="l"/>
-            <a:r>
-              <a:rPr sz="1100" b="1">
-                <a:solidFill>
-                  <a:srgbClr val="5234B7"/>
-                </a:solidFill>
-                <a:latin typeface="DIN Next LT W23"/>
-                <a:ea typeface="DIN Next LT W23"/>
-                <a:cs typeface="DIN Next LT W23"/>
-              </a:rPr>
-              <a:t>ETRA</a:t>
-            </a:r>
-          </a:p>
-        </p:txBody>
-      </p:sp>
-      <p:sp>
-        <p:nvSpPr>
-          <p:cNvPr id="20" name="TextBox 19"/>
-          <p:cNvSpPr txBox="1"/>
-          <p:nvPr/>
-        </p:nvSpPr>
-        <p:spPr>
-          <a:xfrm>
-            <a:off x="9601200" y="6510528"/>
-            <a:ext cx="2011680" cy="256032"/>
-          </a:xfrm>
-          <a:prstGeom prst="rect">
-            <a:avLst/>
-          </a:prstGeom>
-          <a:noFill/>
-        </p:spPr>
-        <p:txBody>
-          <a:bodyPr wrap="square" anchor="t">
-            <a:spAutoFit/>
-          </a:bodyPr>
-          <a:lstStyle/>
-          <a:p>
-            <a:pPr algn="r"/>
-            <a:r>
-              <a:rPr sz="1100" b="0">
-                <a:solidFill>
-                  <a:srgbClr val="5A5470"/>
-                </a:solidFill>
-                <a:latin typeface="DIN Next LT W23"/>
-                <a:ea typeface="DIN Next LT W23"/>
-                <a:cs typeface="DIN Next LT W23"/>
-              </a:rPr>
-              <a:t>73  /  78</a:t>
+              <a:t>73  /  79</a:t>
             </a:r>
           </a:p>
         </p:txBody>
@@ -48619,7 +48384,7 @@
                 <a:ea typeface="DIN Next LT W23"/>
                 <a:cs typeface="DIN Next LT W23"/>
               </a:rPr>
-              <a:t>RNN Unfolded Through Time</a:t>
+              <a:t>Sequential Data &amp; Vanilla RNNs</a:t>
             </a:r>
           </a:p>
         </p:txBody>
@@ -48656,7 +48421,7 @@
                 <a:ea typeface="DIN Next LT W23"/>
                 <a:cs typeface="DIN Next LT W23"/>
               </a:rPr>
-              <a:t>Rolled Cell = Shared Weights Across Steps</a:t>
+              <a:t>One Transition, Unfolded Through Time</a:t>
             </a:r>
           </a:p>
         </p:txBody>
@@ -48670,7 +48435,7 @@
         <p:spPr>
           <a:xfrm>
             <a:off x="548640" y="1965960"/>
-            <a:ext cx="10972800" cy="3977639"/>
+            <a:ext cx="10972800" cy="640080"/>
           </a:xfrm>
           <a:prstGeom prst="roundRect">
             <a:avLst>
@@ -48707,9 +48472,92 @@
           </a:p>
         </p:txBody>
       </p:sp>
+      <p:sp>
+        <p:nvSpPr>
+          <p:cNvPr id="9" name="TextBox 8"/>
+          <p:cNvSpPr txBox="1"/>
+          <p:nvPr/>
+        </p:nvSpPr>
+        <p:spPr>
+          <a:xfrm>
+            <a:off x="868680" y="2084831"/>
+            <a:ext cx="10332720" cy="411480"/>
+          </a:xfrm>
+          <a:prstGeom prst="rect">
+            <a:avLst/>
+          </a:prstGeom>
+          <a:noFill/>
+        </p:spPr>
+        <p:txBody>
+          <a:bodyPr wrap="square" anchor="t">
+            <a:spAutoFit/>
+          </a:bodyPr>
+          <a:lstStyle/>
+          <a:p>
+            <a:pPr algn="l"/>
+            <a:r>
+              <a:rPr sz="1400" b="0">
+                <a:solidFill>
+                  <a:srgbClr val="121018"/>
+                </a:solidFill>
+                <a:latin typeface="DIN Next LT W23"/>
+                <a:ea typeface="DIN Next LT W23"/>
+                <a:cs typeface="DIN Next LT W23"/>
+              </a:rPr>
+              <a:t>Text, audio, and sensors have order. Shuffling them destroys meaning.</a:t>
+            </a:r>
+          </a:p>
+        </p:txBody>
+      </p:sp>
+      <p:sp>
+        <p:nvSpPr>
+          <p:cNvPr id="10" name="Rounded Rectangle 9"/>
+          <p:cNvSpPr/>
+          <p:nvPr/>
+        </p:nvSpPr>
+        <p:spPr>
+          <a:xfrm>
+            <a:off x="548640" y="2743200"/>
+            <a:ext cx="10972800" cy="1417320"/>
+          </a:xfrm>
+          <a:prstGeom prst="roundRect">
+            <a:avLst>
+              <a:gd name="adj" fmla="val 10000"/>
+            </a:avLst>
+          </a:prstGeom>
+          <a:solidFill>
+            <a:srgbClr val="EEE8FA"/>
+          </a:solidFill>
+          <a:ln>
+            <a:noFill/>
+          </a:ln>
+          <a:effectLst/>
+        </p:spPr>
+        <p:style>
+          <a:lnRef idx="1">
+            <a:schemeClr val="accent1"/>
+          </a:lnRef>
+          <a:fillRef idx="3">
+            <a:schemeClr val="accent1"/>
+          </a:fillRef>
+          <a:effectRef idx="2">
+            <a:schemeClr val="accent1"/>
+          </a:effectRef>
+          <a:fontRef idx="minor">
+            <a:schemeClr val="lt1"/>
+          </a:fontRef>
+        </p:style>
+        <p:txBody>
+          <a:bodyPr rtlCol="0" anchor="ctr"/>
+          <a:lstStyle/>
+          <a:p>
+            <a:pPr algn="ctr"/>
+          </a:p>
+        </p:txBody>
+      </p:sp>
       <p:pic>
         <p:nvPicPr>
-          <p:cNvPr id="9" name="Picture 8" descr="rnn-unfold.png"/>
+          <p:cNvPr id="11" name="Picture 10" descr="f-2d62af7528050520.png"/>
           <p:cNvPicPr>
             <a:picLocks noChangeAspect="1"/>
           </p:cNvPicPr>
@@ -48723,8 +48571,8 @@
         </p:blipFill>
         <p:spPr>
           <a:xfrm>
-            <a:off x="1177732" y="2103120"/>
-            <a:ext cx="9714615" cy="3703320"/>
+            <a:off x="2529632" y="2852928"/>
+            <a:ext cx="7010814" cy="868680"/>
           </a:xfrm>
           <a:prstGeom prst="rect">
             <a:avLst/>
@@ -48733,13 +48581,198 @@
       </p:pic>
       <p:sp>
         <p:nvSpPr>
-          <p:cNvPr id="10" name="TextBox 9"/>
-          <p:cNvSpPr txBox="1"/>
-          <p:nvPr/>
-        </p:nvSpPr>
-        <p:spPr>
-          <a:xfrm>
-            <a:off x="548640" y="6309360"/>
+          <p:cNvPr id="12" name="TextBox 11"/>
+          <p:cNvSpPr txBox="1"/>
+          <p:nvPr/>
+        </p:nvSpPr>
+        <p:spPr>
+          <a:xfrm>
+            <a:off x="914400" y="3840480"/>
+            <a:ext cx="10241280" cy="256032"/>
+          </a:xfrm>
+          <a:prstGeom prst="rect">
+            <a:avLst/>
+          </a:prstGeom>
+          <a:noFill/>
+        </p:spPr>
+        <p:txBody>
+          <a:bodyPr wrap="square" anchor="t">
+            <a:spAutoFit/>
+          </a:bodyPr>
+          <a:lstStyle/>
+          <a:p>
+            <a:pPr algn="ctr"/>
+            <a:r>
+              <a:rPr sz="1200" b="0">
+                <a:solidFill>
+                  <a:srgbClr val="5A5470"/>
+                </a:solidFill>
+                <a:latin typeface="DIN Next LT W23"/>
+                <a:ea typeface="DIN Next LT W23"/>
+                <a:cs typeface="DIN Next LT W23"/>
+              </a:rPr>
+              <a:t>Same weights at every timestep  ·  hₜ is a running memory of the past</a:t>
+            </a:r>
+          </a:p>
+        </p:txBody>
+      </p:sp>
+      <p:sp>
+        <p:nvSpPr>
+          <p:cNvPr id="13" name="TextBox 12"/>
+          <p:cNvSpPr txBox="1"/>
+          <p:nvPr/>
+        </p:nvSpPr>
+        <p:spPr>
+          <a:xfrm>
+            <a:off x="548640" y="4270248"/>
+            <a:ext cx="320040" cy="384048"/>
+          </a:xfrm>
+          <a:prstGeom prst="rect">
+            <a:avLst/>
+          </a:prstGeom>
+          <a:noFill/>
+        </p:spPr>
+        <p:txBody>
+          <a:bodyPr wrap="square" anchor="t">
+            <a:spAutoFit/>
+          </a:bodyPr>
+          <a:lstStyle/>
+          <a:p>
+            <a:pPr algn="l"/>
+            <a:r>
+              <a:rPr sz="1300" b="0">
+                <a:solidFill>
+                  <a:srgbClr val="9E59CD"/>
+                </a:solidFill>
+                <a:latin typeface="DIN Next LT W23"/>
+                <a:ea typeface="DIN Next LT W23"/>
+                <a:cs typeface="DIN Next LT W23"/>
+              </a:rPr>
+              <a:t>–</a:t>
+            </a:r>
+          </a:p>
+        </p:txBody>
+      </p:sp>
+      <p:sp>
+        <p:nvSpPr>
+          <p:cNvPr id="14" name="TextBox 13"/>
+          <p:cNvSpPr txBox="1"/>
+          <p:nvPr/>
+        </p:nvSpPr>
+        <p:spPr>
+          <a:xfrm>
+            <a:off x="914400" y="4270248"/>
+            <a:ext cx="9875519" cy="384048"/>
+          </a:xfrm>
+          <a:prstGeom prst="rect">
+            <a:avLst/>
+          </a:prstGeom>
+          <a:noFill/>
+        </p:spPr>
+        <p:txBody>
+          <a:bodyPr wrap="square" anchor="t">
+            <a:spAutoFit/>
+          </a:bodyPr>
+          <a:lstStyle/>
+          <a:p>
+            <a:pPr algn="l"/>
+            <a:r>
+              <a:rPr sz="1300" b="0">
+                <a:solidFill>
+                  <a:srgbClr val="121018"/>
+                </a:solidFill>
+                <a:latin typeface="DIN Next LT W23"/>
+                <a:ea typeface="DIN Next LT W23"/>
+                <a:cs typeface="DIN Next LT W23"/>
+              </a:rPr>
+              <a:t>Parameter sharing across time is efficient — but long sequences multiply Jacobians.</a:t>
+            </a:r>
+          </a:p>
+        </p:txBody>
+      </p:sp>
+      <p:sp>
+        <p:nvSpPr>
+          <p:cNvPr id="15" name="TextBox 14"/>
+          <p:cNvSpPr txBox="1"/>
+          <p:nvPr/>
+        </p:nvSpPr>
+        <p:spPr>
+          <a:xfrm>
+            <a:off x="548640" y="4690872"/>
+            <a:ext cx="320040" cy="384048"/>
+          </a:xfrm>
+          <a:prstGeom prst="rect">
+            <a:avLst/>
+          </a:prstGeom>
+          <a:noFill/>
+        </p:spPr>
+        <p:txBody>
+          <a:bodyPr wrap="square" anchor="t">
+            <a:spAutoFit/>
+          </a:bodyPr>
+          <a:lstStyle/>
+          <a:p>
+            <a:pPr algn="l"/>
+            <a:r>
+              <a:rPr sz="1300" b="0">
+                <a:solidFill>
+                  <a:srgbClr val="9E59CD"/>
+                </a:solidFill>
+                <a:latin typeface="DIN Next LT W23"/>
+                <a:ea typeface="DIN Next LT W23"/>
+                <a:cs typeface="DIN Next LT W23"/>
+              </a:rPr>
+              <a:t>–</a:t>
+            </a:r>
+          </a:p>
+        </p:txBody>
+      </p:sp>
+      <p:sp>
+        <p:nvSpPr>
+          <p:cNvPr id="16" name="TextBox 15"/>
+          <p:cNvSpPr txBox="1"/>
+          <p:nvPr/>
+        </p:nvSpPr>
+        <p:spPr>
+          <a:xfrm>
+            <a:off x="914400" y="4690872"/>
+            <a:ext cx="9875519" cy="384048"/>
+          </a:xfrm>
+          <a:prstGeom prst="rect">
+            <a:avLst/>
+          </a:prstGeom>
+          <a:noFill/>
+        </p:spPr>
+        <p:txBody>
+          <a:bodyPr wrap="square" anchor="t">
+            <a:spAutoFit/>
+          </a:bodyPr>
+          <a:lstStyle/>
+          <a:p>
+            <a:pPr algn="l"/>
+            <a:r>
+              <a:rPr sz="1300" b="0">
+                <a:solidFill>
+                  <a:srgbClr val="121018"/>
+                </a:solidFill>
+                <a:latin typeface="DIN Next LT W23"/>
+                <a:ea typeface="DIN Next LT W23"/>
+                <a:cs typeface="DIN Next LT W23"/>
+              </a:rPr>
+              <a:t>Vanilla RNNs struggle with long-range dependencies (vanishing / exploding gradients).</a:t>
+            </a:r>
+          </a:p>
+        </p:txBody>
+      </p:sp>
+      <p:sp>
+        <p:nvSpPr>
+          <p:cNvPr id="17" name="TextBox 16"/>
+          <p:cNvSpPr txBox="1"/>
+          <p:nvPr/>
+        </p:nvSpPr>
+        <p:spPr>
+          <a:xfrm>
+            <a:off x="548640" y="5989320"/>
             <a:ext cx="10972800" cy="228600"/>
           </a:xfrm>
           <a:prstGeom prst="rect">
@@ -48755,7 +48788,7 @@
           <a:p>
             <a:pPr algn="l"/>
             <a:r>
-              <a:rPr sz="1100" b="0">
+              <a:rPr sz="1200" b="0">
                 <a:solidFill>
                   <a:srgbClr val="5A5470"/>
                 </a:solidFill>
@@ -48763,14 +48796,14 @@
                 <a:ea typeface="DIN Next LT W23"/>
                 <a:cs typeface="DIN Next LT W23"/>
               </a:rPr>
-              <a:t>Cannot fully parallelize timesteps — each hₜ waits on hₜ₋₁.</a:t>
-            </a:r>
-          </a:p>
-        </p:txBody>
-      </p:sp>
-      <p:sp>
-        <p:nvSpPr>
-          <p:cNvPr id="11" name="Rectangle 10"/>
+              <a:t>Backprop through 50 steps ≈ multiplying a matrix 50 times.</a:t>
+            </a:r>
+          </a:p>
+        </p:txBody>
+      </p:sp>
+      <p:sp>
+        <p:nvSpPr>
+          <p:cNvPr id="18" name="Rectangle 17"/>
           <p:cNvSpPr/>
           <p:nvPr/>
         </p:nvSpPr>
@@ -48814,7 +48847,7 @@
       </p:sp>
       <p:sp>
         <p:nvSpPr>
-          <p:cNvPr id="12" name="TextBox 11"/>
+          <p:cNvPr id="19" name="TextBox 18"/>
           <p:cNvSpPr txBox="1"/>
           <p:nvPr/>
         </p:nvSpPr>
@@ -48851,7 +48884,7 @@
       </p:sp>
       <p:sp>
         <p:nvSpPr>
-          <p:cNvPr id="13" name="TextBox 12"/>
+          <p:cNvPr id="20" name="TextBox 19"/>
           <p:cNvSpPr txBox="1"/>
           <p:nvPr/>
         </p:nvSpPr>
@@ -48881,7 +48914,7 @@
                 <a:ea typeface="DIN Next LT W23"/>
                 <a:cs typeface="DIN Next LT W23"/>
               </a:rPr>
-              <a:t>74  /  78</a:t>
+              <a:t>74  /  79</a:t>
             </a:r>
           </a:p>
         </p:txBody>
@@ -49093,7 +49126,7 @@
                 <a:ea typeface="DIN Next LT W23"/>
                 <a:cs typeface="DIN Next LT W23"/>
               </a:rPr>
-              <a:t>LSTM: Gates for Long-Term Memory</a:t>
+              <a:t>RNN Unfolded Through Time</a:t>
             </a:r>
           </a:p>
         </p:txBody>
@@ -49130,57 +49163,20 @@
                 <a:ea typeface="DIN Next LT W23"/>
                 <a:cs typeface="DIN Next LT W23"/>
               </a:rPr>
-              <a:t>Forget, Input, Output — Cell State Flows Linearly</a:t>
-            </a:r>
-          </a:p>
-        </p:txBody>
-      </p:sp>
-      <p:sp>
-        <p:nvSpPr>
-          <p:cNvPr id="8" name="TextBox 7"/>
-          <p:cNvSpPr txBox="1"/>
-          <p:nvPr/>
-        </p:nvSpPr>
-        <p:spPr>
-          <a:xfrm>
-            <a:off x="548640" y="1920240"/>
-            <a:ext cx="10972800" cy="320040"/>
-          </a:xfrm>
-          <a:prstGeom prst="rect">
-            <a:avLst/>
-          </a:prstGeom>
-          <a:noFill/>
-        </p:spPr>
-        <p:txBody>
-          <a:bodyPr wrap="square" anchor="t">
-            <a:spAutoFit/>
-          </a:bodyPr>
-          <a:lstStyle/>
-          <a:p>
-            <a:pPr algn="l"/>
-            <a:r>
-              <a:rPr sz="1300" b="0">
-                <a:solidFill>
-                  <a:srgbClr val="5A5470"/>
-                </a:solidFill>
-                <a:latin typeface="DIN Next LT W23"/>
-                <a:ea typeface="DIN Next LT W23"/>
-                <a:cs typeface="DIN Next LT W23"/>
-              </a:rPr>
-              <a:t>LSTM adds a cell state cₜ with an additive path, so signal can travel many steps without vanishing.</a:t>
-            </a:r>
-          </a:p>
-        </p:txBody>
-      </p:sp>
-      <p:sp>
-        <p:nvSpPr>
-          <p:cNvPr id="9" name="Rounded Rectangle 8"/>
+              <a:t>Rolled Cell = Shared Weights Across Steps</a:t>
+            </a:r>
+          </a:p>
+        </p:txBody>
+      </p:sp>
+      <p:sp>
+        <p:nvSpPr>
+          <p:cNvPr id="8" name="Rounded Rectangle 7"/>
           <p:cNvSpPr/>
           <p:nvPr/>
         </p:nvSpPr>
         <p:spPr>
           <a:xfrm>
-            <a:off x="548640" y="2240280"/>
+            <a:off x="548640" y="1965960"/>
             <a:ext cx="10972800" cy="3977639"/>
           </a:xfrm>
           <a:prstGeom prst="roundRect">
@@ -49220,7 +49216,7 @@
       </p:sp>
       <p:pic>
         <p:nvPicPr>
-          <p:cNvPr id="10" name="Picture 9" descr="lstm-gates.png"/>
+          <p:cNvPr id="9" name="Picture 8" descr="rnn-unfold.png"/>
           <p:cNvPicPr>
             <a:picLocks noChangeAspect="1"/>
           </p:cNvPicPr>
@@ -49234,8 +49230,8 @@
         </p:blipFill>
         <p:spPr>
           <a:xfrm>
-            <a:off x="1056046" y="2377440"/>
-            <a:ext cx="9957987" cy="3703320"/>
+            <a:off x="1177732" y="2103120"/>
+            <a:ext cx="9714615" cy="3703320"/>
           </a:xfrm>
           <a:prstGeom prst="rect">
             <a:avLst/>
@@ -49244,7 +49240,7 @@
       </p:pic>
       <p:sp>
         <p:nvSpPr>
-          <p:cNvPr id="11" name="TextBox 10"/>
+          <p:cNvPr id="10" name="TextBox 9"/>
           <p:cNvSpPr txBox="1"/>
           <p:nvPr/>
         </p:nvSpPr>
@@ -49274,14 +49270,14 @@
                 <a:ea typeface="DIN Next LT W23"/>
                 <a:cs typeface="DIN Next LT W23"/>
               </a:rPr>
-              <a:t>GRU is a simpler cousin (two gates). Transformers later replace recurrence with attention.</a:t>
-            </a:r>
-          </a:p>
-        </p:txBody>
-      </p:sp>
-      <p:sp>
-        <p:nvSpPr>
-          <p:cNvPr id="12" name="Rectangle 11"/>
+              <a:t>Cannot fully parallelize timesteps — each hₜ waits on hₜ₋₁.</a:t>
+            </a:r>
+          </a:p>
+        </p:txBody>
+      </p:sp>
+      <p:sp>
+        <p:nvSpPr>
+          <p:cNvPr id="11" name="Rectangle 10"/>
           <p:cNvSpPr/>
           <p:nvPr/>
         </p:nvSpPr>
@@ -49325,7 +49321,7 @@
       </p:sp>
       <p:sp>
         <p:nvSpPr>
-          <p:cNvPr id="13" name="TextBox 12"/>
+          <p:cNvPr id="12" name="TextBox 11"/>
           <p:cNvSpPr txBox="1"/>
           <p:nvPr/>
         </p:nvSpPr>
@@ -49362,7 +49358,7 @@
       </p:sp>
       <p:sp>
         <p:nvSpPr>
-          <p:cNvPr id="14" name="TextBox 13"/>
+          <p:cNvPr id="13" name="TextBox 12"/>
           <p:cNvSpPr txBox="1"/>
           <p:nvPr/>
         </p:nvSpPr>
@@ -49392,7 +49388,7 @@
                 <a:ea typeface="DIN Next LT W23"/>
                 <a:cs typeface="DIN Next LT W23"/>
               </a:rPr>
-              <a:t>75  /  78</a:t>
+              <a:t>75  /  79</a:t>
             </a:r>
           </a:p>
         </p:txBody>
@@ -49406,6 +49402,517 @@
 </file>
 
 <file path=ppt/slides/slide76.xml><?xml version="1.0" encoding="utf-8"?>
+<p:sld xmlns:a="http://schemas.openxmlformats.org/drawingml/2006/main" xmlns:p="http://schemas.openxmlformats.org/presentationml/2006/main" xmlns:r="http://schemas.openxmlformats.org/officeDocument/2006/relationships">
+  <p:cSld>
+    <p:bg>
+      <p:bgPr>
+        <a:solidFill>
+          <a:srgbClr val="FAF8FF"/>
+        </a:solidFill>
+        <a:effectLst/>
+      </p:bgPr>
+    </p:bg>
+    <p:spTree>
+      <p:nvGrpSpPr>
+        <p:cNvPr id="1" name=""/>
+        <p:cNvGrpSpPr/>
+        <p:nvPr/>
+      </p:nvGrpSpPr>
+      <p:grpSpPr/>
+      <p:sp>
+        <p:nvSpPr>
+          <p:cNvPr id="2" name="Rectangle 1"/>
+          <p:cNvSpPr/>
+          <p:nvPr/>
+        </p:nvSpPr>
+        <p:spPr>
+          <a:xfrm>
+            <a:off x="12136831" y="0"/>
+            <a:ext cx="54864" cy="6858000"/>
+          </a:xfrm>
+          <a:prstGeom prst="rect">
+            <a:avLst/>
+          </a:prstGeom>
+          <a:solidFill>
+            <a:srgbClr val="5234B7"/>
+          </a:solidFill>
+          <a:ln>
+            <a:noFill/>
+          </a:ln>
+          <a:effectLst/>
+        </p:spPr>
+        <p:style>
+          <a:lnRef idx="1">
+            <a:schemeClr val="accent1"/>
+          </a:lnRef>
+          <a:fillRef idx="3">
+            <a:schemeClr val="accent1"/>
+          </a:fillRef>
+          <a:effectRef idx="2">
+            <a:schemeClr val="accent1"/>
+          </a:effectRef>
+          <a:fontRef idx="minor">
+            <a:schemeClr val="lt1"/>
+          </a:fontRef>
+        </p:style>
+        <p:txBody>
+          <a:bodyPr rtlCol="0" anchor="ctr"/>
+          <a:lstStyle/>
+          <a:p>
+            <a:pPr algn="ctr"/>
+          </a:p>
+        </p:txBody>
+      </p:sp>
+      <p:pic>
+        <p:nvPicPr>
+          <p:cNvPr id="3" name="Picture 2" descr="etra-wordmark.png"/>
+          <p:cNvPicPr>
+            <a:picLocks noChangeAspect="1"/>
+          </p:cNvPicPr>
+          <p:nvPr/>
+        </p:nvPicPr>
+        <p:blipFill>
+          <a:blip r:embed="rId2"/>
+          <a:stretch>
+            <a:fillRect/>
+          </a:stretch>
+        </p:blipFill>
+        <p:spPr>
+          <a:xfrm>
+            <a:off x="10561320" y="411480"/>
+            <a:ext cx="1206201" cy="320040"/>
+          </a:xfrm>
+          <a:prstGeom prst="rect">
+            <a:avLst/>
+          </a:prstGeom>
+        </p:spPr>
+      </p:pic>
+      <p:sp>
+        <p:nvSpPr>
+          <p:cNvPr id="4" name="TextBox 3"/>
+          <p:cNvSpPr txBox="1"/>
+          <p:nvPr/>
+        </p:nvSpPr>
+        <p:spPr>
+          <a:xfrm>
+            <a:off x="548640" y="438912"/>
+            <a:ext cx="7772400" cy="274320"/>
+          </a:xfrm>
+          <a:prstGeom prst="rect">
+            <a:avLst/>
+          </a:prstGeom>
+          <a:noFill/>
+        </p:spPr>
+        <p:txBody>
+          <a:bodyPr wrap="square" anchor="t">
+            <a:spAutoFit/>
+          </a:bodyPr>
+          <a:lstStyle/>
+          <a:p>
+            <a:pPr algn="l"/>
+            <a:r>
+              <a:rPr sz="1200" b="0">
+                <a:solidFill>
+                  <a:srgbClr val="5A5470"/>
+                </a:solidFill>
+                <a:latin typeface="DIN Next LT W23"/>
+                <a:ea typeface="DIN Next LT W23"/>
+                <a:cs typeface="DIN Next LT W23"/>
+              </a:rPr>
+              <a:t>S07  ·  Deep Learning</a:t>
+            </a:r>
+          </a:p>
+        </p:txBody>
+      </p:sp>
+      <p:sp>
+        <p:nvSpPr>
+          <p:cNvPr id="5" name="Rectangle 4"/>
+          <p:cNvSpPr/>
+          <p:nvPr/>
+        </p:nvSpPr>
+        <p:spPr>
+          <a:xfrm>
+            <a:off x="548640" y="822960"/>
+            <a:ext cx="11064240" cy="10972"/>
+          </a:xfrm>
+          <a:prstGeom prst="rect">
+            <a:avLst/>
+          </a:prstGeom>
+          <a:solidFill>
+            <a:srgbClr val="E4DCF4"/>
+          </a:solidFill>
+          <a:ln>
+            <a:noFill/>
+          </a:ln>
+          <a:effectLst/>
+        </p:spPr>
+        <p:style>
+          <a:lnRef idx="1">
+            <a:schemeClr val="accent1"/>
+          </a:lnRef>
+          <a:fillRef idx="3">
+            <a:schemeClr val="accent1"/>
+          </a:fillRef>
+          <a:effectRef idx="2">
+            <a:schemeClr val="accent1"/>
+          </a:effectRef>
+          <a:fontRef idx="minor">
+            <a:schemeClr val="lt1"/>
+          </a:fontRef>
+        </p:style>
+        <p:txBody>
+          <a:bodyPr rtlCol="0" anchor="ctr"/>
+          <a:lstStyle/>
+          <a:p>
+            <a:pPr algn="ctr"/>
+          </a:p>
+        </p:txBody>
+      </p:sp>
+      <p:sp>
+        <p:nvSpPr>
+          <p:cNvPr id="6" name="TextBox 5"/>
+          <p:cNvSpPr txBox="1"/>
+          <p:nvPr/>
+        </p:nvSpPr>
+        <p:spPr>
+          <a:xfrm>
+            <a:off x="548640" y="1051560"/>
+            <a:ext cx="10241280" cy="594360"/>
+          </a:xfrm>
+          <a:prstGeom prst="rect">
+            <a:avLst/>
+          </a:prstGeom>
+          <a:noFill/>
+        </p:spPr>
+        <p:txBody>
+          <a:bodyPr wrap="square" anchor="t">
+            <a:spAutoFit/>
+          </a:bodyPr>
+          <a:lstStyle/>
+          <a:p>
+            <a:pPr algn="l"/>
+            <a:r>
+              <a:rPr sz="3200" b="1">
+                <a:solidFill>
+                  <a:srgbClr val="5234B7"/>
+                </a:solidFill>
+                <a:latin typeface="DIN Next LT W23"/>
+                <a:ea typeface="DIN Next LT W23"/>
+                <a:cs typeface="DIN Next LT W23"/>
+              </a:rPr>
+              <a:t>LSTM: Gates for Long-Term Memory</a:t>
+            </a:r>
+          </a:p>
+        </p:txBody>
+      </p:sp>
+      <p:sp>
+        <p:nvSpPr>
+          <p:cNvPr id="7" name="TextBox 6"/>
+          <p:cNvSpPr txBox="1"/>
+          <p:nvPr/>
+        </p:nvSpPr>
+        <p:spPr>
+          <a:xfrm>
+            <a:off x="548640" y="1600200"/>
+            <a:ext cx="10241280" cy="365760"/>
+          </a:xfrm>
+          <a:prstGeom prst="rect">
+            <a:avLst/>
+          </a:prstGeom>
+          <a:noFill/>
+        </p:spPr>
+        <p:txBody>
+          <a:bodyPr wrap="square" anchor="t">
+            <a:spAutoFit/>
+          </a:bodyPr>
+          <a:lstStyle/>
+          <a:p>
+            <a:pPr algn="l"/>
+            <a:r>
+              <a:rPr sz="1500" b="0">
+                <a:solidFill>
+                  <a:srgbClr val="5A5470"/>
+                </a:solidFill>
+                <a:latin typeface="DIN Next LT W23"/>
+                <a:ea typeface="DIN Next LT W23"/>
+                <a:cs typeface="DIN Next LT W23"/>
+              </a:rPr>
+              <a:t>Forget, Input, Output — Cell State Flows Linearly</a:t>
+            </a:r>
+          </a:p>
+        </p:txBody>
+      </p:sp>
+      <p:sp>
+        <p:nvSpPr>
+          <p:cNvPr id="8" name="TextBox 7"/>
+          <p:cNvSpPr txBox="1"/>
+          <p:nvPr/>
+        </p:nvSpPr>
+        <p:spPr>
+          <a:xfrm>
+            <a:off x="548640" y="1920240"/>
+            <a:ext cx="10972800" cy="320040"/>
+          </a:xfrm>
+          <a:prstGeom prst="rect">
+            <a:avLst/>
+          </a:prstGeom>
+          <a:noFill/>
+        </p:spPr>
+        <p:txBody>
+          <a:bodyPr wrap="square" anchor="t">
+            <a:spAutoFit/>
+          </a:bodyPr>
+          <a:lstStyle/>
+          <a:p>
+            <a:pPr algn="l"/>
+            <a:r>
+              <a:rPr sz="1300" b="0">
+                <a:solidFill>
+                  <a:srgbClr val="5A5470"/>
+                </a:solidFill>
+                <a:latin typeface="DIN Next LT W23"/>
+                <a:ea typeface="DIN Next LT W23"/>
+                <a:cs typeface="DIN Next LT W23"/>
+              </a:rPr>
+              <a:t>LSTM adds a cell state cₜ with an additive path, so signal can travel many steps without vanishing.</a:t>
+            </a:r>
+          </a:p>
+        </p:txBody>
+      </p:sp>
+      <p:sp>
+        <p:nvSpPr>
+          <p:cNvPr id="9" name="Rounded Rectangle 8"/>
+          <p:cNvSpPr/>
+          <p:nvPr/>
+        </p:nvSpPr>
+        <p:spPr>
+          <a:xfrm>
+            <a:off x="548640" y="2240280"/>
+            <a:ext cx="10972800" cy="3977639"/>
+          </a:xfrm>
+          <a:prstGeom prst="roundRect">
+            <a:avLst>
+              <a:gd name="adj" fmla="val 10000"/>
+            </a:avLst>
+          </a:prstGeom>
+          <a:solidFill>
+            <a:srgbClr val="EEE8FA"/>
+          </a:solidFill>
+          <a:ln>
+            <a:noFill/>
+          </a:ln>
+          <a:effectLst/>
+        </p:spPr>
+        <p:style>
+          <a:lnRef idx="1">
+            <a:schemeClr val="accent1"/>
+          </a:lnRef>
+          <a:fillRef idx="3">
+            <a:schemeClr val="accent1"/>
+          </a:fillRef>
+          <a:effectRef idx="2">
+            <a:schemeClr val="accent1"/>
+          </a:effectRef>
+          <a:fontRef idx="minor">
+            <a:schemeClr val="lt1"/>
+          </a:fontRef>
+        </p:style>
+        <p:txBody>
+          <a:bodyPr rtlCol="0" anchor="ctr"/>
+          <a:lstStyle/>
+          <a:p>
+            <a:pPr algn="ctr"/>
+          </a:p>
+        </p:txBody>
+      </p:sp>
+      <p:pic>
+        <p:nvPicPr>
+          <p:cNvPr id="10" name="Picture 9" descr="lstm-gates.png"/>
+          <p:cNvPicPr>
+            <a:picLocks noChangeAspect="1"/>
+          </p:cNvPicPr>
+          <p:nvPr/>
+        </p:nvPicPr>
+        <p:blipFill>
+          <a:blip r:embed="rId3"/>
+          <a:stretch>
+            <a:fillRect/>
+          </a:stretch>
+        </p:blipFill>
+        <p:spPr>
+          <a:xfrm>
+            <a:off x="1056046" y="2377440"/>
+            <a:ext cx="9957987" cy="3703320"/>
+          </a:xfrm>
+          <a:prstGeom prst="rect">
+            <a:avLst/>
+          </a:prstGeom>
+        </p:spPr>
+      </p:pic>
+      <p:sp>
+        <p:nvSpPr>
+          <p:cNvPr id="11" name="TextBox 10"/>
+          <p:cNvSpPr txBox="1"/>
+          <p:nvPr/>
+        </p:nvSpPr>
+        <p:spPr>
+          <a:xfrm>
+            <a:off x="548640" y="6309360"/>
+            <a:ext cx="10972800" cy="228600"/>
+          </a:xfrm>
+          <a:prstGeom prst="rect">
+            <a:avLst/>
+          </a:prstGeom>
+          <a:noFill/>
+        </p:spPr>
+        <p:txBody>
+          <a:bodyPr wrap="square" anchor="t">
+            <a:spAutoFit/>
+          </a:bodyPr>
+          <a:lstStyle/>
+          <a:p>
+            <a:pPr algn="l"/>
+            <a:r>
+              <a:rPr sz="1100" b="0">
+                <a:solidFill>
+                  <a:srgbClr val="5A5470"/>
+                </a:solidFill>
+                <a:latin typeface="DIN Next LT W23"/>
+                <a:ea typeface="DIN Next LT W23"/>
+                <a:cs typeface="DIN Next LT W23"/>
+              </a:rPr>
+              <a:t>GRU is a simpler cousin (two gates). Transformers later replace recurrence with attention.</a:t>
+            </a:r>
+          </a:p>
+        </p:txBody>
+      </p:sp>
+      <p:sp>
+        <p:nvSpPr>
+          <p:cNvPr id="12" name="Rectangle 11"/>
+          <p:cNvSpPr/>
+          <p:nvPr/>
+        </p:nvSpPr>
+        <p:spPr>
+          <a:xfrm>
+            <a:off x="548640" y="6446520"/>
+            <a:ext cx="11064240" cy="10972"/>
+          </a:xfrm>
+          <a:prstGeom prst="rect">
+            <a:avLst/>
+          </a:prstGeom>
+          <a:solidFill>
+            <a:srgbClr val="5234B7"/>
+          </a:solidFill>
+          <a:ln>
+            <a:noFill/>
+          </a:ln>
+          <a:effectLst/>
+        </p:spPr>
+        <p:style>
+          <a:lnRef idx="1">
+            <a:schemeClr val="accent1"/>
+          </a:lnRef>
+          <a:fillRef idx="3">
+            <a:schemeClr val="accent1"/>
+          </a:fillRef>
+          <a:effectRef idx="2">
+            <a:schemeClr val="accent1"/>
+          </a:effectRef>
+          <a:fontRef idx="minor">
+            <a:schemeClr val="lt1"/>
+          </a:fontRef>
+        </p:style>
+        <p:txBody>
+          <a:bodyPr rtlCol="0" anchor="ctr"/>
+          <a:lstStyle/>
+          <a:p>
+            <a:pPr algn="ctr"/>
+          </a:p>
+        </p:txBody>
+      </p:sp>
+      <p:sp>
+        <p:nvSpPr>
+          <p:cNvPr id="13" name="TextBox 12"/>
+          <p:cNvSpPr txBox="1"/>
+          <p:nvPr/>
+        </p:nvSpPr>
+        <p:spPr>
+          <a:xfrm>
+            <a:off x="548640" y="6510528"/>
+            <a:ext cx="2743200" cy="256032"/>
+          </a:xfrm>
+          <a:prstGeom prst="rect">
+            <a:avLst/>
+          </a:prstGeom>
+          <a:noFill/>
+        </p:spPr>
+        <p:txBody>
+          <a:bodyPr wrap="square" anchor="t">
+            <a:spAutoFit/>
+          </a:bodyPr>
+          <a:lstStyle/>
+          <a:p>
+            <a:pPr algn="l"/>
+            <a:r>
+              <a:rPr sz="1100" b="1">
+                <a:solidFill>
+                  <a:srgbClr val="5234B7"/>
+                </a:solidFill>
+                <a:latin typeface="DIN Next LT W23"/>
+                <a:ea typeface="DIN Next LT W23"/>
+                <a:cs typeface="DIN Next LT W23"/>
+              </a:rPr>
+              <a:t>ETRA</a:t>
+            </a:r>
+          </a:p>
+        </p:txBody>
+      </p:sp>
+      <p:sp>
+        <p:nvSpPr>
+          <p:cNvPr id="14" name="TextBox 13"/>
+          <p:cNvSpPr txBox="1"/>
+          <p:nvPr/>
+        </p:nvSpPr>
+        <p:spPr>
+          <a:xfrm>
+            <a:off x="9601200" y="6510528"/>
+            <a:ext cx="2011680" cy="256032"/>
+          </a:xfrm>
+          <a:prstGeom prst="rect">
+            <a:avLst/>
+          </a:prstGeom>
+          <a:noFill/>
+        </p:spPr>
+        <p:txBody>
+          <a:bodyPr wrap="square" anchor="t">
+            <a:spAutoFit/>
+          </a:bodyPr>
+          <a:lstStyle/>
+          <a:p>
+            <a:pPr algn="r"/>
+            <a:r>
+              <a:rPr sz="1100" b="0">
+                <a:solidFill>
+                  <a:srgbClr val="5A5470"/>
+                </a:solidFill>
+                <a:latin typeface="DIN Next LT W23"/>
+                <a:ea typeface="DIN Next LT W23"/>
+                <a:cs typeface="DIN Next LT W23"/>
+              </a:rPr>
+              <a:t>76  /  79</a:t>
+            </a:r>
+          </a:p>
+        </p:txBody>
+      </p:sp>
+    </p:spTree>
+  </p:cSld>
+  <p:clrMapOvr>
+    <a:masterClrMapping/>
+  </p:clrMapOvr>
+</p:sld>
+</file>
+
+<file path=ppt/slides/slide77.xml><?xml version="1.0" encoding="utf-8"?>
 <p:sld xmlns:a="http://schemas.openxmlformats.org/drawingml/2006/main" xmlns:p="http://schemas.openxmlformats.org/presentationml/2006/main" xmlns:r="http://schemas.openxmlformats.org/officeDocument/2006/relationships">
   <p:cSld>
     <p:bg>
@@ -50060,734 +50567,7 @@
                 <a:ea typeface="DIN Next LT W23"/>
                 <a:cs typeface="DIN Next LT W23"/>
               </a:rPr>
-              <a:t>76  /  78</a:t>
-            </a:r>
-          </a:p>
-        </p:txBody>
-      </p:sp>
-    </p:spTree>
-  </p:cSld>
-  <p:clrMapOvr>
-    <a:masterClrMapping/>
-  </p:clrMapOvr>
-</p:sld>
-</file>
-
-<file path=ppt/slides/slide77.xml><?xml version="1.0" encoding="utf-8"?>
-<p:sld xmlns:a="http://schemas.openxmlformats.org/drawingml/2006/main" xmlns:p="http://schemas.openxmlformats.org/presentationml/2006/main" xmlns:r="http://schemas.openxmlformats.org/officeDocument/2006/relationships">
-  <p:cSld>
-    <p:bg>
-      <p:bgPr>
-        <a:solidFill>
-          <a:srgbClr val="FAF8FF"/>
-        </a:solidFill>
-        <a:effectLst/>
-      </p:bgPr>
-    </p:bg>
-    <p:spTree>
-      <p:nvGrpSpPr>
-        <p:cNvPr id="1" name=""/>
-        <p:cNvGrpSpPr/>
-        <p:nvPr/>
-      </p:nvGrpSpPr>
-      <p:grpSpPr/>
-      <p:sp>
-        <p:nvSpPr>
-          <p:cNvPr id="2" name="Rectangle 1"/>
-          <p:cNvSpPr/>
-          <p:nvPr/>
-        </p:nvSpPr>
-        <p:spPr>
-          <a:xfrm>
-            <a:off x="12136831" y="0"/>
-            <a:ext cx="54864" cy="6858000"/>
-          </a:xfrm>
-          <a:prstGeom prst="rect">
-            <a:avLst/>
-          </a:prstGeom>
-          <a:solidFill>
-            <a:srgbClr val="5234B7"/>
-          </a:solidFill>
-          <a:ln>
-            <a:noFill/>
-          </a:ln>
-          <a:effectLst/>
-        </p:spPr>
-        <p:style>
-          <a:lnRef idx="1">
-            <a:schemeClr val="accent1"/>
-          </a:lnRef>
-          <a:fillRef idx="3">
-            <a:schemeClr val="accent1"/>
-          </a:fillRef>
-          <a:effectRef idx="2">
-            <a:schemeClr val="accent1"/>
-          </a:effectRef>
-          <a:fontRef idx="minor">
-            <a:schemeClr val="lt1"/>
-          </a:fontRef>
-        </p:style>
-        <p:txBody>
-          <a:bodyPr rtlCol="0" anchor="ctr"/>
-          <a:lstStyle/>
-          <a:p>
-            <a:pPr algn="ctr"/>
-          </a:p>
-        </p:txBody>
-      </p:sp>
-      <p:pic>
-        <p:nvPicPr>
-          <p:cNvPr id="3" name="Picture 2" descr="etra-wordmark.png"/>
-          <p:cNvPicPr>
-            <a:picLocks noChangeAspect="1"/>
-          </p:cNvPicPr>
-          <p:nvPr/>
-        </p:nvPicPr>
-        <p:blipFill>
-          <a:blip r:embed="rId2"/>
-          <a:stretch>
-            <a:fillRect/>
-          </a:stretch>
-        </p:blipFill>
-        <p:spPr>
-          <a:xfrm>
-            <a:off x="10561320" y="411480"/>
-            <a:ext cx="1206201" cy="320040"/>
-          </a:xfrm>
-          <a:prstGeom prst="rect">
-            <a:avLst/>
-          </a:prstGeom>
-        </p:spPr>
-      </p:pic>
-      <p:sp>
-        <p:nvSpPr>
-          <p:cNvPr id="4" name="TextBox 3"/>
-          <p:cNvSpPr txBox="1"/>
-          <p:nvPr/>
-        </p:nvSpPr>
-        <p:spPr>
-          <a:xfrm>
-            <a:off x="548640" y="438912"/>
-            <a:ext cx="7772400" cy="274320"/>
-          </a:xfrm>
-          <a:prstGeom prst="rect">
-            <a:avLst/>
-          </a:prstGeom>
-          <a:noFill/>
-        </p:spPr>
-        <p:txBody>
-          <a:bodyPr wrap="square" anchor="t">
-            <a:spAutoFit/>
-          </a:bodyPr>
-          <a:lstStyle/>
-          <a:p>
-            <a:pPr algn="l"/>
-            <a:r>
-              <a:rPr sz="1200" b="0">
-                <a:solidFill>
-                  <a:srgbClr val="5A5470"/>
-                </a:solidFill>
-                <a:latin typeface="DIN Next LT W23"/>
-                <a:ea typeface="DIN Next LT W23"/>
-                <a:cs typeface="DIN Next LT W23"/>
-              </a:rPr>
-              <a:t>S07  ·  Takeaways</a:t>
-            </a:r>
-          </a:p>
-        </p:txBody>
-      </p:sp>
-      <p:sp>
-        <p:nvSpPr>
-          <p:cNvPr id="5" name="Rectangle 4"/>
-          <p:cNvSpPr/>
-          <p:nvPr/>
-        </p:nvSpPr>
-        <p:spPr>
-          <a:xfrm>
-            <a:off x="548640" y="822960"/>
-            <a:ext cx="11064240" cy="10972"/>
-          </a:xfrm>
-          <a:prstGeom prst="rect">
-            <a:avLst/>
-          </a:prstGeom>
-          <a:solidFill>
-            <a:srgbClr val="E4DCF4"/>
-          </a:solidFill>
-          <a:ln>
-            <a:noFill/>
-          </a:ln>
-          <a:effectLst/>
-        </p:spPr>
-        <p:style>
-          <a:lnRef idx="1">
-            <a:schemeClr val="accent1"/>
-          </a:lnRef>
-          <a:fillRef idx="3">
-            <a:schemeClr val="accent1"/>
-          </a:fillRef>
-          <a:effectRef idx="2">
-            <a:schemeClr val="accent1"/>
-          </a:effectRef>
-          <a:fontRef idx="minor">
-            <a:schemeClr val="lt1"/>
-          </a:fontRef>
-        </p:style>
-        <p:txBody>
-          <a:bodyPr rtlCol="0" anchor="ctr"/>
-          <a:lstStyle/>
-          <a:p>
-            <a:pPr algn="ctr"/>
-          </a:p>
-        </p:txBody>
-      </p:sp>
-      <p:sp>
-        <p:nvSpPr>
-          <p:cNvPr id="6" name="TextBox 5"/>
-          <p:cNvSpPr txBox="1"/>
-          <p:nvPr/>
-        </p:nvSpPr>
-        <p:spPr>
-          <a:xfrm>
-            <a:off x="548640" y="1051560"/>
-            <a:ext cx="10241280" cy="594360"/>
-          </a:xfrm>
-          <a:prstGeom prst="rect">
-            <a:avLst/>
-          </a:prstGeom>
-          <a:noFill/>
-        </p:spPr>
-        <p:txBody>
-          <a:bodyPr wrap="square" anchor="t">
-            <a:spAutoFit/>
-          </a:bodyPr>
-          <a:lstStyle/>
-          <a:p>
-            <a:pPr algn="l"/>
-            <a:r>
-              <a:rPr sz="3200" b="1">
-                <a:solidFill>
-                  <a:srgbClr val="5234B7"/>
-                </a:solidFill>
-                <a:latin typeface="DIN Next LT W23"/>
-                <a:ea typeface="DIN Next LT W23"/>
-                <a:cs typeface="DIN Next LT W23"/>
-              </a:rPr>
-              <a:t>3 Ideas to Keep</a:t>
-            </a:r>
-          </a:p>
-        </p:txBody>
-      </p:sp>
-      <p:sp>
-        <p:nvSpPr>
-          <p:cNvPr id="7" name="TextBox 6"/>
-          <p:cNvSpPr txBox="1"/>
-          <p:nvPr/>
-        </p:nvSpPr>
-        <p:spPr>
-          <a:xfrm>
-            <a:off x="548640" y="1600200"/>
-            <a:ext cx="10241280" cy="365760"/>
-          </a:xfrm>
-          <a:prstGeom prst="rect">
-            <a:avLst/>
-          </a:prstGeom>
-          <a:noFill/>
-        </p:spPr>
-        <p:txBody>
-          <a:bodyPr wrap="square" anchor="t">
-            <a:spAutoFit/>
-          </a:bodyPr>
-          <a:lstStyle/>
-          <a:p>
-            <a:pPr algn="l"/>
-            <a:r>
-              <a:rPr sz="1500" b="0">
-                <a:solidFill>
-                  <a:srgbClr val="5A5470"/>
-                </a:solidFill>
-                <a:latin typeface="DIN Next LT W23"/>
-                <a:ea typeface="DIN Next LT W23"/>
-                <a:cs typeface="DIN Next LT W23"/>
-              </a:rPr>
-              <a:t>Leave with these</a:t>
-            </a:r>
-          </a:p>
-        </p:txBody>
-      </p:sp>
-      <p:sp>
-        <p:nvSpPr>
-          <p:cNvPr id="8" name="Rounded Rectangle 7"/>
-          <p:cNvSpPr/>
-          <p:nvPr/>
-        </p:nvSpPr>
-        <p:spPr>
-          <a:xfrm>
-            <a:off x="548640" y="2148840"/>
-            <a:ext cx="10972800" cy="987552"/>
-          </a:xfrm>
-          <a:prstGeom prst="roundRect">
-            <a:avLst>
-              <a:gd name="adj" fmla="val 10000"/>
-            </a:avLst>
-          </a:prstGeom>
-          <a:solidFill>
-            <a:srgbClr val="EEE8FA"/>
-          </a:solidFill>
-          <a:ln>
-            <a:noFill/>
-          </a:ln>
-          <a:effectLst/>
-        </p:spPr>
-        <p:style>
-          <a:lnRef idx="1">
-            <a:schemeClr val="accent1"/>
-          </a:lnRef>
-          <a:fillRef idx="3">
-            <a:schemeClr val="accent1"/>
-          </a:fillRef>
-          <a:effectRef idx="2">
-            <a:schemeClr val="accent1"/>
-          </a:effectRef>
-          <a:fontRef idx="minor">
-            <a:schemeClr val="lt1"/>
-          </a:fontRef>
-        </p:style>
-        <p:txBody>
-          <a:bodyPr rtlCol="0" anchor="ctr"/>
-          <a:lstStyle/>
-          <a:p>
-            <a:pPr algn="ctr"/>
-          </a:p>
-        </p:txBody>
-      </p:sp>
-      <p:sp>
-        <p:nvSpPr>
-          <p:cNvPr id="9" name="TextBox 8"/>
-          <p:cNvSpPr txBox="1"/>
-          <p:nvPr/>
-        </p:nvSpPr>
-        <p:spPr>
-          <a:xfrm>
-            <a:off x="822960" y="2404872"/>
-            <a:ext cx="457200" cy="457200"/>
-          </a:xfrm>
-          <a:prstGeom prst="rect">
-            <a:avLst/>
-          </a:prstGeom>
-          <a:noFill/>
-        </p:spPr>
-        <p:txBody>
-          <a:bodyPr wrap="square" anchor="t">
-            <a:spAutoFit/>
-          </a:bodyPr>
-          <a:lstStyle/>
-          <a:p>
-            <a:pPr algn="l"/>
-            <a:r>
-              <a:rPr sz="2200" b="1">
-                <a:solidFill>
-                  <a:srgbClr val="5234B7"/>
-                </a:solidFill>
-                <a:latin typeface="DIN Next LT W23"/>
-                <a:ea typeface="DIN Next LT W23"/>
-                <a:cs typeface="DIN Next LT W23"/>
-              </a:rPr>
-              <a:t>1</a:t>
-            </a:r>
-          </a:p>
-        </p:txBody>
-      </p:sp>
-      <p:sp>
-        <p:nvSpPr>
-          <p:cNvPr id="10" name="TextBox 9"/>
-          <p:cNvSpPr txBox="1"/>
-          <p:nvPr/>
-        </p:nvSpPr>
-        <p:spPr>
-          <a:xfrm>
-            <a:off x="1417320" y="2404872"/>
-            <a:ext cx="9692640" cy="548640"/>
-          </a:xfrm>
-          <a:prstGeom prst="rect">
-            <a:avLst/>
-          </a:prstGeom>
-          <a:noFill/>
-        </p:spPr>
-        <p:txBody>
-          <a:bodyPr wrap="square" anchor="t">
-            <a:spAutoFit/>
-          </a:bodyPr>
-          <a:lstStyle/>
-          <a:p>
-            <a:pPr algn="l"/>
-            <a:r>
-              <a:rPr sz="1600" b="0">
-                <a:solidFill>
-                  <a:srgbClr val="121018"/>
-                </a:solidFill>
-                <a:latin typeface="DIN Next LT W23"/>
-                <a:ea typeface="DIN Next LT W23"/>
-                <a:cs typeface="DIN Next LT W23"/>
-              </a:rPr>
-              <a:t>A neuron is z = wᵀx + b then a = f(z). Depth needs nonlinearity between layers.</a:t>
-            </a:r>
-          </a:p>
-        </p:txBody>
-      </p:sp>
-      <p:sp>
-        <p:nvSpPr>
-          <p:cNvPr id="11" name="Rounded Rectangle 10"/>
-          <p:cNvSpPr/>
-          <p:nvPr/>
-        </p:nvSpPr>
-        <p:spPr>
-          <a:xfrm>
-            <a:off x="548640" y="3291840"/>
-            <a:ext cx="10972800" cy="987552"/>
-          </a:xfrm>
-          <a:prstGeom prst="roundRect">
-            <a:avLst>
-              <a:gd name="adj" fmla="val 10000"/>
-            </a:avLst>
-          </a:prstGeom>
-          <a:solidFill>
-            <a:srgbClr val="EEE8FA"/>
-          </a:solidFill>
-          <a:ln>
-            <a:noFill/>
-          </a:ln>
-          <a:effectLst/>
-        </p:spPr>
-        <p:style>
-          <a:lnRef idx="1">
-            <a:schemeClr val="accent1"/>
-          </a:lnRef>
-          <a:fillRef idx="3">
-            <a:schemeClr val="accent1"/>
-          </a:fillRef>
-          <a:effectRef idx="2">
-            <a:schemeClr val="accent1"/>
-          </a:effectRef>
-          <a:fontRef idx="minor">
-            <a:schemeClr val="lt1"/>
-          </a:fontRef>
-        </p:style>
-        <p:txBody>
-          <a:bodyPr rtlCol="0" anchor="ctr"/>
-          <a:lstStyle/>
-          <a:p>
-            <a:pPr algn="ctr"/>
-          </a:p>
-        </p:txBody>
-      </p:sp>
-      <p:sp>
-        <p:nvSpPr>
-          <p:cNvPr id="12" name="TextBox 11"/>
-          <p:cNvSpPr txBox="1"/>
-          <p:nvPr/>
-        </p:nvSpPr>
-        <p:spPr>
-          <a:xfrm>
-            <a:off x="822960" y="3547872"/>
-            <a:ext cx="457200" cy="457200"/>
-          </a:xfrm>
-          <a:prstGeom prst="rect">
-            <a:avLst/>
-          </a:prstGeom>
-          <a:noFill/>
-        </p:spPr>
-        <p:txBody>
-          <a:bodyPr wrap="square" anchor="t">
-            <a:spAutoFit/>
-          </a:bodyPr>
-          <a:lstStyle/>
-          <a:p>
-            <a:pPr algn="l"/>
-            <a:r>
-              <a:rPr sz="2200" b="1">
-                <a:solidFill>
-                  <a:srgbClr val="5234B7"/>
-                </a:solidFill>
-                <a:latin typeface="DIN Next LT W23"/>
-                <a:ea typeface="DIN Next LT W23"/>
-                <a:cs typeface="DIN Next LT W23"/>
-              </a:rPr>
-              <a:t>2</a:t>
-            </a:r>
-          </a:p>
-        </p:txBody>
-      </p:sp>
-      <p:sp>
-        <p:nvSpPr>
-          <p:cNvPr id="13" name="TextBox 12"/>
-          <p:cNvSpPr txBox="1"/>
-          <p:nvPr/>
-        </p:nvSpPr>
-        <p:spPr>
-          <a:xfrm>
-            <a:off x="1417320" y="3547872"/>
-            <a:ext cx="9692640" cy="548640"/>
-          </a:xfrm>
-          <a:prstGeom prst="rect">
-            <a:avLst/>
-          </a:prstGeom>
-          <a:noFill/>
-        </p:spPr>
-        <p:txBody>
-          <a:bodyPr wrap="square" anchor="t">
-            <a:spAutoFit/>
-          </a:bodyPr>
-          <a:lstStyle/>
-          <a:p>
-            <a:pPr algn="l"/>
-            <a:r>
-              <a:rPr sz="1600" b="0">
-                <a:solidFill>
-                  <a:srgbClr val="121018"/>
-                </a:solidFill>
-                <a:latin typeface="DIN Next LT W23"/>
-                <a:ea typeface="DIN Next LT W23"/>
-                <a:cs typeface="DIN Next LT W23"/>
-              </a:rPr>
-              <a:t>Backprop is the chain rule on a graph. Watch vanishing gradients, LR, and train vs val.</a:t>
-            </a:r>
-          </a:p>
-        </p:txBody>
-      </p:sp>
-      <p:sp>
-        <p:nvSpPr>
-          <p:cNvPr id="14" name="Rounded Rectangle 13"/>
-          <p:cNvSpPr/>
-          <p:nvPr/>
-        </p:nvSpPr>
-        <p:spPr>
-          <a:xfrm>
-            <a:off x="548640" y="4434840"/>
-            <a:ext cx="10972800" cy="987552"/>
-          </a:xfrm>
-          <a:prstGeom prst="roundRect">
-            <a:avLst>
-              <a:gd name="adj" fmla="val 10000"/>
-            </a:avLst>
-          </a:prstGeom>
-          <a:solidFill>
-            <a:srgbClr val="EEE8FA"/>
-          </a:solidFill>
-          <a:ln>
-            <a:noFill/>
-          </a:ln>
-          <a:effectLst/>
-        </p:spPr>
-        <p:style>
-          <a:lnRef idx="1">
-            <a:schemeClr val="accent1"/>
-          </a:lnRef>
-          <a:fillRef idx="3">
-            <a:schemeClr val="accent1"/>
-          </a:fillRef>
-          <a:effectRef idx="2">
-            <a:schemeClr val="accent1"/>
-          </a:effectRef>
-          <a:fontRef idx="minor">
-            <a:schemeClr val="lt1"/>
-          </a:fontRef>
-        </p:style>
-        <p:txBody>
-          <a:bodyPr rtlCol="0" anchor="ctr"/>
-          <a:lstStyle/>
-          <a:p>
-            <a:pPr algn="ctr"/>
-          </a:p>
-        </p:txBody>
-      </p:sp>
-      <p:sp>
-        <p:nvSpPr>
-          <p:cNvPr id="15" name="TextBox 14"/>
-          <p:cNvSpPr txBox="1"/>
-          <p:nvPr/>
-        </p:nvSpPr>
-        <p:spPr>
-          <a:xfrm>
-            <a:off x="822960" y="4690872"/>
-            <a:ext cx="457200" cy="457200"/>
-          </a:xfrm>
-          <a:prstGeom prst="rect">
-            <a:avLst/>
-          </a:prstGeom>
-          <a:noFill/>
-        </p:spPr>
-        <p:txBody>
-          <a:bodyPr wrap="square" anchor="t">
-            <a:spAutoFit/>
-          </a:bodyPr>
-          <a:lstStyle/>
-          <a:p>
-            <a:pPr algn="l"/>
-            <a:r>
-              <a:rPr sz="2200" b="1">
-                <a:solidFill>
-                  <a:srgbClr val="5234B7"/>
-                </a:solidFill>
-                <a:latin typeface="DIN Next LT W23"/>
-                <a:ea typeface="DIN Next LT W23"/>
-                <a:cs typeface="DIN Next LT W23"/>
-              </a:rPr>
-              <a:t>3</a:t>
-            </a:r>
-          </a:p>
-        </p:txBody>
-      </p:sp>
-      <p:sp>
-        <p:nvSpPr>
-          <p:cNvPr id="16" name="TextBox 15"/>
-          <p:cNvSpPr txBox="1"/>
-          <p:nvPr/>
-        </p:nvSpPr>
-        <p:spPr>
-          <a:xfrm>
-            <a:off x="1417320" y="4690872"/>
-            <a:ext cx="9692640" cy="548640"/>
-          </a:xfrm>
-          <a:prstGeom prst="rect">
-            <a:avLst/>
-          </a:prstGeom>
-          <a:noFill/>
-        </p:spPr>
-        <p:txBody>
-          <a:bodyPr wrap="square" anchor="t">
-            <a:spAutoFit/>
-          </a:bodyPr>
-          <a:lstStyle/>
-          <a:p>
-            <a:pPr algn="l"/>
-            <a:r>
-              <a:rPr sz="1600" b="0">
-                <a:solidFill>
-                  <a:srgbClr val="121018"/>
-                </a:solidFill>
-                <a:latin typeface="DIN Next LT W23"/>
-                <a:ea typeface="DIN Next LT W23"/>
-                <a:cs typeface="DIN Next LT W23"/>
-              </a:rPr>
-              <a:t>CNNs share filters across space; RNNs share weights across time; regularize so they generalize.</a:t>
-            </a:r>
-          </a:p>
-        </p:txBody>
-      </p:sp>
-      <p:sp>
-        <p:nvSpPr>
-          <p:cNvPr id="17" name="Rectangle 16"/>
-          <p:cNvSpPr/>
-          <p:nvPr/>
-        </p:nvSpPr>
-        <p:spPr>
-          <a:xfrm>
-            <a:off x="548640" y="6446520"/>
-            <a:ext cx="11064240" cy="10972"/>
-          </a:xfrm>
-          <a:prstGeom prst="rect">
-            <a:avLst/>
-          </a:prstGeom>
-          <a:solidFill>
-            <a:srgbClr val="5234B7"/>
-          </a:solidFill>
-          <a:ln>
-            <a:noFill/>
-          </a:ln>
-          <a:effectLst/>
-        </p:spPr>
-        <p:style>
-          <a:lnRef idx="1">
-            <a:schemeClr val="accent1"/>
-          </a:lnRef>
-          <a:fillRef idx="3">
-            <a:schemeClr val="accent1"/>
-          </a:fillRef>
-          <a:effectRef idx="2">
-            <a:schemeClr val="accent1"/>
-          </a:effectRef>
-          <a:fontRef idx="minor">
-            <a:schemeClr val="lt1"/>
-          </a:fontRef>
-        </p:style>
-        <p:txBody>
-          <a:bodyPr rtlCol="0" anchor="ctr"/>
-          <a:lstStyle/>
-          <a:p>
-            <a:pPr algn="ctr"/>
-          </a:p>
-        </p:txBody>
-      </p:sp>
-      <p:sp>
-        <p:nvSpPr>
-          <p:cNvPr id="18" name="TextBox 17"/>
-          <p:cNvSpPr txBox="1"/>
-          <p:nvPr/>
-        </p:nvSpPr>
-        <p:spPr>
-          <a:xfrm>
-            <a:off x="548640" y="6510528"/>
-            <a:ext cx="2743200" cy="256032"/>
-          </a:xfrm>
-          <a:prstGeom prst="rect">
-            <a:avLst/>
-          </a:prstGeom>
-          <a:noFill/>
-        </p:spPr>
-        <p:txBody>
-          <a:bodyPr wrap="square" anchor="t">
-            <a:spAutoFit/>
-          </a:bodyPr>
-          <a:lstStyle/>
-          <a:p>
-            <a:pPr algn="l"/>
-            <a:r>
-              <a:rPr sz="1100" b="1">
-                <a:solidFill>
-                  <a:srgbClr val="5234B7"/>
-                </a:solidFill>
-                <a:latin typeface="DIN Next LT W23"/>
-                <a:ea typeface="DIN Next LT W23"/>
-                <a:cs typeface="DIN Next LT W23"/>
-              </a:rPr>
-              <a:t>ETRA</a:t>
-            </a:r>
-          </a:p>
-        </p:txBody>
-      </p:sp>
-      <p:sp>
-        <p:nvSpPr>
-          <p:cNvPr id="19" name="TextBox 18"/>
-          <p:cNvSpPr txBox="1"/>
-          <p:nvPr/>
-        </p:nvSpPr>
-        <p:spPr>
-          <a:xfrm>
-            <a:off x="9601200" y="6510528"/>
-            <a:ext cx="2011680" cy="256032"/>
-          </a:xfrm>
-          <a:prstGeom prst="rect">
-            <a:avLst/>
-          </a:prstGeom>
-          <a:noFill/>
-        </p:spPr>
-        <p:txBody>
-          <a:bodyPr wrap="square" anchor="t">
-            <a:spAutoFit/>
-          </a:bodyPr>
-          <a:lstStyle/>
-          <a:p>
-            <a:pPr algn="r"/>
-            <a:r>
-              <a:rPr sz="1100" b="0">
-                <a:solidFill>
-                  <a:srgbClr val="5A5470"/>
-                </a:solidFill>
-                <a:latin typeface="DIN Next LT W23"/>
-                <a:ea typeface="DIN Next LT W23"/>
-                <a:cs typeface="DIN Next LT W23"/>
-              </a:rPr>
-              <a:t>77  /  78</a:t>
+              <a:t>77  /  79</a:t>
             </a:r>
           </a:p>
         </p:txBody>
@@ -50879,7 +50659,7 @@
         <p:spPr>
           <a:xfrm>
             <a:off x="10561320" y="411480"/>
-            <a:ext cx="1378516" cy="365760"/>
+            <a:ext cx="1206201" cy="320040"/>
           </a:xfrm>
           <a:prstGeom prst="rect">
             <a:avLst/>
@@ -50894,23 +50674,104 @@
         </p:nvSpPr>
         <p:spPr>
           <a:xfrm>
-            <a:off x="548640" y="2651760"/>
-            <a:ext cx="10972800" cy="731520"/>
-          </a:xfrm>
-          <a:prstGeom prst="rect">
-            <a:avLst/>
-          </a:prstGeom>
-          <a:noFill/>
-        </p:spPr>
-        <p:txBody>
-          <a:bodyPr wrap="square" anchor="t">
-            <a:spAutoFit/>
-          </a:bodyPr>
+            <a:off x="548640" y="438912"/>
+            <a:ext cx="7772400" cy="274320"/>
+          </a:xfrm>
+          <a:prstGeom prst="rect">
+            <a:avLst/>
+          </a:prstGeom>
+          <a:noFill/>
+        </p:spPr>
+        <p:txBody>
+          <a:bodyPr wrap="square" anchor="t">
+            <a:spAutoFit/>
+          </a:bodyPr>
+          <a:lstStyle/>
+          <a:p>
+            <a:pPr algn="l"/>
+            <a:r>
+              <a:rPr sz="1200" b="0">
+                <a:solidFill>
+                  <a:srgbClr val="5A5470"/>
+                </a:solidFill>
+                <a:latin typeface="DIN Next LT W23"/>
+                <a:ea typeface="DIN Next LT W23"/>
+                <a:cs typeface="DIN Next LT W23"/>
+              </a:rPr>
+              <a:t>S07  ·  Takeaways</a:t>
+            </a:r>
+          </a:p>
+        </p:txBody>
+      </p:sp>
+      <p:sp>
+        <p:nvSpPr>
+          <p:cNvPr id="5" name="Rectangle 4"/>
+          <p:cNvSpPr/>
+          <p:nvPr/>
+        </p:nvSpPr>
+        <p:spPr>
+          <a:xfrm>
+            <a:off x="548640" y="822960"/>
+            <a:ext cx="11064240" cy="10972"/>
+          </a:xfrm>
+          <a:prstGeom prst="rect">
+            <a:avLst/>
+          </a:prstGeom>
+          <a:solidFill>
+            <a:srgbClr val="E4DCF4"/>
+          </a:solidFill>
+          <a:ln>
+            <a:noFill/>
+          </a:ln>
+          <a:effectLst/>
+        </p:spPr>
+        <p:style>
+          <a:lnRef idx="1">
+            <a:schemeClr val="accent1"/>
+          </a:lnRef>
+          <a:fillRef idx="3">
+            <a:schemeClr val="accent1"/>
+          </a:fillRef>
+          <a:effectRef idx="2">
+            <a:schemeClr val="accent1"/>
+          </a:effectRef>
+          <a:fontRef idx="minor">
+            <a:schemeClr val="lt1"/>
+          </a:fontRef>
+        </p:style>
+        <p:txBody>
+          <a:bodyPr rtlCol="0" anchor="ctr"/>
           <a:lstStyle/>
           <a:p>
             <a:pPr algn="ctr"/>
-            <a:r>
-              <a:rPr sz="4000" b="1">
+          </a:p>
+        </p:txBody>
+      </p:sp>
+      <p:sp>
+        <p:nvSpPr>
+          <p:cNvPr id="6" name="TextBox 5"/>
+          <p:cNvSpPr txBox="1"/>
+          <p:nvPr/>
+        </p:nvSpPr>
+        <p:spPr>
+          <a:xfrm>
+            <a:off x="548640" y="1051560"/>
+            <a:ext cx="10241280" cy="594360"/>
+          </a:xfrm>
+          <a:prstGeom prst="rect">
+            <a:avLst/>
+          </a:prstGeom>
+          <a:noFill/>
+        </p:spPr>
+        <p:txBody>
+          <a:bodyPr wrap="square" anchor="t">
+            <a:spAutoFit/>
+          </a:bodyPr>
+          <a:lstStyle/>
+          <a:p>
+            <a:pPr algn="l"/>
+            <a:r>
+              <a:rPr sz="3200" b="1">
                 <a:solidFill>
                   <a:srgbClr val="5234B7"/>
                 </a:solidFill>
@@ -50918,73 +50779,239 @@
                 <a:ea typeface="DIN Next LT W23"/>
                 <a:cs typeface="DIN Next LT W23"/>
               </a:rPr>
-              <a:t>Thank you</a:t>
-            </a:r>
-          </a:p>
-        </p:txBody>
-      </p:sp>
-      <p:sp>
-        <p:nvSpPr>
-          <p:cNvPr id="5" name="TextBox 4"/>
-          <p:cNvSpPr txBox="1"/>
-          <p:nvPr/>
-        </p:nvSpPr>
-        <p:spPr>
-          <a:xfrm>
-            <a:off x="548640" y="3474720"/>
-            <a:ext cx="10972800" cy="365760"/>
-          </a:xfrm>
-          <a:prstGeom prst="rect">
-            <a:avLst/>
-          </a:prstGeom>
-          <a:noFill/>
-        </p:spPr>
-        <p:txBody>
-          <a:bodyPr wrap="square" anchor="t">
-            <a:spAutoFit/>
-          </a:bodyPr>
+              <a:t>3 Ideas to Keep</a:t>
+            </a:r>
+          </a:p>
+        </p:txBody>
+      </p:sp>
+      <p:sp>
+        <p:nvSpPr>
+          <p:cNvPr id="7" name="TextBox 6"/>
+          <p:cNvSpPr txBox="1"/>
+          <p:nvPr/>
+        </p:nvSpPr>
+        <p:spPr>
+          <a:xfrm>
+            <a:off x="548640" y="1600200"/>
+            <a:ext cx="10241280" cy="365760"/>
+          </a:xfrm>
+          <a:prstGeom prst="rect">
+            <a:avLst/>
+          </a:prstGeom>
+          <a:noFill/>
+        </p:spPr>
+        <p:txBody>
+          <a:bodyPr wrap="square" anchor="t">
+            <a:spAutoFit/>
+          </a:bodyPr>
+          <a:lstStyle/>
+          <a:p>
+            <a:pPr algn="l"/>
+            <a:r>
+              <a:rPr sz="1500" b="0">
+                <a:solidFill>
+                  <a:srgbClr val="5A5470"/>
+                </a:solidFill>
+                <a:latin typeface="DIN Next LT W23"/>
+                <a:ea typeface="DIN Next LT W23"/>
+                <a:cs typeface="DIN Next LT W23"/>
+              </a:rPr>
+              <a:t>Leave with these</a:t>
+            </a:r>
+          </a:p>
+        </p:txBody>
+      </p:sp>
+      <p:sp>
+        <p:nvSpPr>
+          <p:cNvPr id="8" name="Rounded Rectangle 7"/>
+          <p:cNvSpPr/>
+          <p:nvPr/>
+        </p:nvSpPr>
+        <p:spPr>
+          <a:xfrm>
+            <a:off x="548640" y="2148840"/>
+            <a:ext cx="10972800" cy="987552"/>
+          </a:xfrm>
+          <a:prstGeom prst="roundRect">
+            <a:avLst>
+              <a:gd name="adj" fmla="val 10000"/>
+            </a:avLst>
+          </a:prstGeom>
+          <a:solidFill>
+            <a:srgbClr val="EEE8FA"/>
+          </a:solidFill>
+          <a:ln>
+            <a:noFill/>
+          </a:ln>
+          <a:effectLst/>
+        </p:spPr>
+        <p:style>
+          <a:lnRef idx="1">
+            <a:schemeClr val="accent1"/>
+          </a:lnRef>
+          <a:fillRef idx="3">
+            <a:schemeClr val="accent1"/>
+          </a:fillRef>
+          <a:effectRef idx="2">
+            <a:schemeClr val="accent1"/>
+          </a:effectRef>
+          <a:fontRef idx="minor">
+            <a:schemeClr val="lt1"/>
+          </a:fontRef>
+        </p:style>
+        <p:txBody>
+          <a:bodyPr rtlCol="0" anchor="ctr"/>
           <a:lstStyle/>
           <a:p>
             <a:pPr algn="ctr"/>
+          </a:p>
+        </p:txBody>
+      </p:sp>
+      <p:sp>
+        <p:nvSpPr>
+          <p:cNvPr id="9" name="TextBox 8"/>
+          <p:cNvSpPr txBox="1"/>
+          <p:nvPr/>
+        </p:nvSpPr>
+        <p:spPr>
+          <a:xfrm>
+            <a:off x="822960" y="2404872"/>
+            <a:ext cx="457200" cy="457200"/>
+          </a:xfrm>
+          <a:prstGeom prst="rect">
+            <a:avLst/>
+          </a:prstGeom>
+          <a:noFill/>
+        </p:spPr>
+        <p:txBody>
+          <a:bodyPr wrap="square" anchor="t">
+            <a:spAutoFit/>
+          </a:bodyPr>
+          <a:lstStyle/>
+          <a:p>
+            <a:pPr algn="l"/>
+            <a:r>
+              <a:rPr sz="2200" b="1">
+                <a:solidFill>
+                  <a:srgbClr val="5234B7"/>
+                </a:solidFill>
+                <a:latin typeface="DIN Next LT W23"/>
+                <a:ea typeface="DIN Next LT W23"/>
+                <a:cs typeface="DIN Next LT W23"/>
+              </a:rPr>
+              <a:t>1</a:t>
+            </a:r>
+          </a:p>
+        </p:txBody>
+      </p:sp>
+      <p:sp>
+        <p:nvSpPr>
+          <p:cNvPr id="10" name="TextBox 9"/>
+          <p:cNvSpPr txBox="1"/>
+          <p:nvPr/>
+        </p:nvSpPr>
+        <p:spPr>
+          <a:xfrm>
+            <a:off x="1417320" y="2404872"/>
+            <a:ext cx="9692640" cy="548640"/>
+          </a:xfrm>
+          <a:prstGeom prst="rect">
+            <a:avLst/>
+          </a:prstGeom>
+          <a:noFill/>
+        </p:spPr>
+        <p:txBody>
+          <a:bodyPr wrap="square" anchor="t">
+            <a:spAutoFit/>
+          </a:bodyPr>
+          <a:lstStyle/>
+          <a:p>
+            <a:pPr algn="l"/>
             <a:r>
               <a:rPr sz="1600" b="0">
                 <a:solidFill>
-                  <a:srgbClr val="5A5470"/>
-                </a:solidFill>
-                <a:latin typeface="DIN Next LT W23"/>
-                <a:ea typeface="DIN Next LT W23"/>
-                <a:cs typeface="DIN Next LT W23"/>
-              </a:rPr>
-              <a:t>Labs: code/15- Deep Learning</a:t>
-            </a:r>
-          </a:p>
-        </p:txBody>
-      </p:sp>
-      <p:sp>
-        <p:nvSpPr>
-          <p:cNvPr id="6" name="TextBox 5"/>
-          <p:cNvSpPr txBox="1"/>
-          <p:nvPr/>
-        </p:nvSpPr>
-        <p:spPr>
-          <a:xfrm>
-            <a:off x="548640" y="6126480"/>
-            <a:ext cx="5486400" cy="274320"/>
-          </a:xfrm>
-          <a:prstGeom prst="rect">
-            <a:avLst/>
-          </a:prstGeom>
-          <a:noFill/>
-        </p:spPr>
-        <p:txBody>
-          <a:bodyPr wrap="square" anchor="t">
-            <a:spAutoFit/>
-          </a:bodyPr>
-          <a:lstStyle/>
-          <a:p>
-            <a:pPr algn="l"/>
-            <a:r>
-              <a:rPr sz="1200" b="1">
+                  <a:srgbClr val="121018"/>
+                </a:solidFill>
+                <a:latin typeface="DIN Next LT W23"/>
+                <a:ea typeface="DIN Next LT W23"/>
+                <a:cs typeface="DIN Next LT W23"/>
+              </a:rPr>
+              <a:t>A neuron is z = wᵀx + b then a = f(z). Depth needs nonlinearity between layers.</a:t>
+            </a:r>
+          </a:p>
+        </p:txBody>
+      </p:sp>
+      <p:sp>
+        <p:nvSpPr>
+          <p:cNvPr id="11" name="Rounded Rectangle 10"/>
+          <p:cNvSpPr/>
+          <p:nvPr/>
+        </p:nvSpPr>
+        <p:spPr>
+          <a:xfrm>
+            <a:off x="548640" y="3291840"/>
+            <a:ext cx="10972800" cy="987552"/>
+          </a:xfrm>
+          <a:prstGeom prst="roundRect">
+            <a:avLst>
+              <a:gd name="adj" fmla="val 10000"/>
+            </a:avLst>
+          </a:prstGeom>
+          <a:solidFill>
+            <a:srgbClr val="EEE8FA"/>
+          </a:solidFill>
+          <a:ln>
+            <a:noFill/>
+          </a:ln>
+          <a:effectLst/>
+        </p:spPr>
+        <p:style>
+          <a:lnRef idx="1">
+            <a:schemeClr val="accent1"/>
+          </a:lnRef>
+          <a:fillRef idx="3">
+            <a:schemeClr val="accent1"/>
+          </a:fillRef>
+          <a:effectRef idx="2">
+            <a:schemeClr val="accent1"/>
+          </a:effectRef>
+          <a:fontRef idx="minor">
+            <a:schemeClr val="lt1"/>
+          </a:fontRef>
+        </p:style>
+        <p:txBody>
+          <a:bodyPr rtlCol="0" anchor="ctr"/>
+          <a:lstStyle/>
+          <a:p>
+            <a:pPr algn="ctr"/>
+          </a:p>
+        </p:txBody>
+      </p:sp>
+      <p:sp>
+        <p:nvSpPr>
+          <p:cNvPr id="12" name="TextBox 11"/>
+          <p:cNvSpPr txBox="1"/>
+          <p:nvPr/>
+        </p:nvSpPr>
+        <p:spPr>
+          <a:xfrm>
+            <a:off x="822960" y="3547872"/>
+            <a:ext cx="457200" cy="457200"/>
+          </a:xfrm>
+          <a:prstGeom prst="rect">
+            <a:avLst/>
+          </a:prstGeom>
+          <a:noFill/>
+        </p:spPr>
+        <p:txBody>
+          <a:bodyPr wrap="square" anchor="t">
+            <a:spAutoFit/>
+          </a:bodyPr>
+          <a:lstStyle/>
+          <a:p>
+            <a:pPr algn="l"/>
+            <a:r>
+              <a:rPr sz="2200" b="1">
                 <a:solidFill>
                   <a:srgbClr val="5234B7"/>
                 </a:solidFill>
@@ -50992,14 +51019,171 @@
                 <a:ea typeface="DIN Next LT W23"/>
                 <a:cs typeface="DIN Next LT W23"/>
               </a:rPr>
-              <a:t>ETRA</a:t>
-            </a:r>
-          </a:p>
-        </p:txBody>
-      </p:sp>
-      <p:sp>
-        <p:nvSpPr>
-          <p:cNvPr id="7" name="Rectangle 6"/>
+              <a:t>2</a:t>
+            </a:r>
+          </a:p>
+        </p:txBody>
+      </p:sp>
+      <p:sp>
+        <p:nvSpPr>
+          <p:cNvPr id="13" name="TextBox 12"/>
+          <p:cNvSpPr txBox="1"/>
+          <p:nvPr/>
+        </p:nvSpPr>
+        <p:spPr>
+          <a:xfrm>
+            <a:off x="1417320" y="3547872"/>
+            <a:ext cx="9692640" cy="548640"/>
+          </a:xfrm>
+          <a:prstGeom prst="rect">
+            <a:avLst/>
+          </a:prstGeom>
+          <a:noFill/>
+        </p:spPr>
+        <p:txBody>
+          <a:bodyPr wrap="square" anchor="t">
+            <a:spAutoFit/>
+          </a:bodyPr>
+          <a:lstStyle/>
+          <a:p>
+            <a:pPr algn="l"/>
+            <a:r>
+              <a:rPr sz="1600" b="0">
+                <a:solidFill>
+                  <a:srgbClr val="121018"/>
+                </a:solidFill>
+                <a:latin typeface="DIN Next LT W23"/>
+                <a:ea typeface="DIN Next LT W23"/>
+                <a:cs typeface="DIN Next LT W23"/>
+              </a:rPr>
+              <a:t>Backprop is the chain rule on a graph. Watch vanishing gradients, LR, and train vs val.</a:t>
+            </a:r>
+          </a:p>
+        </p:txBody>
+      </p:sp>
+      <p:sp>
+        <p:nvSpPr>
+          <p:cNvPr id="14" name="Rounded Rectangle 13"/>
+          <p:cNvSpPr/>
+          <p:nvPr/>
+        </p:nvSpPr>
+        <p:spPr>
+          <a:xfrm>
+            <a:off x="548640" y="4434840"/>
+            <a:ext cx="10972800" cy="987552"/>
+          </a:xfrm>
+          <a:prstGeom prst="roundRect">
+            <a:avLst>
+              <a:gd name="adj" fmla="val 10000"/>
+            </a:avLst>
+          </a:prstGeom>
+          <a:solidFill>
+            <a:srgbClr val="EEE8FA"/>
+          </a:solidFill>
+          <a:ln>
+            <a:noFill/>
+          </a:ln>
+          <a:effectLst/>
+        </p:spPr>
+        <p:style>
+          <a:lnRef idx="1">
+            <a:schemeClr val="accent1"/>
+          </a:lnRef>
+          <a:fillRef idx="3">
+            <a:schemeClr val="accent1"/>
+          </a:fillRef>
+          <a:effectRef idx="2">
+            <a:schemeClr val="accent1"/>
+          </a:effectRef>
+          <a:fontRef idx="minor">
+            <a:schemeClr val="lt1"/>
+          </a:fontRef>
+        </p:style>
+        <p:txBody>
+          <a:bodyPr rtlCol="0" anchor="ctr"/>
+          <a:lstStyle/>
+          <a:p>
+            <a:pPr algn="ctr"/>
+          </a:p>
+        </p:txBody>
+      </p:sp>
+      <p:sp>
+        <p:nvSpPr>
+          <p:cNvPr id="15" name="TextBox 14"/>
+          <p:cNvSpPr txBox="1"/>
+          <p:nvPr/>
+        </p:nvSpPr>
+        <p:spPr>
+          <a:xfrm>
+            <a:off x="822960" y="4690872"/>
+            <a:ext cx="457200" cy="457200"/>
+          </a:xfrm>
+          <a:prstGeom prst="rect">
+            <a:avLst/>
+          </a:prstGeom>
+          <a:noFill/>
+        </p:spPr>
+        <p:txBody>
+          <a:bodyPr wrap="square" anchor="t">
+            <a:spAutoFit/>
+          </a:bodyPr>
+          <a:lstStyle/>
+          <a:p>
+            <a:pPr algn="l"/>
+            <a:r>
+              <a:rPr sz="2200" b="1">
+                <a:solidFill>
+                  <a:srgbClr val="5234B7"/>
+                </a:solidFill>
+                <a:latin typeface="DIN Next LT W23"/>
+                <a:ea typeface="DIN Next LT W23"/>
+                <a:cs typeface="DIN Next LT W23"/>
+              </a:rPr>
+              <a:t>3</a:t>
+            </a:r>
+          </a:p>
+        </p:txBody>
+      </p:sp>
+      <p:sp>
+        <p:nvSpPr>
+          <p:cNvPr id="16" name="TextBox 15"/>
+          <p:cNvSpPr txBox="1"/>
+          <p:nvPr/>
+        </p:nvSpPr>
+        <p:spPr>
+          <a:xfrm>
+            <a:off x="1417320" y="4690872"/>
+            <a:ext cx="9692640" cy="548640"/>
+          </a:xfrm>
+          <a:prstGeom prst="rect">
+            <a:avLst/>
+          </a:prstGeom>
+          <a:noFill/>
+        </p:spPr>
+        <p:txBody>
+          <a:bodyPr wrap="square" anchor="t">
+            <a:spAutoFit/>
+          </a:bodyPr>
+          <a:lstStyle/>
+          <a:p>
+            <a:pPr algn="l"/>
+            <a:r>
+              <a:rPr sz="1600" b="0">
+                <a:solidFill>
+                  <a:srgbClr val="121018"/>
+                </a:solidFill>
+                <a:latin typeface="DIN Next LT W23"/>
+                <a:ea typeface="DIN Next LT W23"/>
+                <a:cs typeface="DIN Next LT W23"/>
+              </a:rPr>
+              <a:t>CNNs share filters across space; RNNs share weights across time; regularize so they generalize.</a:t>
+            </a:r>
+          </a:p>
+        </p:txBody>
+      </p:sp>
+      <p:sp>
+        <p:nvSpPr>
+          <p:cNvPr id="17" name="Rectangle 16"/>
           <p:cNvSpPr/>
           <p:nvPr/>
         </p:nvSpPr>
@@ -51043,7 +51227,7 @@
       </p:sp>
       <p:sp>
         <p:nvSpPr>
-          <p:cNvPr id="8" name="TextBox 7"/>
+          <p:cNvPr id="18" name="TextBox 17"/>
           <p:cNvSpPr txBox="1"/>
           <p:nvPr/>
         </p:nvSpPr>
@@ -51080,7 +51264,7 @@
       </p:sp>
       <p:sp>
         <p:nvSpPr>
-          <p:cNvPr id="9" name="TextBox 8"/>
+          <p:cNvPr id="19" name="TextBox 18"/>
           <p:cNvSpPr txBox="1"/>
           <p:nvPr/>
         </p:nvSpPr>
@@ -51110,7 +51294,330 @@
                 <a:ea typeface="DIN Next LT W23"/>
                 <a:cs typeface="DIN Next LT W23"/>
               </a:rPr>
-              <a:t>78  /  78</a:t>
+              <a:t>78  /  79</a:t>
+            </a:r>
+          </a:p>
+        </p:txBody>
+      </p:sp>
+    </p:spTree>
+  </p:cSld>
+  <p:clrMapOvr>
+    <a:masterClrMapping/>
+  </p:clrMapOvr>
+</p:sld>
+</file>
+
+<file path=ppt/slides/slide79.xml><?xml version="1.0" encoding="utf-8"?>
+<p:sld xmlns:a="http://schemas.openxmlformats.org/drawingml/2006/main" xmlns:p="http://schemas.openxmlformats.org/presentationml/2006/main" xmlns:r="http://schemas.openxmlformats.org/officeDocument/2006/relationships">
+  <p:cSld>
+    <p:bg>
+      <p:bgPr>
+        <a:solidFill>
+          <a:srgbClr val="FAF8FF"/>
+        </a:solidFill>
+        <a:effectLst/>
+      </p:bgPr>
+    </p:bg>
+    <p:spTree>
+      <p:nvGrpSpPr>
+        <p:cNvPr id="1" name=""/>
+        <p:cNvGrpSpPr/>
+        <p:nvPr/>
+      </p:nvGrpSpPr>
+      <p:grpSpPr/>
+      <p:sp>
+        <p:nvSpPr>
+          <p:cNvPr id="2" name="Rectangle 1"/>
+          <p:cNvSpPr/>
+          <p:nvPr/>
+        </p:nvSpPr>
+        <p:spPr>
+          <a:xfrm>
+            <a:off x="12136831" y="0"/>
+            <a:ext cx="54864" cy="6858000"/>
+          </a:xfrm>
+          <a:prstGeom prst="rect">
+            <a:avLst/>
+          </a:prstGeom>
+          <a:solidFill>
+            <a:srgbClr val="5234B7"/>
+          </a:solidFill>
+          <a:ln>
+            <a:noFill/>
+          </a:ln>
+          <a:effectLst/>
+        </p:spPr>
+        <p:style>
+          <a:lnRef idx="1">
+            <a:schemeClr val="accent1"/>
+          </a:lnRef>
+          <a:fillRef idx="3">
+            <a:schemeClr val="accent1"/>
+          </a:fillRef>
+          <a:effectRef idx="2">
+            <a:schemeClr val="accent1"/>
+          </a:effectRef>
+          <a:fontRef idx="minor">
+            <a:schemeClr val="lt1"/>
+          </a:fontRef>
+        </p:style>
+        <p:txBody>
+          <a:bodyPr rtlCol="0" anchor="ctr"/>
+          <a:lstStyle/>
+          <a:p>
+            <a:pPr algn="ctr"/>
+          </a:p>
+        </p:txBody>
+      </p:sp>
+      <p:pic>
+        <p:nvPicPr>
+          <p:cNvPr id="3" name="Picture 2" descr="etra-wordmark.png"/>
+          <p:cNvPicPr>
+            <a:picLocks noChangeAspect="1"/>
+          </p:cNvPicPr>
+          <p:nvPr/>
+        </p:nvPicPr>
+        <p:blipFill>
+          <a:blip r:embed="rId2"/>
+          <a:stretch>
+            <a:fillRect/>
+          </a:stretch>
+        </p:blipFill>
+        <p:spPr>
+          <a:xfrm>
+            <a:off x="10561320" y="411480"/>
+            <a:ext cx="1378516" cy="365760"/>
+          </a:xfrm>
+          <a:prstGeom prst="rect">
+            <a:avLst/>
+          </a:prstGeom>
+        </p:spPr>
+      </p:pic>
+      <p:sp>
+        <p:nvSpPr>
+          <p:cNvPr id="4" name="TextBox 3"/>
+          <p:cNvSpPr txBox="1"/>
+          <p:nvPr/>
+        </p:nvSpPr>
+        <p:spPr>
+          <a:xfrm>
+            <a:off x="548640" y="2651760"/>
+            <a:ext cx="10972800" cy="731520"/>
+          </a:xfrm>
+          <a:prstGeom prst="rect">
+            <a:avLst/>
+          </a:prstGeom>
+          <a:noFill/>
+        </p:spPr>
+        <p:txBody>
+          <a:bodyPr wrap="square" anchor="t">
+            <a:spAutoFit/>
+          </a:bodyPr>
+          <a:lstStyle/>
+          <a:p>
+            <a:pPr algn="ctr"/>
+            <a:r>
+              <a:rPr sz="4000" b="1">
+                <a:solidFill>
+                  <a:srgbClr val="5234B7"/>
+                </a:solidFill>
+                <a:latin typeface="DIN Next LT W23"/>
+                <a:ea typeface="DIN Next LT W23"/>
+                <a:cs typeface="DIN Next LT W23"/>
+              </a:rPr>
+              <a:t>Thank you</a:t>
+            </a:r>
+          </a:p>
+        </p:txBody>
+      </p:sp>
+      <p:sp>
+        <p:nvSpPr>
+          <p:cNvPr id="5" name="TextBox 4"/>
+          <p:cNvSpPr txBox="1"/>
+          <p:nvPr/>
+        </p:nvSpPr>
+        <p:spPr>
+          <a:xfrm>
+            <a:off x="548640" y="3474720"/>
+            <a:ext cx="10972800" cy="365760"/>
+          </a:xfrm>
+          <a:prstGeom prst="rect">
+            <a:avLst/>
+          </a:prstGeom>
+          <a:noFill/>
+        </p:spPr>
+        <p:txBody>
+          <a:bodyPr wrap="square" anchor="t">
+            <a:spAutoFit/>
+          </a:bodyPr>
+          <a:lstStyle/>
+          <a:p>
+            <a:pPr algn="ctr"/>
+            <a:r>
+              <a:rPr sz="1600" b="0">
+                <a:solidFill>
+                  <a:srgbClr val="5A5470"/>
+                </a:solidFill>
+                <a:latin typeface="DIN Next LT W23"/>
+                <a:ea typeface="DIN Next LT W23"/>
+                <a:cs typeface="DIN Next LT W23"/>
+              </a:rPr>
+              <a:t>Labs: code/15- Deep Learning</a:t>
+            </a:r>
+          </a:p>
+        </p:txBody>
+      </p:sp>
+      <p:sp>
+        <p:nvSpPr>
+          <p:cNvPr id="6" name="TextBox 5"/>
+          <p:cNvSpPr txBox="1"/>
+          <p:nvPr/>
+        </p:nvSpPr>
+        <p:spPr>
+          <a:xfrm>
+            <a:off x="548640" y="6126480"/>
+            <a:ext cx="5486400" cy="274320"/>
+          </a:xfrm>
+          <a:prstGeom prst="rect">
+            <a:avLst/>
+          </a:prstGeom>
+          <a:noFill/>
+        </p:spPr>
+        <p:txBody>
+          <a:bodyPr wrap="square" anchor="t">
+            <a:spAutoFit/>
+          </a:bodyPr>
+          <a:lstStyle/>
+          <a:p>
+            <a:pPr algn="l"/>
+            <a:r>
+              <a:rPr sz="1200" b="1">
+                <a:solidFill>
+                  <a:srgbClr val="5234B7"/>
+                </a:solidFill>
+                <a:latin typeface="DIN Next LT W23"/>
+                <a:ea typeface="DIN Next LT W23"/>
+                <a:cs typeface="DIN Next LT W23"/>
+              </a:rPr>
+              <a:t>ETRA</a:t>
+            </a:r>
+          </a:p>
+        </p:txBody>
+      </p:sp>
+      <p:sp>
+        <p:nvSpPr>
+          <p:cNvPr id="7" name="Rectangle 6"/>
+          <p:cNvSpPr/>
+          <p:nvPr/>
+        </p:nvSpPr>
+        <p:spPr>
+          <a:xfrm>
+            <a:off x="548640" y="6446520"/>
+            <a:ext cx="11064240" cy="10972"/>
+          </a:xfrm>
+          <a:prstGeom prst="rect">
+            <a:avLst/>
+          </a:prstGeom>
+          <a:solidFill>
+            <a:srgbClr val="5234B7"/>
+          </a:solidFill>
+          <a:ln>
+            <a:noFill/>
+          </a:ln>
+          <a:effectLst/>
+        </p:spPr>
+        <p:style>
+          <a:lnRef idx="1">
+            <a:schemeClr val="accent1"/>
+          </a:lnRef>
+          <a:fillRef idx="3">
+            <a:schemeClr val="accent1"/>
+          </a:fillRef>
+          <a:effectRef idx="2">
+            <a:schemeClr val="accent1"/>
+          </a:effectRef>
+          <a:fontRef idx="minor">
+            <a:schemeClr val="lt1"/>
+          </a:fontRef>
+        </p:style>
+        <p:txBody>
+          <a:bodyPr rtlCol="0" anchor="ctr"/>
+          <a:lstStyle/>
+          <a:p>
+            <a:pPr algn="ctr"/>
+          </a:p>
+        </p:txBody>
+      </p:sp>
+      <p:sp>
+        <p:nvSpPr>
+          <p:cNvPr id="8" name="TextBox 7"/>
+          <p:cNvSpPr txBox="1"/>
+          <p:nvPr/>
+        </p:nvSpPr>
+        <p:spPr>
+          <a:xfrm>
+            <a:off x="548640" y="6510528"/>
+            <a:ext cx="2743200" cy="256032"/>
+          </a:xfrm>
+          <a:prstGeom prst="rect">
+            <a:avLst/>
+          </a:prstGeom>
+          <a:noFill/>
+        </p:spPr>
+        <p:txBody>
+          <a:bodyPr wrap="square" anchor="t">
+            <a:spAutoFit/>
+          </a:bodyPr>
+          <a:lstStyle/>
+          <a:p>
+            <a:pPr algn="l"/>
+            <a:r>
+              <a:rPr sz="1100" b="1">
+                <a:solidFill>
+                  <a:srgbClr val="5234B7"/>
+                </a:solidFill>
+                <a:latin typeface="DIN Next LT W23"/>
+                <a:ea typeface="DIN Next LT W23"/>
+                <a:cs typeface="DIN Next LT W23"/>
+              </a:rPr>
+              <a:t>ETRA</a:t>
+            </a:r>
+          </a:p>
+        </p:txBody>
+      </p:sp>
+      <p:sp>
+        <p:nvSpPr>
+          <p:cNvPr id="9" name="TextBox 8"/>
+          <p:cNvSpPr txBox="1"/>
+          <p:nvPr/>
+        </p:nvSpPr>
+        <p:spPr>
+          <a:xfrm>
+            <a:off x="9601200" y="6510528"/>
+            <a:ext cx="2011680" cy="256032"/>
+          </a:xfrm>
+          <a:prstGeom prst="rect">
+            <a:avLst/>
+          </a:prstGeom>
+          <a:noFill/>
+        </p:spPr>
+        <p:txBody>
+          <a:bodyPr wrap="square" anchor="t">
+            <a:spAutoFit/>
+          </a:bodyPr>
+          <a:lstStyle/>
+          <a:p>
+            <a:pPr algn="r"/>
+            <a:r>
+              <a:rPr sz="1100" b="0">
+                <a:solidFill>
+                  <a:srgbClr val="5A5470"/>
+                </a:solidFill>
+                <a:latin typeface="DIN Next LT W23"/>
+                <a:ea typeface="DIN Next LT W23"/>
+                <a:cs typeface="DIN Next LT W23"/>
+              </a:rPr>
+              <a:t>79  /  79</a:t>
             </a:r>
           </a:p>
         </p:txBody>
@@ -51778,7 +52285,7 @@
                 <a:ea typeface="DIN Next LT W23"/>
                 <a:cs typeface="DIN Next LT W23"/>
               </a:rPr>
-              <a:t>08  /  78</a:t>
+              <a:t>08  /  79</a:t>
             </a:r>
           </a:p>
         </p:txBody>
@@ -52409,7 +52916,7 @@
                 <a:ea typeface="DIN Next LT W23"/>
                 <a:cs typeface="DIN Next LT W23"/>
               </a:rPr>
-              <a:t>09  /  78</a:t>
+              <a:t>09  /  79</a:t>
             </a:r>
           </a:p>
         </p:txBody>

--- a/web-presentation/pdf-exports/Week2-Session1-Deep-Learning.pptx
+++ b/web-presentation/pdf-exports/Week2-Session1-Deep-Learning.pptx
@@ -84,6 +84,9 @@
     <p:sldId id="332" r:id="rId83"/>
     <p:sldId id="333" r:id="rId84"/>
     <p:sldId id="334" r:id="rId85"/>
+    <p:sldId id="335" r:id="rId86"/>
+    <p:sldId id="336" r:id="rId87"/>
+    <p:sldId id="337" r:id="rId88"/>
   </p:sldIdLst>
   <p:sldSz cx="12191695" cy="6858000" type="screen4x3"/>
   <p:notesSz cx="6858000" cy="9144000"/>
@@ -4026,7 +4029,7 @@
                 <a:ea typeface="DIN Next LT W23"/>
                 <a:cs typeface="DIN Next LT W23"/>
               </a:rPr>
-              <a:t>10  /  79</a:t>
+              <a:t>10  /  82</a:t>
             </a:r>
           </a:p>
         </p:txBody>
@@ -4694,7 +4697,7 @@
                 <a:ea typeface="DIN Next LT W23"/>
                 <a:cs typeface="DIN Next LT W23"/>
               </a:rPr>
-              <a:t>11  /  79</a:t>
+              <a:t>11  /  82</a:t>
             </a:r>
           </a:p>
         </p:txBody>
@@ -5168,7 +5171,7 @@
                 <a:ea typeface="DIN Next LT W23"/>
                 <a:cs typeface="DIN Next LT W23"/>
               </a:rPr>
-              <a:t>12  /  79</a:t>
+              <a:t>12  /  82</a:t>
             </a:r>
           </a:p>
         </p:txBody>
@@ -5757,7 +5760,7 @@
                 <a:ea typeface="DIN Next LT W23"/>
                 <a:cs typeface="DIN Next LT W23"/>
               </a:rPr>
-              <a:t>13  /  79</a:t>
+              <a:t>13  /  82</a:t>
             </a:r>
           </a:p>
         </p:txBody>
@@ -6231,7 +6234,7 @@
                 <a:ea typeface="DIN Next LT W23"/>
                 <a:cs typeface="DIN Next LT W23"/>
               </a:rPr>
-              <a:t>14  /  79</a:t>
+              <a:t>14  /  82</a:t>
             </a:r>
           </a:p>
         </p:txBody>
@@ -6899,7 +6902,7 @@
                 <a:ea typeface="DIN Next LT W23"/>
                 <a:cs typeface="DIN Next LT W23"/>
               </a:rPr>
-              <a:t>15  /  79</a:t>
+              <a:t>15  /  82</a:t>
             </a:r>
           </a:p>
         </p:txBody>
@@ -7488,7 +7491,7 @@
                 <a:ea typeface="DIN Next LT W23"/>
                 <a:cs typeface="DIN Next LT W23"/>
               </a:rPr>
-              <a:t>16  /  79</a:t>
+              <a:t>16  /  82</a:t>
             </a:r>
           </a:p>
         </p:txBody>
@@ -8308,7 +8311,7 @@
                 <a:ea typeface="DIN Next LT W23"/>
                 <a:cs typeface="DIN Next LT W23"/>
               </a:rPr>
-              <a:t>17  /  79</a:t>
+              <a:t>17  /  82</a:t>
             </a:r>
           </a:p>
         </p:txBody>
@@ -9087,7 +9090,7 @@
                 <a:ea typeface="DIN Next LT W23"/>
                 <a:cs typeface="DIN Next LT W23"/>
               </a:rPr>
-              <a:t>18  /  79</a:t>
+              <a:t>18  /  82</a:t>
             </a:r>
           </a:p>
         </p:txBody>
@@ -9803,7 +9806,7 @@
                 <a:ea typeface="DIN Next LT W23"/>
                 <a:cs typeface="DIN Next LT W23"/>
               </a:rPr>
-              <a:t>19  /  79</a:t>
+              <a:t>19  /  82</a:t>
             </a:r>
           </a:p>
         </p:txBody>
@@ -11722,7 +11725,7 @@
                 <a:ea typeface="DIN Next LT W23"/>
                 <a:cs typeface="DIN Next LT W23"/>
               </a:rPr>
-              <a:t>02  /  79</a:t>
+              <a:t>02  /  82</a:t>
             </a:r>
           </a:p>
         </p:txBody>
@@ -12386,7 +12389,7 @@
                 <a:ea typeface="DIN Next LT W23"/>
                 <a:cs typeface="DIN Next LT W23"/>
               </a:rPr>
-              <a:t>20  /  79</a:t>
+              <a:t>20  /  82</a:t>
             </a:r>
           </a:p>
         </p:txBody>
@@ -13049,7 +13052,7 @@
                 <a:ea typeface="DIN Next LT W23"/>
                 <a:cs typeface="DIN Next LT W23"/>
               </a:rPr>
-              <a:t>21  /  79</a:t>
+              <a:t>21  /  82</a:t>
             </a:r>
           </a:p>
         </p:txBody>
@@ -13881,7 +13884,7 @@
                 <a:ea typeface="DIN Next LT W23"/>
                 <a:cs typeface="DIN Next LT W23"/>
               </a:rPr>
-              <a:t>22  /  79</a:t>
+              <a:t>22  /  82</a:t>
             </a:r>
           </a:p>
         </p:txBody>
@@ -14470,7 +14473,7 @@
                 <a:ea typeface="DIN Next LT W23"/>
                 <a:cs typeface="DIN Next LT W23"/>
               </a:rPr>
-              <a:t>23  /  79</a:t>
+              <a:t>23  /  82</a:t>
             </a:r>
           </a:p>
         </p:txBody>
@@ -15175,7 +15178,7 @@
                 <a:ea typeface="DIN Next LT W23"/>
                 <a:cs typeface="DIN Next LT W23"/>
               </a:rPr>
-              <a:t>24  /  79</a:t>
+              <a:t>24  /  82</a:t>
             </a:r>
           </a:p>
         </p:txBody>
@@ -15853,7 +15856,7 @@
                 <a:ea typeface="DIN Next LT W23"/>
                 <a:cs typeface="DIN Next LT W23"/>
               </a:rPr>
-              <a:t>25  /  79</a:t>
+              <a:t>25  /  82</a:t>
             </a:r>
           </a:p>
         </p:txBody>
@@ -16373,7 +16376,7 @@
                 <a:ea typeface="DIN Next LT W23"/>
                 <a:cs typeface="DIN Next LT W23"/>
               </a:rPr>
-              <a:t>26  /  79</a:t>
+              <a:t>26  /  82</a:t>
             </a:r>
           </a:p>
         </p:txBody>
@@ -16847,7 +16850,7 @@
                 <a:ea typeface="DIN Next LT W23"/>
                 <a:cs typeface="DIN Next LT W23"/>
               </a:rPr>
-              <a:t>27  /  79</a:t>
+              <a:t>27  /  82</a:t>
             </a:r>
           </a:p>
         </p:txBody>
@@ -17436,7 +17439,7 @@
                 <a:ea typeface="DIN Next LT W23"/>
                 <a:cs typeface="DIN Next LT W23"/>
               </a:rPr>
-              <a:t>28  /  79</a:t>
+              <a:t>28  /  82</a:t>
             </a:r>
           </a:p>
         </p:txBody>
@@ -18114,7 +18117,7 @@
                 <a:ea typeface="DIN Next LT W23"/>
                 <a:cs typeface="DIN Next LT W23"/>
               </a:rPr>
-              <a:t>29  /  79</a:t>
+              <a:t>29  /  82</a:t>
             </a:r>
           </a:p>
         </p:txBody>
@@ -18987,7 +18990,7 @@
                 <a:ea typeface="DIN Next LT W23"/>
                 <a:cs typeface="DIN Next LT W23"/>
               </a:rPr>
-              <a:t>03  /  79</a:t>
+              <a:t>03  /  82</a:t>
             </a:r>
           </a:p>
         </p:txBody>
@@ -19651,7 +19654,7 @@
                 <a:ea typeface="DIN Next LT W23"/>
                 <a:cs typeface="DIN Next LT W23"/>
               </a:rPr>
-              <a:t>30  /  79</a:t>
+              <a:t>30  /  82</a:t>
             </a:r>
           </a:p>
         </p:txBody>
@@ -20125,7 +20128,7 @@
                 <a:ea typeface="DIN Next LT W23"/>
                 <a:cs typeface="DIN Next LT W23"/>
               </a:rPr>
-              <a:t>31  /  79</a:t>
+              <a:t>31  /  82</a:t>
             </a:r>
           </a:p>
         </p:txBody>
@@ -20714,7 +20717,7 @@
                 <a:ea typeface="DIN Next LT W23"/>
                 <a:cs typeface="DIN Next LT W23"/>
               </a:rPr>
-              <a:t>32  /  79</a:t>
+              <a:t>32  /  82</a:t>
             </a:r>
           </a:p>
         </p:txBody>
@@ -21188,7 +21191,7 @@
                 <a:ea typeface="DIN Next LT W23"/>
                 <a:cs typeface="DIN Next LT W23"/>
               </a:rPr>
-              <a:t>33  /  79</a:t>
+              <a:t>33  /  82</a:t>
             </a:r>
           </a:p>
         </p:txBody>
@@ -22020,7 +22023,7 @@
                 <a:ea typeface="DIN Next LT W23"/>
                 <a:cs typeface="DIN Next LT W23"/>
               </a:rPr>
-              <a:t>34  /  79</a:t>
+              <a:t>34  /  82</a:t>
             </a:r>
           </a:p>
         </p:txBody>
@@ -22684,7 +22687,7 @@
                 <a:ea typeface="DIN Next LT W23"/>
                 <a:cs typeface="DIN Next LT W23"/>
               </a:rPr>
-              <a:t>35  /  79</a:t>
+              <a:t>35  /  82</a:t>
             </a:r>
           </a:p>
         </p:txBody>
@@ -23158,7 +23161,7 @@
                 <a:ea typeface="DIN Next LT W23"/>
                 <a:cs typeface="DIN Next LT W23"/>
               </a:rPr>
-              <a:t>36  /  79</a:t>
+              <a:t>36  /  82</a:t>
             </a:r>
           </a:p>
         </p:txBody>
@@ -23747,7 +23750,7 @@
                 <a:ea typeface="DIN Next LT W23"/>
                 <a:cs typeface="DIN Next LT W23"/>
               </a:rPr>
-              <a:t>37  /  79</a:t>
+              <a:t>37  /  82</a:t>
             </a:r>
           </a:p>
         </p:txBody>
@@ -24332,7 +24335,7 @@
                 <a:ea typeface="DIN Next LT W23"/>
                 <a:cs typeface="DIN Next LT W23"/>
               </a:rPr>
-              <a:t>38  /  79</a:t>
+              <a:t>38  /  82</a:t>
             </a:r>
           </a:p>
         </p:txBody>
@@ -24806,7 +24809,7 @@
                 <a:ea typeface="DIN Next LT W23"/>
                 <a:cs typeface="DIN Next LT W23"/>
               </a:rPr>
-              <a:t>39  /  79</a:t>
+              <a:t>39  /  82</a:t>
             </a:r>
           </a:p>
         </p:txBody>
@@ -25617,7 +25620,7 @@
                 <a:ea typeface="DIN Next LT W23"/>
                 <a:cs typeface="DIN Next LT W23"/>
               </a:rPr>
-              <a:t>04  /  79</a:t>
+              <a:t>04  /  82</a:t>
             </a:r>
           </a:p>
         </p:txBody>
@@ -26206,7 +26209,7 @@
                 <a:ea typeface="DIN Next LT W23"/>
                 <a:cs typeface="DIN Next LT W23"/>
               </a:rPr>
-              <a:t>40  /  79</a:t>
+              <a:t>40  /  82</a:t>
             </a:r>
           </a:p>
         </p:txBody>
@@ -26884,7 +26887,7 @@
                 <a:ea typeface="DIN Next LT W23"/>
                 <a:cs typeface="DIN Next LT W23"/>
               </a:rPr>
-              <a:t>41  /  79</a:t>
+              <a:t>41  /  82</a:t>
             </a:r>
           </a:p>
         </p:txBody>
@@ -27358,7 +27361,7 @@
                 <a:ea typeface="DIN Next LT W23"/>
                 <a:cs typeface="DIN Next LT W23"/>
               </a:rPr>
-              <a:t>42  /  79</a:t>
+              <a:t>42  /  82</a:t>
             </a:r>
           </a:p>
         </p:txBody>
@@ -28026,7 +28029,7 @@
                 <a:ea typeface="DIN Next LT W23"/>
                 <a:cs typeface="DIN Next LT W23"/>
               </a:rPr>
-              <a:t>43  /  79</a:t>
+              <a:t>43  /  82</a:t>
             </a:r>
           </a:p>
         </p:txBody>
@@ -28731,7 +28734,7 @@
                 <a:ea typeface="DIN Next LT W23"/>
                 <a:cs typeface="DIN Next LT W23"/>
               </a:rPr>
-              <a:t>44  /  79</a:t>
+              <a:t>44  /  82</a:t>
             </a:r>
           </a:p>
         </p:txBody>
@@ -29399,7 +29402,7 @@
                 <a:ea typeface="DIN Next LT W23"/>
                 <a:cs typeface="DIN Next LT W23"/>
               </a:rPr>
-              <a:t>45  /  79</a:t>
+              <a:t>45  /  82</a:t>
             </a:r>
           </a:p>
         </p:txBody>
@@ -29947,7 +29950,7 @@
                 <a:ea typeface="DIN Next LT W23"/>
                 <a:cs typeface="DIN Next LT W23"/>
               </a:rPr>
-              <a:t>46  /  79</a:t>
+              <a:t>46  /  82</a:t>
             </a:r>
           </a:p>
         </p:txBody>
@@ -30421,7 +30424,7 @@
                 <a:ea typeface="DIN Next LT W23"/>
                 <a:cs typeface="DIN Next LT W23"/>
               </a:rPr>
-              <a:t>47  /  79</a:t>
+              <a:t>47  /  82</a:t>
             </a:r>
           </a:p>
         </p:txBody>
@@ -30973,7 +30976,7 @@
                 <a:ea typeface="DIN Next LT W23"/>
                 <a:cs typeface="DIN Next LT W23"/>
               </a:rPr>
-              <a:t>48  /  79</a:t>
+              <a:t>48  /  82</a:t>
             </a:r>
           </a:p>
         </p:txBody>
@@ -31593,7 +31596,7 @@
                 <a:ea typeface="DIN Next LT W23"/>
                 <a:cs typeface="DIN Next LT W23"/>
               </a:rPr>
-              <a:t>49  /  79</a:t>
+              <a:t>49  /  82</a:t>
             </a:r>
           </a:p>
         </p:txBody>
@@ -32372,7 +32375,7 @@
                 <a:ea typeface="DIN Next LT W23"/>
                 <a:cs typeface="DIN Next LT W23"/>
               </a:rPr>
-              <a:t>05  /  79</a:t>
+              <a:t>05  /  82</a:t>
             </a:r>
           </a:p>
         </p:txBody>
@@ -32887,7 +32890,7 @@
                 <a:ea typeface="DIN Next LT W23"/>
                 <a:cs typeface="DIN Next LT W23"/>
               </a:rPr>
-              <a:t>50  /  79</a:t>
+              <a:t>50  /  82</a:t>
             </a:r>
           </a:p>
         </p:txBody>
@@ -33472,7 +33475,7 @@
                 <a:ea typeface="DIN Next LT W23"/>
                 <a:cs typeface="DIN Next LT W23"/>
               </a:rPr>
-              <a:t>51  /  79</a:t>
+              <a:t>51  /  82</a:t>
             </a:r>
           </a:p>
         </p:txBody>
@@ -34061,7 +34064,7 @@
                 <a:ea typeface="DIN Next LT W23"/>
                 <a:cs typeface="DIN Next LT W23"/>
               </a:rPr>
-              <a:t>52  /  79</a:t>
+              <a:t>52  /  82</a:t>
             </a:r>
           </a:p>
         </p:txBody>
@@ -34535,7 +34538,7 @@
                 <a:ea typeface="DIN Next LT W23"/>
                 <a:cs typeface="DIN Next LT W23"/>
               </a:rPr>
-              <a:t>53  /  79</a:t>
+              <a:t>53  /  82</a:t>
             </a:r>
           </a:p>
         </p:txBody>
@@ -35306,7 +35309,7 @@
                 <a:ea typeface="DIN Next LT W23"/>
                 <a:cs typeface="DIN Next LT W23"/>
               </a:rPr>
-              <a:t>54  /  79</a:t>
+              <a:t>54  /  82</a:t>
             </a:r>
           </a:p>
         </p:txBody>
@@ -35895,7 +35898,7 @@
                 <a:ea typeface="DIN Next LT W23"/>
                 <a:cs typeface="DIN Next LT W23"/>
               </a:rPr>
-              <a:t>55  /  79</a:t>
+              <a:t>55  /  82</a:t>
             </a:r>
           </a:p>
         </p:txBody>
@@ -36573,7 +36576,7 @@
                 <a:ea typeface="DIN Next LT W23"/>
                 <a:cs typeface="DIN Next LT W23"/>
               </a:rPr>
-              <a:t>56  /  79</a:t>
+              <a:t>56  /  82</a:t>
             </a:r>
           </a:p>
         </p:txBody>
@@ -37199,7 +37202,7 @@
                 <a:ea typeface="DIN Next LT W23"/>
                 <a:cs typeface="DIN Next LT W23"/>
               </a:rPr>
-              <a:t>57  /  79</a:t>
+              <a:t>57  /  82</a:t>
             </a:r>
           </a:p>
         </p:txBody>
@@ -37673,7 +37676,7 @@
                 <a:ea typeface="DIN Next LT W23"/>
                 <a:cs typeface="DIN Next LT W23"/>
               </a:rPr>
-              <a:t>58  /  79</a:t>
+              <a:t>58  /  82</a:t>
             </a:r>
           </a:p>
         </p:txBody>
@@ -38434,7 +38437,7 @@
                 <a:ea typeface="DIN Next LT W23"/>
                 <a:cs typeface="DIN Next LT W23"/>
               </a:rPr>
-              <a:t>59  /  79</a:t>
+              <a:t>59  /  82</a:t>
             </a:r>
           </a:p>
         </p:txBody>
@@ -38945,7 +38948,7 @@
                 <a:ea typeface="DIN Next LT W23"/>
                 <a:cs typeface="DIN Next LT W23"/>
               </a:rPr>
-              <a:t>06  /  79</a:t>
+              <a:t>06  /  82</a:t>
             </a:r>
           </a:p>
         </p:txBody>
@@ -39419,7 +39422,7 @@
                 <a:ea typeface="DIN Next LT W23"/>
                 <a:cs typeface="DIN Next LT W23"/>
               </a:rPr>
-              <a:t>60  /  79</a:t>
+              <a:t>60  /  82</a:t>
             </a:r>
           </a:p>
         </p:txBody>
@@ -40087,7 +40090,7 @@
                 <a:ea typeface="DIN Next LT W23"/>
                 <a:cs typeface="DIN Next LT W23"/>
               </a:rPr>
-              <a:t>61  /  79</a:t>
+              <a:t>61  /  82</a:t>
             </a:r>
           </a:p>
         </p:txBody>
@@ -40694,7 +40697,7 @@
                 <a:ea typeface="DIN Next LT W23"/>
                 <a:cs typeface="DIN Next LT W23"/>
               </a:rPr>
-              <a:t>62  /  79</a:t>
+              <a:t>62  /  82</a:t>
             </a:r>
           </a:p>
         </p:txBody>
@@ -40906,7 +40909,7 @@
                 <a:ea typeface="DIN Next LT W23"/>
                 <a:cs typeface="DIN Next LT W23"/>
               </a:rPr>
-              <a:t>Image Data: How Computers See Pixels</a:t>
+              <a:t>Phase 3: Specialized Architectures (Vision &amp; Sequences)</a:t>
             </a:r>
           </a:p>
         </p:txBody>
@@ -40943,54 +40946,45 @@
                 <a:ea typeface="DIN Next LT W23"/>
                 <a:cs typeface="DIN Next LT W23"/>
               </a:rPr>
-              <a:t>Tensors, Channels, and Local Structure</a:t>
-            </a:r>
-          </a:p>
-        </p:txBody>
-      </p:sp>
-      <p:sp>
-        <p:nvSpPr>
-          <p:cNvPr id="8" name="Rounded Rectangle 7"/>
-          <p:cNvSpPr/>
-          <p:nvPr/>
-        </p:nvSpPr>
-        <p:spPr>
-          <a:xfrm>
-            <a:off x="548640" y="2011680"/>
-            <a:ext cx="5760720" cy="1097280"/>
-          </a:xfrm>
-          <a:prstGeom prst="roundRect">
-            <a:avLst>
-              <a:gd name="adj" fmla="val 10000"/>
-            </a:avLst>
-          </a:prstGeom>
-          <a:solidFill>
-            <a:srgbClr val="EEE8FA"/>
-          </a:solidFill>
-          <a:ln>
-            <a:noFill/>
-          </a:ln>
-          <a:effectLst/>
-        </p:spPr>
-        <p:style>
-          <a:lnRef idx="1">
-            <a:schemeClr val="accent1"/>
-          </a:lnRef>
-          <a:fillRef idx="3">
-            <a:schemeClr val="accent1"/>
-          </a:fillRef>
-          <a:effectRef idx="2">
-            <a:schemeClr val="accent1"/>
-          </a:effectRef>
-          <a:fontRef idx="minor">
-            <a:schemeClr val="lt1"/>
-          </a:fontRef>
-        </p:style>
-        <p:txBody>
-          <a:bodyPr rtlCol="0" anchor="ctr"/>
-          <a:lstStyle/>
-          <a:p>
-            <a:pPr algn="ctr"/>
+              <a:t>Images vs Ordered Sequences</a:t>
+            </a:r>
+          </a:p>
+        </p:txBody>
+      </p:sp>
+      <p:sp>
+        <p:nvSpPr>
+          <p:cNvPr id="8" name="TextBox 7"/>
+          <p:cNvSpPr txBox="1"/>
+          <p:nvPr/>
+        </p:nvSpPr>
+        <p:spPr>
+          <a:xfrm>
+            <a:off x="548640" y="2148840"/>
+            <a:ext cx="320040" cy="411480"/>
+          </a:xfrm>
+          <a:prstGeom prst="rect">
+            <a:avLst/>
+          </a:prstGeom>
+          <a:noFill/>
+        </p:spPr>
+        <p:txBody>
+          <a:bodyPr wrap="square" anchor="t">
+            <a:spAutoFit/>
+          </a:bodyPr>
+          <a:lstStyle/>
+          <a:p>
+            <a:pPr algn="l"/>
+            <a:r>
+              <a:rPr sz="1700" b="0">
+                <a:solidFill>
+                  <a:srgbClr val="9E59CD"/>
+                </a:solidFill>
+                <a:latin typeface="DIN Next LT W23"/>
+                <a:ea typeface="DIN Next LT W23"/>
+                <a:cs typeface="DIN Next LT W23"/>
+              </a:rPr>
+              <a:t>–</a:t>
+            </a:r>
           </a:p>
         </p:txBody>
       </p:sp>
@@ -41002,23 +40996,23 @@
         </p:nvSpPr>
         <p:spPr>
           <a:xfrm>
-            <a:off x="822960" y="2148840"/>
-            <a:ext cx="5303520" cy="868680"/>
-          </a:xfrm>
-          <a:prstGeom prst="rect">
-            <a:avLst/>
-          </a:prstGeom>
-          <a:noFill/>
-        </p:spPr>
-        <p:txBody>
-          <a:bodyPr wrap="square" anchor="t">
-            <a:spAutoFit/>
-          </a:bodyPr>
-          <a:lstStyle/>
-          <a:p>
-            <a:pPr algn="l"/>
-            <a:r>
-              <a:rPr sz="1300" b="0">
+            <a:off x="914400" y="2148840"/>
+            <a:ext cx="9875519" cy="411480"/>
+          </a:xfrm>
+          <a:prstGeom prst="rect">
+            <a:avLst/>
+          </a:prstGeom>
+          <a:noFill/>
+        </p:spPr>
+        <p:txBody>
+          <a:bodyPr wrap="square" anchor="t">
+            <a:spAutoFit/>
+          </a:bodyPr>
+          <a:lstStyle/>
+          <a:p>
+            <a:pPr algn="l"/>
+            <a:r>
+              <a:rPr sz="1700" b="0">
                 <a:solidFill>
                   <a:srgbClr val="121018"/>
                 </a:solidFill>
@@ -41026,7 +41020,7 @@
                 <a:ea typeface="DIN Next LT W23"/>
                 <a:cs typeface="DIN Next LT W23"/>
               </a:rPr>
-              <a:t>A color image is a tensor H×W×3 (RGB). Meaning lives in local neighborhoods, not isolated pixels.</a:t>
+              <a:t>Images have 2D locality and translation symmetry—convolutions exploit shared weights across space.</a:t>
             </a:r>
           </a:p>
         </p:txBody>
@@ -41039,23 +41033,23 @@
         </p:nvSpPr>
         <p:spPr>
           <a:xfrm>
-            <a:off x="548640" y="3246120"/>
-            <a:ext cx="320040" cy="384048"/>
-          </a:xfrm>
-          <a:prstGeom prst="rect">
-            <a:avLst/>
-          </a:prstGeom>
-          <a:noFill/>
-        </p:spPr>
-        <p:txBody>
-          <a:bodyPr wrap="square" anchor="t">
-            <a:spAutoFit/>
-          </a:bodyPr>
-          <a:lstStyle/>
-          <a:p>
-            <a:pPr algn="l"/>
-            <a:r>
-              <a:rPr sz="1300" b="0">
+            <a:off x="548640" y="2715768"/>
+            <a:ext cx="320040" cy="411480"/>
+          </a:xfrm>
+          <a:prstGeom prst="rect">
+            <a:avLst/>
+          </a:prstGeom>
+          <a:noFill/>
+        </p:spPr>
+        <p:txBody>
+          <a:bodyPr wrap="square" anchor="t">
+            <a:spAutoFit/>
+          </a:bodyPr>
+          <a:lstStyle/>
+          <a:p>
+            <a:pPr algn="l"/>
+            <a:r>
+              <a:rPr sz="1700" b="0">
                 <a:solidFill>
                   <a:srgbClr val="9E59CD"/>
                 </a:solidFill>
@@ -41076,23 +41070,23 @@
         </p:nvSpPr>
         <p:spPr>
           <a:xfrm>
-            <a:off x="914400" y="3246120"/>
-            <a:ext cx="4754879" cy="384048"/>
-          </a:xfrm>
-          <a:prstGeom prst="rect">
-            <a:avLst/>
-          </a:prstGeom>
-          <a:noFill/>
-        </p:spPr>
-        <p:txBody>
-          <a:bodyPr wrap="square" anchor="t">
-            <a:spAutoFit/>
-          </a:bodyPr>
-          <a:lstStyle/>
-          <a:p>
-            <a:pPr algn="l"/>
-            <a:r>
-              <a:rPr sz="1300" b="0">
+            <a:off x="914400" y="2715768"/>
+            <a:ext cx="9875519" cy="411480"/>
+          </a:xfrm>
+          <a:prstGeom prst="rect">
+            <a:avLst/>
+          </a:prstGeom>
+          <a:noFill/>
+        </p:spPr>
+        <p:txBody>
+          <a:bodyPr wrap="square" anchor="t">
+            <a:spAutoFit/>
+          </a:bodyPr>
+          <a:lstStyle/>
+          <a:p>
+            <a:pPr algn="l"/>
+            <a:r>
+              <a:rPr sz="1700" b="0">
                 <a:solidFill>
                   <a:srgbClr val="121018"/>
                 </a:solidFill>
@@ -41100,7 +41094,7 @@
                 <a:ea typeface="DIN Next LT W23"/>
                 <a:cs typeface="DIN Next LT W23"/>
               </a:rPr>
-              <a:t>Small patches reveal edges; larger context reveals objects — hierarchical composition.</a:t>
+              <a:t>Sequences have order—recurrence, causal convolutions, or attention carry context across time or position.</a:t>
             </a:r>
           </a:p>
         </p:txBody>
@@ -41113,23 +41107,23 @@
         </p:nvSpPr>
         <p:spPr>
           <a:xfrm>
-            <a:off x="548640" y="3703320"/>
-            <a:ext cx="320040" cy="384048"/>
-          </a:xfrm>
-          <a:prstGeom prst="rect">
-            <a:avLst/>
-          </a:prstGeom>
-          <a:noFill/>
-        </p:spPr>
-        <p:txBody>
-          <a:bodyPr wrap="square" anchor="t">
-            <a:spAutoFit/>
-          </a:bodyPr>
-          <a:lstStyle/>
-          <a:p>
-            <a:pPr algn="l"/>
-            <a:r>
-              <a:rPr sz="1300" b="0">
+            <a:off x="548640" y="3282696"/>
+            <a:ext cx="320040" cy="411480"/>
+          </a:xfrm>
+          <a:prstGeom prst="rect">
+            <a:avLst/>
+          </a:prstGeom>
+          <a:noFill/>
+        </p:spPr>
+        <p:txBody>
+          <a:bodyPr wrap="square" anchor="t">
+            <a:spAutoFit/>
+          </a:bodyPr>
+          <a:lstStyle/>
+          <a:p>
+            <a:pPr algn="l"/>
+            <a:r>
+              <a:rPr sz="1700" b="0">
                 <a:solidFill>
                   <a:srgbClr val="9E59CD"/>
                 </a:solidFill>
@@ -41150,23 +41144,23 @@
         </p:nvSpPr>
         <p:spPr>
           <a:xfrm>
-            <a:off x="914400" y="3703320"/>
-            <a:ext cx="4754879" cy="384048"/>
-          </a:xfrm>
-          <a:prstGeom prst="rect">
-            <a:avLst/>
-          </a:prstGeom>
-          <a:noFill/>
-        </p:spPr>
-        <p:txBody>
-          <a:bodyPr wrap="square" anchor="t">
-            <a:spAutoFit/>
-          </a:bodyPr>
-          <a:lstStyle/>
-          <a:p>
-            <a:pPr algn="l"/>
-            <a:r>
-              <a:rPr sz="1300" b="0">
+            <a:off x="914400" y="3282696"/>
+            <a:ext cx="9875519" cy="411480"/>
+          </a:xfrm>
+          <a:prstGeom prst="rect">
+            <a:avLst/>
+          </a:prstGeom>
+          <a:noFill/>
+        </p:spPr>
+        <p:txBody>
+          <a:bodyPr wrap="square" anchor="t">
+            <a:spAutoFit/>
+          </a:bodyPr>
+          <a:lstStyle/>
+          <a:p>
+            <a:pPr algn="l"/>
+            <a:r>
+              <a:rPr sz="1700" b="0">
                 <a:solidFill>
                   <a:srgbClr val="121018"/>
                 </a:solidFill>
@@ -41174,195 +41168,14 @@
                 <a:ea typeface="DIN Next LT W23"/>
                 <a:cs typeface="DIN Next LT W23"/>
               </a:rPr>
-              <a:t>Preprocess: resize, crop, normalize (often ImageNet mean/std), then augment.</a:t>
-            </a:r>
-          </a:p>
-        </p:txBody>
-      </p:sp>
-      <p:sp>
-        <p:nvSpPr>
-          <p:cNvPr id="14" name="TextBox 13"/>
-          <p:cNvSpPr txBox="1"/>
-          <p:nvPr/>
-        </p:nvSpPr>
-        <p:spPr>
-          <a:xfrm>
-            <a:off x="548640" y="4160520"/>
-            <a:ext cx="320040" cy="384048"/>
-          </a:xfrm>
-          <a:prstGeom prst="rect">
-            <a:avLst/>
-          </a:prstGeom>
-          <a:noFill/>
-        </p:spPr>
-        <p:txBody>
-          <a:bodyPr wrap="square" anchor="t">
-            <a:spAutoFit/>
-          </a:bodyPr>
-          <a:lstStyle/>
-          <a:p>
-            <a:pPr algn="l"/>
-            <a:r>
-              <a:rPr sz="1300" b="0">
-                <a:solidFill>
-                  <a:srgbClr val="9E59CD"/>
-                </a:solidFill>
-                <a:latin typeface="DIN Next LT W23"/>
-                <a:ea typeface="DIN Next LT W23"/>
-                <a:cs typeface="DIN Next LT W23"/>
-              </a:rPr>
-              <a:t>–</a:t>
-            </a:r>
-          </a:p>
-        </p:txBody>
-      </p:sp>
-      <p:sp>
-        <p:nvSpPr>
-          <p:cNvPr id="15" name="TextBox 14"/>
-          <p:cNvSpPr txBox="1"/>
-          <p:nvPr/>
-        </p:nvSpPr>
-        <p:spPr>
-          <a:xfrm>
-            <a:off x="914400" y="4160520"/>
-            <a:ext cx="4754879" cy="384048"/>
-          </a:xfrm>
-          <a:prstGeom prst="rect">
-            <a:avLst/>
-          </a:prstGeom>
-          <a:noFill/>
-        </p:spPr>
-        <p:txBody>
-          <a:bodyPr wrap="square" anchor="t">
-            <a:spAutoFit/>
-          </a:bodyPr>
-          <a:lstStyle/>
-          <a:p>
-            <a:pPr algn="l"/>
-            <a:r>
-              <a:rPr sz="1300" b="0">
-                <a:solidFill>
-                  <a:srgbClr val="121018"/>
-                </a:solidFill>
-                <a:latin typeface="DIN Next LT W23"/>
-                <a:ea typeface="DIN Next LT W23"/>
-                <a:cs typeface="DIN Next LT W23"/>
-              </a:rPr>
-              <a:t>Model input is typically Batch × C × H × W fed into stem convolutions.</a:t>
-            </a:r>
-          </a:p>
-        </p:txBody>
-      </p:sp>
-      <p:sp>
-        <p:nvSpPr>
-          <p:cNvPr id="16" name="Rounded Rectangle 15"/>
-          <p:cNvSpPr/>
-          <p:nvPr/>
-        </p:nvSpPr>
-        <p:spPr>
-          <a:xfrm>
-            <a:off x="6537960" y="2011680"/>
-            <a:ext cx="4983480" cy="3794760"/>
-          </a:xfrm>
-          <a:prstGeom prst="roundRect">
-            <a:avLst>
-              <a:gd name="adj" fmla="val 10000"/>
-            </a:avLst>
-          </a:prstGeom>
-          <a:solidFill>
-            <a:srgbClr val="EEE8FA"/>
-          </a:solidFill>
-          <a:ln>
-            <a:noFill/>
-          </a:ln>
-          <a:effectLst/>
-        </p:spPr>
-        <p:style>
-          <a:lnRef idx="1">
-            <a:schemeClr val="accent1"/>
-          </a:lnRef>
-          <a:fillRef idx="3">
-            <a:schemeClr val="accent1"/>
-          </a:fillRef>
-          <a:effectRef idx="2">
-            <a:schemeClr val="accent1"/>
-          </a:effectRef>
-          <a:fontRef idx="minor">
-            <a:schemeClr val="lt1"/>
-          </a:fontRef>
-        </p:style>
-        <p:txBody>
-          <a:bodyPr rtlCol="0" anchor="ctr"/>
-          <a:lstStyle/>
-          <a:p>
-            <a:pPr algn="ctr"/>
-          </a:p>
-        </p:txBody>
-      </p:sp>
-      <p:pic>
-        <p:nvPicPr>
-          <p:cNvPr id="17" name="Picture 16" descr="convolution.png"/>
-          <p:cNvPicPr>
-            <a:picLocks noChangeAspect="1"/>
-          </p:cNvPicPr>
-          <p:nvPr/>
-        </p:nvPicPr>
-        <p:blipFill>
-          <a:blip r:embed="rId3"/>
-          <a:stretch>
-            <a:fillRect/>
-          </a:stretch>
-        </p:blipFill>
-        <p:spPr>
-          <a:xfrm>
-            <a:off x="6720840" y="2194560"/>
-            <a:ext cx="4617720" cy="1849956"/>
-          </a:xfrm>
-          <a:prstGeom prst="rect">
-            <a:avLst/>
-          </a:prstGeom>
-        </p:spPr>
-      </p:pic>
-      <p:sp>
-        <p:nvSpPr>
-          <p:cNvPr id="18" name="TextBox 17"/>
-          <p:cNvSpPr txBox="1"/>
-          <p:nvPr/>
-        </p:nvSpPr>
-        <p:spPr>
-          <a:xfrm>
-            <a:off x="548640" y="5989320"/>
-            <a:ext cx="10972800" cy="256032"/>
-          </a:xfrm>
-          <a:prstGeom prst="rect">
-            <a:avLst/>
-          </a:prstGeom>
-          <a:noFill/>
-        </p:spPr>
-        <p:txBody>
-          <a:bodyPr wrap="square" anchor="t">
-            <a:spAutoFit/>
-          </a:bodyPr>
-          <a:lstStyle/>
-          <a:p>
-            <a:pPr algn="l"/>
-            <a:r>
-              <a:rPr sz="1100" b="0">
-                <a:solidFill>
-                  <a:srgbClr val="5A5470"/>
-                </a:solidFill>
-                <a:latin typeface="DIN Next LT W23"/>
-                <a:ea typeface="DIN Next LT W23"/>
-                <a:cs typeface="DIN Next LT W23"/>
-              </a:rPr>
-              <a:t>Augmentation (crop, flip, color jitter) teaches invariance the loss never states explicitly.</a:t>
-            </a:r>
-          </a:p>
-        </p:txBody>
-      </p:sp>
-      <p:sp>
-        <p:nvSpPr>
-          <p:cNvPr id="19" name="Rectangle 18"/>
+              <a:t>Choosing the right inductive bias beats blindly scaling the wrong architecture.</a:t>
+            </a:r>
+          </a:p>
+        </p:txBody>
+      </p:sp>
+      <p:sp>
+        <p:nvSpPr>
+          <p:cNvPr id="14" name="Rectangle 13"/>
           <p:cNvSpPr/>
           <p:nvPr/>
         </p:nvSpPr>
@@ -41406,7 +41219,7 @@
       </p:sp>
       <p:sp>
         <p:nvSpPr>
-          <p:cNvPr id="20" name="TextBox 19"/>
+          <p:cNvPr id="15" name="TextBox 14"/>
           <p:cNvSpPr txBox="1"/>
           <p:nvPr/>
         </p:nvSpPr>
@@ -41443,7 +41256,7 @@
       </p:sp>
       <p:sp>
         <p:nvSpPr>
-          <p:cNvPr id="21" name="TextBox 20"/>
+          <p:cNvPr id="16" name="TextBox 15"/>
           <p:cNvSpPr txBox="1"/>
           <p:nvPr/>
         </p:nvSpPr>
@@ -41473,7 +41286,7 @@
                 <a:ea typeface="DIN Next LT W23"/>
                 <a:cs typeface="DIN Next LT W23"/>
               </a:rPr>
-              <a:t>63  /  79</a:t>
+              <a:t>63  /  82</a:t>
             </a:r>
           </a:p>
         </p:txBody>
@@ -41685,7 +41498,7 @@
                 <a:ea typeface="DIN Next LT W23"/>
                 <a:cs typeface="DIN Next LT W23"/>
               </a:rPr>
-              <a:t>Convolution: Kernels and Feature Maps</a:t>
+              <a:t>Phase 3: Specialized Architectures (Vision &amp; Sequences)</a:t>
             </a:r>
           </a:p>
         </p:txBody>
@@ -41722,158 +41535,254 @@
                 <a:ea typeface="DIN Next LT W23"/>
                 <a:cs typeface="DIN Next LT W23"/>
               </a:rPr>
-              <a:t>Sliding Linear Filters + Nonlinearity</a:t>
-            </a:r>
-          </a:p>
-        </p:txBody>
-      </p:sp>
-      <p:sp>
-        <p:nvSpPr>
-          <p:cNvPr id="8" name="TextBox 7"/>
-          <p:cNvSpPr txBox="1"/>
-          <p:nvPr/>
-        </p:nvSpPr>
-        <p:spPr>
-          <a:xfrm>
-            <a:off x="548640" y="1920240"/>
-            <a:ext cx="10972800" cy="320040"/>
-          </a:xfrm>
-          <a:prstGeom prst="rect">
-            <a:avLst/>
-          </a:prstGeom>
-          <a:noFill/>
-        </p:spPr>
-        <p:txBody>
-          <a:bodyPr wrap="square" anchor="t">
-            <a:spAutoFit/>
-          </a:bodyPr>
-          <a:lstStyle/>
-          <a:p>
-            <a:pPr algn="l"/>
-            <a:r>
-              <a:rPr sz="1300" b="0">
-                <a:solidFill>
-                  <a:srgbClr val="5A5470"/>
-                </a:solidFill>
-                <a:latin typeface="DIN Next LT W23"/>
-                <a:ea typeface="DIN Next LT W23"/>
-                <a:cs typeface="DIN Next LT W23"/>
-              </a:rPr>
-              <a:t>A kernel is a small learnable matrix (often 3×3). Multiple kernels produce a stack of feature maps.</a:t>
-            </a:r>
-          </a:p>
-        </p:txBody>
-      </p:sp>
-      <p:sp>
-        <p:nvSpPr>
-          <p:cNvPr id="9" name="Rounded Rectangle 8"/>
-          <p:cNvSpPr/>
-          <p:nvPr/>
-        </p:nvSpPr>
-        <p:spPr>
-          <a:xfrm>
-            <a:off x="548640" y="2240280"/>
-            <a:ext cx="10972800" cy="3977639"/>
-          </a:xfrm>
-          <a:prstGeom prst="roundRect">
-            <a:avLst>
-              <a:gd name="adj" fmla="val 10000"/>
-            </a:avLst>
-          </a:prstGeom>
-          <a:solidFill>
-            <a:srgbClr val="EEE8FA"/>
-          </a:solidFill>
-          <a:ln>
-            <a:noFill/>
-          </a:ln>
-          <a:effectLst/>
-        </p:spPr>
-        <p:style>
-          <a:lnRef idx="1">
-            <a:schemeClr val="accent1"/>
-          </a:lnRef>
-          <a:fillRef idx="3">
-            <a:schemeClr val="accent1"/>
-          </a:fillRef>
-          <a:effectRef idx="2">
-            <a:schemeClr val="accent1"/>
-          </a:effectRef>
-          <a:fontRef idx="minor">
-            <a:schemeClr val="lt1"/>
-          </a:fontRef>
-        </p:style>
-        <p:txBody>
-          <a:bodyPr rtlCol="0" anchor="ctr"/>
-          <a:lstStyle/>
-          <a:p>
-            <a:pPr algn="ctr"/>
-          </a:p>
-        </p:txBody>
-      </p:sp>
-      <p:pic>
-        <p:nvPicPr>
-          <p:cNvPr id="10" name="Picture 9" descr="convolution.png"/>
-          <p:cNvPicPr>
-            <a:picLocks noChangeAspect="1"/>
-          </p:cNvPicPr>
-          <p:nvPr/>
-        </p:nvPicPr>
-        <p:blipFill>
-          <a:blip r:embed="rId3"/>
-          <a:stretch>
-            <a:fillRect/>
-          </a:stretch>
-        </p:blipFill>
-        <p:spPr>
-          <a:xfrm>
-            <a:off x="1413066" y="2377440"/>
-            <a:ext cx="9243946" cy="3703320"/>
-          </a:xfrm>
-          <a:prstGeom prst="rect">
-            <a:avLst/>
-          </a:prstGeom>
-        </p:spPr>
-      </p:pic>
-      <p:sp>
-        <p:nvSpPr>
-          <p:cNvPr id="11" name="TextBox 10"/>
-          <p:cNvSpPr txBox="1"/>
-          <p:nvPr/>
-        </p:nvSpPr>
-        <p:spPr>
-          <a:xfrm>
-            <a:off x="548640" y="6309360"/>
-            <a:ext cx="10972800" cy="228600"/>
-          </a:xfrm>
-          <a:prstGeom prst="rect">
-            <a:avLst/>
-          </a:prstGeom>
-          <a:noFill/>
-        </p:spPr>
-        <p:txBody>
-          <a:bodyPr wrap="square" anchor="t">
-            <a:spAutoFit/>
-          </a:bodyPr>
-          <a:lstStyle/>
-          <a:p>
-            <a:pPr algn="l"/>
-            <a:r>
-              <a:rPr sz="1100" b="0">
-                <a:solidFill>
-                  <a:srgbClr val="5A5470"/>
-                </a:solidFill>
-                <a:latin typeface="DIN Next LT W23"/>
-                <a:ea typeface="DIN Next LT W23"/>
-                <a:cs typeface="DIN Next LT W23"/>
-              </a:rPr>
-              <a:t>Classical Sobel filters are fixed. CNNs learn task-specific filters from data.</a:t>
-            </a:r>
-          </a:p>
-        </p:txBody>
-      </p:sp>
-      <p:sp>
-        <p:nvSpPr>
-          <p:cNvPr id="12" name="Rectangle 11"/>
+              <a:t>Images vs Ordered Sequences</a:t>
+            </a:r>
+          </a:p>
+        </p:txBody>
+      </p:sp>
+      <p:graphicFrame>
+        <p:nvGraphicFramePr>
+          <p:cNvPr id="8" name="Table 7"/>
+          <p:cNvGraphicFramePr>
+            <a:graphicFrameLocks noGrp="1"/>
+          </p:cNvGraphicFramePr>
+          <p:nvPr/>
+        </p:nvGraphicFramePr>
+        <p:xfrm>
+          <a:off x="548640" y="2057400"/>
+          <a:ext cx="10972800" cy="1426464"/>
+        </p:xfrm>
+        <a:graphic>
+          <a:graphicData uri="http://schemas.openxmlformats.org/drawingml/2006/table">
+            <a:tbl>
+              <a:tblPr firstRow="1" bandRow="1">
+                <a:tableStyleId>{5C22544A-7EE6-4342-B048-85BDC9FD1C3A}</a:tableStyleId>
+              </a:tblPr>
+              <a:tblGrid>
+                <a:gridCol w="3657600"/>
+                <a:gridCol w="3657600"/>
+                <a:gridCol w="3657600"/>
+              </a:tblGrid>
+              <a:tr h="475488">
+                <a:tc>
+                  <a:txBody>
+                    <a:bodyPr/>
+                    <a:lstStyle/>
+                    <a:p>
+                      <a:pPr algn="ctr"/>
+                      <a:r>
+                        <a:rPr sz="1200" b="1">
+                          <a:solidFill>
+                            <a:srgbClr val="FFFFFF"/>
+                          </a:solidFill>
+                          <a:latin typeface="Helvetica"/>
+                        </a:rPr>
+                        <a:t>Modality</a:t>
+                      </a:r>
+                    </a:p>
+                  </a:txBody>
+                  <a:tcPr>
+                    <a:solidFill>
+                      <a:srgbClr val="5234B7"/>
+                    </a:solidFill>
+                  </a:tcPr>
+                </a:tc>
+                <a:tc>
+                  <a:txBody>
+                    <a:bodyPr/>
+                    <a:lstStyle/>
+                    <a:p>
+                      <a:pPr algn="ctr"/>
+                      <a:r>
+                        <a:rPr sz="1200" b="1">
+                          <a:solidFill>
+                            <a:srgbClr val="FFFFFF"/>
+                          </a:solidFill>
+                          <a:latin typeface="Helvetica"/>
+                        </a:rPr>
+                        <a:t>Core structure</a:t>
+                      </a:r>
+                    </a:p>
+                  </a:txBody>
+                  <a:tcPr>
+                    <a:solidFill>
+                      <a:srgbClr val="5234B7"/>
+                    </a:solidFill>
+                  </a:tcPr>
+                </a:tc>
+                <a:tc>
+                  <a:txBody>
+                    <a:bodyPr/>
+                    <a:lstStyle/>
+                    <a:p>
+                      <a:pPr algn="ctr"/>
+                      <a:r>
+                        <a:rPr sz="1200" b="1">
+                          <a:solidFill>
+                            <a:srgbClr val="FFFFFF"/>
+                          </a:solidFill>
+                          <a:latin typeface="Helvetica"/>
+                        </a:rPr>
+                        <a:t>Representative layers</a:t>
+                      </a:r>
+                    </a:p>
+                  </a:txBody>
+                  <a:tcPr>
+                    <a:solidFill>
+                      <a:srgbClr val="5234B7"/>
+                    </a:solidFill>
+                  </a:tcPr>
+                </a:tc>
+              </a:tr>
+              <a:tr h="475488">
+                <a:tc>
+                  <a:txBody>
+                    <a:bodyPr/>
+                    <a:lstStyle/>
+                    <a:p>
+                      <a:pPr algn="l"/>
+                      <a:r>
+                        <a:rPr sz="1300" b="1">
+                          <a:solidFill>
+                            <a:srgbClr val="5234B7"/>
+                          </a:solidFill>
+                          <a:latin typeface="Helvetica"/>
+                        </a:rPr>
+                        <a:t>Image / video frames</a:t>
+                      </a:r>
+                    </a:p>
+                  </a:txBody>
+                  <a:tcPr>
+                    <a:solidFill>
+                      <a:srgbClr val="EEE8FA"/>
+                    </a:solidFill>
+                  </a:tcPr>
+                </a:tc>
+                <a:tc>
+                  <a:txBody>
+                    <a:bodyPr/>
+                    <a:lstStyle/>
+                    <a:p>
+                      <a:pPr algn="l"/>
+                      <a:r>
+                        <a:rPr sz="1300" b="0">
+                          <a:solidFill>
+                            <a:srgbClr val="121018"/>
+                          </a:solidFill>
+                          <a:latin typeface="Helvetica"/>
+                        </a:rPr>
+                        <a:t>Spatial grids</a:t>
+                      </a:r>
+                    </a:p>
+                  </a:txBody>
+                  <a:tcPr>
+                    <a:solidFill>
+                      <a:srgbClr val="EEE8FA"/>
+                    </a:solidFill>
+                  </a:tcPr>
+                </a:tc>
+                <a:tc>
+                  <a:txBody>
+                    <a:bodyPr/>
+                    <a:lstStyle/>
+                    <a:p>
+                      <a:pPr algn="l"/>
+                      <a:r>
+                        <a:rPr sz="1300" b="0">
+                          <a:solidFill>
+                            <a:srgbClr val="121018"/>
+                          </a:solidFill>
+                          <a:latin typeface="Helvetica"/>
+                        </a:rPr>
+                        <a:t>Conv2D, pooling, residual blocks</a:t>
+                      </a:r>
+                    </a:p>
+                  </a:txBody>
+                  <a:tcPr>
+                    <a:solidFill>
+                      <a:srgbClr val="EEE8FA"/>
+                    </a:solidFill>
+                  </a:tcPr>
+                </a:tc>
+              </a:tr>
+              <a:tr h="475488">
+                <a:tc>
+                  <a:txBody>
+                    <a:bodyPr/>
+                    <a:lstStyle/>
+                    <a:p>
+                      <a:pPr algn="l"/>
+                      <a:r>
+                        <a:rPr sz="1300" b="1">
+                          <a:solidFill>
+                            <a:srgbClr val="5234B7"/>
+                          </a:solidFill>
+                          <a:latin typeface="Helvetica"/>
+                        </a:rPr>
+                        <a:t>Text / speech / sensors</a:t>
+                      </a:r>
+                    </a:p>
+                  </a:txBody>
+                  <a:tcPr>
+                    <a:solidFill>
+                      <a:srgbClr val="F5F1FC"/>
+                    </a:solidFill>
+                  </a:tcPr>
+                </a:tc>
+                <a:tc>
+                  <a:txBody>
+                    <a:bodyPr/>
+                    <a:lstStyle/>
+                    <a:p>
+                      <a:pPr algn="l"/>
+                      <a:r>
+                        <a:rPr sz="1300" b="0">
+                          <a:solidFill>
+                            <a:srgbClr val="121018"/>
+                          </a:solidFill>
+                          <a:latin typeface="Helvetica"/>
+                        </a:rPr>
+                        <a:t>Ordered tokens or time steps</a:t>
+                      </a:r>
+                    </a:p>
+                  </a:txBody>
+                  <a:tcPr>
+                    <a:solidFill>
+                      <a:srgbClr val="F5F1FC"/>
+                    </a:solidFill>
+                  </a:tcPr>
+                </a:tc>
+                <a:tc>
+                  <a:txBody>
+                    <a:bodyPr/>
+                    <a:lstStyle/>
+                    <a:p>
+                      <a:pPr algn="l"/>
+                      <a:r>
+                        <a:rPr sz="1300" b="0">
+                          <a:solidFill>
+                            <a:srgbClr val="121018"/>
+                          </a:solidFill>
+                          <a:latin typeface="Helvetica"/>
+                        </a:rPr>
+                        <a:t>RNN/GRU/LSTM, causal conv, self-attention</a:t>
+                      </a:r>
+                    </a:p>
+                  </a:txBody>
+                  <a:tcPr>
+                    <a:solidFill>
+                      <a:srgbClr val="F5F1FC"/>
+                    </a:solidFill>
+                  </a:tcPr>
+                </a:tc>
+              </a:tr>
+            </a:tbl>
+          </a:graphicData>
+        </a:graphic>
+      </p:graphicFrame>
+      <p:sp>
+        <p:nvSpPr>
+          <p:cNvPr id="9" name="Rectangle 8"/>
           <p:cNvSpPr/>
           <p:nvPr/>
         </p:nvSpPr>
@@ -41917,7 +41826,7 @@
       </p:sp>
       <p:sp>
         <p:nvSpPr>
-          <p:cNvPr id="13" name="TextBox 12"/>
+          <p:cNvPr id="10" name="TextBox 9"/>
           <p:cNvSpPr txBox="1"/>
           <p:nvPr/>
         </p:nvSpPr>
@@ -41954,7 +41863,7 @@
       </p:sp>
       <p:sp>
         <p:nvSpPr>
-          <p:cNvPr id="14" name="TextBox 13"/>
+          <p:cNvPr id="11" name="TextBox 10"/>
           <p:cNvSpPr txBox="1"/>
           <p:nvPr/>
         </p:nvSpPr>
@@ -41984,7 +41893,7 @@
                 <a:ea typeface="DIN Next LT W23"/>
                 <a:cs typeface="DIN Next LT W23"/>
               </a:rPr>
-              <a:t>64  /  79</a:t>
+              <a:t>64  /  82</a:t>
             </a:r>
           </a:p>
         </p:txBody>
@@ -41998,6 +41907,1469 @@
 </file>
 
 <file path=ppt/slides/slide65.xml><?xml version="1.0" encoding="utf-8"?>
+<p:sld xmlns:a="http://schemas.openxmlformats.org/drawingml/2006/main" xmlns:p="http://schemas.openxmlformats.org/presentationml/2006/main" xmlns:r="http://schemas.openxmlformats.org/officeDocument/2006/relationships">
+  <p:cSld>
+    <p:bg>
+      <p:bgPr>
+        <a:solidFill>
+          <a:srgbClr val="FAF8FF"/>
+        </a:solidFill>
+        <a:effectLst/>
+      </p:bgPr>
+    </p:bg>
+    <p:spTree>
+      <p:nvGrpSpPr>
+        <p:cNvPr id="1" name=""/>
+        <p:cNvGrpSpPr/>
+        <p:nvPr/>
+      </p:nvGrpSpPr>
+      <p:grpSpPr/>
+      <p:sp>
+        <p:nvSpPr>
+          <p:cNvPr id="2" name="Rectangle 1"/>
+          <p:cNvSpPr/>
+          <p:nvPr/>
+        </p:nvSpPr>
+        <p:spPr>
+          <a:xfrm>
+            <a:off x="12136831" y="0"/>
+            <a:ext cx="54864" cy="6858000"/>
+          </a:xfrm>
+          <a:prstGeom prst="rect">
+            <a:avLst/>
+          </a:prstGeom>
+          <a:solidFill>
+            <a:srgbClr val="5234B7"/>
+          </a:solidFill>
+          <a:ln>
+            <a:noFill/>
+          </a:ln>
+          <a:effectLst/>
+        </p:spPr>
+        <p:style>
+          <a:lnRef idx="1">
+            <a:schemeClr val="accent1"/>
+          </a:lnRef>
+          <a:fillRef idx="3">
+            <a:schemeClr val="accent1"/>
+          </a:fillRef>
+          <a:effectRef idx="2">
+            <a:schemeClr val="accent1"/>
+          </a:effectRef>
+          <a:fontRef idx="minor">
+            <a:schemeClr val="lt1"/>
+          </a:fontRef>
+        </p:style>
+        <p:txBody>
+          <a:bodyPr rtlCol="0" anchor="ctr"/>
+          <a:lstStyle/>
+          <a:p>
+            <a:pPr algn="ctr"/>
+          </a:p>
+        </p:txBody>
+      </p:sp>
+      <p:pic>
+        <p:nvPicPr>
+          <p:cNvPr id="3" name="Picture 2" descr="etra-wordmark.png"/>
+          <p:cNvPicPr>
+            <a:picLocks noChangeAspect="1"/>
+          </p:cNvPicPr>
+          <p:nvPr/>
+        </p:nvPicPr>
+        <p:blipFill>
+          <a:blip r:embed="rId2"/>
+          <a:stretch>
+            <a:fillRect/>
+          </a:stretch>
+        </p:blipFill>
+        <p:spPr>
+          <a:xfrm>
+            <a:off x="10561320" y="411480"/>
+            <a:ext cx="1206201" cy="320040"/>
+          </a:xfrm>
+          <a:prstGeom prst="rect">
+            <a:avLst/>
+          </a:prstGeom>
+        </p:spPr>
+      </p:pic>
+      <p:sp>
+        <p:nvSpPr>
+          <p:cNvPr id="4" name="TextBox 3"/>
+          <p:cNvSpPr txBox="1"/>
+          <p:nvPr/>
+        </p:nvSpPr>
+        <p:spPr>
+          <a:xfrm>
+            <a:off x="548640" y="438912"/>
+            <a:ext cx="7772400" cy="274320"/>
+          </a:xfrm>
+          <a:prstGeom prst="rect">
+            <a:avLst/>
+          </a:prstGeom>
+          <a:noFill/>
+        </p:spPr>
+        <p:txBody>
+          <a:bodyPr wrap="square" anchor="t">
+            <a:spAutoFit/>
+          </a:bodyPr>
+          <a:lstStyle/>
+          <a:p>
+            <a:pPr algn="l"/>
+            <a:r>
+              <a:rPr sz="1200" b="0">
+                <a:solidFill>
+                  <a:srgbClr val="5A5470"/>
+                </a:solidFill>
+                <a:latin typeface="DIN Next LT W23"/>
+                <a:ea typeface="DIN Next LT W23"/>
+                <a:cs typeface="DIN Next LT W23"/>
+              </a:rPr>
+              <a:t>S07  ·  Deep Learning</a:t>
+            </a:r>
+          </a:p>
+        </p:txBody>
+      </p:sp>
+      <p:sp>
+        <p:nvSpPr>
+          <p:cNvPr id="5" name="Rectangle 4"/>
+          <p:cNvSpPr/>
+          <p:nvPr/>
+        </p:nvSpPr>
+        <p:spPr>
+          <a:xfrm>
+            <a:off x="548640" y="822960"/>
+            <a:ext cx="11064240" cy="10972"/>
+          </a:xfrm>
+          <a:prstGeom prst="rect">
+            <a:avLst/>
+          </a:prstGeom>
+          <a:solidFill>
+            <a:srgbClr val="E4DCF4"/>
+          </a:solidFill>
+          <a:ln>
+            <a:noFill/>
+          </a:ln>
+          <a:effectLst/>
+        </p:spPr>
+        <p:style>
+          <a:lnRef idx="1">
+            <a:schemeClr val="accent1"/>
+          </a:lnRef>
+          <a:fillRef idx="3">
+            <a:schemeClr val="accent1"/>
+          </a:fillRef>
+          <a:effectRef idx="2">
+            <a:schemeClr val="accent1"/>
+          </a:effectRef>
+          <a:fontRef idx="minor">
+            <a:schemeClr val="lt1"/>
+          </a:fontRef>
+        </p:style>
+        <p:txBody>
+          <a:bodyPr rtlCol="0" anchor="ctr"/>
+          <a:lstStyle/>
+          <a:p>
+            <a:pPr algn="ctr"/>
+          </a:p>
+        </p:txBody>
+      </p:sp>
+      <p:sp>
+        <p:nvSpPr>
+          <p:cNvPr id="6" name="TextBox 5"/>
+          <p:cNvSpPr txBox="1"/>
+          <p:nvPr/>
+        </p:nvSpPr>
+        <p:spPr>
+          <a:xfrm>
+            <a:off x="548640" y="1051560"/>
+            <a:ext cx="10241280" cy="594360"/>
+          </a:xfrm>
+          <a:prstGeom prst="rect">
+            <a:avLst/>
+          </a:prstGeom>
+          <a:noFill/>
+        </p:spPr>
+        <p:txBody>
+          <a:bodyPr wrap="square" anchor="t">
+            <a:spAutoFit/>
+          </a:bodyPr>
+          <a:lstStyle/>
+          <a:p>
+            <a:pPr algn="l"/>
+            <a:r>
+              <a:rPr sz="3200" b="1">
+                <a:solidFill>
+                  <a:srgbClr val="5234B7"/>
+                </a:solidFill>
+                <a:latin typeface="DIN Next LT W23"/>
+                <a:ea typeface="DIN Next LT W23"/>
+                <a:cs typeface="DIN Next LT W23"/>
+              </a:rPr>
+              <a:t>Image Data: How Computers “See” Pixels</a:t>
+            </a:r>
+          </a:p>
+        </p:txBody>
+      </p:sp>
+      <p:sp>
+        <p:nvSpPr>
+          <p:cNvPr id="7" name="TextBox 6"/>
+          <p:cNvSpPr txBox="1"/>
+          <p:nvPr/>
+        </p:nvSpPr>
+        <p:spPr>
+          <a:xfrm>
+            <a:off x="548640" y="1600200"/>
+            <a:ext cx="10241280" cy="365760"/>
+          </a:xfrm>
+          <a:prstGeom prst="rect">
+            <a:avLst/>
+          </a:prstGeom>
+          <a:noFill/>
+        </p:spPr>
+        <p:txBody>
+          <a:bodyPr wrap="square" anchor="t">
+            <a:spAutoFit/>
+          </a:bodyPr>
+          <a:lstStyle/>
+          <a:p>
+            <a:pPr algn="l"/>
+            <a:r>
+              <a:rPr sz="1500" b="0">
+                <a:solidFill>
+                  <a:srgbClr val="5A5470"/>
+                </a:solidFill>
+                <a:latin typeface="DIN Next LT W23"/>
+                <a:ea typeface="DIN Next LT W23"/>
+                <a:cs typeface="DIN Next LT W23"/>
+              </a:rPr>
+              <a:t>Tensors, Channels, and Local Structure</a:t>
+            </a:r>
+          </a:p>
+        </p:txBody>
+      </p:sp>
+      <p:sp>
+        <p:nvSpPr>
+          <p:cNvPr id="8" name="TextBox 7"/>
+          <p:cNvSpPr txBox="1"/>
+          <p:nvPr/>
+        </p:nvSpPr>
+        <p:spPr>
+          <a:xfrm>
+            <a:off x="548640" y="2148840"/>
+            <a:ext cx="320040" cy="411480"/>
+          </a:xfrm>
+          <a:prstGeom prst="rect">
+            <a:avLst/>
+          </a:prstGeom>
+          <a:noFill/>
+        </p:spPr>
+        <p:txBody>
+          <a:bodyPr wrap="square" anchor="t">
+            <a:spAutoFit/>
+          </a:bodyPr>
+          <a:lstStyle/>
+          <a:p>
+            <a:pPr algn="l"/>
+            <a:r>
+              <a:rPr sz="1700" b="0">
+                <a:solidFill>
+                  <a:srgbClr val="9E59CD"/>
+                </a:solidFill>
+                <a:latin typeface="DIN Next LT W23"/>
+                <a:ea typeface="DIN Next LT W23"/>
+                <a:cs typeface="DIN Next LT W23"/>
+              </a:rPr>
+              <a:t>–</a:t>
+            </a:r>
+          </a:p>
+        </p:txBody>
+      </p:sp>
+      <p:sp>
+        <p:nvSpPr>
+          <p:cNvPr id="9" name="TextBox 8"/>
+          <p:cNvSpPr txBox="1"/>
+          <p:nvPr/>
+        </p:nvSpPr>
+        <p:spPr>
+          <a:xfrm>
+            <a:off x="914400" y="2148840"/>
+            <a:ext cx="9875519" cy="411480"/>
+          </a:xfrm>
+          <a:prstGeom prst="rect">
+            <a:avLst/>
+          </a:prstGeom>
+          <a:noFill/>
+        </p:spPr>
+        <p:txBody>
+          <a:bodyPr wrap="square" anchor="t">
+            <a:spAutoFit/>
+          </a:bodyPr>
+          <a:lstStyle/>
+          <a:p>
+            <a:pPr algn="l"/>
+            <a:r>
+              <a:rPr sz="1700" b="0">
+                <a:solidFill>
+                  <a:srgbClr val="121018"/>
+                </a:solidFill>
+                <a:latin typeface="DIN Next LT W23"/>
+                <a:ea typeface="DIN Next LT W23"/>
+                <a:cs typeface="DIN Next LT W23"/>
+              </a:rPr>
+              <a:t>A color image is usually a tensor of shape H×W×3 (RGB); each entry is an intensity discretized into 8 bits (0–255) before normalization.</a:t>
+            </a:r>
+          </a:p>
+        </p:txBody>
+      </p:sp>
+      <p:sp>
+        <p:nvSpPr>
+          <p:cNvPr id="10" name="TextBox 9"/>
+          <p:cNvSpPr txBox="1"/>
+          <p:nvPr/>
+        </p:nvSpPr>
+        <p:spPr>
+          <a:xfrm>
+            <a:off x="548640" y="2715768"/>
+            <a:ext cx="320040" cy="411480"/>
+          </a:xfrm>
+          <a:prstGeom prst="rect">
+            <a:avLst/>
+          </a:prstGeom>
+          <a:noFill/>
+        </p:spPr>
+        <p:txBody>
+          <a:bodyPr wrap="square" anchor="t">
+            <a:spAutoFit/>
+          </a:bodyPr>
+          <a:lstStyle/>
+          <a:p>
+            <a:pPr algn="l"/>
+            <a:r>
+              <a:rPr sz="1700" b="0">
+                <a:solidFill>
+                  <a:srgbClr val="9E59CD"/>
+                </a:solidFill>
+                <a:latin typeface="DIN Next LT W23"/>
+                <a:ea typeface="DIN Next LT W23"/>
+                <a:cs typeface="DIN Next LT W23"/>
+              </a:rPr>
+              <a:t>–</a:t>
+            </a:r>
+          </a:p>
+        </p:txBody>
+      </p:sp>
+      <p:sp>
+        <p:nvSpPr>
+          <p:cNvPr id="11" name="TextBox 10"/>
+          <p:cNvSpPr txBox="1"/>
+          <p:nvPr/>
+        </p:nvSpPr>
+        <p:spPr>
+          <a:xfrm>
+            <a:off x="914400" y="2715768"/>
+            <a:ext cx="9875519" cy="411480"/>
+          </a:xfrm>
+          <a:prstGeom prst="rect">
+            <a:avLst/>
+          </a:prstGeom>
+          <a:noFill/>
+        </p:spPr>
+        <p:txBody>
+          <a:bodyPr wrap="square" anchor="t">
+            <a:spAutoFit/>
+          </a:bodyPr>
+          <a:lstStyle/>
+          <a:p>
+            <a:pPr algn="l"/>
+            <a:r>
+              <a:rPr sz="1700" b="0">
+                <a:solidFill>
+                  <a:srgbClr val="121018"/>
+                </a:solidFill>
+                <a:latin typeface="DIN Next LT W23"/>
+                <a:ea typeface="DIN Next LT W23"/>
+                <a:cs typeface="DIN Next LT W23"/>
+              </a:rPr>
+              <a:t>Meaning lives in local neighborhoods: small patches reveal edges; larger contexts reveal objects—hierarchical composition.</a:t>
+            </a:r>
+          </a:p>
+        </p:txBody>
+      </p:sp>
+      <p:sp>
+        <p:nvSpPr>
+          <p:cNvPr id="12" name="Rectangle 11"/>
+          <p:cNvSpPr/>
+          <p:nvPr/>
+        </p:nvSpPr>
+        <p:spPr>
+          <a:xfrm>
+            <a:off x="548640" y="6446520"/>
+            <a:ext cx="11064240" cy="10972"/>
+          </a:xfrm>
+          <a:prstGeom prst="rect">
+            <a:avLst/>
+          </a:prstGeom>
+          <a:solidFill>
+            <a:srgbClr val="5234B7"/>
+          </a:solidFill>
+          <a:ln>
+            <a:noFill/>
+          </a:ln>
+          <a:effectLst/>
+        </p:spPr>
+        <p:style>
+          <a:lnRef idx="1">
+            <a:schemeClr val="accent1"/>
+          </a:lnRef>
+          <a:fillRef idx="3">
+            <a:schemeClr val="accent1"/>
+          </a:fillRef>
+          <a:effectRef idx="2">
+            <a:schemeClr val="accent1"/>
+          </a:effectRef>
+          <a:fontRef idx="minor">
+            <a:schemeClr val="lt1"/>
+          </a:fontRef>
+        </p:style>
+        <p:txBody>
+          <a:bodyPr rtlCol="0" anchor="ctr"/>
+          <a:lstStyle/>
+          <a:p>
+            <a:pPr algn="ctr"/>
+          </a:p>
+        </p:txBody>
+      </p:sp>
+      <p:sp>
+        <p:nvSpPr>
+          <p:cNvPr id="13" name="TextBox 12"/>
+          <p:cNvSpPr txBox="1"/>
+          <p:nvPr/>
+        </p:nvSpPr>
+        <p:spPr>
+          <a:xfrm>
+            <a:off x="548640" y="6510528"/>
+            <a:ext cx="2743200" cy="256032"/>
+          </a:xfrm>
+          <a:prstGeom prst="rect">
+            <a:avLst/>
+          </a:prstGeom>
+          <a:noFill/>
+        </p:spPr>
+        <p:txBody>
+          <a:bodyPr wrap="square" anchor="t">
+            <a:spAutoFit/>
+          </a:bodyPr>
+          <a:lstStyle/>
+          <a:p>
+            <a:pPr algn="l"/>
+            <a:r>
+              <a:rPr sz="1100" b="1">
+                <a:solidFill>
+                  <a:srgbClr val="5234B7"/>
+                </a:solidFill>
+                <a:latin typeface="DIN Next LT W23"/>
+                <a:ea typeface="DIN Next LT W23"/>
+                <a:cs typeface="DIN Next LT W23"/>
+              </a:rPr>
+              <a:t>ETRA</a:t>
+            </a:r>
+          </a:p>
+        </p:txBody>
+      </p:sp>
+      <p:sp>
+        <p:nvSpPr>
+          <p:cNvPr id="14" name="TextBox 13"/>
+          <p:cNvSpPr txBox="1"/>
+          <p:nvPr/>
+        </p:nvSpPr>
+        <p:spPr>
+          <a:xfrm>
+            <a:off x="9601200" y="6510528"/>
+            <a:ext cx="2011680" cy="256032"/>
+          </a:xfrm>
+          <a:prstGeom prst="rect">
+            <a:avLst/>
+          </a:prstGeom>
+          <a:noFill/>
+        </p:spPr>
+        <p:txBody>
+          <a:bodyPr wrap="square" anchor="t">
+            <a:spAutoFit/>
+          </a:bodyPr>
+          <a:lstStyle/>
+          <a:p>
+            <a:pPr algn="r"/>
+            <a:r>
+              <a:rPr sz="1100" b="0">
+                <a:solidFill>
+                  <a:srgbClr val="5A5470"/>
+                </a:solidFill>
+                <a:latin typeface="DIN Next LT W23"/>
+                <a:ea typeface="DIN Next LT W23"/>
+                <a:cs typeface="DIN Next LT W23"/>
+              </a:rPr>
+              <a:t>65  /  82</a:t>
+            </a:r>
+          </a:p>
+        </p:txBody>
+      </p:sp>
+    </p:spTree>
+  </p:cSld>
+  <p:clrMapOvr>
+    <a:masterClrMapping/>
+  </p:clrMapOvr>
+</p:sld>
+</file>
+
+<file path=ppt/slides/slide66.xml><?xml version="1.0" encoding="utf-8"?>
+<p:sld xmlns:a="http://schemas.openxmlformats.org/drawingml/2006/main" xmlns:p="http://schemas.openxmlformats.org/presentationml/2006/main" xmlns:r="http://schemas.openxmlformats.org/officeDocument/2006/relationships">
+  <p:cSld>
+    <p:bg>
+      <p:bgPr>
+        <a:solidFill>
+          <a:srgbClr val="FAF8FF"/>
+        </a:solidFill>
+        <a:effectLst/>
+      </p:bgPr>
+    </p:bg>
+    <p:spTree>
+      <p:nvGrpSpPr>
+        <p:cNvPr id="1" name=""/>
+        <p:cNvGrpSpPr/>
+        <p:nvPr/>
+      </p:nvGrpSpPr>
+      <p:grpSpPr/>
+      <p:sp>
+        <p:nvSpPr>
+          <p:cNvPr id="2" name="Rectangle 1"/>
+          <p:cNvSpPr/>
+          <p:nvPr/>
+        </p:nvSpPr>
+        <p:spPr>
+          <a:xfrm>
+            <a:off x="12136831" y="0"/>
+            <a:ext cx="54864" cy="6858000"/>
+          </a:xfrm>
+          <a:prstGeom prst="rect">
+            <a:avLst/>
+          </a:prstGeom>
+          <a:solidFill>
+            <a:srgbClr val="5234B7"/>
+          </a:solidFill>
+          <a:ln>
+            <a:noFill/>
+          </a:ln>
+          <a:effectLst/>
+        </p:spPr>
+        <p:style>
+          <a:lnRef idx="1">
+            <a:schemeClr val="accent1"/>
+          </a:lnRef>
+          <a:fillRef idx="3">
+            <a:schemeClr val="accent1"/>
+          </a:fillRef>
+          <a:effectRef idx="2">
+            <a:schemeClr val="accent1"/>
+          </a:effectRef>
+          <a:fontRef idx="minor">
+            <a:schemeClr val="lt1"/>
+          </a:fontRef>
+        </p:style>
+        <p:txBody>
+          <a:bodyPr rtlCol="0" anchor="ctr"/>
+          <a:lstStyle/>
+          <a:p>
+            <a:pPr algn="ctr"/>
+          </a:p>
+        </p:txBody>
+      </p:sp>
+      <p:pic>
+        <p:nvPicPr>
+          <p:cNvPr id="3" name="Picture 2" descr="etra-wordmark.png"/>
+          <p:cNvPicPr>
+            <a:picLocks noChangeAspect="1"/>
+          </p:cNvPicPr>
+          <p:nvPr/>
+        </p:nvPicPr>
+        <p:blipFill>
+          <a:blip r:embed="rId2"/>
+          <a:stretch>
+            <a:fillRect/>
+          </a:stretch>
+        </p:blipFill>
+        <p:spPr>
+          <a:xfrm>
+            <a:off x="10561320" y="411480"/>
+            <a:ext cx="1206201" cy="320040"/>
+          </a:xfrm>
+          <a:prstGeom prst="rect">
+            <a:avLst/>
+          </a:prstGeom>
+        </p:spPr>
+      </p:pic>
+      <p:sp>
+        <p:nvSpPr>
+          <p:cNvPr id="4" name="TextBox 3"/>
+          <p:cNvSpPr txBox="1"/>
+          <p:nvPr/>
+        </p:nvSpPr>
+        <p:spPr>
+          <a:xfrm>
+            <a:off x="548640" y="438912"/>
+            <a:ext cx="7772400" cy="274320"/>
+          </a:xfrm>
+          <a:prstGeom prst="rect">
+            <a:avLst/>
+          </a:prstGeom>
+          <a:noFill/>
+        </p:spPr>
+        <p:txBody>
+          <a:bodyPr wrap="square" anchor="t">
+            <a:spAutoFit/>
+          </a:bodyPr>
+          <a:lstStyle/>
+          <a:p>
+            <a:pPr algn="l"/>
+            <a:r>
+              <a:rPr sz="1200" b="0">
+                <a:solidFill>
+                  <a:srgbClr val="5A5470"/>
+                </a:solidFill>
+                <a:latin typeface="DIN Next LT W23"/>
+                <a:ea typeface="DIN Next LT W23"/>
+                <a:cs typeface="DIN Next LT W23"/>
+              </a:rPr>
+              <a:t>S07  ·  Deep Learning</a:t>
+            </a:r>
+          </a:p>
+        </p:txBody>
+      </p:sp>
+      <p:sp>
+        <p:nvSpPr>
+          <p:cNvPr id="5" name="Rectangle 4"/>
+          <p:cNvSpPr/>
+          <p:nvPr/>
+        </p:nvSpPr>
+        <p:spPr>
+          <a:xfrm>
+            <a:off x="548640" y="822960"/>
+            <a:ext cx="11064240" cy="10972"/>
+          </a:xfrm>
+          <a:prstGeom prst="rect">
+            <a:avLst/>
+          </a:prstGeom>
+          <a:solidFill>
+            <a:srgbClr val="E4DCF4"/>
+          </a:solidFill>
+          <a:ln>
+            <a:noFill/>
+          </a:ln>
+          <a:effectLst/>
+        </p:spPr>
+        <p:style>
+          <a:lnRef idx="1">
+            <a:schemeClr val="accent1"/>
+          </a:lnRef>
+          <a:fillRef idx="3">
+            <a:schemeClr val="accent1"/>
+          </a:fillRef>
+          <a:effectRef idx="2">
+            <a:schemeClr val="accent1"/>
+          </a:effectRef>
+          <a:fontRef idx="minor">
+            <a:schemeClr val="lt1"/>
+          </a:fontRef>
+        </p:style>
+        <p:txBody>
+          <a:bodyPr rtlCol="0" anchor="ctr"/>
+          <a:lstStyle/>
+          <a:p>
+            <a:pPr algn="ctr"/>
+          </a:p>
+        </p:txBody>
+      </p:sp>
+      <p:sp>
+        <p:nvSpPr>
+          <p:cNvPr id="6" name="TextBox 5"/>
+          <p:cNvSpPr txBox="1"/>
+          <p:nvPr/>
+        </p:nvSpPr>
+        <p:spPr>
+          <a:xfrm>
+            <a:off x="548640" y="1051560"/>
+            <a:ext cx="10241280" cy="594360"/>
+          </a:xfrm>
+          <a:prstGeom prst="rect">
+            <a:avLst/>
+          </a:prstGeom>
+          <a:noFill/>
+        </p:spPr>
+        <p:txBody>
+          <a:bodyPr wrap="square" anchor="t">
+            <a:spAutoFit/>
+          </a:bodyPr>
+          <a:lstStyle/>
+          <a:p>
+            <a:pPr algn="l"/>
+            <a:r>
+              <a:rPr sz="3200" b="1">
+                <a:solidFill>
+                  <a:srgbClr val="5234B7"/>
+                </a:solidFill>
+                <a:latin typeface="DIN Next LT W23"/>
+                <a:ea typeface="DIN Next LT W23"/>
+                <a:cs typeface="DIN Next LT W23"/>
+              </a:rPr>
+              <a:t>Image Data: How Computers “See” Pixels</a:t>
+            </a:r>
+          </a:p>
+        </p:txBody>
+      </p:sp>
+      <p:sp>
+        <p:nvSpPr>
+          <p:cNvPr id="7" name="TextBox 6"/>
+          <p:cNvSpPr txBox="1"/>
+          <p:nvPr/>
+        </p:nvSpPr>
+        <p:spPr>
+          <a:xfrm>
+            <a:off x="548640" y="1600200"/>
+            <a:ext cx="10241280" cy="365760"/>
+          </a:xfrm>
+          <a:prstGeom prst="rect">
+            <a:avLst/>
+          </a:prstGeom>
+          <a:noFill/>
+        </p:spPr>
+        <p:txBody>
+          <a:bodyPr wrap="square" anchor="t">
+            <a:spAutoFit/>
+          </a:bodyPr>
+          <a:lstStyle/>
+          <a:p>
+            <a:pPr algn="l"/>
+            <a:r>
+              <a:rPr sz="1500" b="0">
+                <a:solidFill>
+                  <a:srgbClr val="5A5470"/>
+                </a:solidFill>
+                <a:latin typeface="DIN Next LT W23"/>
+                <a:ea typeface="DIN Next LT W23"/>
+                <a:cs typeface="DIN Next LT W23"/>
+              </a:rPr>
+              <a:t>Tensors, Channels, and Local Structure</a:t>
+            </a:r>
+          </a:p>
+        </p:txBody>
+      </p:sp>
+      <p:sp>
+        <p:nvSpPr>
+          <p:cNvPr id="8" name="Rounded Rectangle 7"/>
+          <p:cNvSpPr/>
+          <p:nvPr/>
+        </p:nvSpPr>
+        <p:spPr>
+          <a:xfrm>
+            <a:off x="548640" y="1965960"/>
+            <a:ext cx="10972800" cy="3977639"/>
+          </a:xfrm>
+          <a:prstGeom prst="roundRect">
+            <a:avLst>
+              <a:gd name="adj" fmla="val 10000"/>
+            </a:avLst>
+          </a:prstGeom>
+          <a:solidFill>
+            <a:srgbClr val="EEE8FA"/>
+          </a:solidFill>
+          <a:ln>
+            <a:noFill/>
+          </a:ln>
+          <a:effectLst/>
+        </p:spPr>
+        <p:style>
+          <a:lnRef idx="1">
+            <a:schemeClr val="accent1"/>
+          </a:lnRef>
+          <a:fillRef idx="3">
+            <a:schemeClr val="accent1"/>
+          </a:fillRef>
+          <a:effectRef idx="2">
+            <a:schemeClr val="accent1"/>
+          </a:effectRef>
+          <a:fontRef idx="minor">
+            <a:schemeClr val="lt1"/>
+          </a:fontRef>
+        </p:style>
+        <p:txBody>
+          <a:bodyPr rtlCol="0" anchor="ctr"/>
+          <a:lstStyle/>
+          <a:p>
+            <a:pPr algn="ctr"/>
+          </a:p>
+        </p:txBody>
+      </p:sp>
+      <p:pic>
+        <p:nvPicPr>
+          <p:cNvPr id="9" name="Picture 8" descr="cnn-architecture.png"/>
+          <p:cNvPicPr>
+            <a:picLocks noChangeAspect="1"/>
+          </p:cNvPicPr>
+          <p:nvPr/>
+        </p:nvPicPr>
+        <p:blipFill>
+          <a:blip r:embed="rId3"/>
+          <a:stretch>
+            <a:fillRect/>
+          </a:stretch>
+        </p:blipFill>
+        <p:spPr>
+          <a:xfrm>
+            <a:off x="1305933" y="2103120"/>
+            <a:ext cx="9458213" cy="3703320"/>
+          </a:xfrm>
+          <a:prstGeom prst="rect">
+            <a:avLst/>
+          </a:prstGeom>
+        </p:spPr>
+      </p:pic>
+      <p:sp>
+        <p:nvSpPr>
+          <p:cNvPr id="10" name="Rectangle 9"/>
+          <p:cNvSpPr/>
+          <p:nvPr/>
+        </p:nvSpPr>
+        <p:spPr>
+          <a:xfrm>
+            <a:off x="548640" y="6446520"/>
+            <a:ext cx="11064240" cy="10972"/>
+          </a:xfrm>
+          <a:prstGeom prst="rect">
+            <a:avLst/>
+          </a:prstGeom>
+          <a:solidFill>
+            <a:srgbClr val="5234B7"/>
+          </a:solidFill>
+          <a:ln>
+            <a:noFill/>
+          </a:ln>
+          <a:effectLst/>
+        </p:spPr>
+        <p:style>
+          <a:lnRef idx="1">
+            <a:schemeClr val="accent1"/>
+          </a:lnRef>
+          <a:fillRef idx="3">
+            <a:schemeClr val="accent1"/>
+          </a:fillRef>
+          <a:effectRef idx="2">
+            <a:schemeClr val="accent1"/>
+          </a:effectRef>
+          <a:fontRef idx="minor">
+            <a:schemeClr val="lt1"/>
+          </a:fontRef>
+        </p:style>
+        <p:txBody>
+          <a:bodyPr rtlCol="0" anchor="ctr"/>
+          <a:lstStyle/>
+          <a:p>
+            <a:pPr algn="ctr"/>
+          </a:p>
+        </p:txBody>
+      </p:sp>
+      <p:sp>
+        <p:nvSpPr>
+          <p:cNvPr id="11" name="TextBox 10"/>
+          <p:cNvSpPr txBox="1"/>
+          <p:nvPr/>
+        </p:nvSpPr>
+        <p:spPr>
+          <a:xfrm>
+            <a:off x="548640" y="6510528"/>
+            <a:ext cx="2743200" cy="256032"/>
+          </a:xfrm>
+          <a:prstGeom prst="rect">
+            <a:avLst/>
+          </a:prstGeom>
+          <a:noFill/>
+        </p:spPr>
+        <p:txBody>
+          <a:bodyPr wrap="square" anchor="t">
+            <a:spAutoFit/>
+          </a:bodyPr>
+          <a:lstStyle/>
+          <a:p>
+            <a:pPr algn="l"/>
+            <a:r>
+              <a:rPr sz="1100" b="1">
+                <a:solidFill>
+                  <a:srgbClr val="5234B7"/>
+                </a:solidFill>
+                <a:latin typeface="DIN Next LT W23"/>
+                <a:ea typeface="DIN Next LT W23"/>
+                <a:cs typeface="DIN Next LT W23"/>
+              </a:rPr>
+              <a:t>ETRA</a:t>
+            </a:r>
+          </a:p>
+        </p:txBody>
+      </p:sp>
+      <p:sp>
+        <p:nvSpPr>
+          <p:cNvPr id="12" name="TextBox 11"/>
+          <p:cNvSpPr txBox="1"/>
+          <p:nvPr/>
+        </p:nvSpPr>
+        <p:spPr>
+          <a:xfrm>
+            <a:off x="9601200" y="6510528"/>
+            <a:ext cx="2011680" cy="256032"/>
+          </a:xfrm>
+          <a:prstGeom prst="rect">
+            <a:avLst/>
+          </a:prstGeom>
+          <a:noFill/>
+        </p:spPr>
+        <p:txBody>
+          <a:bodyPr wrap="square" anchor="t">
+            <a:spAutoFit/>
+          </a:bodyPr>
+          <a:lstStyle/>
+          <a:p>
+            <a:pPr algn="r"/>
+            <a:r>
+              <a:rPr sz="1100" b="0">
+                <a:solidFill>
+                  <a:srgbClr val="5A5470"/>
+                </a:solidFill>
+                <a:latin typeface="DIN Next LT W23"/>
+                <a:ea typeface="DIN Next LT W23"/>
+                <a:cs typeface="DIN Next LT W23"/>
+              </a:rPr>
+              <a:t>66  /  82</a:t>
+            </a:r>
+          </a:p>
+        </p:txBody>
+      </p:sp>
+    </p:spTree>
+  </p:cSld>
+  <p:clrMapOvr>
+    <a:masterClrMapping/>
+  </p:clrMapOvr>
+</p:sld>
+</file>
+
+<file path=ppt/slides/slide67.xml><?xml version="1.0" encoding="utf-8"?>
+<p:sld xmlns:a="http://schemas.openxmlformats.org/drawingml/2006/main" xmlns:p="http://schemas.openxmlformats.org/presentationml/2006/main" xmlns:r="http://schemas.openxmlformats.org/officeDocument/2006/relationships">
+  <p:cSld>
+    <p:bg>
+      <p:bgPr>
+        <a:solidFill>
+          <a:srgbClr val="FAF8FF"/>
+        </a:solidFill>
+        <a:effectLst/>
+      </p:bgPr>
+    </p:bg>
+    <p:spTree>
+      <p:nvGrpSpPr>
+        <p:cNvPr id="1" name=""/>
+        <p:cNvGrpSpPr/>
+        <p:nvPr/>
+      </p:nvGrpSpPr>
+      <p:grpSpPr/>
+      <p:sp>
+        <p:nvSpPr>
+          <p:cNvPr id="2" name="Rectangle 1"/>
+          <p:cNvSpPr/>
+          <p:nvPr/>
+        </p:nvSpPr>
+        <p:spPr>
+          <a:xfrm>
+            <a:off x="12136831" y="0"/>
+            <a:ext cx="54864" cy="6858000"/>
+          </a:xfrm>
+          <a:prstGeom prst="rect">
+            <a:avLst/>
+          </a:prstGeom>
+          <a:solidFill>
+            <a:srgbClr val="5234B7"/>
+          </a:solidFill>
+          <a:ln>
+            <a:noFill/>
+          </a:ln>
+          <a:effectLst/>
+        </p:spPr>
+        <p:style>
+          <a:lnRef idx="1">
+            <a:schemeClr val="accent1"/>
+          </a:lnRef>
+          <a:fillRef idx="3">
+            <a:schemeClr val="accent1"/>
+          </a:fillRef>
+          <a:effectRef idx="2">
+            <a:schemeClr val="accent1"/>
+          </a:effectRef>
+          <a:fontRef idx="minor">
+            <a:schemeClr val="lt1"/>
+          </a:fontRef>
+        </p:style>
+        <p:txBody>
+          <a:bodyPr rtlCol="0" anchor="ctr"/>
+          <a:lstStyle/>
+          <a:p>
+            <a:pPr algn="ctr"/>
+          </a:p>
+        </p:txBody>
+      </p:sp>
+      <p:pic>
+        <p:nvPicPr>
+          <p:cNvPr id="3" name="Picture 2" descr="etra-wordmark.png"/>
+          <p:cNvPicPr>
+            <a:picLocks noChangeAspect="1"/>
+          </p:cNvPicPr>
+          <p:nvPr/>
+        </p:nvPicPr>
+        <p:blipFill>
+          <a:blip r:embed="rId2"/>
+          <a:stretch>
+            <a:fillRect/>
+          </a:stretch>
+        </p:blipFill>
+        <p:spPr>
+          <a:xfrm>
+            <a:off x="10561320" y="411480"/>
+            <a:ext cx="1206201" cy="320040"/>
+          </a:xfrm>
+          <a:prstGeom prst="rect">
+            <a:avLst/>
+          </a:prstGeom>
+        </p:spPr>
+      </p:pic>
+      <p:sp>
+        <p:nvSpPr>
+          <p:cNvPr id="4" name="TextBox 3"/>
+          <p:cNvSpPr txBox="1"/>
+          <p:nvPr/>
+        </p:nvSpPr>
+        <p:spPr>
+          <a:xfrm>
+            <a:off x="548640" y="438912"/>
+            <a:ext cx="7772400" cy="274320"/>
+          </a:xfrm>
+          <a:prstGeom prst="rect">
+            <a:avLst/>
+          </a:prstGeom>
+          <a:noFill/>
+        </p:spPr>
+        <p:txBody>
+          <a:bodyPr wrap="square" anchor="t">
+            <a:spAutoFit/>
+          </a:bodyPr>
+          <a:lstStyle/>
+          <a:p>
+            <a:pPr algn="l"/>
+            <a:r>
+              <a:rPr sz="1200" b="0">
+                <a:solidFill>
+                  <a:srgbClr val="5A5470"/>
+                </a:solidFill>
+                <a:latin typeface="DIN Next LT W23"/>
+                <a:ea typeface="DIN Next LT W23"/>
+                <a:cs typeface="DIN Next LT W23"/>
+              </a:rPr>
+              <a:t>S07  ·  Deep Learning</a:t>
+            </a:r>
+          </a:p>
+        </p:txBody>
+      </p:sp>
+      <p:sp>
+        <p:nvSpPr>
+          <p:cNvPr id="5" name="Rectangle 4"/>
+          <p:cNvSpPr/>
+          <p:nvPr/>
+        </p:nvSpPr>
+        <p:spPr>
+          <a:xfrm>
+            <a:off x="548640" y="822960"/>
+            <a:ext cx="11064240" cy="10972"/>
+          </a:xfrm>
+          <a:prstGeom prst="rect">
+            <a:avLst/>
+          </a:prstGeom>
+          <a:solidFill>
+            <a:srgbClr val="E4DCF4"/>
+          </a:solidFill>
+          <a:ln>
+            <a:noFill/>
+          </a:ln>
+          <a:effectLst/>
+        </p:spPr>
+        <p:style>
+          <a:lnRef idx="1">
+            <a:schemeClr val="accent1"/>
+          </a:lnRef>
+          <a:fillRef idx="3">
+            <a:schemeClr val="accent1"/>
+          </a:fillRef>
+          <a:effectRef idx="2">
+            <a:schemeClr val="accent1"/>
+          </a:effectRef>
+          <a:fontRef idx="minor">
+            <a:schemeClr val="lt1"/>
+          </a:fontRef>
+        </p:style>
+        <p:txBody>
+          <a:bodyPr rtlCol="0" anchor="ctr"/>
+          <a:lstStyle/>
+          <a:p>
+            <a:pPr algn="ctr"/>
+          </a:p>
+        </p:txBody>
+      </p:sp>
+      <p:sp>
+        <p:nvSpPr>
+          <p:cNvPr id="6" name="TextBox 5"/>
+          <p:cNvSpPr txBox="1"/>
+          <p:nvPr/>
+        </p:nvSpPr>
+        <p:spPr>
+          <a:xfrm>
+            <a:off x="548640" y="1051560"/>
+            <a:ext cx="10241280" cy="594360"/>
+          </a:xfrm>
+          <a:prstGeom prst="rect">
+            <a:avLst/>
+          </a:prstGeom>
+          <a:noFill/>
+        </p:spPr>
+        <p:txBody>
+          <a:bodyPr wrap="square" anchor="t">
+            <a:spAutoFit/>
+          </a:bodyPr>
+          <a:lstStyle/>
+          <a:p>
+            <a:pPr algn="l"/>
+            <a:r>
+              <a:rPr sz="3200" b="1">
+                <a:solidFill>
+                  <a:srgbClr val="5234B7"/>
+                </a:solidFill>
+                <a:latin typeface="DIN Next LT W23"/>
+                <a:ea typeface="DIN Next LT W23"/>
+                <a:cs typeface="DIN Next LT W23"/>
+              </a:rPr>
+              <a:t>Convolution: Kernels and Feature Maps</a:t>
+            </a:r>
+          </a:p>
+        </p:txBody>
+      </p:sp>
+      <p:sp>
+        <p:nvSpPr>
+          <p:cNvPr id="7" name="TextBox 6"/>
+          <p:cNvSpPr txBox="1"/>
+          <p:nvPr/>
+        </p:nvSpPr>
+        <p:spPr>
+          <a:xfrm>
+            <a:off x="548640" y="1600200"/>
+            <a:ext cx="10241280" cy="365760"/>
+          </a:xfrm>
+          <a:prstGeom prst="rect">
+            <a:avLst/>
+          </a:prstGeom>
+          <a:noFill/>
+        </p:spPr>
+        <p:txBody>
+          <a:bodyPr wrap="square" anchor="t">
+            <a:spAutoFit/>
+          </a:bodyPr>
+          <a:lstStyle/>
+          <a:p>
+            <a:pPr algn="l"/>
+            <a:r>
+              <a:rPr sz="1500" b="0">
+                <a:solidFill>
+                  <a:srgbClr val="5A5470"/>
+                </a:solidFill>
+                <a:latin typeface="DIN Next LT W23"/>
+                <a:ea typeface="DIN Next LT W23"/>
+                <a:cs typeface="DIN Next LT W23"/>
+              </a:rPr>
+              <a:t>Sliding Linear Filters + Nonlinearity</a:t>
+            </a:r>
+          </a:p>
+        </p:txBody>
+      </p:sp>
+      <p:sp>
+        <p:nvSpPr>
+          <p:cNvPr id="8" name="TextBox 7"/>
+          <p:cNvSpPr txBox="1"/>
+          <p:nvPr/>
+        </p:nvSpPr>
+        <p:spPr>
+          <a:xfrm>
+            <a:off x="548640" y="1920240"/>
+            <a:ext cx="10972800" cy="320040"/>
+          </a:xfrm>
+          <a:prstGeom prst="rect">
+            <a:avLst/>
+          </a:prstGeom>
+          <a:noFill/>
+        </p:spPr>
+        <p:txBody>
+          <a:bodyPr wrap="square" anchor="t">
+            <a:spAutoFit/>
+          </a:bodyPr>
+          <a:lstStyle/>
+          <a:p>
+            <a:pPr algn="l"/>
+            <a:r>
+              <a:rPr sz="1300" b="0">
+                <a:solidFill>
+                  <a:srgbClr val="5A5470"/>
+                </a:solidFill>
+                <a:latin typeface="DIN Next LT W23"/>
+                <a:ea typeface="DIN Next LT W23"/>
+                <a:cs typeface="DIN Next LT W23"/>
+              </a:rPr>
+              <a:t>A kernel is a small learnable matrix (often 3×3). Multiple kernels produce a stack of feature maps.</a:t>
+            </a:r>
+          </a:p>
+        </p:txBody>
+      </p:sp>
+      <p:sp>
+        <p:nvSpPr>
+          <p:cNvPr id="9" name="Rounded Rectangle 8"/>
+          <p:cNvSpPr/>
+          <p:nvPr/>
+        </p:nvSpPr>
+        <p:spPr>
+          <a:xfrm>
+            <a:off x="548640" y="2240280"/>
+            <a:ext cx="10972800" cy="3977639"/>
+          </a:xfrm>
+          <a:prstGeom prst="roundRect">
+            <a:avLst>
+              <a:gd name="adj" fmla="val 10000"/>
+            </a:avLst>
+          </a:prstGeom>
+          <a:solidFill>
+            <a:srgbClr val="EEE8FA"/>
+          </a:solidFill>
+          <a:ln>
+            <a:noFill/>
+          </a:ln>
+          <a:effectLst/>
+        </p:spPr>
+        <p:style>
+          <a:lnRef idx="1">
+            <a:schemeClr val="accent1"/>
+          </a:lnRef>
+          <a:fillRef idx="3">
+            <a:schemeClr val="accent1"/>
+          </a:fillRef>
+          <a:effectRef idx="2">
+            <a:schemeClr val="accent1"/>
+          </a:effectRef>
+          <a:fontRef idx="minor">
+            <a:schemeClr val="lt1"/>
+          </a:fontRef>
+        </p:style>
+        <p:txBody>
+          <a:bodyPr rtlCol="0" anchor="ctr"/>
+          <a:lstStyle/>
+          <a:p>
+            <a:pPr algn="ctr"/>
+          </a:p>
+        </p:txBody>
+      </p:sp>
+      <p:pic>
+        <p:nvPicPr>
+          <p:cNvPr id="10" name="Picture 9" descr="convolution.png"/>
+          <p:cNvPicPr>
+            <a:picLocks noChangeAspect="1"/>
+          </p:cNvPicPr>
+          <p:nvPr/>
+        </p:nvPicPr>
+        <p:blipFill>
+          <a:blip r:embed="rId3"/>
+          <a:stretch>
+            <a:fillRect/>
+          </a:stretch>
+        </p:blipFill>
+        <p:spPr>
+          <a:xfrm>
+            <a:off x="1413066" y="2377440"/>
+            <a:ext cx="9243946" cy="3703320"/>
+          </a:xfrm>
+          <a:prstGeom prst="rect">
+            <a:avLst/>
+          </a:prstGeom>
+        </p:spPr>
+      </p:pic>
+      <p:sp>
+        <p:nvSpPr>
+          <p:cNvPr id="11" name="TextBox 10"/>
+          <p:cNvSpPr txBox="1"/>
+          <p:nvPr/>
+        </p:nvSpPr>
+        <p:spPr>
+          <a:xfrm>
+            <a:off x="548640" y="6309360"/>
+            <a:ext cx="10972800" cy="228600"/>
+          </a:xfrm>
+          <a:prstGeom prst="rect">
+            <a:avLst/>
+          </a:prstGeom>
+          <a:noFill/>
+        </p:spPr>
+        <p:txBody>
+          <a:bodyPr wrap="square" anchor="t">
+            <a:spAutoFit/>
+          </a:bodyPr>
+          <a:lstStyle/>
+          <a:p>
+            <a:pPr algn="l"/>
+            <a:r>
+              <a:rPr sz="1100" b="0">
+                <a:solidFill>
+                  <a:srgbClr val="5A5470"/>
+                </a:solidFill>
+                <a:latin typeface="DIN Next LT W23"/>
+                <a:ea typeface="DIN Next LT W23"/>
+                <a:cs typeface="DIN Next LT W23"/>
+              </a:rPr>
+              <a:t>Classical Sobel filters are fixed. CNNs learn task-specific filters from data.</a:t>
+            </a:r>
+          </a:p>
+        </p:txBody>
+      </p:sp>
+      <p:sp>
+        <p:nvSpPr>
+          <p:cNvPr id="12" name="Rectangle 11"/>
+          <p:cNvSpPr/>
+          <p:nvPr/>
+        </p:nvSpPr>
+        <p:spPr>
+          <a:xfrm>
+            <a:off x="548640" y="6446520"/>
+            <a:ext cx="11064240" cy="10972"/>
+          </a:xfrm>
+          <a:prstGeom prst="rect">
+            <a:avLst/>
+          </a:prstGeom>
+          <a:solidFill>
+            <a:srgbClr val="5234B7"/>
+          </a:solidFill>
+          <a:ln>
+            <a:noFill/>
+          </a:ln>
+          <a:effectLst/>
+        </p:spPr>
+        <p:style>
+          <a:lnRef idx="1">
+            <a:schemeClr val="accent1"/>
+          </a:lnRef>
+          <a:fillRef idx="3">
+            <a:schemeClr val="accent1"/>
+          </a:fillRef>
+          <a:effectRef idx="2">
+            <a:schemeClr val="accent1"/>
+          </a:effectRef>
+          <a:fontRef idx="minor">
+            <a:schemeClr val="lt1"/>
+          </a:fontRef>
+        </p:style>
+        <p:txBody>
+          <a:bodyPr rtlCol="0" anchor="ctr"/>
+          <a:lstStyle/>
+          <a:p>
+            <a:pPr algn="ctr"/>
+          </a:p>
+        </p:txBody>
+      </p:sp>
+      <p:sp>
+        <p:nvSpPr>
+          <p:cNvPr id="13" name="TextBox 12"/>
+          <p:cNvSpPr txBox="1"/>
+          <p:nvPr/>
+        </p:nvSpPr>
+        <p:spPr>
+          <a:xfrm>
+            <a:off x="548640" y="6510528"/>
+            <a:ext cx="2743200" cy="256032"/>
+          </a:xfrm>
+          <a:prstGeom prst="rect">
+            <a:avLst/>
+          </a:prstGeom>
+          <a:noFill/>
+        </p:spPr>
+        <p:txBody>
+          <a:bodyPr wrap="square" anchor="t">
+            <a:spAutoFit/>
+          </a:bodyPr>
+          <a:lstStyle/>
+          <a:p>
+            <a:pPr algn="l"/>
+            <a:r>
+              <a:rPr sz="1100" b="1">
+                <a:solidFill>
+                  <a:srgbClr val="5234B7"/>
+                </a:solidFill>
+                <a:latin typeface="DIN Next LT W23"/>
+                <a:ea typeface="DIN Next LT W23"/>
+                <a:cs typeface="DIN Next LT W23"/>
+              </a:rPr>
+              <a:t>ETRA</a:t>
+            </a:r>
+          </a:p>
+        </p:txBody>
+      </p:sp>
+      <p:sp>
+        <p:nvSpPr>
+          <p:cNvPr id="14" name="TextBox 13"/>
+          <p:cNvSpPr txBox="1"/>
+          <p:nvPr/>
+        </p:nvSpPr>
+        <p:spPr>
+          <a:xfrm>
+            <a:off x="9601200" y="6510528"/>
+            <a:ext cx="2011680" cy="256032"/>
+          </a:xfrm>
+          <a:prstGeom prst="rect">
+            <a:avLst/>
+          </a:prstGeom>
+          <a:noFill/>
+        </p:spPr>
+        <p:txBody>
+          <a:bodyPr wrap="square" anchor="t">
+            <a:spAutoFit/>
+          </a:bodyPr>
+          <a:lstStyle/>
+          <a:p>
+            <a:pPr algn="r"/>
+            <a:r>
+              <a:rPr sz="1100" b="0">
+                <a:solidFill>
+                  <a:srgbClr val="5A5470"/>
+                </a:solidFill>
+                <a:latin typeface="DIN Next LT W23"/>
+                <a:ea typeface="DIN Next LT W23"/>
+                <a:cs typeface="DIN Next LT W23"/>
+              </a:rPr>
+              <a:t>67  /  82</a:t>
+            </a:r>
+          </a:p>
+        </p:txBody>
+      </p:sp>
+    </p:spTree>
+  </p:cSld>
+  <p:clrMapOvr>
+    <a:masterClrMapping/>
+  </p:clrMapOvr>
+</p:sld>
+</file>
+
+<file path=ppt/slides/slide68.xml><?xml version="1.0" encoding="utf-8"?>
 <p:sld xmlns:a="http://schemas.openxmlformats.org/drawingml/2006/main" xmlns:p="http://schemas.openxmlformats.org/presentationml/2006/main" xmlns:r="http://schemas.openxmlformats.org/officeDocument/2006/relationships">
   <p:cSld>
     <p:bg>
@@ -42700,1734 +44072,7 @@
                 <a:ea typeface="DIN Next LT W23"/>
                 <a:cs typeface="DIN Next LT W23"/>
               </a:rPr>
-              <a:t>65  /  79</a:t>
-            </a:r>
-          </a:p>
-        </p:txBody>
-      </p:sp>
-    </p:spTree>
-  </p:cSld>
-  <p:clrMapOvr>
-    <a:masterClrMapping/>
-  </p:clrMapOvr>
-</p:sld>
-</file>
-
-<file path=ppt/slides/slide66.xml><?xml version="1.0" encoding="utf-8"?>
-<p:sld xmlns:a="http://schemas.openxmlformats.org/drawingml/2006/main" xmlns:p="http://schemas.openxmlformats.org/presentationml/2006/main" xmlns:r="http://schemas.openxmlformats.org/officeDocument/2006/relationships">
-  <p:cSld>
-    <p:bg>
-      <p:bgPr>
-        <a:solidFill>
-          <a:srgbClr val="FAF8FF"/>
-        </a:solidFill>
-        <a:effectLst/>
-      </p:bgPr>
-    </p:bg>
-    <p:spTree>
-      <p:nvGrpSpPr>
-        <p:cNvPr id="1" name=""/>
-        <p:cNvGrpSpPr/>
-        <p:nvPr/>
-      </p:nvGrpSpPr>
-      <p:grpSpPr/>
-      <p:sp>
-        <p:nvSpPr>
-          <p:cNvPr id="2" name="Rectangle 1"/>
-          <p:cNvSpPr/>
-          <p:nvPr/>
-        </p:nvSpPr>
-        <p:spPr>
-          <a:xfrm>
-            <a:off x="12136831" y="0"/>
-            <a:ext cx="54864" cy="6858000"/>
-          </a:xfrm>
-          <a:prstGeom prst="rect">
-            <a:avLst/>
-          </a:prstGeom>
-          <a:solidFill>
-            <a:srgbClr val="5234B7"/>
-          </a:solidFill>
-          <a:ln>
-            <a:noFill/>
-          </a:ln>
-          <a:effectLst/>
-        </p:spPr>
-        <p:style>
-          <a:lnRef idx="1">
-            <a:schemeClr val="accent1"/>
-          </a:lnRef>
-          <a:fillRef idx="3">
-            <a:schemeClr val="accent1"/>
-          </a:fillRef>
-          <a:effectRef idx="2">
-            <a:schemeClr val="accent1"/>
-          </a:effectRef>
-          <a:fontRef idx="minor">
-            <a:schemeClr val="lt1"/>
-          </a:fontRef>
-        </p:style>
-        <p:txBody>
-          <a:bodyPr rtlCol="0" anchor="ctr"/>
-          <a:lstStyle/>
-          <a:p>
-            <a:pPr algn="ctr"/>
-          </a:p>
-        </p:txBody>
-      </p:sp>
-      <p:pic>
-        <p:nvPicPr>
-          <p:cNvPr id="3" name="Picture 2" descr="etra-wordmark.png"/>
-          <p:cNvPicPr>
-            <a:picLocks noChangeAspect="1"/>
-          </p:cNvPicPr>
-          <p:nvPr/>
-        </p:nvPicPr>
-        <p:blipFill>
-          <a:blip r:embed="rId2"/>
-          <a:stretch>
-            <a:fillRect/>
-          </a:stretch>
-        </p:blipFill>
-        <p:spPr>
-          <a:xfrm>
-            <a:off x="10561320" y="411480"/>
-            <a:ext cx="1206201" cy="320040"/>
-          </a:xfrm>
-          <a:prstGeom prst="rect">
-            <a:avLst/>
-          </a:prstGeom>
-        </p:spPr>
-      </p:pic>
-      <p:sp>
-        <p:nvSpPr>
-          <p:cNvPr id="4" name="TextBox 3"/>
-          <p:cNvSpPr txBox="1"/>
-          <p:nvPr/>
-        </p:nvSpPr>
-        <p:spPr>
-          <a:xfrm>
-            <a:off x="548640" y="438912"/>
-            <a:ext cx="7772400" cy="274320"/>
-          </a:xfrm>
-          <a:prstGeom prst="rect">
-            <a:avLst/>
-          </a:prstGeom>
-          <a:noFill/>
-        </p:spPr>
-        <p:txBody>
-          <a:bodyPr wrap="square" anchor="t">
-            <a:spAutoFit/>
-          </a:bodyPr>
-          <a:lstStyle/>
-          <a:p>
-            <a:pPr algn="l"/>
-            <a:r>
-              <a:rPr sz="1200" b="0">
-                <a:solidFill>
-                  <a:srgbClr val="5A5470"/>
-                </a:solidFill>
-                <a:latin typeface="DIN Next LT W23"/>
-                <a:ea typeface="DIN Next LT W23"/>
-                <a:cs typeface="DIN Next LT W23"/>
-              </a:rPr>
-              <a:t>S07  ·  Deep Learning</a:t>
-            </a:r>
-          </a:p>
-        </p:txBody>
-      </p:sp>
-      <p:sp>
-        <p:nvSpPr>
-          <p:cNvPr id="5" name="Rectangle 4"/>
-          <p:cNvSpPr/>
-          <p:nvPr/>
-        </p:nvSpPr>
-        <p:spPr>
-          <a:xfrm>
-            <a:off x="548640" y="822960"/>
-            <a:ext cx="11064240" cy="10972"/>
-          </a:xfrm>
-          <a:prstGeom prst="rect">
-            <a:avLst/>
-          </a:prstGeom>
-          <a:solidFill>
-            <a:srgbClr val="E4DCF4"/>
-          </a:solidFill>
-          <a:ln>
-            <a:noFill/>
-          </a:ln>
-          <a:effectLst/>
-        </p:spPr>
-        <p:style>
-          <a:lnRef idx="1">
-            <a:schemeClr val="accent1"/>
-          </a:lnRef>
-          <a:fillRef idx="3">
-            <a:schemeClr val="accent1"/>
-          </a:fillRef>
-          <a:effectRef idx="2">
-            <a:schemeClr val="accent1"/>
-          </a:effectRef>
-          <a:fontRef idx="minor">
-            <a:schemeClr val="lt1"/>
-          </a:fontRef>
-        </p:style>
-        <p:txBody>
-          <a:bodyPr rtlCol="0" anchor="ctr"/>
-          <a:lstStyle/>
-          <a:p>
-            <a:pPr algn="ctr"/>
-          </a:p>
-        </p:txBody>
-      </p:sp>
-      <p:sp>
-        <p:nvSpPr>
-          <p:cNvPr id="6" name="TextBox 5"/>
-          <p:cNvSpPr txBox="1"/>
-          <p:nvPr/>
-        </p:nvSpPr>
-        <p:spPr>
-          <a:xfrm>
-            <a:off x="548640" y="1051560"/>
-            <a:ext cx="10241280" cy="594360"/>
-          </a:xfrm>
-          <a:prstGeom prst="rect">
-            <a:avLst/>
-          </a:prstGeom>
-          <a:noFill/>
-        </p:spPr>
-        <p:txBody>
-          <a:bodyPr wrap="square" anchor="t">
-            <a:spAutoFit/>
-          </a:bodyPr>
-          <a:lstStyle/>
-          <a:p>
-            <a:pPr algn="l"/>
-            <a:r>
-              <a:rPr sz="3200" b="1">
-                <a:solidFill>
-                  <a:srgbClr val="5234B7"/>
-                </a:solidFill>
-                <a:latin typeface="DIN Next LT W23"/>
-                <a:ea typeface="DIN Next LT W23"/>
-                <a:cs typeface="DIN Next LT W23"/>
-              </a:rPr>
-              <a:t>CNN Blocks: Conv–Pool to ResNet</a:t>
-            </a:r>
-          </a:p>
-        </p:txBody>
-      </p:sp>
-      <p:sp>
-        <p:nvSpPr>
-          <p:cNvPr id="7" name="TextBox 6"/>
-          <p:cNvSpPr txBox="1"/>
-          <p:nvPr/>
-        </p:nvSpPr>
-        <p:spPr>
-          <a:xfrm>
-            <a:off x="548640" y="1600200"/>
-            <a:ext cx="10241280" cy="365760"/>
-          </a:xfrm>
-          <a:prstGeom prst="rect">
-            <a:avLst/>
-          </a:prstGeom>
-          <a:noFill/>
-        </p:spPr>
-        <p:txBody>
-          <a:bodyPr wrap="square" anchor="t">
-            <a:spAutoFit/>
-          </a:bodyPr>
-          <a:lstStyle/>
-          <a:p>
-            <a:pPr algn="l"/>
-            <a:r>
-              <a:rPr sz="1500" b="0">
-                <a:solidFill>
-                  <a:srgbClr val="5A5470"/>
-                </a:solidFill>
-                <a:latin typeface="DIN Next LT W23"/>
-                <a:ea typeface="DIN Next LT W23"/>
-                <a:cs typeface="DIN Next LT W23"/>
-              </a:rPr>
-              <a:t>Depth, Downsampling, Residual Learning</a:t>
-            </a:r>
-          </a:p>
-        </p:txBody>
-      </p:sp>
-      <p:sp>
-        <p:nvSpPr>
-          <p:cNvPr id="8" name="TextBox 7"/>
-          <p:cNvSpPr txBox="1"/>
-          <p:nvPr/>
-        </p:nvSpPr>
-        <p:spPr>
-          <a:xfrm>
-            <a:off x="548640" y="1920240"/>
-            <a:ext cx="10972800" cy="320040"/>
-          </a:xfrm>
-          <a:prstGeom prst="rect">
-            <a:avLst/>
-          </a:prstGeom>
-          <a:noFill/>
-        </p:spPr>
-        <p:txBody>
-          <a:bodyPr wrap="square" anchor="t">
-            <a:spAutoFit/>
-          </a:bodyPr>
-          <a:lstStyle/>
-          <a:p>
-            <a:pPr algn="l"/>
-            <a:r>
-              <a:rPr sz="1300" b="0">
-                <a:solidFill>
-                  <a:srgbClr val="5A5470"/>
-                </a:solidFill>
-                <a:latin typeface="DIN Next LT W23"/>
-                <a:ea typeface="DIN Next LT W23"/>
-                <a:cs typeface="DIN Next LT W23"/>
-              </a:rPr>
-              <a:t>A standard CNN alternates convolution, ReLU, and pooling, then a fully connected head.</a:t>
-            </a:r>
-          </a:p>
-        </p:txBody>
-      </p:sp>
-      <p:sp>
-        <p:nvSpPr>
-          <p:cNvPr id="9" name="Rounded Rectangle 8"/>
-          <p:cNvSpPr/>
-          <p:nvPr/>
-        </p:nvSpPr>
-        <p:spPr>
-          <a:xfrm>
-            <a:off x="548640" y="2240280"/>
-            <a:ext cx="10972800" cy="3977639"/>
-          </a:xfrm>
-          <a:prstGeom prst="roundRect">
-            <a:avLst>
-              <a:gd name="adj" fmla="val 10000"/>
-            </a:avLst>
-          </a:prstGeom>
-          <a:solidFill>
-            <a:srgbClr val="EEE8FA"/>
-          </a:solidFill>
-          <a:ln>
-            <a:noFill/>
-          </a:ln>
-          <a:effectLst/>
-        </p:spPr>
-        <p:style>
-          <a:lnRef idx="1">
-            <a:schemeClr val="accent1"/>
-          </a:lnRef>
-          <a:fillRef idx="3">
-            <a:schemeClr val="accent1"/>
-          </a:fillRef>
-          <a:effectRef idx="2">
-            <a:schemeClr val="accent1"/>
-          </a:effectRef>
-          <a:fontRef idx="minor">
-            <a:schemeClr val="lt1"/>
-          </a:fontRef>
-        </p:style>
-        <p:txBody>
-          <a:bodyPr rtlCol="0" anchor="ctr"/>
-          <a:lstStyle/>
-          <a:p>
-            <a:pPr algn="ctr"/>
-          </a:p>
-        </p:txBody>
-      </p:sp>
-      <p:pic>
-        <p:nvPicPr>
-          <p:cNvPr id="10" name="Picture 9" descr="cnn-stack.png"/>
-          <p:cNvPicPr>
-            <a:picLocks noChangeAspect="1"/>
-          </p:cNvPicPr>
-          <p:nvPr/>
-        </p:nvPicPr>
-        <p:blipFill>
-          <a:blip r:embed="rId3"/>
-          <a:stretch>
-            <a:fillRect/>
-          </a:stretch>
-        </p:blipFill>
-        <p:spPr>
-          <a:xfrm>
-            <a:off x="731520" y="2377440"/>
-            <a:ext cx="10607040" cy="3639993"/>
-          </a:xfrm>
-          <a:prstGeom prst="rect">
-            <a:avLst/>
-          </a:prstGeom>
-        </p:spPr>
-      </p:pic>
-      <p:sp>
-        <p:nvSpPr>
-          <p:cNvPr id="11" name="TextBox 10"/>
-          <p:cNvSpPr txBox="1"/>
-          <p:nvPr/>
-        </p:nvSpPr>
-        <p:spPr>
-          <a:xfrm>
-            <a:off x="548640" y="6309360"/>
-            <a:ext cx="10972800" cy="228600"/>
-          </a:xfrm>
-          <a:prstGeom prst="rect">
-            <a:avLst/>
-          </a:prstGeom>
-          <a:noFill/>
-        </p:spPr>
-        <p:txBody>
-          <a:bodyPr wrap="square" anchor="t">
-            <a:spAutoFit/>
-          </a:bodyPr>
-          <a:lstStyle/>
-          <a:p>
-            <a:pPr algn="l"/>
-            <a:r>
-              <a:rPr sz="1100" b="0">
-                <a:solidFill>
-                  <a:srgbClr val="5A5470"/>
-                </a:solidFill>
-                <a:latin typeface="DIN Next LT W23"/>
-                <a:ea typeface="DIN Next LT W23"/>
-                <a:cs typeface="DIN Next LT W23"/>
-              </a:rPr>
-              <a:t>Max-pool keeps the strongest local response and shrinks the map.</a:t>
-            </a:r>
-          </a:p>
-        </p:txBody>
-      </p:sp>
-      <p:sp>
-        <p:nvSpPr>
-          <p:cNvPr id="12" name="Rectangle 11"/>
-          <p:cNvSpPr/>
-          <p:nvPr/>
-        </p:nvSpPr>
-        <p:spPr>
-          <a:xfrm>
-            <a:off x="548640" y="6446520"/>
-            <a:ext cx="11064240" cy="10972"/>
-          </a:xfrm>
-          <a:prstGeom prst="rect">
-            <a:avLst/>
-          </a:prstGeom>
-          <a:solidFill>
-            <a:srgbClr val="5234B7"/>
-          </a:solidFill>
-          <a:ln>
-            <a:noFill/>
-          </a:ln>
-          <a:effectLst/>
-        </p:spPr>
-        <p:style>
-          <a:lnRef idx="1">
-            <a:schemeClr val="accent1"/>
-          </a:lnRef>
-          <a:fillRef idx="3">
-            <a:schemeClr val="accent1"/>
-          </a:fillRef>
-          <a:effectRef idx="2">
-            <a:schemeClr val="accent1"/>
-          </a:effectRef>
-          <a:fontRef idx="minor">
-            <a:schemeClr val="lt1"/>
-          </a:fontRef>
-        </p:style>
-        <p:txBody>
-          <a:bodyPr rtlCol="0" anchor="ctr"/>
-          <a:lstStyle/>
-          <a:p>
-            <a:pPr algn="ctr"/>
-          </a:p>
-        </p:txBody>
-      </p:sp>
-      <p:sp>
-        <p:nvSpPr>
-          <p:cNvPr id="13" name="TextBox 12"/>
-          <p:cNvSpPr txBox="1"/>
-          <p:nvPr/>
-        </p:nvSpPr>
-        <p:spPr>
-          <a:xfrm>
-            <a:off x="548640" y="6510528"/>
-            <a:ext cx="2743200" cy="256032"/>
-          </a:xfrm>
-          <a:prstGeom prst="rect">
-            <a:avLst/>
-          </a:prstGeom>
-          <a:noFill/>
-        </p:spPr>
-        <p:txBody>
-          <a:bodyPr wrap="square" anchor="t">
-            <a:spAutoFit/>
-          </a:bodyPr>
-          <a:lstStyle/>
-          <a:p>
-            <a:pPr algn="l"/>
-            <a:r>
-              <a:rPr sz="1100" b="1">
-                <a:solidFill>
-                  <a:srgbClr val="5234B7"/>
-                </a:solidFill>
-                <a:latin typeface="DIN Next LT W23"/>
-                <a:ea typeface="DIN Next LT W23"/>
-                <a:cs typeface="DIN Next LT W23"/>
-              </a:rPr>
-              <a:t>ETRA</a:t>
-            </a:r>
-          </a:p>
-        </p:txBody>
-      </p:sp>
-      <p:sp>
-        <p:nvSpPr>
-          <p:cNvPr id="14" name="TextBox 13"/>
-          <p:cNvSpPr txBox="1"/>
-          <p:nvPr/>
-        </p:nvSpPr>
-        <p:spPr>
-          <a:xfrm>
-            <a:off x="9601200" y="6510528"/>
-            <a:ext cx="2011680" cy="256032"/>
-          </a:xfrm>
-          <a:prstGeom prst="rect">
-            <a:avLst/>
-          </a:prstGeom>
-          <a:noFill/>
-        </p:spPr>
-        <p:txBody>
-          <a:bodyPr wrap="square" anchor="t">
-            <a:spAutoFit/>
-          </a:bodyPr>
-          <a:lstStyle/>
-          <a:p>
-            <a:pPr algn="r"/>
-            <a:r>
-              <a:rPr sz="1100" b="0">
-                <a:solidFill>
-                  <a:srgbClr val="5A5470"/>
-                </a:solidFill>
-                <a:latin typeface="DIN Next LT W23"/>
-                <a:ea typeface="DIN Next LT W23"/>
-                <a:cs typeface="DIN Next LT W23"/>
-              </a:rPr>
-              <a:t>66  /  79</a:t>
-            </a:r>
-          </a:p>
-        </p:txBody>
-      </p:sp>
-    </p:spTree>
-  </p:cSld>
-  <p:clrMapOvr>
-    <a:masterClrMapping/>
-  </p:clrMapOvr>
-</p:sld>
-</file>
-
-<file path=ppt/slides/slide67.xml><?xml version="1.0" encoding="utf-8"?>
-<p:sld xmlns:a="http://schemas.openxmlformats.org/drawingml/2006/main" xmlns:p="http://schemas.openxmlformats.org/presentationml/2006/main" xmlns:r="http://schemas.openxmlformats.org/officeDocument/2006/relationships">
-  <p:cSld>
-    <p:bg>
-      <p:bgPr>
-        <a:solidFill>
-          <a:srgbClr val="FAF8FF"/>
-        </a:solidFill>
-        <a:effectLst/>
-      </p:bgPr>
-    </p:bg>
-    <p:spTree>
-      <p:nvGrpSpPr>
-        <p:cNvPr id="1" name=""/>
-        <p:cNvGrpSpPr/>
-        <p:nvPr/>
-      </p:nvGrpSpPr>
-      <p:grpSpPr/>
-      <p:sp>
-        <p:nvSpPr>
-          <p:cNvPr id="2" name="Rectangle 1"/>
-          <p:cNvSpPr/>
-          <p:nvPr/>
-        </p:nvSpPr>
-        <p:spPr>
-          <a:xfrm>
-            <a:off x="12136831" y="0"/>
-            <a:ext cx="54864" cy="6858000"/>
-          </a:xfrm>
-          <a:prstGeom prst="rect">
-            <a:avLst/>
-          </a:prstGeom>
-          <a:solidFill>
-            <a:srgbClr val="5234B7"/>
-          </a:solidFill>
-          <a:ln>
-            <a:noFill/>
-          </a:ln>
-          <a:effectLst/>
-        </p:spPr>
-        <p:style>
-          <a:lnRef idx="1">
-            <a:schemeClr val="accent1"/>
-          </a:lnRef>
-          <a:fillRef idx="3">
-            <a:schemeClr val="accent1"/>
-          </a:fillRef>
-          <a:effectRef idx="2">
-            <a:schemeClr val="accent1"/>
-          </a:effectRef>
-          <a:fontRef idx="minor">
-            <a:schemeClr val="lt1"/>
-          </a:fontRef>
-        </p:style>
-        <p:txBody>
-          <a:bodyPr rtlCol="0" anchor="ctr"/>
-          <a:lstStyle/>
-          <a:p>
-            <a:pPr algn="ctr"/>
-          </a:p>
-        </p:txBody>
-      </p:sp>
-      <p:pic>
-        <p:nvPicPr>
-          <p:cNvPr id="3" name="Picture 2" descr="etra-wordmark.png"/>
-          <p:cNvPicPr>
-            <a:picLocks noChangeAspect="1"/>
-          </p:cNvPicPr>
-          <p:nvPr/>
-        </p:nvPicPr>
-        <p:blipFill>
-          <a:blip r:embed="rId2"/>
-          <a:stretch>
-            <a:fillRect/>
-          </a:stretch>
-        </p:blipFill>
-        <p:spPr>
-          <a:xfrm>
-            <a:off x="10561320" y="411480"/>
-            <a:ext cx="1206201" cy="320040"/>
-          </a:xfrm>
-          <a:prstGeom prst="rect">
-            <a:avLst/>
-          </a:prstGeom>
-        </p:spPr>
-      </p:pic>
-      <p:sp>
-        <p:nvSpPr>
-          <p:cNvPr id="4" name="TextBox 3"/>
-          <p:cNvSpPr txBox="1"/>
-          <p:nvPr/>
-        </p:nvSpPr>
-        <p:spPr>
-          <a:xfrm>
-            <a:off x="548640" y="438912"/>
-            <a:ext cx="7772400" cy="274320"/>
-          </a:xfrm>
-          <a:prstGeom prst="rect">
-            <a:avLst/>
-          </a:prstGeom>
-          <a:noFill/>
-        </p:spPr>
-        <p:txBody>
-          <a:bodyPr wrap="square" anchor="t">
-            <a:spAutoFit/>
-          </a:bodyPr>
-          <a:lstStyle/>
-          <a:p>
-            <a:pPr algn="l"/>
-            <a:r>
-              <a:rPr sz="1200" b="0">
-                <a:solidFill>
-                  <a:srgbClr val="5A5470"/>
-                </a:solidFill>
-                <a:latin typeface="DIN Next LT W23"/>
-                <a:ea typeface="DIN Next LT W23"/>
-                <a:cs typeface="DIN Next LT W23"/>
-              </a:rPr>
-              <a:t>S07  ·  Deep Learning</a:t>
-            </a:r>
-          </a:p>
-        </p:txBody>
-      </p:sp>
-      <p:sp>
-        <p:nvSpPr>
-          <p:cNvPr id="5" name="Rectangle 4"/>
-          <p:cNvSpPr/>
-          <p:nvPr/>
-        </p:nvSpPr>
-        <p:spPr>
-          <a:xfrm>
-            <a:off x="548640" y="822960"/>
-            <a:ext cx="11064240" cy="10972"/>
-          </a:xfrm>
-          <a:prstGeom prst="rect">
-            <a:avLst/>
-          </a:prstGeom>
-          <a:solidFill>
-            <a:srgbClr val="E4DCF4"/>
-          </a:solidFill>
-          <a:ln>
-            <a:noFill/>
-          </a:ln>
-          <a:effectLst/>
-        </p:spPr>
-        <p:style>
-          <a:lnRef idx="1">
-            <a:schemeClr val="accent1"/>
-          </a:lnRef>
-          <a:fillRef idx="3">
-            <a:schemeClr val="accent1"/>
-          </a:fillRef>
-          <a:effectRef idx="2">
-            <a:schemeClr val="accent1"/>
-          </a:effectRef>
-          <a:fontRef idx="minor">
-            <a:schemeClr val="lt1"/>
-          </a:fontRef>
-        </p:style>
-        <p:txBody>
-          <a:bodyPr rtlCol="0" anchor="ctr"/>
-          <a:lstStyle/>
-          <a:p>
-            <a:pPr algn="ctr"/>
-          </a:p>
-        </p:txBody>
-      </p:sp>
-      <p:sp>
-        <p:nvSpPr>
-          <p:cNvPr id="6" name="TextBox 5"/>
-          <p:cNvSpPr txBox="1"/>
-          <p:nvPr/>
-        </p:nvSpPr>
-        <p:spPr>
-          <a:xfrm>
-            <a:off x="548640" y="1051560"/>
-            <a:ext cx="10241280" cy="594360"/>
-          </a:xfrm>
-          <a:prstGeom prst="rect">
-            <a:avLst/>
-          </a:prstGeom>
-          <a:noFill/>
-        </p:spPr>
-        <p:txBody>
-          <a:bodyPr wrap="square" anchor="t">
-            <a:spAutoFit/>
-          </a:bodyPr>
-          <a:lstStyle/>
-          <a:p>
-            <a:pPr algn="l"/>
-            <a:r>
-              <a:rPr sz="3200" b="1">
-                <a:solidFill>
-                  <a:srgbClr val="5234B7"/>
-                </a:solidFill>
-                <a:latin typeface="DIN Next LT W23"/>
-                <a:ea typeface="DIN Next LT W23"/>
-                <a:cs typeface="DIN Next LT W23"/>
-              </a:rPr>
-              <a:t>Residual Block</a:t>
-            </a:r>
-          </a:p>
-        </p:txBody>
-      </p:sp>
-      <p:sp>
-        <p:nvSpPr>
-          <p:cNvPr id="7" name="TextBox 6"/>
-          <p:cNvSpPr txBox="1"/>
-          <p:nvPr/>
-        </p:nvSpPr>
-        <p:spPr>
-          <a:xfrm>
-            <a:off x="548640" y="1600200"/>
-            <a:ext cx="10241280" cy="365760"/>
-          </a:xfrm>
-          <a:prstGeom prst="rect">
-            <a:avLst/>
-          </a:prstGeom>
-          <a:noFill/>
-        </p:spPr>
-        <p:txBody>
-          <a:bodyPr wrap="square" anchor="t">
-            <a:spAutoFit/>
-          </a:bodyPr>
-          <a:lstStyle/>
-          <a:p>
-            <a:pPr algn="l"/>
-            <a:r>
-              <a:rPr sz="1500" b="0">
-                <a:solidFill>
-                  <a:srgbClr val="5A5470"/>
-                </a:solidFill>
-                <a:latin typeface="DIN Next LT W23"/>
-                <a:ea typeface="DIN Next LT W23"/>
-                <a:cs typeface="DIN Next LT W23"/>
-              </a:rPr>
-              <a:t>Learn F(x), Keep an Identity Path</a:t>
-            </a:r>
-          </a:p>
-        </p:txBody>
-      </p:sp>
-      <p:sp>
-        <p:nvSpPr>
-          <p:cNvPr id="8" name="Rounded Rectangle 7"/>
-          <p:cNvSpPr/>
-          <p:nvPr/>
-        </p:nvSpPr>
-        <p:spPr>
-          <a:xfrm>
-            <a:off x="548640" y="1965960"/>
-            <a:ext cx="10972800" cy="640080"/>
-          </a:xfrm>
-          <a:prstGeom prst="roundRect">
-            <a:avLst>
-              <a:gd name="adj" fmla="val 10000"/>
-            </a:avLst>
-          </a:prstGeom>
-          <a:solidFill>
-            <a:srgbClr val="EEE8FA"/>
-          </a:solidFill>
-          <a:ln>
-            <a:noFill/>
-          </a:ln>
-          <a:effectLst/>
-        </p:spPr>
-        <p:style>
-          <a:lnRef idx="1">
-            <a:schemeClr val="accent1"/>
-          </a:lnRef>
-          <a:fillRef idx="3">
-            <a:schemeClr val="accent1"/>
-          </a:fillRef>
-          <a:effectRef idx="2">
-            <a:schemeClr val="accent1"/>
-          </a:effectRef>
-          <a:fontRef idx="minor">
-            <a:schemeClr val="lt1"/>
-          </a:fontRef>
-        </p:style>
-        <p:txBody>
-          <a:bodyPr rtlCol="0" anchor="ctr"/>
-          <a:lstStyle/>
-          <a:p>
-            <a:pPr algn="ctr"/>
-          </a:p>
-        </p:txBody>
-      </p:sp>
-      <p:sp>
-        <p:nvSpPr>
-          <p:cNvPr id="9" name="TextBox 8"/>
-          <p:cNvSpPr txBox="1"/>
-          <p:nvPr/>
-        </p:nvSpPr>
-        <p:spPr>
-          <a:xfrm>
-            <a:off x="868680" y="2084831"/>
-            <a:ext cx="10332720" cy="411480"/>
-          </a:xfrm>
-          <a:prstGeom prst="rect">
-            <a:avLst/>
-          </a:prstGeom>
-          <a:noFill/>
-        </p:spPr>
-        <p:txBody>
-          <a:bodyPr wrap="square" anchor="t">
-            <a:spAutoFit/>
-          </a:bodyPr>
-          <a:lstStyle/>
-          <a:p>
-            <a:pPr algn="l"/>
-            <a:r>
-              <a:rPr sz="1400" b="0">
-                <a:solidFill>
-                  <a:srgbClr val="121018"/>
-                </a:solidFill>
-                <a:latin typeface="DIN Next LT W23"/>
-                <a:ea typeface="DIN Next LT W23"/>
-                <a:cs typeface="DIN Next LT W23"/>
-              </a:rPr>
-              <a:t>Skip connections let gradients flow backward through identity — this is how 100+ layer nets train.</a:t>
-            </a:r>
-          </a:p>
-        </p:txBody>
-      </p:sp>
-      <p:sp>
-        <p:nvSpPr>
-          <p:cNvPr id="10" name="Rounded Rectangle 9"/>
-          <p:cNvSpPr/>
-          <p:nvPr/>
-        </p:nvSpPr>
-        <p:spPr>
-          <a:xfrm>
-            <a:off x="548640" y="2743200"/>
-            <a:ext cx="10972800" cy="1417320"/>
-          </a:xfrm>
-          <a:prstGeom prst="roundRect">
-            <a:avLst>
-              <a:gd name="adj" fmla="val 10000"/>
-            </a:avLst>
-          </a:prstGeom>
-          <a:solidFill>
-            <a:srgbClr val="EEE8FA"/>
-          </a:solidFill>
-          <a:ln>
-            <a:noFill/>
-          </a:ln>
-          <a:effectLst/>
-        </p:spPr>
-        <p:style>
-          <a:lnRef idx="1">
-            <a:schemeClr val="accent1"/>
-          </a:lnRef>
-          <a:fillRef idx="3">
-            <a:schemeClr val="accent1"/>
-          </a:fillRef>
-          <a:effectRef idx="2">
-            <a:schemeClr val="accent1"/>
-          </a:effectRef>
-          <a:fontRef idx="minor">
-            <a:schemeClr val="lt1"/>
-          </a:fontRef>
-        </p:style>
-        <p:txBody>
-          <a:bodyPr rtlCol="0" anchor="ctr"/>
-          <a:lstStyle/>
-          <a:p>
-            <a:pPr algn="ctr"/>
-          </a:p>
-        </p:txBody>
-      </p:sp>
-      <p:pic>
-        <p:nvPicPr>
-          <p:cNvPr id="11" name="Picture 10" descr="f-2b076bcbaf5e0bf9.png"/>
-          <p:cNvPicPr>
-            <a:picLocks noChangeAspect="1"/>
-          </p:cNvPicPr>
-          <p:nvPr/>
-        </p:nvPicPr>
-        <p:blipFill>
-          <a:blip r:embed="rId3"/>
-          <a:stretch>
-            <a:fillRect/>
-          </a:stretch>
-        </p:blipFill>
-        <p:spPr>
-          <a:xfrm>
-            <a:off x="4440086" y="2852928"/>
-            <a:ext cx="3189906" cy="868679"/>
-          </a:xfrm>
-          <a:prstGeom prst="rect">
-            <a:avLst/>
-          </a:prstGeom>
-        </p:spPr>
-      </p:pic>
-      <p:sp>
-        <p:nvSpPr>
-          <p:cNvPr id="12" name="TextBox 11"/>
-          <p:cNvSpPr txBox="1"/>
-          <p:nvPr/>
-        </p:nvSpPr>
-        <p:spPr>
-          <a:xfrm>
-            <a:off x="914400" y="3840480"/>
-            <a:ext cx="10241280" cy="256032"/>
-          </a:xfrm>
-          <a:prstGeom prst="rect">
-            <a:avLst/>
-          </a:prstGeom>
-          <a:noFill/>
-        </p:spPr>
-        <p:txBody>
-          <a:bodyPr wrap="square" anchor="t">
-            <a:spAutoFit/>
-          </a:bodyPr>
-          <a:lstStyle/>
-          <a:p>
-            <a:pPr algn="ctr"/>
-            <a:r>
-              <a:rPr sz="1200" b="0">
-                <a:solidFill>
-                  <a:srgbClr val="5A5470"/>
-                </a:solidFill>
-                <a:latin typeface="DIN Next LT W23"/>
-                <a:ea typeface="DIN Next LT W23"/>
-                <a:cs typeface="DIN Next LT W23"/>
-              </a:rPr>
-              <a:t>The block learns the residual F; x is copied forward</a:t>
-            </a:r>
-          </a:p>
-        </p:txBody>
-      </p:sp>
-      <p:sp>
-        <p:nvSpPr>
-          <p:cNvPr id="13" name="TextBox 12"/>
-          <p:cNvSpPr txBox="1"/>
-          <p:nvPr/>
-        </p:nvSpPr>
-        <p:spPr>
-          <a:xfrm>
-            <a:off x="548640" y="4270248"/>
-            <a:ext cx="320040" cy="384048"/>
-          </a:xfrm>
-          <a:prstGeom prst="rect">
-            <a:avLst/>
-          </a:prstGeom>
-          <a:noFill/>
-        </p:spPr>
-        <p:txBody>
-          <a:bodyPr wrap="square" anchor="t">
-            <a:spAutoFit/>
-          </a:bodyPr>
-          <a:lstStyle/>
-          <a:p>
-            <a:pPr algn="l"/>
-            <a:r>
-              <a:rPr sz="1300" b="0">
-                <a:solidFill>
-                  <a:srgbClr val="9E59CD"/>
-                </a:solidFill>
-                <a:latin typeface="DIN Next LT W23"/>
-                <a:ea typeface="DIN Next LT W23"/>
-                <a:cs typeface="DIN Next LT W23"/>
-              </a:rPr>
-              <a:t>–</a:t>
-            </a:r>
-          </a:p>
-        </p:txBody>
-      </p:sp>
-      <p:sp>
-        <p:nvSpPr>
-          <p:cNvPr id="14" name="TextBox 13"/>
-          <p:cNvSpPr txBox="1"/>
-          <p:nvPr/>
-        </p:nvSpPr>
-        <p:spPr>
-          <a:xfrm>
-            <a:off x="914400" y="4270248"/>
-            <a:ext cx="9875519" cy="384048"/>
-          </a:xfrm>
-          <a:prstGeom prst="rect">
-            <a:avLst/>
-          </a:prstGeom>
-          <a:noFill/>
-        </p:spPr>
-        <p:txBody>
-          <a:bodyPr wrap="square" anchor="t">
-            <a:spAutoFit/>
-          </a:bodyPr>
-          <a:lstStyle/>
-          <a:p>
-            <a:pPr algn="l"/>
-            <a:r>
-              <a:rPr sz="1300" b="0">
-                <a:solidFill>
-                  <a:srgbClr val="121018"/>
-                </a:solidFill>
-                <a:latin typeface="DIN Next LT W23"/>
-                <a:ea typeface="DIN Next LT W23"/>
-                <a:cs typeface="DIN Next LT W23"/>
-              </a:rPr>
-              <a:t>AlexNet (2012): scale + ReLU + dropout + GPUs on ImageNet.</a:t>
-            </a:r>
-          </a:p>
-        </p:txBody>
-      </p:sp>
-      <p:sp>
-        <p:nvSpPr>
-          <p:cNvPr id="15" name="TextBox 14"/>
-          <p:cNvSpPr txBox="1"/>
-          <p:nvPr/>
-        </p:nvSpPr>
-        <p:spPr>
-          <a:xfrm>
-            <a:off x="548640" y="4690872"/>
-            <a:ext cx="320040" cy="384048"/>
-          </a:xfrm>
-          <a:prstGeom prst="rect">
-            <a:avLst/>
-          </a:prstGeom>
-          <a:noFill/>
-        </p:spPr>
-        <p:txBody>
-          <a:bodyPr wrap="square" anchor="t">
-            <a:spAutoFit/>
-          </a:bodyPr>
-          <a:lstStyle/>
-          <a:p>
-            <a:pPr algn="l"/>
-            <a:r>
-              <a:rPr sz="1300" b="0">
-                <a:solidFill>
-                  <a:srgbClr val="9E59CD"/>
-                </a:solidFill>
-                <a:latin typeface="DIN Next LT W23"/>
-                <a:ea typeface="DIN Next LT W23"/>
-                <a:cs typeface="DIN Next LT W23"/>
-              </a:rPr>
-              <a:t>–</a:t>
-            </a:r>
-          </a:p>
-        </p:txBody>
-      </p:sp>
-      <p:sp>
-        <p:nvSpPr>
-          <p:cNvPr id="16" name="TextBox 15"/>
-          <p:cNvSpPr txBox="1"/>
-          <p:nvPr/>
-        </p:nvSpPr>
-        <p:spPr>
-          <a:xfrm>
-            <a:off x="914400" y="4690872"/>
-            <a:ext cx="9875519" cy="384048"/>
-          </a:xfrm>
-          <a:prstGeom prst="rect">
-            <a:avLst/>
-          </a:prstGeom>
-          <a:noFill/>
-        </p:spPr>
-        <p:txBody>
-          <a:bodyPr wrap="square" anchor="t">
-            <a:spAutoFit/>
-          </a:bodyPr>
-          <a:lstStyle/>
-          <a:p>
-            <a:pPr algn="l"/>
-            <a:r>
-              <a:rPr sz="1300" b="0">
-                <a:solidFill>
-                  <a:srgbClr val="121018"/>
-                </a:solidFill>
-                <a:latin typeface="DIN Next LT W23"/>
-                <a:ea typeface="DIN Next LT W23"/>
-                <a:cs typeface="DIN Next LT W23"/>
-              </a:rPr>
-              <a:t>ResNet (2015): residual mapping F(x)+x; skip paths help gradients.</a:t>
-            </a:r>
-          </a:p>
-        </p:txBody>
-      </p:sp>
-      <p:sp>
-        <p:nvSpPr>
-          <p:cNvPr id="17" name="TextBox 16"/>
-          <p:cNvSpPr txBox="1"/>
-          <p:nvPr/>
-        </p:nvSpPr>
-        <p:spPr>
-          <a:xfrm>
-            <a:off x="548640" y="5989320"/>
-            <a:ext cx="10972800" cy="228600"/>
-          </a:xfrm>
-          <a:prstGeom prst="rect">
-            <a:avLst/>
-          </a:prstGeom>
-          <a:noFill/>
-        </p:spPr>
-        <p:txBody>
-          <a:bodyPr wrap="square" anchor="t">
-            <a:spAutoFit/>
-          </a:bodyPr>
-          <a:lstStyle/>
-          <a:p>
-            <a:pPr algn="l"/>
-            <a:r>
-              <a:rPr sz="1200" b="0">
-                <a:solidFill>
-                  <a:srgbClr val="5A5470"/>
-                </a:solidFill>
-                <a:latin typeface="DIN Next LT W23"/>
-                <a:ea typeface="DIN Next LT W23"/>
-                <a:cs typeface="DIN Next LT W23"/>
-              </a:rPr>
-              <a:t>If F learns zero, the block still acts as identity — easier than learning identity from scratch.</a:t>
-            </a:r>
-          </a:p>
-        </p:txBody>
-      </p:sp>
-      <p:sp>
-        <p:nvSpPr>
-          <p:cNvPr id="18" name="Rectangle 17"/>
-          <p:cNvSpPr/>
-          <p:nvPr/>
-        </p:nvSpPr>
-        <p:spPr>
-          <a:xfrm>
-            <a:off x="548640" y="6446520"/>
-            <a:ext cx="11064240" cy="10972"/>
-          </a:xfrm>
-          <a:prstGeom prst="rect">
-            <a:avLst/>
-          </a:prstGeom>
-          <a:solidFill>
-            <a:srgbClr val="5234B7"/>
-          </a:solidFill>
-          <a:ln>
-            <a:noFill/>
-          </a:ln>
-          <a:effectLst/>
-        </p:spPr>
-        <p:style>
-          <a:lnRef idx="1">
-            <a:schemeClr val="accent1"/>
-          </a:lnRef>
-          <a:fillRef idx="3">
-            <a:schemeClr val="accent1"/>
-          </a:fillRef>
-          <a:effectRef idx="2">
-            <a:schemeClr val="accent1"/>
-          </a:effectRef>
-          <a:fontRef idx="minor">
-            <a:schemeClr val="lt1"/>
-          </a:fontRef>
-        </p:style>
-        <p:txBody>
-          <a:bodyPr rtlCol="0" anchor="ctr"/>
-          <a:lstStyle/>
-          <a:p>
-            <a:pPr algn="ctr"/>
-          </a:p>
-        </p:txBody>
-      </p:sp>
-      <p:sp>
-        <p:nvSpPr>
-          <p:cNvPr id="19" name="TextBox 18"/>
-          <p:cNvSpPr txBox="1"/>
-          <p:nvPr/>
-        </p:nvSpPr>
-        <p:spPr>
-          <a:xfrm>
-            <a:off x="548640" y="6510528"/>
-            <a:ext cx="2743200" cy="256032"/>
-          </a:xfrm>
-          <a:prstGeom prst="rect">
-            <a:avLst/>
-          </a:prstGeom>
-          <a:noFill/>
-        </p:spPr>
-        <p:txBody>
-          <a:bodyPr wrap="square" anchor="t">
-            <a:spAutoFit/>
-          </a:bodyPr>
-          <a:lstStyle/>
-          <a:p>
-            <a:pPr algn="l"/>
-            <a:r>
-              <a:rPr sz="1100" b="1">
-                <a:solidFill>
-                  <a:srgbClr val="5234B7"/>
-                </a:solidFill>
-                <a:latin typeface="DIN Next LT W23"/>
-                <a:ea typeface="DIN Next LT W23"/>
-                <a:cs typeface="DIN Next LT W23"/>
-              </a:rPr>
-              <a:t>ETRA</a:t>
-            </a:r>
-          </a:p>
-        </p:txBody>
-      </p:sp>
-      <p:sp>
-        <p:nvSpPr>
-          <p:cNvPr id="20" name="TextBox 19"/>
-          <p:cNvSpPr txBox="1"/>
-          <p:nvPr/>
-        </p:nvSpPr>
-        <p:spPr>
-          <a:xfrm>
-            <a:off x="9601200" y="6510528"/>
-            <a:ext cx="2011680" cy="256032"/>
-          </a:xfrm>
-          <a:prstGeom prst="rect">
-            <a:avLst/>
-          </a:prstGeom>
-          <a:noFill/>
-        </p:spPr>
-        <p:txBody>
-          <a:bodyPr wrap="square" anchor="t">
-            <a:spAutoFit/>
-          </a:bodyPr>
-          <a:lstStyle/>
-          <a:p>
-            <a:pPr algn="r"/>
-            <a:r>
-              <a:rPr sz="1100" b="0">
-                <a:solidFill>
-                  <a:srgbClr val="5A5470"/>
-                </a:solidFill>
-                <a:latin typeface="DIN Next LT W23"/>
-                <a:ea typeface="DIN Next LT W23"/>
-                <a:cs typeface="DIN Next LT W23"/>
-              </a:rPr>
-              <a:t>67  /  79</a:t>
-            </a:r>
-          </a:p>
-        </p:txBody>
-      </p:sp>
-    </p:spTree>
-  </p:cSld>
-  <p:clrMapOvr>
-    <a:masterClrMapping/>
-  </p:clrMapOvr>
-</p:sld>
-</file>
-
-<file path=ppt/slides/slide68.xml><?xml version="1.0" encoding="utf-8"?>
-<p:sld xmlns:a="http://schemas.openxmlformats.org/drawingml/2006/main" xmlns:p="http://schemas.openxmlformats.org/presentationml/2006/main" xmlns:r="http://schemas.openxmlformats.org/officeDocument/2006/relationships">
-  <p:cSld>
-    <p:bg>
-      <p:bgPr>
-        <a:solidFill>
-          <a:srgbClr val="FAF8FF"/>
-        </a:solidFill>
-        <a:effectLst/>
-      </p:bgPr>
-    </p:bg>
-    <p:spTree>
-      <p:nvGrpSpPr>
-        <p:cNvPr id="1" name=""/>
-        <p:cNvGrpSpPr/>
-        <p:nvPr/>
-      </p:nvGrpSpPr>
-      <p:grpSpPr/>
-      <p:sp>
-        <p:nvSpPr>
-          <p:cNvPr id="2" name="Rectangle 1"/>
-          <p:cNvSpPr/>
-          <p:nvPr/>
-        </p:nvSpPr>
-        <p:spPr>
-          <a:xfrm>
-            <a:off x="12136831" y="0"/>
-            <a:ext cx="54864" cy="6858000"/>
-          </a:xfrm>
-          <a:prstGeom prst="rect">
-            <a:avLst/>
-          </a:prstGeom>
-          <a:solidFill>
-            <a:srgbClr val="5234B7"/>
-          </a:solidFill>
-          <a:ln>
-            <a:noFill/>
-          </a:ln>
-          <a:effectLst/>
-        </p:spPr>
-        <p:style>
-          <a:lnRef idx="1">
-            <a:schemeClr val="accent1"/>
-          </a:lnRef>
-          <a:fillRef idx="3">
-            <a:schemeClr val="accent1"/>
-          </a:fillRef>
-          <a:effectRef idx="2">
-            <a:schemeClr val="accent1"/>
-          </a:effectRef>
-          <a:fontRef idx="minor">
-            <a:schemeClr val="lt1"/>
-          </a:fontRef>
-        </p:style>
-        <p:txBody>
-          <a:bodyPr rtlCol="0" anchor="ctr"/>
-          <a:lstStyle/>
-          <a:p>
-            <a:pPr algn="ctr"/>
-          </a:p>
-        </p:txBody>
-      </p:sp>
-      <p:pic>
-        <p:nvPicPr>
-          <p:cNvPr id="3" name="Picture 2" descr="etra-wordmark.png"/>
-          <p:cNvPicPr>
-            <a:picLocks noChangeAspect="1"/>
-          </p:cNvPicPr>
-          <p:nvPr/>
-        </p:nvPicPr>
-        <p:blipFill>
-          <a:blip r:embed="rId2"/>
-          <a:stretch>
-            <a:fillRect/>
-          </a:stretch>
-        </p:blipFill>
-        <p:spPr>
-          <a:xfrm>
-            <a:off x="10561320" y="411480"/>
-            <a:ext cx="1206201" cy="320040"/>
-          </a:xfrm>
-          <a:prstGeom prst="rect">
-            <a:avLst/>
-          </a:prstGeom>
-        </p:spPr>
-      </p:pic>
-      <p:sp>
-        <p:nvSpPr>
-          <p:cNvPr id="4" name="TextBox 3"/>
-          <p:cNvSpPr txBox="1"/>
-          <p:nvPr/>
-        </p:nvSpPr>
-        <p:spPr>
-          <a:xfrm>
-            <a:off x="548640" y="438912"/>
-            <a:ext cx="7772400" cy="274320"/>
-          </a:xfrm>
-          <a:prstGeom prst="rect">
-            <a:avLst/>
-          </a:prstGeom>
-          <a:noFill/>
-        </p:spPr>
-        <p:txBody>
-          <a:bodyPr wrap="square" anchor="t">
-            <a:spAutoFit/>
-          </a:bodyPr>
-          <a:lstStyle/>
-          <a:p>
-            <a:pPr algn="l"/>
-            <a:r>
-              <a:rPr sz="1200" b="0">
-                <a:solidFill>
-                  <a:srgbClr val="5A5470"/>
-                </a:solidFill>
-                <a:latin typeface="DIN Next LT W23"/>
-                <a:ea typeface="DIN Next LT W23"/>
-                <a:cs typeface="DIN Next LT W23"/>
-              </a:rPr>
-              <a:t>S07  ·  Deep Learning</a:t>
-            </a:r>
-          </a:p>
-        </p:txBody>
-      </p:sp>
-      <p:sp>
-        <p:nvSpPr>
-          <p:cNvPr id="5" name="Rectangle 4"/>
-          <p:cNvSpPr/>
-          <p:nvPr/>
-        </p:nvSpPr>
-        <p:spPr>
-          <a:xfrm>
-            <a:off x="548640" y="822960"/>
-            <a:ext cx="11064240" cy="10972"/>
-          </a:xfrm>
-          <a:prstGeom prst="rect">
-            <a:avLst/>
-          </a:prstGeom>
-          <a:solidFill>
-            <a:srgbClr val="E4DCF4"/>
-          </a:solidFill>
-          <a:ln>
-            <a:noFill/>
-          </a:ln>
-          <a:effectLst/>
-        </p:spPr>
-        <p:style>
-          <a:lnRef idx="1">
-            <a:schemeClr val="accent1"/>
-          </a:lnRef>
-          <a:fillRef idx="3">
-            <a:schemeClr val="accent1"/>
-          </a:fillRef>
-          <a:effectRef idx="2">
-            <a:schemeClr val="accent1"/>
-          </a:effectRef>
-          <a:fontRef idx="minor">
-            <a:schemeClr val="lt1"/>
-          </a:fontRef>
-        </p:style>
-        <p:txBody>
-          <a:bodyPr rtlCol="0" anchor="ctr"/>
-          <a:lstStyle/>
-          <a:p>
-            <a:pPr algn="ctr"/>
-          </a:p>
-        </p:txBody>
-      </p:sp>
-      <p:sp>
-        <p:nvSpPr>
-          <p:cNvPr id="6" name="TextBox 5"/>
-          <p:cNvSpPr txBox="1"/>
-          <p:nvPr/>
-        </p:nvSpPr>
-        <p:spPr>
-          <a:xfrm>
-            <a:off x="548640" y="1051560"/>
-            <a:ext cx="10241280" cy="594360"/>
-          </a:xfrm>
-          <a:prstGeom prst="rect">
-            <a:avLst/>
-          </a:prstGeom>
-          <a:noFill/>
-        </p:spPr>
-        <p:txBody>
-          <a:bodyPr wrap="square" anchor="t">
-            <a:spAutoFit/>
-          </a:bodyPr>
-          <a:lstStyle/>
-          <a:p>
-            <a:pPr algn="l"/>
-            <a:r>
-              <a:rPr sz="3200" b="1">
-                <a:solidFill>
-                  <a:srgbClr val="5234B7"/>
-                </a:solidFill>
-                <a:latin typeface="DIN Next LT W23"/>
-                <a:ea typeface="DIN Next LT W23"/>
-                <a:cs typeface="DIN Next LT W23"/>
-              </a:rPr>
-              <a:t>Residual Path</a:t>
-            </a:r>
-          </a:p>
-        </p:txBody>
-      </p:sp>
-      <p:sp>
-        <p:nvSpPr>
-          <p:cNvPr id="7" name="TextBox 6"/>
-          <p:cNvSpPr txBox="1"/>
-          <p:nvPr/>
-        </p:nvSpPr>
-        <p:spPr>
-          <a:xfrm>
-            <a:off x="548640" y="1600200"/>
-            <a:ext cx="10241280" cy="365760"/>
-          </a:xfrm>
-          <a:prstGeom prst="rect">
-            <a:avLst/>
-          </a:prstGeom>
-          <a:noFill/>
-        </p:spPr>
-        <p:txBody>
-          <a:bodyPr wrap="square" anchor="t">
-            <a:spAutoFit/>
-          </a:bodyPr>
-          <a:lstStyle/>
-          <a:p>
-            <a:pPr algn="l"/>
-            <a:r>
-              <a:rPr sz="1500" b="0">
-                <a:solidFill>
-                  <a:srgbClr val="5A5470"/>
-                </a:solidFill>
-                <a:latin typeface="DIN Next LT W23"/>
-                <a:ea typeface="DIN Next LT W23"/>
-                <a:cs typeface="DIN Next LT W23"/>
-              </a:rPr>
-              <a:t>Shortcut Around the Convolutions</a:t>
-            </a:r>
-          </a:p>
-        </p:txBody>
-      </p:sp>
-      <p:sp>
-        <p:nvSpPr>
-          <p:cNvPr id="8" name="Rounded Rectangle 7"/>
-          <p:cNvSpPr/>
-          <p:nvPr/>
-        </p:nvSpPr>
-        <p:spPr>
-          <a:xfrm>
-            <a:off x="548640" y="1965960"/>
-            <a:ext cx="10972800" cy="3977639"/>
-          </a:xfrm>
-          <a:prstGeom prst="roundRect">
-            <a:avLst>
-              <a:gd name="adj" fmla="val 10000"/>
-            </a:avLst>
-          </a:prstGeom>
-          <a:solidFill>
-            <a:srgbClr val="EEE8FA"/>
-          </a:solidFill>
-          <a:ln>
-            <a:noFill/>
-          </a:ln>
-          <a:effectLst/>
-        </p:spPr>
-        <p:style>
-          <a:lnRef idx="1">
-            <a:schemeClr val="accent1"/>
-          </a:lnRef>
-          <a:fillRef idx="3">
-            <a:schemeClr val="accent1"/>
-          </a:fillRef>
-          <a:effectRef idx="2">
-            <a:schemeClr val="accent1"/>
-          </a:effectRef>
-          <a:fontRef idx="minor">
-            <a:schemeClr val="lt1"/>
-          </a:fontRef>
-        </p:style>
-        <p:txBody>
-          <a:bodyPr rtlCol="0" anchor="ctr"/>
-          <a:lstStyle/>
-          <a:p>
-            <a:pPr algn="ctr"/>
-          </a:p>
-        </p:txBody>
-      </p:sp>
-      <p:pic>
-        <p:nvPicPr>
-          <p:cNvPr id="9" name="Picture 8" descr="residual-block.png"/>
-          <p:cNvPicPr>
-            <a:picLocks noChangeAspect="1"/>
-          </p:cNvPicPr>
-          <p:nvPr/>
-        </p:nvPicPr>
-        <p:blipFill>
-          <a:blip r:embed="rId3"/>
-          <a:stretch>
-            <a:fillRect/>
-          </a:stretch>
-        </p:blipFill>
-        <p:spPr>
-          <a:xfrm>
-            <a:off x="917147" y="2103120"/>
-            <a:ext cx="10235785" cy="3703320"/>
-          </a:xfrm>
-          <a:prstGeom prst="rect">
-            <a:avLst/>
-          </a:prstGeom>
-        </p:spPr>
-      </p:pic>
-      <p:sp>
-        <p:nvSpPr>
-          <p:cNvPr id="10" name="TextBox 9"/>
-          <p:cNvSpPr txBox="1"/>
-          <p:nvPr/>
-        </p:nvSpPr>
-        <p:spPr>
-          <a:xfrm>
-            <a:off x="548640" y="6309360"/>
-            <a:ext cx="10972800" cy="228600"/>
-          </a:xfrm>
-          <a:prstGeom prst="rect">
-            <a:avLst/>
-          </a:prstGeom>
-          <a:noFill/>
-        </p:spPr>
-        <p:txBody>
-          <a:bodyPr wrap="square" anchor="t">
-            <a:spAutoFit/>
-          </a:bodyPr>
-          <a:lstStyle/>
-          <a:p>
-            <a:pPr algn="l"/>
-            <a:r>
-              <a:rPr sz="1100" b="0">
-                <a:solidFill>
-                  <a:srgbClr val="5A5470"/>
-                </a:solidFill>
-                <a:latin typeface="DIN Next LT W23"/>
-                <a:ea typeface="DIN Next LT W23"/>
-                <a:cs typeface="DIN Next LT W23"/>
-              </a:rPr>
-              <a:t>The add node is why early layers still receive a usable gradient.</a:t>
-            </a:r>
-          </a:p>
-        </p:txBody>
-      </p:sp>
-      <p:sp>
-        <p:nvSpPr>
-          <p:cNvPr id="11" name="Rectangle 10"/>
-          <p:cNvSpPr/>
-          <p:nvPr/>
-        </p:nvSpPr>
-        <p:spPr>
-          <a:xfrm>
-            <a:off x="548640" y="6446520"/>
-            <a:ext cx="11064240" cy="10972"/>
-          </a:xfrm>
-          <a:prstGeom prst="rect">
-            <a:avLst/>
-          </a:prstGeom>
-          <a:solidFill>
-            <a:srgbClr val="5234B7"/>
-          </a:solidFill>
-          <a:ln>
-            <a:noFill/>
-          </a:ln>
-          <a:effectLst/>
-        </p:spPr>
-        <p:style>
-          <a:lnRef idx="1">
-            <a:schemeClr val="accent1"/>
-          </a:lnRef>
-          <a:fillRef idx="3">
-            <a:schemeClr val="accent1"/>
-          </a:fillRef>
-          <a:effectRef idx="2">
-            <a:schemeClr val="accent1"/>
-          </a:effectRef>
-          <a:fontRef idx="minor">
-            <a:schemeClr val="lt1"/>
-          </a:fontRef>
-        </p:style>
-        <p:txBody>
-          <a:bodyPr rtlCol="0" anchor="ctr"/>
-          <a:lstStyle/>
-          <a:p>
-            <a:pPr algn="ctr"/>
-          </a:p>
-        </p:txBody>
-      </p:sp>
-      <p:sp>
-        <p:nvSpPr>
-          <p:cNvPr id="12" name="TextBox 11"/>
-          <p:cNvSpPr txBox="1"/>
-          <p:nvPr/>
-        </p:nvSpPr>
-        <p:spPr>
-          <a:xfrm>
-            <a:off x="548640" y="6510528"/>
-            <a:ext cx="2743200" cy="256032"/>
-          </a:xfrm>
-          <a:prstGeom prst="rect">
-            <a:avLst/>
-          </a:prstGeom>
-          <a:noFill/>
-        </p:spPr>
-        <p:txBody>
-          <a:bodyPr wrap="square" anchor="t">
-            <a:spAutoFit/>
-          </a:bodyPr>
-          <a:lstStyle/>
-          <a:p>
-            <a:pPr algn="l"/>
-            <a:r>
-              <a:rPr sz="1100" b="1">
-                <a:solidFill>
-                  <a:srgbClr val="5234B7"/>
-                </a:solidFill>
-                <a:latin typeface="DIN Next LT W23"/>
-                <a:ea typeface="DIN Next LT W23"/>
-                <a:cs typeface="DIN Next LT W23"/>
-              </a:rPr>
-              <a:t>ETRA</a:t>
-            </a:r>
-          </a:p>
-        </p:txBody>
-      </p:sp>
-      <p:sp>
-        <p:nvSpPr>
-          <p:cNvPr id="13" name="TextBox 12"/>
-          <p:cNvSpPr txBox="1"/>
-          <p:nvPr/>
-        </p:nvSpPr>
-        <p:spPr>
-          <a:xfrm>
-            <a:off x="9601200" y="6510528"/>
-            <a:ext cx="2011680" cy="256032"/>
-          </a:xfrm>
-          <a:prstGeom prst="rect">
-            <a:avLst/>
-          </a:prstGeom>
-          <a:noFill/>
-        </p:spPr>
-        <p:txBody>
-          <a:bodyPr wrap="square" anchor="t">
-            <a:spAutoFit/>
-          </a:bodyPr>
-          <a:lstStyle/>
-          <a:p>
-            <a:pPr algn="r"/>
-            <a:r>
-              <a:rPr sz="1100" b="0">
-                <a:solidFill>
-                  <a:srgbClr val="5A5470"/>
-                </a:solidFill>
-                <a:latin typeface="DIN Next LT W23"/>
-                <a:ea typeface="DIN Next LT W23"/>
-                <a:cs typeface="DIN Next LT W23"/>
-              </a:rPr>
-              <a:t>68  /  79</a:t>
+              <a:t>68  /  82</a:t>
             </a:r>
           </a:p>
         </p:txBody>
@@ -44639,7 +44284,7 @@
                 <a:ea typeface="DIN Next LT W23"/>
                 <a:cs typeface="DIN Next LT W23"/>
               </a:rPr>
-              <a:t>Transfer Learning with Pretrained Models</a:t>
+              <a:t>CNN Blocks: Conv–Pool to ResNet</a:t>
             </a:r>
           </a:p>
         </p:txBody>
@@ -44676,7 +44321,7 @@
                 <a:ea typeface="DIN Next LT W23"/>
                 <a:cs typeface="DIN Next LT W23"/>
               </a:rPr>
-              <a:t>Reuse Features, Adapt the Head</a:t>
+              <a:t>Depth, Downsampling, Residual Learning</a:t>
             </a:r>
           </a:p>
         </p:txBody>
@@ -44713,7 +44358,7 @@
                 <a:ea typeface="DIN Next LT W23"/>
                 <a:cs typeface="DIN Next LT W23"/>
               </a:rPr>
-              <a:t>Pretraining on ImageNet learns general filters you can reuse on a smaller target task.</a:t>
+              <a:t>A standard CNN alternates convolution, ReLU, and pooling, then a fully connected head.</a:t>
             </a:r>
           </a:p>
         </p:txBody>
@@ -44766,7 +44411,7 @@
       </p:sp>
       <p:pic>
         <p:nvPicPr>
-          <p:cNvPr id="10" name="Picture 9" descr="transfer-learning.png"/>
+          <p:cNvPr id="10" name="Picture 9" descr="cnn-stack.png"/>
           <p:cNvPicPr>
             <a:picLocks noChangeAspect="1"/>
           </p:cNvPicPr>
@@ -44780,8 +44425,8 @@
         </p:blipFill>
         <p:spPr>
           <a:xfrm>
-            <a:off x="917147" y="2377440"/>
-            <a:ext cx="10235785" cy="3703320"/>
+            <a:off x="731520" y="2377440"/>
+            <a:ext cx="10607040" cy="3639993"/>
           </a:xfrm>
           <a:prstGeom prst="rect">
             <a:avLst/>
@@ -44820,7 +44465,7 @@
                 <a:ea typeface="DIN Next LT W23"/>
                 <a:cs typeface="DIN Next LT W23"/>
               </a:rPr>
-              <a:t>Freeze the backbone when data is scarce; fine-tune top blocks when you have more labels.</a:t>
+              <a:t>Max-pool keeps the strongest local response and shrinks the map.</a:t>
             </a:r>
           </a:p>
         </p:txBody>
@@ -44938,7 +44583,7 @@
                 <a:ea typeface="DIN Next LT W23"/>
                 <a:cs typeface="DIN Next LT W23"/>
               </a:rPr>
-              <a:t>69  /  79</a:t>
+              <a:t>69  /  82</a:t>
             </a:r>
           </a:p>
         </p:txBody>
@@ -45643,7 +45288,7 @@
                 <a:ea typeface="DIN Next LT W23"/>
                 <a:cs typeface="DIN Next LT W23"/>
               </a:rPr>
-              <a:t>07  /  79</a:t>
+              <a:t>07  /  82</a:t>
             </a:r>
           </a:p>
         </p:txBody>
@@ -45657,6 +45302,1733 @@
 </file>
 
 <file path=ppt/slides/slide70.xml><?xml version="1.0" encoding="utf-8"?>
+<p:sld xmlns:a="http://schemas.openxmlformats.org/drawingml/2006/main" xmlns:p="http://schemas.openxmlformats.org/presentationml/2006/main" xmlns:r="http://schemas.openxmlformats.org/officeDocument/2006/relationships">
+  <p:cSld>
+    <p:bg>
+      <p:bgPr>
+        <a:solidFill>
+          <a:srgbClr val="FAF8FF"/>
+        </a:solidFill>
+        <a:effectLst/>
+      </p:bgPr>
+    </p:bg>
+    <p:spTree>
+      <p:nvGrpSpPr>
+        <p:cNvPr id="1" name=""/>
+        <p:cNvGrpSpPr/>
+        <p:nvPr/>
+      </p:nvGrpSpPr>
+      <p:grpSpPr/>
+      <p:sp>
+        <p:nvSpPr>
+          <p:cNvPr id="2" name="Rectangle 1"/>
+          <p:cNvSpPr/>
+          <p:nvPr/>
+        </p:nvSpPr>
+        <p:spPr>
+          <a:xfrm>
+            <a:off x="12136831" y="0"/>
+            <a:ext cx="54864" cy="6858000"/>
+          </a:xfrm>
+          <a:prstGeom prst="rect">
+            <a:avLst/>
+          </a:prstGeom>
+          <a:solidFill>
+            <a:srgbClr val="5234B7"/>
+          </a:solidFill>
+          <a:ln>
+            <a:noFill/>
+          </a:ln>
+          <a:effectLst/>
+        </p:spPr>
+        <p:style>
+          <a:lnRef idx="1">
+            <a:schemeClr val="accent1"/>
+          </a:lnRef>
+          <a:fillRef idx="3">
+            <a:schemeClr val="accent1"/>
+          </a:fillRef>
+          <a:effectRef idx="2">
+            <a:schemeClr val="accent1"/>
+          </a:effectRef>
+          <a:fontRef idx="minor">
+            <a:schemeClr val="lt1"/>
+          </a:fontRef>
+        </p:style>
+        <p:txBody>
+          <a:bodyPr rtlCol="0" anchor="ctr"/>
+          <a:lstStyle/>
+          <a:p>
+            <a:pPr algn="ctr"/>
+          </a:p>
+        </p:txBody>
+      </p:sp>
+      <p:pic>
+        <p:nvPicPr>
+          <p:cNvPr id="3" name="Picture 2" descr="etra-wordmark.png"/>
+          <p:cNvPicPr>
+            <a:picLocks noChangeAspect="1"/>
+          </p:cNvPicPr>
+          <p:nvPr/>
+        </p:nvPicPr>
+        <p:blipFill>
+          <a:blip r:embed="rId2"/>
+          <a:stretch>
+            <a:fillRect/>
+          </a:stretch>
+        </p:blipFill>
+        <p:spPr>
+          <a:xfrm>
+            <a:off x="10561320" y="411480"/>
+            <a:ext cx="1206201" cy="320040"/>
+          </a:xfrm>
+          <a:prstGeom prst="rect">
+            <a:avLst/>
+          </a:prstGeom>
+        </p:spPr>
+      </p:pic>
+      <p:sp>
+        <p:nvSpPr>
+          <p:cNvPr id="4" name="TextBox 3"/>
+          <p:cNvSpPr txBox="1"/>
+          <p:nvPr/>
+        </p:nvSpPr>
+        <p:spPr>
+          <a:xfrm>
+            <a:off x="548640" y="438912"/>
+            <a:ext cx="7772400" cy="274320"/>
+          </a:xfrm>
+          <a:prstGeom prst="rect">
+            <a:avLst/>
+          </a:prstGeom>
+          <a:noFill/>
+        </p:spPr>
+        <p:txBody>
+          <a:bodyPr wrap="square" anchor="t">
+            <a:spAutoFit/>
+          </a:bodyPr>
+          <a:lstStyle/>
+          <a:p>
+            <a:pPr algn="l"/>
+            <a:r>
+              <a:rPr sz="1200" b="0">
+                <a:solidFill>
+                  <a:srgbClr val="5A5470"/>
+                </a:solidFill>
+                <a:latin typeface="DIN Next LT W23"/>
+                <a:ea typeface="DIN Next LT W23"/>
+                <a:cs typeface="DIN Next LT W23"/>
+              </a:rPr>
+              <a:t>S07  ·  Deep Learning</a:t>
+            </a:r>
+          </a:p>
+        </p:txBody>
+      </p:sp>
+      <p:sp>
+        <p:nvSpPr>
+          <p:cNvPr id="5" name="Rectangle 4"/>
+          <p:cNvSpPr/>
+          <p:nvPr/>
+        </p:nvSpPr>
+        <p:spPr>
+          <a:xfrm>
+            <a:off x="548640" y="822960"/>
+            <a:ext cx="11064240" cy="10972"/>
+          </a:xfrm>
+          <a:prstGeom prst="rect">
+            <a:avLst/>
+          </a:prstGeom>
+          <a:solidFill>
+            <a:srgbClr val="E4DCF4"/>
+          </a:solidFill>
+          <a:ln>
+            <a:noFill/>
+          </a:ln>
+          <a:effectLst/>
+        </p:spPr>
+        <p:style>
+          <a:lnRef idx="1">
+            <a:schemeClr val="accent1"/>
+          </a:lnRef>
+          <a:fillRef idx="3">
+            <a:schemeClr val="accent1"/>
+          </a:fillRef>
+          <a:effectRef idx="2">
+            <a:schemeClr val="accent1"/>
+          </a:effectRef>
+          <a:fontRef idx="minor">
+            <a:schemeClr val="lt1"/>
+          </a:fontRef>
+        </p:style>
+        <p:txBody>
+          <a:bodyPr rtlCol="0" anchor="ctr"/>
+          <a:lstStyle/>
+          <a:p>
+            <a:pPr algn="ctr"/>
+          </a:p>
+        </p:txBody>
+      </p:sp>
+      <p:sp>
+        <p:nvSpPr>
+          <p:cNvPr id="6" name="TextBox 5"/>
+          <p:cNvSpPr txBox="1"/>
+          <p:nvPr/>
+        </p:nvSpPr>
+        <p:spPr>
+          <a:xfrm>
+            <a:off x="548640" y="1051560"/>
+            <a:ext cx="10241280" cy="594360"/>
+          </a:xfrm>
+          <a:prstGeom prst="rect">
+            <a:avLst/>
+          </a:prstGeom>
+          <a:noFill/>
+        </p:spPr>
+        <p:txBody>
+          <a:bodyPr wrap="square" anchor="t">
+            <a:spAutoFit/>
+          </a:bodyPr>
+          <a:lstStyle/>
+          <a:p>
+            <a:pPr algn="l"/>
+            <a:r>
+              <a:rPr sz="3200" b="1">
+                <a:solidFill>
+                  <a:srgbClr val="5234B7"/>
+                </a:solidFill>
+                <a:latin typeface="DIN Next LT W23"/>
+                <a:ea typeface="DIN Next LT W23"/>
+                <a:cs typeface="DIN Next LT W23"/>
+              </a:rPr>
+              <a:t>Residual Block</a:t>
+            </a:r>
+          </a:p>
+        </p:txBody>
+      </p:sp>
+      <p:sp>
+        <p:nvSpPr>
+          <p:cNvPr id="7" name="TextBox 6"/>
+          <p:cNvSpPr txBox="1"/>
+          <p:nvPr/>
+        </p:nvSpPr>
+        <p:spPr>
+          <a:xfrm>
+            <a:off x="548640" y="1600200"/>
+            <a:ext cx="10241280" cy="365760"/>
+          </a:xfrm>
+          <a:prstGeom prst="rect">
+            <a:avLst/>
+          </a:prstGeom>
+          <a:noFill/>
+        </p:spPr>
+        <p:txBody>
+          <a:bodyPr wrap="square" anchor="t">
+            <a:spAutoFit/>
+          </a:bodyPr>
+          <a:lstStyle/>
+          <a:p>
+            <a:pPr algn="l"/>
+            <a:r>
+              <a:rPr sz="1500" b="0">
+                <a:solidFill>
+                  <a:srgbClr val="5A5470"/>
+                </a:solidFill>
+                <a:latin typeface="DIN Next LT W23"/>
+                <a:ea typeface="DIN Next LT W23"/>
+                <a:cs typeface="DIN Next LT W23"/>
+              </a:rPr>
+              <a:t>Learn F(x), Keep an Identity Path</a:t>
+            </a:r>
+          </a:p>
+        </p:txBody>
+      </p:sp>
+      <p:sp>
+        <p:nvSpPr>
+          <p:cNvPr id="8" name="Rounded Rectangle 7"/>
+          <p:cNvSpPr/>
+          <p:nvPr/>
+        </p:nvSpPr>
+        <p:spPr>
+          <a:xfrm>
+            <a:off x="548640" y="1965960"/>
+            <a:ext cx="10972800" cy="640080"/>
+          </a:xfrm>
+          <a:prstGeom prst="roundRect">
+            <a:avLst>
+              <a:gd name="adj" fmla="val 10000"/>
+            </a:avLst>
+          </a:prstGeom>
+          <a:solidFill>
+            <a:srgbClr val="EEE8FA"/>
+          </a:solidFill>
+          <a:ln>
+            <a:noFill/>
+          </a:ln>
+          <a:effectLst/>
+        </p:spPr>
+        <p:style>
+          <a:lnRef idx="1">
+            <a:schemeClr val="accent1"/>
+          </a:lnRef>
+          <a:fillRef idx="3">
+            <a:schemeClr val="accent1"/>
+          </a:fillRef>
+          <a:effectRef idx="2">
+            <a:schemeClr val="accent1"/>
+          </a:effectRef>
+          <a:fontRef idx="minor">
+            <a:schemeClr val="lt1"/>
+          </a:fontRef>
+        </p:style>
+        <p:txBody>
+          <a:bodyPr rtlCol="0" anchor="ctr"/>
+          <a:lstStyle/>
+          <a:p>
+            <a:pPr algn="ctr"/>
+          </a:p>
+        </p:txBody>
+      </p:sp>
+      <p:sp>
+        <p:nvSpPr>
+          <p:cNvPr id="9" name="TextBox 8"/>
+          <p:cNvSpPr txBox="1"/>
+          <p:nvPr/>
+        </p:nvSpPr>
+        <p:spPr>
+          <a:xfrm>
+            <a:off x="868680" y="2084831"/>
+            <a:ext cx="10332720" cy="411480"/>
+          </a:xfrm>
+          <a:prstGeom prst="rect">
+            <a:avLst/>
+          </a:prstGeom>
+          <a:noFill/>
+        </p:spPr>
+        <p:txBody>
+          <a:bodyPr wrap="square" anchor="t">
+            <a:spAutoFit/>
+          </a:bodyPr>
+          <a:lstStyle/>
+          <a:p>
+            <a:pPr algn="l"/>
+            <a:r>
+              <a:rPr sz="1400" b="0">
+                <a:solidFill>
+                  <a:srgbClr val="121018"/>
+                </a:solidFill>
+                <a:latin typeface="DIN Next LT W23"/>
+                <a:ea typeface="DIN Next LT W23"/>
+                <a:cs typeface="DIN Next LT W23"/>
+              </a:rPr>
+              <a:t>Skip connections let gradients flow backward through identity — this is how 100+ layer nets train.</a:t>
+            </a:r>
+          </a:p>
+        </p:txBody>
+      </p:sp>
+      <p:sp>
+        <p:nvSpPr>
+          <p:cNvPr id="10" name="Rounded Rectangle 9"/>
+          <p:cNvSpPr/>
+          <p:nvPr/>
+        </p:nvSpPr>
+        <p:spPr>
+          <a:xfrm>
+            <a:off x="548640" y="2743200"/>
+            <a:ext cx="10972800" cy="1417320"/>
+          </a:xfrm>
+          <a:prstGeom prst="roundRect">
+            <a:avLst>
+              <a:gd name="adj" fmla="val 10000"/>
+            </a:avLst>
+          </a:prstGeom>
+          <a:solidFill>
+            <a:srgbClr val="EEE8FA"/>
+          </a:solidFill>
+          <a:ln>
+            <a:noFill/>
+          </a:ln>
+          <a:effectLst/>
+        </p:spPr>
+        <p:style>
+          <a:lnRef idx="1">
+            <a:schemeClr val="accent1"/>
+          </a:lnRef>
+          <a:fillRef idx="3">
+            <a:schemeClr val="accent1"/>
+          </a:fillRef>
+          <a:effectRef idx="2">
+            <a:schemeClr val="accent1"/>
+          </a:effectRef>
+          <a:fontRef idx="minor">
+            <a:schemeClr val="lt1"/>
+          </a:fontRef>
+        </p:style>
+        <p:txBody>
+          <a:bodyPr rtlCol="0" anchor="ctr"/>
+          <a:lstStyle/>
+          <a:p>
+            <a:pPr algn="ctr"/>
+          </a:p>
+        </p:txBody>
+      </p:sp>
+      <p:pic>
+        <p:nvPicPr>
+          <p:cNvPr id="11" name="Picture 10" descr="f-2b076bcbaf5e0bf9.png"/>
+          <p:cNvPicPr>
+            <a:picLocks noChangeAspect="1"/>
+          </p:cNvPicPr>
+          <p:nvPr/>
+        </p:nvPicPr>
+        <p:blipFill>
+          <a:blip r:embed="rId3"/>
+          <a:stretch>
+            <a:fillRect/>
+          </a:stretch>
+        </p:blipFill>
+        <p:spPr>
+          <a:xfrm>
+            <a:off x="4440086" y="2852928"/>
+            <a:ext cx="3189906" cy="868679"/>
+          </a:xfrm>
+          <a:prstGeom prst="rect">
+            <a:avLst/>
+          </a:prstGeom>
+        </p:spPr>
+      </p:pic>
+      <p:sp>
+        <p:nvSpPr>
+          <p:cNvPr id="12" name="TextBox 11"/>
+          <p:cNvSpPr txBox="1"/>
+          <p:nvPr/>
+        </p:nvSpPr>
+        <p:spPr>
+          <a:xfrm>
+            <a:off x="914400" y="3840480"/>
+            <a:ext cx="10241280" cy="256032"/>
+          </a:xfrm>
+          <a:prstGeom prst="rect">
+            <a:avLst/>
+          </a:prstGeom>
+          <a:noFill/>
+        </p:spPr>
+        <p:txBody>
+          <a:bodyPr wrap="square" anchor="t">
+            <a:spAutoFit/>
+          </a:bodyPr>
+          <a:lstStyle/>
+          <a:p>
+            <a:pPr algn="ctr"/>
+            <a:r>
+              <a:rPr sz="1200" b="0">
+                <a:solidFill>
+                  <a:srgbClr val="5A5470"/>
+                </a:solidFill>
+                <a:latin typeface="DIN Next LT W23"/>
+                <a:ea typeface="DIN Next LT W23"/>
+                <a:cs typeface="DIN Next LT W23"/>
+              </a:rPr>
+              <a:t>The block learns the residual F; x is copied forward</a:t>
+            </a:r>
+          </a:p>
+        </p:txBody>
+      </p:sp>
+      <p:sp>
+        <p:nvSpPr>
+          <p:cNvPr id="13" name="TextBox 12"/>
+          <p:cNvSpPr txBox="1"/>
+          <p:nvPr/>
+        </p:nvSpPr>
+        <p:spPr>
+          <a:xfrm>
+            <a:off x="548640" y="4270248"/>
+            <a:ext cx="320040" cy="384048"/>
+          </a:xfrm>
+          <a:prstGeom prst="rect">
+            <a:avLst/>
+          </a:prstGeom>
+          <a:noFill/>
+        </p:spPr>
+        <p:txBody>
+          <a:bodyPr wrap="square" anchor="t">
+            <a:spAutoFit/>
+          </a:bodyPr>
+          <a:lstStyle/>
+          <a:p>
+            <a:pPr algn="l"/>
+            <a:r>
+              <a:rPr sz="1300" b="0">
+                <a:solidFill>
+                  <a:srgbClr val="9E59CD"/>
+                </a:solidFill>
+                <a:latin typeface="DIN Next LT W23"/>
+                <a:ea typeface="DIN Next LT W23"/>
+                <a:cs typeface="DIN Next LT W23"/>
+              </a:rPr>
+              <a:t>–</a:t>
+            </a:r>
+          </a:p>
+        </p:txBody>
+      </p:sp>
+      <p:sp>
+        <p:nvSpPr>
+          <p:cNvPr id="14" name="TextBox 13"/>
+          <p:cNvSpPr txBox="1"/>
+          <p:nvPr/>
+        </p:nvSpPr>
+        <p:spPr>
+          <a:xfrm>
+            <a:off x="914400" y="4270248"/>
+            <a:ext cx="9875519" cy="384048"/>
+          </a:xfrm>
+          <a:prstGeom prst="rect">
+            <a:avLst/>
+          </a:prstGeom>
+          <a:noFill/>
+        </p:spPr>
+        <p:txBody>
+          <a:bodyPr wrap="square" anchor="t">
+            <a:spAutoFit/>
+          </a:bodyPr>
+          <a:lstStyle/>
+          <a:p>
+            <a:pPr algn="l"/>
+            <a:r>
+              <a:rPr sz="1300" b="0">
+                <a:solidFill>
+                  <a:srgbClr val="121018"/>
+                </a:solidFill>
+                <a:latin typeface="DIN Next LT W23"/>
+                <a:ea typeface="DIN Next LT W23"/>
+                <a:cs typeface="DIN Next LT W23"/>
+              </a:rPr>
+              <a:t>AlexNet (2012): scale + ReLU + dropout + GPUs on ImageNet.</a:t>
+            </a:r>
+          </a:p>
+        </p:txBody>
+      </p:sp>
+      <p:sp>
+        <p:nvSpPr>
+          <p:cNvPr id="15" name="TextBox 14"/>
+          <p:cNvSpPr txBox="1"/>
+          <p:nvPr/>
+        </p:nvSpPr>
+        <p:spPr>
+          <a:xfrm>
+            <a:off x="548640" y="4690872"/>
+            <a:ext cx="320040" cy="384048"/>
+          </a:xfrm>
+          <a:prstGeom prst="rect">
+            <a:avLst/>
+          </a:prstGeom>
+          <a:noFill/>
+        </p:spPr>
+        <p:txBody>
+          <a:bodyPr wrap="square" anchor="t">
+            <a:spAutoFit/>
+          </a:bodyPr>
+          <a:lstStyle/>
+          <a:p>
+            <a:pPr algn="l"/>
+            <a:r>
+              <a:rPr sz="1300" b="0">
+                <a:solidFill>
+                  <a:srgbClr val="9E59CD"/>
+                </a:solidFill>
+                <a:latin typeface="DIN Next LT W23"/>
+                <a:ea typeface="DIN Next LT W23"/>
+                <a:cs typeface="DIN Next LT W23"/>
+              </a:rPr>
+              <a:t>–</a:t>
+            </a:r>
+          </a:p>
+        </p:txBody>
+      </p:sp>
+      <p:sp>
+        <p:nvSpPr>
+          <p:cNvPr id="16" name="TextBox 15"/>
+          <p:cNvSpPr txBox="1"/>
+          <p:nvPr/>
+        </p:nvSpPr>
+        <p:spPr>
+          <a:xfrm>
+            <a:off x="914400" y="4690872"/>
+            <a:ext cx="9875519" cy="384048"/>
+          </a:xfrm>
+          <a:prstGeom prst="rect">
+            <a:avLst/>
+          </a:prstGeom>
+          <a:noFill/>
+        </p:spPr>
+        <p:txBody>
+          <a:bodyPr wrap="square" anchor="t">
+            <a:spAutoFit/>
+          </a:bodyPr>
+          <a:lstStyle/>
+          <a:p>
+            <a:pPr algn="l"/>
+            <a:r>
+              <a:rPr sz="1300" b="0">
+                <a:solidFill>
+                  <a:srgbClr val="121018"/>
+                </a:solidFill>
+                <a:latin typeface="DIN Next LT W23"/>
+                <a:ea typeface="DIN Next LT W23"/>
+                <a:cs typeface="DIN Next LT W23"/>
+              </a:rPr>
+              <a:t>ResNet (2015): residual mapping F(x)+x; skip paths help gradients.</a:t>
+            </a:r>
+          </a:p>
+        </p:txBody>
+      </p:sp>
+      <p:sp>
+        <p:nvSpPr>
+          <p:cNvPr id="17" name="TextBox 16"/>
+          <p:cNvSpPr txBox="1"/>
+          <p:nvPr/>
+        </p:nvSpPr>
+        <p:spPr>
+          <a:xfrm>
+            <a:off x="548640" y="5989320"/>
+            <a:ext cx="10972800" cy="228600"/>
+          </a:xfrm>
+          <a:prstGeom prst="rect">
+            <a:avLst/>
+          </a:prstGeom>
+          <a:noFill/>
+        </p:spPr>
+        <p:txBody>
+          <a:bodyPr wrap="square" anchor="t">
+            <a:spAutoFit/>
+          </a:bodyPr>
+          <a:lstStyle/>
+          <a:p>
+            <a:pPr algn="l"/>
+            <a:r>
+              <a:rPr sz="1200" b="0">
+                <a:solidFill>
+                  <a:srgbClr val="5A5470"/>
+                </a:solidFill>
+                <a:latin typeface="DIN Next LT W23"/>
+                <a:ea typeface="DIN Next LT W23"/>
+                <a:cs typeface="DIN Next LT W23"/>
+              </a:rPr>
+              <a:t>If F learns zero, the block still acts as identity — easier than learning identity from scratch.</a:t>
+            </a:r>
+          </a:p>
+        </p:txBody>
+      </p:sp>
+      <p:sp>
+        <p:nvSpPr>
+          <p:cNvPr id="18" name="Rectangle 17"/>
+          <p:cNvSpPr/>
+          <p:nvPr/>
+        </p:nvSpPr>
+        <p:spPr>
+          <a:xfrm>
+            <a:off x="548640" y="6446520"/>
+            <a:ext cx="11064240" cy="10972"/>
+          </a:xfrm>
+          <a:prstGeom prst="rect">
+            <a:avLst/>
+          </a:prstGeom>
+          <a:solidFill>
+            <a:srgbClr val="5234B7"/>
+          </a:solidFill>
+          <a:ln>
+            <a:noFill/>
+          </a:ln>
+          <a:effectLst/>
+        </p:spPr>
+        <p:style>
+          <a:lnRef idx="1">
+            <a:schemeClr val="accent1"/>
+          </a:lnRef>
+          <a:fillRef idx="3">
+            <a:schemeClr val="accent1"/>
+          </a:fillRef>
+          <a:effectRef idx="2">
+            <a:schemeClr val="accent1"/>
+          </a:effectRef>
+          <a:fontRef idx="minor">
+            <a:schemeClr val="lt1"/>
+          </a:fontRef>
+        </p:style>
+        <p:txBody>
+          <a:bodyPr rtlCol="0" anchor="ctr"/>
+          <a:lstStyle/>
+          <a:p>
+            <a:pPr algn="ctr"/>
+          </a:p>
+        </p:txBody>
+      </p:sp>
+      <p:sp>
+        <p:nvSpPr>
+          <p:cNvPr id="19" name="TextBox 18"/>
+          <p:cNvSpPr txBox="1"/>
+          <p:nvPr/>
+        </p:nvSpPr>
+        <p:spPr>
+          <a:xfrm>
+            <a:off x="548640" y="6510528"/>
+            <a:ext cx="2743200" cy="256032"/>
+          </a:xfrm>
+          <a:prstGeom prst="rect">
+            <a:avLst/>
+          </a:prstGeom>
+          <a:noFill/>
+        </p:spPr>
+        <p:txBody>
+          <a:bodyPr wrap="square" anchor="t">
+            <a:spAutoFit/>
+          </a:bodyPr>
+          <a:lstStyle/>
+          <a:p>
+            <a:pPr algn="l"/>
+            <a:r>
+              <a:rPr sz="1100" b="1">
+                <a:solidFill>
+                  <a:srgbClr val="5234B7"/>
+                </a:solidFill>
+                <a:latin typeface="DIN Next LT W23"/>
+                <a:ea typeface="DIN Next LT W23"/>
+                <a:cs typeface="DIN Next LT W23"/>
+              </a:rPr>
+              <a:t>ETRA</a:t>
+            </a:r>
+          </a:p>
+        </p:txBody>
+      </p:sp>
+      <p:sp>
+        <p:nvSpPr>
+          <p:cNvPr id="20" name="TextBox 19"/>
+          <p:cNvSpPr txBox="1"/>
+          <p:nvPr/>
+        </p:nvSpPr>
+        <p:spPr>
+          <a:xfrm>
+            <a:off x="9601200" y="6510528"/>
+            <a:ext cx="2011680" cy="256032"/>
+          </a:xfrm>
+          <a:prstGeom prst="rect">
+            <a:avLst/>
+          </a:prstGeom>
+          <a:noFill/>
+        </p:spPr>
+        <p:txBody>
+          <a:bodyPr wrap="square" anchor="t">
+            <a:spAutoFit/>
+          </a:bodyPr>
+          <a:lstStyle/>
+          <a:p>
+            <a:pPr algn="r"/>
+            <a:r>
+              <a:rPr sz="1100" b="0">
+                <a:solidFill>
+                  <a:srgbClr val="5A5470"/>
+                </a:solidFill>
+                <a:latin typeface="DIN Next LT W23"/>
+                <a:ea typeface="DIN Next LT W23"/>
+                <a:cs typeface="DIN Next LT W23"/>
+              </a:rPr>
+              <a:t>70  /  82</a:t>
+            </a:r>
+          </a:p>
+        </p:txBody>
+      </p:sp>
+    </p:spTree>
+  </p:cSld>
+  <p:clrMapOvr>
+    <a:masterClrMapping/>
+  </p:clrMapOvr>
+</p:sld>
+</file>
+
+<file path=ppt/slides/slide71.xml><?xml version="1.0" encoding="utf-8"?>
+<p:sld xmlns:a="http://schemas.openxmlformats.org/drawingml/2006/main" xmlns:p="http://schemas.openxmlformats.org/presentationml/2006/main" xmlns:r="http://schemas.openxmlformats.org/officeDocument/2006/relationships">
+  <p:cSld>
+    <p:bg>
+      <p:bgPr>
+        <a:solidFill>
+          <a:srgbClr val="FAF8FF"/>
+        </a:solidFill>
+        <a:effectLst/>
+      </p:bgPr>
+    </p:bg>
+    <p:spTree>
+      <p:nvGrpSpPr>
+        <p:cNvPr id="1" name=""/>
+        <p:cNvGrpSpPr/>
+        <p:nvPr/>
+      </p:nvGrpSpPr>
+      <p:grpSpPr/>
+      <p:sp>
+        <p:nvSpPr>
+          <p:cNvPr id="2" name="Rectangle 1"/>
+          <p:cNvSpPr/>
+          <p:nvPr/>
+        </p:nvSpPr>
+        <p:spPr>
+          <a:xfrm>
+            <a:off x="12136831" y="0"/>
+            <a:ext cx="54864" cy="6858000"/>
+          </a:xfrm>
+          <a:prstGeom prst="rect">
+            <a:avLst/>
+          </a:prstGeom>
+          <a:solidFill>
+            <a:srgbClr val="5234B7"/>
+          </a:solidFill>
+          <a:ln>
+            <a:noFill/>
+          </a:ln>
+          <a:effectLst/>
+        </p:spPr>
+        <p:style>
+          <a:lnRef idx="1">
+            <a:schemeClr val="accent1"/>
+          </a:lnRef>
+          <a:fillRef idx="3">
+            <a:schemeClr val="accent1"/>
+          </a:fillRef>
+          <a:effectRef idx="2">
+            <a:schemeClr val="accent1"/>
+          </a:effectRef>
+          <a:fontRef idx="minor">
+            <a:schemeClr val="lt1"/>
+          </a:fontRef>
+        </p:style>
+        <p:txBody>
+          <a:bodyPr rtlCol="0" anchor="ctr"/>
+          <a:lstStyle/>
+          <a:p>
+            <a:pPr algn="ctr"/>
+          </a:p>
+        </p:txBody>
+      </p:sp>
+      <p:pic>
+        <p:nvPicPr>
+          <p:cNvPr id="3" name="Picture 2" descr="etra-wordmark.png"/>
+          <p:cNvPicPr>
+            <a:picLocks noChangeAspect="1"/>
+          </p:cNvPicPr>
+          <p:nvPr/>
+        </p:nvPicPr>
+        <p:blipFill>
+          <a:blip r:embed="rId2"/>
+          <a:stretch>
+            <a:fillRect/>
+          </a:stretch>
+        </p:blipFill>
+        <p:spPr>
+          <a:xfrm>
+            <a:off x="10561320" y="411480"/>
+            <a:ext cx="1206201" cy="320040"/>
+          </a:xfrm>
+          <a:prstGeom prst="rect">
+            <a:avLst/>
+          </a:prstGeom>
+        </p:spPr>
+      </p:pic>
+      <p:sp>
+        <p:nvSpPr>
+          <p:cNvPr id="4" name="TextBox 3"/>
+          <p:cNvSpPr txBox="1"/>
+          <p:nvPr/>
+        </p:nvSpPr>
+        <p:spPr>
+          <a:xfrm>
+            <a:off x="548640" y="438912"/>
+            <a:ext cx="7772400" cy="274320"/>
+          </a:xfrm>
+          <a:prstGeom prst="rect">
+            <a:avLst/>
+          </a:prstGeom>
+          <a:noFill/>
+        </p:spPr>
+        <p:txBody>
+          <a:bodyPr wrap="square" anchor="t">
+            <a:spAutoFit/>
+          </a:bodyPr>
+          <a:lstStyle/>
+          <a:p>
+            <a:pPr algn="l"/>
+            <a:r>
+              <a:rPr sz="1200" b="0">
+                <a:solidFill>
+                  <a:srgbClr val="5A5470"/>
+                </a:solidFill>
+                <a:latin typeface="DIN Next LT W23"/>
+                <a:ea typeface="DIN Next LT W23"/>
+                <a:cs typeface="DIN Next LT W23"/>
+              </a:rPr>
+              <a:t>S07  ·  Deep Learning</a:t>
+            </a:r>
+          </a:p>
+        </p:txBody>
+      </p:sp>
+      <p:sp>
+        <p:nvSpPr>
+          <p:cNvPr id="5" name="Rectangle 4"/>
+          <p:cNvSpPr/>
+          <p:nvPr/>
+        </p:nvSpPr>
+        <p:spPr>
+          <a:xfrm>
+            <a:off x="548640" y="822960"/>
+            <a:ext cx="11064240" cy="10972"/>
+          </a:xfrm>
+          <a:prstGeom prst="rect">
+            <a:avLst/>
+          </a:prstGeom>
+          <a:solidFill>
+            <a:srgbClr val="E4DCF4"/>
+          </a:solidFill>
+          <a:ln>
+            <a:noFill/>
+          </a:ln>
+          <a:effectLst/>
+        </p:spPr>
+        <p:style>
+          <a:lnRef idx="1">
+            <a:schemeClr val="accent1"/>
+          </a:lnRef>
+          <a:fillRef idx="3">
+            <a:schemeClr val="accent1"/>
+          </a:fillRef>
+          <a:effectRef idx="2">
+            <a:schemeClr val="accent1"/>
+          </a:effectRef>
+          <a:fontRef idx="minor">
+            <a:schemeClr val="lt1"/>
+          </a:fontRef>
+        </p:style>
+        <p:txBody>
+          <a:bodyPr rtlCol="0" anchor="ctr"/>
+          <a:lstStyle/>
+          <a:p>
+            <a:pPr algn="ctr"/>
+          </a:p>
+        </p:txBody>
+      </p:sp>
+      <p:sp>
+        <p:nvSpPr>
+          <p:cNvPr id="6" name="TextBox 5"/>
+          <p:cNvSpPr txBox="1"/>
+          <p:nvPr/>
+        </p:nvSpPr>
+        <p:spPr>
+          <a:xfrm>
+            <a:off x="548640" y="1051560"/>
+            <a:ext cx="10241280" cy="594360"/>
+          </a:xfrm>
+          <a:prstGeom prst="rect">
+            <a:avLst/>
+          </a:prstGeom>
+          <a:noFill/>
+        </p:spPr>
+        <p:txBody>
+          <a:bodyPr wrap="square" anchor="t">
+            <a:spAutoFit/>
+          </a:bodyPr>
+          <a:lstStyle/>
+          <a:p>
+            <a:pPr algn="l"/>
+            <a:r>
+              <a:rPr sz="3200" b="1">
+                <a:solidFill>
+                  <a:srgbClr val="5234B7"/>
+                </a:solidFill>
+                <a:latin typeface="DIN Next LT W23"/>
+                <a:ea typeface="DIN Next LT W23"/>
+                <a:cs typeface="DIN Next LT W23"/>
+              </a:rPr>
+              <a:t>Residual Path</a:t>
+            </a:r>
+          </a:p>
+        </p:txBody>
+      </p:sp>
+      <p:sp>
+        <p:nvSpPr>
+          <p:cNvPr id="7" name="TextBox 6"/>
+          <p:cNvSpPr txBox="1"/>
+          <p:nvPr/>
+        </p:nvSpPr>
+        <p:spPr>
+          <a:xfrm>
+            <a:off x="548640" y="1600200"/>
+            <a:ext cx="10241280" cy="365760"/>
+          </a:xfrm>
+          <a:prstGeom prst="rect">
+            <a:avLst/>
+          </a:prstGeom>
+          <a:noFill/>
+        </p:spPr>
+        <p:txBody>
+          <a:bodyPr wrap="square" anchor="t">
+            <a:spAutoFit/>
+          </a:bodyPr>
+          <a:lstStyle/>
+          <a:p>
+            <a:pPr algn="l"/>
+            <a:r>
+              <a:rPr sz="1500" b="0">
+                <a:solidFill>
+                  <a:srgbClr val="5A5470"/>
+                </a:solidFill>
+                <a:latin typeface="DIN Next LT W23"/>
+                <a:ea typeface="DIN Next LT W23"/>
+                <a:cs typeface="DIN Next LT W23"/>
+              </a:rPr>
+              <a:t>Shortcut Around the Convolutions</a:t>
+            </a:r>
+          </a:p>
+        </p:txBody>
+      </p:sp>
+      <p:sp>
+        <p:nvSpPr>
+          <p:cNvPr id="8" name="Rounded Rectangle 7"/>
+          <p:cNvSpPr/>
+          <p:nvPr/>
+        </p:nvSpPr>
+        <p:spPr>
+          <a:xfrm>
+            <a:off x="548640" y="1965960"/>
+            <a:ext cx="10972800" cy="3977639"/>
+          </a:xfrm>
+          <a:prstGeom prst="roundRect">
+            <a:avLst>
+              <a:gd name="adj" fmla="val 10000"/>
+            </a:avLst>
+          </a:prstGeom>
+          <a:solidFill>
+            <a:srgbClr val="EEE8FA"/>
+          </a:solidFill>
+          <a:ln>
+            <a:noFill/>
+          </a:ln>
+          <a:effectLst/>
+        </p:spPr>
+        <p:style>
+          <a:lnRef idx="1">
+            <a:schemeClr val="accent1"/>
+          </a:lnRef>
+          <a:fillRef idx="3">
+            <a:schemeClr val="accent1"/>
+          </a:fillRef>
+          <a:effectRef idx="2">
+            <a:schemeClr val="accent1"/>
+          </a:effectRef>
+          <a:fontRef idx="minor">
+            <a:schemeClr val="lt1"/>
+          </a:fontRef>
+        </p:style>
+        <p:txBody>
+          <a:bodyPr rtlCol="0" anchor="ctr"/>
+          <a:lstStyle/>
+          <a:p>
+            <a:pPr algn="ctr"/>
+          </a:p>
+        </p:txBody>
+      </p:sp>
+      <p:pic>
+        <p:nvPicPr>
+          <p:cNvPr id="9" name="Picture 8" descr="residual-block.png"/>
+          <p:cNvPicPr>
+            <a:picLocks noChangeAspect="1"/>
+          </p:cNvPicPr>
+          <p:nvPr/>
+        </p:nvPicPr>
+        <p:blipFill>
+          <a:blip r:embed="rId3"/>
+          <a:stretch>
+            <a:fillRect/>
+          </a:stretch>
+        </p:blipFill>
+        <p:spPr>
+          <a:xfrm>
+            <a:off x="917147" y="2103120"/>
+            <a:ext cx="10235785" cy="3703320"/>
+          </a:xfrm>
+          <a:prstGeom prst="rect">
+            <a:avLst/>
+          </a:prstGeom>
+        </p:spPr>
+      </p:pic>
+      <p:sp>
+        <p:nvSpPr>
+          <p:cNvPr id="10" name="TextBox 9"/>
+          <p:cNvSpPr txBox="1"/>
+          <p:nvPr/>
+        </p:nvSpPr>
+        <p:spPr>
+          <a:xfrm>
+            <a:off x="548640" y="6309360"/>
+            <a:ext cx="10972800" cy="228600"/>
+          </a:xfrm>
+          <a:prstGeom prst="rect">
+            <a:avLst/>
+          </a:prstGeom>
+          <a:noFill/>
+        </p:spPr>
+        <p:txBody>
+          <a:bodyPr wrap="square" anchor="t">
+            <a:spAutoFit/>
+          </a:bodyPr>
+          <a:lstStyle/>
+          <a:p>
+            <a:pPr algn="l"/>
+            <a:r>
+              <a:rPr sz="1100" b="0">
+                <a:solidFill>
+                  <a:srgbClr val="5A5470"/>
+                </a:solidFill>
+                <a:latin typeface="DIN Next LT W23"/>
+                <a:ea typeface="DIN Next LT W23"/>
+                <a:cs typeface="DIN Next LT W23"/>
+              </a:rPr>
+              <a:t>The add node is why early layers still receive a usable gradient.</a:t>
+            </a:r>
+          </a:p>
+        </p:txBody>
+      </p:sp>
+      <p:sp>
+        <p:nvSpPr>
+          <p:cNvPr id="11" name="Rectangle 10"/>
+          <p:cNvSpPr/>
+          <p:nvPr/>
+        </p:nvSpPr>
+        <p:spPr>
+          <a:xfrm>
+            <a:off x="548640" y="6446520"/>
+            <a:ext cx="11064240" cy="10972"/>
+          </a:xfrm>
+          <a:prstGeom prst="rect">
+            <a:avLst/>
+          </a:prstGeom>
+          <a:solidFill>
+            <a:srgbClr val="5234B7"/>
+          </a:solidFill>
+          <a:ln>
+            <a:noFill/>
+          </a:ln>
+          <a:effectLst/>
+        </p:spPr>
+        <p:style>
+          <a:lnRef idx="1">
+            <a:schemeClr val="accent1"/>
+          </a:lnRef>
+          <a:fillRef idx="3">
+            <a:schemeClr val="accent1"/>
+          </a:fillRef>
+          <a:effectRef idx="2">
+            <a:schemeClr val="accent1"/>
+          </a:effectRef>
+          <a:fontRef idx="minor">
+            <a:schemeClr val="lt1"/>
+          </a:fontRef>
+        </p:style>
+        <p:txBody>
+          <a:bodyPr rtlCol="0" anchor="ctr"/>
+          <a:lstStyle/>
+          <a:p>
+            <a:pPr algn="ctr"/>
+          </a:p>
+        </p:txBody>
+      </p:sp>
+      <p:sp>
+        <p:nvSpPr>
+          <p:cNvPr id="12" name="TextBox 11"/>
+          <p:cNvSpPr txBox="1"/>
+          <p:nvPr/>
+        </p:nvSpPr>
+        <p:spPr>
+          <a:xfrm>
+            <a:off x="548640" y="6510528"/>
+            <a:ext cx="2743200" cy="256032"/>
+          </a:xfrm>
+          <a:prstGeom prst="rect">
+            <a:avLst/>
+          </a:prstGeom>
+          <a:noFill/>
+        </p:spPr>
+        <p:txBody>
+          <a:bodyPr wrap="square" anchor="t">
+            <a:spAutoFit/>
+          </a:bodyPr>
+          <a:lstStyle/>
+          <a:p>
+            <a:pPr algn="l"/>
+            <a:r>
+              <a:rPr sz="1100" b="1">
+                <a:solidFill>
+                  <a:srgbClr val="5234B7"/>
+                </a:solidFill>
+                <a:latin typeface="DIN Next LT W23"/>
+                <a:ea typeface="DIN Next LT W23"/>
+                <a:cs typeface="DIN Next LT W23"/>
+              </a:rPr>
+              <a:t>ETRA</a:t>
+            </a:r>
+          </a:p>
+        </p:txBody>
+      </p:sp>
+      <p:sp>
+        <p:nvSpPr>
+          <p:cNvPr id="13" name="TextBox 12"/>
+          <p:cNvSpPr txBox="1"/>
+          <p:nvPr/>
+        </p:nvSpPr>
+        <p:spPr>
+          <a:xfrm>
+            <a:off x="9601200" y="6510528"/>
+            <a:ext cx="2011680" cy="256032"/>
+          </a:xfrm>
+          <a:prstGeom prst="rect">
+            <a:avLst/>
+          </a:prstGeom>
+          <a:noFill/>
+        </p:spPr>
+        <p:txBody>
+          <a:bodyPr wrap="square" anchor="t">
+            <a:spAutoFit/>
+          </a:bodyPr>
+          <a:lstStyle/>
+          <a:p>
+            <a:pPr algn="r"/>
+            <a:r>
+              <a:rPr sz="1100" b="0">
+                <a:solidFill>
+                  <a:srgbClr val="5A5470"/>
+                </a:solidFill>
+                <a:latin typeface="DIN Next LT W23"/>
+                <a:ea typeface="DIN Next LT W23"/>
+                <a:cs typeface="DIN Next LT W23"/>
+              </a:rPr>
+              <a:t>71  /  82</a:t>
+            </a:r>
+          </a:p>
+        </p:txBody>
+      </p:sp>
+    </p:spTree>
+  </p:cSld>
+  <p:clrMapOvr>
+    <a:masterClrMapping/>
+  </p:clrMapOvr>
+</p:sld>
+</file>
+
+<file path=ppt/slides/slide72.xml><?xml version="1.0" encoding="utf-8"?>
+<p:sld xmlns:a="http://schemas.openxmlformats.org/drawingml/2006/main" xmlns:p="http://schemas.openxmlformats.org/presentationml/2006/main" xmlns:r="http://schemas.openxmlformats.org/officeDocument/2006/relationships">
+  <p:cSld>
+    <p:bg>
+      <p:bgPr>
+        <a:solidFill>
+          <a:srgbClr val="FAF8FF"/>
+        </a:solidFill>
+        <a:effectLst/>
+      </p:bgPr>
+    </p:bg>
+    <p:spTree>
+      <p:nvGrpSpPr>
+        <p:cNvPr id="1" name=""/>
+        <p:cNvGrpSpPr/>
+        <p:nvPr/>
+      </p:nvGrpSpPr>
+      <p:grpSpPr/>
+      <p:sp>
+        <p:nvSpPr>
+          <p:cNvPr id="2" name="Rectangle 1"/>
+          <p:cNvSpPr/>
+          <p:nvPr/>
+        </p:nvSpPr>
+        <p:spPr>
+          <a:xfrm>
+            <a:off x="12136831" y="0"/>
+            <a:ext cx="54864" cy="6858000"/>
+          </a:xfrm>
+          <a:prstGeom prst="rect">
+            <a:avLst/>
+          </a:prstGeom>
+          <a:solidFill>
+            <a:srgbClr val="5234B7"/>
+          </a:solidFill>
+          <a:ln>
+            <a:noFill/>
+          </a:ln>
+          <a:effectLst/>
+        </p:spPr>
+        <p:style>
+          <a:lnRef idx="1">
+            <a:schemeClr val="accent1"/>
+          </a:lnRef>
+          <a:fillRef idx="3">
+            <a:schemeClr val="accent1"/>
+          </a:fillRef>
+          <a:effectRef idx="2">
+            <a:schemeClr val="accent1"/>
+          </a:effectRef>
+          <a:fontRef idx="minor">
+            <a:schemeClr val="lt1"/>
+          </a:fontRef>
+        </p:style>
+        <p:txBody>
+          <a:bodyPr rtlCol="0" anchor="ctr"/>
+          <a:lstStyle/>
+          <a:p>
+            <a:pPr algn="ctr"/>
+          </a:p>
+        </p:txBody>
+      </p:sp>
+      <p:pic>
+        <p:nvPicPr>
+          <p:cNvPr id="3" name="Picture 2" descr="etra-wordmark.png"/>
+          <p:cNvPicPr>
+            <a:picLocks noChangeAspect="1"/>
+          </p:cNvPicPr>
+          <p:nvPr/>
+        </p:nvPicPr>
+        <p:blipFill>
+          <a:blip r:embed="rId2"/>
+          <a:stretch>
+            <a:fillRect/>
+          </a:stretch>
+        </p:blipFill>
+        <p:spPr>
+          <a:xfrm>
+            <a:off x="10561320" y="411480"/>
+            <a:ext cx="1206201" cy="320040"/>
+          </a:xfrm>
+          <a:prstGeom prst="rect">
+            <a:avLst/>
+          </a:prstGeom>
+        </p:spPr>
+      </p:pic>
+      <p:sp>
+        <p:nvSpPr>
+          <p:cNvPr id="4" name="TextBox 3"/>
+          <p:cNvSpPr txBox="1"/>
+          <p:nvPr/>
+        </p:nvSpPr>
+        <p:spPr>
+          <a:xfrm>
+            <a:off x="548640" y="438912"/>
+            <a:ext cx="7772400" cy="274320"/>
+          </a:xfrm>
+          <a:prstGeom prst="rect">
+            <a:avLst/>
+          </a:prstGeom>
+          <a:noFill/>
+        </p:spPr>
+        <p:txBody>
+          <a:bodyPr wrap="square" anchor="t">
+            <a:spAutoFit/>
+          </a:bodyPr>
+          <a:lstStyle/>
+          <a:p>
+            <a:pPr algn="l"/>
+            <a:r>
+              <a:rPr sz="1200" b="0">
+                <a:solidFill>
+                  <a:srgbClr val="5A5470"/>
+                </a:solidFill>
+                <a:latin typeface="DIN Next LT W23"/>
+                <a:ea typeface="DIN Next LT W23"/>
+                <a:cs typeface="DIN Next LT W23"/>
+              </a:rPr>
+              <a:t>S07  ·  Deep Learning</a:t>
+            </a:r>
+          </a:p>
+        </p:txBody>
+      </p:sp>
+      <p:sp>
+        <p:nvSpPr>
+          <p:cNvPr id="5" name="Rectangle 4"/>
+          <p:cNvSpPr/>
+          <p:nvPr/>
+        </p:nvSpPr>
+        <p:spPr>
+          <a:xfrm>
+            <a:off x="548640" y="822960"/>
+            <a:ext cx="11064240" cy="10972"/>
+          </a:xfrm>
+          <a:prstGeom prst="rect">
+            <a:avLst/>
+          </a:prstGeom>
+          <a:solidFill>
+            <a:srgbClr val="E4DCF4"/>
+          </a:solidFill>
+          <a:ln>
+            <a:noFill/>
+          </a:ln>
+          <a:effectLst/>
+        </p:spPr>
+        <p:style>
+          <a:lnRef idx="1">
+            <a:schemeClr val="accent1"/>
+          </a:lnRef>
+          <a:fillRef idx="3">
+            <a:schemeClr val="accent1"/>
+          </a:fillRef>
+          <a:effectRef idx="2">
+            <a:schemeClr val="accent1"/>
+          </a:effectRef>
+          <a:fontRef idx="minor">
+            <a:schemeClr val="lt1"/>
+          </a:fontRef>
+        </p:style>
+        <p:txBody>
+          <a:bodyPr rtlCol="0" anchor="ctr"/>
+          <a:lstStyle/>
+          <a:p>
+            <a:pPr algn="ctr"/>
+          </a:p>
+        </p:txBody>
+      </p:sp>
+      <p:sp>
+        <p:nvSpPr>
+          <p:cNvPr id="6" name="TextBox 5"/>
+          <p:cNvSpPr txBox="1"/>
+          <p:nvPr/>
+        </p:nvSpPr>
+        <p:spPr>
+          <a:xfrm>
+            <a:off x="548640" y="1051560"/>
+            <a:ext cx="10241280" cy="594360"/>
+          </a:xfrm>
+          <a:prstGeom prst="rect">
+            <a:avLst/>
+          </a:prstGeom>
+          <a:noFill/>
+        </p:spPr>
+        <p:txBody>
+          <a:bodyPr wrap="square" anchor="t">
+            <a:spAutoFit/>
+          </a:bodyPr>
+          <a:lstStyle/>
+          <a:p>
+            <a:pPr algn="l"/>
+            <a:r>
+              <a:rPr sz="3200" b="1">
+                <a:solidFill>
+                  <a:srgbClr val="5234B7"/>
+                </a:solidFill>
+                <a:latin typeface="DIN Next LT W23"/>
+                <a:ea typeface="DIN Next LT W23"/>
+                <a:cs typeface="DIN Next LT W23"/>
+              </a:rPr>
+              <a:t>Transfer Learning with Pretrained Models</a:t>
+            </a:r>
+          </a:p>
+        </p:txBody>
+      </p:sp>
+      <p:sp>
+        <p:nvSpPr>
+          <p:cNvPr id="7" name="TextBox 6"/>
+          <p:cNvSpPr txBox="1"/>
+          <p:nvPr/>
+        </p:nvSpPr>
+        <p:spPr>
+          <a:xfrm>
+            <a:off x="548640" y="1600200"/>
+            <a:ext cx="10241280" cy="365760"/>
+          </a:xfrm>
+          <a:prstGeom prst="rect">
+            <a:avLst/>
+          </a:prstGeom>
+          <a:noFill/>
+        </p:spPr>
+        <p:txBody>
+          <a:bodyPr wrap="square" anchor="t">
+            <a:spAutoFit/>
+          </a:bodyPr>
+          <a:lstStyle/>
+          <a:p>
+            <a:pPr algn="l"/>
+            <a:r>
+              <a:rPr sz="1500" b="0">
+                <a:solidFill>
+                  <a:srgbClr val="5A5470"/>
+                </a:solidFill>
+                <a:latin typeface="DIN Next LT W23"/>
+                <a:ea typeface="DIN Next LT W23"/>
+                <a:cs typeface="DIN Next LT W23"/>
+              </a:rPr>
+              <a:t>Reuse Features, Adapt the Head</a:t>
+            </a:r>
+          </a:p>
+        </p:txBody>
+      </p:sp>
+      <p:sp>
+        <p:nvSpPr>
+          <p:cNvPr id="8" name="TextBox 7"/>
+          <p:cNvSpPr txBox="1"/>
+          <p:nvPr/>
+        </p:nvSpPr>
+        <p:spPr>
+          <a:xfrm>
+            <a:off x="548640" y="1920240"/>
+            <a:ext cx="10972800" cy="320040"/>
+          </a:xfrm>
+          <a:prstGeom prst="rect">
+            <a:avLst/>
+          </a:prstGeom>
+          <a:noFill/>
+        </p:spPr>
+        <p:txBody>
+          <a:bodyPr wrap="square" anchor="t">
+            <a:spAutoFit/>
+          </a:bodyPr>
+          <a:lstStyle/>
+          <a:p>
+            <a:pPr algn="l"/>
+            <a:r>
+              <a:rPr sz="1300" b="0">
+                <a:solidFill>
+                  <a:srgbClr val="5A5470"/>
+                </a:solidFill>
+                <a:latin typeface="DIN Next LT W23"/>
+                <a:ea typeface="DIN Next LT W23"/>
+                <a:cs typeface="DIN Next LT W23"/>
+              </a:rPr>
+              <a:t>Pretraining on ImageNet learns general filters you can reuse on a smaller target task.</a:t>
+            </a:r>
+          </a:p>
+        </p:txBody>
+      </p:sp>
+      <p:sp>
+        <p:nvSpPr>
+          <p:cNvPr id="9" name="Rounded Rectangle 8"/>
+          <p:cNvSpPr/>
+          <p:nvPr/>
+        </p:nvSpPr>
+        <p:spPr>
+          <a:xfrm>
+            <a:off x="548640" y="2240280"/>
+            <a:ext cx="10972800" cy="3977639"/>
+          </a:xfrm>
+          <a:prstGeom prst="roundRect">
+            <a:avLst>
+              <a:gd name="adj" fmla="val 10000"/>
+            </a:avLst>
+          </a:prstGeom>
+          <a:solidFill>
+            <a:srgbClr val="EEE8FA"/>
+          </a:solidFill>
+          <a:ln>
+            <a:noFill/>
+          </a:ln>
+          <a:effectLst/>
+        </p:spPr>
+        <p:style>
+          <a:lnRef idx="1">
+            <a:schemeClr val="accent1"/>
+          </a:lnRef>
+          <a:fillRef idx="3">
+            <a:schemeClr val="accent1"/>
+          </a:fillRef>
+          <a:effectRef idx="2">
+            <a:schemeClr val="accent1"/>
+          </a:effectRef>
+          <a:fontRef idx="minor">
+            <a:schemeClr val="lt1"/>
+          </a:fontRef>
+        </p:style>
+        <p:txBody>
+          <a:bodyPr rtlCol="0" anchor="ctr"/>
+          <a:lstStyle/>
+          <a:p>
+            <a:pPr algn="ctr"/>
+          </a:p>
+        </p:txBody>
+      </p:sp>
+      <p:pic>
+        <p:nvPicPr>
+          <p:cNvPr id="10" name="Picture 9" descr="transfer-learning.png"/>
+          <p:cNvPicPr>
+            <a:picLocks noChangeAspect="1"/>
+          </p:cNvPicPr>
+          <p:nvPr/>
+        </p:nvPicPr>
+        <p:blipFill>
+          <a:blip r:embed="rId3"/>
+          <a:stretch>
+            <a:fillRect/>
+          </a:stretch>
+        </p:blipFill>
+        <p:spPr>
+          <a:xfrm>
+            <a:off x="917147" y="2377440"/>
+            <a:ext cx="10235785" cy="3703320"/>
+          </a:xfrm>
+          <a:prstGeom prst="rect">
+            <a:avLst/>
+          </a:prstGeom>
+        </p:spPr>
+      </p:pic>
+      <p:sp>
+        <p:nvSpPr>
+          <p:cNvPr id="11" name="TextBox 10"/>
+          <p:cNvSpPr txBox="1"/>
+          <p:nvPr/>
+        </p:nvSpPr>
+        <p:spPr>
+          <a:xfrm>
+            <a:off x="548640" y="6309360"/>
+            <a:ext cx="10972800" cy="228600"/>
+          </a:xfrm>
+          <a:prstGeom prst="rect">
+            <a:avLst/>
+          </a:prstGeom>
+          <a:noFill/>
+        </p:spPr>
+        <p:txBody>
+          <a:bodyPr wrap="square" anchor="t">
+            <a:spAutoFit/>
+          </a:bodyPr>
+          <a:lstStyle/>
+          <a:p>
+            <a:pPr algn="l"/>
+            <a:r>
+              <a:rPr sz="1100" b="0">
+                <a:solidFill>
+                  <a:srgbClr val="5A5470"/>
+                </a:solidFill>
+                <a:latin typeface="DIN Next LT W23"/>
+                <a:ea typeface="DIN Next LT W23"/>
+                <a:cs typeface="DIN Next LT W23"/>
+              </a:rPr>
+              <a:t>Freeze the backbone when data is scarce; fine-tune top blocks when you have more labels.</a:t>
+            </a:r>
+          </a:p>
+        </p:txBody>
+      </p:sp>
+      <p:sp>
+        <p:nvSpPr>
+          <p:cNvPr id="12" name="Rectangle 11"/>
+          <p:cNvSpPr/>
+          <p:nvPr/>
+        </p:nvSpPr>
+        <p:spPr>
+          <a:xfrm>
+            <a:off x="548640" y="6446520"/>
+            <a:ext cx="11064240" cy="10972"/>
+          </a:xfrm>
+          <a:prstGeom prst="rect">
+            <a:avLst/>
+          </a:prstGeom>
+          <a:solidFill>
+            <a:srgbClr val="5234B7"/>
+          </a:solidFill>
+          <a:ln>
+            <a:noFill/>
+          </a:ln>
+          <a:effectLst/>
+        </p:spPr>
+        <p:style>
+          <a:lnRef idx="1">
+            <a:schemeClr val="accent1"/>
+          </a:lnRef>
+          <a:fillRef idx="3">
+            <a:schemeClr val="accent1"/>
+          </a:fillRef>
+          <a:effectRef idx="2">
+            <a:schemeClr val="accent1"/>
+          </a:effectRef>
+          <a:fontRef idx="minor">
+            <a:schemeClr val="lt1"/>
+          </a:fontRef>
+        </p:style>
+        <p:txBody>
+          <a:bodyPr rtlCol="0" anchor="ctr"/>
+          <a:lstStyle/>
+          <a:p>
+            <a:pPr algn="ctr"/>
+          </a:p>
+        </p:txBody>
+      </p:sp>
+      <p:sp>
+        <p:nvSpPr>
+          <p:cNvPr id="13" name="TextBox 12"/>
+          <p:cNvSpPr txBox="1"/>
+          <p:nvPr/>
+        </p:nvSpPr>
+        <p:spPr>
+          <a:xfrm>
+            <a:off x="548640" y="6510528"/>
+            <a:ext cx="2743200" cy="256032"/>
+          </a:xfrm>
+          <a:prstGeom prst="rect">
+            <a:avLst/>
+          </a:prstGeom>
+          <a:noFill/>
+        </p:spPr>
+        <p:txBody>
+          <a:bodyPr wrap="square" anchor="t">
+            <a:spAutoFit/>
+          </a:bodyPr>
+          <a:lstStyle/>
+          <a:p>
+            <a:pPr algn="l"/>
+            <a:r>
+              <a:rPr sz="1100" b="1">
+                <a:solidFill>
+                  <a:srgbClr val="5234B7"/>
+                </a:solidFill>
+                <a:latin typeface="DIN Next LT W23"/>
+                <a:ea typeface="DIN Next LT W23"/>
+                <a:cs typeface="DIN Next LT W23"/>
+              </a:rPr>
+              <a:t>ETRA</a:t>
+            </a:r>
+          </a:p>
+        </p:txBody>
+      </p:sp>
+      <p:sp>
+        <p:nvSpPr>
+          <p:cNvPr id="14" name="TextBox 13"/>
+          <p:cNvSpPr txBox="1"/>
+          <p:nvPr/>
+        </p:nvSpPr>
+        <p:spPr>
+          <a:xfrm>
+            <a:off x="9601200" y="6510528"/>
+            <a:ext cx="2011680" cy="256032"/>
+          </a:xfrm>
+          <a:prstGeom prst="rect">
+            <a:avLst/>
+          </a:prstGeom>
+          <a:noFill/>
+        </p:spPr>
+        <p:txBody>
+          <a:bodyPr wrap="square" anchor="t">
+            <a:spAutoFit/>
+          </a:bodyPr>
+          <a:lstStyle/>
+          <a:p>
+            <a:pPr algn="r"/>
+            <a:r>
+              <a:rPr sz="1100" b="0">
+                <a:solidFill>
+                  <a:srgbClr val="5A5470"/>
+                </a:solidFill>
+                <a:latin typeface="DIN Next LT W23"/>
+                <a:ea typeface="DIN Next LT W23"/>
+                <a:cs typeface="DIN Next LT W23"/>
+              </a:rPr>
+              <a:t>72  /  82</a:t>
+            </a:r>
+          </a:p>
+        </p:txBody>
+      </p:sp>
+    </p:spTree>
+  </p:cSld>
+  <p:clrMapOvr>
+    <a:masterClrMapping/>
+  </p:clrMapOvr>
+</p:sld>
+</file>
+
+<file path=ppt/slides/slide73.xml><?xml version="1.0" encoding="utf-8"?>
 <p:sld xmlns:a="http://schemas.openxmlformats.org/drawingml/2006/main" xmlns:p="http://schemas.openxmlformats.org/presentationml/2006/main" xmlns:r="http://schemas.openxmlformats.org/officeDocument/2006/relationships">
   <p:cSld>
     <p:bg>
@@ -46311,7 +47683,7 @@
                 <a:ea typeface="DIN Next LT W23"/>
                 <a:cs typeface="DIN Next LT W23"/>
               </a:rPr>
-              <a:t>70  /  79</a:t>
+              <a:t>73  /  82</a:t>
             </a:r>
           </a:p>
         </p:txBody>
@@ -46324,7 +47696,7 @@
 </p:sld>
 </file>
 
-<file path=ppt/slides/slide71.xml><?xml version="1.0" encoding="utf-8"?>
+<file path=ppt/slides/slide74.xml><?xml version="1.0" encoding="utf-8"?>
 <p:sld xmlns:a="http://schemas.openxmlformats.org/drawingml/2006/main" xmlns:p="http://schemas.openxmlformats.org/presentationml/2006/main" xmlns:r="http://schemas.openxmlformats.org/officeDocument/2006/relationships">
   <p:cSld>
     <p:bg>
@@ -46905,7 +48277,7 @@
                 <a:ea typeface="DIN Next LT W23"/>
                 <a:cs typeface="DIN Next LT W23"/>
               </a:rPr>
-              <a:t>71  /  79</a:t>
+              <a:t>74  /  82</a:t>
             </a:r>
           </a:p>
         </p:txBody>
@@ -46918,7 +48290,7 @@
 </p:sld>
 </file>
 
-<file path=ppt/slides/slide72.xml><?xml version="1.0" encoding="utf-8"?>
+<file path=ppt/slides/slide75.xml><?xml version="1.0" encoding="utf-8"?>
 <p:sld xmlns:a="http://schemas.openxmlformats.org/drawingml/2006/main" xmlns:p="http://schemas.openxmlformats.org/presentationml/2006/main" xmlns:r="http://schemas.openxmlformats.org/officeDocument/2006/relationships">
   <p:cSld>
     <p:bg>
@@ -47494,7 +48866,7 @@
                 <a:ea typeface="DIN Next LT W23"/>
                 <a:cs typeface="DIN Next LT W23"/>
               </a:rPr>
-              <a:t>72  /  79</a:t>
+              <a:t>75  /  82</a:t>
             </a:r>
           </a:p>
         </p:txBody>
@@ -47507,7 +48879,7 @@
 </p:sld>
 </file>
 
-<file path=ppt/slides/slide73.xml><?xml version="1.0" encoding="utf-8"?>
+<file path=ppt/slides/slide76.xml><?xml version="1.0" encoding="utf-8"?>
 <p:sld xmlns:a="http://schemas.openxmlformats.org/drawingml/2006/main" xmlns:p="http://schemas.openxmlformats.org/presentationml/2006/main" xmlns:r="http://schemas.openxmlformats.org/officeDocument/2006/relationships">
   <p:cSld>
     <p:bg>
@@ -48172,7 +49544,7 @@
                 <a:ea typeface="DIN Next LT W23"/>
                 <a:cs typeface="DIN Next LT W23"/>
               </a:rPr>
-              <a:t>73  /  79</a:t>
+              <a:t>76  /  82</a:t>
             </a:r>
           </a:p>
         </p:txBody>
@@ -48185,7 +49557,7 @@
 </p:sld>
 </file>
 
-<file path=ppt/slides/slide74.xml><?xml version="1.0" encoding="utf-8"?>
+<file path=ppt/slides/slide77.xml><?xml version="1.0" encoding="utf-8"?>
 <p:sld xmlns:a="http://schemas.openxmlformats.org/drawingml/2006/main" xmlns:p="http://schemas.openxmlformats.org/presentationml/2006/main" xmlns:r="http://schemas.openxmlformats.org/officeDocument/2006/relationships">
   <p:cSld>
     <p:bg>
@@ -48914,7 +50286,7 @@
                 <a:ea typeface="DIN Next LT W23"/>
                 <a:cs typeface="DIN Next LT W23"/>
               </a:rPr>
-              <a:t>74  /  79</a:t>
+              <a:t>77  /  82</a:t>
             </a:r>
           </a:p>
         </p:txBody>
@@ -48927,7 +50299,7 @@
 </p:sld>
 </file>
 
-<file path=ppt/slides/slide75.xml><?xml version="1.0" encoding="utf-8"?>
+<file path=ppt/slides/slide78.xml><?xml version="1.0" encoding="utf-8"?>
 <p:sld xmlns:a="http://schemas.openxmlformats.org/drawingml/2006/main" xmlns:p="http://schemas.openxmlformats.org/presentationml/2006/main" xmlns:r="http://schemas.openxmlformats.org/officeDocument/2006/relationships">
   <p:cSld>
     <p:bg>
@@ -49388,7 +50760,7 @@
                 <a:ea typeface="DIN Next LT W23"/>
                 <a:cs typeface="DIN Next LT W23"/>
               </a:rPr>
-              <a:t>75  /  79</a:t>
+              <a:t>78  /  82</a:t>
             </a:r>
           </a:p>
         </p:txBody>
@@ -49401,7 +50773,7 @@
 </p:sld>
 </file>
 
-<file path=ppt/slides/slide76.xml><?xml version="1.0" encoding="utf-8"?>
+<file path=ppt/slides/slide79.xml><?xml version="1.0" encoding="utf-8"?>
 <p:sld xmlns:a="http://schemas.openxmlformats.org/drawingml/2006/main" xmlns:p="http://schemas.openxmlformats.org/presentationml/2006/main" xmlns:r="http://schemas.openxmlformats.org/officeDocument/2006/relationships">
   <p:cSld>
     <p:bg>
@@ -49899,7 +51271,7 @@
                 <a:ea typeface="DIN Next LT W23"/>
                 <a:cs typeface="DIN Next LT W23"/>
               </a:rPr>
-              <a:t>76  /  79</a:t>
+              <a:t>79  /  82</a:t>
             </a:r>
           </a:p>
         </p:txBody>
@@ -49912,7 +51284,675 @@
 </p:sld>
 </file>
 
-<file path=ppt/slides/slide77.xml><?xml version="1.0" encoding="utf-8"?>
+<file path=ppt/slides/slide8.xml><?xml version="1.0" encoding="utf-8"?>
+<p:sld xmlns:a="http://schemas.openxmlformats.org/drawingml/2006/main" xmlns:p="http://schemas.openxmlformats.org/presentationml/2006/main" xmlns:r="http://schemas.openxmlformats.org/officeDocument/2006/relationships">
+  <p:cSld>
+    <p:bg>
+      <p:bgPr>
+        <a:solidFill>
+          <a:srgbClr val="FAF8FF"/>
+        </a:solidFill>
+        <a:effectLst/>
+      </p:bgPr>
+    </p:bg>
+    <p:spTree>
+      <p:nvGrpSpPr>
+        <p:cNvPr id="1" name=""/>
+        <p:cNvGrpSpPr/>
+        <p:nvPr/>
+      </p:nvGrpSpPr>
+      <p:grpSpPr/>
+      <p:sp>
+        <p:nvSpPr>
+          <p:cNvPr id="2" name="Rectangle 1"/>
+          <p:cNvSpPr/>
+          <p:nvPr/>
+        </p:nvSpPr>
+        <p:spPr>
+          <a:xfrm>
+            <a:off x="12136831" y="0"/>
+            <a:ext cx="54864" cy="6858000"/>
+          </a:xfrm>
+          <a:prstGeom prst="rect">
+            <a:avLst/>
+          </a:prstGeom>
+          <a:solidFill>
+            <a:srgbClr val="5234B7"/>
+          </a:solidFill>
+          <a:ln>
+            <a:noFill/>
+          </a:ln>
+          <a:effectLst/>
+        </p:spPr>
+        <p:style>
+          <a:lnRef idx="1">
+            <a:schemeClr val="accent1"/>
+          </a:lnRef>
+          <a:fillRef idx="3">
+            <a:schemeClr val="accent1"/>
+          </a:fillRef>
+          <a:effectRef idx="2">
+            <a:schemeClr val="accent1"/>
+          </a:effectRef>
+          <a:fontRef idx="minor">
+            <a:schemeClr val="lt1"/>
+          </a:fontRef>
+        </p:style>
+        <p:txBody>
+          <a:bodyPr rtlCol="0" anchor="ctr"/>
+          <a:lstStyle/>
+          <a:p>
+            <a:pPr algn="ctr"/>
+          </a:p>
+        </p:txBody>
+      </p:sp>
+      <p:pic>
+        <p:nvPicPr>
+          <p:cNvPr id="3" name="Picture 2" descr="etra-wordmark.png"/>
+          <p:cNvPicPr>
+            <a:picLocks noChangeAspect="1"/>
+          </p:cNvPicPr>
+          <p:nvPr/>
+        </p:nvPicPr>
+        <p:blipFill>
+          <a:blip r:embed="rId2"/>
+          <a:stretch>
+            <a:fillRect/>
+          </a:stretch>
+        </p:blipFill>
+        <p:spPr>
+          <a:xfrm>
+            <a:off x="10561320" y="411480"/>
+            <a:ext cx="1206201" cy="320040"/>
+          </a:xfrm>
+          <a:prstGeom prst="rect">
+            <a:avLst/>
+          </a:prstGeom>
+        </p:spPr>
+      </p:pic>
+      <p:sp>
+        <p:nvSpPr>
+          <p:cNvPr id="4" name="TextBox 3"/>
+          <p:cNvSpPr txBox="1"/>
+          <p:nvPr/>
+        </p:nvSpPr>
+        <p:spPr>
+          <a:xfrm>
+            <a:off x="548640" y="438912"/>
+            <a:ext cx="7772400" cy="274320"/>
+          </a:xfrm>
+          <a:prstGeom prst="rect">
+            <a:avLst/>
+          </a:prstGeom>
+          <a:noFill/>
+        </p:spPr>
+        <p:txBody>
+          <a:bodyPr wrap="square" anchor="t">
+            <a:spAutoFit/>
+          </a:bodyPr>
+          <a:lstStyle/>
+          <a:p>
+            <a:pPr algn="l"/>
+            <a:r>
+              <a:rPr sz="1200" b="0">
+                <a:solidFill>
+                  <a:srgbClr val="5A5470"/>
+                </a:solidFill>
+                <a:latin typeface="DIN Next LT W23"/>
+                <a:ea typeface="DIN Next LT W23"/>
+                <a:cs typeface="DIN Next LT W23"/>
+              </a:rPr>
+              <a:t>S07  ·  Deep Learning</a:t>
+            </a:r>
+          </a:p>
+        </p:txBody>
+      </p:sp>
+      <p:sp>
+        <p:nvSpPr>
+          <p:cNvPr id="5" name="Rectangle 4"/>
+          <p:cNvSpPr/>
+          <p:nvPr/>
+        </p:nvSpPr>
+        <p:spPr>
+          <a:xfrm>
+            <a:off x="548640" y="822960"/>
+            <a:ext cx="11064240" cy="10972"/>
+          </a:xfrm>
+          <a:prstGeom prst="rect">
+            <a:avLst/>
+          </a:prstGeom>
+          <a:solidFill>
+            <a:srgbClr val="E4DCF4"/>
+          </a:solidFill>
+          <a:ln>
+            <a:noFill/>
+          </a:ln>
+          <a:effectLst/>
+        </p:spPr>
+        <p:style>
+          <a:lnRef idx="1">
+            <a:schemeClr val="accent1"/>
+          </a:lnRef>
+          <a:fillRef idx="3">
+            <a:schemeClr val="accent1"/>
+          </a:fillRef>
+          <a:effectRef idx="2">
+            <a:schemeClr val="accent1"/>
+          </a:effectRef>
+          <a:fontRef idx="minor">
+            <a:schemeClr val="lt1"/>
+          </a:fontRef>
+        </p:style>
+        <p:txBody>
+          <a:bodyPr rtlCol="0" anchor="ctr"/>
+          <a:lstStyle/>
+          <a:p>
+            <a:pPr algn="ctr"/>
+          </a:p>
+        </p:txBody>
+      </p:sp>
+      <p:sp>
+        <p:nvSpPr>
+          <p:cNvPr id="6" name="TextBox 5"/>
+          <p:cNvSpPr txBox="1"/>
+          <p:nvPr/>
+        </p:nvSpPr>
+        <p:spPr>
+          <a:xfrm>
+            <a:off x="548640" y="1051560"/>
+            <a:ext cx="10241280" cy="594360"/>
+          </a:xfrm>
+          <a:prstGeom prst="rect">
+            <a:avLst/>
+          </a:prstGeom>
+          <a:noFill/>
+        </p:spPr>
+        <p:txBody>
+          <a:bodyPr wrap="square" anchor="t">
+            <a:spAutoFit/>
+          </a:bodyPr>
+          <a:lstStyle/>
+          <a:p>
+            <a:pPr algn="l"/>
+            <a:r>
+              <a:rPr sz="3200" b="1">
+                <a:solidFill>
+                  <a:srgbClr val="5234B7"/>
+                </a:solidFill>
+                <a:latin typeface="DIN Next LT W23"/>
+                <a:ea typeface="DIN Next LT W23"/>
+                <a:cs typeface="DIN Next LT W23"/>
+              </a:rPr>
+              <a:t>Phase 1 Roadmap</a:t>
+            </a:r>
+          </a:p>
+        </p:txBody>
+      </p:sp>
+      <p:sp>
+        <p:nvSpPr>
+          <p:cNvPr id="7" name="TextBox 6"/>
+          <p:cNvSpPr txBox="1"/>
+          <p:nvPr/>
+        </p:nvSpPr>
+        <p:spPr>
+          <a:xfrm>
+            <a:off x="548640" y="1600200"/>
+            <a:ext cx="10241280" cy="365760"/>
+          </a:xfrm>
+          <a:prstGeom prst="rect">
+            <a:avLst/>
+          </a:prstGeom>
+          <a:noFill/>
+        </p:spPr>
+        <p:txBody>
+          <a:bodyPr wrap="square" anchor="t">
+            <a:spAutoFit/>
+          </a:bodyPr>
+          <a:lstStyle/>
+          <a:p>
+            <a:pPr algn="l"/>
+            <a:r>
+              <a:rPr sz="1500" b="0">
+                <a:solidFill>
+                  <a:srgbClr val="5A5470"/>
+                </a:solidFill>
+                <a:latin typeface="DIN Next LT W23"/>
+                <a:ea typeface="DIN Next LT W23"/>
+                <a:cs typeface="DIN Next LT W23"/>
+              </a:rPr>
+              <a:t>Why depth, neurons, and forward pass</a:t>
+            </a:r>
+          </a:p>
+        </p:txBody>
+      </p:sp>
+      <p:graphicFrame>
+        <p:nvGraphicFramePr>
+          <p:cNvPr id="8" name="Table 7"/>
+          <p:cNvGraphicFramePr>
+            <a:graphicFrameLocks noGrp="1"/>
+          </p:cNvGraphicFramePr>
+          <p:nvPr/>
+        </p:nvGraphicFramePr>
+        <p:xfrm>
+          <a:off x="548640" y="2057400"/>
+          <a:ext cx="10972800" cy="1901952"/>
+        </p:xfrm>
+        <a:graphic>
+          <a:graphicData uri="http://schemas.openxmlformats.org/drawingml/2006/table">
+            <a:tbl>
+              <a:tblPr firstRow="1" bandRow="1">
+                <a:tableStyleId>{5C22544A-7EE6-4342-B048-85BDC9FD1C3A}</a:tableStyleId>
+              </a:tblPr>
+              <a:tblGrid>
+                <a:gridCol w="5486400"/>
+                <a:gridCol w="5486400"/>
+              </a:tblGrid>
+              <a:tr h="475488">
+                <a:tc>
+                  <a:txBody>
+                    <a:bodyPr/>
+                    <a:lstStyle/>
+                    <a:p>
+                      <a:pPr algn="ctr"/>
+                      <a:r>
+                        <a:rPr sz="1200" b="1">
+                          <a:solidFill>
+                            <a:srgbClr val="FFFFFF"/>
+                          </a:solidFill>
+                          <a:latin typeface="Helvetica"/>
+                        </a:rPr>
+                        <a:t>Block</a:t>
+                      </a:r>
+                    </a:p>
+                  </a:txBody>
+                  <a:tcPr>
+                    <a:solidFill>
+                      <a:srgbClr val="5234B7"/>
+                    </a:solidFill>
+                  </a:tcPr>
+                </a:tc>
+                <a:tc>
+                  <a:txBody>
+                    <a:bodyPr/>
+                    <a:lstStyle/>
+                    <a:p>
+                      <a:pPr algn="ctr"/>
+                      <a:r>
+                        <a:rPr sz="1200" b="1">
+                          <a:solidFill>
+                            <a:srgbClr val="FFFFFF"/>
+                          </a:solidFill>
+                          <a:latin typeface="Helvetica"/>
+                        </a:rPr>
+                        <a:t>Question it answers</a:t>
+                      </a:r>
+                    </a:p>
+                  </a:txBody>
+                  <a:tcPr>
+                    <a:solidFill>
+                      <a:srgbClr val="5234B7"/>
+                    </a:solidFill>
+                  </a:tcPr>
+                </a:tc>
+              </a:tr>
+              <a:tr h="475488">
+                <a:tc>
+                  <a:txBody>
+                    <a:bodyPr/>
+                    <a:lstStyle/>
+                    <a:p>
+                      <a:pPr algn="l"/>
+                      <a:r>
+                        <a:rPr sz="1300" b="1">
+                          <a:solidFill>
+                            <a:srgbClr val="5234B7"/>
+                          </a:solidFill>
+                          <a:latin typeface="Helvetica"/>
+                        </a:rPr>
+                        <a:t>Perceptron &amp; MLP</a:t>
+                      </a:r>
+                    </a:p>
+                  </a:txBody>
+                  <a:tcPr>
+                    <a:solidFill>
+                      <a:srgbClr val="EEE8FA"/>
+                    </a:solidFill>
+                  </a:tcPr>
+                </a:tc>
+                <a:tc>
+                  <a:txBody>
+                    <a:bodyPr/>
+                    <a:lstStyle/>
+                    <a:p>
+                      <a:pPr algn="l"/>
+                      <a:r>
+                        <a:rPr sz="1300" b="0">
+                          <a:solidFill>
+                            <a:srgbClr val="121018"/>
+                          </a:solidFill>
+                          <a:latin typeface="Helvetica"/>
+                        </a:rPr>
+                        <a:t>What does one layer compute?</a:t>
+                      </a:r>
+                    </a:p>
+                  </a:txBody>
+                  <a:tcPr>
+                    <a:solidFill>
+                      <a:srgbClr val="EEE8FA"/>
+                    </a:solidFill>
+                  </a:tcPr>
+                </a:tc>
+              </a:tr>
+              <a:tr h="475488">
+                <a:tc>
+                  <a:txBody>
+                    <a:bodyPr/>
+                    <a:lstStyle/>
+                    <a:p>
+                      <a:pPr algn="l"/>
+                      <a:r>
+                        <a:rPr sz="1300" b="1">
+                          <a:solidFill>
+                            <a:srgbClr val="5234B7"/>
+                          </a:solidFill>
+                          <a:latin typeface="Helvetica"/>
+                        </a:rPr>
+                        <a:t>Forward pass</a:t>
+                      </a:r>
+                    </a:p>
+                  </a:txBody>
+                  <a:tcPr>
+                    <a:solidFill>
+                      <a:srgbClr val="F5F1FC"/>
+                    </a:solidFill>
+                  </a:tcPr>
+                </a:tc>
+                <a:tc>
+                  <a:txBody>
+                    <a:bodyPr/>
+                    <a:lstStyle/>
+                    <a:p>
+                      <a:pPr algn="l"/>
+                      <a:r>
+                        <a:rPr sz="1300" b="0">
+                          <a:solidFill>
+                            <a:srgbClr val="121018"/>
+                          </a:solidFill>
+                          <a:latin typeface="Helvetica"/>
+                        </a:rPr>
+                        <a:t>How does inference flow through the graph?</a:t>
+                      </a:r>
+                    </a:p>
+                  </a:txBody>
+                  <a:tcPr>
+                    <a:solidFill>
+                      <a:srgbClr val="F5F1FC"/>
+                    </a:solidFill>
+                  </a:tcPr>
+                </a:tc>
+              </a:tr>
+              <a:tr h="475488">
+                <a:tc>
+                  <a:txBody>
+                    <a:bodyPr/>
+                    <a:lstStyle/>
+                    <a:p>
+                      <a:pPr algn="l"/>
+                      <a:r>
+                        <a:rPr sz="1300" b="1">
+                          <a:solidFill>
+                            <a:srgbClr val="5234B7"/>
+                          </a:solidFill>
+                          <a:latin typeface="Helvetica"/>
+                        </a:rPr>
+                        <a:t>Loss &amp; gradients</a:t>
+                      </a:r>
+                    </a:p>
+                  </a:txBody>
+                  <a:tcPr>
+                    <a:solidFill>
+                      <a:srgbClr val="EEE8FA"/>
+                    </a:solidFill>
+                  </a:tcPr>
+                </a:tc>
+                <a:tc>
+                  <a:txBody>
+                    <a:bodyPr/>
+                    <a:lstStyle/>
+                    <a:p>
+                      <a:pPr algn="l"/>
+                      <a:r>
+                        <a:rPr sz="1300" b="0">
+                          <a:solidFill>
+                            <a:srgbClr val="121018"/>
+                          </a:solidFill>
+                          <a:latin typeface="Helvetica"/>
+                        </a:rPr>
+                        <a:t>What are we optimizing?</a:t>
+                      </a:r>
+                    </a:p>
+                  </a:txBody>
+                  <a:tcPr>
+                    <a:solidFill>
+                      <a:srgbClr val="EEE8FA"/>
+                    </a:solidFill>
+                  </a:tcPr>
+                </a:tc>
+              </a:tr>
+            </a:tbl>
+          </a:graphicData>
+        </a:graphic>
+      </p:graphicFrame>
+      <p:sp>
+        <p:nvSpPr>
+          <p:cNvPr id="9" name="Rounded Rectangle 8"/>
+          <p:cNvSpPr/>
+          <p:nvPr/>
+        </p:nvSpPr>
+        <p:spPr>
+          <a:xfrm>
+            <a:off x="548640" y="4032504"/>
+            <a:ext cx="10972800" cy="411480"/>
+          </a:xfrm>
+          <a:prstGeom prst="roundRect">
+            <a:avLst>
+              <a:gd name="adj" fmla="val 10000"/>
+            </a:avLst>
+          </a:prstGeom>
+          <a:solidFill>
+            <a:srgbClr val="EEE8FA"/>
+          </a:solidFill>
+          <a:ln>
+            <a:noFill/>
+          </a:ln>
+          <a:effectLst/>
+        </p:spPr>
+        <p:style>
+          <a:lnRef idx="1">
+            <a:schemeClr val="accent1"/>
+          </a:lnRef>
+          <a:fillRef idx="3">
+            <a:schemeClr val="accent1"/>
+          </a:fillRef>
+          <a:effectRef idx="2">
+            <a:schemeClr val="accent1"/>
+          </a:effectRef>
+          <a:fontRef idx="minor">
+            <a:schemeClr val="lt1"/>
+          </a:fontRef>
+        </p:style>
+        <p:txBody>
+          <a:bodyPr rtlCol="0" anchor="ctr"/>
+          <a:lstStyle/>
+          <a:p>
+            <a:pPr algn="ctr"/>
+          </a:p>
+        </p:txBody>
+      </p:sp>
+      <p:sp>
+        <p:nvSpPr>
+          <p:cNvPr id="10" name="TextBox 9"/>
+          <p:cNvSpPr txBox="1"/>
+          <p:nvPr/>
+        </p:nvSpPr>
+        <p:spPr>
+          <a:xfrm>
+            <a:off x="868680" y="4105656"/>
+            <a:ext cx="10332720" cy="292608"/>
+          </a:xfrm>
+          <a:prstGeom prst="rect">
+            <a:avLst/>
+          </a:prstGeom>
+          <a:noFill/>
+        </p:spPr>
+        <p:txBody>
+          <a:bodyPr wrap="square" anchor="t">
+            <a:spAutoFit/>
+          </a:bodyPr>
+          <a:lstStyle/>
+          <a:p>
+            <a:pPr algn="l"/>
+            <a:r>
+              <a:rPr sz="1200" b="0">
+                <a:solidFill>
+                  <a:srgbClr val="5A5470"/>
+                </a:solidFill>
+                <a:latin typeface="DIN Next LT W23"/>
+                <a:ea typeface="DIN Next LT W23"/>
+                <a:cs typeface="DIN Next LT W23"/>
+              </a:rPr>
+              <a:t>Exit check: explain z = w·x + b and why nonlinearity is required between layers.</a:t>
+            </a:r>
+          </a:p>
+        </p:txBody>
+      </p:sp>
+      <p:sp>
+        <p:nvSpPr>
+          <p:cNvPr id="11" name="Rectangle 10"/>
+          <p:cNvSpPr/>
+          <p:nvPr/>
+        </p:nvSpPr>
+        <p:spPr>
+          <a:xfrm>
+            <a:off x="548640" y="6446520"/>
+            <a:ext cx="11064240" cy="10972"/>
+          </a:xfrm>
+          <a:prstGeom prst="rect">
+            <a:avLst/>
+          </a:prstGeom>
+          <a:solidFill>
+            <a:srgbClr val="5234B7"/>
+          </a:solidFill>
+          <a:ln>
+            <a:noFill/>
+          </a:ln>
+          <a:effectLst/>
+        </p:spPr>
+        <p:style>
+          <a:lnRef idx="1">
+            <a:schemeClr val="accent1"/>
+          </a:lnRef>
+          <a:fillRef idx="3">
+            <a:schemeClr val="accent1"/>
+          </a:fillRef>
+          <a:effectRef idx="2">
+            <a:schemeClr val="accent1"/>
+          </a:effectRef>
+          <a:fontRef idx="minor">
+            <a:schemeClr val="lt1"/>
+          </a:fontRef>
+        </p:style>
+        <p:txBody>
+          <a:bodyPr rtlCol="0" anchor="ctr"/>
+          <a:lstStyle/>
+          <a:p>
+            <a:pPr algn="ctr"/>
+          </a:p>
+        </p:txBody>
+      </p:sp>
+      <p:sp>
+        <p:nvSpPr>
+          <p:cNvPr id="12" name="TextBox 11"/>
+          <p:cNvSpPr txBox="1"/>
+          <p:nvPr/>
+        </p:nvSpPr>
+        <p:spPr>
+          <a:xfrm>
+            <a:off x="548640" y="6510528"/>
+            <a:ext cx="2743200" cy="256032"/>
+          </a:xfrm>
+          <a:prstGeom prst="rect">
+            <a:avLst/>
+          </a:prstGeom>
+          <a:noFill/>
+        </p:spPr>
+        <p:txBody>
+          <a:bodyPr wrap="square" anchor="t">
+            <a:spAutoFit/>
+          </a:bodyPr>
+          <a:lstStyle/>
+          <a:p>
+            <a:pPr algn="l"/>
+            <a:r>
+              <a:rPr sz="1100" b="1">
+                <a:solidFill>
+                  <a:srgbClr val="5234B7"/>
+                </a:solidFill>
+                <a:latin typeface="DIN Next LT W23"/>
+                <a:ea typeface="DIN Next LT W23"/>
+                <a:cs typeface="DIN Next LT W23"/>
+              </a:rPr>
+              <a:t>ETRA</a:t>
+            </a:r>
+          </a:p>
+        </p:txBody>
+      </p:sp>
+      <p:sp>
+        <p:nvSpPr>
+          <p:cNvPr id="13" name="TextBox 12"/>
+          <p:cNvSpPr txBox="1"/>
+          <p:nvPr/>
+        </p:nvSpPr>
+        <p:spPr>
+          <a:xfrm>
+            <a:off x="9601200" y="6510528"/>
+            <a:ext cx="2011680" cy="256032"/>
+          </a:xfrm>
+          <a:prstGeom prst="rect">
+            <a:avLst/>
+          </a:prstGeom>
+          <a:noFill/>
+        </p:spPr>
+        <p:txBody>
+          <a:bodyPr wrap="square" anchor="t">
+            <a:spAutoFit/>
+          </a:bodyPr>
+          <a:lstStyle/>
+          <a:p>
+            <a:pPr algn="r"/>
+            <a:r>
+              <a:rPr sz="1100" b="0">
+                <a:solidFill>
+                  <a:srgbClr val="5A5470"/>
+                </a:solidFill>
+                <a:latin typeface="DIN Next LT W23"/>
+                <a:ea typeface="DIN Next LT W23"/>
+                <a:cs typeface="DIN Next LT W23"/>
+              </a:rPr>
+              <a:t>08  /  82</a:t>
+            </a:r>
+          </a:p>
+        </p:txBody>
+      </p:sp>
+    </p:spTree>
+  </p:cSld>
+  <p:clrMapOvr>
+    <a:masterClrMapping/>
+  </p:clrMapOvr>
+</p:sld>
+</file>
+
+<file path=ppt/slides/slide80.xml><?xml version="1.0" encoding="utf-8"?>
 <p:sld xmlns:a="http://schemas.openxmlformats.org/drawingml/2006/main" xmlns:p="http://schemas.openxmlformats.org/presentationml/2006/main" xmlns:r="http://schemas.openxmlformats.org/officeDocument/2006/relationships">
   <p:cSld>
     <p:bg>
@@ -50567,7 +52607,7 @@
                 <a:ea typeface="DIN Next LT W23"/>
                 <a:cs typeface="DIN Next LT W23"/>
               </a:rPr>
-              <a:t>77  /  79</a:t>
+              <a:t>80  /  82</a:t>
             </a:r>
           </a:p>
         </p:txBody>
@@ -50580,7 +52620,7 @@
 </p:sld>
 </file>
 
-<file path=ppt/slides/slide78.xml><?xml version="1.0" encoding="utf-8"?>
+<file path=ppt/slides/slide81.xml><?xml version="1.0" encoding="utf-8"?>
 <p:sld xmlns:a="http://schemas.openxmlformats.org/drawingml/2006/main" xmlns:p="http://schemas.openxmlformats.org/presentationml/2006/main" xmlns:r="http://schemas.openxmlformats.org/officeDocument/2006/relationships">
   <p:cSld>
     <p:bg>
@@ -51294,7 +53334,7 @@
                 <a:ea typeface="DIN Next LT W23"/>
                 <a:cs typeface="DIN Next LT W23"/>
               </a:rPr>
-              <a:t>78  /  79</a:t>
+              <a:t>81  /  82</a:t>
             </a:r>
           </a:p>
         </p:txBody>
@@ -51307,7 +53347,7 @@
 </p:sld>
 </file>
 
-<file path=ppt/slides/slide79.xml><?xml version="1.0" encoding="utf-8"?>
+<file path=ppt/slides/slide82.xml><?xml version="1.0" encoding="utf-8"?>
 <p:sld xmlns:a="http://schemas.openxmlformats.org/drawingml/2006/main" xmlns:p="http://schemas.openxmlformats.org/presentationml/2006/main" xmlns:r="http://schemas.openxmlformats.org/officeDocument/2006/relationships">
   <p:cSld>
     <p:bg>
@@ -51617,675 +53657,7 @@
                 <a:ea typeface="DIN Next LT W23"/>
                 <a:cs typeface="DIN Next LT W23"/>
               </a:rPr>
-              <a:t>79  /  79</a:t>
-            </a:r>
-          </a:p>
-        </p:txBody>
-      </p:sp>
-    </p:spTree>
-  </p:cSld>
-  <p:clrMapOvr>
-    <a:masterClrMapping/>
-  </p:clrMapOvr>
-</p:sld>
-</file>
-
-<file path=ppt/slides/slide8.xml><?xml version="1.0" encoding="utf-8"?>
-<p:sld xmlns:a="http://schemas.openxmlformats.org/drawingml/2006/main" xmlns:p="http://schemas.openxmlformats.org/presentationml/2006/main" xmlns:r="http://schemas.openxmlformats.org/officeDocument/2006/relationships">
-  <p:cSld>
-    <p:bg>
-      <p:bgPr>
-        <a:solidFill>
-          <a:srgbClr val="FAF8FF"/>
-        </a:solidFill>
-        <a:effectLst/>
-      </p:bgPr>
-    </p:bg>
-    <p:spTree>
-      <p:nvGrpSpPr>
-        <p:cNvPr id="1" name=""/>
-        <p:cNvGrpSpPr/>
-        <p:nvPr/>
-      </p:nvGrpSpPr>
-      <p:grpSpPr/>
-      <p:sp>
-        <p:nvSpPr>
-          <p:cNvPr id="2" name="Rectangle 1"/>
-          <p:cNvSpPr/>
-          <p:nvPr/>
-        </p:nvSpPr>
-        <p:spPr>
-          <a:xfrm>
-            <a:off x="12136831" y="0"/>
-            <a:ext cx="54864" cy="6858000"/>
-          </a:xfrm>
-          <a:prstGeom prst="rect">
-            <a:avLst/>
-          </a:prstGeom>
-          <a:solidFill>
-            <a:srgbClr val="5234B7"/>
-          </a:solidFill>
-          <a:ln>
-            <a:noFill/>
-          </a:ln>
-          <a:effectLst/>
-        </p:spPr>
-        <p:style>
-          <a:lnRef idx="1">
-            <a:schemeClr val="accent1"/>
-          </a:lnRef>
-          <a:fillRef idx="3">
-            <a:schemeClr val="accent1"/>
-          </a:fillRef>
-          <a:effectRef idx="2">
-            <a:schemeClr val="accent1"/>
-          </a:effectRef>
-          <a:fontRef idx="minor">
-            <a:schemeClr val="lt1"/>
-          </a:fontRef>
-        </p:style>
-        <p:txBody>
-          <a:bodyPr rtlCol="0" anchor="ctr"/>
-          <a:lstStyle/>
-          <a:p>
-            <a:pPr algn="ctr"/>
-          </a:p>
-        </p:txBody>
-      </p:sp>
-      <p:pic>
-        <p:nvPicPr>
-          <p:cNvPr id="3" name="Picture 2" descr="etra-wordmark.png"/>
-          <p:cNvPicPr>
-            <a:picLocks noChangeAspect="1"/>
-          </p:cNvPicPr>
-          <p:nvPr/>
-        </p:nvPicPr>
-        <p:blipFill>
-          <a:blip r:embed="rId2"/>
-          <a:stretch>
-            <a:fillRect/>
-          </a:stretch>
-        </p:blipFill>
-        <p:spPr>
-          <a:xfrm>
-            <a:off x="10561320" y="411480"/>
-            <a:ext cx="1206201" cy="320040"/>
-          </a:xfrm>
-          <a:prstGeom prst="rect">
-            <a:avLst/>
-          </a:prstGeom>
-        </p:spPr>
-      </p:pic>
-      <p:sp>
-        <p:nvSpPr>
-          <p:cNvPr id="4" name="TextBox 3"/>
-          <p:cNvSpPr txBox="1"/>
-          <p:nvPr/>
-        </p:nvSpPr>
-        <p:spPr>
-          <a:xfrm>
-            <a:off x="548640" y="438912"/>
-            <a:ext cx="7772400" cy="274320"/>
-          </a:xfrm>
-          <a:prstGeom prst="rect">
-            <a:avLst/>
-          </a:prstGeom>
-          <a:noFill/>
-        </p:spPr>
-        <p:txBody>
-          <a:bodyPr wrap="square" anchor="t">
-            <a:spAutoFit/>
-          </a:bodyPr>
-          <a:lstStyle/>
-          <a:p>
-            <a:pPr algn="l"/>
-            <a:r>
-              <a:rPr sz="1200" b="0">
-                <a:solidFill>
-                  <a:srgbClr val="5A5470"/>
-                </a:solidFill>
-                <a:latin typeface="DIN Next LT W23"/>
-                <a:ea typeface="DIN Next LT W23"/>
-                <a:cs typeface="DIN Next LT W23"/>
-              </a:rPr>
-              <a:t>S07  ·  Deep Learning</a:t>
-            </a:r>
-          </a:p>
-        </p:txBody>
-      </p:sp>
-      <p:sp>
-        <p:nvSpPr>
-          <p:cNvPr id="5" name="Rectangle 4"/>
-          <p:cNvSpPr/>
-          <p:nvPr/>
-        </p:nvSpPr>
-        <p:spPr>
-          <a:xfrm>
-            <a:off x="548640" y="822960"/>
-            <a:ext cx="11064240" cy="10972"/>
-          </a:xfrm>
-          <a:prstGeom prst="rect">
-            <a:avLst/>
-          </a:prstGeom>
-          <a:solidFill>
-            <a:srgbClr val="E4DCF4"/>
-          </a:solidFill>
-          <a:ln>
-            <a:noFill/>
-          </a:ln>
-          <a:effectLst/>
-        </p:spPr>
-        <p:style>
-          <a:lnRef idx="1">
-            <a:schemeClr val="accent1"/>
-          </a:lnRef>
-          <a:fillRef idx="3">
-            <a:schemeClr val="accent1"/>
-          </a:fillRef>
-          <a:effectRef idx="2">
-            <a:schemeClr val="accent1"/>
-          </a:effectRef>
-          <a:fontRef idx="minor">
-            <a:schemeClr val="lt1"/>
-          </a:fontRef>
-        </p:style>
-        <p:txBody>
-          <a:bodyPr rtlCol="0" anchor="ctr"/>
-          <a:lstStyle/>
-          <a:p>
-            <a:pPr algn="ctr"/>
-          </a:p>
-        </p:txBody>
-      </p:sp>
-      <p:sp>
-        <p:nvSpPr>
-          <p:cNvPr id="6" name="TextBox 5"/>
-          <p:cNvSpPr txBox="1"/>
-          <p:nvPr/>
-        </p:nvSpPr>
-        <p:spPr>
-          <a:xfrm>
-            <a:off x="548640" y="1051560"/>
-            <a:ext cx="10241280" cy="594360"/>
-          </a:xfrm>
-          <a:prstGeom prst="rect">
-            <a:avLst/>
-          </a:prstGeom>
-          <a:noFill/>
-        </p:spPr>
-        <p:txBody>
-          <a:bodyPr wrap="square" anchor="t">
-            <a:spAutoFit/>
-          </a:bodyPr>
-          <a:lstStyle/>
-          <a:p>
-            <a:pPr algn="l"/>
-            <a:r>
-              <a:rPr sz="3200" b="1">
-                <a:solidFill>
-                  <a:srgbClr val="5234B7"/>
-                </a:solidFill>
-                <a:latin typeface="DIN Next LT W23"/>
-                <a:ea typeface="DIN Next LT W23"/>
-                <a:cs typeface="DIN Next LT W23"/>
-              </a:rPr>
-              <a:t>Phase 1 Roadmap</a:t>
-            </a:r>
-          </a:p>
-        </p:txBody>
-      </p:sp>
-      <p:sp>
-        <p:nvSpPr>
-          <p:cNvPr id="7" name="TextBox 6"/>
-          <p:cNvSpPr txBox="1"/>
-          <p:nvPr/>
-        </p:nvSpPr>
-        <p:spPr>
-          <a:xfrm>
-            <a:off x="548640" y="1600200"/>
-            <a:ext cx="10241280" cy="365760"/>
-          </a:xfrm>
-          <a:prstGeom prst="rect">
-            <a:avLst/>
-          </a:prstGeom>
-          <a:noFill/>
-        </p:spPr>
-        <p:txBody>
-          <a:bodyPr wrap="square" anchor="t">
-            <a:spAutoFit/>
-          </a:bodyPr>
-          <a:lstStyle/>
-          <a:p>
-            <a:pPr algn="l"/>
-            <a:r>
-              <a:rPr sz="1500" b="0">
-                <a:solidFill>
-                  <a:srgbClr val="5A5470"/>
-                </a:solidFill>
-                <a:latin typeface="DIN Next LT W23"/>
-                <a:ea typeface="DIN Next LT W23"/>
-                <a:cs typeface="DIN Next LT W23"/>
-              </a:rPr>
-              <a:t>Why depth, neurons, and forward pass</a:t>
-            </a:r>
-          </a:p>
-        </p:txBody>
-      </p:sp>
-      <p:graphicFrame>
-        <p:nvGraphicFramePr>
-          <p:cNvPr id="8" name="Table 7"/>
-          <p:cNvGraphicFramePr>
-            <a:graphicFrameLocks noGrp="1"/>
-          </p:cNvGraphicFramePr>
-          <p:nvPr/>
-        </p:nvGraphicFramePr>
-        <p:xfrm>
-          <a:off x="548640" y="2057400"/>
-          <a:ext cx="10972800" cy="1901952"/>
-        </p:xfrm>
-        <a:graphic>
-          <a:graphicData uri="http://schemas.openxmlformats.org/drawingml/2006/table">
-            <a:tbl>
-              <a:tblPr firstRow="1" bandRow="1">
-                <a:tableStyleId>{5C22544A-7EE6-4342-B048-85BDC9FD1C3A}</a:tableStyleId>
-              </a:tblPr>
-              <a:tblGrid>
-                <a:gridCol w="5486400"/>
-                <a:gridCol w="5486400"/>
-              </a:tblGrid>
-              <a:tr h="475488">
-                <a:tc>
-                  <a:txBody>
-                    <a:bodyPr/>
-                    <a:lstStyle/>
-                    <a:p>
-                      <a:pPr algn="ctr"/>
-                      <a:r>
-                        <a:rPr sz="1200" b="1">
-                          <a:solidFill>
-                            <a:srgbClr val="FFFFFF"/>
-                          </a:solidFill>
-                          <a:latin typeface="Helvetica"/>
-                        </a:rPr>
-                        <a:t>Block</a:t>
-                      </a:r>
-                    </a:p>
-                  </a:txBody>
-                  <a:tcPr>
-                    <a:solidFill>
-                      <a:srgbClr val="5234B7"/>
-                    </a:solidFill>
-                  </a:tcPr>
-                </a:tc>
-                <a:tc>
-                  <a:txBody>
-                    <a:bodyPr/>
-                    <a:lstStyle/>
-                    <a:p>
-                      <a:pPr algn="ctr"/>
-                      <a:r>
-                        <a:rPr sz="1200" b="1">
-                          <a:solidFill>
-                            <a:srgbClr val="FFFFFF"/>
-                          </a:solidFill>
-                          <a:latin typeface="Helvetica"/>
-                        </a:rPr>
-                        <a:t>Question it answers</a:t>
-                      </a:r>
-                    </a:p>
-                  </a:txBody>
-                  <a:tcPr>
-                    <a:solidFill>
-                      <a:srgbClr val="5234B7"/>
-                    </a:solidFill>
-                  </a:tcPr>
-                </a:tc>
-              </a:tr>
-              <a:tr h="475488">
-                <a:tc>
-                  <a:txBody>
-                    <a:bodyPr/>
-                    <a:lstStyle/>
-                    <a:p>
-                      <a:pPr algn="l"/>
-                      <a:r>
-                        <a:rPr sz="1300" b="1">
-                          <a:solidFill>
-                            <a:srgbClr val="5234B7"/>
-                          </a:solidFill>
-                          <a:latin typeface="Helvetica"/>
-                        </a:rPr>
-                        <a:t>Perceptron &amp; MLP</a:t>
-                      </a:r>
-                    </a:p>
-                  </a:txBody>
-                  <a:tcPr>
-                    <a:solidFill>
-                      <a:srgbClr val="EEE8FA"/>
-                    </a:solidFill>
-                  </a:tcPr>
-                </a:tc>
-                <a:tc>
-                  <a:txBody>
-                    <a:bodyPr/>
-                    <a:lstStyle/>
-                    <a:p>
-                      <a:pPr algn="l"/>
-                      <a:r>
-                        <a:rPr sz="1300" b="0">
-                          <a:solidFill>
-                            <a:srgbClr val="121018"/>
-                          </a:solidFill>
-                          <a:latin typeface="Helvetica"/>
-                        </a:rPr>
-                        <a:t>What does one layer compute?</a:t>
-                      </a:r>
-                    </a:p>
-                  </a:txBody>
-                  <a:tcPr>
-                    <a:solidFill>
-                      <a:srgbClr val="EEE8FA"/>
-                    </a:solidFill>
-                  </a:tcPr>
-                </a:tc>
-              </a:tr>
-              <a:tr h="475488">
-                <a:tc>
-                  <a:txBody>
-                    <a:bodyPr/>
-                    <a:lstStyle/>
-                    <a:p>
-                      <a:pPr algn="l"/>
-                      <a:r>
-                        <a:rPr sz="1300" b="1">
-                          <a:solidFill>
-                            <a:srgbClr val="5234B7"/>
-                          </a:solidFill>
-                          <a:latin typeface="Helvetica"/>
-                        </a:rPr>
-                        <a:t>Forward pass</a:t>
-                      </a:r>
-                    </a:p>
-                  </a:txBody>
-                  <a:tcPr>
-                    <a:solidFill>
-                      <a:srgbClr val="F5F1FC"/>
-                    </a:solidFill>
-                  </a:tcPr>
-                </a:tc>
-                <a:tc>
-                  <a:txBody>
-                    <a:bodyPr/>
-                    <a:lstStyle/>
-                    <a:p>
-                      <a:pPr algn="l"/>
-                      <a:r>
-                        <a:rPr sz="1300" b="0">
-                          <a:solidFill>
-                            <a:srgbClr val="121018"/>
-                          </a:solidFill>
-                          <a:latin typeface="Helvetica"/>
-                        </a:rPr>
-                        <a:t>How does inference flow through the graph?</a:t>
-                      </a:r>
-                    </a:p>
-                  </a:txBody>
-                  <a:tcPr>
-                    <a:solidFill>
-                      <a:srgbClr val="F5F1FC"/>
-                    </a:solidFill>
-                  </a:tcPr>
-                </a:tc>
-              </a:tr>
-              <a:tr h="475488">
-                <a:tc>
-                  <a:txBody>
-                    <a:bodyPr/>
-                    <a:lstStyle/>
-                    <a:p>
-                      <a:pPr algn="l"/>
-                      <a:r>
-                        <a:rPr sz="1300" b="1">
-                          <a:solidFill>
-                            <a:srgbClr val="5234B7"/>
-                          </a:solidFill>
-                          <a:latin typeface="Helvetica"/>
-                        </a:rPr>
-                        <a:t>Loss &amp; gradients</a:t>
-                      </a:r>
-                    </a:p>
-                  </a:txBody>
-                  <a:tcPr>
-                    <a:solidFill>
-                      <a:srgbClr val="EEE8FA"/>
-                    </a:solidFill>
-                  </a:tcPr>
-                </a:tc>
-                <a:tc>
-                  <a:txBody>
-                    <a:bodyPr/>
-                    <a:lstStyle/>
-                    <a:p>
-                      <a:pPr algn="l"/>
-                      <a:r>
-                        <a:rPr sz="1300" b="0">
-                          <a:solidFill>
-                            <a:srgbClr val="121018"/>
-                          </a:solidFill>
-                          <a:latin typeface="Helvetica"/>
-                        </a:rPr>
-                        <a:t>What are we optimizing?</a:t>
-                      </a:r>
-                    </a:p>
-                  </a:txBody>
-                  <a:tcPr>
-                    <a:solidFill>
-                      <a:srgbClr val="EEE8FA"/>
-                    </a:solidFill>
-                  </a:tcPr>
-                </a:tc>
-              </a:tr>
-            </a:tbl>
-          </a:graphicData>
-        </a:graphic>
-      </p:graphicFrame>
-      <p:sp>
-        <p:nvSpPr>
-          <p:cNvPr id="9" name="Rounded Rectangle 8"/>
-          <p:cNvSpPr/>
-          <p:nvPr/>
-        </p:nvSpPr>
-        <p:spPr>
-          <a:xfrm>
-            <a:off x="548640" y="4032504"/>
-            <a:ext cx="10972800" cy="411480"/>
-          </a:xfrm>
-          <a:prstGeom prst="roundRect">
-            <a:avLst>
-              <a:gd name="adj" fmla="val 10000"/>
-            </a:avLst>
-          </a:prstGeom>
-          <a:solidFill>
-            <a:srgbClr val="EEE8FA"/>
-          </a:solidFill>
-          <a:ln>
-            <a:noFill/>
-          </a:ln>
-          <a:effectLst/>
-        </p:spPr>
-        <p:style>
-          <a:lnRef idx="1">
-            <a:schemeClr val="accent1"/>
-          </a:lnRef>
-          <a:fillRef idx="3">
-            <a:schemeClr val="accent1"/>
-          </a:fillRef>
-          <a:effectRef idx="2">
-            <a:schemeClr val="accent1"/>
-          </a:effectRef>
-          <a:fontRef idx="minor">
-            <a:schemeClr val="lt1"/>
-          </a:fontRef>
-        </p:style>
-        <p:txBody>
-          <a:bodyPr rtlCol="0" anchor="ctr"/>
-          <a:lstStyle/>
-          <a:p>
-            <a:pPr algn="ctr"/>
-          </a:p>
-        </p:txBody>
-      </p:sp>
-      <p:sp>
-        <p:nvSpPr>
-          <p:cNvPr id="10" name="TextBox 9"/>
-          <p:cNvSpPr txBox="1"/>
-          <p:nvPr/>
-        </p:nvSpPr>
-        <p:spPr>
-          <a:xfrm>
-            <a:off x="868680" y="4105656"/>
-            <a:ext cx="10332720" cy="292608"/>
-          </a:xfrm>
-          <a:prstGeom prst="rect">
-            <a:avLst/>
-          </a:prstGeom>
-          <a:noFill/>
-        </p:spPr>
-        <p:txBody>
-          <a:bodyPr wrap="square" anchor="t">
-            <a:spAutoFit/>
-          </a:bodyPr>
-          <a:lstStyle/>
-          <a:p>
-            <a:pPr algn="l"/>
-            <a:r>
-              <a:rPr sz="1200" b="0">
-                <a:solidFill>
-                  <a:srgbClr val="5A5470"/>
-                </a:solidFill>
-                <a:latin typeface="DIN Next LT W23"/>
-                <a:ea typeface="DIN Next LT W23"/>
-                <a:cs typeface="DIN Next LT W23"/>
-              </a:rPr>
-              <a:t>Exit check: explain z = w·x + b and why nonlinearity is required between layers.</a:t>
-            </a:r>
-          </a:p>
-        </p:txBody>
-      </p:sp>
-      <p:sp>
-        <p:nvSpPr>
-          <p:cNvPr id="11" name="Rectangle 10"/>
-          <p:cNvSpPr/>
-          <p:nvPr/>
-        </p:nvSpPr>
-        <p:spPr>
-          <a:xfrm>
-            <a:off x="548640" y="6446520"/>
-            <a:ext cx="11064240" cy="10972"/>
-          </a:xfrm>
-          <a:prstGeom prst="rect">
-            <a:avLst/>
-          </a:prstGeom>
-          <a:solidFill>
-            <a:srgbClr val="5234B7"/>
-          </a:solidFill>
-          <a:ln>
-            <a:noFill/>
-          </a:ln>
-          <a:effectLst/>
-        </p:spPr>
-        <p:style>
-          <a:lnRef idx="1">
-            <a:schemeClr val="accent1"/>
-          </a:lnRef>
-          <a:fillRef idx="3">
-            <a:schemeClr val="accent1"/>
-          </a:fillRef>
-          <a:effectRef idx="2">
-            <a:schemeClr val="accent1"/>
-          </a:effectRef>
-          <a:fontRef idx="minor">
-            <a:schemeClr val="lt1"/>
-          </a:fontRef>
-        </p:style>
-        <p:txBody>
-          <a:bodyPr rtlCol="0" anchor="ctr"/>
-          <a:lstStyle/>
-          <a:p>
-            <a:pPr algn="ctr"/>
-          </a:p>
-        </p:txBody>
-      </p:sp>
-      <p:sp>
-        <p:nvSpPr>
-          <p:cNvPr id="12" name="TextBox 11"/>
-          <p:cNvSpPr txBox="1"/>
-          <p:nvPr/>
-        </p:nvSpPr>
-        <p:spPr>
-          <a:xfrm>
-            <a:off x="548640" y="6510528"/>
-            <a:ext cx="2743200" cy="256032"/>
-          </a:xfrm>
-          <a:prstGeom prst="rect">
-            <a:avLst/>
-          </a:prstGeom>
-          <a:noFill/>
-        </p:spPr>
-        <p:txBody>
-          <a:bodyPr wrap="square" anchor="t">
-            <a:spAutoFit/>
-          </a:bodyPr>
-          <a:lstStyle/>
-          <a:p>
-            <a:pPr algn="l"/>
-            <a:r>
-              <a:rPr sz="1100" b="1">
-                <a:solidFill>
-                  <a:srgbClr val="5234B7"/>
-                </a:solidFill>
-                <a:latin typeface="DIN Next LT W23"/>
-                <a:ea typeface="DIN Next LT W23"/>
-                <a:cs typeface="DIN Next LT W23"/>
-              </a:rPr>
-              <a:t>ETRA</a:t>
-            </a:r>
-          </a:p>
-        </p:txBody>
-      </p:sp>
-      <p:sp>
-        <p:nvSpPr>
-          <p:cNvPr id="13" name="TextBox 12"/>
-          <p:cNvSpPr txBox="1"/>
-          <p:nvPr/>
-        </p:nvSpPr>
-        <p:spPr>
-          <a:xfrm>
-            <a:off x="9601200" y="6510528"/>
-            <a:ext cx="2011680" cy="256032"/>
-          </a:xfrm>
-          <a:prstGeom prst="rect">
-            <a:avLst/>
-          </a:prstGeom>
-          <a:noFill/>
-        </p:spPr>
-        <p:txBody>
-          <a:bodyPr wrap="square" anchor="t">
-            <a:spAutoFit/>
-          </a:bodyPr>
-          <a:lstStyle/>
-          <a:p>
-            <a:pPr algn="r"/>
-            <a:r>
-              <a:rPr sz="1100" b="0">
-                <a:solidFill>
-                  <a:srgbClr val="5A5470"/>
-                </a:solidFill>
-                <a:latin typeface="DIN Next LT W23"/>
-                <a:ea typeface="DIN Next LT W23"/>
-                <a:cs typeface="DIN Next LT W23"/>
-              </a:rPr>
-              <a:t>08  /  79</a:t>
+              <a:t>82  /  82</a:t>
             </a:r>
           </a:p>
         </p:txBody>
@@ -52916,7 +54288,7 @@
                 <a:ea typeface="DIN Next LT W23"/>
                 <a:cs typeface="DIN Next LT W23"/>
               </a:rPr>
-              <a:t>09  /  79</a:t>
+              <a:t>09  /  82</a:t>
             </a:r>
           </a:p>
         </p:txBody>

--- a/web-presentation/pdf-exports/Week2-Session1-Deep-Learning.pptx
+++ b/web-presentation/pdf-exports/Week2-Session1-Deep-Learning.pptx
@@ -87,6 +87,10 @@
     <p:sldId id="335" r:id="rId86"/>
     <p:sldId id="336" r:id="rId87"/>
     <p:sldId id="337" r:id="rId88"/>
+    <p:sldId id="338" r:id="rId89"/>
+    <p:sldId id="339" r:id="rId90"/>
+    <p:sldId id="340" r:id="rId91"/>
+    <p:sldId id="341" r:id="rId92"/>
   </p:sldIdLst>
   <p:sldSz cx="12191695" cy="6858000" type="screen4x3"/>
   <p:notesSz cx="6858000" cy="9144000"/>
@@ -4029,7 +4033,7 @@
                 <a:ea typeface="DIN Next LT W23"/>
                 <a:cs typeface="DIN Next LT W23"/>
               </a:rPr>
-              <a:t>10  /  82</a:t>
+              <a:t>10  /  86</a:t>
             </a:r>
           </a:p>
         </p:txBody>
@@ -4697,7 +4701,7 @@
                 <a:ea typeface="DIN Next LT W23"/>
                 <a:cs typeface="DIN Next LT W23"/>
               </a:rPr>
-              <a:t>11  /  82</a:t>
+              <a:t>11  /  86</a:t>
             </a:r>
           </a:p>
         </p:txBody>
@@ -5171,7 +5175,7 @@
                 <a:ea typeface="DIN Next LT W23"/>
                 <a:cs typeface="DIN Next LT W23"/>
               </a:rPr>
-              <a:t>12  /  82</a:t>
+              <a:t>12  /  86</a:t>
             </a:r>
           </a:p>
         </p:txBody>
@@ -5760,7 +5764,7 @@
                 <a:ea typeface="DIN Next LT W23"/>
                 <a:cs typeface="DIN Next LT W23"/>
               </a:rPr>
-              <a:t>13  /  82</a:t>
+              <a:t>13  /  86</a:t>
             </a:r>
           </a:p>
         </p:txBody>
@@ -6234,7 +6238,7 @@
                 <a:ea typeface="DIN Next LT W23"/>
                 <a:cs typeface="DIN Next LT W23"/>
               </a:rPr>
-              <a:t>14  /  82</a:t>
+              <a:t>14  /  86</a:t>
             </a:r>
           </a:p>
         </p:txBody>
@@ -6902,7 +6906,7 @@
                 <a:ea typeface="DIN Next LT W23"/>
                 <a:cs typeface="DIN Next LT W23"/>
               </a:rPr>
-              <a:t>15  /  82</a:t>
+              <a:t>15  /  86</a:t>
             </a:r>
           </a:p>
         </p:txBody>
@@ -7491,7 +7495,7 @@
                 <a:ea typeface="DIN Next LT W23"/>
                 <a:cs typeface="DIN Next LT W23"/>
               </a:rPr>
-              <a:t>16  /  82</a:t>
+              <a:t>16  /  86</a:t>
             </a:r>
           </a:p>
         </p:txBody>
@@ -8311,7 +8315,7 @@
                 <a:ea typeface="DIN Next LT W23"/>
                 <a:cs typeface="DIN Next LT W23"/>
               </a:rPr>
-              <a:t>17  /  82</a:t>
+              <a:t>17  /  86</a:t>
             </a:r>
           </a:p>
         </p:txBody>
@@ -9090,7 +9094,7 @@
                 <a:ea typeface="DIN Next LT W23"/>
                 <a:cs typeface="DIN Next LT W23"/>
               </a:rPr>
-              <a:t>18  /  82</a:t>
+              <a:t>18  /  86</a:t>
             </a:r>
           </a:p>
         </p:txBody>
@@ -9806,7 +9810,7 @@
                 <a:ea typeface="DIN Next LT W23"/>
                 <a:cs typeface="DIN Next LT W23"/>
               </a:rPr>
-              <a:t>19  /  82</a:t>
+              <a:t>19  /  86</a:t>
             </a:r>
           </a:p>
         </p:txBody>
@@ -11725,7 +11729,7 @@
                 <a:ea typeface="DIN Next LT W23"/>
                 <a:cs typeface="DIN Next LT W23"/>
               </a:rPr>
-              <a:t>02  /  82</a:t>
+              <a:t>02  /  86</a:t>
             </a:r>
           </a:p>
         </p:txBody>
@@ -12389,7 +12393,7 @@
                 <a:ea typeface="DIN Next LT W23"/>
                 <a:cs typeface="DIN Next LT W23"/>
               </a:rPr>
-              <a:t>20  /  82</a:t>
+              <a:t>20  /  86</a:t>
             </a:r>
           </a:p>
         </p:txBody>
@@ -13052,7 +13056,7 @@
                 <a:ea typeface="DIN Next LT W23"/>
                 <a:cs typeface="DIN Next LT W23"/>
               </a:rPr>
-              <a:t>21  /  82</a:t>
+              <a:t>21  /  86</a:t>
             </a:r>
           </a:p>
         </p:txBody>
@@ -13884,7 +13888,7 @@
                 <a:ea typeface="DIN Next LT W23"/>
                 <a:cs typeface="DIN Next LT W23"/>
               </a:rPr>
-              <a:t>22  /  82</a:t>
+              <a:t>22  /  86</a:t>
             </a:r>
           </a:p>
         </p:txBody>
@@ -14473,7 +14477,7 @@
                 <a:ea typeface="DIN Next LT W23"/>
                 <a:cs typeface="DIN Next LT W23"/>
               </a:rPr>
-              <a:t>23  /  82</a:t>
+              <a:t>23  /  86</a:t>
             </a:r>
           </a:p>
         </p:txBody>
@@ -15178,7 +15182,7 @@
                 <a:ea typeface="DIN Next LT W23"/>
                 <a:cs typeface="DIN Next LT W23"/>
               </a:rPr>
-              <a:t>24  /  82</a:t>
+              <a:t>24  /  86</a:t>
             </a:r>
           </a:p>
         </p:txBody>
@@ -15856,7 +15860,7 @@
                 <a:ea typeface="DIN Next LT W23"/>
                 <a:cs typeface="DIN Next LT W23"/>
               </a:rPr>
-              <a:t>25  /  82</a:t>
+              <a:t>25  /  86</a:t>
             </a:r>
           </a:p>
         </p:txBody>
@@ -16376,7 +16380,7 @@
                 <a:ea typeface="DIN Next LT W23"/>
                 <a:cs typeface="DIN Next LT W23"/>
               </a:rPr>
-              <a:t>26  /  82</a:t>
+              <a:t>26  /  86</a:t>
             </a:r>
           </a:p>
         </p:txBody>
@@ -16850,7 +16854,7 @@
                 <a:ea typeface="DIN Next LT W23"/>
                 <a:cs typeface="DIN Next LT W23"/>
               </a:rPr>
-              <a:t>27  /  82</a:t>
+              <a:t>27  /  86</a:t>
             </a:r>
           </a:p>
         </p:txBody>
@@ -17439,7 +17443,7 @@
                 <a:ea typeface="DIN Next LT W23"/>
                 <a:cs typeface="DIN Next LT W23"/>
               </a:rPr>
-              <a:t>28  /  82</a:t>
+              <a:t>28  /  86</a:t>
             </a:r>
           </a:p>
         </p:txBody>
@@ -18117,7 +18121,7 @@
                 <a:ea typeface="DIN Next LT W23"/>
                 <a:cs typeface="DIN Next LT W23"/>
               </a:rPr>
-              <a:t>29  /  82</a:t>
+              <a:t>29  /  86</a:t>
             </a:r>
           </a:p>
         </p:txBody>
@@ -18990,7 +18994,7 @@
                 <a:ea typeface="DIN Next LT W23"/>
                 <a:cs typeface="DIN Next LT W23"/>
               </a:rPr>
-              <a:t>03  /  82</a:t>
+              <a:t>03  /  86</a:t>
             </a:r>
           </a:p>
         </p:txBody>
@@ -19654,7 +19658,7 @@
                 <a:ea typeface="DIN Next LT W23"/>
                 <a:cs typeface="DIN Next LT W23"/>
               </a:rPr>
-              <a:t>30  /  82</a:t>
+              <a:t>30  /  86</a:t>
             </a:r>
           </a:p>
         </p:txBody>
@@ -20128,7 +20132,7 @@
                 <a:ea typeface="DIN Next LT W23"/>
                 <a:cs typeface="DIN Next LT W23"/>
               </a:rPr>
-              <a:t>31  /  82</a:t>
+              <a:t>31  /  86</a:t>
             </a:r>
           </a:p>
         </p:txBody>
@@ -20717,7 +20721,7 @@
                 <a:ea typeface="DIN Next LT W23"/>
                 <a:cs typeface="DIN Next LT W23"/>
               </a:rPr>
-              <a:t>32  /  82</a:t>
+              <a:t>32  /  86</a:t>
             </a:r>
           </a:p>
         </p:txBody>
@@ -21191,7 +21195,7 @@
                 <a:ea typeface="DIN Next LT W23"/>
                 <a:cs typeface="DIN Next LT W23"/>
               </a:rPr>
-              <a:t>33  /  82</a:t>
+              <a:t>33  /  86</a:t>
             </a:r>
           </a:p>
         </p:txBody>
@@ -22023,7 +22027,7 @@
                 <a:ea typeface="DIN Next LT W23"/>
                 <a:cs typeface="DIN Next LT W23"/>
               </a:rPr>
-              <a:t>34  /  82</a:t>
+              <a:t>34  /  86</a:t>
             </a:r>
           </a:p>
         </p:txBody>
@@ -22687,7 +22691,7 @@
                 <a:ea typeface="DIN Next LT W23"/>
                 <a:cs typeface="DIN Next LT W23"/>
               </a:rPr>
-              <a:t>35  /  82</a:t>
+              <a:t>35  /  86</a:t>
             </a:r>
           </a:p>
         </p:txBody>
@@ -23161,7 +23165,7 @@
                 <a:ea typeface="DIN Next LT W23"/>
                 <a:cs typeface="DIN Next LT W23"/>
               </a:rPr>
-              <a:t>36  /  82</a:t>
+              <a:t>36  /  86</a:t>
             </a:r>
           </a:p>
         </p:txBody>
@@ -23750,7 +23754,7 @@
                 <a:ea typeface="DIN Next LT W23"/>
                 <a:cs typeface="DIN Next LT W23"/>
               </a:rPr>
-              <a:t>37  /  82</a:t>
+              <a:t>37  /  86</a:t>
             </a:r>
           </a:p>
         </p:txBody>
@@ -24335,7 +24339,7 @@
                 <a:ea typeface="DIN Next LT W23"/>
                 <a:cs typeface="DIN Next LT W23"/>
               </a:rPr>
-              <a:t>38  /  82</a:t>
+              <a:t>38  /  86</a:t>
             </a:r>
           </a:p>
         </p:txBody>
@@ -24809,7 +24813,7 @@
                 <a:ea typeface="DIN Next LT W23"/>
                 <a:cs typeface="DIN Next LT W23"/>
               </a:rPr>
-              <a:t>39  /  82</a:t>
+              <a:t>39  /  86</a:t>
             </a:r>
           </a:p>
         </p:txBody>
@@ -25620,7 +25624,7 @@
                 <a:ea typeface="DIN Next LT W23"/>
                 <a:cs typeface="DIN Next LT W23"/>
               </a:rPr>
-              <a:t>04  /  82</a:t>
+              <a:t>04  /  86</a:t>
             </a:r>
           </a:p>
         </p:txBody>
@@ -26209,7 +26213,7 @@
                 <a:ea typeface="DIN Next LT W23"/>
                 <a:cs typeface="DIN Next LT W23"/>
               </a:rPr>
-              <a:t>40  /  82</a:t>
+              <a:t>40  /  86</a:t>
             </a:r>
           </a:p>
         </p:txBody>
@@ -26887,7 +26891,7 @@
                 <a:ea typeface="DIN Next LT W23"/>
                 <a:cs typeface="DIN Next LT W23"/>
               </a:rPr>
-              <a:t>41  /  82</a:t>
+              <a:t>41  /  86</a:t>
             </a:r>
           </a:p>
         </p:txBody>
@@ -27361,7 +27365,7 @@
                 <a:ea typeface="DIN Next LT W23"/>
                 <a:cs typeface="DIN Next LT W23"/>
               </a:rPr>
-              <a:t>42  /  82</a:t>
+              <a:t>42  /  86</a:t>
             </a:r>
           </a:p>
         </p:txBody>
@@ -28029,7 +28033,7 @@
                 <a:ea typeface="DIN Next LT W23"/>
                 <a:cs typeface="DIN Next LT W23"/>
               </a:rPr>
-              <a:t>43  /  82</a:t>
+              <a:t>43  /  86</a:t>
             </a:r>
           </a:p>
         </p:txBody>
@@ -28734,7 +28738,7 @@
                 <a:ea typeface="DIN Next LT W23"/>
                 <a:cs typeface="DIN Next LT W23"/>
               </a:rPr>
-              <a:t>44  /  82</a:t>
+              <a:t>44  /  86</a:t>
             </a:r>
           </a:p>
         </p:txBody>
@@ -29402,7 +29406,7 @@
                 <a:ea typeface="DIN Next LT W23"/>
                 <a:cs typeface="DIN Next LT W23"/>
               </a:rPr>
-              <a:t>45  /  82</a:t>
+              <a:t>45  /  86</a:t>
             </a:r>
           </a:p>
         </p:txBody>
@@ -29950,7 +29954,7 @@
                 <a:ea typeface="DIN Next LT W23"/>
                 <a:cs typeface="DIN Next LT W23"/>
               </a:rPr>
-              <a:t>46  /  82</a:t>
+              <a:t>46  /  86</a:t>
             </a:r>
           </a:p>
         </p:txBody>
@@ -30424,7 +30428,7 @@
                 <a:ea typeface="DIN Next LT W23"/>
                 <a:cs typeface="DIN Next LT W23"/>
               </a:rPr>
-              <a:t>47  /  82</a:t>
+              <a:t>47  /  86</a:t>
             </a:r>
           </a:p>
         </p:txBody>
@@ -30976,7 +30980,7 @@
                 <a:ea typeface="DIN Next LT W23"/>
                 <a:cs typeface="DIN Next LT W23"/>
               </a:rPr>
-              <a:t>48  /  82</a:t>
+              <a:t>48  /  86</a:t>
             </a:r>
           </a:p>
         </p:txBody>
@@ -31596,7 +31600,7 @@
                 <a:ea typeface="DIN Next LT W23"/>
                 <a:cs typeface="DIN Next LT W23"/>
               </a:rPr>
-              <a:t>49  /  82</a:t>
+              <a:t>49  /  86</a:t>
             </a:r>
           </a:p>
         </p:txBody>
@@ -32375,7 +32379,7 @@
                 <a:ea typeface="DIN Next LT W23"/>
                 <a:cs typeface="DIN Next LT W23"/>
               </a:rPr>
-              <a:t>05  /  82</a:t>
+              <a:t>05  /  86</a:t>
             </a:r>
           </a:p>
         </p:txBody>
@@ -32890,7 +32894,7 @@
                 <a:ea typeface="DIN Next LT W23"/>
                 <a:cs typeface="DIN Next LT W23"/>
               </a:rPr>
-              <a:t>50  /  82</a:t>
+              <a:t>50  /  86</a:t>
             </a:r>
           </a:p>
         </p:txBody>
@@ -33475,7 +33479,7 @@
                 <a:ea typeface="DIN Next LT W23"/>
                 <a:cs typeface="DIN Next LT W23"/>
               </a:rPr>
-              <a:t>51  /  82</a:t>
+              <a:t>51  /  86</a:t>
             </a:r>
           </a:p>
         </p:txBody>
@@ -34064,7 +34068,7 @@
                 <a:ea typeface="DIN Next LT W23"/>
                 <a:cs typeface="DIN Next LT W23"/>
               </a:rPr>
-              <a:t>52  /  82</a:t>
+              <a:t>52  /  86</a:t>
             </a:r>
           </a:p>
         </p:txBody>
@@ -34538,7 +34542,7 @@
                 <a:ea typeface="DIN Next LT W23"/>
                 <a:cs typeface="DIN Next LT W23"/>
               </a:rPr>
-              <a:t>53  /  82</a:t>
+              <a:t>53  /  86</a:t>
             </a:r>
           </a:p>
         </p:txBody>
@@ -35309,7 +35313,7 @@
                 <a:ea typeface="DIN Next LT W23"/>
                 <a:cs typeface="DIN Next LT W23"/>
               </a:rPr>
-              <a:t>54  /  82</a:t>
+              <a:t>54  /  86</a:t>
             </a:r>
           </a:p>
         </p:txBody>
@@ -35898,7 +35902,7 @@
                 <a:ea typeface="DIN Next LT W23"/>
                 <a:cs typeface="DIN Next LT W23"/>
               </a:rPr>
-              <a:t>55  /  82</a:t>
+              <a:t>55  /  86</a:t>
             </a:r>
           </a:p>
         </p:txBody>
@@ -36576,7 +36580,7 @@
                 <a:ea typeface="DIN Next LT W23"/>
                 <a:cs typeface="DIN Next LT W23"/>
               </a:rPr>
-              <a:t>56  /  82</a:t>
+              <a:t>56  /  86</a:t>
             </a:r>
           </a:p>
         </p:txBody>
@@ -37202,7 +37206,7 @@
                 <a:ea typeface="DIN Next LT W23"/>
                 <a:cs typeface="DIN Next LT W23"/>
               </a:rPr>
-              <a:t>57  /  82</a:t>
+              <a:t>57  /  86</a:t>
             </a:r>
           </a:p>
         </p:txBody>
@@ -37676,7 +37680,7 @@
                 <a:ea typeface="DIN Next LT W23"/>
                 <a:cs typeface="DIN Next LT W23"/>
               </a:rPr>
-              <a:t>58  /  82</a:t>
+              <a:t>58  /  86</a:t>
             </a:r>
           </a:p>
         </p:txBody>
@@ -38437,7 +38441,7 @@
                 <a:ea typeface="DIN Next LT W23"/>
                 <a:cs typeface="DIN Next LT W23"/>
               </a:rPr>
-              <a:t>59  /  82</a:t>
+              <a:t>59  /  86</a:t>
             </a:r>
           </a:p>
         </p:txBody>
@@ -38948,7 +38952,7 @@
                 <a:ea typeface="DIN Next LT W23"/>
                 <a:cs typeface="DIN Next LT W23"/>
               </a:rPr>
-              <a:t>06  /  82</a:t>
+              <a:t>06  /  86</a:t>
             </a:r>
           </a:p>
         </p:txBody>
@@ -39422,7 +39426,7 @@
                 <a:ea typeface="DIN Next LT W23"/>
                 <a:cs typeface="DIN Next LT W23"/>
               </a:rPr>
-              <a:t>60  /  82</a:t>
+              <a:t>60  /  86</a:t>
             </a:r>
           </a:p>
         </p:txBody>
@@ -40090,7 +40094,7 @@
                 <a:ea typeface="DIN Next LT W23"/>
                 <a:cs typeface="DIN Next LT W23"/>
               </a:rPr>
-              <a:t>61  /  82</a:t>
+              <a:t>61  /  86</a:t>
             </a:r>
           </a:p>
         </p:txBody>
@@ -40697,7 +40701,7 @@
                 <a:ea typeface="DIN Next LT W23"/>
                 <a:cs typeface="DIN Next LT W23"/>
               </a:rPr>
-              <a:t>62  /  82</a:t>
+              <a:t>62  /  86</a:t>
             </a:r>
           </a:p>
         </p:txBody>
@@ -41286,7 +41290,7 @@
                 <a:ea typeface="DIN Next LT W23"/>
                 <a:cs typeface="DIN Next LT W23"/>
               </a:rPr>
-              <a:t>63  /  82</a:t>
+              <a:t>63  /  86</a:t>
             </a:r>
           </a:p>
         </p:txBody>
@@ -41893,7 +41897,7 @@
                 <a:ea typeface="DIN Next LT W23"/>
                 <a:cs typeface="DIN Next LT W23"/>
               </a:rPr>
-              <a:t>64  /  82</a:t>
+              <a:t>64  /  86</a:t>
             </a:r>
           </a:p>
         </p:txBody>
@@ -42297,7 +42301,81 @@
       </p:sp>
       <p:sp>
         <p:nvSpPr>
-          <p:cNvPr id="12" name="Rectangle 11"/>
+          <p:cNvPr id="12" name="TextBox 11"/>
+          <p:cNvSpPr txBox="1"/>
+          <p:nvPr/>
+        </p:nvSpPr>
+        <p:spPr>
+          <a:xfrm>
+            <a:off x="548640" y="3282696"/>
+            <a:ext cx="320040" cy="411480"/>
+          </a:xfrm>
+          <a:prstGeom prst="rect">
+            <a:avLst/>
+          </a:prstGeom>
+          <a:noFill/>
+        </p:spPr>
+        <p:txBody>
+          <a:bodyPr wrap="square" anchor="t">
+            <a:spAutoFit/>
+          </a:bodyPr>
+          <a:lstStyle/>
+          <a:p>
+            <a:pPr algn="l"/>
+            <a:r>
+              <a:rPr sz="1700" b="0">
+                <a:solidFill>
+                  <a:srgbClr val="9E59CD"/>
+                </a:solidFill>
+                <a:latin typeface="DIN Next LT W23"/>
+                <a:ea typeface="DIN Next LT W23"/>
+                <a:cs typeface="DIN Next LT W23"/>
+              </a:rPr>
+              <a:t>–</a:t>
+            </a:r>
+          </a:p>
+        </p:txBody>
+      </p:sp>
+      <p:sp>
+        <p:nvSpPr>
+          <p:cNvPr id="13" name="TextBox 12"/>
+          <p:cNvSpPr txBox="1"/>
+          <p:nvPr/>
+        </p:nvSpPr>
+        <p:spPr>
+          <a:xfrm>
+            <a:off x="914400" y="3282696"/>
+            <a:ext cx="9875519" cy="411480"/>
+          </a:xfrm>
+          <a:prstGeom prst="rect">
+            <a:avLst/>
+          </a:prstGeom>
+          <a:noFill/>
+        </p:spPr>
+        <p:txBody>
+          <a:bodyPr wrap="square" anchor="t">
+            <a:spAutoFit/>
+          </a:bodyPr>
+          <a:lstStyle/>
+          <a:p>
+            <a:pPr algn="l"/>
+            <a:r>
+              <a:rPr sz="1700" b="0">
+                <a:solidFill>
+                  <a:srgbClr val="121018"/>
+                </a:solidFill>
+                <a:latin typeface="DIN Next LT W23"/>
+                <a:ea typeface="DIN Next LT W23"/>
+                <a:cs typeface="DIN Next LT W23"/>
+              </a:rPr>
+              <a:t>Augmentation (crop, flip, color jitter) teaches invariance; normalization (e.g., ImageNet mean/std) stabilizes optimization.</a:t>
+            </a:r>
+          </a:p>
+        </p:txBody>
+      </p:sp>
+      <p:sp>
+        <p:nvSpPr>
+          <p:cNvPr id="14" name="Rectangle 13"/>
           <p:cNvSpPr/>
           <p:nvPr/>
         </p:nvSpPr>
@@ -42341,7 +42419,7 @@
       </p:sp>
       <p:sp>
         <p:nvSpPr>
-          <p:cNvPr id="13" name="TextBox 12"/>
+          <p:cNvPr id="15" name="TextBox 14"/>
           <p:cNvSpPr txBox="1"/>
           <p:nvPr/>
         </p:nvSpPr>
@@ -42378,7 +42456,7 @@
       </p:sp>
       <p:sp>
         <p:nvSpPr>
-          <p:cNvPr id="14" name="TextBox 13"/>
+          <p:cNvPr id="16" name="TextBox 15"/>
           <p:cNvSpPr txBox="1"/>
           <p:nvPr/>
         </p:nvSpPr>
@@ -42408,7 +42486,7 @@
                 <a:ea typeface="DIN Next LT W23"/>
                 <a:cs typeface="DIN Next LT W23"/>
               </a:rPr>
-              <a:t>65  /  82</a:t>
+              <a:t>65  /  86</a:t>
             </a:r>
           </a:p>
         </p:txBody>
@@ -42845,7 +42923,7 @@
                 <a:ea typeface="DIN Next LT W23"/>
                 <a:cs typeface="DIN Next LT W23"/>
               </a:rPr>
-              <a:t>66  /  82</a:t>
+              <a:t>66  /  86</a:t>
             </a:r>
           </a:p>
         </p:txBody>
@@ -43057,7 +43135,7 @@
                 <a:ea typeface="DIN Next LT W23"/>
                 <a:cs typeface="DIN Next LT W23"/>
               </a:rPr>
-              <a:t>Convolution: Kernels and Feature Maps</a:t>
+              <a:t>Image Data: How Computers “See” Pixels</a:t>
             </a:r>
           </a:p>
         </p:txBody>
@@ -43094,158 +43172,232 @@
                 <a:ea typeface="DIN Next LT W23"/>
                 <a:cs typeface="DIN Next LT W23"/>
               </a:rPr>
-              <a:t>Sliding Linear Filters + Nonlinearity</a:t>
-            </a:r>
-          </a:p>
-        </p:txBody>
-      </p:sp>
-      <p:sp>
-        <p:nvSpPr>
-          <p:cNvPr id="8" name="TextBox 7"/>
-          <p:cNvSpPr txBox="1"/>
-          <p:nvPr/>
-        </p:nvSpPr>
-        <p:spPr>
-          <a:xfrm>
-            <a:off x="548640" y="1920240"/>
-            <a:ext cx="10972800" cy="320040"/>
-          </a:xfrm>
-          <a:prstGeom prst="rect">
-            <a:avLst/>
-          </a:prstGeom>
-          <a:noFill/>
-        </p:spPr>
-        <p:txBody>
-          <a:bodyPr wrap="square" anchor="t">
-            <a:spAutoFit/>
-          </a:bodyPr>
-          <a:lstStyle/>
-          <a:p>
-            <a:pPr algn="l"/>
-            <a:r>
-              <a:rPr sz="1300" b="0">
-                <a:solidFill>
-                  <a:srgbClr val="5A5470"/>
-                </a:solidFill>
-                <a:latin typeface="DIN Next LT W23"/>
-                <a:ea typeface="DIN Next LT W23"/>
-                <a:cs typeface="DIN Next LT W23"/>
-              </a:rPr>
-              <a:t>A kernel is a small learnable matrix (often 3×3). Multiple kernels produce a stack of feature maps.</a:t>
-            </a:r>
-          </a:p>
-        </p:txBody>
-      </p:sp>
-      <p:sp>
-        <p:nvSpPr>
-          <p:cNvPr id="9" name="Rounded Rectangle 8"/>
-          <p:cNvSpPr/>
-          <p:nvPr/>
-        </p:nvSpPr>
-        <p:spPr>
-          <a:xfrm>
-            <a:off x="548640" y="2240280"/>
-            <a:ext cx="10972800" cy="3977639"/>
-          </a:xfrm>
-          <a:prstGeom prst="roundRect">
-            <a:avLst>
-              <a:gd name="adj" fmla="val 10000"/>
-            </a:avLst>
-          </a:prstGeom>
-          <a:solidFill>
-            <a:srgbClr val="EEE8FA"/>
-          </a:solidFill>
-          <a:ln>
-            <a:noFill/>
-          </a:ln>
-          <a:effectLst/>
-        </p:spPr>
-        <p:style>
-          <a:lnRef idx="1">
-            <a:schemeClr val="accent1"/>
-          </a:lnRef>
-          <a:fillRef idx="3">
-            <a:schemeClr val="accent1"/>
-          </a:fillRef>
-          <a:effectRef idx="2">
-            <a:schemeClr val="accent1"/>
-          </a:effectRef>
-          <a:fontRef idx="minor">
-            <a:schemeClr val="lt1"/>
-          </a:fontRef>
-        </p:style>
-        <p:txBody>
-          <a:bodyPr rtlCol="0" anchor="ctr"/>
-          <a:lstStyle/>
-          <a:p>
-            <a:pPr algn="ctr"/>
-          </a:p>
-        </p:txBody>
-      </p:sp>
-      <p:pic>
-        <p:nvPicPr>
-          <p:cNvPr id="10" name="Picture 9" descr="convolution.png"/>
-          <p:cNvPicPr>
-            <a:picLocks noChangeAspect="1"/>
-          </p:cNvPicPr>
-          <p:nvPr/>
-        </p:nvPicPr>
-        <p:blipFill>
-          <a:blip r:embed="rId3"/>
-          <a:stretch>
-            <a:fillRect/>
-          </a:stretch>
-        </p:blipFill>
-        <p:spPr>
-          <a:xfrm>
-            <a:off x="1413066" y="2377440"/>
-            <a:ext cx="9243946" cy="3703320"/>
-          </a:xfrm>
-          <a:prstGeom prst="rect">
-            <a:avLst/>
-          </a:prstGeom>
-        </p:spPr>
-      </p:pic>
-      <p:sp>
-        <p:nvSpPr>
-          <p:cNvPr id="11" name="TextBox 10"/>
-          <p:cNvSpPr txBox="1"/>
-          <p:nvPr/>
-        </p:nvSpPr>
-        <p:spPr>
-          <a:xfrm>
-            <a:off x="548640" y="6309360"/>
-            <a:ext cx="10972800" cy="228600"/>
-          </a:xfrm>
-          <a:prstGeom prst="rect">
-            <a:avLst/>
-          </a:prstGeom>
-          <a:noFill/>
-        </p:spPr>
-        <p:txBody>
-          <a:bodyPr wrap="square" anchor="t">
-            <a:spAutoFit/>
-          </a:bodyPr>
-          <a:lstStyle/>
-          <a:p>
-            <a:pPr algn="l"/>
-            <a:r>
-              <a:rPr sz="1100" b="0">
-                <a:solidFill>
-                  <a:srgbClr val="5A5470"/>
-                </a:solidFill>
-                <a:latin typeface="DIN Next LT W23"/>
-                <a:ea typeface="DIN Next LT W23"/>
-                <a:cs typeface="DIN Next LT W23"/>
-              </a:rPr>
-              <a:t>Classical Sobel filters are fixed. CNNs learn task-specific filters from data.</a:t>
-            </a:r>
-          </a:p>
-        </p:txBody>
-      </p:sp>
-      <p:sp>
-        <p:nvSpPr>
-          <p:cNvPr id="12" name="Rectangle 11"/>
+              <a:t>Tensors, Channels, and Local Structure</a:t>
+            </a:r>
+          </a:p>
+        </p:txBody>
+      </p:sp>
+      <p:graphicFrame>
+        <p:nvGraphicFramePr>
+          <p:cNvPr id="8" name="Table 7"/>
+          <p:cNvGraphicFramePr>
+            <a:graphicFrameLocks noGrp="1"/>
+          </p:cNvGraphicFramePr>
+          <p:nvPr/>
+        </p:nvGraphicFramePr>
+        <p:xfrm>
+          <a:off x="548640" y="2057400"/>
+          <a:ext cx="10972800" cy="1901952"/>
+        </p:xfrm>
+        <a:graphic>
+          <a:graphicData uri="http://schemas.openxmlformats.org/drawingml/2006/table">
+            <a:tbl>
+              <a:tblPr firstRow="1" bandRow="1">
+                <a:tableStyleId>{5C22544A-7EE6-4342-B048-85BDC9FD1C3A}</a:tableStyleId>
+              </a:tblPr>
+              <a:tblGrid>
+                <a:gridCol w="5486400"/>
+                <a:gridCol w="5486400"/>
+              </a:tblGrid>
+              <a:tr h="475488">
+                <a:tc>
+                  <a:txBody>
+                    <a:bodyPr/>
+                    <a:lstStyle/>
+                    <a:p>
+                      <a:pPr algn="ctr"/>
+                      <a:r>
+                        <a:rPr sz="1200" b="1">
+                          <a:solidFill>
+                            <a:srgbClr val="FFFFFF"/>
+                          </a:solidFill>
+                          <a:latin typeface="Helvetica"/>
+                        </a:rPr>
+                        <a:t>Stage</a:t>
+                      </a:r>
+                    </a:p>
+                  </a:txBody>
+                  <a:tcPr>
+                    <a:solidFill>
+                      <a:srgbClr val="5234B7"/>
+                    </a:solidFill>
+                  </a:tcPr>
+                </a:tc>
+                <a:tc>
+                  <a:txBody>
+                    <a:bodyPr/>
+                    <a:lstStyle/>
+                    <a:p>
+                      <a:pPr algn="ctr"/>
+                      <a:r>
+                        <a:rPr sz="1200" b="1">
+                          <a:solidFill>
+                            <a:srgbClr val="FFFFFF"/>
+                          </a:solidFill>
+                          <a:latin typeface="Helvetica"/>
+                        </a:rPr>
+                        <a:t>What happens</a:t>
+                      </a:r>
+                    </a:p>
+                  </a:txBody>
+                  <a:tcPr>
+                    <a:solidFill>
+                      <a:srgbClr val="5234B7"/>
+                    </a:solidFill>
+                  </a:tcPr>
+                </a:tc>
+              </a:tr>
+              <a:tr h="475488">
+                <a:tc>
+                  <a:txBody>
+                    <a:bodyPr/>
+                    <a:lstStyle/>
+                    <a:p>
+                      <a:pPr algn="l"/>
+                      <a:r>
+                        <a:rPr sz="1300" b="1">
+                          <a:solidFill>
+                            <a:srgbClr val="5234B7"/>
+                          </a:solidFill>
+                          <a:latin typeface="Helvetica"/>
+                        </a:rPr>
+                        <a:t>Raw sensor</a:t>
+                      </a:r>
+                    </a:p>
+                  </a:txBody>
+                  <a:tcPr>
+                    <a:solidFill>
+                      <a:srgbClr val="EEE8FA"/>
+                    </a:solidFill>
+                  </a:tcPr>
+                </a:tc>
+                <a:tc>
+                  <a:txBody>
+                    <a:bodyPr/>
+                    <a:lstStyle/>
+                    <a:p>
+                      <a:pPr algn="l"/>
+                      <a:r>
+                        <a:rPr sz="1300" b="0">
+                          <a:solidFill>
+                            <a:srgbClr val="121018"/>
+                          </a:solidFill>
+                          <a:latin typeface="Helvetica"/>
+                        </a:rPr>
+                        <a:t>Quantized intensities per channel per pixel</a:t>
+                      </a:r>
+                    </a:p>
+                  </a:txBody>
+                  <a:tcPr>
+                    <a:solidFill>
+                      <a:srgbClr val="EEE8FA"/>
+                    </a:solidFill>
+                  </a:tcPr>
+                </a:tc>
+              </a:tr>
+              <a:tr h="475488">
+                <a:tc>
+                  <a:txBody>
+                    <a:bodyPr/>
+                    <a:lstStyle/>
+                    <a:p>
+                      <a:pPr algn="l"/>
+                      <a:r>
+                        <a:rPr sz="1300" b="1">
+                          <a:solidFill>
+                            <a:srgbClr val="5234B7"/>
+                          </a:solidFill>
+                          <a:latin typeface="Helvetica"/>
+                        </a:rPr>
+                        <a:t>Preprocess</a:t>
+                      </a:r>
+                    </a:p>
+                  </a:txBody>
+                  <a:tcPr>
+                    <a:solidFill>
+                      <a:srgbClr val="F5F1FC"/>
+                    </a:solidFill>
+                  </a:tcPr>
+                </a:tc>
+                <a:tc>
+                  <a:txBody>
+                    <a:bodyPr/>
+                    <a:lstStyle/>
+                    <a:p>
+                      <a:pPr algn="l"/>
+                      <a:r>
+                        <a:rPr sz="1300" b="0">
+                          <a:solidFill>
+                            <a:srgbClr val="121018"/>
+                          </a:solidFill>
+                          <a:latin typeface="Helvetica"/>
+                        </a:rPr>
+                        <a:t>Resize, crop, normalize, augment</a:t>
+                      </a:r>
+                    </a:p>
+                  </a:txBody>
+                  <a:tcPr>
+                    <a:solidFill>
+                      <a:srgbClr val="F5F1FC"/>
+                    </a:solidFill>
+                  </a:tcPr>
+                </a:tc>
+              </a:tr>
+              <a:tr h="475488">
+                <a:tc>
+                  <a:txBody>
+                    <a:bodyPr/>
+                    <a:lstStyle/>
+                    <a:p>
+                      <a:pPr algn="l"/>
+                      <a:r>
+                        <a:rPr sz="1300" b="1">
+                          <a:solidFill>
+                            <a:srgbClr val="5234B7"/>
+                          </a:solidFill>
+                          <a:latin typeface="Helvetica"/>
+                        </a:rPr>
+                        <a:t>Model input</a:t>
+                      </a:r>
+                    </a:p>
+                  </a:txBody>
+                  <a:tcPr>
+                    <a:solidFill>
+                      <a:srgbClr val="EEE8FA"/>
+                    </a:solidFill>
+                  </a:tcPr>
+                </a:tc>
+                <a:tc>
+                  <a:txBody>
+                    <a:bodyPr/>
+                    <a:lstStyle/>
+                    <a:p>
+                      <a:pPr algn="l"/>
+                      <a:r>
+                        <a:rPr sz="1300" b="0">
+                          <a:solidFill>
+                            <a:srgbClr val="121018"/>
+                          </a:solidFill>
+                          <a:latin typeface="Helvetica"/>
+                        </a:rPr>
+                        <a:t>Batch × C × H × W tensor fed to stem convolutions</a:t>
+                      </a:r>
+                    </a:p>
+                  </a:txBody>
+                  <a:tcPr>
+                    <a:solidFill>
+                      <a:srgbClr val="EEE8FA"/>
+                    </a:solidFill>
+                  </a:tcPr>
+                </a:tc>
+              </a:tr>
+            </a:tbl>
+          </a:graphicData>
+        </a:graphic>
+      </p:graphicFrame>
+      <p:sp>
+        <p:nvSpPr>
+          <p:cNvPr id="9" name="Rectangle 8"/>
           <p:cNvSpPr/>
           <p:nvPr/>
         </p:nvSpPr>
@@ -43289,7 +43441,7 @@
       </p:sp>
       <p:sp>
         <p:nvSpPr>
-          <p:cNvPr id="13" name="TextBox 12"/>
+          <p:cNvPr id="10" name="TextBox 9"/>
           <p:cNvSpPr txBox="1"/>
           <p:nvPr/>
         </p:nvSpPr>
@@ -43326,7 +43478,7 @@
       </p:sp>
       <p:sp>
         <p:nvSpPr>
-          <p:cNvPr id="14" name="TextBox 13"/>
+          <p:cNvPr id="11" name="TextBox 10"/>
           <p:cNvSpPr txBox="1"/>
           <p:nvPr/>
         </p:nvSpPr>
@@ -43356,7 +43508,7 @@
                 <a:ea typeface="DIN Next LT W23"/>
                 <a:cs typeface="DIN Next LT W23"/>
               </a:rPr>
-              <a:t>67  /  82</a:t>
+              <a:t>67  /  86</a:t>
             </a:r>
           </a:p>
         </p:txBody>
@@ -43568,7 +43720,7 @@
                 <a:ea typeface="DIN Next LT W23"/>
                 <a:cs typeface="DIN Next LT W23"/>
               </a:rPr>
-              <a:t>Convolution Hyperparameters</a:t>
+              <a:t>Convolution: Kernels, Edge Filters, and Feature Maps</a:t>
             </a:r>
           </a:p>
         </p:txBody>
@@ -43605,7 +43757,2612 @@
                 <a:ea typeface="DIN Next LT W23"/>
                 <a:cs typeface="DIN Next LT W23"/>
               </a:rPr>
-              <a:t>Neighborhood, Stride, Border</a:t>
+              <a:t>Sliding Linear Filters + Nonlinearity</a:t>
+            </a:r>
+          </a:p>
+        </p:txBody>
+      </p:sp>
+      <p:sp>
+        <p:nvSpPr>
+          <p:cNvPr id="8" name="Rounded Rectangle 7"/>
+          <p:cNvSpPr/>
+          <p:nvPr/>
+        </p:nvSpPr>
+        <p:spPr>
+          <a:xfrm>
+            <a:off x="548640" y="1965960"/>
+            <a:ext cx="10972800" cy="3977639"/>
+          </a:xfrm>
+          <a:prstGeom prst="roundRect">
+            <a:avLst>
+              <a:gd name="adj" fmla="val 10000"/>
+            </a:avLst>
+          </a:prstGeom>
+          <a:solidFill>
+            <a:srgbClr val="EEE8FA"/>
+          </a:solidFill>
+          <a:ln>
+            <a:noFill/>
+          </a:ln>
+          <a:effectLst/>
+        </p:spPr>
+        <p:style>
+          <a:lnRef idx="1">
+            <a:schemeClr val="accent1"/>
+          </a:lnRef>
+          <a:fillRef idx="3">
+            <a:schemeClr val="accent1"/>
+          </a:fillRef>
+          <a:effectRef idx="2">
+            <a:schemeClr val="accent1"/>
+          </a:effectRef>
+          <a:fontRef idx="minor">
+            <a:schemeClr val="lt1"/>
+          </a:fontRef>
+        </p:style>
+        <p:txBody>
+          <a:bodyPr rtlCol="0" anchor="ctr"/>
+          <a:lstStyle/>
+          <a:p>
+            <a:pPr algn="ctr"/>
+          </a:p>
+        </p:txBody>
+      </p:sp>
+      <p:pic>
+        <p:nvPicPr>
+          <p:cNvPr id="9" name="Picture 8" descr="cnn-architecture.png"/>
+          <p:cNvPicPr>
+            <a:picLocks noChangeAspect="1"/>
+          </p:cNvPicPr>
+          <p:nvPr/>
+        </p:nvPicPr>
+        <p:blipFill>
+          <a:blip r:embed="rId3"/>
+          <a:stretch>
+            <a:fillRect/>
+          </a:stretch>
+        </p:blipFill>
+        <p:spPr>
+          <a:xfrm>
+            <a:off x="1305933" y="2103120"/>
+            <a:ext cx="9458213" cy="3703320"/>
+          </a:xfrm>
+          <a:prstGeom prst="rect">
+            <a:avLst/>
+          </a:prstGeom>
+        </p:spPr>
+      </p:pic>
+      <p:sp>
+        <p:nvSpPr>
+          <p:cNvPr id="10" name="Rectangle 9"/>
+          <p:cNvSpPr/>
+          <p:nvPr/>
+        </p:nvSpPr>
+        <p:spPr>
+          <a:xfrm>
+            <a:off x="548640" y="6446520"/>
+            <a:ext cx="11064240" cy="10972"/>
+          </a:xfrm>
+          <a:prstGeom prst="rect">
+            <a:avLst/>
+          </a:prstGeom>
+          <a:solidFill>
+            <a:srgbClr val="5234B7"/>
+          </a:solidFill>
+          <a:ln>
+            <a:noFill/>
+          </a:ln>
+          <a:effectLst/>
+        </p:spPr>
+        <p:style>
+          <a:lnRef idx="1">
+            <a:schemeClr val="accent1"/>
+          </a:lnRef>
+          <a:fillRef idx="3">
+            <a:schemeClr val="accent1"/>
+          </a:fillRef>
+          <a:effectRef idx="2">
+            <a:schemeClr val="accent1"/>
+          </a:effectRef>
+          <a:fontRef idx="minor">
+            <a:schemeClr val="lt1"/>
+          </a:fontRef>
+        </p:style>
+        <p:txBody>
+          <a:bodyPr rtlCol="0" anchor="ctr"/>
+          <a:lstStyle/>
+          <a:p>
+            <a:pPr algn="ctr"/>
+          </a:p>
+        </p:txBody>
+      </p:sp>
+      <p:sp>
+        <p:nvSpPr>
+          <p:cNvPr id="11" name="TextBox 10"/>
+          <p:cNvSpPr txBox="1"/>
+          <p:nvPr/>
+        </p:nvSpPr>
+        <p:spPr>
+          <a:xfrm>
+            <a:off x="548640" y="6510528"/>
+            <a:ext cx="2743200" cy="256032"/>
+          </a:xfrm>
+          <a:prstGeom prst="rect">
+            <a:avLst/>
+          </a:prstGeom>
+          <a:noFill/>
+        </p:spPr>
+        <p:txBody>
+          <a:bodyPr wrap="square" anchor="t">
+            <a:spAutoFit/>
+          </a:bodyPr>
+          <a:lstStyle/>
+          <a:p>
+            <a:pPr algn="l"/>
+            <a:r>
+              <a:rPr sz="1100" b="1">
+                <a:solidFill>
+                  <a:srgbClr val="5234B7"/>
+                </a:solidFill>
+                <a:latin typeface="DIN Next LT W23"/>
+                <a:ea typeface="DIN Next LT W23"/>
+                <a:cs typeface="DIN Next LT W23"/>
+              </a:rPr>
+              <a:t>ETRA</a:t>
+            </a:r>
+          </a:p>
+        </p:txBody>
+      </p:sp>
+      <p:sp>
+        <p:nvSpPr>
+          <p:cNvPr id="12" name="TextBox 11"/>
+          <p:cNvSpPr txBox="1"/>
+          <p:nvPr/>
+        </p:nvSpPr>
+        <p:spPr>
+          <a:xfrm>
+            <a:off x="9601200" y="6510528"/>
+            <a:ext cx="2011680" cy="256032"/>
+          </a:xfrm>
+          <a:prstGeom prst="rect">
+            <a:avLst/>
+          </a:prstGeom>
+          <a:noFill/>
+        </p:spPr>
+        <p:txBody>
+          <a:bodyPr wrap="square" anchor="t">
+            <a:spAutoFit/>
+          </a:bodyPr>
+          <a:lstStyle/>
+          <a:p>
+            <a:pPr algn="r"/>
+            <a:r>
+              <a:rPr sz="1100" b="0">
+                <a:solidFill>
+                  <a:srgbClr val="5A5470"/>
+                </a:solidFill>
+                <a:latin typeface="DIN Next LT W23"/>
+                <a:ea typeface="DIN Next LT W23"/>
+                <a:cs typeface="DIN Next LT W23"/>
+              </a:rPr>
+              <a:t>68  /  86</a:t>
+            </a:r>
+          </a:p>
+        </p:txBody>
+      </p:sp>
+    </p:spTree>
+  </p:cSld>
+  <p:clrMapOvr>
+    <a:masterClrMapping/>
+  </p:clrMapOvr>
+</p:sld>
+</file>
+
+<file path=ppt/slides/slide69.xml><?xml version="1.0" encoding="utf-8"?>
+<p:sld xmlns:a="http://schemas.openxmlformats.org/drawingml/2006/main" xmlns:p="http://schemas.openxmlformats.org/presentationml/2006/main" xmlns:r="http://schemas.openxmlformats.org/officeDocument/2006/relationships">
+  <p:cSld>
+    <p:bg>
+      <p:bgPr>
+        <a:solidFill>
+          <a:srgbClr val="FAF8FF"/>
+        </a:solidFill>
+        <a:effectLst/>
+      </p:bgPr>
+    </p:bg>
+    <p:spTree>
+      <p:nvGrpSpPr>
+        <p:cNvPr id="1" name=""/>
+        <p:cNvGrpSpPr/>
+        <p:nvPr/>
+      </p:nvGrpSpPr>
+      <p:grpSpPr/>
+      <p:sp>
+        <p:nvSpPr>
+          <p:cNvPr id="2" name="Rectangle 1"/>
+          <p:cNvSpPr/>
+          <p:nvPr/>
+        </p:nvSpPr>
+        <p:spPr>
+          <a:xfrm>
+            <a:off x="12136831" y="0"/>
+            <a:ext cx="54864" cy="6858000"/>
+          </a:xfrm>
+          <a:prstGeom prst="rect">
+            <a:avLst/>
+          </a:prstGeom>
+          <a:solidFill>
+            <a:srgbClr val="5234B7"/>
+          </a:solidFill>
+          <a:ln>
+            <a:noFill/>
+          </a:ln>
+          <a:effectLst/>
+        </p:spPr>
+        <p:style>
+          <a:lnRef idx="1">
+            <a:schemeClr val="accent1"/>
+          </a:lnRef>
+          <a:fillRef idx="3">
+            <a:schemeClr val="accent1"/>
+          </a:fillRef>
+          <a:effectRef idx="2">
+            <a:schemeClr val="accent1"/>
+          </a:effectRef>
+          <a:fontRef idx="minor">
+            <a:schemeClr val="lt1"/>
+          </a:fontRef>
+        </p:style>
+        <p:txBody>
+          <a:bodyPr rtlCol="0" anchor="ctr"/>
+          <a:lstStyle/>
+          <a:p>
+            <a:pPr algn="ctr"/>
+          </a:p>
+        </p:txBody>
+      </p:sp>
+      <p:pic>
+        <p:nvPicPr>
+          <p:cNvPr id="3" name="Picture 2" descr="etra-wordmark.png"/>
+          <p:cNvPicPr>
+            <a:picLocks noChangeAspect="1"/>
+          </p:cNvPicPr>
+          <p:nvPr/>
+        </p:nvPicPr>
+        <p:blipFill>
+          <a:blip r:embed="rId2"/>
+          <a:stretch>
+            <a:fillRect/>
+          </a:stretch>
+        </p:blipFill>
+        <p:spPr>
+          <a:xfrm>
+            <a:off x="10561320" y="411480"/>
+            <a:ext cx="1206201" cy="320040"/>
+          </a:xfrm>
+          <a:prstGeom prst="rect">
+            <a:avLst/>
+          </a:prstGeom>
+        </p:spPr>
+      </p:pic>
+      <p:sp>
+        <p:nvSpPr>
+          <p:cNvPr id="4" name="TextBox 3"/>
+          <p:cNvSpPr txBox="1"/>
+          <p:nvPr/>
+        </p:nvSpPr>
+        <p:spPr>
+          <a:xfrm>
+            <a:off x="548640" y="438912"/>
+            <a:ext cx="7772400" cy="274320"/>
+          </a:xfrm>
+          <a:prstGeom prst="rect">
+            <a:avLst/>
+          </a:prstGeom>
+          <a:noFill/>
+        </p:spPr>
+        <p:txBody>
+          <a:bodyPr wrap="square" anchor="t">
+            <a:spAutoFit/>
+          </a:bodyPr>
+          <a:lstStyle/>
+          <a:p>
+            <a:pPr algn="l"/>
+            <a:r>
+              <a:rPr sz="1200" b="0">
+                <a:solidFill>
+                  <a:srgbClr val="5A5470"/>
+                </a:solidFill>
+                <a:latin typeface="DIN Next LT W23"/>
+                <a:ea typeface="DIN Next LT W23"/>
+                <a:cs typeface="DIN Next LT W23"/>
+              </a:rPr>
+              <a:t>S07  ·  Deep Learning</a:t>
+            </a:r>
+          </a:p>
+        </p:txBody>
+      </p:sp>
+      <p:sp>
+        <p:nvSpPr>
+          <p:cNvPr id="5" name="Rectangle 4"/>
+          <p:cNvSpPr/>
+          <p:nvPr/>
+        </p:nvSpPr>
+        <p:spPr>
+          <a:xfrm>
+            <a:off x="548640" y="822960"/>
+            <a:ext cx="11064240" cy="10972"/>
+          </a:xfrm>
+          <a:prstGeom prst="rect">
+            <a:avLst/>
+          </a:prstGeom>
+          <a:solidFill>
+            <a:srgbClr val="E4DCF4"/>
+          </a:solidFill>
+          <a:ln>
+            <a:noFill/>
+          </a:ln>
+          <a:effectLst/>
+        </p:spPr>
+        <p:style>
+          <a:lnRef idx="1">
+            <a:schemeClr val="accent1"/>
+          </a:lnRef>
+          <a:fillRef idx="3">
+            <a:schemeClr val="accent1"/>
+          </a:fillRef>
+          <a:effectRef idx="2">
+            <a:schemeClr val="accent1"/>
+          </a:effectRef>
+          <a:fontRef idx="minor">
+            <a:schemeClr val="lt1"/>
+          </a:fontRef>
+        </p:style>
+        <p:txBody>
+          <a:bodyPr rtlCol="0" anchor="ctr"/>
+          <a:lstStyle/>
+          <a:p>
+            <a:pPr algn="ctr"/>
+          </a:p>
+        </p:txBody>
+      </p:sp>
+      <p:sp>
+        <p:nvSpPr>
+          <p:cNvPr id="6" name="TextBox 5"/>
+          <p:cNvSpPr txBox="1"/>
+          <p:nvPr/>
+        </p:nvSpPr>
+        <p:spPr>
+          <a:xfrm>
+            <a:off x="548640" y="1051560"/>
+            <a:ext cx="10241280" cy="594360"/>
+          </a:xfrm>
+          <a:prstGeom prst="rect">
+            <a:avLst/>
+          </a:prstGeom>
+          <a:noFill/>
+        </p:spPr>
+        <p:txBody>
+          <a:bodyPr wrap="square" anchor="t">
+            <a:spAutoFit/>
+          </a:bodyPr>
+          <a:lstStyle/>
+          <a:p>
+            <a:pPr algn="l"/>
+            <a:r>
+              <a:rPr sz="3200" b="1">
+                <a:solidFill>
+                  <a:srgbClr val="5234B7"/>
+                </a:solidFill>
+                <a:latin typeface="DIN Next LT W23"/>
+                <a:ea typeface="DIN Next LT W23"/>
+                <a:cs typeface="DIN Next LT W23"/>
+              </a:rPr>
+              <a:t>Convolution: Kernels, Edge Filters, and Feature Maps</a:t>
+            </a:r>
+          </a:p>
+        </p:txBody>
+      </p:sp>
+      <p:sp>
+        <p:nvSpPr>
+          <p:cNvPr id="7" name="TextBox 6"/>
+          <p:cNvSpPr txBox="1"/>
+          <p:nvPr/>
+        </p:nvSpPr>
+        <p:spPr>
+          <a:xfrm>
+            <a:off x="548640" y="1600200"/>
+            <a:ext cx="10241280" cy="365760"/>
+          </a:xfrm>
+          <a:prstGeom prst="rect">
+            <a:avLst/>
+          </a:prstGeom>
+          <a:noFill/>
+        </p:spPr>
+        <p:txBody>
+          <a:bodyPr wrap="square" anchor="t">
+            <a:spAutoFit/>
+          </a:bodyPr>
+          <a:lstStyle/>
+          <a:p>
+            <a:pPr algn="l"/>
+            <a:r>
+              <a:rPr sz="1500" b="0">
+                <a:solidFill>
+                  <a:srgbClr val="5A5470"/>
+                </a:solidFill>
+                <a:latin typeface="DIN Next LT W23"/>
+                <a:ea typeface="DIN Next LT W23"/>
+                <a:cs typeface="DIN Next LT W23"/>
+              </a:rPr>
+              <a:t>Sliding Linear Filters + Nonlinearity</a:t>
+            </a:r>
+          </a:p>
+        </p:txBody>
+      </p:sp>
+      <p:sp>
+        <p:nvSpPr>
+          <p:cNvPr id="8" name="TextBox 7"/>
+          <p:cNvSpPr txBox="1"/>
+          <p:nvPr/>
+        </p:nvSpPr>
+        <p:spPr>
+          <a:xfrm>
+            <a:off x="548640" y="2148840"/>
+            <a:ext cx="320040" cy="411480"/>
+          </a:xfrm>
+          <a:prstGeom prst="rect">
+            <a:avLst/>
+          </a:prstGeom>
+          <a:noFill/>
+        </p:spPr>
+        <p:txBody>
+          <a:bodyPr wrap="square" anchor="t">
+            <a:spAutoFit/>
+          </a:bodyPr>
+          <a:lstStyle/>
+          <a:p>
+            <a:pPr algn="l"/>
+            <a:r>
+              <a:rPr sz="1700" b="0">
+                <a:solidFill>
+                  <a:srgbClr val="9E59CD"/>
+                </a:solidFill>
+                <a:latin typeface="DIN Next LT W23"/>
+                <a:ea typeface="DIN Next LT W23"/>
+                <a:cs typeface="DIN Next LT W23"/>
+              </a:rPr>
+              <a:t>–</a:t>
+            </a:r>
+          </a:p>
+        </p:txBody>
+      </p:sp>
+      <p:sp>
+        <p:nvSpPr>
+          <p:cNvPr id="9" name="TextBox 8"/>
+          <p:cNvSpPr txBox="1"/>
+          <p:nvPr/>
+        </p:nvSpPr>
+        <p:spPr>
+          <a:xfrm>
+            <a:off x="914400" y="2148840"/>
+            <a:ext cx="9875519" cy="411480"/>
+          </a:xfrm>
+          <a:prstGeom prst="rect">
+            <a:avLst/>
+          </a:prstGeom>
+          <a:noFill/>
+        </p:spPr>
+        <p:txBody>
+          <a:bodyPr wrap="square" anchor="t">
+            <a:spAutoFit/>
+          </a:bodyPr>
+          <a:lstStyle/>
+          <a:p>
+            <a:pPr algn="l"/>
+            <a:r>
+              <a:rPr sz="1700" b="0">
+                <a:solidFill>
+                  <a:srgbClr val="121018"/>
+                </a:solidFill>
+                <a:latin typeface="DIN Next LT W23"/>
+                <a:ea typeface="DIN Next LT W23"/>
+                <a:cs typeface="DIN Next LT W23"/>
+              </a:rPr>
+              <a:t>A kernel is a small learnable matrix (e.g., 3×3) that responds to local patterns; multiple kernels produce a stack of feature maps.</a:t>
+            </a:r>
+          </a:p>
+        </p:txBody>
+      </p:sp>
+      <p:sp>
+        <p:nvSpPr>
+          <p:cNvPr id="10" name="TextBox 9"/>
+          <p:cNvSpPr txBox="1"/>
+          <p:nvPr/>
+        </p:nvSpPr>
+        <p:spPr>
+          <a:xfrm>
+            <a:off x="548640" y="2715768"/>
+            <a:ext cx="320040" cy="411480"/>
+          </a:xfrm>
+          <a:prstGeom prst="rect">
+            <a:avLst/>
+          </a:prstGeom>
+          <a:noFill/>
+        </p:spPr>
+        <p:txBody>
+          <a:bodyPr wrap="square" anchor="t">
+            <a:spAutoFit/>
+          </a:bodyPr>
+          <a:lstStyle/>
+          <a:p>
+            <a:pPr algn="l"/>
+            <a:r>
+              <a:rPr sz="1700" b="0">
+                <a:solidFill>
+                  <a:srgbClr val="9E59CD"/>
+                </a:solidFill>
+                <a:latin typeface="DIN Next LT W23"/>
+                <a:ea typeface="DIN Next LT W23"/>
+                <a:cs typeface="DIN Next LT W23"/>
+              </a:rPr>
+              <a:t>–</a:t>
+            </a:r>
+          </a:p>
+        </p:txBody>
+      </p:sp>
+      <p:sp>
+        <p:nvSpPr>
+          <p:cNvPr id="11" name="TextBox 10"/>
+          <p:cNvSpPr txBox="1"/>
+          <p:nvPr/>
+        </p:nvSpPr>
+        <p:spPr>
+          <a:xfrm>
+            <a:off x="914400" y="2715768"/>
+            <a:ext cx="9875519" cy="411480"/>
+          </a:xfrm>
+          <a:prstGeom prst="rect">
+            <a:avLst/>
+          </a:prstGeom>
+          <a:noFill/>
+        </p:spPr>
+        <p:txBody>
+          <a:bodyPr wrap="square" anchor="t">
+            <a:spAutoFit/>
+          </a:bodyPr>
+          <a:lstStyle/>
+          <a:p>
+            <a:pPr algn="l"/>
+            <a:r>
+              <a:rPr sz="1700" b="0">
+                <a:solidFill>
+                  <a:srgbClr val="121018"/>
+                </a:solidFill>
+                <a:latin typeface="DIN Next LT W23"/>
+                <a:ea typeface="DIN Next LT W23"/>
+                <a:cs typeface="DIN Next LT W23"/>
+              </a:rPr>
+              <a:t>Classical edge detectors (Sobel, shown) are fixed kernels; CNNs learn task-specific filters from data.</a:t>
+            </a:r>
+          </a:p>
+        </p:txBody>
+      </p:sp>
+      <p:sp>
+        <p:nvSpPr>
+          <p:cNvPr id="12" name="TextBox 11"/>
+          <p:cNvSpPr txBox="1"/>
+          <p:nvPr/>
+        </p:nvSpPr>
+        <p:spPr>
+          <a:xfrm>
+            <a:off x="548640" y="3282696"/>
+            <a:ext cx="320040" cy="411480"/>
+          </a:xfrm>
+          <a:prstGeom prst="rect">
+            <a:avLst/>
+          </a:prstGeom>
+          <a:noFill/>
+        </p:spPr>
+        <p:txBody>
+          <a:bodyPr wrap="square" anchor="t">
+            <a:spAutoFit/>
+          </a:bodyPr>
+          <a:lstStyle/>
+          <a:p>
+            <a:pPr algn="l"/>
+            <a:r>
+              <a:rPr sz="1700" b="0">
+                <a:solidFill>
+                  <a:srgbClr val="9E59CD"/>
+                </a:solidFill>
+                <a:latin typeface="DIN Next LT W23"/>
+                <a:ea typeface="DIN Next LT W23"/>
+                <a:cs typeface="DIN Next LT W23"/>
+              </a:rPr>
+              <a:t>–</a:t>
+            </a:r>
+          </a:p>
+        </p:txBody>
+      </p:sp>
+      <p:sp>
+        <p:nvSpPr>
+          <p:cNvPr id="13" name="TextBox 12"/>
+          <p:cNvSpPr txBox="1"/>
+          <p:nvPr/>
+        </p:nvSpPr>
+        <p:spPr>
+          <a:xfrm>
+            <a:off x="914400" y="3282696"/>
+            <a:ext cx="9875519" cy="411480"/>
+          </a:xfrm>
+          <a:prstGeom prst="rect">
+            <a:avLst/>
+          </a:prstGeom>
+          <a:noFill/>
+        </p:spPr>
+        <p:txBody>
+          <a:bodyPr wrap="square" anchor="t">
+            <a:spAutoFit/>
+          </a:bodyPr>
+          <a:lstStyle/>
+          <a:p>
+            <a:pPr algn="l"/>
+            <a:r>
+              <a:rPr sz="1700" b="0">
+                <a:solidFill>
+                  <a:srgbClr val="121018"/>
+                </a:solidFill>
+                <a:latin typeface="DIN Next LT W23"/>
+                <a:ea typeface="DIN Next LT W23"/>
+                <a:cs typeface="DIN Next LT W23"/>
+              </a:rPr>
+              <a:t>Deep stacks widen the receptive field: early layers ≈ edges/textures; late layers ≈ object parts and semantics.</a:t>
+            </a:r>
+          </a:p>
+        </p:txBody>
+      </p:sp>
+      <p:sp>
+        <p:nvSpPr>
+          <p:cNvPr id="14" name="Rectangle 13"/>
+          <p:cNvSpPr/>
+          <p:nvPr/>
+        </p:nvSpPr>
+        <p:spPr>
+          <a:xfrm>
+            <a:off x="548640" y="6446520"/>
+            <a:ext cx="11064240" cy="10972"/>
+          </a:xfrm>
+          <a:prstGeom prst="rect">
+            <a:avLst/>
+          </a:prstGeom>
+          <a:solidFill>
+            <a:srgbClr val="5234B7"/>
+          </a:solidFill>
+          <a:ln>
+            <a:noFill/>
+          </a:ln>
+          <a:effectLst/>
+        </p:spPr>
+        <p:style>
+          <a:lnRef idx="1">
+            <a:schemeClr val="accent1"/>
+          </a:lnRef>
+          <a:fillRef idx="3">
+            <a:schemeClr val="accent1"/>
+          </a:fillRef>
+          <a:effectRef idx="2">
+            <a:schemeClr val="accent1"/>
+          </a:effectRef>
+          <a:fontRef idx="minor">
+            <a:schemeClr val="lt1"/>
+          </a:fontRef>
+        </p:style>
+        <p:txBody>
+          <a:bodyPr rtlCol="0" anchor="ctr"/>
+          <a:lstStyle/>
+          <a:p>
+            <a:pPr algn="ctr"/>
+          </a:p>
+        </p:txBody>
+      </p:sp>
+      <p:sp>
+        <p:nvSpPr>
+          <p:cNvPr id="15" name="TextBox 14"/>
+          <p:cNvSpPr txBox="1"/>
+          <p:nvPr/>
+        </p:nvSpPr>
+        <p:spPr>
+          <a:xfrm>
+            <a:off x="548640" y="6510528"/>
+            <a:ext cx="2743200" cy="256032"/>
+          </a:xfrm>
+          <a:prstGeom prst="rect">
+            <a:avLst/>
+          </a:prstGeom>
+          <a:noFill/>
+        </p:spPr>
+        <p:txBody>
+          <a:bodyPr wrap="square" anchor="t">
+            <a:spAutoFit/>
+          </a:bodyPr>
+          <a:lstStyle/>
+          <a:p>
+            <a:pPr algn="l"/>
+            <a:r>
+              <a:rPr sz="1100" b="1">
+                <a:solidFill>
+                  <a:srgbClr val="5234B7"/>
+                </a:solidFill>
+                <a:latin typeface="DIN Next LT W23"/>
+                <a:ea typeface="DIN Next LT W23"/>
+                <a:cs typeface="DIN Next LT W23"/>
+              </a:rPr>
+              <a:t>ETRA</a:t>
+            </a:r>
+          </a:p>
+        </p:txBody>
+      </p:sp>
+      <p:sp>
+        <p:nvSpPr>
+          <p:cNvPr id="16" name="TextBox 15"/>
+          <p:cNvSpPr txBox="1"/>
+          <p:nvPr/>
+        </p:nvSpPr>
+        <p:spPr>
+          <a:xfrm>
+            <a:off x="9601200" y="6510528"/>
+            <a:ext cx="2011680" cy="256032"/>
+          </a:xfrm>
+          <a:prstGeom prst="rect">
+            <a:avLst/>
+          </a:prstGeom>
+          <a:noFill/>
+        </p:spPr>
+        <p:txBody>
+          <a:bodyPr wrap="square" anchor="t">
+            <a:spAutoFit/>
+          </a:bodyPr>
+          <a:lstStyle/>
+          <a:p>
+            <a:pPr algn="r"/>
+            <a:r>
+              <a:rPr sz="1100" b="0">
+                <a:solidFill>
+                  <a:srgbClr val="5A5470"/>
+                </a:solidFill>
+                <a:latin typeface="DIN Next LT W23"/>
+                <a:ea typeface="DIN Next LT W23"/>
+                <a:cs typeface="DIN Next LT W23"/>
+              </a:rPr>
+              <a:t>69  /  86</a:t>
+            </a:r>
+          </a:p>
+        </p:txBody>
+      </p:sp>
+    </p:spTree>
+  </p:cSld>
+  <p:clrMapOvr>
+    <a:masterClrMapping/>
+  </p:clrMapOvr>
+</p:sld>
+</file>
+
+<file path=ppt/slides/slide7.xml><?xml version="1.0" encoding="utf-8"?>
+<p:sld xmlns:a="http://schemas.openxmlformats.org/drawingml/2006/main" xmlns:p="http://schemas.openxmlformats.org/presentationml/2006/main" xmlns:r="http://schemas.openxmlformats.org/officeDocument/2006/relationships">
+  <p:cSld>
+    <p:bg>
+      <p:bgPr>
+        <a:solidFill>
+          <a:srgbClr val="FAF8FF"/>
+        </a:solidFill>
+        <a:effectLst/>
+      </p:bgPr>
+    </p:bg>
+    <p:spTree>
+      <p:nvGrpSpPr>
+        <p:cNvPr id="1" name=""/>
+        <p:cNvGrpSpPr/>
+        <p:nvPr/>
+      </p:nvGrpSpPr>
+      <p:grpSpPr/>
+      <p:sp>
+        <p:nvSpPr>
+          <p:cNvPr id="2" name="Rectangle 1"/>
+          <p:cNvSpPr/>
+          <p:nvPr/>
+        </p:nvSpPr>
+        <p:spPr>
+          <a:xfrm>
+            <a:off x="12136831" y="0"/>
+            <a:ext cx="54864" cy="6858000"/>
+          </a:xfrm>
+          <a:prstGeom prst="rect">
+            <a:avLst/>
+          </a:prstGeom>
+          <a:solidFill>
+            <a:srgbClr val="5234B7"/>
+          </a:solidFill>
+          <a:ln>
+            <a:noFill/>
+          </a:ln>
+          <a:effectLst/>
+        </p:spPr>
+        <p:style>
+          <a:lnRef idx="1">
+            <a:schemeClr val="accent1"/>
+          </a:lnRef>
+          <a:fillRef idx="3">
+            <a:schemeClr val="accent1"/>
+          </a:fillRef>
+          <a:effectRef idx="2">
+            <a:schemeClr val="accent1"/>
+          </a:effectRef>
+          <a:fontRef idx="minor">
+            <a:schemeClr val="lt1"/>
+          </a:fontRef>
+        </p:style>
+        <p:txBody>
+          <a:bodyPr rtlCol="0" anchor="ctr"/>
+          <a:lstStyle/>
+          <a:p>
+            <a:pPr algn="ctr"/>
+          </a:p>
+        </p:txBody>
+      </p:sp>
+      <p:pic>
+        <p:nvPicPr>
+          <p:cNvPr id="3" name="Picture 2" descr="etra-wordmark.png"/>
+          <p:cNvPicPr>
+            <a:picLocks noChangeAspect="1"/>
+          </p:cNvPicPr>
+          <p:nvPr/>
+        </p:nvPicPr>
+        <p:blipFill>
+          <a:blip r:embed="rId2"/>
+          <a:stretch>
+            <a:fillRect/>
+          </a:stretch>
+        </p:blipFill>
+        <p:spPr>
+          <a:xfrm>
+            <a:off x="10561320" y="411480"/>
+            <a:ext cx="1206201" cy="320040"/>
+          </a:xfrm>
+          <a:prstGeom prst="rect">
+            <a:avLst/>
+          </a:prstGeom>
+        </p:spPr>
+      </p:pic>
+      <p:sp>
+        <p:nvSpPr>
+          <p:cNvPr id="4" name="TextBox 3"/>
+          <p:cNvSpPr txBox="1"/>
+          <p:nvPr/>
+        </p:nvSpPr>
+        <p:spPr>
+          <a:xfrm>
+            <a:off x="548640" y="438912"/>
+            <a:ext cx="7772400" cy="274320"/>
+          </a:xfrm>
+          <a:prstGeom prst="rect">
+            <a:avLst/>
+          </a:prstGeom>
+          <a:noFill/>
+        </p:spPr>
+        <p:txBody>
+          <a:bodyPr wrap="square" anchor="t">
+            <a:spAutoFit/>
+          </a:bodyPr>
+          <a:lstStyle/>
+          <a:p>
+            <a:pPr algn="l"/>
+            <a:r>
+              <a:rPr sz="1200" b="0">
+                <a:solidFill>
+                  <a:srgbClr val="5A5470"/>
+                </a:solidFill>
+                <a:latin typeface="DIN Next LT W23"/>
+                <a:ea typeface="DIN Next LT W23"/>
+                <a:cs typeface="DIN Next LT W23"/>
+              </a:rPr>
+              <a:t>S07  ·  Deep Learning</a:t>
+            </a:r>
+          </a:p>
+        </p:txBody>
+      </p:sp>
+      <p:sp>
+        <p:nvSpPr>
+          <p:cNvPr id="5" name="Rectangle 4"/>
+          <p:cNvSpPr/>
+          <p:nvPr/>
+        </p:nvSpPr>
+        <p:spPr>
+          <a:xfrm>
+            <a:off x="548640" y="822960"/>
+            <a:ext cx="11064240" cy="10972"/>
+          </a:xfrm>
+          <a:prstGeom prst="rect">
+            <a:avLst/>
+          </a:prstGeom>
+          <a:solidFill>
+            <a:srgbClr val="E4DCF4"/>
+          </a:solidFill>
+          <a:ln>
+            <a:noFill/>
+          </a:ln>
+          <a:effectLst/>
+        </p:spPr>
+        <p:style>
+          <a:lnRef idx="1">
+            <a:schemeClr val="accent1"/>
+          </a:lnRef>
+          <a:fillRef idx="3">
+            <a:schemeClr val="accent1"/>
+          </a:fillRef>
+          <a:effectRef idx="2">
+            <a:schemeClr val="accent1"/>
+          </a:effectRef>
+          <a:fontRef idx="minor">
+            <a:schemeClr val="lt1"/>
+          </a:fontRef>
+        </p:style>
+        <p:txBody>
+          <a:bodyPr rtlCol="0" anchor="ctr"/>
+          <a:lstStyle/>
+          <a:p>
+            <a:pPr algn="ctr"/>
+          </a:p>
+        </p:txBody>
+      </p:sp>
+      <p:sp>
+        <p:nvSpPr>
+          <p:cNvPr id="6" name="TextBox 5"/>
+          <p:cNvSpPr txBox="1"/>
+          <p:nvPr/>
+        </p:nvSpPr>
+        <p:spPr>
+          <a:xfrm>
+            <a:off x="548640" y="1051560"/>
+            <a:ext cx="10241280" cy="594360"/>
+          </a:xfrm>
+          <a:prstGeom prst="rect">
+            <a:avLst/>
+          </a:prstGeom>
+          <a:noFill/>
+        </p:spPr>
+        <p:txBody>
+          <a:bodyPr wrap="square" anchor="t">
+            <a:spAutoFit/>
+          </a:bodyPr>
+          <a:lstStyle/>
+          <a:p>
+            <a:pPr algn="l"/>
+            <a:r>
+              <a:rPr sz="3200" b="1">
+                <a:solidFill>
+                  <a:srgbClr val="5234B7"/>
+                </a:solidFill>
+                <a:latin typeface="DIN Next LT W23"/>
+                <a:ea typeface="DIN Next LT W23"/>
+                <a:cs typeface="DIN Next LT W23"/>
+              </a:rPr>
+              <a:t>Phase 1: Foundations &amp; Neural Core</a:t>
+            </a:r>
+          </a:p>
+        </p:txBody>
+      </p:sp>
+      <p:sp>
+        <p:nvSpPr>
+          <p:cNvPr id="7" name="TextBox 6"/>
+          <p:cNvSpPr txBox="1"/>
+          <p:nvPr/>
+        </p:nvSpPr>
+        <p:spPr>
+          <a:xfrm>
+            <a:off x="548640" y="1600200"/>
+            <a:ext cx="10241280" cy="365760"/>
+          </a:xfrm>
+          <a:prstGeom prst="rect">
+            <a:avLst/>
+          </a:prstGeom>
+          <a:noFill/>
+        </p:spPr>
+        <p:txBody>
+          <a:bodyPr wrap="square" anchor="t">
+            <a:spAutoFit/>
+          </a:bodyPr>
+          <a:lstStyle/>
+          <a:p>
+            <a:pPr algn="l"/>
+            <a:r>
+              <a:rPr sz="1500" b="0">
+                <a:solidFill>
+                  <a:srgbClr val="5A5470"/>
+                </a:solidFill>
+                <a:latin typeface="DIN Next LT W23"/>
+                <a:ea typeface="DIN Next LT W23"/>
+                <a:cs typeface="DIN Next LT W23"/>
+              </a:rPr>
+              <a:t>Why depth, neurons, and forward pass</a:t>
+            </a:r>
+          </a:p>
+        </p:txBody>
+      </p:sp>
+      <p:sp>
+        <p:nvSpPr>
+          <p:cNvPr id="8" name="Rounded Rectangle 7"/>
+          <p:cNvSpPr/>
+          <p:nvPr/>
+        </p:nvSpPr>
+        <p:spPr>
+          <a:xfrm>
+            <a:off x="548640" y="1965960"/>
+            <a:ext cx="10972800" cy="640080"/>
+          </a:xfrm>
+          <a:prstGeom prst="roundRect">
+            <a:avLst>
+              <a:gd name="adj" fmla="val 10000"/>
+            </a:avLst>
+          </a:prstGeom>
+          <a:solidFill>
+            <a:srgbClr val="EEE8FA"/>
+          </a:solidFill>
+          <a:ln>
+            <a:noFill/>
+          </a:ln>
+          <a:effectLst/>
+        </p:spPr>
+        <p:style>
+          <a:lnRef idx="1">
+            <a:schemeClr val="accent1"/>
+          </a:lnRef>
+          <a:fillRef idx="3">
+            <a:schemeClr val="accent1"/>
+          </a:fillRef>
+          <a:effectRef idx="2">
+            <a:schemeClr val="accent1"/>
+          </a:effectRef>
+          <a:fontRef idx="minor">
+            <a:schemeClr val="lt1"/>
+          </a:fontRef>
+        </p:style>
+        <p:txBody>
+          <a:bodyPr rtlCol="0" anchor="ctr"/>
+          <a:lstStyle/>
+          <a:p>
+            <a:pPr algn="ctr"/>
+          </a:p>
+        </p:txBody>
+      </p:sp>
+      <p:sp>
+        <p:nvSpPr>
+          <p:cNvPr id="9" name="TextBox 8"/>
+          <p:cNvSpPr txBox="1"/>
+          <p:nvPr/>
+        </p:nvSpPr>
+        <p:spPr>
+          <a:xfrm>
+            <a:off x="868680" y="2084831"/>
+            <a:ext cx="10332720" cy="411480"/>
+          </a:xfrm>
+          <a:prstGeom prst="rect">
+            <a:avLst/>
+          </a:prstGeom>
+          <a:noFill/>
+        </p:spPr>
+        <p:txBody>
+          <a:bodyPr wrap="square" anchor="t">
+            <a:spAutoFit/>
+          </a:bodyPr>
+          <a:lstStyle/>
+          <a:p>
+            <a:pPr algn="l"/>
+            <a:r>
+              <a:rPr sz="1400" b="0">
+                <a:solidFill>
+                  <a:srgbClr val="121018"/>
+                </a:solidFill>
+                <a:latin typeface="DIN Next LT W23"/>
+                <a:ea typeface="DIN Next LT W23"/>
+                <a:cs typeface="DIN Next LT W23"/>
+              </a:rPr>
+              <a:t>Goal: understand what a neuron computes and why stacking layers enables hierarchical features.</a:t>
+            </a:r>
+          </a:p>
+        </p:txBody>
+      </p:sp>
+      <p:sp>
+        <p:nvSpPr>
+          <p:cNvPr id="10" name="Rounded Rectangle 9"/>
+          <p:cNvSpPr/>
+          <p:nvPr/>
+        </p:nvSpPr>
+        <p:spPr>
+          <a:xfrm>
+            <a:off x="548640" y="2743200"/>
+            <a:ext cx="10972800" cy="1417320"/>
+          </a:xfrm>
+          <a:prstGeom prst="roundRect">
+            <a:avLst>
+              <a:gd name="adj" fmla="val 10000"/>
+            </a:avLst>
+          </a:prstGeom>
+          <a:solidFill>
+            <a:srgbClr val="EEE8FA"/>
+          </a:solidFill>
+          <a:ln>
+            <a:noFill/>
+          </a:ln>
+          <a:effectLst/>
+        </p:spPr>
+        <p:style>
+          <a:lnRef idx="1">
+            <a:schemeClr val="accent1"/>
+          </a:lnRef>
+          <a:fillRef idx="3">
+            <a:schemeClr val="accent1"/>
+          </a:fillRef>
+          <a:effectRef idx="2">
+            <a:schemeClr val="accent1"/>
+          </a:effectRef>
+          <a:fontRef idx="minor">
+            <a:schemeClr val="lt1"/>
+          </a:fontRef>
+        </p:style>
+        <p:txBody>
+          <a:bodyPr rtlCol="0" anchor="ctr"/>
+          <a:lstStyle/>
+          <a:p>
+            <a:pPr algn="ctr"/>
+          </a:p>
+        </p:txBody>
+      </p:sp>
+      <p:pic>
+        <p:nvPicPr>
+          <p:cNvPr id="11" name="Picture 10" descr="f-a72afc9ad6284967.png"/>
+          <p:cNvPicPr>
+            <a:picLocks noChangeAspect="1"/>
+          </p:cNvPicPr>
+          <p:nvPr/>
+        </p:nvPicPr>
+        <p:blipFill>
+          <a:blip r:embed="rId3"/>
+          <a:stretch>
+            <a:fillRect/>
+          </a:stretch>
+        </p:blipFill>
+        <p:spPr>
+          <a:xfrm>
+            <a:off x="4415917" y="2852928"/>
+            <a:ext cx="3238246" cy="868680"/>
+          </a:xfrm>
+          <a:prstGeom prst="rect">
+            <a:avLst/>
+          </a:prstGeom>
+        </p:spPr>
+      </p:pic>
+      <p:sp>
+        <p:nvSpPr>
+          <p:cNvPr id="12" name="TextBox 11"/>
+          <p:cNvSpPr txBox="1"/>
+          <p:nvPr/>
+        </p:nvSpPr>
+        <p:spPr>
+          <a:xfrm>
+            <a:off x="914400" y="3840480"/>
+            <a:ext cx="10241280" cy="256032"/>
+          </a:xfrm>
+          <a:prstGeom prst="rect">
+            <a:avLst/>
+          </a:prstGeom>
+          <a:noFill/>
+        </p:spPr>
+        <p:txBody>
+          <a:bodyPr wrap="square" anchor="t">
+            <a:spAutoFit/>
+          </a:bodyPr>
+          <a:lstStyle/>
+          <a:p>
+            <a:pPr algn="ctr"/>
+            <a:r>
+              <a:rPr sz="1200" b="0">
+                <a:solidFill>
+                  <a:srgbClr val="5A5470"/>
+                </a:solidFill>
+                <a:latin typeface="DIN Next LT W23"/>
+                <a:ea typeface="DIN Next LT W23"/>
+                <a:cs typeface="DIN Next LT W23"/>
+              </a:rPr>
+              <a:t>Exit check: explain this — and why nonlinearity is required between layers.</a:t>
+            </a:r>
+          </a:p>
+        </p:txBody>
+      </p:sp>
+      <p:sp>
+        <p:nvSpPr>
+          <p:cNvPr id="13" name="TextBox 12"/>
+          <p:cNvSpPr txBox="1"/>
+          <p:nvPr/>
+        </p:nvSpPr>
+        <p:spPr>
+          <a:xfrm>
+            <a:off x="548640" y="4270248"/>
+            <a:ext cx="320040" cy="384048"/>
+          </a:xfrm>
+          <a:prstGeom prst="rect">
+            <a:avLst/>
+          </a:prstGeom>
+          <a:noFill/>
+        </p:spPr>
+        <p:txBody>
+          <a:bodyPr wrap="square" anchor="t">
+            <a:spAutoFit/>
+          </a:bodyPr>
+          <a:lstStyle/>
+          <a:p>
+            <a:pPr algn="l"/>
+            <a:r>
+              <a:rPr sz="1500" b="0">
+                <a:solidFill>
+                  <a:srgbClr val="9E59CD"/>
+                </a:solidFill>
+                <a:latin typeface="DIN Next LT W23"/>
+                <a:ea typeface="DIN Next LT W23"/>
+                <a:cs typeface="DIN Next LT W23"/>
+              </a:rPr>
+              <a:t>–</a:t>
+            </a:r>
+          </a:p>
+        </p:txBody>
+      </p:sp>
+      <p:sp>
+        <p:nvSpPr>
+          <p:cNvPr id="14" name="TextBox 13"/>
+          <p:cNvSpPr txBox="1"/>
+          <p:nvPr/>
+        </p:nvSpPr>
+        <p:spPr>
+          <a:xfrm>
+            <a:off x="914400" y="4270248"/>
+            <a:ext cx="9875519" cy="384048"/>
+          </a:xfrm>
+          <a:prstGeom prst="rect">
+            <a:avLst/>
+          </a:prstGeom>
+          <a:noFill/>
+        </p:spPr>
+        <p:txBody>
+          <a:bodyPr wrap="square" anchor="t">
+            <a:spAutoFit/>
+          </a:bodyPr>
+          <a:lstStyle/>
+          <a:p>
+            <a:pPr algn="l"/>
+            <a:r>
+              <a:rPr sz="1500" b="0">
+                <a:solidFill>
+                  <a:srgbClr val="121018"/>
+                </a:solidFill>
+                <a:latin typeface="DIN Next LT W23"/>
+                <a:ea typeface="DIN Next LT W23"/>
+                <a:cs typeface="DIN Next LT W23"/>
+              </a:rPr>
+              <a:t>Topics: perceptron, activations, MLP, forward propagation, and loss functions.</a:t>
+            </a:r>
+          </a:p>
+        </p:txBody>
+      </p:sp>
+      <p:sp>
+        <p:nvSpPr>
+          <p:cNvPr id="15" name="TextBox 14"/>
+          <p:cNvSpPr txBox="1"/>
+          <p:nvPr/>
+        </p:nvSpPr>
+        <p:spPr>
+          <a:xfrm>
+            <a:off x="548640" y="4782312"/>
+            <a:ext cx="320040" cy="384048"/>
+          </a:xfrm>
+          <a:prstGeom prst="rect">
+            <a:avLst/>
+          </a:prstGeom>
+          <a:noFill/>
+        </p:spPr>
+        <p:txBody>
+          <a:bodyPr wrap="square" anchor="t">
+            <a:spAutoFit/>
+          </a:bodyPr>
+          <a:lstStyle/>
+          <a:p>
+            <a:pPr algn="l"/>
+            <a:r>
+              <a:rPr sz="1500" b="0">
+                <a:solidFill>
+                  <a:srgbClr val="9E59CD"/>
+                </a:solidFill>
+                <a:latin typeface="DIN Next LT W23"/>
+                <a:ea typeface="DIN Next LT W23"/>
+                <a:cs typeface="DIN Next LT W23"/>
+              </a:rPr>
+              <a:t>–</a:t>
+            </a:r>
+          </a:p>
+        </p:txBody>
+      </p:sp>
+      <p:sp>
+        <p:nvSpPr>
+          <p:cNvPr id="16" name="TextBox 15"/>
+          <p:cNvSpPr txBox="1"/>
+          <p:nvPr/>
+        </p:nvSpPr>
+        <p:spPr>
+          <a:xfrm>
+            <a:off x="914400" y="4782312"/>
+            <a:ext cx="9875519" cy="384048"/>
+          </a:xfrm>
+          <a:prstGeom prst="rect">
+            <a:avLst/>
+          </a:prstGeom>
+          <a:noFill/>
+        </p:spPr>
+        <p:txBody>
+          <a:bodyPr wrap="square" anchor="t">
+            <a:spAutoFit/>
+          </a:bodyPr>
+          <a:lstStyle/>
+          <a:p>
+            <a:pPr algn="l"/>
+            <a:r>
+              <a:rPr sz="1500" b="0">
+                <a:solidFill>
+                  <a:srgbClr val="121018"/>
+                </a:solidFill>
+                <a:latin typeface="DIN Next LT W23"/>
+                <a:ea typeface="DIN Next LT W23"/>
+                <a:cs typeface="DIN Next LT W23"/>
+              </a:rPr>
+              <a:t>Stacking layers builds hierarchical features only if a nonlinearity sits between them.</a:t>
+            </a:r>
+          </a:p>
+        </p:txBody>
+      </p:sp>
+      <p:sp>
+        <p:nvSpPr>
+          <p:cNvPr id="17" name="Rectangle 16"/>
+          <p:cNvSpPr/>
+          <p:nvPr/>
+        </p:nvSpPr>
+        <p:spPr>
+          <a:xfrm>
+            <a:off x="548640" y="6446520"/>
+            <a:ext cx="11064240" cy="10972"/>
+          </a:xfrm>
+          <a:prstGeom prst="rect">
+            <a:avLst/>
+          </a:prstGeom>
+          <a:solidFill>
+            <a:srgbClr val="5234B7"/>
+          </a:solidFill>
+          <a:ln>
+            <a:noFill/>
+          </a:ln>
+          <a:effectLst/>
+        </p:spPr>
+        <p:style>
+          <a:lnRef idx="1">
+            <a:schemeClr val="accent1"/>
+          </a:lnRef>
+          <a:fillRef idx="3">
+            <a:schemeClr val="accent1"/>
+          </a:fillRef>
+          <a:effectRef idx="2">
+            <a:schemeClr val="accent1"/>
+          </a:effectRef>
+          <a:fontRef idx="minor">
+            <a:schemeClr val="lt1"/>
+          </a:fontRef>
+        </p:style>
+        <p:txBody>
+          <a:bodyPr rtlCol="0" anchor="ctr"/>
+          <a:lstStyle/>
+          <a:p>
+            <a:pPr algn="ctr"/>
+          </a:p>
+        </p:txBody>
+      </p:sp>
+      <p:sp>
+        <p:nvSpPr>
+          <p:cNvPr id="18" name="TextBox 17"/>
+          <p:cNvSpPr txBox="1"/>
+          <p:nvPr/>
+        </p:nvSpPr>
+        <p:spPr>
+          <a:xfrm>
+            <a:off x="548640" y="6510528"/>
+            <a:ext cx="2743200" cy="256032"/>
+          </a:xfrm>
+          <a:prstGeom prst="rect">
+            <a:avLst/>
+          </a:prstGeom>
+          <a:noFill/>
+        </p:spPr>
+        <p:txBody>
+          <a:bodyPr wrap="square" anchor="t">
+            <a:spAutoFit/>
+          </a:bodyPr>
+          <a:lstStyle/>
+          <a:p>
+            <a:pPr algn="l"/>
+            <a:r>
+              <a:rPr sz="1100" b="1">
+                <a:solidFill>
+                  <a:srgbClr val="5234B7"/>
+                </a:solidFill>
+                <a:latin typeface="DIN Next LT W23"/>
+                <a:ea typeface="DIN Next LT W23"/>
+                <a:cs typeface="DIN Next LT W23"/>
+              </a:rPr>
+              <a:t>ETRA</a:t>
+            </a:r>
+          </a:p>
+        </p:txBody>
+      </p:sp>
+      <p:sp>
+        <p:nvSpPr>
+          <p:cNvPr id="19" name="TextBox 18"/>
+          <p:cNvSpPr txBox="1"/>
+          <p:nvPr/>
+        </p:nvSpPr>
+        <p:spPr>
+          <a:xfrm>
+            <a:off x="9601200" y="6510528"/>
+            <a:ext cx="2011680" cy="256032"/>
+          </a:xfrm>
+          <a:prstGeom prst="rect">
+            <a:avLst/>
+          </a:prstGeom>
+          <a:noFill/>
+        </p:spPr>
+        <p:txBody>
+          <a:bodyPr wrap="square" anchor="t">
+            <a:spAutoFit/>
+          </a:bodyPr>
+          <a:lstStyle/>
+          <a:p>
+            <a:pPr algn="r"/>
+            <a:r>
+              <a:rPr sz="1100" b="0">
+                <a:solidFill>
+                  <a:srgbClr val="5A5470"/>
+                </a:solidFill>
+                <a:latin typeface="DIN Next LT W23"/>
+                <a:ea typeface="DIN Next LT W23"/>
+                <a:cs typeface="DIN Next LT W23"/>
+              </a:rPr>
+              <a:t>07  /  86</a:t>
+            </a:r>
+          </a:p>
+        </p:txBody>
+      </p:sp>
+    </p:spTree>
+  </p:cSld>
+  <p:clrMapOvr>
+    <a:masterClrMapping/>
+  </p:clrMapOvr>
+</p:sld>
+</file>
+
+<file path=ppt/slides/slide70.xml><?xml version="1.0" encoding="utf-8"?>
+<p:sld xmlns:a="http://schemas.openxmlformats.org/drawingml/2006/main" xmlns:p="http://schemas.openxmlformats.org/presentationml/2006/main" xmlns:r="http://schemas.openxmlformats.org/officeDocument/2006/relationships">
+  <p:cSld>
+    <p:bg>
+      <p:bgPr>
+        <a:solidFill>
+          <a:srgbClr val="FAF8FF"/>
+        </a:solidFill>
+        <a:effectLst/>
+      </p:bgPr>
+    </p:bg>
+    <p:spTree>
+      <p:nvGrpSpPr>
+        <p:cNvPr id="1" name=""/>
+        <p:cNvGrpSpPr/>
+        <p:nvPr/>
+      </p:nvGrpSpPr>
+      <p:grpSpPr/>
+      <p:sp>
+        <p:nvSpPr>
+          <p:cNvPr id="2" name="Rectangle 1"/>
+          <p:cNvSpPr/>
+          <p:nvPr/>
+        </p:nvSpPr>
+        <p:spPr>
+          <a:xfrm>
+            <a:off x="12136831" y="0"/>
+            <a:ext cx="54864" cy="6858000"/>
+          </a:xfrm>
+          <a:prstGeom prst="rect">
+            <a:avLst/>
+          </a:prstGeom>
+          <a:solidFill>
+            <a:srgbClr val="5234B7"/>
+          </a:solidFill>
+          <a:ln>
+            <a:noFill/>
+          </a:ln>
+          <a:effectLst/>
+        </p:spPr>
+        <p:style>
+          <a:lnRef idx="1">
+            <a:schemeClr val="accent1"/>
+          </a:lnRef>
+          <a:fillRef idx="3">
+            <a:schemeClr val="accent1"/>
+          </a:fillRef>
+          <a:effectRef idx="2">
+            <a:schemeClr val="accent1"/>
+          </a:effectRef>
+          <a:fontRef idx="minor">
+            <a:schemeClr val="lt1"/>
+          </a:fontRef>
+        </p:style>
+        <p:txBody>
+          <a:bodyPr rtlCol="0" anchor="ctr"/>
+          <a:lstStyle/>
+          <a:p>
+            <a:pPr algn="ctr"/>
+          </a:p>
+        </p:txBody>
+      </p:sp>
+      <p:pic>
+        <p:nvPicPr>
+          <p:cNvPr id="3" name="Picture 2" descr="etra-wordmark.png"/>
+          <p:cNvPicPr>
+            <a:picLocks noChangeAspect="1"/>
+          </p:cNvPicPr>
+          <p:nvPr/>
+        </p:nvPicPr>
+        <p:blipFill>
+          <a:blip r:embed="rId2"/>
+          <a:stretch>
+            <a:fillRect/>
+          </a:stretch>
+        </p:blipFill>
+        <p:spPr>
+          <a:xfrm>
+            <a:off x="10561320" y="411480"/>
+            <a:ext cx="1206201" cy="320040"/>
+          </a:xfrm>
+          <a:prstGeom prst="rect">
+            <a:avLst/>
+          </a:prstGeom>
+        </p:spPr>
+      </p:pic>
+      <p:sp>
+        <p:nvSpPr>
+          <p:cNvPr id="4" name="TextBox 3"/>
+          <p:cNvSpPr txBox="1"/>
+          <p:nvPr/>
+        </p:nvSpPr>
+        <p:spPr>
+          <a:xfrm>
+            <a:off x="548640" y="438912"/>
+            <a:ext cx="7772400" cy="274320"/>
+          </a:xfrm>
+          <a:prstGeom prst="rect">
+            <a:avLst/>
+          </a:prstGeom>
+          <a:noFill/>
+        </p:spPr>
+        <p:txBody>
+          <a:bodyPr wrap="square" anchor="t">
+            <a:spAutoFit/>
+          </a:bodyPr>
+          <a:lstStyle/>
+          <a:p>
+            <a:pPr algn="l"/>
+            <a:r>
+              <a:rPr sz="1200" b="0">
+                <a:solidFill>
+                  <a:srgbClr val="5A5470"/>
+                </a:solidFill>
+                <a:latin typeface="DIN Next LT W23"/>
+                <a:ea typeface="DIN Next LT W23"/>
+                <a:cs typeface="DIN Next LT W23"/>
+              </a:rPr>
+              <a:t>S07  ·  Deep Learning</a:t>
+            </a:r>
+          </a:p>
+        </p:txBody>
+      </p:sp>
+      <p:sp>
+        <p:nvSpPr>
+          <p:cNvPr id="5" name="Rectangle 4"/>
+          <p:cNvSpPr/>
+          <p:nvPr/>
+        </p:nvSpPr>
+        <p:spPr>
+          <a:xfrm>
+            <a:off x="548640" y="822960"/>
+            <a:ext cx="11064240" cy="10972"/>
+          </a:xfrm>
+          <a:prstGeom prst="rect">
+            <a:avLst/>
+          </a:prstGeom>
+          <a:solidFill>
+            <a:srgbClr val="E4DCF4"/>
+          </a:solidFill>
+          <a:ln>
+            <a:noFill/>
+          </a:ln>
+          <a:effectLst/>
+        </p:spPr>
+        <p:style>
+          <a:lnRef idx="1">
+            <a:schemeClr val="accent1"/>
+          </a:lnRef>
+          <a:fillRef idx="3">
+            <a:schemeClr val="accent1"/>
+          </a:fillRef>
+          <a:effectRef idx="2">
+            <a:schemeClr val="accent1"/>
+          </a:effectRef>
+          <a:fontRef idx="minor">
+            <a:schemeClr val="lt1"/>
+          </a:fontRef>
+        </p:style>
+        <p:txBody>
+          <a:bodyPr rtlCol="0" anchor="ctr"/>
+          <a:lstStyle/>
+          <a:p>
+            <a:pPr algn="ctr"/>
+          </a:p>
+        </p:txBody>
+      </p:sp>
+      <p:sp>
+        <p:nvSpPr>
+          <p:cNvPr id="6" name="TextBox 5"/>
+          <p:cNvSpPr txBox="1"/>
+          <p:nvPr/>
+        </p:nvSpPr>
+        <p:spPr>
+          <a:xfrm>
+            <a:off x="548640" y="1051560"/>
+            <a:ext cx="10241280" cy="594360"/>
+          </a:xfrm>
+          <a:prstGeom prst="rect">
+            <a:avLst/>
+          </a:prstGeom>
+          <a:noFill/>
+        </p:spPr>
+        <p:txBody>
+          <a:bodyPr wrap="square" anchor="t">
+            <a:spAutoFit/>
+          </a:bodyPr>
+          <a:lstStyle/>
+          <a:p>
+            <a:pPr algn="l"/>
+            <a:r>
+              <a:rPr sz="3200" b="1">
+                <a:solidFill>
+                  <a:srgbClr val="5234B7"/>
+                </a:solidFill>
+                <a:latin typeface="DIN Next LT W23"/>
+                <a:ea typeface="DIN Next LT W23"/>
+                <a:cs typeface="DIN Next LT W23"/>
+              </a:rPr>
+              <a:t>Convolution: Kernels, Edge Filters, and Feature Maps</a:t>
+            </a:r>
+          </a:p>
+        </p:txBody>
+      </p:sp>
+      <p:sp>
+        <p:nvSpPr>
+          <p:cNvPr id="7" name="TextBox 6"/>
+          <p:cNvSpPr txBox="1"/>
+          <p:nvPr/>
+        </p:nvSpPr>
+        <p:spPr>
+          <a:xfrm>
+            <a:off x="548640" y="1600200"/>
+            <a:ext cx="10241280" cy="365760"/>
+          </a:xfrm>
+          <a:prstGeom prst="rect">
+            <a:avLst/>
+          </a:prstGeom>
+          <a:noFill/>
+        </p:spPr>
+        <p:txBody>
+          <a:bodyPr wrap="square" anchor="t">
+            <a:spAutoFit/>
+          </a:bodyPr>
+          <a:lstStyle/>
+          <a:p>
+            <a:pPr algn="l"/>
+            <a:r>
+              <a:rPr sz="1500" b="0">
+                <a:solidFill>
+                  <a:srgbClr val="5A5470"/>
+                </a:solidFill>
+                <a:latin typeface="DIN Next LT W23"/>
+                <a:ea typeface="DIN Next LT W23"/>
+                <a:cs typeface="DIN Next LT W23"/>
+              </a:rPr>
+              <a:t>Sliding Linear Filters + Nonlinearity</a:t>
+            </a:r>
+          </a:p>
+        </p:txBody>
+      </p:sp>
+      <p:sp>
+        <p:nvSpPr>
+          <p:cNvPr id="8" name="Rounded Rectangle 7"/>
+          <p:cNvSpPr/>
+          <p:nvPr/>
+        </p:nvSpPr>
+        <p:spPr>
+          <a:xfrm>
+            <a:off x="548640" y="1965960"/>
+            <a:ext cx="10972800" cy="3977639"/>
+          </a:xfrm>
+          <a:prstGeom prst="roundRect">
+            <a:avLst>
+              <a:gd name="adj" fmla="val 10000"/>
+            </a:avLst>
+          </a:prstGeom>
+          <a:solidFill>
+            <a:srgbClr val="EEE8FA"/>
+          </a:solidFill>
+          <a:ln>
+            <a:noFill/>
+          </a:ln>
+          <a:effectLst/>
+        </p:spPr>
+        <p:style>
+          <a:lnRef idx="1">
+            <a:schemeClr val="accent1"/>
+          </a:lnRef>
+          <a:fillRef idx="3">
+            <a:schemeClr val="accent1"/>
+          </a:fillRef>
+          <a:effectRef idx="2">
+            <a:schemeClr val="accent1"/>
+          </a:effectRef>
+          <a:fontRef idx="minor">
+            <a:schemeClr val="lt1"/>
+          </a:fontRef>
+        </p:style>
+        <p:txBody>
+          <a:bodyPr rtlCol="0" anchor="ctr"/>
+          <a:lstStyle/>
+          <a:p>
+            <a:pPr algn="ctr"/>
+          </a:p>
+        </p:txBody>
+      </p:sp>
+      <p:pic>
+        <p:nvPicPr>
+          <p:cNvPr id="9" name="Picture 8" descr="convolution.png"/>
+          <p:cNvPicPr>
+            <a:picLocks noChangeAspect="1"/>
+          </p:cNvPicPr>
+          <p:nvPr/>
+        </p:nvPicPr>
+        <p:blipFill>
+          <a:blip r:embed="rId3"/>
+          <a:stretch>
+            <a:fillRect/>
+          </a:stretch>
+        </p:blipFill>
+        <p:spPr>
+          <a:xfrm>
+            <a:off x="1413066" y="2103120"/>
+            <a:ext cx="9243946" cy="3703320"/>
+          </a:xfrm>
+          <a:prstGeom prst="rect">
+            <a:avLst/>
+          </a:prstGeom>
+        </p:spPr>
+      </p:pic>
+      <p:sp>
+        <p:nvSpPr>
+          <p:cNvPr id="10" name="Rectangle 9"/>
+          <p:cNvSpPr/>
+          <p:nvPr/>
+        </p:nvSpPr>
+        <p:spPr>
+          <a:xfrm>
+            <a:off x="548640" y="6446520"/>
+            <a:ext cx="11064240" cy="10972"/>
+          </a:xfrm>
+          <a:prstGeom prst="rect">
+            <a:avLst/>
+          </a:prstGeom>
+          <a:solidFill>
+            <a:srgbClr val="5234B7"/>
+          </a:solidFill>
+          <a:ln>
+            <a:noFill/>
+          </a:ln>
+          <a:effectLst/>
+        </p:spPr>
+        <p:style>
+          <a:lnRef idx="1">
+            <a:schemeClr val="accent1"/>
+          </a:lnRef>
+          <a:fillRef idx="3">
+            <a:schemeClr val="accent1"/>
+          </a:fillRef>
+          <a:effectRef idx="2">
+            <a:schemeClr val="accent1"/>
+          </a:effectRef>
+          <a:fontRef idx="minor">
+            <a:schemeClr val="lt1"/>
+          </a:fontRef>
+        </p:style>
+        <p:txBody>
+          <a:bodyPr rtlCol="0" anchor="ctr"/>
+          <a:lstStyle/>
+          <a:p>
+            <a:pPr algn="ctr"/>
+          </a:p>
+        </p:txBody>
+      </p:sp>
+      <p:sp>
+        <p:nvSpPr>
+          <p:cNvPr id="11" name="TextBox 10"/>
+          <p:cNvSpPr txBox="1"/>
+          <p:nvPr/>
+        </p:nvSpPr>
+        <p:spPr>
+          <a:xfrm>
+            <a:off x="548640" y="6510528"/>
+            <a:ext cx="2743200" cy="256032"/>
+          </a:xfrm>
+          <a:prstGeom prst="rect">
+            <a:avLst/>
+          </a:prstGeom>
+          <a:noFill/>
+        </p:spPr>
+        <p:txBody>
+          <a:bodyPr wrap="square" anchor="t">
+            <a:spAutoFit/>
+          </a:bodyPr>
+          <a:lstStyle/>
+          <a:p>
+            <a:pPr algn="l"/>
+            <a:r>
+              <a:rPr sz="1100" b="1">
+                <a:solidFill>
+                  <a:srgbClr val="5234B7"/>
+                </a:solidFill>
+                <a:latin typeface="DIN Next LT W23"/>
+                <a:ea typeface="DIN Next LT W23"/>
+                <a:cs typeface="DIN Next LT W23"/>
+              </a:rPr>
+              <a:t>ETRA</a:t>
+            </a:r>
+          </a:p>
+        </p:txBody>
+      </p:sp>
+      <p:sp>
+        <p:nvSpPr>
+          <p:cNvPr id="12" name="TextBox 11"/>
+          <p:cNvSpPr txBox="1"/>
+          <p:nvPr/>
+        </p:nvSpPr>
+        <p:spPr>
+          <a:xfrm>
+            <a:off x="9601200" y="6510528"/>
+            <a:ext cx="2011680" cy="256032"/>
+          </a:xfrm>
+          <a:prstGeom prst="rect">
+            <a:avLst/>
+          </a:prstGeom>
+          <a:noFill/>
+        </p:spPr>
+        <p:txBody>
+          <a:bodyPr wrap="square" anchor="t">
+            <a:spAutoFit/>
+          </a:bodyPr>
+          <a:lstStyle/>
+          <a:p>
+            <a:pPr algn="r"/>
+            <a:r>
+              <a:rPr sz="1100" b="0">
+                <a:solidFill>
+                  <a:srgbClr val="5A5470"/>
+                </a:solidFill>
+                <a:latin typeface="DIN Next LT W23"/>
+                <a:ea typeface="DIN Next LT W23"/>
+                <a:cs typeface="DIN Next LT W23"/>
+              </a:rPr>
+              <a:t>70  /  86</a:t>
+            </a:r>
+          </a:p>
+        </p:txBody>
+      </p:sp>
+    </p:spTree>
+  </p:cSld>
+  <p:clrMapOvr>
+    <a:masterClrMapping/>
+  </p:clrMapOvr>
+</p:sld>
+</file>
+
+<file path=ppt/slides/slide71.xml><?xml version="1.0" encoding="utf-8"?>
+<p:sld xmlns:a="http://schemas.openxmlformats.org/drawingml/2006/main" xmlns:p="http://schemas.openxmlformats.org/presentationml/2006/main" xmlns:r="http://schemas.openxmlformats.org/officeDocument/2006/relationships">
+  <p:cSld>
+    <p:bg>
+      <p:bgPr>
+        <a:solidFill>
+          <a:srgbClr val="FAF8FF"/>
+        </a:solidFill>
+        <a:effectLst/>
+      </p:bgPr>
+    </p:bg>
+    <p:spTree>
+      <p:nvGrpSpPr>
+        <p:cNvPr id="1" name=""/>
+        <p:cNvGrpSpPr/>
+        <p:nvPr/>
+      </p:nvGrpSpPr>
+      <p:grpSpPr/>
+      <p:sp>
+        <p:nvSpPr>
+          <p:cNvPr id="2" name="Rectangle 1"/>
+          <p:cNvSpPr/>
+          <p:nvPr/>
+        </p:nvSpPr>
+        <p:spPr>
+          <a:xfrm>
+            <a:off x="12136831" y="0"/>
+            <a:ext cx="54864" cy="6858000"/>
+          </a:xfrm>
+          <a:prstGeom prst="rect">
+            <a:avLst/>
+          </a:prstGeom>
+          <a:solidFill>
+            <a:srgbClr val="5234B7"/>
+          </a:solidFill>
+          <a:ln>
+            <a:noFill/>
+          </a:ln>
+          <a:effectLst/>
+        </p:spPr>
+        <p:style>
+          <a:lnRef idx="1">
+            <a:schemeClr val="accent1"/>
+          </a:lnRef>
+          <a:fillRef idx="3">
+            <a:schemeClr val="accent1"/>
+          </a:fillRef>
+          <a:effectRef idx="2">
+            <a:schemeClr val="accent1"/>
+          </a:effectRef>
+          <a:fontRef idx="minor">
+            <a:schemeClr val="lt1"/>
+          </a:fontRef>
+        </p:style>
+        <p:txBody>
+          <a:bodyPr rtlCol="0" anchor="ctr"/>
+          <a:lstStyle/>
+          <a:p>
+            <a:pPr algn="ctr"/>
+          </a:p>
+        </p:txBody>
+      </p:sp>
+      <p:pic>
+        <p:nvPicPr>
+          <p:cNvPr id="3" name="Picture 2" descr="etra-wordmark.png"/>
+          <p:cNvPicPr>
+            <a:picLocks noChangeAspect="1"/>
+          </p:cNvPicPr>
+          <p:nvPr/>
+        </p:nvPicPr>
+        <p:blipFill>
+          <a:blip r:embed="rId2"/>
+          <a:stretch>
+            <a:fillRect/>
+          </a:stretch>
+        </p:blipFill>
+        <p:spPr>
+          <a:xfrm>
+            <a:off x="10561320" y="411480"/>
+            <a:ext cx="1206201" cy="320040"/>
+          </a:xfrm>
+          <a:prstGeom prst="rect">
+            <a:avLst/>
+          </a:prstGeom>
+        </p:spPr>
+      </p:pic>
+      <p:sp>
+        <p:nvSpPr>
+          <p:cNvPr id="4" name="TextBox 3"/>
+          <p:cNvSpPr txBox="1"/>
+          <p:nvPr/>
+        </p:nvSpPr>
+        <p:spPr>
+          <a:xfrm>
+            <a:off x="548640" y="438912"/>
+            <a:ext cx="7772400" cy="274320"/>
+          </a:xfrm>
+          <a:prstGeom prst="rect">
+            <a:avLst/>
+          </a:prstGeom>
+          <a:noFill/>
+        </p:spPr>
+        <p:txBody>
+          <a:bodyPr wrap="square" anchor="t">
+            <a:spAutoFit/>
+          </a:bodyPr>
+          <a:lstStyle/>
+          <a:p>
+            <a:pPr algn="l"/>
+            <a:r>
+              <a:rPr sz="1200" b="0">
+                <a:solidFill>
+                  <a:srgbClr val="5A5470"/>
+                </a:solidFill>
+                <a:latin typeface="DIN Next LT W23"/>
+                <a:ea typeface="DIN Next LT W23"/>
+                <a:cs typeface="DIN Next LT W23"/>
+              </a:rPr>
+              <a:t>S07  ·  Deep Learning</a:t>
+            </a:r>
+          </a:p>
+        </p:txBody>
+      </p:sp>
+      <p:sp>
+        <p:nvSpPr>
+          <p:cNvPr id="5" name="Rectangle 4"/>
+          <p:cNvSpPr/>
+          <p:nvPr/>
+        </p:nvSpPr>
+        <p:spPr>
+          <a:xfrm>
+            <a:off x="548640" y="822960"/>
+            <a:ext cx="11064240" cy="10972"/>
+          </a:xfrm>
+          <a:prstGeom prst="rect">
+            <a:avLst/>
+          </a:prstGeom>
+          <a:solidFill>
+            <a:srgbClr val="E4DCF4"/>
+          </a:solidFill>
+          <a:ln>
+            <a:noFill/>
+          </a:ln>
+          <a:effectLst/>
+        </p:spPr>
+        <p:style>
+          <a:lnRef idx="1">
+            <a:schemeClr val="accent1"/>
+          </a:lnRef>
+          <a:fillRef idx="3">
+            <a:schemeClr val="accent1"/>
+          </a:fillRef>
+          <a:effectRef idx="2">
+            <a:schemeClr val="accent1"/>
+          </a:effectRef>
+          <a:fontRef idx="minor">
+            <a:schemeClr val="lt1"/>
+          </a:fontRef>
+        </p:style>
+        <p:txBody>
+          <a:bodyPr rtlCol="0" anchor="ctr"/>
+          <a:lstStyle/>
+          <a:p>
+            <a:pPr algn="ctr"/>
+          </a:p>
+        </p:txBody>
+      </p:sp>
+      <p:sp>
+        <p:nvSpPr>
+          <p:cNvPr id="6" name="TextBox 5"/>
+          <p:cNvSpPr txBox="1"/>
+          <p:nvPr/>
+        </p:nvSpPr>
+        <p:spPr>
+          <a:xfrm>
+            <a:off x="548640" y="1051560"/>
+            <a:ext cx="10241280" cy="594360"/>
+          </a:xfrm>
+          <a:prstGeom prst="rect">
+            <a:avLst/>
+          </a:prstGeom>
+          <a:noFill/>
+        </p:spPr>
+        <p:txBody>
+          <a:bodyPr wrap="square" anchor="t">
+            <a:spAutoFit/>
+          </a:bodyPr>
+          <a:lstStyle/>
+          <a:p>
+            <a:pPr algn="l"/>
+            <a:r>
+              <a:rPr sz="3200" b="1">
+                <a:solidFill>
+                  <a:srgbClr val="5234B7"/>
+                </a:solidFill>
+                <a:latin typeface="DIN Next LT W23"/>
+                <a:ea typeface="DIN Next LT W23"/>
+                <a:cs typeface="DIN Next LT W23"/>
+              </a:rPr>
+              <a:t>Convolution: Kernels, Edge Filters, and Feature Maps</a:t>
+            </a:r>
+          </a:p>
+        </p:txBody>
+      </p:sp>
+      <p:sp>
+        <p:nvSpPr>
+          <p:cNvPr id="7" name="TextBox 6"/>
+          <p:cNvSpPr txBox="1"/>
+          <p:nvPr/>
+        </p:nvSpPr>
+        <p:spPr>
+          <a:xfrm>
+            <a:off x="548640" y="1600200"/>
+            <a:ext cx="10241280" cy="365760"/>
+          </a:xfrm>
+          <a:prstGeom prst="rect">
+            <a:avLst/>
+          </a:prstGeom>
+          <a:noFill/>
+        </p:spPr>
+        <p:txBody>
+          <a:bodyPr wrap="square" anchor="t">
+            <a:spAutoFit/>
+          </a:bodyPr>
+          <a:lstStyle/>
+          <a:p>
+            <a:pPr algn="l"/>
+            <a:r>
+              <a:rPr sz="1500" b="0">
+                <a:solidFill>
+                  <a:srgbClr val="5A5470"/>
+                </a:solidFill>
+                <a:latin typeface="DIN Next LT W23"/>
+                <a:ea typeface="DIN Next LT W23"/>
+                <a:cs typeface="DIN Next LT W23"/>
+              </a:rPr>
+              <a:t>Sliding Linear Filters + Nonlinearity</a:t>
+            </a:r>
+          </a:p>
+        </p:txBody>
+      </p:sp>
+      <p:sp>
+        <p:nvSpPr>
+          <p:cNvPr id="8" name="Rounded Rectangle 7"/>
+          <p:cNvSpPr/>
+          <p:nvPr/>
+        </p:nvSpPr>
+        <p:spPr>
+          <a:xfrm>
+            <a:off x="548640" y="1965960"/>
+            <a:ext cx="10972800" cy="3977639"/>
+          </a:xfrm>
+          <a:prstGeom prst="roundRect">
+            <a:avLst>
+              <a:gd name="adj" fmla="val 10000"/>
+            </a:avLst>
+          </a:prstGeom>
+          <a:solidFill>
+            <a:srgbClr val="EEE8FA"/>
+          </a:solidFill>
+          <a:ln>
+            <a:noFill/>
+          </a:ln>
+          <a:effectLst/>
+        </p:spPr>
+        <p:style>
+          <a:lnRef idx="1">
+            <a:schemeClr val="accent1"/>
+          </a:lnRef>
+          <a:fillRef idx="3">
+            <a:schemeClr val="accent1"/>
+          </a:fillRef>
+          <a:effectRef idx="2">
+            <a:schemeClr val="accent1"/>
+          </a:effectRef>
+          <a:fontRef idx="minor">
+            <a:schemeClr val="lt1"/>
+          </a:fontRef>
+        </p:style>
+        <p:txBody>
+          <a:bodyPr rtlCol="0" anchor="ctr"/>
+          <a:lstStyle/>
+          <a:p>
+            <a:pPr algn="ctr"/>
+          </a:p>
+        </p:txBody>
+      </p:sp>
+      <p:pic>
+        <p:nvPicPr>
+          <p:cNvPr id="9" name="Picture 8" descr="sobel-y.png"/>
+          <p:cNvPicPr>
+            <a:picLocks noChangeAspect="1"/>
+          </p:cNvPicPr>
+          <p:nvPr/>
+        </p:nvPicPr>
+        <p:blipFill>
+          <a:blip r:embed="rId3"/>
+          <a:stretch>
+            <a:fillRect/>
+          </a:stretch>
+        </p:blipFill>
+        <p:spPr>
+          <a:xfrm>
+            <a:off x="2075917" y="2103120"/>
+            <a:ext cx="7918244" cy="3703320"/>
+          </a:xfrm>
+          <a:prstGeom prst="rect">
+            <a:avLst/>
+          </a:prstGeom>
+        </p:spPr>
+      </p:pic>
+      <p:sp>
+        <p:nvSpPr>
+          <p:cNvPr id="10" name="Rectangle 9"/>
+          <p:cNvSpPr/>
+          <p:nvPr/>
+        </p:nvSpPr>
+        <p:spPr>
+          <a:xfrm>
+            <a:off x="548640" y="6446520"/>
+            <a:ext cx="11064240" cy="10972"/>
+          </a:xfrm>
+          <a:prstGeom prst="rect">
+            <a:avLst/>
+          </a:prstGeom>
+          <a:solidFill>
+            <a:srgbClr val="5234B7"/>
+          </a:solidFill>
+          <a:ln>
+            <a:noFill/>
+          </a:ln>
+          <a:effectLst/>
+        </p:spPr>
+        <p:style>
+          <a:lnRef idx="1">
+            <a:schemeClr val="accent1"/>
+          </a:lnRef>
+          <a:fillRef idx="3">
+            <a:schemeClr val="accent1"/>
+          </a:fillRef>
+          <a:effectRef idx="2">
+            <a:schemeClr val="accent1"/>
+          </a:effectRef>
+          <a:fontRef idx="minor">
+            <a:schemeClr val="lt1"/>
+          </a:fontRef>
+        </p:style>
+        <p:txBody>
+          <a:bodyPr rtlCol="0" anchor="ctr"/>
+          <a:lstStyle/>
+          <a:p>
+            <a:pPr algn="ctr"/>
+          </a:p>
+        </p:txBody>
+      </p:sp>
+      <p:sp>
+        <p:nvSpPr>
+          <p:cNvPr id="11" name="TextBox 10"/>
+          <p:cNvSpPr txBox="1"/>
+          <p:nvPr/>
+        </p:nvSpPr>
+        <p:spPr>
+          <a:xfrm>
+            <a:off x="548640" y="6510528"/>
+            <a:ext cx="2743200" cy="256032"/>
+          </a:xfrm>
+          <a:prstGeom prst="rect">
+            <a:avLst/>
+          </a:prstGeom>
+          <a:noFill/>
+        </p:spPr>
+        <p:txBody>
+          <a:bodyPr wrap="square" anchor="t">
+            <a:spAutoFit/>
+          </a:bodyPr>
+          <a:lstStyle/>
+          <a:p>
+            <a:pPr algn="l"/>
+            <a:r>
+              <a:rPr sz="1100" b="1">
+                <a:solidFill>
+                  <a:srgbClr val="5234B7"/>
+                </a:solidFill>
+                <a:latin typeface="DIN Next LT W23"/>
+                <a:ea typeface="DIN Next LT W23"/>
+                <a:cs typeface="DIN Next LT W23"/>
+              </a:rPr>
+              <a:t>ETRA</a:t>
+            </a:r>
+          </a:p>
+        </p:txBody>
+      </p:sp>
+      <p:sp>
+        <p:nvSpPr>
+          <p:cNvPr id="12" name="TextBox 11"/>
+          <p:cNvSpPr txBox="1"/>
+          <p:nvPr/>
+        </p:nvSpPr>
+        <p:spPr>
+          <a:xfrm>
+            <a:off x="9601200" y="6510528"/>
+            <a:ext cx="2011680" cy="256032"/>
+          </a:xfrm>
+          <a:prstGeom prst="rect">
+            <a:avLst/>
+          </a:prstGeom>
+          <a:noFill/>
+        </p:spPr>
+        <p:txBody>
+          <a:bodyPr wrap="square" anchor="t">
+            <a:spAutoFit/>
+          </a:bodyPr>
+          <a:lstStyle/>
+          <a:p>
+            <a:pPr algn="r"/>
+            <a:r>
+              <a:rPr sz="1100" b="0">
+                <a:solidFill>
+                  <a:srgbClr val="5A5470"/>
+                </a:solidFill>
+                <a:latin typeface="DIN Next LT W23"/>
+                <a:ea typeface="DIN Next LT W23"/>
+                <a:cs typeface="DIN Next LT W23"/>
+              </a:rPr>
+              <a:t>71  /  86</a:t>
+            </a:r>
+          </a:p>
+        </p:txBody>
+      </p:sp>
+    </p:spTree>
+  </p:cSld>
+  <p:clrMapOvr>
+    <a:masterClrMapping/>
+  </p:clrMapOvr>
+</p:sld>
+</file>
+
+<file path=ppt/slides/slide72.xml><?xml version="1.0" encoding="utf-8"?>
+<p:sld xmlns:a="http://schemas.openxmlformats.org/drawingml/2006/main" xmlns:p="http://schemas.openxmlformats.org/presentationml/2006/main" xmlns:r="http://schemas.openxmlformats.org/officeDocument/2006/relationships">
+  <p:cSld>
+    <p:bg>
+      <p:bgPr>
+        <a:solidFill>
+          <a:srgbClr val="FAF8FF"/>
+        </a:solidFill>
+        <a:effectLst/>
+      </p:bgPr>
+    </p:bg>
+    <p:spTree>
+      <p:nvGrpSpPr>
+        <p:cNvPr id="1" name=""/>
+        <p:cNvGrpSpPr/>
+        <p:nvPr/>
+      </p:nvGrpSpPr>
+      <p:grpSpPr/>
+      <p:sp>
+        <p:nvSpPr>
+          <p:cNvPr id="2" name="Rectangle 1"/>
+          <p:cNvSpPr/>
+          <p:nvPr/>
+        </p:nvSpPr>
+        <p:spPr>
+          <a:xfrm>
+            <a:off x="12136831" y="0"/>
+            <a:ext cx="54864" cy="6858000"/>
+          </a:xfrm>
+          <a:prstGeom prst="rect">
+            <a:avLst/>
+          </a:prstGeom>
+          <a:solidFill>
+            <a:srgbClr val="5234B7"/>
+          </a:solidFill>
+          <a:ln>
+            <a:noFill/>
+          </a:ln>
+          <a:effectLst/>
+        </p:spPr>
+        <p:style>
+          <a:lnRef idx="1">
+            <a:schemeClr val="accent1"/>
+          </a:lnRef>
+          <a:fillRef idx="3">
+            <a:schemeClr val="accent1"/>
+          </a:fillRef>
+          <a:effectRef idx="2">
+            <a:schemeClr val="accent1"/>
+          </a:effectRef>
+          <a:fontRef idx="minor">
+            <a:schemeClr val="lt1"/>
+          </a:fontRef>
+        </p:style>
+        <p:txBody>
+          <a:bodyPr rtlCol="0" anchor="ctr"/>
+          <a:lstStyle/>
+          <a:p>
+            <a:pPr algn="ctr"/>
+          </a:p>
+        </p:txBody>
+      </p:sp>
+      <p:pic>
+        <p:nvPicPr>
+          <p:cNvPr id="3" name="Picture 2" descr="etra-wordmark.png"/>
+          <p:cNvPicPr>
+            <a:picLocks noChangeAspect="1"/>
+          </p:cNvPicPr>
+          <p:nvPr/>
+        </p:nvPicPr>
+        <p:blipFill>
+          <a:blip r:embed="rId2"/>
+          <a:stretch>
+            <a:fillRect/>
+          </a:stretch>
+        </p:blipFill>
+        <p:spPr>
+          <a:xfrm>
+            <a:off x="10561320" y="411480"/>
+            <a:ext cx="1206201" cy="320040"/>
+          </a:xfrm>
+          <a:prstGeom prst="rect">
+            <a:avLst/>
+          </a:prstGeom>
+        </p:spPr>
+      </p:pic>
+      <p:sp>
+        <p:nvSpPr>
+          <p:cNvPr id="4" name="TextBox 3"/>
+          <p:cNvSpPr txBox="1"/>
+          <p:nvPr/>
+        </p:nvSpPr>
+        <p:spPr>
+          <a:xfrm>
+            <a:off x="548640" y="438912"/>
+            <a:ext cx="7772400" cy="274320"/>
+          </a:xfrm>
+          <a:prstGeom prst="rect">
+            <a:avLst/>
+          </a:prstGeom>
+          <a:noFill/>
+        </p:spPr>
+        <p:txBody>
+          <a:bodyPr wrap="square" anchor="t">
+            <a:spAutoFit/>
+          </a:bodyPr>
+          <a:lstStyle/>
+          <a:p>
+            <a:pPr algn="l"/>
+            <a:r>
+              <a:rPr sz="1200" b="0">
+                <a:solidFill>
+                  <a:srgbClr val="5A5470"/>
+                </a:solidFill>
+                <a:latin typeface="DIN Next LT W23"/>
+                <a:ea typeface="DIN Next LT W23"/>
+                <a:cs typeface="DIN Next LT W23"/>
+              </a:rPr>
+              <a:t>S07  ·  Deep Learning</a:t>
+            </a:r>
+          </a:p>
+        </p:txBody>
+      </p:sp>
+      <p:sp>
+        <p:nvSpPr>
+          <p:cNvPr id="5" name="Rectangle 4"/>
+          <p:cNvSpPr/>
+          <p:nvPr/>
+        </p:nvSpPr>
+        <p:spPr>
+          <a:xfrm>
+            <a:off x="548640" y="822960"/>
+            <a:ext cx="11064240" cy="10972"/>
+          </a:xfrm>
+          <a:prstGeom prst="rect">
+            <a:avLst/>
+          </a:prstGeom>
+          <a:solidFill>
+            <a:srgbClr val="E4DCF4"/>
+          </a:solidFill>
+          <a:ln>
+            <a:noFill/>
+          </a:ln>
+          <a:effectLst/>
+        </p:spPr>
+        <p:style>
+          <a:lnRef idx="1">
+            <a:schemeClr val="accent1"/>
+          </a:lnRef>
+          <a:fillRef idx="3">
+            <a:schemeClr val="accent1"/>
+          </a:fillRef>
+          <a:effectRef idx="2">
+            <a:schemeClr val="accent1"/>
+          </a:effectRef>
+          <a:fontRef idx="minor">
+            <a:schemeClr val="lt1"/>
+          </a:fontRef>
+        </p:style>
+        <p:txBody>
+          <a:bodyPr rtlCol="0" anchor="ctr"/>
+          <a:lstStyle/>
+          <a:p>
+            <a:pPr algn="ctr"/>
+          </a:p>
+        </p:txBody>
+      </p:sp>
+      <p:sp>
+        <p:nvSpPr>
+          <p:cNvPr id="6" name="TextBox 5"/>
+          <p:cNvSpPr txBox="1"/>
+          <p:nvPr/>
+        </p:nvSpPr>
+        <p:spPr>
+          <a:xfrm>
+            <a:off x="548640" y="1051560"/>
+            <a:ext cx="10241280" cy="594360"/>
+          </a:xfrm>
+          <a:prstGeom prst="rect">
+            <a:avLst/>
+          </a:prstGeom>
+          <a:noFill/>
+        </p:spPr>
+        <p:txBody>
+          <a:bodyPr wrap="square" anchor="t">
+            <a:spAutoFit/>
+          </a:bodyPr>
+          <a:lstStyle/>
+          <a:p>
+            <a:pPr algn="l"/>
+            <a:r>
+              <a:rPr sz="3200" b="1">
+                <a:solidFill>
+                  <a:srgbClr val="5234B7"/>
+                </a:solidFill>
+                <a:latin typeface="DIN Next LT W23"/>
+                <a:ea typeface="DIN Next LT W23"/>
+                <a:cs typeface="DIN Next LT W23"/>
+              </a:rPr>
+              <a:t>Convolution: Kernels, Edge Filters, and Feature Maps</a:t>
+            </a:r>
+          </a:p>
+        </p:txBody>
+      </p:sp>
+      <p:sp>
+        <p:nvSpPr>
+          <p:cNvPr id="7" name="TextBox 6"/>
+          <p:cNvSpPr txBox="1"/>
+          <p:nvPr/>
+        </p:nvSpPr>
+        <p:spPr>
+          <a:xfrm>
+            <a:off x="548640" y="1600200"/>
+            <a:ext cx="10241280" cy="365760"/>
+          </a:xfrm>
+          <a:prstGeom prst="rect">
+            <a:avLst/>
+          </a:prstGeom>
+          <a:noFill/>
+        </p:spPr>
+        <p:txBody>
+          <a:bodyPr wrap="square" anchor="t">
+            <a:spAutoFit/>
+          </a:bodyPr>
+          <a:lstStyle/>
+          <a:p>
+            <a:pPr algn="l"/>
+            <a:r>
+              <a:rPr sz="1500" b="0">
+                <a:solidFill>
+                  <a:srgbClr val="5A5470"/>
+                </a:solidFill>
+                <a:latin typeface="DIN Next LT W23"/>
+                <a:ea typeface="DIN Next LT W23"/>
+                <a:cs typeface="DIN Next LT W23"/>
+              </a:rPr>
+              <a:t>Sliding Linear Filters + Nonlinearity</a:t>
             </a:r>
           </a:p>
         </p:txBody>
@@ -43620,7 +46377,7 @@
         </p:nvGraphicFramePr>
         <p:xfrm>
           <a:off x="548640" y="2057400"/>
-          <a:ext cx="10972800" cy="2377440"/>
+          <a:ext cx="10972800" cy="1901952"/>
         </p:xfrm>
         <a:graphic>
           <a:graphicData uri="http://schemas.openxmlformats.org/drawingml/2006/table">
@@ -43717,7 +46474,7 @@
                           </a:solidFill>
                           <a:latin typeface="Helvetica"/>
                         </a:rPr>
-                        <a:t>Immediate neighborhood (3×3 is common)</a:t>
+                        <a:t>Immediate neighborhood size (3×3 common)</a:t>
                       </a:r>
                     </a:p>
                   </a:txBody>
@@ -43765,7 +46522,7 @@
                           </a:solidFill>
                           <a:latin typeface="Helvetica"/>
                         </a:rPr>
-                        <a:t>Downsample spatially when &gt; 1</a:t>
+                        <a:t>Downsample spatially when &gt;1</a:t>
                       </a:r>
                     </a:p>
                   </a:txBody>
@@ -43813,7 +46570,7 @@
                           </a:solidFill>
                           <a:latin typeface="Helvetica"/>
                         </a:rPr>
-                        <a:t>Keep spatial size (same) or control the border</a:t>
+                        <a:t>Keep spatial size (same padding) or control border</a:t>
                       </a:r>
                     </a:p>
                   </a:txBody>
@@ -43824,144 +46581,13 @@
                   </a:tcPr>
                 </a:tc>
               </a:tr>
-              <a:tr h="475488">
-                <a:tc>
-                  <a:txBody>
-                    <a:bodyPr/>
-                    <a:lstStyle/>
-                    <a:p>
-                      <a:pPr algn="l"/>
-                      <a:r>
-                        <a:rPr sz="1300" b="1">
-                          <a:solidFill>
-                            <a:srgbClr val="5234B7"/>
-                          </a:solidFill>
-                          <a:latin typeface="Helvetica"/>
-                        </a:rPr>
-                        <a:t>Channels / filters</a:t>
-                      </a:r>
-                    </a:p>
-                  </a:txBody>
-                  <a:tcPr>
-                    <a:solidFill>
-                      <a:srgbClr val="F5F1FC"/>
-                    </a:solidFill>
-                  </a:tcPr>
-                </a:tc>
-                <a:tc>
-                  <a:txBody>
-                    <a:bodyPr/>
-                    <a:lstStyle/>
-                    <a:p>
-                      <a:pPr algn="l"/>
-                      <a:r>
-                        <a:rPr sz="1300" b="0">
-                          <a:solidFill>
-                            <a:srgbClr val="121018"/>
-                          </a:solidFill>
-                          <a:latin typeface="Helvetica"/>
-                        </a:rPr>
-                        <a:t>How many distinct patterns this layer can detect</a:t>
-                      </a:r>
-                    </a:p>
-                  </a:txBody>
-                  <a:tcPr>
-                    <a:solidFill>
-                      <a:srgbClr val="F5F1FC"/>
-                    </a:solidFill>
-                  </a:tcPr>
-                </a:tc>
-              </a:tr>
             </a:tbl>
           </a:graphicData>
         </a:graphic>
       </p:graphicFrame>
       <p:sp>
         <p:nvSpPr>
-          <p:cNvPr id="9" name="Rounded Rectangle 8"/>
-          <p:cNvSpPr/>
-          <p:nvPr/>
-        </p:nvSpPr>
-        <p:spPr>
-          <a:xfrm>
-            <a:off x="548640" y="4507992"/>
-            <a:ext cx="10972800" cy="411480"/>
-          </a:xfrm>
-          <a:prstGeom prst="roundRect">
-            <a:avLst>
-              <a:gd name="adj" fmla="val 10000"/>
-            </a:avLst>
-          </a:prstGeom>
-          <a:solidFill>
-            <a:srgbClr val="EEE8FA"/>
-          </a:solidFill>
-          <a:ln>
-            <a:noFill/>
-          </a:ln>
-          <a:effectLst/>
-        </p:spPr>
-        <p:style>
-          <a:lnRef idx="1">
-            <a:schemeClr val="accent1"/>
-          </a:lnRef>
-          <a:fillRef idx="3">
-            <a:schemeClr val="accent1"/>
-          </a:fillRef>
-          <a:effectRef idx="2">
-            <a:schemeClr val="accent1"/>
-          </a:effectRef>
-          <a:fontRef idx="minor">
-            <a:schemeClr val="lt1"/>
-          </a:fontRef>
-        </p:style>
-        <p:txBody>
-          <a:bodyPr rtlCol="0" anchor="ctr"/>
-          <a:lstStyle/>
-          <a:p>
-            <a:pPr algn="ctr"/>
-          </a:p>
-        </p:txBody>
-      </p:sp>
-      <p:sp>
-        <p:nvSpPr>
-          <p:cNvPr id="10" name="TextBox 9"/>
-          <p:cNvSpPr txBox="1"/>
-          <p:nvPr/>
-        </p:nvSpPr>
-        <p:spPr>
-          <a:xfrm>
-            <a:off x="868680" y="4581144"/>
-            <a:ext cx="10332720" cy="292608"/>
-          </a:xfrm>
-          <a:prstGeom prst="rect">
-            <a:avLst/>
-          </a:prstGeom>
-          <a:noFill/>
-        </p:spPr>
-        <p:txBody>
-          <a:bodyPr wrap="square" anchor="t">
-            <a:spAutoFit/>
-          </a:bodyPr>
-          <a:lstStyle/>
-          <a:p>
-            <a:pPr algn="l"/>
-            <a:r>
-              <a:rPr sz="1200" b="0">
-                <a:solidFill>
-                  <a:srgbClr val="5A5470"/>
-                </a:solidFill>
-                <a:latin typeface="DIN Next LT W23"/>
-                <a:ea typeface="DIN Next LT W23"/>
-                <a:cs typeface="DIN Next LT W23"/>
-              </a:rPr>
-              <a:t>Deep stacks widen the receptive field: early ≈ edges; late ≈ object parts.</a:t>
-            </a:r>
-          </a:p>
-        </p:txBody>
-      </p:sp>
-      <p:sp>
-        <p:nvSpPr>
-          <p:cNvPr id="11" name="Rectangle 10"/>
+          <p:cNvPr id="9" name="Rectangle 8"/>
           <p:cNvSpPr/>
           <p:nvPr/>
         </p:nvSpPr>
@@ -44005,7 +46631,7 @@
       </p:sp>
       <p:sp>
         <p:nvSpPr>
-          <p:cNvPr id="12" name="TextBox 11"/>
+          <p:cNvPr id="10" name="TextBox 9"/>
           <p:cNvSpPr txBox="1"/>
           <p:nvPr/>
         </p:nvSpPr>
@@ -44042,7 +46668,7 @@
       </p:sp>
       <p:sp>
         <p:nvSpPr>
-          <p:cNvPr id="13" name="TextBox 12"/>
+          <p:cNvPr id="11" name="TextBox 10"/>
           <p:cNvSpPr txBox="1"/>
           <p:nvPr/>
         </p:nvSpPr>
@@ -44072,7 +46698,7 @@
                 <a:ea typeface="DIN Next LT W23"/>
                 <a:cs typeface="DIN Next LT W23"/>
               </a:rPr>
-              <a:t>68  /  82</a:t>
+              <a:t>72  /  86</a:t>
             </a:r>
           </a:p>
         </p:txBody>
@@ -44085,7 +46711,7 @@
 </p:sld>
 </file>
 
-<file path=ppt/slides/slide69.xml><?xml version="1.0" encoding="utf-8"?>
+<file path=ppt/slides/slide73.xml><?xml version="1.0" encoding="utf-8"?>
 <p:sld xmlns:a="http://schemas.openxmlformats.org/drawingml/2006/main" xmlns:p="http://schemas.openxmlformats.org/presentationml/2006/main" xmlns:r="http://schemas.openxmlformats.org/officeDocument/2006/relationships">
   <p:cSld>
     <p:bg>
@@ -44583,7 +47209,7 @@
                 <a:ea typeface="DIN Next LT W23"/>
                 <a:cs typeface="DIN Next LT W23"/>
               </a:rPr>
-              <a:t>69  /  82</a:t>
+              <a:t>73  /  86</a:t>
             </a:r>
           </a:p>
         </p:txBody>
@@ -44596,7 +47222,7 @@
 </p:sld>
 </file>
 
-<file path=ppt/slides/slide7.xml><?xml version="1.0" encoding="utf-8"?>
+<file path=ppt/slides/slide74.xml><?xml version="1.0" encoding="utf-8"?>
 <p:sld xmlns:a="http://schemas.openxmlformats.org/drawingml/2006/main" xmlns:p="http://schemas.openxmlformats.org/presentationml/2006/main" xmlns:r="http://schemas.openxmlformats.org/officeDocument/2006/relationships">
   <p:cSld>
     <p:bg>
@@ -44795,7 +47421,7 @@
                 <a:ea typeface="DIN Next LT W23"/>
                 <a:cs typeface="DIN Next LT W23"/>
               </a:rPr>
-              <a:t>Phase 1: Foundations &amp; Neural Core</a:t>
+              <a:t>Residual Block</a:t>
             </a:r>
           </a:p>
         </p:txBody>
@@ -44832,7 +47458,7 @@
                 <a:ea typeface="DIN Next LT W23"/>
                 <a:cs typeface="DIN Next LT W23"/>
               </a:rPr>
-              <a:t>Why depth, neurons, and forward pass</a:t>
+              <a:t>Learn F(x), Keep an Identity Path</a:t>
             </a:r>
           </a:p>
         </p:txBody>
@@ -44915,7 +47541,7 @@
                 <a:ea typeface="DIN Next LT W23"/>
                 <a:cs typeface="DIN Next LT W23"/>
               </a:rPr>
-              <a:t>Goal: understand what a neuron computes and why stacking layers enables hierarchical features.</a:t>
+              <a:t>Skip connections let gradients flow backward through identity — this is how 100+ layer nets train.</a:t>
             </a:r>
           </a:p>
         </p:txBody>
@@ -44968,7 +47594,7 @@
       </p:sp>
       <p:pic>
         <p:nvPicPr>
-          <p:cNvPr id="11" name="Picture 10" descr="f-a72afc9ad6284967.png"/>
+          <p:cNvPr id="11" name="Picture 10" descr="f-2b076bcbaf5e0bf9.png"/>
           <p:cNvPicPr>
             <a:picLocks noChangeAspect="1"/>
           </p:cNvPicPr>
@@ -44982,8 +47608,8 @@
         </p:blipFill>
         <p:spPr>
           <a:xfrm>
-            <a:off x="4415917" y="2852928"/>
-            <a:ext cx="3238246" cy="868680"/>
+            <a:off x="4440086" y="2852928"/>
+            <a:ext cx="3189906" cy="868679"/>
           </a:xfrm>
           <a:prstGeom prst="rect">
             <a:avLst/>
@@ -45022,7 +47648,7 @@
                 <a:ea typeface="DIN Next LT W23"/>
                 <a:cs typeface="DIN Next LT W23"/>
               </a:rPr>
-              <a:t>Exit check: explain this — and why nonlinearity is required between layers.</a:t>
+              <a:t>The block learns the residual F; x is copied forward</a:t>
             </a:r>
           </a:p>
         </p:txBody>
@@ -45051,7 +47677,7 @@
           <a:p>
             <a:pPr algn="l"/>
             <a:r>
-              <a:rPr sz="1500" b="0">
+              <a:rPr sz="1300" b="0">
                 <a:solidFill>
                   <a:srgbClr val="9E59CD"/>
                 </a:solidFill>
@@ -45088,7 +47714,7 @@
           <a:p>
             <a:pPr algn="l"/>
             <a:r>
-              <a:rPr sz="1500" b="0">
+              <a:rPr sz="1300" b="0">
                 <a:solidFill>
                   <a:srgbClr val="121018"/>
                 </a:solidFill>
@@ -45096,7 +47722,7 @@
                 <a:ea typeface="DIN Next LT W23"/>
                 <a:cs typeface="DIN Next LT W23"/>
               </a:rPr>
-              <a:t>Topics: perceptron, activations, MLP, forward propagation, and loss functions.</a:t>
+              <a:t>AlexNet (2012): scale + ReLU + dropout + GPUs on ImageNet.</a:t>
             </a:r>
           </a:p>
         </p:txBody>
@@ -45109,7 +47735,7 @@
         </p:nvSpPr>
         <p:spPr>
           <a:xfrm>
-            <a:off x="548640" y="4782312"/>
+            <a:off x="548640" y="4690872"/>
             <a:ext cx="320040" cy="384048"/>
           </a:xfrm>
           <a:prstGeom prst="rect">
@@ -45125,7 +47751,7 @@
           <a:p>
             <a:pPr algn="l"/>
             <a:r>
-              <a:rPr sz="1500" b="0">
+              <a:rPr sz="1300" b="0">
                 <a:solidFill>
                   <a:srgbClr val="9E59CD"/>
                 </a:solidFill>
@@ -45146,7 +47772,7 @@
         </p:nvSpPr>
         <p:spPr>
           <a:xfrm>
-            <a:off x="914400" y="4782312"/>
+            <a:off x="914400" y="4690872"/>
             <a:ext cx="9875519" cy="384048"/>
           </a:xfrm>
           <a:prstGeom prst="rect">
@@ -45162,7 +47788,7 @@
           <a:p>
             <a:pPr algn="l"/>
             <a:r>
-              <a:rPr sz="1500" b="0">
+              <a:rPr sz="1300" b="0">
                 <a:solidFill>
                   <a:srgbClr val="121018"/>
                 </a:solidFill>
@@ -45170,14 +47796,51 @@
                 <a:ea typeface="DIN Next LT W23"/>
                 <a:cs typeface="DIN Next LT W23"/>
               </a:rPr>
-              <a:t>Stacking layers builds hierarchical features only if a nonlinearity sits between them.</a:t>
-            </a:r>
-          </a:p>
-        </p:txBody>
-      </p:sp>
-      <p:sp>
-        <p:nvSpPr>
-          <p:cNvPr id="17" name="Rectangle 16"/>
+              <a:t>ResNet (2015): residual mapping F(x)+x; skip paths help gradients.</a:t>
+            </a:r>
+          </a:p>
+        </p:txBody>
+      </p:sp>
+      <p:sp>
+        <p:nvSpPr>
+          <p:cNvPr id="17" name="TextBox 16"/>
+          <p:cNvSpPr txBox="1"/>
+          <p:nvPr/>
+        </p:nvSpPr>
+        <p:spPr>
+          <a:xfrm>
+            <a:off x="548640" y="5989320"/>
+            <a:ext cx="10972800" cy="228600"/>
+          </a:xfrm>
+          <a:prstGeom prst="rect">
+            <a:avLst/>
+          </a:prstGeom>
+          <a:noFill/>
+        </p:spPr>
+        <p:txBody>
+          <a:bodyPr wrap="square" anchor="t">
+            <a:spAutoFit/>
+          </a:bodyPr>
+          <a:lstStyle/>
+          <a:p>
+            <a:pPr algn="l"/>
+            <a:r>
+              <a:rPr sz="1200" b="0">
+                <a:solidFill>
+                  <a:srgbClr val="5A5470"/>
+                </a:solidFill>
+                <a:latin typeface="DIN Next LT W23"/>
+                <a:ea typeface="DIN Next LT W23"/>
+                <a:cs typeface="DIN Next LT W23"/>
+              </a:rPr>
+              <a:t>If F learns zero, the block still acts as identity — easier than learning identity from scratch.</a:t>
+            </a:r>
+          </a:p>
+        </p:txBody>
+      </p:sp>
+      <p:sp>
+        <p:nvSpPr>
+          <p:cNvPr id="18" name="Rectangle 17"/>
           <p:cNvSpPr/>
           <p:nvPr/>
         </p:nvSpPr>
@@ -45221,7 +47884,7 @@
       </p:sp>
       <p:sp>
         <p:nvSpPr>
-          <p:cNvPr id="18" name="TextBox 17"/>
+          <p:cNvPr id="19" name="TextBox 18"/>
           <p:cNvSpPr txBox="1"/>
           <p:nvPr/>
         </p:nvSpPr>
@@ -45258,7 +47921,7 @@
       </p:sp>
       <p:sp>
         <p:nvSpPr>
-          <p:cNvPr id="19" name="TextBox 18"/>
+          <p:cNvPr id="20" name="TextBox 19"/>
           <p:cNvSpPr txBox="1"/>
           <p:nvPr/>
         </p:nvSpPr>
@@ -45288,7 +47951,7 @@
                 <a:ea typeface="DIN Next LT W23"/>
                 <a:cs typeface="DIN Next LT W23"/>
               </a:rPr>
-              <a:t>07  /  82</a:t>
+              <a:t>74  /  86</a:t>
             </a:r>
           </a:p>
         </p:txBody>
@@ -45301,7 +47964,7 @@
 </p:sld>
 </file>
 
-<file path=ppt/slides/slide70.xml><?xml version="1.0" encoding="utf-8"?>
+<file path=ppt/slides/slide75.xml><?xml version="1.0" encoding="utf-8"?>
 <p:sld xmlns:a="http://schemas.openxmlformats.org/drawingml/2006/main" xmlns:p="http://schemas.openxmlformats.org/presentationml/2006/main" xmlns:r="http://schemas.openxmlformats.org/officeDocument/2006/relationships">
   <p:cSld>
     <p:bg>
@@ -45500,7 +48163,7 @@
                 <a:ea typeface="DIN Next LT W23"/>
                 <a:cs typeface="DIN Next LT W23"/>
               </a:rPr>
-              <a:t>Residual Block</a:t>
+              <a:t>Residual Path</a:t>
             </a:r>
           </a:p>
         </p:txBody>
@@ -45537,7 +48200,7 @@
                 <a:ea typeface="DIN Next LT W23"/>
                 <a:cs typeface="DIN Next LT W23"/>
               </a:rPr>
-              <a:t>Learn F(x), Keep an Identity Path</a:t>
+              <a:t>Shortcut Around the Convolutions</a:t>
             </a:r>
           </a:p>
         </p:txBody>
@@ -45551,7 +48214,7 @@
         <p:spPr>
           <a:xfrm>
             <a:off x="548640" y="1965960"/>
-            <a:ext cx="10972800" cy="640080"/>
+            <a:ext cx="10972800" cy="3977639"/>
           </a:xfrm>
           <a:prstGeom prst="roundRect">
             <a:avLst>
@@ -45588,92 +48251,9 @@
           </a:p>
         </p:txBody>
       </p:sp>
-      <p:sp>
-        <p:nvSpPr>
-          <p:cNvPr id="9" name="TextBox 8"/>
-          <p:cNvSpPr txBox="1"/>
-          <p:nvPr/>
-        </p:nvSpPr>
-        <p:spPr>
-          <a:xfrm>
-            <a:off x="868680" y="2084831"/>
-            <a:ext cx="10332720" cy="411480"/>
-          </a:xfrm>
-          <a:prstGeom prst="rect">
-            <a:avLst/>
-          </a:prstGeom>
-          <a:noFill/>
-        </p:spPr>
-        <p:txBody>
-          <a:bodyPr wrap="square" anchor="t">
-            <a:spAutoFit/>
-          </a:bodyPr>
-          <a:lstStyle/>
-          <a:p>
-            <a:pPr algn="l"/>
-            <a:r>
-              <a:rPr sz="1400" b="0">
-                <a:solidFill>
-                  <a:srgbClr val="121018"/>
-                </a:solidFill>
-                <a:latin typeface="DIN Next LT W23"/>
-                <a:ea typeface="DIN Next LT W23"/>
-                <a:cs typeface="DIN Next LT W23"/>
-              </a:rPr>
-              <a:t>Skip connections let gradients flow backward through identity — this is how 100+ layer nets train.</a:t>
-            </a:r>
-          </a:p>
-        </p:txBody>
-      </p:sp>
-      <p:sp>
-        <p:nvSpPr>
-          <p:cNvPr id="10" name="Rounded Rectangle 9"/>
-          <p:cNvSpPr/>
-          <p:nvPr/>
-        </p:nvSpPr>
-        <p:spPr>
-          <a:xfrm>
-            <a:off x="548640" y="2743200"/>
-            <a:ext cx="10972800" cy="1417320"/>
-          </a:xfrm>
-          <a:prstGeom prst="roundRect">
-            <a:avLst>
-              <a:gd name="adj" fmla="val 10000"/>
-            </a:avLst>
-          </a:prstGeom>
-          <a:solidFill>
-            <a:srgbClr val="EEE8FA"/>
-          </a:solidFill>
-          <a:ln>
-            <a:noFill/>
-          </a:ln>
-          <a:effectLst/>
-        </p:spPr>
-        <p:style>
-          <a:lnRef idx="1">
-            <a:schemeClr val="accent1"/>
-          </a:lnRef>
-          <a:fillRef idx="3">
-            <a:schemeClr val="accent1"/>
-          </a:fillRef>
-          <a:effectRef idx="2">
-            <a:schemeClr val="accent1"/>
-          </a:effectRef>
-          <a:fontRef idx="minor">
-            <a:schemeClr val="lt1"/>
-          </a:fontRef>
-        </p:style>
-        <p:txBody>
-          <a:bodyPr rtlCol="0" anchor="ctr"/>
-          <a:lstStyle/>
-          <a:p>
-            <a:pPr algn="ctr"/>
-          </a:p>
-        </p:txBody>
-      </p:sp>
       <p:pic>
         <p:nvPicPr>
-          <p:cNvPr id="11" name="Picture 10" descr="f-2b076bcbaf5e0bf9.png"/>
+          <p:cNvPr id="9" name="Picture 8" descr="residual-block.png"/>
           <p:cNvPicPr>
             <a:picLocks noChangeAspect="1"/>
           </p:cNvPicPr>
@@ -45687,8 +48267,8 @@
         </p:blipFill>
         <p:spPr>
           <a:xfrm>
-            <a:off x="4440086" y="2852928"/>
-            <a:ext cx="3189906" cy="868679"/>
+            <a:off x="917147" y="2103120"/>
+            <a:ext cx="10235785" cy="3703320"/>
           </a:xfrm>
           <a:prstGeom prst="rect">
             <a:avLst/>
@@ -45697,29 +48277,29 @@
       </p:pic>
       <p:sp>
         <p:nvSpPr>
-          <p:cNvPr id="12" name="TextBox 11"/>
-          <p:cNvSpPr txBox="1"/>
-          <p:nvPr/>
-        </p:nvSpPr>
-        <p:spPr>
-          <a:xfrm>
-            <a:off x="914400" y="3840480"/>
-            <a:ext cx="10241280" cy="256032"/>
-          </a:xfrm>
-          <a:prstGeom prst="rect">
-            <a:avLst/>
-          </a:prstGeom>
-          <a:noFill/>
-        </p:spPr>
-        <p:txBody>
-          <a:bodyPr wrap="square" anchor="t">
-            <a:spAutoFit/>
-          </a:bodyPr>
-          <a:lstStyle/>
-          <a:p>
-            <a:pPr algn="ctr"/>
-            <a:r>
-              <a:rPr sz="1200" b="0">
+          <p:cNvPr id="10" name="TextBox 9"/>
+          <p:cNvSpPr txBox="1"/>
+          <p:nvPr/>
+        </p:nvSpPr>
+        <p:spPr>
+          <a:xfrm>
+            <a:off x="548640" y="6309360"/>
+            <a:ext cx="10972800" cy="228600"/>
+          </a:xfrm>
+          <a:prstGeom prst="rect">
+            <a:avLst/>
+          </a:prstGeom>
+          <a:noFill/>
+        </p:spPr>
+        <p:txBody>
+          <a:bodyPr wrap="square" anchor="t">
+            <a:spAutoFit/>
+          </a:bodyPr>
+          <a:lstStyle/>
+          <a:p>
+            <a:pPr algn="l"/>
+            <a:r>
+              <a:rPr sz="1100" b="0">
                 <a:solidFill>
                   <a:srgbClr val="5A5470"/>
                 </a:solidFill>
@@ -45727,199 +48307,14 @@
                 <a:ea typeface="DIN Next LT W23"/>
                 <a:cs typeface="DIN Next LT W23"/>
               </a:rPr>
-              <a:t>The block learns the residual F; x is copied forward</a:t>
-            </a:r>
-          </a:p>
-        </p:txBody>
-      </p:sp>
-      <p:sp>
-        <p:nvSpPr>
-          <p:cNvPr id="13" name="TextBox 12"/>
-          <p:cNvSpPr txBox="1"/>
-          <p:nvPr/>
-        </p:nvSpPr>
-        <p:spPr>
-          <a:xfrm>
-            <a:off x="548640" y="4270248"/>
-            <a:ext cx="320040" cy="384048"/>
-          </a:xfrm>
-          <a:prstGeom prst="rect">
-            <a:avLst/>
-          </a:prstGeom>
-          <a:noFill/>
-        </p:spPr>
-        <p:txBody>
-          <a:bodyPr wrap="square" anchor="t">
-            <a:spAutoFit/>
-          </a:bodyPr>
-          <a:lstStyle/>
-          <a:p>
-            <a:pPr algn="l"/>
-            <a:r>
-              <a:rPr sz="1300" b="0">
-                <a:solidFill>
-                  <a:srgbClr val="9E59CD"/>
-                </a:solidFill>
-                <a:latin typeface="DIN Next LT W23"/>
-                <a:ea typeface="DIN Next LT W23"/>
-                <a:cs typeface="DIN Next LT W23"/>
-              </a:rPr>
-              <a:t>–</a:t>
-            </a:r>
-          </a:p>
-        </p:txBody>
-      </p:sp>
-      <p:sp>
-        <p:nvSpPr>
-          <p:cNvPr id="14" name="TextBox 13"/>
-          <p:cNvSpPr txBox="1"/>
-          <p:nvPr/>
-        </p:nvSpPr>
-        <p:spPr>
-          <a:xfrm>
-            <a:off x="914400" y="4270248"/>
-            <a:ext cx="9875519" cy="384048"/>
-          </a:xfrm>
-          <a:prstGeom prst="rect">
-            <a:avLst/>
-          </a:prstGeom>
-          <a:noFill/>
-        </p:spPr>
-        <p:txBody>
-          <a:bodyPr wrap="square" anchor="t">
-            <a:spAutoFit/>
-          </a:bodyPr>
-          <a:lstStyle/>
-          <a:p>
-            <a:pPr algn="l"/>
-            <a:r>
-              <a:rPr sz="1300" b="0">
-                <a:solidFill>
-                  <a:srgbClr val="121018"/>
-                </a:solidFill>
-                <a:latin typeface="DIN Next LT W23"/>
-                <a:ea typeface="DIN Next LT W23"/>
-                <a:cs typeface="DIN Next LT W23"/>
-              </a:rPr>
-              <a:t>AlexNet (2012): scale + ReLU + dropout + GPUs on ImageNet.</a:t>
-            </a:r>
-          </a:p>
-        </p:txBody>
-      </p:sp>
-      <p:sp>
-        <p:nvSpPr>
-          <p:cNvPr id="15" name="TextBox 14"/>
-          <p:cNvSpPr txBox="1"/>
-          <p:nvPr/>
-        </p:nvSpPr>
-        <p:spPr>
-          <a:xfrm>
-            <a:off x="548640" y="4690872"/>
-            <a:ext cx="320040" cy="384048"/>
-          </a:xfrm>
-          <a:prstGeom prst="rect">
-            <a:avLst/>
-          </a:prstGeom>
-          <a:noFill/>
-        </p:spPr>
-        <p:txBody>
-          <a:bodyPr wrap="square" anchor="t">
-            <a:spAutoFit/>
-          </a:bodyPr>
-          <a:lstStyle/>
-          <a:p>
-            <a:pPr algn="l"/>
-            <a:r>
-              <a:rPr sz="1300" b="0">
-                <a:solidFill>
-                  <a:srgbClr val="9E59CD"/>
-                </a:solidFill>
-                <a:latin typeface="DIN Next LT W23"/>
-                <a:ea typeface="DIN Next LT W23"/>
-                <a:cs typeface="DIN Next LT W23"/>
-              </a:rPr>
-              <a:t>–</a:t>
-            </a:r>
-          </a:p>
-        </p:txBody>
-      </p:sp>
-      <p:sp>
-        <p:nvSpPr>
-          <p:cNvPr id="16" name="TextBox 15"/>
-          <p:cNvSpPr txBox="1"/>
-          <p:nvPr/>
-        </p:nvSpPr>
-        <p:spPr>
-          <a:xfrm>
-            <a:off x="914400" y="4690872"/>
-            <a:ext cx="9875519" cy="384048"/>
-          </a:xfrm>
-          <a:prstGeom prst="rect">
-            <a:avLst/>
-          </a:prstGeom>
-          <a:noFill/>
-        </p:spPr>
-        <p:txBody>
-          <a:bodyPr wrap="square" anchor="t">
-            <a:spAutoFit/>
-          </a:bodyPr>
-          <a:lstStyle/>
-          <a:p>
-            <a:pPr algn="l"/>
-            <a:r>
-              <a:rPr sz="1300" b="0">
-                <a:solidFill>
-                  <a:srgbClr val="121018"/>
-                </a:solidFill>
-                <a:latin typeface="DIN Next LT W23"/>
-                <a:ea typeface="DIN Next LT W23"/>
-                <a:cs typeface="DIN Next LT W23"/>
-              </a:rPr>
-              <a:t>ResNet (2015): residual mapping F(x)+x; skip paths help gradients.</a:t>
-            </a:r>
-          </a:p>
-        </p:txBody>
-      </p:sp>
-      <p:sp>
-        <p:nvSpPr>
-          <p:cNvPr id="17" name="TextBox 16"/>
-          <p:cNvSpPr txBox="1"/>
-          <p:nvPr/>
-        </p:nvSpPr>
-        <p:spPr>
-          <a:xfrm>
-            <a:off x="548640" y="5989320"/>
-            <a:ext cx="10972800" cy="228600"/>
-          </a:xfrm>
-          <a:prstGeom prst="rect">
-            <a:avLst/>
-          </a:prstGeom>
-          <a:noFill/>
-        </p:spPr>
-        <p:txBody>
-          <a:bodyPr wrap="square" anchor="t">
-            <a:spAutoFit/>
-          </a:bodyPr>
-          <a:lstStyle/>
-          <a:p>
-            <a:pPr algn="l"/>
-            <a:r>
-              <a:rPr sz="1200" b="0">
-                <a:solidFill>
-                  <a:srgbClr val="5A5470"/>
-                </a:solidFill>
-                <a:latin typeface="DIN Next LT W23"/>
-                <a:ea typeface="DIN Next LT W23"/>
-                <a:cs typeface="DIN Next LT W23"/>
-              </a:rPr>
-              <a:t>If F learns zero, the block still acts as identity — easier than learning identity from scratch.</a:t>
-            </a:r>
-          </a:p>
-        </p:txBody>
-      </p:sp>
-      <p:sp>
-        <p:nvSpPr>
-          <p:cNvPr id="18" name="Rectangle 17"/>
+              <a:t>The add node is why early layers still receive a usable gradient.</a:t>
+            </a:r>
+          </a:p>
+        </p:txBody>
+      </p:sp>
+      <p:sp>
+        <p:nvSpPr>
+          <p:cNvPr id="11" name="Rectangle 10"/>
           <p:cNvSpPr/>
           <p:nvPr/>
         </p:nvSpPr>
@@ -45963,7 +48358,7 @@
       </p:sp>
       <p:sp>
         <p:nvSpPr>
-          <p:cNvPr id="19" name="TextBox 18"/>
+          <p:cNvPr id="12" name="TextBox 11"/>
           <p:cNvSpPr txBox="1"/>
           <p:nvPr/>
         </p:nvSpPr>
@@ -46000,7 +48395,7 @@
       </p:sp>
       <p:sp>
         <p:nvSpPr>
-          <p:cNvPr id="20" name="TextBox 19"/>
+          <p:cNvPr id="13" name="TextBox 12"/>
           <p:cNvSpPr txBox="1"/>
           <p:nvPr/>
         </p:nvSpPr>
@@ -46030,7 +48425,7 @@
                 <a:ea typeface="DIN Next LT W23"/>
                 <a:cs typeface="DIN Next LT W23"/>
               </a:rPr>
-              <a:t>70  /  82</a:t>
+              <a:t>75  /  86</a:t>
             </a:r>
           </a:p>
         </p:txBody>
@@ -46043,7 +48438,7 @@
 </p:sld>
 </file>
 
-<file path=ppt/slides/slide71.xml><?xml version="1.0" encoding="utf-8"?>
+<file path=ppt/slides/slide76.xml><?xml version="1.0" encoding="utf-8"?>
 <p:sld xmlns:a="http://schemas.openxmlformats.org/drawingml/2006/main" xmlns:p="http://schemas.openxmlformats.org/presentationml/2006/main" xmlns:r="http://schemas.openxmlformats.org/officeDocument/2006/relationships">
   <p:cSld>
     <p:bg>
@@ -46242,7 +48637,7 @@
                 <a:ea typeface="DIN Next LT W23"/>
                 <a:cs typeface="DIN Next LT W23"/>
               </a:rPr>
-              <a:t>Residual Path</a:t>
+              <a:t>Transfer Learning with Pretrained Models</a:t>
             </a:r>
           </a:p>
         </p:txBody>
@@ -46279,20 +48674,57 @@
                 <a:ea typeface="DIN Next LT W23"/>
                 <a:cs typeface="DIN Next LT W23"/>
               </a:rPr>
-              <a:t>Shortcut Around the Convolutions</a:t>
-            </a:r>
-          </a:p>
-        </p:txBody>
-      </p:sp>
-      <p:sp>
-        <p:nvSpPr>
-          <p:cNvPr id="8" name="Rounded Rectangle 7"/>
+              <a:t>Reuse Features, Adapt the Head</a:t>
+            </a:r>
+          </a:p>
+        </p:txBody>
+      </p:sp>
+      <p:sp>
+        <p:nvSpPr>
+          <p:cNvPr id="8" name="TextBox 7"/>
+          <p:cNvSpPr txBox="1"/>
+          <p:nvPr/>
+        </p:nvSpPr>
+        <p:spPr>
+          <a:xfrm>
+            <a:off x="548640" y="1920240"/>
+            <a:ext cx="10972800" cy="320040"/>
+          </a:xfrm>
+          <a:prstGeom prst="rect">
+            <a:avLst/>
+          </a:prstGeom>
+          <a:noFill/>
+        </p:spPr>
+        <p:txBody>
+          <a:bodyPr wrap="square" anchor="t">
+            <a:spAutoFit/>
+          </a:bodyPr>
+          <a:lstStyle/>
+          <a:p>
+            <a:pPr algn="l"/>
+            <a:r>
+              <a:rPr sz="1300" b="0">
+                <a:solidFill>
+                  <a:srgbClr val="5A5470"/>
+                </a:solidFill>
+                <a:latin typeface="DIN Next LT W23"/>
+                <a:ea typeface="DIN Next LT W23"/>
+                <a:cs typeface="DIN Next LT W23"/>
+              </a:rPr>
+              <a:t>Pretraining on ImageNet learns general filters you can reuse on a smaller target task.</a:t>
+            </a:r>
+          </a:p>
+        </p:txBody>
+      </p:sp>
+      <p:sp>
+        <p:nvSpPr>
+          <p:cNvPr id="9" name="Rounded Rectangle 8"/>
           <p:cNvSpPr/>
           <p:nvPr/>
         </p:nvSpPr>
         <p:spPr>
           <a:xfrm>
-            <a:off x="548640" y="1965960"/>
+            <a:off x="548640" y="2240280"/>
             <a:ext cx="10972800" cy="3977639"/>
           </a:xfrm>
           <a:prstGeom prst="roundRect">
@@ -46332,7 +48764,7 @@
       </p:sp>
       <p:pic>
         <p:nvPicPr>
-          <p:cNvPr id="9" name="Picture 8" descr="residual-block.png"/>
+          <p:cNvPr id="10" name="Picture 9" descr="transfer-learning.png"/>
           <p:cNvPicPr>
             <a:picLocks noChangeAspect="1"/>
           </p:cNvPicPr>
@@ -46346,7 +48778,7 @@
         </p:blipFill>
         <p:spPr>
           <a:xfrm>
-            <a:off x="917147" y="2103120"/>
+            <a:off x="917147" y="2377440"/>
             <a:ext cx="10235785" cy="3703320"/>
           </a:xfrm>
           <a:prstGeom prst="rect">
@@ -46356,7 +48788,7 @@
       </p:pic>
       <p:sp>
         <p:nvSpPr>
-          <p:cNvPr id="10" name="TextBox 9"/>
+          <p:cNvPr id="11" name="TextBox 10"/>
           <p:cNvSpPr txBox="1"/>
           <p:nvPr/>
         </p:nvSpPr>
@@ -46386,14 +48818,14 @@
                 <a:ea typeface="DIN Next LT W23"/>
                 <a:cs typeface="DIN Next LT W23"/>
               </a:rPr>
-              <a:t>The add node is why early layers still receive a usable gradient.</a:t>
-            </a:r>
-          </a:p>
-        </p:txBody>
-      </p:sp>
-      <p:sp>
-        <p:nvSpPr>
-          <p:cNvPr id="11" name="Rectangle 10"/>
+              <a:t>Freeze the backbone when data is scarce; fine-tune top blocks when you have more labels.</a:t>
+            </a:r>
+          </a:p>
+        </p:txBody>
+      </p:sp>
+      <p:sp>
+        <p:nvSpPr>
+          <p:cNvPr id="12" name="Rectangle 11"/>
           <p:cNvSpPr/>
           <p:nvPr/>
         </p:nvSpPr>
@@ -46437,7 +48869,7 @@
       </p:sp>
       <p:sp>
         <p:nvSpPr>
-          <p:cNvPr id="12" name="TextBox 11"/>
+          <p:cNvPr id="13" name="TextBox 12"/>
           <p:cNvSpPr txBox="1"/>
           <p:nvPr/>
         </p:nvSpPr>
@@ -46474,7 +48906,7 @@
       </p:sp>
       <p:sp>
         <p:nvSpPr>
-          <p:cNvPr id="13" name="TextBox 12"/>
+          <p:cNvPr id="14" name="TextBox 13"/>
           <p:cNvSpPr txBox="1"/>
           <p:nvPr/>
         </p:nvSpPr>
@@ -46504,7 +48936,7 @@
                 <a:ea typeface="DIN Next LT W23"/>
                 <a:cs typeface="DIN Next LT W23"/>
               </a:rPr>
-              <a:t>71  /  82</a:t>
+              <a:t>76  /  86</a:t>
             </a:r>
           </a:p>
         </p:txBody>
@@ -46517,518 +48949,7 @@
 </p:sld>
 </file>
 
-<file path=ppt/slides/slide72.xml><?xml version="1.0" encoding="utf-8"?>
-<p:sld xmlns:a="http://schemas.openxmlformats.org/drawingml/2006/main" xmlns:p="http://schemas.openxmlformats.org/presentationml/2006/main" xmlns:r="http://schemas.openxmlformats.org/officeDocument/2006/relationships">
-  <p:cSld>
-    <p:bg>
-      <p:bgPr>
-        <a:solidFill>
-          <a:srgbClr val="FAF8FF"/>
-        </a:solidFill>
-        <a:effectLst/>
-      </p:bgPr>
-    </p:bg>
-    <p:spTree>
-      <p:nvGrpSpPr>
-        <p:cNvPr id="1" name=""/>
-        <p:cNvGrpSpPr/>
-        <p:nvPr/>
-      </p:nvGrpSpPr>
-      <p:grpSpPr/>
-      <p:sp>
-        <p:nvSpPr>
-          <p:cNvPr id="2" name="Rectangle 1"/>
-          <p:cNvSpPr/>
-          <p:nvPr/>
-        </p:nvSpPr>
-        <p:spPr>
-          <a:xfrm>
-            <a:off x="12136831" y="0"/>
-            <a:ext cx="54864" cy="6858000"/>
-          </a:xfrm>
-          <a:prstGeom prst="rect">
-            <a:avLst/>
-          </a:prstGeom>
-          <a:solidFill>
-            <a:srgbClr val="5234B7"/>
-          </a:solidFill>
-          <a:ln>
-            <a:noFill/>
-          </a:ln>
-          <a:effectLst/>
-        </p:spPr>
-        <p:style>
-          <a:lnRef idx="1">
-            <a:schemeClr val="accent1"/>
-          </a:lnRef>
-          <a:fillRef idx="3">
-            <a:schemeClr val="accent1"/>
-          </a:fillRef>
-          <a:effectRef idx="2">
-            <a:schemeClr val="accent1"/>
-          </a:effectRef>
-          <a:fontRef idx="minor">
-            <a:schemeClr val="lt1"/>
-          </a:fontRef>
-        </p:style>
-        <p:txBody>
-          <a:bodyPr rtlCol="0" anchor="ctr"/>
-          <a:lstStyle/>
-          <a:p>
-            <a:pPr algn="ctr"/>
-          </a:p>
-        </p:txBody>
-      </p:sp>
-      <p:pic>
-        <p:nvPicPr>
-          <p:cNvPr id="3" name="Picture 2" descr="etra-wordmark.png"/>
-          <p:cNvPicPr>
-            <a:picLocks noChangeAspect="1"/>
-          </p:cNvPicPr>
-          <p:nvPr/>
-        </p:nvPicPr>
-        <p:blipFill>
-          <a:blip r:embed="rId2"/>
-          <a:stretch>
-            <a:fillRect/>
-          </a:stretch>
-        </p:blipFill>
-        <p:spPr>
-          <a:xfrm>
-            <a:off x="10561320" y="411480"/>
-            <a:ext cx="1206201" cy="320040"/>
-          </a:xfrm>
-          <a:prstGeom prst="rect">
-            <a:avLst/>
-          </a:prstGeom>
-        </p:spPr>
-      </p:pic>
-      <p:sp>
-        <p:nvSpPr>
-          <p:cNvPr id="4" name="TextBox 3"/>
-          <p:cNvSpPr txBox="1"/>
-          <p:nvPr/>
-        </p:nvSpPr>
-        <p:spPr>
-          <a:xfrm>
-            <a:off x="548640" y="438912"/>
-            <a:ext cx="7772400" cy="274320"/>
-          </a:xfrm>
-          <a:prstGeom prst="rect">
-            <a:avLst/>
-          </a:prstGeom>
-          <a:noFill/>
-        </p:spPr>
-        <p:txBody>
-          <a:bodyPr wrap="square" anchor="t">
-            <a:spAutoFit/>
-          </a:bodyPr>
-          <a:lstStyle/>
-          <a:p>
-            <a:pPr algn="l"/>
-            <a:r>
-              <a:rPr sz="1200" b="0">
-                <a:solidFill>
-                  <a:srgbClr val="5A5470"/>
-                </a:solidFill>
-                <a:latin typeface="DIN Next LT W23"/>
-                <a:ea typeface="DIN Next LT W23"/>
-                <a:cs typeface="DIN Next LT W23"/>
-              </a:rPr>
-              <a:t>S07  ·  Deep Learning</a:t>
-            </a:r>
-          </a:p>
-        </p:txBody>
-      </p:sp>
-      <p:sp>
-        <p:nvSpPr>
-          <p:cNvPr id="5" name="Rectangle 4"/>
-          <p:cNvSpPr/>
-          <p:nvPr/>
-        </p:nvSpPr>
-        <p:spPr>
-          <a:xfrm>
-            <a:off x="548640" y="822960"/>
-            <a:ext cx="11064240" cy="10972"/>
-          </a:xfrm>
-          <a:prstGeom prst="rect">
-            <a:avLst/>
-          </a:prstGeom>
-          <a:solidFill>
-            <a:srgbClr val="E4DCF4"/>
-          </a:solidFill>
-          <a:ln>
-            <a:noFill/>
-          </a:ln>
-          <a:effectLst/>
-        </p:spPr>
-        <p:style>
-          <a:lnRef idx="1">
-            <a:schemeClr val="accent1"/>
-          </a:lnRef>
-          <a:fillRef idx="3">
-            <a:schemeClr val="accent1"/>
-          </a:fillRef>
-          <a:effectRef idx="2">
-            <a:schemeClr val="accent1"/>
-          </a:effectRef>
-          <a:fontRef idx="minor">
-            <a:schemeClr val="lt1"/>
-          </a:fontRef>
-        </p:style>
-        <p:txBody>
-          <a:bodyPr rtlCol="0" anchor="ctr"/>
-          <a:lstStyle/>
-          <a:p>
-            <a:pPr algn="ctr"/>
-          </a:p>
-        </p:txBody>
-      </p:sp>
-      <p:sp>
-        <p:nvSpPr>
-          <p:cNvPr id="6" name="TextBox 5"/>
-          <p:cNvSpPr txBox="1"/>
-          <p:nvPr/>
-        </p:nvSpPr>
-        <p:spPr>
-          <a:xfrm>
-            <a:off x="548640" y="1051560"/>
-            <a:ext cx="10241280" cy="594360"/>
-          </a:xfrm>
-          <a:prstGeom prst="rect">
-            <a:avLst/>
-          </a:prstGeom>
-          <a:noFill/>
-        </p:spPr>
-        <p:txBody>
-          <a:bodyPr wrap="square" anchor="t">
-            <a:spAutoFit/>
-          </a:bodyPr>
-          <a:lstStyle/>
-          <a:p>
-            <a:pPr algn="l"/>
-            <a:r>
-              <a:rPr sz="3200" b="1">
-                <a:solidFill>
-                  <a:srgbClr val="5234B7"/>
-                </a:solidFill>
-                <a:latin typeface="DIN Next LT W23"/>
-                <a:ea typeface="DIN Next LT W23"/>
-                <a:cs typeface="DIN Next LT W23"/>
-              </a:rPr>
-              <a:t>Transfer Learning with Pretrained Models</a:t>
-            </a:r>
-          </a:p>
-        </p:txBody>
-      </p:sp>
-      <p:sp>
-        <p:nvSpPr>
-          <p:cNvPr id="7" name="TextBox 6"/>
-          <p:cNvSpPr txBox="1"/>
-          <p:nvPr/>
-        </p:nvSpPr>
-        <p:spPr>
-          <a:xfrm>
-            <a:off x="548640" y="1600200"/>
-            <a:ext cx="10241280" cy="365760"/>
-          </a:xfrm>
-          <a:prstGeom prst="rect">
-            <a:avLst/>
-          </a:prstGeom>
-          <a:noFill/>
-        </p:spPr>
-        <p:txBody>
-          <a:bodyPr wrap="square" anchor="t">
-            <a:spAutoFit/>
-          </a:bodyPr>
-          <a:lstStyle/>
-          <a:p>
-            <a:pPr algn="l"/>
-            <a:r>
-              <a:rPr sz="1500" b="0">
-                <a:solidFill>
-                  <a:srgbClr val="5A5470"/>
-                </a:solidFill>
-                <a:latin typeface="DIN Next LT W23"/>
-                <a:ea typeface="DIN Next LT W23"/>
-                <a:cs typeface="DIN Next LT W23"/>
-              </a:rPr>
-              <a:t>Reuse Features, Adapt the Head</a:t>
-            </a:r>
-          </a:p>
-        </p:txBody>
-      </p:sp>
-      <p:sp>
-        <p:nvSpPr>
-          <p:cNvPr id="8" name="TextBox 7"/>
-          <p:cNvSpPr txBox="1"/>
-          <p:nvPr/>
-        </p:nvSpPr>
-        <p:spPr>
-          <a:xfrm>
-            <a:off x="548640" y="1920240"/>
-            <a:ext cx="10972800" cy="320040"/>
-          </a:xfrm>
-          <a:prstGeom prst="rect">
-            <a:avLst/>
-          </a:prstGeom>
-          <a:noFill/>
-        </p:spPr>
-        <p:txBody>
-          <a:bodyPr wrap="square" anchor="t">
-            <a:spAutoFit/>
-          </a:bodyPr>
-          <a:lstStyle/>
-          <a:p>
-            <a:pPr algn="l"/>
-            <a:r>
-              <a:rPr sz="1300" b="0">
-                <a:solidFill>
-                  <a:srgbClr val="5A5470"/>
-                </a:solidFill>
-                <a:latin typeface="DIN Next LT W23"/>
-                <a:ea typeface="DIN Next LT W23"/>
-                <a:cs typeface="DIN Next LT W23"/>
-              </a:rPr>
-              <a:t>Pretraining on ImageNet learns general filters you can reuse on a smaller target task.</a:t>
-            </a:r>
-          </a:p>
-        </p:txBody>
-      </p:sp>
-      <p:sp>
-        <p:nvSpPr>
-          <p:cNvPr id="9" name="Rounded Rectangle 8"/>
-          <p:cNvSpPr/>
-          <p:nvPr/>
-        </p:nvSpPr>
-        <p:spPr>
-          <a:xfrm>
-            <a:off x="548640" y="2240280"/>
-            <a:ext cx="10972800" cy="3977639"/>
-          </a:xfrm>
-          <a:prstGeom prst="roundRect">
-            <a:avLst>
-              <a:gd name="adj" fmla="val 10000"/>
-            </a:avLst>
-          </a:prstGeom>
-          <a:solidFill>
-            <a:srgbClr val="EEE8FA"/>
-          </a:solidFill>
-          <a:ln>
-            <a:noFill/>
-          </a:ln>
-          <a:effectLst/>
-        </p:spPr>
-        <p:style>
-          <a:lnRef idx="1">
-            <a:schemeClr val="accent1"/>
-          </a:lnRef>
-          <a:fillRef idx="3">
-            <a:schemeClr val="accent1"/>
-          </a:fillRef>
-          <a:effectRef idx="2">
-            <a:schemeClr val="accent1"/>
-          </a:effectRef>
-          <a:fontRef idx="minor">
-            <a:schemeClr val="lt1"/>
-          </a:fontRef>
-        </p:style>
-        <p:txBody>
-          <a:bodyPr rtlCol="0" anchor="ctr"/>
-          <a:lstStyle/>
-          <a:p>
-            <a:pPr algn="ctr"/>
-          </a:p>
-        </p:txBody>
-      </p:sp>
-      <p:pic>
-        <p:nvPicPr>
-          <p:cNvPr id="10" name="Picture 9" descr="transfer-learning.png"/>
-          <p:cNvPicPr>
-            <a:picLocks noChangeAspect="1"/>
-          </p:cNvPicPr>
-          <p:nvPr/>
-        </p:nvPicPr>
-        <p:blipFill>
-          <a:blip r:embed="rId3"/>
-          <a:stretch>
-            <a:fillRect/>
-          </a:stretch>
-        </p:blipFill>
-        <p:spPr>
-          <a:xfrm>
-            <a:off x="917147" y="2377440"/>
-            <a:ext cx="10235785" cy="3703320"/>
-          </a:xfrm>
-          <a:prstGeom prst="rect">
-            <a:avLst/>
-          </a:prstGeom>
-        </p:spPr>
-      </p:pic>
-      <p:sp>
-        <p:nvSpPr>
-          <p:cNvPr id="11" name="TextBox 10"/>
-          <p:cNvSpPr txBox="1"/>
-          <p:nvPr/>
-        </p:nvSpPr>
-        <p:spPr>
-          <a:xfrm>
-            <a:off x="548640" y="6309360"/>
-            <a:ext cx="10972800" cy="228600"/>
-          </a:xfrm>
-          <a:prstGeom prst="rect">
-            <a:avLst/>
-          </a:prstGeom>
-          <a:noFill/>
-        </p:spPr>
-        <p:txBody>
-          <a:bodyPr wrap="square" anchor="t">
-            <a:spAutoFit/>
-          </a:bodyPr>
-          <a:lstStyle/>
-          <a:p>
-            <a:pPr algn="l"/>
-            <a:r>
-              <a:rPr sz="1100" b="0">
-                <a:solidFill>
-                  <a:srgbClr val="5A5470"/>
-                </a:solidFill>
-                <a:latin typeface="DIN Next LT W23"/>
-                <a:ea typeface="DIN Next LT W23"/>
-                <a:cs typeface="DIN Next LT W23"/>
-              </a:rPr>
-              <a:t>Freeze the backbone when data is scarce; fine-tune top blocks when you have more labels.</a:t>
-            </a:r>
-          </a:p>
-        </p:txBody>
-      </p:sp>
-      <p:sp>
-        <p:nvSpPr>
-          <p:cNvPr id="12" name="Rectangle 11"/>
-          <p:cNvSpPr/>
-          <p:nvPr/>
-        </p:nvSpPr>
-        <p:spPr>
-          <a:xfrm>
-            <a:off x="548640" y="6446520"/>
-            <a:ext cx="11064240" cy="10972"/>
-          </a:xfrm>
-          <a:prstGeom prst="rect">
-            <a:avLst/>
-          </a:prstGeom>
-          <a:solidFill>
-            <a:srgbClr val="5234B7"/>
-          </a:solidFill>
-          <a:ln>
-            <a:noFill/>
-          </a:ln>
-          <a:effectLst/>
-        </p:spPr>
-        <p:style>
-          <a:lnRef idx="1">
-            <a:schemeClr val="accent1"/>
-          </a:lnRef>
-          <a:fillRef idx="3">
-            <a:schemeClr val="accent1"/>
-          </a:fillRef>
-          <a:effectRef idx="2">
-            <a:schemeClr val="accent1"/>
-          </a:effectRef>
-          <a:fontRef idx="minor">
-            <a:schemeClr val="lt1"/>
-          </a:fontRef>
-        </p:style>
-        <p:txBody>
-          <a:bodyPr rtlCol="0" anchor="ctr"/>
-          <a:lstStyle/>
-          <a:p>
-            <a:pPr algn="ctr"/>
-          </a:p>
-        </p:txBody>
-      </p:sp>
-      <p:sp>
-        <p:nvSpPr>
-          <p:cNvPr id="13" name="TextBox 12"/>
-          <p:cNvSpPr txBox="1"/>
-          <p:nvPr/>
-        </p:nvSpPr>
-        <p:spPr>
-          <a:xfrm>
-            <a:off x="548640" y="6510528"/>
-            <a:ext cx="2743200" cy="256032"/>
-          </a:xfrm>
-          <a:prstGeom prst="rect">
-            <a:avLst/>
-          </a:prstGeom>
-          <a:noFill/>
-        </p:spPr>
-        <p:txBody>
-          <a:bodyPr wrap="square" anchor="t">
-            <a:spAutoFit/>
-          </a:bodyPr>
-          <a:lstStyle/>
-          <a:p>
-            <a:pPr algn="l"/>
-            <a:r>
-              <a:rPr sz="1100" b="1">
-                <a:solidFill>
-                  <a:srgbClr val="5234B7"/>
-                </a:solidFill>
-                <a:latin typeface="DIN Next LT W23"/>
-                <a:ea typeface="DIN Next LT W23"/>
-                <a:cs typeface="DIN Next LT W23"/>
-              </a:rPr>
-              <a:t>ETRA</a:t>
-            </a:r>
-          </a:p>
-        </p:txBody>
-      </p:sp>
-      <p:sp>
-        <p:nvSpPr>
-          <p:cNvPr id="14" name="TextBox 13"/>
-          <p:cNvSpPr txBox="1"/>
-          <p:nvPr/>
-        </p:nvSpPr>
-        <p:spPr>
-          <a:xfrm>
-            <a:off x="9601200" y="6510528"/>
-            <a:ext cx="2011680" cy="256032"/>
-          </a:xfrm>
-          <a:prstGeom prst="rect">
-            <a:avLst/>
-          </a:prstGeom>
-          <a:noFill/>
-        </p:spPr>
-        <p:txBody>
-          <a:bodyPr wrap="square" anchor="t">
-            <a:spAutoFit/>
-          </a:bodyPr>
-          <a:lstStyle/>
-          <a:p>
-            <a:pPr algn="r"/>
-            <a:r>
-              <a:rPr sz="1100" b="0">
-                <a:solidFill>
-                  <a:srgbClr val="5A5470"/>
-                </a:solidFill>
-                <a:latin typeface="DIN Next LT W23"/>
-                <a:ea typeface="DIN Next LT W23"/>
-                <a:cs typeface="DIN Next LT W23"/>
-              </a:rPr>
-              <a:t>72  /  82</a:t>
-            </a:r>
-          </a:p>
-        </p:txBody>
-      </p:sp>
-    </p:spTree>
-  </p:cSld>
-  <p:clrMapOvr>
-    <a:masterClrMapping/>
-  </p:clrMapOvr>
-</p:sld>
-</file>
-
-<file path=ppt/slides/slide73.xml><?xml version="1.0" encoding="utf-8"?>
+<file path=ppt/slides/slide77.xml><?xml version="1.0" encoding="utf-8"?>
 <p:sld xmlns:a="http://schemas.openxmlformats.org/drawingml/2006/main" xmlns:p="http://schemas.openxmlformats.org/presentationml/2006/main" xmlns:r="http://schemas.openxmlformats.org/officeDocument/2006/relationships">
   <p:cSld>
     <p:bg>
@@ -47683,7 +49604,7 @@
                 <a:ea typeface="DIN Next LT W23"/>
                 <a:cs typeface="DIN Next LT W23"/>
               </a:rPr>
-              <a:t>73  /  82</a:t>
+              <a:t>77  /  86</a:t>
             </a:r>
           </a:p>
         </p:txBody>
@@ -47696,7 +49617,7 @@
 </p:sld>
 </file>
 
-<file path=ppt/slides/slide74.xml><?xml version="1.0" encoding="utf-8"?>
+<file path=ppt/slides/slide78.xml><?xml version="1.0" encoding="utf-8"?>
 <p:sld xmlns:a="http://schemas.openxmlformats.org/drawingml/2006/main" xmlns:p="http://schemas.openxmlformats.org/presentationml/2006/main" xmlns:r="http://schemas.openxmlformats.org/officeDocument/2006/relationships">
   <p:cSld>
     <p:bg>
@@ -48277,7 +50198,7 @@
                 <a:ea typeface="DIN Next LT W23"/>
                 <a:cs typeface="DIN Next LT W23"/>
               </a:rPr>
-              <a:t>74  /  82</a:t>
+              <a:t>78  /  86</a:t>
             </a:r>
           </a:p>
         </p:txBody>
@@ -48290,7 +50211,7 @@
 </p:sld>
 </file>
 
-<file path=ppt/slides/slide75.xml><?xml version="1.0" encoding="utf-8"?>
+<file path=ppt/slides/slide79.xml><?xml version="1.0" encoding="utf-8"?>
 <p:sld xmlns:a="http://schemas.openxmlformats.org/drawingml/2006/main" xmlns:p="http://schemas.openxmlformats.org/presentationml/2006/main" xmlns:r="http://schemas.openxmlformats.org/officeDocument/2006/relationships">
   <p:cSld>
     <p:bg>
@@ -48866,7 +50787,7 @@
                 <a:ea typeface="DIN Next LT W23"/>
                 <a:cs typeface="DIN Next LT W23"/>
               </a:rPr>
-              <a:t>75  /  82</a:t>
+              <a:t>79  /  86</a:t>
             </a:r>
           </a:p>
         </p:txBody>
@@ -48879,7 +50800,675 @@
 </p:sld>
 </file>
 
-<file path=ppt/slides/slide76.xml><?xml version="1.0" encoding="utf-8"?>
+<file path=ppt/slides/slide8.xml><?xml version="1.0" encoding="utf-8"?>
+<p:sld xmlns:a="http://schemas.openxmlformats.org/drawingml/2006/main" xmlns:p="http://schemas.openxmlformats.org/presentationml/2006/main" xmlns:r="http://schemas.openxmlformats.org/officeDocument/2006/relationships">
+  <p:cSld>
+    <p:bg>
+      <p:bgPr>
+        <a:solidFill>
+          <a:srgbClr val="FAF8FF"/>
+        </a:solidFill>
+        <a:effectLst/>
+      </p:bgPr>
+    </p:bg>
+    <p:spTree>
+      <p:nvGrpSpPr>
+        <p:cNvPr id="1" name=""/>
+        <p:cNvGrpSpPr/>
+        <p:nvPr/>
+      </p:nvGrpSpPr>
+      <p:grpSpPr/>
+      <p:sp>
+        <p:nvSpPr>
+          <p:cNvPr id="2" name="Rectangle 1"/>
+          <p:cNvSpPr/>
+          <p:nvPr/>
+        </p:nvSpPr>
+        <p:spPr>
+          <a:xfrm>
+            <a:off x="12136831" y="0"/>
+            <a:ext cx="54864" cy="6858000"/>
+          </a:xfrm>
+          <a:prstGeom prst="rect">
+            <a:avLst/>
+          </a:prstGeom>
+          <a:solidFill>
+            <a:srgbClr val="5234B7"/>
+          </a:solidFill>
+          <a:ln>
+            <a:noFill/>
+          </a:ln>
+          <a:effectLst/>
+        </p:spPr>
+        <p:style>
+          <a:lnRef idx="1">
+            <a:schemeClr val="accent1"/>
+          </a:lnRef>
+          <a:fillRef idx="3">
+            <a:schemeClr val="accent1"/>
+          </a:fillRef>
+          <a:effectRef idx="2">
+            <a:schemeClr val="accent1"/>
+          </a:effectRef>
+          <a:fontRef idx="minor">
+            <a:schemeClr val="lt1"/>
+          </a:fontRef>
+        </p:style>
+        <p:txBody>
+          <a:bodyPr rtlCol="0" anchor="ctr"/>
+          <a:lstStyle/>
+          <a:p>
+            <a:pPr algn="ctr"/>
+          </a:p>
+        </p:txBody>
+      </p:sp>
+      <p:pic>
+        <p:nvPicPr>
+          <p:cNvPr id="3" name="Picture 2" descr="etra-wordmark.png"/>
+          <p:cNvPicPr>
+            <a:picLocks noChangeAspect="1"/>
+          </p:cNvPicPr>
+          <p:nvPr/>
+        </p:nvPicPr>
+        <p:blipFill>
+          <a:blip r:embed="rId2"/>
+          <a:stretch>
+            <a:fillRect/>
+          </a:stretch>
+        </p:blipFill>
+        <p:spPr>
+          <a:xfrm>
+            <a:off x="10561320" y="411480"/>
+            <a:ext cx="1206201" cy="320040"/>
+          </a:xfrm>
+          <a:prstGeom prst="rect">
+            <a:avLst/>
+          </a:prstGeom>
+        </p:spPr>
+      </p:pic>
+      <p:sp>
+        <p:nvSpPr>
+          <p:cNvPr id="4" name="TextBox 3"/>
+          <p:cNvSpPr txBox="1"/>
+          <p:nvPr/>
+        </p:nvSpPr>
+        <p:spPr>
+          <a:xfrm>
+            <a:off x="548640" y="438912"/>
+            <a:ext cx="7772400" cy="274320"/>
+          </a:xfrm>
+          <a:prstGeom prst="rect">
+            <a:avLst/>
+          </a:prstGeom>
+          <a:noFill/>
+        </p:spPr>
+        <p:txBody>
+          <a:bodyPr wrap="square" anchor="t">
+            <a:spAutoFit/>
+          </a:bodyPr>
+          <a:lstStyle/>
+          <a:p>
+            <a:pPr algn="l"/>
+            <a:r>
+              <a:rPr sz="1200" b="0">
+                <a:solidFill>
+                  <a:srgbClr val="5A5470"/>
+                </a:solidFill>
+                <a:latin typeface="DIN Next LT W23"/>
+                <a:ea typeface="DIN Next LT W23"/>
+                <a:cs typeface="DIN Next LT W23"/>
+              </a:rPr>
+              <a:t>S07  ·  Deep Learning</a:t>
+            </a:r>
+          </a:p>
+        </p:txBody>
+      </p:sp>
+      <p:sp>
+        <p:nvSpPr>
+          <p:cNvPr id="5" name="Rectangle 4"/>
+          <p:cNvSpPr/>
+          <p:nvPr/>
+        </p:nvSpPr>
+        <p:spPr>
+          <a:xfrm>
+            <a:off x="548640" y="822960"/>
+            <a:ext cx="11064240" cy="10972"/>
+          </a:xfrm>
+          <a:prstGeom prst="rect">
+            <a:avLst/>
+          </a:prstGeom>
+          <a:solidFill>
+            <a:srgbClr val="E4DCF4"/>
+          </a:solidFill>
+          <a:ln>
+            <a:noFill/>
+          </a:ln>
+          <a:effectLst/>
+        </p:spPr>
+        <p:style>
+          <a:lnRef idx="1">
+            <a:schemeClr val="accent1"/>
+          </a:lnRef>
+          <a:fillRef idx="3">
+            <a:schemeClr val="accent1"/>
+          </a:fillRef>
+          <a:effectRef idx="2">
+            <a:schemeClr val="accent1"/>
+          </a:effectRef>
+          <a:fontRef idx="minor">
+            <a:schemeClr val="lt1"/>
+          </a:fontRef>
+        </p:style>
+        <p:txBody>
+          <a:bodyPr rtlCol="0" anchor="ctr"/>
+          <a:lstStyle/>
+          <a:p>
+            <a:pPr algn="ctr"/>
+          </a:p>
+        </p:txBody>
+      </p:sp>
+      <p:sp>
+        <p:nvSpPr>
+          <p:cNvPr id="6" name="TextBox 5"/>
+          <p:cNvSpPr txBox="1"/>
+          <p:nvPr/>
+        </p:nvSpPr>
+        <p:spPr>
+          <a:xfrm>
+            <a:off x="548640" y="1051560"/>
+            <a:ext cx="10241280" cy="594360"/>
+          </a:xfrm>
+          <a:prstGeom prst="rect">
+            <a:avLst/>
+          </a:prstGeom>
+          <a:noFill/>
+        </p:spPr>
+        <p:txBody>
+          <a:bodyPr wrap="square" anchor="t">
+            <a:spAutoFit/>
+          </a:bodyPr>
+          <a:lstStyle/>
+          <a:p>
+            <a:pPr algn="l"/>
+            <a:r>
+              <a:rPr sz="3200" b="1">
+                <a:solidFill>
+                  <a:srgbClr val="5234B7"/>
+                </a:solidFill>
+                <a:latin typeface="DIN Next LT W23"/>
+                <a:ea typeface="DIN Next LT W23"/>
+                <a:cs typeface="DIN Next LT W23"/>
+              </a:rPr>
+              <a:t>Phase 1 Roadmap</a:t>
+            </a:r>
+          </a:p>
+        </p:txBody>
+      </p:sp>
+      <p:sp>
+        <p:nvSpPr>
+          <p:cNvPr id="7" name="TextBox 6"/>
+          <p:cNvSpPr txBox="1"/>
+          <p:nvPr/>
+        </p:nvSpPr>
+        <p:spPr>
+          <a:xfrm>
+            <a:off x="548640" y="1600200"/>
+            <a:ext cx="10241280" cy="365760"/>
+          </a:xfrm>
+          <a:prstGeom prst="rect">
+            <a:avLst/>
+          </a:prstGeom>
+          <a:noFill/>
+        </p:spPr>
+        <p:txBody>
+          <a:bodyPr wrap="square" anchor="t">
+            <a:spAutoFit/>
+          </a:bodyPr>
+          <a:lstStyle/>
+          <a:p>
+            <a:pPr algn="l"/>
+            <a:r>
+              <a:rPr sz="1500" b="0">
+                <a:solidFill>
+                  <a:srgbClr val="5A5470"/>
+                </a:solidFill>
+                <a:latin typeface="DIN Next LT W23"/>
+                <a:ea typeface="DIN Next LT W23"/>
+                <a:cs typeface="DIN Next LT W23"/>
+              </a:rPr>
+              <a:t>Why depth, neurons, and forward pass</a:t>
+            </a:r>
+          </a:p>
+        </p:txBody>
+      </p:sp>
+      <p:graphicFrame>
+        <p:nvGraphicFramePr>
+          <p:cNvPr id="8" name="Table 7"/>
+          <p:cNvGraphicFramePr>
+            <a:graphicFrameLocks noGrp="1"/>
+          </p:cNvGraphicFramePr>
+          <p:nvPr/>
+        </p:nvGraphicFramePr>
+        <p:xfrm>
+          <a:off x="548640" y="2057400"/>
+          <a:ext cx="10972800" cy="1901952"/>
+        </p:xfrm>
+        <a:graphic>
+          <a:graphicData uri="http://schemas.openxmlformats.org/drawingml/2006/table">
+            <a:tbl>
+              <a:tblPr firstRow="1" bandRow="1">
+                <a:tableStyleId>{5C22544A-7EE6-4342-B048-85BDC9FD1C3A}</a:tableStyleId>
+              </a:tblPr>
+              <a:tblGrid>
+                <a:gridCol w="5486400"/>
+                <a:gridCol w="5486400"/>
+              </a:tblGrid>
+              <a:tr h="475488">
+                <a:tc>
+                  <a:txBody>
+                    <a:bodyPr/>
+                    <a:lstStyle/>
+                    <a:p>
+                      <a:pPr algn="ctr"/>
+                      <a:r>
+                        <a:rPr sz="1200" b="1">
+                          <a:solidFill>
+                            <a:srgbClr val="FFFFFF"/>
+                          </a:solidFill>
+                          <a:latin typeface="Helvetica"/>
+                        </a:rPr>
+                        <a:t>Block</a:t>
+                      </a:r>
+                    </a:p>
+                  </a:txBody>
+                  <a:tcPr>
+                    <a:solidFill>
+                      <a:srgbClr val="5234B7"/>
+                    </a:solidFill>
+                  </a:tcPr>
+                </a:tc>
+                <a:tc>
+                  <a:txBody>
+                    <a:bodyPr/>
+                    <a:lstStyle/>
+                    <a:p>
+                      <a:pPr algn="ctr"/>
+                      <a:r>
+                        <a:rPr sz="1200" b="1">
+                          <a:solidFill>
+                            <a:srgbClr val="FFFFFF"/>
+                          </a:solidFill>
+                          <a:latin typeface="Helvetica"/>
+                        </a:rPr>
+                        <a:t>Question it answers</a:t>
+                      </a:r>
+                    </a:p>
+                  </a:txBody>
+                  <a:tcPr>
+                    <a:solidFill>
+                      <a:srgbClr val="5234B7"/>
+                    </a:solidFill>
+                  </a:tcPr>
+                </a:tc>
+              </a:tr>
+              <a:tr h="475488">
+                <a:tc>
+                  <a:txBody>
+                    <a:bodyPr/>
+                    <a:lstStyle/>
+                    <a:p>
+                      <a:pPr algn="l"/>
+                      <a:r>
+                        <a:rPr sz="1300" b="1">
+                          <a:solidFill>
+                            <a:srgbClr val="5234B7"/>
+                          </a:solidFill>
+                          <a:latin typeface="Helvetica"/>
+                        </a:rPr>
+                        <a:t>Perceptron &amp; MLP</a:t>
+                      </a:r>
+                    </a:p>
+                  </a:txBody>
+                  <a:tcPr>
+                    <a:solidFill>
+                      <a:srgbClr val="EEE8FA"/>
+                    </a:solidFill>
+                  </a:tcPr>
+                </a:tc>
+                <a:tc>
+                  <a:txBody>
+                    <a:bodyPr/>
+                    <a:lstStyle/>
+                    <a:p>
+                      <a:pPr algn="l"/>
+                      <a:r>
+                        <a:rPr sz="1300" b="0">
+                          <a:solidFill>
+                            <a:srgbClr val="121018"/>
+                          </a:solidFill>
+                          <a:latin typeface="Helvetica"/>
+                        </a:rPr>
+                        <a:t>What does one layer compute?</a:t>
+                      </a:r>
+                    </a:p>
+                  </a:txBody>
+                  <a:tcPr>
+                    <a:solidFill>
+                      <a:srgbClr val="EEE8FA"/>
+                    </a:solidFill>
+                  </a:tcPr>
+                </a:tc>
+              </a:tr>
+              <a:tr h="475488">
+                <a:tc>
+                  <a:txBody>
+                    <a:bodyPr/>
+                    <a:lstStyle/>
+                    <a:p>
+                      <a:pPr algn="l"/>
+                      <a:r>
+                        <a:rPr sz="1300" b="1">
+                          <a:solidFill>
+                            <a:srgbClr val="5234B7"/>
+                          </a:solidFill>
+                          <a:latin typeface="Helvetica"/>
+                        </a:rPr>
+                        <a:t>Forward pass</a:t>
+                      </a:r>
+                    </a:p>
+                  </a:txBody>
+                  <a:tcPr>
+                    <a:solidFill>
+                      <a:srgbClr val="F5F1FC"/>
+                    </a:solidFill>
+                  </a:tcPr>
+                </a:tc>
+                <a:tc>
+                  <a:txBody>
+                    <a:bodyPr/>
+                    <a:lstStyle/>
+                    <a:p>
+                      <a:pPr algn="l"/>
+                      <a:r>
+                        <a:rPr sz="1300" b="0">
+                          <a:solidFill>
+                            <a:srgbClr val="121018"/>
+                          </a:solidFill>
+                          <a:latin typeface="Helvetica"/>
+                        </a:rPr>
+                        <a:t>How does inference flow through the graph?</a:t>
+                      </a:r>
+                    </a:p>
+                  </a:txBody>
+                  <a:tcPr>
+                    <a:solidFill>
+                      <a:srgbClr val="F5F1FC"/>
+                    </a:solidFill>
+                  </a:tcPr>
+                </a:tc>
+              </a:tr>
+              <a:tr h="475488">
+                <a:tc>
+                  <a:txBody>
+                    <a:bodyPr/>
+                    <a:lstStyle/>
+                    <a:p>
+                      <a:pPr algn="l"/>
+                      <a:r>
+                        <a:rPr sz="1300" b="1">
+                          <a:solidFill>
+                            <a:srgbClr val="5234B7"/>
+                          </a:solidFill>
+                          <a:latin typeface="Helvetica"/>
+                        </a:rPr>
+                        <a:t>Loss &amp; gradients</a:t>
+                      </a:r>
+                    </a:p>
+                  </a:txBody>
+                  <a:tcPr>
+                    <a:solidFill>
+                      <a:srgbClr val="EEE8FA"/>
+                    </a:solidFill>
+                  </a:tcPr>
+                </a:tc>
+                <a:tc>
+                  <a:txBody>
+                    <a:bodyPr/>
+                    <a:lstStyle/>
+                    <a:p>
+                      <a:pPr algn="l"/>
+                      <a:r>
+                        <a:rPr sz="1300" b="0">
+                          <a:solidFill>
+                            <a:srgbClr val="121018"/>
+                          </a:solidFill>
+                          <a:latin typeface="Helvetica"/>
+                        </a:rPr>
+                        <a:t>What are we optimizing?</a:t>
+                      </a:r>
+                    </a:p>
+                  </a:txBody>
+                  <a:tcPr>
+                    <a:solidFill>
+                      <a:srgbClr val="EEE8FA"/>
+                    </a:solidFill>
+                  </a:tcPr>
+                </a:tc>
+              </a:tr>
+            </a:tbl>
+          </a:graphicData>
+        </a:graphic>
+      </p:graphicFrame>
+      <p:sp>
+        <p:nvSpPr>
+          <p:cNvPr id="9" name="Rounded Rectangle 8"/>
+          <p:cNvSpPr/>
+          <p:nvPr/>
+        </p:nvSpPr>
+        <p:spPr>
+          <a:xfrm>
+            <a:off x="548640" y="4032504"/>
+            <a:ext cx="10972800" cy="411480"/>
+          </a:xfrm>
+          <a:prstGeom prst="roundRect">
+            <a:avLst>
+              <a:gd name="adj" fmla="val 10000"/>
+            </a:avLst>
+          </a:prstGeom>
+          <a:solidFill>
+            <a:srgbClr val="EEE8FA"/>
+          </a:solidFill>
+          <a:ln>
+            <a:noFill/>
+          </a:ln>
+          <a:effectLst/>
+        </p:spPr>
+        <p:style>
+          <a:lnRef idx="1">
+            <a:schemeClr val="accent1"/>
+          </a:lnRef>
+          <a:fillRef idx="3">
+            <a:schemeClr val="accent1"/>
+          </a:fillRef>
+          <a:effectRef idx="2">
+            <a:schemeClr val="accent1"/>
+          </a:effectRef>
+          <a:fontRef idx="minor">
+            <a:schemeClr val="lt1"/>
+          </a:fontRef>
+        </p:style>
+        <p:txBody>
+          <a:bodyPr rtlCol="0" anchor="ctr"/>
+          <a:lstStyle/>
+          <a:p>
+            <a:pPr algn="ctr"/>
+          </a:p>
+        </p:txBody>
+      </p:sp>
+      <p:sp>
+        <p:nvSpPr>
+          <p:cNvPr id="10" name="TextBox 9"/>
+          <p:cNvSpPr txBox="1"/>
+          <p:nvPr/>
+        </p:nvSpPr>
+        <p:spPr>
+          <a:xfrm>
+            <a:off x="868680" y="4105656"/>
+            <a:ext cx="10332720" cy="292608"/>
+          </a:xfrm>
+          <a:prstGeom prst="rect">
+            <a:avLst/>
+          </a:prstGeom>
+          <a:noFill/>
+        </p:spPr>
+        <p:txBody>
+          <a:bodyPr wrap="square" anchor="t">
+            <a:spAutoFit/>
+          </a:bodyPr>
+          <a:lstStyle/>
+          <a:p>
+            <a:pPr algn="l"/>
+            <a:r>
+              <a:rPr sz="1200" b="0">
+                <a:solidFill>
+                  <a:srgbClr val="5A5470"/>
+                </a:solidFill>
+                <a:latin typeface="DIN Next LT W23"/>
+                <a:ea typeface="DIN Next LT W23"/>
+                <a:cs typeface="DIN Next LT W23"/>
+              </a:rPr>
+              <a:t>Exit check: explain z = w·x + b and why nonlinearity is required between layers.</a:t>
+            </a:r>
+          </a:p>
+        </p:txBody>
+      </p:sp>
+      <p:sp>
+        <p:nvSpPr>
+          <p:cNvPr id="11" name="Rectangle 10"/>
+          <p:cNvSpPr/>
+          <p:nvPr/>
+        </p:nvSpPr>
+        <p:spPr>
+          <a:xfrm>
+            <a:off x="548640" y="6446520"/>
+            <a:ext cx="11064240" cy="10972"/>
+          </a:xfrm>
+          <a:prstGeom prst="rect">
+            <a:avLst/>
+          </a:prstGeom>
+          <a:solidFill>
+            <a:srgbClr val="5234B7"/>
+          </a:solidFill>
+          <a:ln>
+            <a:noFill/>
+          </a:ln>
+          <a:effectLst/>
+        </p:spPr>
+        <p:style>
+          <a:lnRef idx="1">
+            <a:schemeClr val="accent1"/>
+          </a:lnRef>
+          <a:fillRef idx="3">
+            <a:schemeClr val="accent1"/>
+          </a:fillRef>
+          <a:effectRef idx="2">
+            <a:schemeClr val="accent1"/>
+          </a:effectRef>
+          <a:fontRef idx="minor">
+            <a:schemeClr val="lt1"/>
+          </a:fontRef>
+        </p:style>
+        <p:txBody>
+          <a:bodyPr rtlCol="0" anchor="ctr"/>
+          <a:lstStyle/>
+          <a:p>
+            <a:pPr algn="ctr"/>
+          </a:p>
+        </p:txBody>
+      </p:sp>
+      <p:sp>
+        <p:nvSpPr>
+          <p:cNvPr id="12" name="TextBox 11"/>
+          <p:cNvSpPr txBox="1"/>
+          <p:nvPr/>
+        </p:nvSpPr>
+        <p:spPr>
+          <a:xfrm>
+            <a:off x="548640" y="6510528"/>
+            <a:ext cx="2743200" cy="256032"/>
+          </a:xfrm>
+          <a:prstGeom prst="rect">
+            <a:avLst/>
+          </a:prstGeom>
+          <a:noFill/>
+        </p:spPr>
+        <p:txBody>
+          <a:bodyPr wrap="square" anchor="t">
+            <a:spAutoFit/>
+          </a:bodyPr>
+          <a:lstStyle/>
+          <a:p>
+            <a:pPr algn="l"/>
+            <a:r>
+              <a:rPr sz="1100" b="1">
+                <a:solidFill>
+                  <a:srgbClr val="5234B7"/>
+                </a:solidFill>
+                <a:latin typeface="DIN Next LT W23"/>
+                <a:ea typeface="DIN Next LT W23"/>
+                <a:cs typeface="DIN Next LT W23"/>
+              </a:rPr>
+              <a:t>ETRA</a:t>
+            </a:r>
+          </a:p>
+        </p:txBody>
+      </p:sp>
+      <p:sp>
+        <p:nvSpPr>
+          <p:cNvPr id="13" name="TextBox 12"/>
+          <p:cNvSpPr txBox="1"/>
+          <p:nvPr/>
+        </p:nvSpPr>
+        <p:spPr>
+          <a:xfrm>
+            <a:off x="9601200" y="6510528"/>
+            <a:ext cx="2011680" cy="256032"/>
+          </a:xfrm>
+          <a:prstGeom prst="rect">
+            <a:avLst/>
+          </a:prstGeom>
+          <a:noFill/>
+        </p:spPr>
+        <p:txBody>
+          <a:bodyPr wrap="square" anchor="t">
+            <a:spAutoFit/>
+          </a:bodyPr>
+          <a:lstStyle/>
+          <a:p>
+            <a:pPr algn="r"/>
+            <a:r>
+              <a:rPr sz="1100" b="0">
+                <a:solidFill>
+                  <a:srgbClr val="5A5470"/>
+                </a:solidFill>
+                <a:latin typeface="DIN Next LT W23"/>
+                <a:ea typeface="DIN Next LT W23"/>
+                <a:cs typeface="DIN Next LT W23"/>
+              </a:rPr>
+              <a:t>08  /  86</a:t>
+            </a:r>
+          </a:p>
+        </p:txBody>
+      </p:sp>
+    </p:spTree>
+  </p:cSld>
+  <p:clrMapOvr>
+    <a:masterClrMapping/>
+  </p:clrMapOvr>
+</p:sld>
+</file>
+
+<file path=ppt/slides/slide80.xml><?xml version="1.0" encoding="utf-8"?>
 <p:sld xmlns:a="http://schemas.openxmlformats.org/drawingml/2006/main" xmlns:p="http://schemas.openxmlformats.org/presentationml/2006/main" xmlns:r="http://schemas.openxmlformats.org/officeDocument/2006/relationships">
   <p:cSld>
     <p:bg>
@@ -49544,7 +52133,7 @@
                 <a:ea typeface="DIN Next LT W23"/>
                 <a:cs typeface="DIN Next LT W23"/>
               </a:rPr>
-              <a:t>76  /  82</a:t>
+              <a:t>80  /  86</a:t>
             </a:r>
           </a:p>
         </p:txBody>
@@ -49557,7 +52146,7 @@
 </p:sld>
 </file>
 
-<file path=ppt/slides/slide77.xml><?xml version="1.0" encoding="utf-8"?>
+<file path=ppt/slides/slide81.xml><?xml version="1.0" encoding="utf-8"?>
 <p:sld xmlns:a="http://schemas.openxmlformats.org/drawingml/2006/main" xmlns:p="http://schemas.openxmlformats.org/presentationml/2006/main" xmlns:r="http://schemas.openxmlformats.org/officeDocument/2006/relationships">
   <p:cSld>
     <p:bg>
@@ -50286,7 +52875,7 @@
                 <a:ea typeface="DIN Next LT W23"/>
                 <a:cs typeface="DIN Next LT W23"/>
               </a:rPr>
-              <a:t>77  /  82</a:t>
+              <a:t>81  /  86</a:t>
             </a:r>
           </a:p>
         </p:txBody>
@@ -50299,7 +52888,7 @@
 </p:sld>
 </file>
 
-<file path=ppt/slides/slide78.xml><?xml version="1.0" encoding="utf-8"?>
+<file path=ppt/slides/slide82.xml><?xml version="1.0" encoding="utf-8"?>
 <p:sld xmlns:a="http://schemas.openxmlformats.org/drawingml/2006/main" xmlns:p="http://schemas.openxmlformats.org/presentationml/2006/main" xmlns:r="http://schemas.openxmlformats.org/officeDocument/2006/relationships">
   <p:cSld>
     <p:bg>
@@ -50760,7 +53349,7 @@
                 <a:ea typeface="DIN Next LT W23"/>
                 <a:cs typeface="DIN Next LT W23"/>
               </a:rPr>
-              <a:t>78  /  82</a:t>
+              <a:t>82  /  86</a:t>
             </a:r>
           </a:p>
         </p:txBody>
@@ -50773,7 +53362,7 @@
 </p:sld>
 </file>
 
-<file path=ppt/slides/slide79.xml><?xml version="1.0" encoding="utf-8"?>
+<file path=ppt/slides/slide83.xml><?xml version="1.0" encoding="utf-8"?>
 <p:sld xmlns:a="http://schemas.openxmlformats.org/drawingml/2006/main" xmlns:p="http://schemas.openxmlformats.org/presentationml/2006/main" xmlns:r="http://schemas.openxmlformats.org/officeDocument/2006/relationships">
   <p:cSld>
     <p:bg>
@@ -51271,7 +53860,7 @@
                 <a:ea typeface="DIN Next LT W23"/>
                 <a:cs typeface="DIN Next LT W23"/>
               </a:rPr>
-              <a:t>79  /  82</a:t>
+              <a:t>83  /  86</a:t>
             </a:r>
           </a:p>
         </p:txBody>
@@ -51284,675 +53873,7 @@
 </p:sld>
 </file>
 
-<file path=ppt/slides/slide8.xml><?xml version="1.0" encoding="utf-8"?>
-<p:sld xmlns:a="http://schemas.openxmlformats.org/drawingml/2006/main" xmlns:p="http://schemas.openxmlformats.org/presentationml/2006/main" xmlns:r="http://schemas.openxmlformats.org/officeDocument/2006/relationships">
-  <p:cSld>
-    <p:bg>
-      <p:bgPr>
-        <a:solidFill>
-          <a:srgbClr val="FAF8FF"/>
-        </a:solidFill>
-        <a:effectLst/>
-      </p:bgPr>
-    </p:bg>
-    <p:spTree>
-      <p:nvGrpSpPr>
-        <p:cNvPr id="1" name=""/>
-        <p:cNvGrpSpPr/>
-        <p:nvPr/>
-      </p:nvGrpSpPr>
-      <p:grpSpPr/>
-      <p:sp>
-        <p:nvSpPr>
-          <p:cNvPr id="2" name="Rectangle 1"/>
-          <p:cNvSpPr/>
-          <p:nvPr/>
-        </p:nvSpPr>
-        <p:spPr>
-          <a:xfrm>
-            <a:off x="12136831" y="0"/>
-            <a:ext cx="54864" cy="6858000"/>
-          </a:xfrm>
-          <a:prstGeom prst="rect">
-            <a:avLst/>
-          </a:prstGeom>
-          <a:solidFill>
-            <a:srgbClr val="5234B7"/>
-          </a:solidFill>
-          <a:ln>
-            <a:noFill/>
-          </a:ln>
-          <a:effectLst/>
-        </p:spPr>
-        <p:style>
-          <a:lnRef idx="1">
-            <a:schemeClr val="accent1"/>
-          </a:lnRef>
-          <a:fillRef idx="3">
-            <a:schemeClr val="accent1"/>
-          </a:fillRef>
-          <a:effectRef idx="2">
-            <a:schemeClr val="accent1"/>
-          </a:effectRef>
-          <a:fontRef idx="minor">
-            <a:schemeClr val="lt1"/>
-          </a:fontRef>
-        </p:style>
-        <p:txBody>
-          <a:bodyPr rtlCol="0" anchor="ctr"/>
-          <a:lstStyle/>
-          <a:p>
-            <a:pPr algn="ctr"/>
-          </a:p>
-        </p:txBody>
-      </p:sp>
-      <p:pic>
-        <p:nvPicPr>
-          <p:cNvPr id="3" name="Picture 2" descr="etra-wordmark.png"/>
-          <p:cNvPicPr>
-            <a:picLocks noChangeAspect="1"/>
-          </p:cNvPicPr>
-          <p:nvPr/>
-        </p:nvPicPr>
-        <p:blipFill>
-          <a:blip r:embed="rId2"/>
-          <a:stretch>
-            <a:fillRect/>
-          </a:stretch>
-        </p:blipFill>
-        <p:spPr>
-          <a:xfrm>
-            <a:off x="10561320" y="411480"/>
-            <a:ext cx="1206201" cy="320040"/>
-          </a:xfrm>
-          <a:prstGeom prst="rect">
-            <a:avLst/>
-          </a:prstGeom>
-        </p:spPr>
-      </p:pic>
-      <p:sp>
-        <p:nvSpPr>
-          <p:cNvPr id="4" name="TextBox 3"/>
-          <p:cNvSpPr txBox="1"/>
-          <p:nvPr/>
-        </p:nvSpPr>
-        <p:spPr>
-          <a:xfrm>
-            <a:off x="548640" y="438912"/>
-            <a:ext cx="7772400" cy="274320"/>
-          </a:xfrm>
-          <a:prstGeom prst="rect">
-            <a:avLst/>
-          </a:prstGeom>
-          <a:noFill/>
-        </p:spPr>
-        <p:txBody>
-          <a:bodyPr wrap="square" anchor="t">
-            <a:spAutoFit/>
-          </a:bodyPr>
-          <a:lstStyle/>
-          <a:p>
-            <a:pPr algn="l"/>
-            <a:r>
-              <a:rPr sz="1200" b="0">
-                <a:solidFill>
-                  <a:srgbClr val="5A5470"/>
-                </a:solidFill>
-                <a:latin typeface="DIN Next LT W23"/>
-                <a:ea typeface="DIN Next LT W23"/>
-                <a:cs typeface="DIN Next LT W23"/>
-              </a:rPr>
-              <a:t>S07  ·  Deep Learning</a:t>
-            </a:r>
-          </a:p>
-        </p:txBody>
-      </p:sp>
-      <p:sp>
-        <p:nvSpPr>
-          <p:cNvPr id="5" name="Rectangle 4"/>
-          <p:cNvSpPr/>
-          <p:nvPr/>
-        </p:nvSpPr>
-        <p:spPr>
-          <a:xfrm>
-            <a:off x="548640" y="822960"/>
-            <a:ext cx="11064240" cy="10972"/>
-          </a:xfrm>
-          <a:prstGeom prst="rect">
-            <a:avLst/>
-          </a:prstGeom>
-          <a:solidFill>
-            <a:srgbClr val="E4DCF4"/>
-          </a:solidFill>
-          <a:ln>
-            <a:noFill/>
-          </a:ln>
-          <a:effectLst/>
-        </p:spPr>
-        <p:style>
-          <a:lnRef idx="1">
-            <a:schemeClr val="accent1"/>
-          </a:lnRef>
-          <a:fillRef idx="3">
-            <a:schemeClr val="accent1"/>
-          </a:fillRef>
-          <a:effectRef idx="2">
-            <a:schemeClr val="accent1"/>
-          </a:effectRef>
-          <a:fontRef idx="minor">
-            <a:schemeClr val="lt1"/>
-          </a:fontRef>
-        </p:style>
-        <p:txBody>
-          <a:bodyPr rtlCol="0" anchor="ctr"/>
-          <a:lstStyle/>
-          <a:p>
-            <a:pPr algn="ctr"/>
-          </a:p>
-        </p:txBody>
-      </p:sp>
-      <p:sp>
-        <p:nvSpPr>
-          <p:cNvPr id="6" name="TextBox 5"/>
-          <p:cNvSpPr txBox="1"/>
-          <p:nvPr/>
-        </p:nvSpPr>
-        <p:spPr>
-          <a:xfrm>
-            <a:off x="548640" y="1051560"/>
-            <a:ext cx="10241280" cy="594360"/>
-          </a:xfrm>
-          <a:prstGeom prst="rect">
-            <a:avLst/>
-          </a:prstGeom>
-          <a:noFill/>
-        </p:spPr>
-        <p:txBody>
-          <a:bodyPr wrap="square" anchor="t">
-            <a:spAutoFit/>
-          </a:bodyPr>
-          <a:lstStyle/>
-          <a:p>
-            <a:pPr algn="l"/>
-            <a:r>
-              <a:rPr sz="3200" b="1">
-                <a:solidFill>
-                  <a:srgbClr val="5234B7"/>
-                </a:solidFill>
-                <a:latin typeface="DIN Next LT W23"/>
-                <a:ea typeface="DIN Next LT W23"/>
-                <a:cs typeface="DIN Next LT W23"/>
-              </a:rPr>
-              <a:t>Phase 1 Roadmap</a:t>
-            </a:r>
-          </a:p>
-        </p:txBody>
-      </p:sp>
-      <p:sp>
-        <p:nvSpPr>
-          <p:cNvPr id="7" name="TextBox 6"/>
-          <p:cNvSpPr txBox="1"/>
-          <p:nvPr/>
-        </p:nvSpPr>
-        <p:spPr>
-          <a:xfrm>
-            <a:off x="548640" y="1600200"/>
-            <a:ext cx="10241280" cy="365760"/>
-          </a:xfrm>
-          <a:prstGeom prst="rect">
-            <a:avLst/>
-          </a:prstGeom>
-          <a:noFill/>
-        </p:spPr>
-        <p:txBody>
-          <a:bodyPr wrap="square" anchor="t">
-            <a:spAutoFit/>
-          </a:bodyPr>
-          <a:lstStyle/>
-          <a:p>
-            <a:pPr algn="l"/>
-            <a:r>
-              <a:rPr sz="1500" b="0">
-                <a:solidFill>
-                  <a:srgbClr val="5A5470"/>
-                </a:solidFill>
-                <a:latin typeface="DIN Next LT W23"/>
-                <a:ea typeface="DIN Next LT W23"/>
-                <a:cs typeface="DIN Next LT W23"/>
-              </a:rPr>
-              <a:t>Why depth, neurons, and forward pass</a:t>
-            </a:r>
-          </a:p>
-        </p:txBody>
-      </p:sp>
-      <p:graphicFrame>
-        <p:nvGraphicFramePr>
-          <p:cNvPr id="8" name="Table 7"/>
-          <p:cNvGraphicFramePr>
-            <a:graphicFrameLocks noGrp="1"/>
-          </p:cNvGraphicFramePr>
-          <p:nvPr/>
-        </p:nvGraphicFramePr>
-        <p:xfrm>
-          <a:off x="548640" y="2057400"/>
-          <a:ext cx="10972800" cy="1901952"/>
-        </p:xfrm>
-        <a:graphic>
-          <a:graphicData uri="http://schemas.openxmlformats.org/drawingml/2006/table">
-            <a:tbl>
-              <a:tblPr firstRow="1" bandRow="1">
-                <a:tableStyleId>{5C22544A-7EE6-4342-B048-85BDC9FD1C3A}</a:tableStyleId>
-              </a:tblPr>
-              <a:tblGrid>
-                <a:gridCol w="5486400"/>
-                <a:gridCol w="5486400"/>
-              </a:tblGrid>
-              <a:tr h="475488">
-                <a:tc>
-                  <a:txBody>
-                    <a:bodyPr/>
-                    <a:lstStyle/>
-                    <a:p>
-                      <a:pPr algn="ctr"/>
-                      <a:r>
-                        <a:rPr sz="1200" b="1">
-                          <a:solidFill>
-                            <a:srgbClr val="FFFFFF"/>
-                          </a:solidFill>
-                          <a:latin typeface="Helvetica"/>
-                        </a:rPr>
-                        <a:t>Block</a:t>
-                      </a:r>
-                    </a:p>
-                  </a:txBody>
-                  <a:tcPr>
-                    <a:solidFill>
-                      <a:srgbClr val="5234B7"/>
-                    </a:solidFill>
-                  </a:tcPr>
-                </a:tc>
-                <a:tc>
-                  <a:txBody>
-                    <a:bodyPr/>
-                    <a:lstStyle/>
-                    <a:p>
-                      <a:pPr algn="ctr"/>
-                      <a:r>
-                        <a:rPr sz="1200" b="1">
-                          <a:solidFill>
-                            <a:srgbClr val="FFFFFF"/>
-                          </a:solidFill>
-                          <a:latin typeface="Helvetica"/>
-                        </a:rPr>
-                        <a:t>Question it answers</a:t>
-                      </a:r>
-                    </a:p>
-                  </a:txBody>
-                  <a:tcPr>
-                    <a:solidFill>
-                      <a:srgbClr val="5234B7"/>
-                    </a:solidFill>
-                  </a:tcPr>
-                </a:tc>
-              </a:tr>
-              <a:tr h="475488">
-                <a:tc>
-                  <a:txBody>
-                    <a:bodyPr/>
-                    <a:lstStyle/>
-                    <a:p>
-                      <a:pPr algn="l"/>
-                      <a:r>
-                        <a:rPr sz="1300" b="1">
-                          <a:solidFill>
-                            <a:srgbClr val="5234B7"/>
-                          </a:solidFill>
-                          <a:latin typeface="Helvetica"/>
-                        </a:rPr>
-                        <a:t>Perceptron &amp; MLP</a:t>
-                      </a:r>
-                    </a:p>
-                  </a:txBody>
-                  <a:tcPr>
-                    <a:solidFill>
-                      <a:srgbClr val="EEE8FA"/>
-                    </a:solidFill>
-                  </a:tcPr>
-                </a:tc>
-                <a:tc>
-                  <a:txBody>
-                    <a:bodyPr/>
-                    <a:lstStyle/>
-                    <a:p>
-                      <a:pPr algn="l"/>
-                      <a:r>
-                        <a:rPr sz="1300" b="0">
-                          <a:solidFill>
-                            <a:srgbClr val="121018"/>
-                          </a:solidFill>
-                          <a:latin typeface="Helvetica"/>
-                        </a:rPr>
-                        <a:t>What does one layer compute?</a:t>
-                      </a:r>
-                    </a:p>
-                  </a:txBody>
-                  <a:tcPr>
-                    <a:solidFill>
-                      <a:srgbClr val="EEE8FA"/>
-                    </a:solidFill>
-                  </a:tcPr>
-                </a:tc>
-              </a:tr>
-              <a:tr h="475488">
-                <a:tc>
-                  <a:txBody>
-                    <a:bodyPr/>
-                    <a:lstStyle/>
-                    <a:p>
-                      <a:pPr algn="l"/>
-                      <a:r>
-                        <a:rPr sz="1300" b="1">
-                          <a:solidFill>
-                            <a:srgbClr val="5234B7"/>
-                          </a:solidFill>
-                          <a:latin typeface="Helvetica"/>
-                        </a:rPr>
-                        <a:t>Forward pass</a:t>
-                      </a:r>
-                    </a:p>
-                  </a:txBody>
-                  <a:tcPr>
-                    <a:solidFill>
-                      <a:srgbClr val="F5F1FC"/>
-                    </a:solidFill>
-                  </a:tcPr>
-                </a:tc>
-                <a:tc>
-                  <a:txBody>
-                    <a:bodyPr/>
-                    <a:lstStyle/>
-                    <a:p>
-                      <a:pPr algn="l"/>
-                      <a:r>
-                        <a:rPr sz="1300" b="0">
-                          <a:solidFill>
-                            <a:srgbClr val="121018"/>
-                          </a:solidFill>
-                          <a:latin typeface="Helvetica"/>
-                        </a:rPr>
-                        <a:t>How does inference flow through the graph?</a:t>
-                      </a:r>
-                    </a:p>
-                  </a:txBody>
-                  <a:tcPr>
-                    <a:solidFill>
-                      <a:srgbClr val="F5F1FC"/>
-                    </a:solidFill>
-                  </a:tcPr>
-                </a:tc>
-              </a:tr>
-              <a:tr h="475488">
-                <a:tc>
-                  <a:txBody>
-                    <a:bodyPr/>
-                    <a:lstStyle/>
-                    <a:p>
-                      <a:pPr algn="l"/>
-                      <a:r>
-                        <a:rPr sz="1300" b="1">
-                          <a:solidFill>
-                            <a:srgbClr val="5234B7"/>
-                          </a:solidFill>
-                          <a:latin typeface="Helvetica"/>
-                        </a:rPr>
-                        <a:t>Loss &amp; gradients</a:t>
-                      </a:r>
-                    </a:p>
-                  </a:txBody>
-                  <a:tcPr>
-                    <a:solidFill>
-                      <a:srgbClr val="EEE8FA"/>
-                    </a:solidFill>
-                  </a:tcPr>
-                </a:tc>
-                <a:tc>
-                  <a:txBody>
-                    <a:bodyPr/>
-                    <a:lstStyle/>
-                    <a:p>
-                      <a:pPr algn="l"/>
-                      <a:r>
-                        <a:rPr sz="1300" b="0">
-                          <a:solidFill>
-                            <a:srgbClr val="121018"/>
-                          </a:solidFill>
-                          <a:latin typeface="Helvetica"/>
-                        </a:rPr>
-                        <a:t>What are we optimizing?</a:t>
-                      </a:r>
-                    </a:p>
-                  </a:txBody>
-                  <a:tcPr>
-                    <a:solidFill>
-                      <a:srgbClr val="EEE8FA"/>
-                    </a:solidFill>
-                  </a:tcPr>
-                </a:tc>
-              </a:tr>
-            </a:tbl>
-          </a:graphicData>
-        </a:graphic>
-      </p:graphicFrame>
-      <p:sp>
-        <p:nvSpPr>
-          <p:cNvPr id="9" name="Rounded Rectangle 8"/>
-          <p:cNvSpPr/>
-          <p:nvPr/>
-        </p:nvSpPr>
-        <p:spPr>
-          <a:xfrm>
-            <a:off x="548640" y="4032504"/>
-            <a:ext cx="10972800" cy="411480"/>
-          </a:xfrm>
-          <a:prstGeom prst="roundRect">
-            <a:avLst>
-              <a:gd name="adj" fmla="val 10000"/>
-            </a:avLst>
-          </a:prstGeom>
-          <a:solidFill>
-            <a:srgbClr val="EEE8FA"/>
-          </a:solidFill>
-          <a:ln>
-            <a:noFill/>
-          </a:ln>
-          <a:effectLst/>
-        </p:spPr>
-        <p:style>
-          <a:lnRef idx="1">
-            <a:schemeClr val="accent1"/>
-          </a:lnRef>
-          <a:fillRef idx="3">
-            <a:schemeClr val="accent1"/>
-          </a:fillRef>
-          <a:effectRef idx="2">
-            <a:schemeClr val="accent1"/>
-          </a:effectRef>
-          <a:fontRef idx="minor">
-            <a:schemeClr val="lt1"/>
-          </a:fontRef>
-        </p:style>
-        <p:txBody>
-          <a:bodyPr rtlCol="0" anchor="ctr"/>
-          <a:lstStyle/>
-          <a:p>
-            <a:pPr algn="ctr"/>
-          </a:p>
-        </p:txBody>
-      </p:sp>
-      <p:sp>
-        <p:nvSpPr>
-          <p:cNvPr id="10" name="TextBox 9"/>
-          <p:cNvSpPr txBox="1"/>
-          <p:nvPr/>
-        </p:nvSpPr>
-        <p:spPr>
-          <a:xfrm>
-            <a:off x="868680" y="4105656"/>
-            <a:ext cx="10332720" cy="292608"/>
-          </a:xfrm>
-          <a:prstGeom prst="rect">
-            <a:avLst/>
-          </a:prstGeom>
-          <a:noFill/>
-        </p:spPr>
-        <p:txBody>
-          <a:bodyPr wrap="square" anchor="t">
-            <a:spAutoFit/>
-          </a:bodyPr>
-          <a:lstStyle/>
-          <a:p>
-            <a:pPr algn="l"/>
-            <a:r>
-              <a:rPr sz="1200" b="0">
-                <a:solidFill>
-                  <a:srgbClr val="5A5470"/>
-                </a:solidFill>
-                <a:latin typeface="DIN Next LT W23"/>
-                <a:ea typeface="DIN Next LT W23"/>
-                <a:cs typeface="DIN Next LT W23"/>
-              </a:rPr>
-              <a:t>Exit check: explain z = w·x + b and why nonlinearity is required between layers.</a:t>
-            </a:r>
-          </a:p>
-        </p:txBody>
-      </p:sp>
-      <p:sp>
-        <p:nvSpPr>
-          <p:cNvPr id="11" name="Rectangle 10"/>
-          <p:cNvSpPr/>
-          <p:nvPr/>
-        </p:nvSpPr>
-        <p:spPr>
-          <a:xfrm>
-            <a:off x="548640" y="6446520"/>
-            <a:ext cx="11064240" cy="10972"/>
-          </a:xfrm>
-          <a:prstGeom prst="rect">
-            <a:avLst/>
-          </a:prstGeom>
-          <a:solidFill>
-            <a:srgbClr val="5234B7"/>
-          </a:solidFill>
-          <a:ln>
-            <a:noFill/>
-          </a:ln>
-          <a:effectLst/>
-        </p:spPr>
-        <p:style>
-          <a:lnRef idx="1">
-            <a:schemeClr val="accent1"/>
-          </a:lnRef>
-          <a:fillRef idx="3">
-            <a:schemeClr val="accent1"/>
-          </a:fillRef>
-          <a:effectRef idx="2">
-            <a:schemeClr val="accent1"/>
-          </a:effectRef>
-          <a:fontRef idx="minor">
-            <a:schemeClr val="lt1"/>
-          </a:fontRef>
-        </p:style>
-        <p:txBody>
-          <a:bodyPr rtlCol="0" anchor="ctr"/>
-          <a:lstStyle/>
-          <a:p>
-            <a:pPr algn="ctr"/>
-          </a:p>
-        </p:txBody>
-      </p:sp>
-      <p:sp>
-        <p:nvSpPr>
-          <p:cNvPr id="12" name="TextBox 11"/>
-          <p:cNvSpPr txBox="1"/>
-          <p:nvPr/>
-        </p:nvSpPr>
-        <p:spPr>
-          <a:xfrm>
-            <a:off x="548640" y="6510528"/>
-            <a:ext cx="2743200" cy="256032"/>
-          </a:xfrm>
-          <a:prstGeom prst="rect">
-            <a:avLst/>
-          </a:prstGeom>
-          <a:noFill/>
-        </p:spPr>
-        <p:txBody>
-          <a:bodyPr wrap="square" anchor="t">
-            <a:spAutoFit/>
-          </a:bodyPr>
-          <a:lstStyle/>
-          <a:p>
-            <a:pPr algn="l"/>
-            <a:r>
-              <a:rPr sz="1100" b="1">
-                <a:solidFill>
-                  <a:srgbClr val="5234B7"/>
-                </a:solidFill>
-                <a:latin typeface="DIN Next LT W23"/>
-                <a:ea typeface="DIN Next LT W23"/>
-                <a:cs typeface="DIN Next LT W23"/>
-              </a:rPr>
-              <a:t>ETRA</a:t>
-            </a:r>
-          </a:p>
-        </p:txBody>
-      </p:sp>
-      <p:sp>
-        <p:nvSpPr>
-          <p:cNvPr id="13" name="TextBox 12"/>
-          <p:cNvSpPr txBox="1"/>
-          <p:nvPr/>
-        </p:nvSpPr>
-        <p:spPr>
-          <a:xfrm>
-            <a:off x="9601200" y="6510528"/>
-            <a:ext cx="2011680" cy="256032"/>
-          </a:xfrm>
-          <a:prstGeom prst="rect">
-            <a:avLst/>
-          </a:prstGeom>
-          <a:noFill/>
-        </p:spPr>
-        <p:txBody>
-          <a:bodyPr wrap="square" anchor="t">
-            <a:spAutoFit/>
-          </a:bodyPr>
-          <a:lstStyle/>
-          <a:p>
-            <a:pPr algn="r"/>
-            <a:r>
-              <a:rPr sz="1100" b="0">
-                <a:solidFill>
-                  <a:srgbClr val="5A5470"/>
-                </a:solidFill>
-                <a:latin typeface="DIN Next LT W23"/>
-                <a:ea typeface="DIN Next LT W23"/>
-                <a:cs typeface="DIN Next LT W23"/>
-              </a:rPr>
-              <a:t>08  /  82</a:t>
-            </a:r>
-          </a:p>
-        </p:txBody>
-      </p:sp>
-    </p:spTree>
-  </p:cSld>
-  <p:clrMapOvr>
-    <a:masterClrMapping/>
-  </p:clrMapOvr>
-</p:sld>
-</file>
-
-<file path=ppt/slides/slide80.xml><?xml version="1.0" encoding="utf-8"?>
+<file path=ppt/slides/slide84.xml><?xml version="1.0" encoding="utf-8"?>
 <p:sld xmlns:a="http://schemas.openxmlformats.org/drawingml/2006/main" xmlns:p="http://schemas.openxmlformats.org/presentationml/2006/main" xmlns:r="http://schemas.openxmlformats.org/officeDocument/2006/relationships">
   <p:cSld>
     <p:bg>
@@ -52607,7 +54528,7 @@
                 <a:ea typeface="DIN Next LT W23"/>
                 <a:cs typeface="DIN Next LT W23"/>
               </a:rPr>
-              <a:t>80  /  82</a:t>
+              <a:t>84  /  86</a:t>
             </a:r>
           </a:p>
         </p:txBody>
@@ -52620,7 +54541,7 @@
 </p:sld>
 </file>
 
-<file path=ppt/slides/slide81.xml><?xml version="1.0" encoding="utf-8"?>
+<file path=ppt/slides/slide85.xml><?xml version="1.0" encoding="utf-8"?>
 <p:sld xmlns:a="http://schemas.openxmlformats.org/drawingml/2006/main" xmlns:p="http://schemas.openxmlformats.org/presentationml/2006/main" xmlns:r="http://schemas.openxmlformats.org/officeDocument/2006/relationships">
   <p:cSld>
     <p:bg>
@@ -53334,7 +55255,7 @@
                 <a:ea typeface="DIN Next LT W23"/>
                 <a:cs typeface="DIN Next LT W23"/>
               </a:rPr>
-              <a:t>81  /  82</a:t>
+              <a:t>85  /  86</a:t>
             </a:r>
           </a:p>
         </p:txBody>
@@ -53347,7 +55268,7 @@
 </p:sld>
 </file>
 
-<file path=ppt/slides/slide82.xml><?xml version="1.0" encoding="utf-8"?>
+<file path=ppt/slides/slide86.xml><?xml version="1.0" encoding="utf-8"?>
 <p:sld xmlns:a="http://schemas.openxmlformats.org/drawingml/2006/main" xmlns:p="http://schemas.openxmlformats.org/presentationml/2006/main" xmlns:r="http://schemas.openxmlformats.org/officeDocument/2006/relationships">
   <p:cSld>
     <p:bg>
@@ -53657,7 +55578,7 @@
                 <a:ea typeface="DIN Next LT W23"/>
                 <a:cs typeface="DIN Next LT W23"/>
               </a:rPr>
-              <a:t>82  /  82</a:t>
+              <a:t>86  /  86</a:t>
             </a:r>
           </a:p>
         </p:txBody>
@@ -54288,7 +56209,7 @@
                 <a:ea typeface="DIN Next LT W23"/>
                 <a:cs typeface="DIN Next LT W23"/>
               </a:rPr>
-              <a:t>09  /  82</a:t>
+              <a:t>09  /  86</a:t>
             </a:r>
           </a:p>
         </p:txBody>
